--- a/Documenti/Relazione Finale/PP relazione.pptx
+++ b/Documenti/Relazione Finale/PP relazione.pptx
@@ -1,31 +1,32 @@
 
 <file path=ppt/presentation.xml><?xml version="1.0" encoding="utf-8"?>
-<p:presentation xmlns:a="http://schemas.openxmlformats.org/drawingml/2006/main" xmlns:r="http://schemas.openxmlformats.org/officeDocument/2006/relationships" xmlns:mc="http://schemas.openxmlformats.org/markup-compatibility/2006" xmlns:mv="urn:schemas-microsoft-com:mac:vml" xmlns:p="http://schemas.openxmlformats.org/presentationml/2006/main" xmlns:c="http://schemas.openxmlformats.org/drawingml/2006/chart" xmlns:dgm="http://schemas.openxmlformats.org/drawingml/2006/diagram" xmlns:o="urn:schemas-microsoft-com:office:office" xmlns:v="urn:schemas-microsoft-com:vml" xmlns:pvml="urn:schemas-microsoft-com:office:powerpoint" xmlns:com="http://schemas.openxmlformats.org/drawingml/2006/compatibility" xmlns:p14="http://schemas.microsoft.com/office/powerpoint/2010/main" xmlns:p15="http://schemas.microsoft.com/office/powerpoint/2012/main" xmlns:ahyp="http://schemas.microsoft.com/office/drawing/2018/hyperlinkcolor" autoCompressPictures="0" embedTrueTypeFonts="1" strictFirstAndLastChars="0" saveSubsetFonts="1">
+<p:presentation xmlns:a="http://schemas.openxmlformats.org/drawingml/2006/main" xmlns:r="http://schemas.openxmlformats.org/officeDocument/2006/relationships" xmlns:p="http://schemas.openxmlformats.org/presentationml/2006/main" strictFirstAndLastChars="0" embedTrueTypeFonts="1" saveSubsetFonts="1" autoCompressPictures="0">
   <p:sldMasterIdLst>
-    <p:sldMasterId id="2147483659" r:id="rId4"/>
+    <p:sldMasterId id="2147483659" r:id="rId1"/>
   </p:sldMasterIdLst>
   <p:notesMasterIdLst>
-    <p:notesMasterId r:id="rId5"/>
+    <p:notesMasterId r:id="rId8"/>
   </p:notesMasterIdLst>
   <p:sldIdLst>
-    <p:sldId id="256" r:id="rId6"/>
-    <p:sldId id="257" r:id="rId7"/>
-    <p:sldId id="258" r:id="rId8"/>
-    <p:sldId id="259" r:id="rId9"/>
-    <p:sldId id="260" r:id="rId10"/>
+    <p:sldId id="256" r:id="rId2"/>
+    <p:sldId id="257" r:id="rId3"/>
+    <p:sldId id="258" r:id="rId4"/>
+    <p:sldId id="259" r:id="rId5"/>
+    <p:sldId id="262" r:id="rId6"/>
+    <p:sldId id="260" r:id="rId7"/>
   </p:sldIdLst>
-  <p:sldSz cy="5143500" cx="9144000"/>
+  <p:sldSz cx="9144000" cy="5143500" type="screen16x9"/>
   <p:notesSz cx="6858000" cy="9144000"/>
   <p:embeddedFontLst>
     <p:embeddedFont>
-      <p:font typeface="Old Standard TT"/>
-      <p:regular r:id="rId11"/>
-      <p:bold r:id="rId12"/>
-      <p:italic r:id="rId13"/>
+      <p:font typeface="Old Standard TT" panose="020B0604020202020204" charset="0"/>
+      <p:regular r:id="rId9"/>
+      <p:bold r:id="rId10"/>
+      <p:italic r:id="rId11"/>
     </p:embeddedFont>
   </p:embeddedFontLst>
   <p:defaultTextStyle>
-    <a:defPPr lvl="0" marR="0" rtl="0" algn="l">
+    <a:defPPr marR="0" lvl="0" algn="l" rtl="0">
       <a:lnSpc>
         <a:spcPct val="100000"/>
       </a:lnSpc>
@@ -36,7 +37,7 @@
         <a:spcPts val="0"/>
       </a:spcAft>
     </a:defPPr>
-    <a:lvl1pPr lvl="0" marR="0" rtl="0" algn="l">
+    <a:lvl1pPr marR="0" lvl="0" algn="l" rtl="0">
       <a:lnSpc>
         <a:spcPct val="100000"/>
       </a:lnSpc>
@@ -50,7 +51,7 @@
         <a:srgbClr val="000000"/>
       </a:buClr>
       <a:buFont typeface="Arial"/>
-      <a:defRPr b="0" i="0" sz="1400" u="none" cap="none" strike="noStrike">
+      <a:defRPr sz="1400" b="0" i="0" u="none" strike="noStrike" cap="none">
         <a:solidFill>
           <a:srgbClr val="000000"/>
         </a:solidFill>
@@ -60,7 +61,7 @@
         <a:sym typeface="Arial"/>
       </a:defRPr>
     </a:lvl1pPr>
-    <a:lvl2pPr lvl="1" marR="0" rtl="0" algn="l">
+    <a:lvl2pPr marR="0" lvl="1" algn="l" rtl="0">
       <a:lnSpc>
         <a:spcPct val="100000"/>
       </a:lnSpc>
@@ -74,7 +75,7 @@
         <a:srgbClr val="000000"/>
       </a:buClr>
       <a:buFont typeface="Arial"/>
-      <a:defRPr b="0" i="0" sz="1400" u="none" cap="none" strike="noStrike">
+      <a:defRPr sz="1400" b="0" i="0" u="none" strike="noStrike" cap="none">
         <a:solidFill>
           <a:srgbClr val="000000"/>
         </a:solidFill>
@@ -84,7 +85,7 @@
         <a:sym typeface="Arial"/>
       </a:defRPr>
     </a:lvl2pPr>
-    <a:lvl3pPr lvl="2" marR="0" rtl="0" algn="l">
+    <a:lvl3pPr marR="0" lvl="2" algn="l" rtl="0">
       <a:lnSpc>
         <a:spcPct val="100000"/>
       </a:lnSpc>
@@ -98,7 +99,7 @@
         <a:srgbClr val="000000"/>
       </a:buClr>
       <a:buFont typeface="Arial"/>
-      <a:defRPr b="0" i="0" sz="1400" u="none" cap="none" strike="noStrike">
+      <a:defRPr sz="1400" b="0" i="0" u="none" strike="noStrike" cap="none">
         <a:solidFill>
           <a:srgbClr val="000000"/>
         </a:solidFill>
@@ -108,7 +109,7 @@
         <a:sym typeface="Arial"/>
       </a:defRPr>
     </a:lvl3pPr>
-    <a:lvl4pPr lvl="3" marR="0" rtl="0" algn="l">
+    <a:lvl4pPr marR="0" lvl="3" algn="l" rtl="0">
       <a:lnSpc>
         <a:spcPct val="100000"/>
       </a:lnSpc>
@@ -122,7 +123,7 @@
         <a:srgbClr val="000000"/>
       </a:buClr>
       <a:buFont typeface="Arial"/>
-      <a:defRPr b="0" i="0" sz="1400" u="none" cap="none" strike="noStrike">
+      <a:defRPr sz="1400" b="0" i="0" u="none" strike="noStrike" cap="none">
         <a:solidFill>
           <a:srgbClr val="000000"/>
         </a:solidFill>
@@ -132,7 +133,7 @@
         <a:sym typeface="Arial"/>
       </a:defRPr>
     </a:lvl4pPr>
-    <a:lvl5pPr lvl="4" marR="0" rtl="0" algn="l">
+    <a:lvl5pPr marR="0" lvl="4" algn="l" rtl="0">
       <a:lnSpc>
         <a:spcPct val="100000"/>
       </a:lnSpc>
@@ -146,7 +147,7 @@
         <a:srgbClr val="000000"/>
       </a:buClr>
       <a:buFont typeface="Arial"/>
-      <a:defRPr b="0" i="0" sz="1400" u="none" cap="none" strike="noStrike">
+      <a:defRPr sz="1400" b="0" i="0" u="none" strike="noStrike" cap="none">
         <a:solidFill>
           <a:srgbClr val="000000"/>
         </a:solidFill>
@@ -156,7 +157,7 @@
         <a:sym typeface="Arial"/>
       </a:defRPr>
     </a:lvl5pPr>
-    <a:lvl6pPr lvl="5" marR="0" rtl="0" algn="l">
+    <a:lvl6pPr marR="0" lvl="5" algn="l" rtl="0">
       <a:lnSpc>
         <a:spcPct val="100000"/>
       </a:lnSpc>
@@ -170,7 +171,7 @@
         <a:srgbClr val="000000"/>
       </a:buClr>
       <a:buFont typeface="Arial"/>
-      <a:defRPr b="0" i="0" sz="1400" u="none" cap="none" strike="noStrike">
+      <a:defRPr sz="1400" b="0" i="0" u="none" strike="noStrike" cap="none">
         <a:solidFill>
           <a:srgbClr val="000000"/>
         </a:solidFill>
@@ -180,7 +181,7 @@
         <a:sym typeface="Arial"/>
       </a:defRPr>
     </a:lvl6pPr>
-    <a:lvl7pPr lvl="6" marR="0" rtl="0" algn="l">
+    <a:lvl7pPr marR="0" lvl="6" algn="l" rtl="0">
       <a:lnSpc>
         <a:spcPct val="100000"/>
       </a:lnSpc>
@@ -194,7 +195,7 @@
         <a:srgbClr val="000000"/>
       </a:buClr>
       <a:buFont typeface="Arial"/>
-      <a:defRPr b="0" i="0" sz="1400" u="none" cap="none" strike="noStrike">
+      <a:defRPr sz="1400" b="0" i="0" u="none" strike="noStrike" cap="none">
         <a:solidFill>
           <a:srgbClr val="000000"/>
         </a:solidFill>
@@ -204,7 +205,7 @@
         <a:sym typeface="Arial"/>
       </a:defRPr>
     </a:lvl7pPr>
-    <a:lvl8pPr lvl="7" marR="0" rtl="0" algn="l">
+    <a:lvl8pPr marR="0" lvl="7" algn="l" rtl="0">
       <a:lnSpc>
         <a:spcPct val="100000"/>
       </a:lnSpc>
@@ -218,7 +219,7 @@
         <a:srgbClr val="000000"/>
       </a:buClr>
       <a:buFont typeface="Arial"/>
-      <a:defRPr b="0" i="0" sz="1400" u="none" cap="none" strike="noStrike">
+      <a:defRPr sz="1400" b="0" i="0" u="none" strike="noStrike" cap="none">
         <a:solidFill>
           <a:srgbClr val="000000"/>
         </a:solidFill>
@@ -228,7 +229,7 @@
         <a:sym typeface="Arial"/>
       </a:defRPr>
     </a:lvl8pPr>
-    <a:lvl9pPr lvl="8" marR="0" rtl="0" algn="l">
+    <a:lvl9pPr marR="0" lvl="8" algn="l" rtl="0">
       <a:lnSpc>
         <a:spcPct val="100000"/>
       </a:lnSpc>
@@ -242,7 +243,7 @@
         <a:srgbClr val="000000"/>
       </a:buClr>
       <a:buFont typeface="Arial"/>
-      <a:defRPr b="0" i="0" sz="1400" u="none" cap="none" strike="noStrike">
+      <a:defRPr sz="1400" b="0" i="0" u="none" strike="noStrike" cap="none">
         <a:solidFill>
           <a:srgbClr val="000000"/>
         </a:solidFill>
@@ -255,7 +256,7 @@
   </p:defaultTextStyle>
   <p:extLst>
     <p:ext uri="{EFAFB233-063F-42B5-8137-9DF3F51BA10A}">
-      <p15:sldGuideLst>
+      <p15:sldGuideLst xmlns:p15="http://schemas.microsoft.com/office/powerpoint/2012/main">
         <p15:guide id="1" orient="horz" pos="1620">
           <p15:clr>
             <a:srgbClr val="747775"/>
@@ -273,11 +274,16 @@
 </file>
 
 <file path=ppt/notesMasters/notesMaster1.xml><?xml version="1.0" encoding="utf-8"?>
-<p:notesMaster xmlns:a="http://schemas.openxmlformats.org/drawingml/2006/main" xmlns:r="http://schemas.openxmlformats.org/officeDocument/2006/relationships" xmlns:mc="http://schemas.openxmlformats.org/markup-compatibility/2006" xmlns:mv="urn:schemas-microsoft-com:mac:vml" xmlns:p="http://schemas.openxmlformats.org/presentationml/2006/main" xmlns:c="http://schemas.openxmlformats.org/drawingml/2006/chart" xmlns:dgm="http://schemas.openxmlformats.org/drawingml/2006/diagram" xmlns:o="urn:schemas-microsoft-com:office:office" xmlns:v="urn:schemas-microsoft-com:vml" xmlns:pvml="urn:schemas-microsoft-com:office:powerpoint" xmlns:com="http://schemas.openxmlformats.org/drawingml/2006/compatibility" xmlns:p14="http://schemas.microsoft.com/office/powerpoint/2010/main" xmlns:p15="http://schemas.microsoft.com/office/powerpoint/2012/main" xmlns:ahyp="http://schemas.microsoft.com/office/drawing/2018/hyperlinkcolor">
+<p:notesMaster xmlns:a="http://schemas.openxmlformats.org/drawingml/2006/main" xmlns:r="http://schemas.openxmlformats.org/officeDocument/2006/relationships" xmlns:p="http://schemas.openxmlformats.org/presentationml/2006/main">
   <p:cSld>
+    <p:bg>
+      <p:bgRef idx="1001">
+        <a:schemeClr val="bg1"/>
+      </p:bgRef>
+    </p:bg>
     <p:spTree>
       <p:nvGrpSpPr>
-        <p:cNvPr id="2" name="Shape 2"/>
+        <p:cNvPr id="1" name="Shape 2"/>
         <p:cNvGrpSpPr/>
         <p:nvPr/>
       </p:nvGrpSpPr>
@@ -292,9 +298,11 @@
       <p:sp>
         <p:nvSpPr>
           <p:cNvPr id="3" name="Google Shape;3;n"/>
-          <p:cNvSpPr/>
+          <p:cNvSpPr>
+            <a:spLocks noGrp="1" noRot="1" noChangeAspect="1"/>
+          </p:cNvSpPr>
           <p:nvPr>
-            <p:ph idx="2" type="sldImg"/>
+            <p:ph type="sldImg" idx="2"/>
           </p:nvPr>
         </p:nvSpPr>
         <p:spPr>
@@ -303,9 +311,13 @@
             <a:ext cx="6096075" cy="3429000"/>
           </a:xfrm>
           <a:custGeom>
-            <a:rect b="b" l="l" r="r" t="t"/>
+            <a:avLst/>
+            <a:gdLst/>
+            <a:ahLst/>
+            <a:cxnLst/>
+            <a:rect l="l" t="t" r="r" b="b"/>
             <a:pathLst>
-              <a:path extrusionOk="0" h="120000" w="120000">
+              <a:path w="120000" h="120000" extrusionOk="0">
                 <a:moveTo>
                   <a:pt x="0" y="0"/>
                 </a:moveTo>
@@ -323,23 +335,25 @@
             </a:pathLst>
           </a:custGeom>
           <a:noFill/>
-          <a:ln cap="flat" cmpd="sng" w="9525">
+          <a:ln w="9525" cap="flat" cmpd="sng">
             <a:solidFill>
               <a:srgbClr val="000000"/>
             </a:solidFill>
             <a:prstDash val="solid"/>
             <a:round/>
-            <a:headEnd len="sm" w="sm" type="none"/>
-            <a:tailEnd len="sm" w="sm" type="none"/>
+            <a:headEnd type="none" w="sm" len="sm"/>
+            <a:tailEnd type="none" w="sm" len="sm"/>
           </a:ln>
         </p:spPr>
       </p:sp>
       <p:sp>
         <p:nvSpPr>
           <p:cNvPr id="4" name="Google Shape;4;n"/>
-          <p:cNvSpPr txBox="1"/>
+          <p:cNvSpPr txBox="1">
+            <a:spLocks noGrp="1"/>
+          </p:cNvSpPr>
           <p:nvPr>
-            <p:ph idx="1" type="body"/>
+            <p:ph type="body" idx="1"/>
           </p:nvPr>
         </p:nvSpPr>
         <p:spPr>
@@ -356,11 +370,11 @@
           </a:ln>
         </p:spPr>
         <p:txBody>
-          <a:bodyPr anchorCtr="0" anchor="t" bIns="91425" lIns="91425" spcFirstLastPara="1" rIns="91425" wrap="square" tIns="91425">
+          <a:bodyPr spcFirstLastPara="1" wrap="square" lIns="91425" tIns="91425" rIns="91425" bIns="91425" anchor="t" anchorCtr="0">
             <a:noAutofit/>
           </a:bodyPr>
           <a:lstStyle>
-            <a:lvl1pPr indent="-317500" lvl="0" marL="457200">
+            <a:lvl1pPr marL="457200" lvl="0" indent="-317500">
               <a:spcBef>
                 <a:spcPts val="0"/>
               </a:spcBef>
@@ -371,7 +385,7 @@
               <a:buChar char="●"/>
               <a:defRPr sz="1100"/>
             </a:lvl1pPr>
-            <a:lvl2pPr indent="-317500" lvl="1" marL="914400">
+            <a:lvl2pPr marL="914400" lvl="1" indent="-317500">
               <a:spcBef>
                 <a:spcPts val="0"/>
               </a:spcBef>
@@ -382,7 +396,7 @@
               <a:buChar char="○"/>
               <a:defRPr sz="1100"/>
             </a:lvl2pPr>
-            <a:lvl3pPr indent="-317500" lvl="2" marL="1371600">
+            <a:lvl3pPr marL="1371600" lvl="2" indent="-317500">
               <a:spcBef>
                 <a:spcPts val="0"/>
               </a:spcBef>
@@ -393,7 +407,7 @@
               <a:buChar char="■"/>
               <a:defRPr sz="1100"/>
             </a:lvl3pPr>
-            <a:lvl4pPr indent="-317500" lvl="3" marL="1828800">
+            <a:lvl4pPr marL="1828800" lvl="3" indent="-317500">
               <a:spcBef>
                 <a:spcPts val="0"/>
               </a:spcBef>
@@ -404,7 +418,7 @@
               <a:buChar char="●"/>
               <a:defRPr sz="1100"/>
             </a:lvl4pPr>
-            <a:lvl5pPr indent="-317500" lvl="4" marL="2286000">
+            <a:lvl5pPr marL="2286000" lvl="4" indent="-317500">
               <a:spcBef>
                 <a:spcPts val="0"/>
               </a:spcBef>
@@ -415,7 +429,7 @@
               <a:buChar char="○"/>
               <a:defRPr sz="1100"/>
             </a:lvl5pPr>
-            <a:lvl6pPr indent="-317500" lvl="5" marL="2743200">
+            <a:lvl6pPr marL="2743200" lvl="5" indent="-317500">
               <a:spcBef>
                 <a:spcPts val="0"/>
               </a:spcBef>
@@ -426,7 +440,7 @@
               <a:buChar char="■"/>
               <a:defRPr sz="1100"/>
             </a:lvl6pPr>
-            <a:lvl7pPr indent="-317500" lvl="6" marL="3200400">
+            <a:lvl7pPr marL="3200400" lvl="6" indent="-317500">
               <a:spcBef>
                 <a:spcPts val="0"/>
               </a:spcBef>
@@ -437,7 +451,7 @@
               <a:buChar char="●"/>
               <a:defRPr sz="1100"/>
             </a:lvl7pPr>
-            <a:lvl8pPr indent="-317500" lvl="7" marL="3657600">
+            <a:lvl8pPr marL="3657600" lvl="7" indent="-317500">
               <a:spcBef>
                 <a:spcPts val="0"/>
               </a:spcBef>
@@ -448,7 +462,7 @@
               <a:buChar char="○"/>
               <a:defRPr sz="1100"/>
             </a:lvl8pPr>
-            <a:lvl9pPr indent="-317500" lvl="8" marL="4114800">
+            <a:lvl9pPr marL="4114800" lvl="8" indent="-317500">
               <a:spcBef>
                 <a:spcPts val="0"/>
               </a:spcBef>
@@ -460,14 +474,16 @@
               <a:defRPr sz="1100"/>
             </a:lvl9pPr>
           </a:lstStyle>
-          <a:p/>
+          <a:p>
+            <a:endParaRPr/>
+          </a:p>
         </p:txBody>
       </p:sp>
     </p:spTree>
   </p:cSld>
-  <p:clrMap accent1="accent1" accent2="accent2" accent3="accent3" accent4="accent4" accent5="accent5" accent6="accent6" bg1="lt1" bg2="dk2" tx1="dk1" tx2="lt2" folHlink="folHlink" hlink="hlink"/>
+  <p:clrMap bg1="lt1" tx1="dk1" bg2="dk2" tx2="lt2" accent1="accent1" accent2="accent2" accent3="accent3" accent4="accent4" accent5="accent5" accent6="accent6" hlink="hlink" folHlink="folHlink"/>
   <p:notesStyle>
-    <a:defPPr lvl="0" marR="0" rtl="0" algn="l">
+    <a:defPPr marR="0" lvl="0" algn="l" rtl="0">
       <a:lnSpc>
         <a:spcPct val="100000"/>
       </a:lnSpc>
@@ -478,7 +494,7 @@
         <a:spcPts val="0"/>
       </a:spcAft>
     </a:defPPr>
-    <a:lvl1pPr lvl="0" marR="0" rtl="0" algn="l">
+    <a:lvl1pPr marR="0" lvl="0" algn="l" rtl="0">
       <a:lnSpc>
         <a:spcPct val="100000"/>
       </a:lnSpc>
@@ -492,7 +508,7 @@
         <a:srgbClr val="000000"/>
       </a:buClr>
       <a:buFont typeface="Arial"/>
-      <a:defRPr b="0" i="0" sz="1400" u="none" cap="none" strike="noStrike">
+      <a:defRPr sz="1400" b="0" i="0" u="none" strike="noStrike" cap="none">
         <a:solidFill>
           <a:srgbClr val="000000"/>
         </a:solidFill>
@@ -502,7 +518,7 @@
         <a:sym typeface="Arial"/>
       </a:defRPr>
     </a:lvl1pPr>
-    <a:lvl2pPr lvl="1" marR="0" rtl="0" algn="l">
+    <a:lvl2pPr marR="0" lvl="1" algn="l" rtl="0">
       <a:lnSpc>
         <a:spcPct val="100000"/>
       </a:lnSpc>
@@ -516,7 +532,7 @@
         <a:srgbClr val="000000"/>
       </a:buClr>
       <a:buFont typeface="Arial"/>
-      <a:defRPr b="0" i="0" sz="1400" u="none" cap="none" strike="noStrike">
+      <a:defRPr sz="1400" b="0" i="0" u="none" strike="noStrike" cap="none">
         <a:solidFill>
           <a:srgbClr val="000000"/>
         </a:solidFill>
@@ -526,7 +542,7 @@
         <a:sym typeface="Arial"/>
       </a:defRPr>
     </a:lvl2pPr>
-    <a:lvl3pPr lvl="2" marR="0" rtl="0" algn="l">
+    <a:lvl3pPr marR="0" lvl="2" algn="l" rtl="0">
       <a:lnSpc>
         <a:spcPct val="100000"/>
       </a:lnSpc>
@@ -540,7 +556,7 @@
         <a:srgbClr val="000000"/>
       </a:buClr>
       <a:buFont typeface="Arial"/>
-      <a:defRPr b="0" i="0" sz="1400" u="none" cap="none" strike="noStrike">
+      <a:defRPr sz="1400" b="0" i="0" u="none" strike="noStrike" cap="none">
         <a:solidFill>
           <a:srgbClr val="000000"/>
         </a:solidFill>
@@ -550,7 +566,7 @@
         <a:sym typeface="Arial"/>
       </a:defRPr>
     </a:lvl3pPr>
-    <a:lvl4pPr lvl="3" marR="0" rtl="0" algn="l">
+    <a:lvl4pPr marR="0" lvl="3" algn="l" rtl="0">
       <a:lnSpc>
         <a:spcPct val="100000"/>
       </a:lnSpc>
@@ -564,7 +580,7 @@
         <a:srgbClr val="000000"/>
       </a:buClr>
       <a:buFont typeface="Arial"/>
-      <a:defRPr b="0" i="0" sz="1400" u="none" cap="none" strike="noStrike">
+      <a:defRPr sz="1400" b="0" i="0" u="none" strike="noStrike" cap="none">
         <a:solidFill>
           <a:srgbClr val="000000"/>
         </a:solidFill>
@@ -574,7 +590,7 @@
         <a:sym typeface="Arial"/>
       </a:defRPr>
     </a:lvl4pPr>
-    <a:lvl5pPr lvl="4" marR="0" rtl="0" algn="l">
+    <a:lvl5pPr marR="0" lvl="4" algn="l" rtl="0">
       <a:lnSpc>
         <a:spcPct val="100000"/>
       </a:lnSpc>
@@ -588,7 +604,7 @@
         <a:srgbClr val="000000"/>
       </a:buClr>
       <a:buFont typeface="Arial"/>
-      <a:defRPr b="0" i="0" sz="1400" u="none" cap="none" strike="noStrike">
+      <a:defRPr sz="1400" b="0" i="0" u="none" strike="noStrike" cap="none">
         <a:solidFill>
           <a:srgbClr val="000000"/>
         </a:solidFill>
@@ -598,7 +614,7 @@
         <a:sym typeface="Arial"/>
       </a:defRPr>
     </a:lvl5pPr>
-    <a:lvl6pPr lvl="5" marR="0" rtl="0" algn="l">
+    <a:lvl6pPr marR="0" lvl="5" algn="l" rtl="0">
       <a:lnSpc>
         <a:spcPct val="100000"/>
       </a:lnSpc>
@@ -612,7 +628,7 @@
         <a:srgbClr val="000000"/>
       </a:buClr>
       <a:buFont typeface="Arial"/>
-      <a:defRPr b="0" i="0" sz="1400" u="none" cap="none" strike="noStrike">
+      <a:defRPr sz="1400" b="0" i="0" u="none" strike="noStrike" cap="none">
         <a:solidFill>
           <a:srgbClr val="000000"/>
         </a:solidFill>
@@ -622,7 +638,7 @@
         <a:sym typeface="Arial"/>
       </a:defRPr>
     </a:lvl6pPr>
-    <a:lvl7pPr lvl="6" marR="0" rtl="0" algn="l">
+    <a:lvl7pPr marR="0" lvl="6" algn="l" rtl="0">
       <a:lnSpc>
         <a:spcPct val="100000"/>
       </a:lnSpc>
@@ -636,7 +652,7 @@
         <a:srgbClr val="000000"/>
       </a:buClr>
       <a:buFont typeface="Arial"/>
-      <a:defRPr b="0" i="0" sz="1400" u="none" cap="none" strike="noStrike">
+      <a:defRPr sz="1400" b="0" i="0" u="none" strike="noStrike" cap="none">
         <a:solidFill>
           <a:srgbClr val="000000"/>
         </a:solidFill>
@@ -646,7 +662,7 @@
         <a:sym typeface="Arial"/>
       </a:defRPr>
     </a:lvl7pPr>
-    <a:lvl8pPr lvl="7" marR="0" rtl="0" algn="l">
+    <a:lvl8pPr marR="0" lvl="7" algn="l" rtl="0">
       <a:lnSpc>
         <a:spcPct val="100000"/>
       </a:lnSpc>
@@ -660,7 +676,7 @@
         <a:srgbClr val="000000"/>
       </a:buClr>
       <a:buFont typeface="Arial"/>
-      <a:defRPr b="0" i="0" sz="1400" u="none" cap="none" strike="noStrike">
+      <a:defRPr sz="1400" b="0" i="0" u="none" strike="noStrike" cap="none">
         <a:solidFill>
           <a:srgbClr val="000000"/>
         </a:solidFill>
@@ -670,7 +686,7 @@
         <a:sym typeface="Arial"/>
       </a:defRPr>
     </a:lvl8pPr>
-    <a:lvl9pPr lvl="8" marR="0" rtl="0" algn="l">
+    <a:lvl9pPr marR="0" lvl="8" algn="l" rtl="0">
       <a:lnSpc>
         <a:spcPct val="100000"/>
       </a:lnSpc>
@@ -684,7 +700,7 @@
         <a:srgbClr val="000000"/>
       </a:buClr>
       <a:buFont typeface="Arial"/>
-      <a:defRPr b="0" i="0" sz="1400" u="none" cap="none" strike="noStrike">
+      <a:defRPr sz="1400" b="0" i="0" u="none" strike="noStrike" cap="none">
         <a:solidFill>
           <a:srgbClr val="000000"/>
         </a:solidFill>
@@ -699,11 +715,11 @@
 </file>
 
 <file path=ppt/notesSlides/notesSlide1.xml><?xml version="1.0" encoding="utf-8"?>
-<p:notes xmlns:a="http://schemas.openxmlformats.org/drawingml/2006/main" xmlns:r="http://schemas.openxmlformats.org/officeDocument/2006/relationships" xmlns:mc="http://schemas.openxmlformats.org/markup-compatibility/2006" xmlns:mv="urn:schemas-microsoft-com:mac:vml" xmlns:p="http://schemas.openxmlformats.org/presentationml/2006/main" xmlns:c="http://schemas.openxmlformats.org/drawingml/2006/chart" xmlns:dgm="http://schemas.openxmlformats.org/drawingml/2006/diagram" xmlns:o="urn:schemas-microsoft-com:office:office" xmlns:v="urn:schemas-microsoft-com:vml" xmlns:pvml="urn:schemas-microsoft-com:office:powerpoint" xmlns:com="http://schemas.openxmlformats.org/drawingml/2006/compatibility" xmlns:p14="http://schemas.microsoft.com/office/powerpoint/2010/main" xmlns:p15="http://schemas.microsoft.com/office/powerpoint/2012/main" xmlns:ahyp="http://schemas.microsoft.com/office/drawing/2018/hyperlinkcolor" showMasterPhAnim="0" showMasterSp="0">
+<p:notes xmlns:a="http://schemas.openxmlformats.org/drawingml/2006/main" xmlns:r="http://schemas.openxmlformats.org/officeDocument/2006/relationships" xmlns:p="http://schemas.openxmlformats.org/presentationml/2006/main" showMasterSp="0" showMasterPhAnim="0">
   <p:cSld>
     <p:spTree>
       <p:nvGrpSpPr>
-        <p:cNvPr id="55" name="Shape 55"/>
+        <p:cNvPr id="1" name="Shape 55"/>
         <p:cNvGrpSpPr/>
         <p:nvPr/>
       </p:nvGrpSpPr>
@@ -718,20 +734,26 @@
       <p:sp>
         <p:nvSpPr>
           <p:cNvPr id="56" name="Google Shape;56;gc6f90357f_0_0:notes"/>
-          <p:cNvSpPr/>
+          <p:cNvSpPr>
+            <a:spLocks noGrp="1" noRot="1" noChangeAspect="1"/>
+          </p:cNvSpPr>
           <p:nvPr>
-            <p:ph idx="2" type="sldImg"/>
+            <p:ph type="sldImg" idx="2"/>
           </p:nvPr>
         </p:nvSpPr>
         <p:spPr>
           <a:xfrm>
-            <a:off x="381188" y="685800"/>
-            <a:ext cx="6096300" cy="3429000"/>
+            <a:off x="381000" y="685800"/>
+            <a:ext cx="6096000" cy="3429000"/>
           </a:xfrm>
           <a:custGeom>
-            <a:rect b="b" l="l" r="r" t="t"/>
+            <a:avLst/>
+            <a:gdLst/>
+            <a:ahLst/>
+            <a:cxnLst/>
+            <a:rect l="l" t="t" r="r" b="b"/>
             <a:pathLst>
-              <a:path extrusionOk="0" h="120000" w="120000">
+              <a:path w="120000" h="120000" extrusionOk="0">
                 <a:moveTo>
                   <a:pt x="0" y="0"/>
                 </a:moveTo>
@@ -753,9 +775,11 @@
       <p:sp>
         <p:nvSpPr>
           <p:cNvPr id="57" name="Google Shape;57;gc6f90357f_0_0:notes"/>
-          <p:cNvSpPr txBox="1"/>
+          <p:cNvSpPr txBox="1">
+            <a:spLocks noGrp="1"/>
+          </p:cNvSpPr>
           <p:nvPr>
-            <p:ph idx="1" type="body"/>
+            <p:ph type="body" idx="1"/>
           </p:nvPr>
         </p:nvSpPr>
         <p:spPr>
@@ -768,12 +792,12 @@
           </a:prstGeom>
         </p:spPr>
         <p:txBody>
-          <a:bodyPr anchorCtr="0" anchor="t" bIns="91425" lIns="91425" spcFirstLastPara="1" rIns="91425" wrap="square" tIns="91425">
+          <a:bodyPr spcFirstLastPara="1" wrap="square" lIns="91425" tIns="91425" rIns="91425" bIns="91425" anchor="t" anchorCtr="0">
             <a:noAutofit/>
           </a:bodyPr>
           <a:lstStyle/>
           <a:p>
-            <a:pPr indent="0" lvl="0" marL="0" rtl="0" algn="l">
+            <a:pPr marL="0" lvl="0" indent="0" algn="l" rtl="0">
               <a:spcBef>
                 <a:spcPts val="0"/>
               </a:spcBef>
@@ -782,9 +806,6 @@
               </a:spcAft>
               <a:buNone/>
             </a:pPr>
-            <a:r>
-              <a:t/>
-            </a:r>
             <a:endParaRPr/>
           </a:p>
         </p:txBody>
@@ -798,11 +819,11 @@
 </file>
 
 <file path=ppt/notesSlides/notesSlide2.xml><?xml version="1.0" encoding="utf-8"?>
-<p:notes xmlns:a="http://schemas.openxmlformats.org/drawingml/2006/main" xmlns:r="http://schemas.openxmlformats.org/officeDocument/2006/relationships" xmlns:mc="http://schemas.openxmlformats.org/markup-compatibility/2006" xmlns:mv="urn:schemas-microsoft-com:mac:vml" xmlns:p="http://schemas.openxmlformats.org/presentationml/2006/main" xmlns:c="http://schemas.openxmlformats.org/drawingml/2006/chart" xmlns:dgm="http://schemas.openxmlformats.org/drawingml/2006/diagram" xmlns:o="urn:schemas-microsoft-com:office:office" xmlns:v="urn:schemas-microsoft-com:vml" xmlns:pvml="urn:schemas-microsoft-com:office:powerpoint" xmlns:com="http://schemas.openxmlformats.org/drawingml/2006/compatibility" xmlns:p14="http://schemas.microsoft.com/office/powerpoint/2010/main" xmlns:p15="http://schemas.microsoft.com/office/powerpoint/2012/main" xmlns:ahyp="http://schemas.microsoft.com/office/drawing/2018/hyperlinkcolor" showMasterPhAnim="0" showMasterSp="0">
+<p:notes xmlns:a="http://schemas.openxmlformats.org/drawingml/2006/main" xmlns:r="http://schemas.openxmlformats.org/officeDocument/2006/relationships" xmlns:p="http://schemas.openxmlformats.org/presentationml/2006/main" showMasterSp="0" showMasterPhAnim="0">
   <p:cSld>
     <p:spTree>
       <p:nvGrpSpPr>
-        <p:cNvPr id="61" name="Shape 61"/>
+        <p:cNvPr id="1" name="Shape 61"/>
         <p:cNvGrpSpPr/>
         <p:nvPr/>
       </p:nvGrpSpPr>
@@ -817,9 +838,11 @@
       <p:sp>
         <p:nvSpPr>
           <p:cNvPr id="62" name="Google Shape;62;gc6f90357f_0_5:notes"/>
-          <p:cNvSpPr/>
+          <p:cNvSpPr>
+            <a:spLocks noGrp="1" noRot="1" noChangeAspect="1"/>
+          </p:cNvSpPr>
           <p:nvPr>
-            <p:ph idx="2" type="sldImg"/>
+            <p:ph type="sldImg" idx="2"/>
           </p:nvPr>
         </p:nvSpPr>
         <p:spPr>
@@ -828,9 +851,13 @@
             <a:ext cx="6096300" cy="3429000"/>
           </a:xfrm>
           <a:custGeom>
-            <a:rect b="b" l="l" r="r" t="t"/>
+            <a:avLst/>
+            <a:gdLst/>
+            <a:ahLst/>
+            <a:cxnLst/>
+            <a:rect l="l" t="t" r="r" b="b"/>
             <a:pathLst>
-              <a:path extrusionOk="0" h="120000" w="120000">
+              <a:path w="120000" h="120000" extrusionOk="0">
                 <a:moveTo>
                   <a:pt x="0" y="0"/>
                 </a:moveTo>
@@ -852,9 +879,11 @@
       <p:sp>
         <p:nvSpPr>
           <p:cNvPr id="63" name="Google Shape;63;gc6f90357f_0_5:notes"/>
-          <p:cNvSpPr txBox="1"/>
+          <p:cNvSpPr txBox="1">
+            <a:spLocks noGrp="1"/>
+          </p:cNvSpPr>
           <p:nvPr>
-            <p:ph idx="1" type="body"/>
+            <p:ph type="body" idx="1"/>
           </p:nvPr>
         </p:nvSpPr>
         <p:spPr>
@@ -867,12 +896,12 @@
           </a:prstGeom>
         </p:spPr>
         <p:txBody>
-          <a:bodyPr anchorCtr="0" anchor="t" bIns="91425" lIns="91425" spcFirstLastPara="1" rIns="91425" wrap="square" tIns="91425">
+          <a:bodyPr spcFirstLastPara="1" wrap="square" lIns="91425" tIns="91425" rIns="91425" bIns="91425" anchor="t" anchorCtr="0">
             <a:noAutofit/>
           </a:bodyPr>
           <a:lstStyle/>
           <a:p>
-            <a:pPr indent="0" lvl="0" marL="0" rtl="0" algn="l">
+            <a:pPr marL="0" lvl="0" indent="0" algn="l" rtl="0">
               <a:spcBef>
                 <a:spcPts val="0"/>
               </a:spcBef>
@@ -881,9 +910,6 @@
               </a:spcAft>
               <a:buNone/>
             </a:pPr>
-            <a:r>
-              <a:t/>
-            </a:r>
             <a:endParaRPr/>
           </a:p>
         </p:txBody>
@@ -897,11 +923,11 @@
 </file>
 
 <file path=ppt/notesSlides/notesSlide3.xml><?xml version="1.0" encoding="utf-8"?>
-<p:notes xmlns:a="http://schemas.openxmlformats.org/drawingml/2006/main" xmlns:r="http://schemas.openxmlformats.org/officeDocument/2006/relationships" xmlns:mc="http://schemas.openxmlformats.org/markup-compatibility/2006" xmlns:mv="urn:schemas-microsoft-com:mac:vml" xmlns:p="http://schemas.openxmlformats.org/presentationml/2006/main" xmlns:c="http://schemas.openxmlformats.org/drawingml/2006/chart" xmlns:dgm="http://schemas.openxmlformats.org/drawingml/2006/diagram" xmlns:o="urn:schemas-microsoft-com:office:office" xmlns:v="urn:schemas-microsoft-com:vml" xmlns:pvml="urn:schemas-microsoft-com:office:powerpoint" xmlns:com="http://schemas.openxmlformats.org/drawingml/2006/compatibility" xmlns:p14="http://schemas.microsoft.com/office/powerpoint/2010/main" xmlns:p15="http://schemas.microsoft.com/office/powerpoint/2012/main" xmlns:ahyp="http://schemas.microsoft.com/office/drawing/2018/hyperlinkcolor" showMasterPhAnim="0" showMasterSp="0">
+<p:notes xmlns:a="http://schemas.openxmlformats.org/drawingml/2006/main" xmlns:r="http://schemas.openxmlformats.org/officeDocument/2006/relationships" xmlns:p="http://schemas.openxmlformats.org/presentationml/2006/main" showMasterSp="0" showMasterPhAnim="0">
   <p:cSld>
     <p:spTree>
       <p:nvGrpSpPr>
-        <p:cNvPr id="66" name="Shape 66"/>
+        <p:cNvPr id="1" name="Shape 66"/>
         <p:cNvGrpSpPr/>
         <p:nvPr/>
       </p:nvGrpSpPr>
@@ -916,9 +942,11 @@
       <p:sp>
         <p:nvSpPr>
           <p:cNvPr id="67" name="Google Shape;67;gc6f90357f_0_13:notes"/>
-          <p:cNvSpPr/>
+          <p:cNvSpPr>
+            <a:spLocks noGrp="1" noRot="1" noChangeAspect="1"/>
+          </p:cNvSpPr>
           <p:nvPr>
-            <p:ph idx="2" type="sldImg"/>
+            <p:ph type="sldImg" idx="2"/>
           </p:nvPr>
         </p:nvSpPr>
         <p:spPr>
@@ -927,9 +955,13 @@
             <a:ext cx="6096300" cy="3429000"/>
           </a:xfrm>
           <a:custGeom>
-            <a:rect b="b" l="l" r="r" t="t"/>
+            <a:avLst/>
+            <a:gdLst/>
+            <a:ahLst/>
+            <a:cxnLst/>
+            <a:rect l="l" t="t" r="r" b="b"/>
             <a:pathLst>
-              <a:path extrusionOk="0" h="120000" w="120000">
+              <a:path w="120000" h="120000" extrusionOk="0">
                 <a:moveTo>
                   <a:pt x="0" y="0"/>
                 </a:moveTo>
@@ -951,9 +983,11 @@
       <p:sp>
         <p:nvSpPr>
           <p:cNvPr id="68" name="Google Shape;68;gc6f90357f_0_13:notes"/>
-          <p:cNvSpPr txBox="1"/>
+          <p:cNvSpPr txBox="1">
+            <a:spLocks noGrp="1"/>
+          </p:cNvSpPr>
           <p:nvPr>
-            <p:ph idx="1" type="body"/>
+            <p:ph type="body" idx="1"/>
           </p:nvPr>
         </p:nvSpPr>
         <p:spPr>
@@ -966,12 +1000,12 @@
           </a:prstGeom>
         </p:spPr>
         <p:txBody>
-          <a:bodyPr anchorCtr="0" anchor="t" bIns="91425" lIns="91425" spcFirstLastPara="1" rIns="91425" wrap="square" tIns="91425">
+          <a:bodyPr spcFirstLastPara="1" wrap="square" lIns="91425" tIns="91425" rIns="91425" bIns="91425" anchor="t" anchorCtr="0">
             <a:noAutofit/>
           </a:bodyPr>
           <a:lstStyle/>
           <a:p>
-            <a:pPr indent="0" lvl="0" marL="0" rtl="0" algn="l">
+            <a:pPr marL="0" lvl="0" indent="0" algn="l" rtl="0">
               <a:spcBef>
                 <a:spcPts val="0"/>
               </a:spcBef>
@@ -980,9 +1014,6 @@
               </a:spcAft>
               <a:buNone/>
             </a:pPr>
-            <a:r>
-              <a:t/>
-            </a:r>
             <a:endParaRPr/>
           </a:p>
         </p:txBody>
@@ -996,11 +1027,11 @@
 </file>
 
 <file path=ppt/notesSlides/notesSlide4.xml><?xml version="1.0" encoding="utf-8"?>
-<p:notes xmlns:a="http://schemas.openxmlformats.org/drawingml/2006/main" xmlns:r="http://schemas.openxmlformats.org/officeDocument/2006/relationships" xmlns:mc="http://schemas.openxmlformats.org/markup-compatibility/2006" xmlns:mv="urn:schemas-microsoft-com:mac:vml" xmlns:p="http://schemas.openxmlformats.org/presentationml/2006/main" xmlns:c="http://schemas.openxmlformats.org/drawingml/2006/chart" xmlns:dgm="http://schemas.openxmlformats.org/drawingml/2006/diagram" xmlns:o="urn:schemas-microsoft-com:office:office" xmlns:v="urn:schemas-microsoft-com:vml" xmlns:pvml="urn:schemas-microsoft-com:office:powerpoint" xmlns:com="http://schemas.openxmlformats.org/drawingml/2006/compatibility" xmlns:p14="http://schemas.microsoft.com/office/powerpoint/2010/main" xmlns:p15="http://schemas.microsoft.com/office/powerpoint/2012/main" xmlns:ahyp="http://schemas.microsoft.com/office/drawing/2018/hyperlinkcolor" showMasterPhAnim="0" showMasterSp="0">
+<p:notes xmlns:a="http://schemas.openxmlformats.org/drawingml/2006/main" xmlns:r="http://schemas.openxmlformats.org/officeDocument/2006/relationships" xmlns:p="http://schemas.openxmlformats.org/presentationml/2006/main" showMasterSp="0" showMasterPhAnim="0">
   <p:cSld>
     <p:spTree>
       <p:nvGrpSpPr>
-        <p:cNvPr id="74" name="Shape 74"/>
+        <p:cNvPr id="1" name="Shape 74"/>
         <p:cNvGrpSpPr/>
         <p:nvPr/>
       </p:nvGrpSpPr>
@@ -1015,9 +1046,11 @@
       <p:sp>
         <p:nvSpPr>
           <p:cNvPr id="75" name="Google Shape;75;gc6f90357f_0_27:notes"/>
-          <p:cNvSpPr/>
+          <p:cNvSpPr>
+            <a:spLocks noGrp="1" noRot="1" noChangeAspect="1"/>
+          </p:cNvSpPr>
           <p:nvPr>
-            <p:ph idx="2" type="sldImg"/>
+            <p:ph type="sldImg" idx="2"/>
           </p:nvPr>
         </p:nvSpPr>
         <p:spPr>
@@ -1026,9 +1059,13 @@
             <a:ext cx="6096300" cy="3429000"/>
           </a:xfrm>
           <a:custGeom>
-            <a:rect b="b" l="l" r="r" t="t"/>
+            <a:avLst/>
+            <a:gdLst/>
+            <a:ahLst/>
+            <a:cxnLst/>
+            <a:rect l="l" t="t" r="r" b="b"/>
             <a:pathLst>
-              <a:path extrusionOk="0" h="120000" w="120000">
+              <a:path w="120000" h="120000" extrusionOk="0">
                 <a:moveTo>
                   <a:pt x="0" y="0"/>
                 </a:moveTo>
@@ -1050,9 +1087,11 @@
       <p:sp>
         <p:nvSpPr>
           <p:cNvPr id="76" name="Google Shape;76;gc6f90357f_0_27:notes"/>
-          <p:cNvSpPr txBox="1"/>
+          <p:cNvSpPr txBox="1">
+            <a:spLocks noGrp="1"/>
+          </p:cNvSpPr>
           <p:nvPr>
-            <p:ph idx="1" type="body"/>
+            <p:ph type="body" idx="1"/>
           </p:nvPr>
         </p:nvSpPr>
         <p:spPr>
@@ -1065,12 +1104,12 @@
           </a:prstGeom>
         </p:spPr>
         <p:txBody>
-          <a:bodyPr anchorCtr="0" anchor="t" bIns="91425" lIns="91425" spcFirstLastPara="1" rIns="91425" wrap="square" tIns="91425">
+          <a:bodyPr spcFirstLastPara="1" wrap="square" lIns="91425" tIns="91425" rIns="91425" bIns="91425" anchor="t" anchorCtr="0">
             <a:noAutofit/>
           </a:bodyPr>
           <a:lstStyle/>
           <a:p>
-            <a:pPr indent="0" lvl="0" marL="0" rtl="0" algn="l">
+            <a:pPr marL="0" lvl="0" indent="0" algn="l" rtl="0">
               <a:spcBef>
                 <a:spcPts val="0"/>
               </a:spcBef>
@@ -1079,9 +1118,6 @@
               </a:spcAft>
               <a:buNone/>
             </a:pPr>
-            <a:r>
-              <a:t/>
-            </a:r>
             <a:endParaRPr/>
           </a:p>
         </p:txBody>
@@ -1095,11 +1131,138 @@
 </file>
 
 <file path=ppt/notesSlides/notesSlide5.xml><?xml version="1.0" encoding="utf-8"?>
-<p:notes xmlns:a="http://schemas.openxmlformats.org/drawingml/2006/main" xmlns:r="http://schemas.openxmlformats.org/officeDocument/2006/relationships" xmlns:mc="http://schemas.openxmlformats.org/markup-compatibility/2006" xmlns:mv="urn:schemas-microsoft-com:mac:vml" xmlns:p="http://schemas.openxmlformats.org/presentationml/2006/main" xmlns:c="http://schemas.openxmlformats.org/drawingml/2006/chart" xmlns:dgm="http://schemas.openxmlformats.org/drawingml/2006/diagram" xmlns:o="urn:schemas-microsoft-com:office:office" xmlns:v="urn:schemas-microsoft-com:vml" xmlns:pvml="urn:schemas-microsoft-com:office:powerpoint" xmlns:com="http://schemas.openxmlformats.org/drawingml/2006/compatibility" xmlns:p14="http://schemas.microsoft.com/office/powerpoint/2010/main" xmlns:p15="http://schemas.microsoft.com/office/powerpoint/2012/main" xmlns:ahyp="http://schemas.microsoft.com/office/drawing/2018/hyperlinkcolor" showMasterPhAnim="0" showMasterSp="0">
+<p:notes xmlns:a="http://schemas.openxmlformats.org/drawingml/2006/main" xmlns:r="http://schemas.openxmlformats.org/officeDocument/2006/relationships" xmlns:p="http://schemas.openxmlformats.org/presentationml/2006/main" showMasterSp="0" showMasterPhAnim="0">
   <p:cSld>
     <p:spTree>
       <p:nvGrpSpPr>
-        <p:cNvPr id="79" name="Shape 79"/>
+        <p:cNvPr id="1" name="Shape 66">
+          <a:extLst>
+            <a:ext uri="{FF2B5EF4-FFF2-40B4-BE49-F238E27FC236}">
+              <a16:creationId xmlns:a16="http://schemas.microsoft.com/office/drawing/2014/main" id="{CCD48EFE-9E28-FB06-9F5C-ADA7602BB7EF}"/>
+            </a:ext>
+          </a:extLst>
+        </p:cNvPr>
+        <p:cNvGrpSpPr/>
+        <p:nvPr/>
+      </p:nvGrpSpPr>
+      <p:grpSpPr>
+        <a:xfrm>
+          <a:off x="0" y="0"/>
+          <a:ext cx="0" cy="0"/>
+          <a:chOff x="0" y="0"/>
+          <a:chExt cx="0" cy="0"/>
+        </a:xfrm>
+      </p:grpSpPr>
+      <p:sp>
+        <p:nvSpPr>
+          <p:cNvPr id="67" name="Google Shape;67;gc6f90357f_0_13:notes">
+            <a:extLst>
+              <a:ext uri="{FF2B5EF4-FFF2-40B4-BE49-F238E27FC236}">
+                <a16:creationId xmlns:a16="http://schemas.microsoft.com/office/drawing/2014/main" id="{0EF63471-D14F-3792-83F6-3285A1460A83}"/>
+              </a:ext>
+            </a:extLst>
+          </p:cNvPr>
+          <p:cNvSpPr>
+            <a:spLocks noGrp="1" noRot="1" noChangeAspect="1"/>
+          </p:cNvSpPr>
+          <p:nvPr>
+            <p:ph type="sldImg" idx="2"/>
+          </p:nvPr>
+        </p:nvSpPr>
+        <p:spPr>
+          <a:xfrm>
+            <a:off x="381000" y="685800"/>
+            <a:ext cx="6096000" cy="3429000"/>
+          </a:xfrm>
+          <a:custGeom>
+            <a:avLst/>
+            <a:gdLst/>
+            <a:ahLst/>
+            <a:cxnLst/>
+            <a:rect l="l" t="t" r="r" b="b"/>
+            <a:pathLst>
+              <a:path w="120000" h="120000" extrusionOk="0">
+                <a:moveTo>
+                  <a:pt x="0" y="0"/>
+                </a:moveTo>
+                <a:lnTo>
+                  <a:pt x="120000" y="0"/>
+                </a:lnTo>
+                <a:lnTo>
+                  <a:pt x="120000" y="120000"/>
+                </a:lnTo>
+                <a:lnTo>
+                  <a:pt x="0" y="120000"/>
+                </a:lnTo>
+                <a:close/>
+              </a:path>
+            </a:pathLst>
+          </a:custGeom>
+        </p:spPr>
+      </p:sp>
+      <p:sp>
+        <p:nvSpPr>
+          <p:cNvPr id="68" name="Google Shape;68;gc6f90357f_0_13:notes">
+            <a:extLst>
+              <a:ext uri="{FF2B5EF4-FFF2-40B4-BE49-F238E27FC236}">
+                <a16:creationId xmlns:a16="http://schemas.microsoft.com/office/drawing/2014/main" id="{604486BE-0471-8742-5357-5CB5BCD50AA4}"/>
+              </a:ext>
+            </a:extLst>
+          </p:cNvPr>
+          <p:cNvSpPr txBox="1">
+            <a:spLocks noGrp="1"/>
+          </p:cNvSpPr>
+          <p:nvPr>
+            <p:ph type="body" idx="1"/>
+          </p:nvPr>
+        </p:nvSpPr>
+        <p:spPr>
+          <a:xfrm>
+            <a:off x="685800" y="4343400"/>
+            <a:ext cx="5486400" cy="4114800"/>
+          </a:xfrm>
+          <a:prstGeom prst="rect">
+            <a:avLst/>
+          </a:prstGeom>
+        </p:spPr>
+        <p:txBody>
+          <a:bodyPr spcFirstLastPara="1" wrap="square" lIns="91425" tIns="91425" rIns="91425" bIns="91425" anchor="t" anchorCtr="0">
+            <a:noAutofit/>
+          </a:bodyPr>
+          <a:lstStyle/>
+          <a:p>
+            <a:pPr marL="0" lvl="0" indent="0" algn="l" rtl="0">
+              <a:spcBef>
+                <a:spcPts val="0"/>
+              </a:spcBef>
+              <a:spcAft>
+                <a:spcPts val="0"/>
+              </a:spcAft>
+              <a:buNone/>
+            </a:pPr>
+            <a:endParaRPr/>
+          </a:p>
+        </p:txBody>
+      </p:sp>
+    </p:spTree>
+    <p:extLst>
+      <p:ext uri="{BB962C8B-B14F-4D97-AF65-F5344CB8AC3E}">
+        <p14:creationId xmlns:p14="http://schemas.microsoft.com/office/powerpoint/2010/main" val="1345899695"/>
+      </p:ext>
+    </p:extLst>
+  </p:cSld>
+  <p:clrMapOvr>
+    <a:masterClrMapping/>
+  </p:clrMapOvr>
+</p:notes>
+</file>
+
+<file path=ppt/notesSlides/notesSlide6.xml><?xml version="1.0" encoding="utf-8"?>
+<p:notes xmlns:a="http://schemas.openxmlformats.org/drawingml/2006/main" xmlns:r="http://schemas.openxmlformats.org/officeDocument/2006/relationships" xmlns:p="http://schemas.openxmlformats.org/presentationml/2006/main" showMasterSp="0" showMasterPhAnim="0">
+  <p:cSld>
+    <p:spTree>
+      <p:nvGrpSpPr>
+        <p:cNvPr id="1" name="Shape 79"/>
         <p:cNvGrpSpPr/>
         <p:nvPr/>
       </p:nvGrpSpPr>
@@ -1114,20 +1277,26 @@
       <p:sp>
         <p:nvSpPr>
           <p:cNvPr id="80" name="Google Shape;80;gc6f90357f_0_35:notes"/>
-          <p:cNvSpPr/>
+          <p:cNvSpPr>
+            <a:spLocks noGrp="1" noRot="1" noChangeAspect="1"/>
+          </p:cNvSpPr>
           <p:nvPr>
-            <p:ph idx="2" type="sldImg"/>
+            <p:ph type="sldImg" idx="2"/>
           </p:nvPr>
         </p:nvSpPr>
         <p:spPr>
           <a:xfrm>
-            <a:off x="381188" y="685800"/>
-            <a:ext cx="6096300" cy="3429000"/>
+            <a:off x="381000" y="685800"/>
+            <a:ext cx="6096000" cy="3429000"/>
           </a:xfrm>
           <a:custGeom>
-            <a:rect b="b" l="l" r="r" t="t"/>
+            <a:avLst/>
+            <a:gdLst/>
+            <a:ahLst/>
+            <a:cxnLst/>
+            <a:rect l="l" t="t" r="r" b="b"/>
             <a:pathLst>
-              <a:path extrusionOk="0" h="120000" w="120000">
+              <a:path w="120000" h="120000" extrusionOk="0">
                 <a:moveTo>
                   <a:pt x="0" y="0"/>
                 </a:moveTo>
@@ -1149,9 +1318,11 @@
       <p:sp>
         <p:nvSpPr>
           <p:cNvPr id="81" name="Google Shape;81;gc6f90357f_0_35:notes"/>
-          <p:cNvSpPr txBox="1"/>
+          <p:cNvSpPr txBox="1">
+            <a:spLocks noGrp="1"/>
+          </p:cNvSpPr>
           <p:nvPr>
-            <p:ph idx="1" type="body"/>
+            <p:ph type="body" idx="1"/>
           </p:nvPr>
         </p:nvSpPr>
         <p:spPr>
@@ -1164,12 +1335,12 @@
           </a:prstGeom>
         </p:spPr>
         <p:txBody>
-          <a:bodyPr anchorCtr="0" anchor="t" bIns="91425" lIns="91425" spcFirstLastPara="1" rIns="91425" wrap="square" tIns="91425">
+          <a:bodyPr spcFirstLastPara="1" wrap="square" lIns="91425" tIns="91425" rIns="91425" bIns="91425" anchor="t" anchorCtr="0">
             <a:noAutofit/>
           </a:bodyPr>
           <a:lstStyle/>
           <a:p>
-            <a:pPr indent="0" lvl="0" marL="0" rtl="0" algn="l">
+            <a:pPr marL="0" lvl="0" indent="0" algn="l" rtl="0">
               <a:spcBef>
                 <a:spcPts val="0"/>
               </a:spcBef>
@@ -1178,9 +1349,6 @@
               </a:spcAft>
               <a:buNone/>
             </a:pPr>
-            <a:r>
-              <a:t/>
-            </a:r>
             <a:endParaRPr/>
           </a:p>
         </p:txBody>
@@ -1194,18 +1362,19 @@
 </file>
 
 <file path=ppt/slideLayouts/slideLayout1.xml><?xml version="1.0" encoding="utf-8"?>
-<p:sldLayout xmlns:a="http://schemas.openxmlformats.org/drawingml/2006/main" xmlns:r="http://schemas.openxmlformats.org/officeDocument/2006/relationships" xmlns:mc="http://schemas.openxmlformats.org/markup-compatibility/2006" xmlns:mv="urn:schemas-microsoft-com:mac:vml" xmlns:p="http://schemas.openxmlformats.org/presentationml/2006/main" xmlns:c="http://schemas.openxmlformats.org/drawingml/2006/chart" xmlns:dgm="http://schemas.openxmlformats.org/drawingml/2006/diagram" xmlns:o="urn:schemas-microsoft-com:office:office" xmlns:v="urn:schemas-microsoft-com:vml" xmlns:pvml="urn:schemas-microsoft-com:office:powerpoint" xmlns:com="http://schemas.openxmlformats.org/drawingml/2006/compatibility" xmlns:p14="http://schemas.microsoft.com/office/powerpoint/2010/main" xmlns:p15="http://schemas.microsoft.com/office/powerpoint/2012/main" xmlns:ahyp="http://schemas.microsoft.com/office/drawing/2018/hyperlinkcolor" matchingName="Title slide" type="title">
+<p:sldLayout xmlns:a="http://schemas.openxmlformats.org/drawingml/2006/main" xmlns:r="http://schemas.openxmlformats.org/officeDocument/2006/relationships" xmlns:p="http://schemas.openxmlformats.org/presentationml/2006/main" matchingName="Title slide" type="title">
   <p:cSld name="TITLE">
     <p:bg>
       <p:bgPr>
         <a:solidFill>
           <a:schemeClr val="dk1"/>
         </a:solidFill>
+        <a:effectLst/>
       </p:bgPr>
     </p:bg>
     <p:spTree>
       <p:nvGrpSpPr>
-        <p:cNvPr id="9" name="Shape 9"/>
+        <p:cNvPr id="1" name="Shape 9"/>
         <p:cNvGrpSpPr/>
         <p:nvPr/>
       </p:nvGrpSpPr>
@@ -1239,12 +1408,12 @@
           </a:ln>
         </p:spPr>
         <p:txBody>
-          <a:bodyPr anchorCtr="0" anchor="ctr" bIns="91425" lIns="91425" spcFirstLastPara="1" rIns="91425" wrap="square" tIns="91425">
+          <a:bodyPr spcFirstLastPara="1" wrap="square" lIns="91425" tIns="91425" rIns="91425" bIns="91425" anchor="ctr" anchorCtr="0">
             <a:noAutofit/>
           </a:bodyPr>
           <a:lstStyle/>
           <a:p>
-            <a:pPr indent="0" lvl="0" marL="0" rtl="0" algn="l">
+            <a:pPr marL="0" lvl="0" indent="0" algn="l" rtl="0">
               <a:spcBef>
                 <a:spcPts val="0"/>
               </a:spcBef>
@@ -1253,9 +1422,6 @@
               </a:spcAft>
               <a:buNone/>
             </a:pPr>
-            <a:r>
-              <a:t/>
-            </a:r>
             <a:endParaRPr/>
           </a:p>
         </p:txBody>
@@ -1275,21 +1441,23 @@
             <a:avLst/>
           </a:prstGeom>
           <a:noFill/>
-          <a:ln cap="flat" cmpd="sng" w="28575">
+          <a:ln w="28575" cap="flat" cmpd="sng">
             <a:solidFill>
               <a:schemeClr val="accent1"/>
             </a:solidFill>
             <a:prstDash val="solid"/>
             <a:round/>
-            <a:headEnd len="sm" w="sm" type="none"/>
-            <a:tailEnd len="sm" w="sm" type="none"/>
+            <a:headEnd type="none" w="sm" len="sm"/>
+            <a:tailEnd type="none" w="sm" len="sm"/>
           </a:ln>
         </p:spPr>
       </p:cxnSp>
       <p:sp>
         <p:nvSpPr>
           <p:cNvPr id="12" name="Google Shape;12;p2"/>
-          <p:cNvSpPr txBox="1"/>
+          <p:cNvSpPr txBox="1">
+            <a:spLocks noGrp="1"/>
+          </p:cNvSpPr>
           <p:nvPr>
             <p:ph type="ctrTitle"/>
           </p:nvPr>
@@ -1304,7 +1472,7 @@
           </a:prstGeom>
         </p:spPr>
         <p:txBody>
-          <a:bodyPr anchorCtr="0" anchor="b" bIns="91425" lIns="91425" spcFirstLastPara="1" rIns="91425" wrap="square" tIns="91425">
+          <a:bodyPr spcFirstLastPara="1" wrap="square" lIns="91425" tIns="91425" rIns="91425" bIns="91425" anchor="b" anchorCtr="0">
             <a:noAutofit/>
           </a:bodyPr>
           <a:lstStyle>
@@ -1471,15 +1639,19 @@
               </a:defRPr>
             </a:lvl9pPr>
           </a:lstStyle>
-          <a:p/>
+          <a:p>
+            <a:endParaRPr/>
+          </a:p>
         </p:txBody>
       </p:sp>
       <p:sp>
         <p:nvSpPr>
           <p:cNvPr id="13" name="Google Shape;13;p2"/>
-          <p:cNvSpPr txBox="1"/>
+          <p:cNvSpPr txBox="1">
+            <a:spLocks noGrp="1"/>
+          </p:cNvSpPr>
           <p:nvPr>
-            <p:ph idx="1" type="subTitle"/>
+            <p:ph type="subTitle" idx="1"/>
           </p:nvPr>
         </p:nvSpPr>
         <p:spPr>
@@ -1492,7 +1664,7 @@
           </a:prstGeom>
         </p:spPr>
         <p:txBody>
-          <a:bodyPr anchorCtr="0" anchor="t" bIns="91425" lIns="91425" spcFirstLastPara="1" rIns="91425" wrap="square" tIns="91425">
+          <a:bodyPr spcFirstLastPara="1" wrap="square" lIns="91425" tIns="91425" rIns="91425" bIns="91425" anchor="t" anchorCtr="0">
             <a:noAutofit/>
           </a:bodyPr>
           <a:lstStyle>
@@ -1686,15 +1858,19 @@
               </a:defRPr>
             </a:lvl9pPr>
           </a:lstStyle>
-          <a:p/>
+          <a:p>
+            <a:endParaRPr/>
+          </a:p>
         </p:txBody>
       </p:sp>
       <p:sp>
         <p:nvSpPr>
           <p:cNvPr id="14" name="Google Shape;14;p2"/>
-          <p:cNvSpPr txBox="1"/>
+          <p:cNvSpPr txBox="1">
+            <a:spLocks noGrp="1"/>
+          </p:cNvSpPr>
           <p:nvPr>
-            <p:ph idx="12" type="sldNum"/>
+            <p:ph type="sldNum" idx="12"/>
           </p:nvPr>
         </p:nvSpPr>
         <p:spPr>
@@ -1707,7 +1883,7 @@
           </a:prstGeom>
         </p:spPr>
         <p:txBody>
-          <a:bodyPr anchorCtr="0" anchor="ctr" bIns="91425" lIns="91425" spcFirstLastPara="1" rIns="91425" wrap="square" tIns="91425">
+          <a:bodyPr spcFirstLastPara="1" wrap="square" lIns="91425" tIns="91425" rIns="91425" bIns="91425" anchor="ctr" anchorCtr="0">
             <a:noAutofit/>
           </a:bodyPr>
           <a:lstStyle>
@@ -1785,7 +1961,7 @@
             </a:lvl9pPr>
           </a:lstStyle>
           <a:p>
-            <a:pPr indent="0" lvl="0" marL="0" rtl="0" algn="r">
+            <a:pPr marL="0" lvl="0" indent="0" algn="r" rtl="0">
               <a:spcBef>
                 <a:spcPts val="0"/>
               </a:spcBef>
@@ -1796,7 +1972,7 @@
             </a:pPr>
             <a:fld id="{00000000-1234-1234-1234-123412341234}" type="slidenum">
               <a:rPr lang="it"/>
-              <a:t>‹#›</a:t>
+              <a:t>‹N›</a:t>
             </a:fld>
             <a:endParaRPr/>
           </a:p>
@@ -1811,11 +1987,11 @@
 </file>
 
 <file path=ppt/slideLayouts/slideLayout10.xml><?xml version="1.0" encoding="utf-8"?>
-<p:sldLayout xmlns:a="http://schemas.openxmlformats.org/drawingml/2006/main" xmlns:r="http://schemas.openxmlformats.org/officeDocument/2006/relationships" xmlns:mc="http://schemas.openxmlformats.org/markup-compatibility/2006" xmlns:mv="urn:schemas-microsoft-com:mac:vml" xmlns:p="http://schemas.openxmlformats.org/presentationml/2006/main" xmlns:c="http://schemas.openxmlformats.org/drawingml/2006/chart" xmlns:dgm="http://schemas.openxmlformats.org/drawingml/2006/diagram" xmlns:o="urn:schemas-microsoft-com:office:office" xmlns:v="urn:schemas-microsoft-com:vml" xmlns:pvml="urn:schemas-microsoft-com:office:powerpoint" xmlns:com="http://schemas.openxmlformats.org/drawingml/2006/compatibility" xmlns:p14="http://schemas.microsoft.com/office/powerpoint/2010/main" xmlns:p15="http://schemas.microsoft.com/office/powerpoint/2012/main" xmlns:ahyp="http://schemas.microsoft.com/office/drawing/2018/hyperlinkcolor" matchingName="Big number">
+<p:sldLayout xmlns:a="http://schemas.openxmlformats.org/drawingml/2006/main" xmlns:r="http://schemas.openxmlformats.org/officeDocument/2006/relationships" xmlns:p="http://schemas.openxmlformats.org/presentationml/2006/main" matchingName="Big number">
   <p:cSld name="BIG_NUMBER">
     <p:spTree>
       <p:nvGrpSpPr>
-        <p:cNvPr id="49" name="Shape 49"/>
+        <p:cNvPr id="1" name="Shape 49"/>
         <p:cNvGrpSpPr/>
         <p:nvPr/>
       </p:nvGrpSpPr>
@@ -1830,9 +2006,11 @@
       <p:sp>
         <p:nvSpPr>
           <p:cNvPr id="50" name="Google Shape;50;p11"/>
-          <p:cNvSpPr txBox="1"/>
+          <p:cNvSpPr txBox="1">
+            <a:spLocks noGrp="1"/>
+          </p:cNvSpPr>
           <p:nvPr>
-            <p:ph hasCustomPrompt="1" type="title"/>
+            <p:ph type="title" hasCustomPrompt="1"/>
           </p:nvPr>
         </p:nvSpPr>
         <p:spPr>
@@ -1845,7 +2023,7 @@
           </a:prstGeom>
         </p:spPr>
         <p:txBody>
-          <a:bodyPr anchorCtr="0" anchor="b" bIns="91425" lIns="91425" spcFirstLastPara="1" rIns="91425" wrap="square" tIns="91425">
+          <a:bodyPr spcFirstLastPara="1" wrap="square" lIns="91425" tIns="91425" rIns="91425" bIns="91425" anchor="b" anchorCtr="0">
             <a:noAutofit/>
           </a:bodyPr>
           <a:lstStyle>
@@ -1858,7 +2036,7 @@
               </a:spcAft>
               <a:buSzPts val="14000"/>
               <a:buNone/>
-              <a:defRPr b="1" sz="14000"/>
+              <a:defRPr sz="14000" b="1"/>
             </a:lvl1pPr>
             <a:lvl2pPr lvl="1" algn="ctr">
               <a:spcBef>
@@ -1869,7 +2047,7 @@
               </a:spcAft>
               <a:buSzPts val="14000"/>
               <a:buNone/>
-              <a:defRPr b="1" sz="14000"/>
+              <a:defRPr sz="14000" b="1"/>
             </a:lvl2pPr>
             <a:lvl3pPr lvl="2" algn="ctr">
               <a:spcBef>
@@ -1880,7 +2058,7 @@
               </a:spcAft>
               <a:buSzPts val="14000"/>
               <a:buNone/>
-              <a:defRPr b="1" sz="14000"/>
+              <a:defRPr sz="14000" b="1"/>
             </a:lvl3pPr>
             <a:lvl4pPr lvl="3" algn="ctr">
               <a:spcBef>
@@ -1891,7 +2069,7 @@
               </a:spcAft>
               <a:buSzPts val="14000"/>
               <a:buNone/>
-              <a:defRPr b="1" sz="14000"/>
+              <a:defRPr sz="14000" b="1"/>
             </a:lvl4pPr>
             <a:lvl5pPr lvl="4" algn="ctr">
               <a:spcBef>
@@ -1902,7 +2080,7 @@
               </a:spcAft>
               <a:buSzPts val="14000"/>
               <a:buNone/>
-              <a:defRPr b="1" sz="14000"/>
+              <a:defRPr sz="14000" b="1"/>
             </a:lvl5pPr>
             <a:lvl6pPr lvl="5" algn="ctr">
               <a:spcBef>
@@ -1913,7 +2091,7 @@
               </a:spcAft>
               <a:buSzPts val="14000"/>
               <a:buNone/>
-              <a:defRPr b="1" sz="14000"/>
+              <a:defRPr sz="14000" b="1"/>
             </a:lvl6pPr>
             <a:lvl7pPr lvl="6" algn="ctr">
               <a:spcBef>
@@ -1924,7 +2102,7 @@
               </a:spcAft>
               <a:buSzPts val="14000"/>
               <a:buNone/>
-              <a:defRPr b="1" sz="14000"/>
+              <a:defRPr sz="14000" b="1"/>
             </a:lvl7pPr>
             <a:lvl8pPr lvl="7" algn="ctr">
               <a:spcBef>
@@ -1935,7 +2113,7 @@
               </a:spcAft>
               <a:buSzPts val="14000"/>
               <a:buNone/>
-              <a:defRPr b="1" sz="14000"/>
+              <a:defRPr sz="14000" b="1"/>
             </a:lvl8pPr>
             <a:lvl9pPr lvl="8" algn="ctr">
               <a:spcBef>
@@ -1946,7 +2124,7 @@
               </a:spcAft>
               <a:buSzPts val="14000"/>
               <a:buNone/>
-              <a:defRPr b="1" sz="14000"/>
+              <a:defRPr sz="14000" b="1"/>
             </a:lvl9pPr>
           </a:lstStyle>
           <a:p>
@@ -1959,9 +2137,11 @@
       <p:sp>
         <p:nvSpPr>
           <p:cNvPr id="51" name="Google Shape;51;p11"/>
-          <p:cNvSpPr txBox="1"/>
+          <p:cNvSpPr txBox="1">
+            <a:spLocks noGrp="1"/>
+          </p:cNvSpPr>
           <p:nvPr>
-            <p:ph idx="1" type="body"/>
+            <p:ph type="body" idx="1"/>
           </p:nvPr>
         </p:nvSpPr>
         <p:spPr>
@@ -1974,11 +2154,11 @@
           </a:prstGeom>
         </p:spPr>
         <p:txBody>
-          <a:bodyPr anchorCtr="0" anchor="t" bIns="91425" lIns="91425" spcFirstLastPara="1" rIns="91425" wrap="square" tIns="91425">
+          <a:bodyPr spcFirstLastPara="1" wrap="square" lIns="91425" tIns="91425" rIns="91425" bIns="91425" anchor="t" anchorCtr="0">
             <a:noAutofit/>
           </a:bodyPr>
           <a:lstStyle>
-            <a:lvl1pPr indent="-342900" lvl="0" marL="457200" algn="ctr">
+            <a:lvl1pPr marL="457200" lvl="0" indent="-342900" algn="ctr">
               <a:spcBef>
                 <a:spcPts val="0"/>
               </a:spcBef>
@@ -1989,7 +2169,7 @@
               <a:buChar char="●"/>
               <a:defRPr/>
             </a:lvl1pPr>
-            <a:lvl2pPr indent="-317500" lvl="1" marL="914400" algn="ctr">
+            <a:lvl2pPr marL="914400" lvl="1" indent="-317500" algn="ctr">
               <a:spcBef>
                 <a:spcPts val="1600"/>
               </a:spcBef>
@@ -2000,7 +2180,7 @@
               <a:buChar char="○"/>
               <a:defRPr/>
             </a:lvl2pPr>
-            <a:lvl3pPr indent="-317500" lvl="2" marL="1371600" algn="ctr">
+            <a:lvl3pPr marL="1371600" lvl="2" indent="-317500" algn="ctr">
               <a:spcBef>
                 <a:spcPts val="1600"/>
               </a:spcBef>
@@ -2011,7 +2191,7 @@
               <a:buChar char="■"/>
               <a:defRPr/>
             </a:lvl3pPr>
-            <a:lvl4pPr indent="-317500" lvl="3" marL="1828800" algn="ctr">
+            <a:lvl4pPr marL="1828800" lvl="3" indent="-317500" algn="ctr">
               <a:spcBef>
                 <a:spcPts val="1600"/>
               </a:spcBef>
@@ -2022,7 +2202,7 @@
               <a:buChar char="●"/>
               <a:defRPr/>
             </a:lvl4pPr>
-            <a:lvl5pPr indent="-317500" lvl="4" marL="2286000" algn="ctr">
+            <a:lvl5pPr marL="2286000" lvl="4" indent="-317500" algn="ctr">
               <a:spcBef>
                 <a:spcPts val="1600"/>
               </a:spcBef>
@@ -2033,7 +2213,7 @@
               <a:buChar char="○"/>
               <a:defRPr/>
             </a:lvl5pPr>
-            <a:lvl6pPr indent="-317500" lvl="5" marL="2743200" algn="ctr">
+            <a:lvl6pPr marL="2743200" lvl="5" indent="-317500" algn="ctr">
               <a:spcBef>
                 <a:spcPts val="1600"/>
               </a:spcBef>
@@ -2044,7 +2224,7 @@
               <a:buChar char="■"/>
               <a:defRPr/>
             </a:lvl6pPr>
-            <a:lvl7pPr indent="-317500" lvl="6" marL="3200400" algn="ctr">
+            <a:lvl7pPr marL="3200400" lvl="6" indent="-317500" algn="ctr">
               <a:spcBef>
                 <a:spcPts val="1600"/>
               </a:spcBef>
@@ -2055,7 +2235,7 @@
               <a:buChar char="●"/>
               <a:defRPr/>
             </a:lvl7pPr>
-            <a:lvl8pPr indent="-317500" lvl="7" marL="3657600" algn="ctr">
+            <a:lvl8pPr marL="3657600" lvl="7" indent="-317500" algn="ctr">
               <a:spcBef>
                 <a:spcPts val="1600"/>
               </a:spcBef>
@@ -2066,7 +2246,7 @@
               <a:buChar char="○"/>
               <a:defRPr/>
             </a:lvl8pPr>
-            <a:lvl9pPr indent="-317500" lvl="8" marL="4114800" algn="ctr">
+            <a:lvl9pPr marL="4114800" lvl="8" indent="-317500" algn="ctr">
               <a:spcBef>
                 <a:spcPts val="1600"/>
               </a:spcBef>
@@ -2078,15 +2258,19 @@
               <a:defRPr/>
             </a:lvl9pPr>
           </a:lstStyle>
-          <a:p/>
+          <a:p>
+            <a:endParaRPr/>
+          </a:p>
         </p:txBody>
       </p:sp>
       <p:sp>
         <p:nvSpPr>
           <p:cNvPr id="52" name="Google Shape;52;p11"/>
-          <p:cNvSpPr txBox="1"/>
+          <p:cNvSpPr txBox="1">
+            <a:spLocks noGrp="1"/>
+          </p:cNvSpPr>
           <p:nvPr>
-            <p:ph idx="12" type="sldNum"/>
+            <p:ph type="sldNum" idx="12"/>
           </p:nvPr>
         </p:nvSpPr>
         <p:spPr>
@@ -2099,7 +2283,7 @@
           </a:prstGeom>
         </p:spPr>
         <p:txBody>
-          <a:bodyPr anchorCtr="0" anchor="ctr" bIns="91425" lIns="91425" spcFirstLastPara="1" rIns="91425" wrap="square" tIns="91425">
+          <a:bodyPr spcFirstLastPara="1" wrap="square" lIns="91425" tIns="91425" rIns="91425" bIns="91425" anchor="ctr" anchorCtr="0">
             <a:noAutofit/>
           </a:bodyPr>
           <a:lstStyle>
@@ -2141,7 +2325,7 @@
             </a:lvl9pPr>
           </a:lstStyle>
           <a:p>
-            <a:pPr indent="0" lvl="0" marL="0" rtl="0" algn="r">
+            <a:pPr marL="0" lvl="0" indent="0" algn="r" rtl="0">
               <a:spcBef>
                 <a:spcPts val="0"/>
               </a:spcBef>
@@ -2152,7 +2336,7 @@
             </a:pPr>
             <a:fld id="{00000000-1234-1234-1234-123412341234}" type="slidenum">
               <a:rPr lang="it"/>
-              <a:t>‹#›</a:t>
+              <a:t>‹N›</a:t>
             </a:fld>
             <a:endParaRPr/>
           </a:p>
@@ -2167,11 +2351,11 @@
 </file>
 
 <file path=ppt/slideLayouts/slideLayout11.xml><?xml version="1.0" encoding="utf-8"?>
-<p:sldLayout xmlns:a="http://schemas.openxmlformats.org/drawingml/2006/main" xmlns:r="http://schemas.openxmlformats.org/officeDocument/2006/relationships" xmlns:mc="http://schemas.openxmlformats.org/markup-compatibility/2006" xmlns:mv="urn:schemas-microsoft-com:mac:vml" xmlns:p="http://schemas.openxmlformats.org/presentationml/2006/main" xmlns:c="http://schemas.openxmlformats.org/drawingml/2006/chart" xmlns:dgm="http://schemas.openxmlformats.org/drawingml/2006/diagram" xmlns:o="urn:schemas-microsoft-com:office:office" xmlns:v="urn:schemas-microsoft-com:vml" xmlns:pvml="urn:schemas-microsoft-com:office:powerpoint" xmlns:com="http://schemas.openxmlformats.org/drawingml/2006/compatibility" xmlns:p14="http://schemas.microsoft.com/office/powerpoint/2010/main" xmlns:p15="http://schemas.microsoft.com/office/powerpoint/2012/main" xmlns:ahyp="http://schemas.microsoft.com/office/drawing/2018/hyperlinkcolor" matchingName="Blank" type="blank">
+<p:sldLayout xmlns:a="http://schemas.openxmlformats.org/drawingml/2006/main" xmlns:r="http://schemas.openxmlformats.org/officeDocument/2006/relationships" xmlns:p="http://schemas.openxmlformats.org/presentationml/2006/main" matchingName="Blank" type="blank">
   <p:cSld name="BLANK">
     <p:spTree>
       <p:nvGrpSpPr>
-        <p:cNvPr id="53" name="Shape 53"/>
+        <p:cNvPr id="1" name="Shape 53"/>
         <p:cNvGrpSpPr/>
         <p:nvPr/>
       </p:nvGrpSpPr>
@@ -2186,9 +2370,11 @@
       <p:sp>
         <p:nvSpPr>
           <p:cNvPr id="54" name="Google Shape;54;p12"/>
-          <p:cNvSpPr txBox="1"/>
+          <p:cNvSpPr txBox="1">
+            <a:spLocks noGrp="1"/>
+          </p:cNvSpPr>
           <p:nvPr>
-            <p:ph idx="12" type="sldNum"/>
+            <p:ph type="sldNum" idx="12"/>
           </p:nvPr>
         </p:nvSpPr>
         <p:spPr>
@@ -2201,7 +2387,7 @@
           </a:prstGeom>
         </p:spPr>
         <p:txBody>
-          <a:bodyPr anchorCtr="0" anchor="ctr" bIns="91425" lIns="91425" spcFirstLastPara="1" rIns="91425" wrap="square" tIns="91425">
+          <a:bodyPr spcFirstLastPara="1" wrap="square" lIns="91425" tIns="91425" rIns="91425" bIns="91425" anchor="ctr" anchorCtr="0">
             <a:noAutofit/>
           </a:bodyPr>
           <a:lstStyle>
@@ -2243,7 +2429,7 @@
             </a:lvl9pPr>
           </a:lstStyle>
           <a:p>
-            <a:pPr indent="0" lvl="0" marL="0" rtl="0" algn="r">
+            <a:pPr marL="0" lvl="0" indent="0" algn="r" rtl="0">
               <a:spcBef>
                 <a:spcPts val="0"/>
               </a:spcBef>
@@ -2254,7 +2440,7 @@
             </a:pPr>
             <a:fld id="{00000000-1234-1234-1234-123412341234}" type="slidenum">
               <a:rPr lang="it"/>
-              <a:t>‹#›</a:t>
+              <a:t>‹N›</a:t>
             </a:fld>
             <a:endParaRPr/>
           </a:p>
@@ -2269,18 +2455,19 @@
 </file>
 
 <file path=ppt/slideLayouts/slideLayout2.xml><?xml version="1.0" encoding="utf-8"?>
-<p:sldLayout xmlns:a="http://schemas.openxmlformats.org/drawingml/2006/main" xmlns:r="http://schemas.openxmlformats.org/officeDocument/2006/relationships" xmlns:mc="http://schemas.openxmlformats.org/markup-compatibility/2006" xmlns:mv="urn:schemas-microsoft-com:mac:vml" xmlns:p="http://schemas.openxmlformats.org/presentationml/2006/main" xmlns:c="http://schemas.openxmlformats.org/drawingml/2006/chart" xmlns:dgm="http://schemas.openxmlformats.org/drawingml/2006/diagram" xmlns:o="urn:schemas-microsoft-com:office:office" xmlns:v="urn:schemas-microsoft-com:vml" xmlns:pvml="urn:schemas-microsoft-com:office:powerpoint" xmlns:com="http://schemas.openxmlformats.org/drawingml/2006/compatibility" xmlns:p14="http://schemas.microsoft.com/office/powerpoint/2010/main" xmlns:p15="http://schemas.microsoft.com/office/powerpoint/2012/main" xmlns:ahyp="http://schemas.microsoft.com/office/drawing/2018/hyperlinkcolor" matchingName="Section header" type="secHead">
+<p:sldLayout xmlns:a="http://schemas.openxmlformats.org/drawingml/2006/main" xmlns:r="http://schemas.openxmlformats.org/officeDocument/2006/relationships" xmlns:p="http://schemas.openxmlformats.org/presentationml/2006/main" matchingName="Section header" type="secHead">
   <p:cSld name="SECTION_HEADER">
     <p:bg>
       <p:bgPr>
         <a:solidFill>
           <a:schemeClr val="dk1"/>
         </a:solidFill>
+        <a:effectLst/>
       </p:bgPr>
     </p:bg>
     <p:spTree>
       <p:nvGrpSpPr>
-        <p:cNvPr id="15" name="Shape 15"/>
+        <p:cNvPr id="1" name="Shape 15"/>
         <p:cNvGrpSpPr/>
         <p:nvPr/>
       </p:nvGrpSpPr>
@@ -2307,21 +2494,23 @@
             <a:avLst/>
           </a:prstGeom>
           <a:noFill/>
-          <a:ln cap="flat" cmpd="sng" w="28575">
+          <a:ln w="28575" cap="flat" cmpd="sng">
             <a:solidFill>
               <a:schemeClr val="lt2"/>
             </a:solidFill>
             <a:prstDash val="solid"/>
             <a:round/>
-            <a:headEnd len="sm" w="sm" type="none"/>
-            <a:tailEnd len="sm" w="sm" type="none"/>
+            <a:headEnd type="none" w="sm" len="sm"/>
+            <a:tailEnd type="none" w="sm" len="sm"/>
           </a:ln>
         </p:spPr>
       </p:cxnSp>
       <p:sp>
         <p:nvSpPr>
           <p:cNvPr id="17" name="Google Shape;17;p3"/>
-          <p:cNvSpPr txBox="1"/>
+          <p:cNvSpPr txBox="1">
+            <a:spLocks noGrp="1"/>
+          </p:cNvSpPr>
           <p:nvPr>
             <p:ph type="title"/>
           </p:nvPr>
@@ -2336,7 +2525,7 @@
           </a:prstGeom>
         </p:spPr>
         <p:txBody>
-          <a:bodyPr anchorCtr="0" anchor="b" bIns="91425" lIns="91425" spcFirstLastPara="1" rIns="91425" wrap="square" tIns="91425">
+          <a:bodyPr spcFirstLastPara="1" wrap="square" lIns="91425" tIns="91425" rIns="91425" bIns="91425" anchor="b" anchorCtr="0">
             <a:noAutofit/>
           </a:bodyPr>
           <a:lstStyle>
@@ -2503,15 +2692,19 @@
               </a:defRPr>
             </a:lvl9pPr>
           </a:lstStyle>
-          <a:p/>
+          <a:p>
+            <a:endParaRPr/>
+          </a:p>
         </p:txBody>
       </p:sp>
       <p:sp>
         <p:nvSpPr>
           <p:cNvPr id="18" name="Google Shape;18;p3"/>
-          <p:cNvSpPr txBox="1"/>
+          <p:cNvSpPr txBox="1">
+            <a:spLocks noGrp="1"/>
+          </p:cNvSpPr>
           <p:nvPr>
-            <p:ph idx="12" type="sldNum"/>
+            <p:ph type="sldNum" idx="12"/>
           </p:nvPr>
         </p:nvSpPr>
         <p:spPr>
@@ -2524,7 +2717,7 @@
           </a:prstGeom>
         </p:spPr>
         <p:txBody>
-          <a:bodyPr anchorCtr="0" anchor="ctr" bIns="91425" lIns="91425" spcFirstLastPara="1" rIns="91425" wrap="square" tIns="91425">
+          <a:bodyPr spcFirstLastPara="1" wrap="square" lIns="91425" tIns="91425" rIns="91425" bIns="91425" anchor="ctr" anchorCtr="0">
             <a:noAutofit/>
           </a:bodyPr>
           <a:lstStyle>
@@ -2602,7 +2795,7 @@
             </a:lvl9pPr>
           </a:lstStyle>
           <a:p>
-            <a:pPr indent="0" lvl="0" marL="0" rtl="0" algn="r">
+            <a:pPr marL="0" lvl="0" indent="0" algn="r" rtl="0">
               <a:spcBef>
                 <a:spcPts val="0"/>
               </a:spcBef>
@@ -2613,7 +2806,7 @@
             </a:pPr>
             <a:fld id="{00000000-1234-1234-1234-123412341234}" type="slidenum">
               <a:rPr lang="it"/>
-              <a:t>‹#›</a:t>
+              <a:t>‹N›</a:t>
             </a:fld>
             <a:endParaRPr/>
           </a:p>
@@ -2628,11 +2821,11 @@
 </file>
 
 <file path=ppt/slideLayouts/slideLayout3.xml><?xml version="1.0" encoding="utf-8"?>
-<p:sldLayout xmlns:a="http://schemas.openxmlformats.org/drawingml/2006/main" xmlns:r="http://schemas.openxmlformats.org/officeDocument/2006/relationships" xmlns:mc="http://schemas.openxmlformats.org/markup-compatibility/2006" xmlns:mv="urn:schemas-microsoft-com:mac:vml" xmlns:p="http://schemas.openxmlformats.org/presentationml/2006/main" xmlns:c="http://schemas.openxmlformats.org/drawingml/2006/chart" xmlns:dgm="http://schemas.openxmlformats.org/drawingml/2006/diagram" xmlns:o="urn:schemas-microsoft-com:office:office" xmlns:v="urn:schemas-microsoft-com:vml" xmlns:pvml="urn:schemas-microsoft-com:office:powerpoint" xmlns:com="http://schemas.openxmlformats.org/drawingml/2006/compatibility" xmlns:p14="http://schemas.microsoft.com/office/powerpoint/2010/main" xmlns:p15="http://schemas.microsoft.com/office/powerpoint/2012/main" xmlns:ahyp="http://schemas.microsoft.com/office/drawing/2018/hyperlinkcolor" matchingName="Title and body" type="tx">
+<p:sldLayout xmlns:a="http://schemas.openxmlformats.org/drawingml/2006/main" xmlns:r="http://schemas.openxmlformats.org/officeDocument/2006/relationships" xmlns:p="http://schemas.openxmlformats.org/presentationml/2006/main" matchingName="Title and body" type="tx">
   <p:cSld name="TITLE_AND_BODY">
     <p:spTree>
       <p:nvGrpSpPr>
-        <p:cNvPr id="19" name="Shape 19"/>
+        <p:cNvPr id="1" name="Shape 19"/>
         <p:cNvGrpSpPr/>
         <p:nvPr/>
       </p:nvGrpSpPr>
@@ -2666,12 +2859,12 @@
           </a:ln>
         </p:spPr>
         <p:txBody>
-          <a:bodyPr anchorCtr="0" anchor="ctr" bIns="91425" lIns="91425" spcFirstLastPara="1" rIns="91425" wrap="square" tIns="91425">
+          <a:bodyPr spcFirstLastPara="1" wrap="square" lIns="91425" tIns="91425" rIns="91425" bIns="91425" anchor="ctr" anchorCtr="0">
             <a:noAutofit/>
           </a:bodyPr>
           <a:lstStyle/>
           <a:p>
-            <a:pPr indent="0" lvl="0" marL="0" rtl="0" algn="l">
+            <a:pPr marL="0" lvl="0" indent="0" algn="l" rtl="0">
               <a:spcBef>
                 <a:spcPts val="0"/>
               </a:spcBef>
@@ -2680,9 +2873,6 @@
               </a:spcAft>
               <a:buNone/>
             </a:pPr>
-            <a:r>
-              <a:t/>
-            </a:r>
             <a:endParaRPr/>
           </a:p>
         </p:txBody>
@@ -2690,7 +2880,9 @@
       <p:sp>
         <p:nvSpPr>
           <p:cNvPr id="21" name="Google Shape;21;p4"/>
-          <p:cNvSpPr txBox="1"/>
+          <p:cNvSpPr txBox="1">
+            <a:spLocks noGrp="1"/>
+          </p:cNvSpPr>
           <p:nvPr>
             <p:ph type="title"/>
           </p:nvPr>
@@ -2705,7 +2897,7 @@
           </a:prstGeom>
         </p:spPr>
         <p:txBody>
-          <a:bodyPr anchorCtr="0" anchor="t" bIns="91425" lIns="91425" spcFirstLastPara="1" rIns="91425" wrap="square" tIns="91425">
+          <a:bodyPr spcFirstLastPara="1" wrap="square" lIns="91425" tIns="91425" rIns="91425" bIns="91425" anchor="t" anchorCtr="0">
             <a:noAutofit/>
           </a:bodyPr>
           <a:lstStyle>
@@ -2809,15 +3001,19 @@
               <a:defRPr/>
             </a:lvl9pPr>
           </a:lstStyle>
-          <a:p/>
+          <a:p>
+            <a:endParaRPr/>
+          </a:p>
         </p:txBody>
       </p:sp>
       <p:sp>
         <p:nvSpPr>
           <p:cNvPr id="22" name="Google Shape;22;p4"/>
-          <p:cNvSpPr txBox="1"/>
+          <p:cNvSpPr txBox="1">
+            <a:spLocks noGrp="1"/>
+          </p:cNvSpPr>
           <p:nvPr>
-            <p:ph idx="1" type="body"/>
+            <p:ph type="body" idx="1"/>
           </p:nvPr>
         </p:nvSpPr>
         <p:spPr>
@@ -2830,11 +3026,11 @@
           </a:prstGeom>
         </p:spPr>
         <p:txBody>
-          <a:bodyPr anchorCtr="0" anchor="t" bIns="91425" lIns="91425" spcFirstLastPara="1" rIns="91425" wrap="square" tIns="91425">
+          <a:bodyPr spcFirstLastPara="1" wrap="square" lIns="91425" tIns="91425" rIns="91425" bIns="91425" anchor="t" anchorCtr="0">
             <a:noAutofit/>
           </a:bodyPr>
           <a:lstStyle>
-            <a:lvl1pPr indent="-342900" lvl="0" marL="457200">
+            <a:lvl1pPr marL="457200" lvl="0" indent="-342900">
               <a:spcBef>
                 <a:spcPts val="0"/>
               </a:spcBef>
@@ -2845,7 +3041,7 @@
               <a:buChar char="●"/>
               <a:defRPr/>
             </a:lvl1pPr>
-            <a:lvl2pPr indent="-317500" lvl="1" marL="914400">
+            <a:lvl2pPr marL="914400" lvl="1" indent="-317500">
               <a:spcBef>
                 <a:spcPts val="1600"/>
               </a:spcBef>
@@ -2856,7 +3052,7 @@
               <a:buChar char="○"/>
               <a:defRPr/>
             </a:lvl2pPr>
-            <a:lvl3pPr indent="-317500" lvl="2" marL="1371600">
+            <a:lvl3pPr marL="1371600" lvl="2" indent="-317500">
               <a:spcBef>
                 <a:spcPts val="1600"/>
               </a:spcBef>
@@ -2867,7 +3063,7 @@
               <a:buChar char="■"/>
               <a:defRPr/>
             </a:lvl3pPr>
-            <a:lvl4pPr indent="-317500" lvl="3" marL="1828800">
+            <a:lvl4pPr marL="1828800" lvl="3" indent="-317500">
               <a:spcBef>
                 <a:spcPts val="1600"/>
               </a:spcBef>
@@ -2878,7 +3074,7 @@
               <a:buChar char="●"/>
               <a:defRPr/>
             </a:lvl4pPr>
-            <a:lvl5pPr indent="-317500" lvl="4" marL="2286000">
+            <a:lvl5pPr marL="2286000" lvl="4" indent="-317500">
               <a:spcBef>
                 <a:spcPts val="1600"/>
               </a:spcBef>
@@ -2889,7 +3085,7 @@
               <a:buChar char="○"/>
               <a:defRPr/>
             </a:lvl5pPr>
-            <a:lvl6pPr indent="-317500" lvl="5" marL="2743200">
+            <a:lvl6pPr marL="2743200" lvl="5" indent="-317500">
               <a:spcBef>
                 <a:spcPts val="1600"/>
               </a:spcBef>
@@ -2900,7 +3096,7 @@
               <a:buChar char="■"/>
               <a:defRPr/>
             </a:lvl6pPr>
-            <a:lvl7pPr indent="-317500" lvl="6" marL="3200400">
+            <a:lvl7pPr marL="3200400" lvl="6" indent="-317500">
               <a:spcBef>
                 <a:spcPts val="1600"/>
               </a:spcBef>
@@ -2911,7 +3107,7 @@
               <a:buChar char="●"/>
               <a:defRPr/>
             </a:lvl7pPr>
-            <a:lvl8pPr indent="-317500" lvl="7" marL="3657600">
+            <a:lvl8pPr marL="3657600" lvl="7" indent="-317500">
               <a:spcBef>
                 <a:spcPts val="1600"/>
               </a:spcBef>
@@ -2922,7 +3118,7 @@
               <a:buChar char="○"/>
               <a:defRPr/>
             </a:lvl8pPr>
-            <a:lvl9pPr indent="-317500" lvl="8" marL="4114800">
+            <a:lvl9pPr marL="4114800" lvl="8" indent="-317500">
               <a:spcBef>
                 <a:spcPts val="1600"/>
               </a:spcBef>
@@ -2934,15 +3130,19 @@
               <a:defRPr/>
             </a:lvl9pPr>
           </a:lstStyle>
-          <a:p/>
+          <a:p>
+            <a:endParaRPr/>
+          </a:p>
         </p:txBody>
       </p:sp>
       <p:sp>
         <p:nvSpPr>
           <p:cNvPr id="23" name="Google Shape;23;p4"/>
-          <p:cNvSpPr txBox="1"/>
+          <p:cNvSpPr txBox="1">
+            <a:spLocks noGrp="1"/>
+          </p:cNvSpPr>
           <p:nvPr>
-            <p:ph idx="12" type="sldNum"/>
+            <p:ph type="sldNum" idx="12"/>
           </p:nvPr>
         </p:nvSpPr>
         <p:spPr>
@@ -2955,7 +3155,7 @@
           </a:prstGeom>
         </p:spPr>
         <p:txBody>
-          <a:bodyPr anchorCtr="0" anchor="ctr" bIns="91425" lIns="91425" spcFirstLastPara="1" rIns="91425" wrap="square" tIns="91425">
+          <a:bodyPr spcFirstLastPara="1" wrap="square" lIns="91425" tIns="91425" rIns="91425" bIns="91425" anchor="ctr" anchorCtr="0">
             <a:noAutofit/>
           </a:bodyPr>
           <a:lstStyle>
@@ -2997,7 +3197,7 @@
             </a:lvl9pPr>
           </a:lstStyle>
           <a:p>
-            <a:pPr indent="0" lvl="0" marL="0" rtl="0" algn="r">
+            <a:pPr marL="0" lvl="0" indent="0" algn="r" rtl="0">
               <a:spcBef>
                 <a:spcPts val="0"/>
               </a:spcBef>
@@ -3008,7 +3208,7 @@
             </a:pPr>
             <a:fld id="{00000000-1234-1234-1234-123412341234}" type="slidenum">
               <a:rPr lang="it"/>
-              <a:t>‹#›</a:t>
+              <a:t>‹N›</a:t>
             </a:fld>
             <a:endParaRPr/>
           </a:p>
@@ -3023,11 +3223,11 @@
 </file>
 
 <file path=ppt/slideLayouts/slideLayout4.xml><?xml version="1.0" encoding="utf-8"?>
-<p:sldLayout xmlns:a="http://schemas.openxmlformats.org/drawingml/2006/main" xmlns:r="http://schemas.openxmlformats.org/officeDocument/2006/relationships" xmlns:mc="http://schemas.openxmlformats.org/markup-compatibility/2006" xmlns:mv="urn:schemas-microsoft-com:mac:vml" xmlns:p="http://schemas.openxmlformats.org/presentationml/2006/main" xmlns:c="http://schemas.openxmlformats.org/drawingml/2006/chart" xmlns:dgm="http://schemas.openxmlformats.org/drawingml/2006/diagram" xmlns:o="urn:schemas-microsoft-com:office:office" xmlns:v="urn:schemas-microsoft-com:vml" xmlns:pvml="urn:schemas-microsoft-com:office:powerpoint" xmlns:com="http://schemas.openxmlformats.org/drawingml/2006/compatibility" xmlns:p14="http://schemas.microsoft.com/office/powerpoint/2010/main" xmlns:p15="http://schemas.microsoft.com/office/powerpoint/2012/main" xmlns:ahyp="http://schemas.microsoft.com/office/drawing/2018/hyperlinkcolor" matchingName="Title and two columns" type="twoColTx">
+<p:sldLayout xmlns:a="http://schemas.openxmlformats.org/drawingml/2006/main" xmlns:r="http://schemas.openxmlformats.org/officeDocument/2006/relationships" xmlns:p="http://schemas.openxmlformats.org/presentationml/2006/main" matchingName="Title and two columns" type="twoColTx">
   <p:cSld name="TITLE_AND_TWO_COLUMNS">
     <p:spTree>
       <p:nvGrpSpPr>
-        <p:cNvPr id="24" name="Shape 24"/>
+        <p:cNvPr id="1" name="Shape 24"/>
         <p:cNvGrpSpPr/>
         <p:nvPr/>
       </p:nvGrpSpPr>
@@ -3042,7 +3242,9 @@
       <p:sp>
         <p:nvSpPr>
           <p:cNvPr id="25" name="Google Shape;25;p5"/>
-          <p:cNvSpPr txBox="1"/>
+          <p:cNvSpPr txBox="1">
+            <a:spLocks noGrp="1"/>
+          </p:cNvSpPr>
           <p:nvPr>
             <p:ph type="title"/>
           </p:nvPr>
@@ -3057,7 +3259,7 @@
           </a:prstGeom>
         </p:spPr>
         <p:txBody>
-          <a:bodyPr anchorCtr="0" anchor="t" bIns="91425" lIns="91425" spcFirstLastPara="1" rIns="91425" wrap="square" tIns="91425">
+          <a:bodyPr spcFirstLastPara="1" wrap="square" lIns="91425" tIns="91425" rIns="91425" bIns="91425" anchor="t" anchorCtr="0">
             <a:noAutofit/>
           </a:bodyPr>
           <a:lstStyle>
@@ -3161,15 +3363,19 @@
               <a:defRPr/>
             </a:lvl9pPr>
           </a:lstStyle>
-          <a:p/>
+          <a:p>
+            <a:endParaRPr/>
+          </a:p>
         </p:txBody>
       </p:sp>
       <p:sp>
         <p:nvSpPr>
           <p:cNvPr id="26" name="Google Shape;26;p5"/>
-          <p:cNvSpPr txBox="1"/>
+          <p:cNvSpPr txBox="1">
+            <a:spLocks noGrp="1"/>
+          </p:cNvSpPr>
           <p:nvPr>
-            <p:ph idx="1" type="body"/>
+            <p:ph type="body" idx="1"/>
           </p:nvPr>
         </p:nvSpPr>
         <p:spPr>
@@ -3182,11 +3388,11 @@
           </a:prstGeom>
         </p:spPr>
         <p:txBody>
-          <a:bodyPr anchorCtr="0" anchor="t" bIns="91425" lIns="91425" spcFirstLastPara="1" rIns="91425" wrap="square" tIns="91425">
+          <a:bodyPr spcFirstLastPara="1" wrap="square" lIns="91425" tIns="91425" rIns="91425" bIns="91425" anchor="t" anchorCtr="0">
             <a:noAutofit/>
           </a:bodyPr>
           <a:lstStyle>
-            <a:lvl1pPr indent="-317500" lvl="0" marL="457200">
+            <a:lvl1pPr marL="457200" lvl="0" indent="-317500">
               <a:spcBef>
                 <a:spcPts val="0"/>
               </a:spcBef>
@@ -3197,7 +3403,7 @@
               <a:buChar char="●"/>
               <a:defRPr sz="1400"/>
             </a:lvl1pPr>
-            <a:lvl2pPr indent="-304800" lvl="1" marL="914400">
+            <a:lvl2pPr marL="914400" lvl="1" indent="-304800">
               <a:spcBef>
                 <a:spcPts val="1600"/>
               </a:spcBef>
@@ -3208,7 +3414,7 @@
               <a:buChar char="○"/>
               <a:defRPr sz="1200"/>
             </a:lvl2pPr>
-            <a:lvl3pPr indent="-304800" lvl="2" marL="1371600">
+            <a:lvl3pPr marL="1371600" lvl="2" indent="-304800">
               <a:spcBef>
                 <a:spcPts val="1600"/>
               </a:spcBef>
@@ -3219,7 +3425,7 @@
               <a:buChar char="■"/>
               <a:defRPr sz="1200"/>
             </a:lvl3pPr>
-            <a:lvl4pPr indent="-304800" lvl="3" marL="1828800">
+            <a:lvl4pPr marL="1828800" lvl="3" indent="-304800">
               <a:spcBef>
                 <a:spcPts val="1600"/>
               </a:spcBef>
@@ -3230,7 +3436,7 @@
               <a:buChar char="●"/>
               <a:defRPr sz="1200"/>
             </a:lvl4pPr>
-            <a:lvl5pPr indent="-304800" lvl="4" marL="2286000">
+            <a:lvl5pPr marL="2286000" lvl="4" indent="-304800">
               <a:spcBef>
                 <a:spcPts val="1600"/>
               </a:spcBef>
@@ -3241,7 +3447,7 @@
               <a:buChar char="○"/>
               <a:defRPr sz="1200"/>
             </a:lvl5pPr>
-            <a:lvl6pPr indent="-304800" lvl="5" marL="2743200">
+            <a:lvl6pPr marL="2743200" lvl="5" indent="-304800">
               <a:spcBef>
                 <a:spcPts val="1600"/>
               </a:spcBef>
@@ -3252,7 +3458,7 @@
               <a:buChar char="■"/>
               <a:defRPr sz="1200"/>
             </a:lvl6pPr>
-            <a:lvl7pPr indent="-304800" lvl="6" marL="3200400">
+            <a:lvl7pPr marL="3200400" lvl="6" indent="-304800">
               <a:spcBef>
                 <a:spcPts val="1600"/>
               </a:spcBef>
@@ -3263,7 +3469,7 @@
               <a:buChar char="●"/>
               <a:defRPr sz="1200"/>
             </a:lvl7pPr>
-            <a:lvl8pPr indent="-304800" lvl="7" marL="3657600">
+            <a:lvl8pPr marL="3657600" lvl="7" indent="-304800">
               <a:spcBef>
                 <a:spcPts val="1600"/>
               </a:spcBef>
@@ -3274,7 +3480,7 @@
               <a:buChar char="○"/>
               <a:defRPr sz="1200"/>
             </a:lvl8pPr>
-            <a:lvl9pPr indent="-304800" lvl="8" marL="4114800">
+            <a:lvl9pPr marL="4114800" lvl="8" indent="-304800">
               <a:spcBef>
                 <a:spcPts val="1600"/>
               </a:spcBef>
@@ -3286,15 +3492,19 @@
               <a:defRPr sz="1200"/>
             </a:lvl9pPr>
           </a:lstStyle>
-          <a:p/>
+          <a:p>
+            <a:endParaRPr/>
+          </a:p>
         </p:txBody>
       </p:sp>
       <p:sp>
         <p:nvSpPr>
           <p:cNvPr id="27" name="Google Shape;27;p5"/>
-          <p:cNvSpPr txBox="1"/>
+          <p:cNvSpPr txBox="1">
+            <a:spLocks noGrp="1"/>
+          </p:cNvSpPr>
           <p:nvPr>
-            <p:ph idx="2" type="body"/>
+            <p:ph type="body" idx="2"/>
           </p:nvPr>
         </p:nvSpPr>
         <p:spPr>
@@ -3307,11 +3517,11 @@
           </a:prstGeom>
         </p:spPr>
         <p:txBody>
-          <a:bodyPr anchorCtr="0" anchor="t" bIns="91425" lIns="91425" spcFirstLastPara="1" rIns="91425" wrap="square" tIns="91425">
+          <a:bodyPr spcFirstLastPara="1" wrap="square" lIns="91425" tIns="91425" rIns="91425" bIns="91425" anchor="t" anchorCtr="0">
             <a:noAutofit/>
           </a:bodyPr>
           <a:lstStyle>
-            <a:lvl1pPr indent="-317500" lvl="0" marL="457200">
+            <a:lvl1pPr marL="457200" lvl="0" indent="-317500">
               <a:spcBef>
                 <a:spcPts val="0"/>
               </a:spcBef>
@@ -3322,7 +3532,7 @@
               <a:buChar char="●"/>
               <a:defRPr sz="1400"/>
             </a:lvl1pPr>
-            <a:lvl2pPr indent="-304800" lvl="1" marL="914400">
+            <a:lvl2pPr marL="914400" lvl="1" indent="-304800">
               <a:spcBef>
                 <a:spcPts val="1600"/>
               </a:spcBef>
@@ -3333,7 +3543,7 @@
               <a:buChar char="○"/>
               <a:defRPr sz="1200"/>
             </a:lvl2pPr>
-            <a:lvl3pPr indent="-304800" lvl="2" marL="1371600">
+            <a:lvl3pPr marL="1371600" lvl="2" indent="-304800">
               <a:spcBef>
                 <a:spcPts val="1600"/>
               </a:spcBef>
@@ -3344,7 +3554,7 @@
               <a:buChar char="■"/>
               <a:defRPr sz="1200"/>
             </a:lvl3pPr>
-            <a:lvl4pPr indent="-304800" lvl="3" marL="1828800">
+            <a:lvl4pPr marL="1828800" lvl="3" indent="-304800">
               <a:spcBef>
                 <a:spcPts val="1600"/>
               </a:spcBef>
@@ -3355,7 +3565,7 @@
               <a:buChar char="●"/>
               <a:defRPr sz="1200"/>
             </a:lvl4pPr>
-            <a:lvl5pPr indent="-304800" lvl="4" marL="2286000">
+            <a:lvl5pPr marL="2286000" lvl="4" indent="-304800">
               <a:spcBef>
                 <a:spcPts val="1600"/>
               </a:spcBef>
@@ -3366,7 +3576,7 @@
               <a:buChar char="○"/>
               <a:defRPr sz="1200"/>
             </a:lvl5pPr>
-            <a:lvl6pPr indent="-304800" lvl="5" marL="2743200">
+            <a:lvl6pPr marL="2743200" lvl="5" indent="-304800">
               <a:spcBef>
                 <a:spcPts val="1600"/>
               </a:spcBef>
@@ -3377,7 +3587,7 @@
               <a:buChar char="■"/>
               <a:defRPr sz="1200"/>
             </a:lvl6pPr>
-            <a:lvl7pPr indent="-304800" lvl="6" marL="3200400">
+            <a:lvl7pPr marL="3200400" lvl="6" indent="-304800">
               <a:spcBef>
                 <a:spcPts val="1600"/>
               </a:spcBef>
@@ -3388,7 +3598,7 @@
               <a:buChar char="●"/>
               <a:defRPr sz="1200"/>
             </a:lvl7pPr>
-            <a:lvl8pPr indent="-304800" lvl="7" marL="3657600">
+            <a:lvl8pPr marL="3657600" lvl="7" indent="-304800">
               <a:spcBef>
                 <a:spcPts val="1600"/>
               </a:spcBef>
@@ -3399,7 +3609,7 @@
               <a:buChar char="○"/>
               <a:defRPr sz="1200"/>
             </a:lvl8pPr>
-            <a:lvl9pPr indent="-304800" lvl="8" marL="4114800">
+            <a:lvl9pPr marL="4114800" lvl="8" indent="-304800">
               <a:spcBef>
                 <a:spcPts val="1600"/>
               </a:spcBef>
@@ -3411,15 +3621,19 @@
               <a:defRPr sz="1200"/>
             </a:lvl9pPr>
           </a:lstStyle>
-          <a:p/>
+          <a:p>
+            <a:endParaRPr/>
+          </a:p>
         </p:txBody>
       </p:sp>
       <p:sp>
         <p:nvSpPr>
           <p:cNvPr id="28" name="Google Shape;28;p5"/>
-          <p:cNvSpPr txBox="1"/>
+          <p:cNvSpPr txBox="1">
+            <a:spLocks noGrp="1"/>
+          </p:cNvSpPr>
           <p:nvPr>
-            <p:ph idx="12" type="sldNum"/>
+            <p:ph type="sldNum" idx="12"/>
           </p:nvPr>
         </p:nvSpPr>
         <p:spPr>
@@ -3432,7 +3646,7 @@
           </a:prstGeom>
         </p:spPr>
         <p:txBody>
-          <a:bodyPr anchorCtr="0" anchor="ctr" bIns="91425" lIns="91425" spcFirstLastPara="1" rIns="91425" wrap="square" tIns="91425">
+          <a:bodyPr spcFirstLastPara="1" wrap="square" lIns="91425" tIns="91425" rIns="91425" bIns="91425" anchor="ctr" anchorCtr="0">
             <a:noAutofit/>
           </a:bodyPr>
           <a:lstStyle>
@@ -3474,7 +3688,7 @@
             </a:lvl9pPr>
           </a:lstStyle>
           <a:p>
-            <a:pPr indent="0" lvl="0" marL="0" rtl="0" algn="r">
+            <a:pPr marL="0" lvl="0" indent="0" algn="r" rtl="0">
               <a:spcBef>
                 <a:spcPts val="0"/>
               </a:spcBef>
@@ -3485,7 +3699,7 @@
             </a:pPr>
             <a:fld id="{00000000-1234-1234-1234-123412341234}" type="slidenum">
               <a:rPr lang="it"/>
-              <a:t>‹#›</a:t>
+              <a:t>‹N›</a:t>
             </a:fld>
             <a:endParaRPr/>
           </a:p>
@@ -3500,11 +3714,11 @@
 </file>
 
 <file path=ppt/slideLayouts/slideLayout5.xml><?xml version="1.0" encoding="utf-8"?>
-<p:sldLayout xmlns:a="http://schemas.openxmlformats.org/drawingml/2006/main" xmlns:r="http://schemas.openxmlformats.org/officeDocument/2006/relationships" xmlns:mc="http://schemas.openxmlformats.org/markup-compatibility/2006" xmlns:mv="urn:schemas-microsoft-com:mac:vml" xmlns:p="http://schemas.openxmlformats.org/presentationml/2006/main" xmlns:c="http://schemas.openxmlformats.org/drawingml/2006/chart" xmlns:dgm="http://schemas.openxmlformats.org/drawingml/2006/diagram" xmlns:o="urn:schemas-microsoft-com:office:office" xmlns:v="urn:schemas-microsoft-com:vml" xmlns:pvml="urn:schemas-microsoft-com:office:powerpoint" xmlns:com="http://schemas.openxmlformats.org/drawingml/2006/compatibility" xmlns:p14="http://schemas.microsoft.com/office/powerpoint/2010/main" xmlns:p15="http://schemas.microsoft.com/office/powerpoint/2012/main" xmlns:ahyp="http://schemas.microsoft.com/office/drawing/2018/hyperlinkcolor" matchingName="Title only" type="titleOnly">
+<p:sldLayout xmlns:a="http://schemas.openxmlformats.org/drawingml/2006/main" xmlns:r="http://schemas.openxmlformats.org/officeDocument/2006/relationships" xmlns:p="http://schemas.openxmlformats.org/presentationml/2006/main" matchingName="Title only" type="titleOnly">
   <p:cSld name="TITLE_ONLY">
     <p:spTree>
       <p:nvGrpSpPr>
-        <p:cNvPr id="29" name="Shape 29"/>
+        <p:cNvPr id="1" name="Shape 29"/>
         <p:cNvGrpSpPr/>
         <p:nvPr/>
       </p:nvGrpSpPr>
@@ -3519,7 +3733,9 @@
       <p:sp>
         <p:nvSpPr>
           <p:cNvPr id="30" name="Google Shape;30;p6"/>
-          <p:cNvSpPr txBox="1"/>
+          <p:cNvSpPr txBox="1">
+            <a:spLocks noGrp="1"/>
+          </p:cNvSpPr>
           <p:nvPr>
             <p:ph type="title"/>
           </p:nvPr>
@@ -3534,7 +3750,7 @@
           </a:prstGeom>
         </p:spPr>
         <p:txBody>
-          <a:bodyPr anchorCtr="0" anchor="t" bIns="91425" lIns="91425" spcFirstLastPara="1" rIns="91425" wrap="square" tIns="91425">
+          <a:bodyPr spcFirstLastPara="1" wrap="square" lIns="91425" tIns="91425" rIns="91425" bIns="91425" anchor="t" anchorCtr="0">
             <a:noAutofit/>
           </a:bodyPr>
           <a:lstStyle>
@@ -3638,15 +3854,19 @@
               <a:defRPr/>
             </a:lvl9pPr>
           </a:lstStyle>
-          <a:p/>
+          <a:p>
+            <a:endParaRPr/>
+          </a:p>
         </p:txBody>
       </p:sp>
       <p:sp>
         <p:nvSpPr>
           <p:cNvPr id="31" name="Google Shape;31;p6"/>
-          <p:cNvSpPr txBox="1"/>
+          <p:cNvSpPr txBox="1">
+            <a:spLocks noGrp="1"/>
+          </p:cNvSpPr>
           <p:nvPr>
-            <p:ph idx="12" type="sldNum"/>
+            <p:ph type="sldNum" idx="12"/>
           </p:nvPr>
         </p:nvSpPr>
         <p:spPr>
@@ -3659,7 +3879,7 @@
           </a:prstGeom>
         </p:spPr>
         <p:txBody>
-          <a:bodyPr anchorCtr="0" anchor="ctr" bIns="91425" lIns="91425" spcFirstLastPara="1" rIns="91425" wrap="square" tIns="91425">
+          <a:bodyPr spcFirstLastPara="1" wrap="square" lIns="91425" tIns="91425" rIns="91425" bIns="91425" anchor="ctr" anchorCtr="0">
             <a:noAutofit/>
           </a:bodyPr>
           <a:lstStyle>
@@ -3701,7 +3921,7 @@
             </a:lvl9pPr>
           </a:lstStyle>
           <a:p>
-            <a:pPr indent="0" lvl="0" marL="0" rtl="0" algn="r">
+            <a:pPr marL="0" lvl="0" indent="0" algn="r" rtl="0">
               <a:spcBef>
                 <a:spcPts val="0"/>
               </a:spcBef>
@@ -3712,7 +3932,7 @@
             </a:pPr>
             <a:fld id="{00000000-1234-1234-1234-123412341234}" type="slidenum">
               <a:rPr lang="it"/>
-              <a:t>‹#›</a:t>
+              <a:t>‹N›</a:t>
             </a:fld>
             <a:endParaRPr/>
           </a:p>
@@ -3727,11 +3947,11 @@
 </file>
 
 <file path=ppt/slideLayouts/slideLayout6.xml><?xml version="1.0" encoding="utf-8"?>
-<p:sldLayout xmlns:a="http://schemas.openxmlformats.org/drawingml/2006/main" xmlns:r="http://schemas.openxmlformats.org/officeDocument/2006/relationships" xmlns:mc="http://schemas.openxmlformats.org/markup-compatibility/2006" xmlns:mv="urn:schemas-microsoft-com:mac:vml" xmlns:p="http://schemas.openxmlformats.org/presentationml/2006/main" xmlns:c="http://schemas.openxmlformats.org/drawingml/2006/chart" xmlns:dgm="http://schemas.openxmlformats.org/drawingml/2006/diagram" xmlns:o="urn:schemas-microsoft-com:office:office" xmlns:v="urn:schemas-microsoft-com:vml" xmlns:pvml="urn:schemas-microsoft-com:office:powerpoint" xmlns:com="http://schemas.openxmlformats.org/drawingml/2006/compatibility" xmlns:p14="http://schemas.microsoft.com/office/powerpoint/2010/main" xmlns:p15="http://schemas.microsoft.com/office/powerpoint/2012/main" xmlns:ahyp="http://schemas.microsoft.com/office/drawing/2018/hyperlinkcolor" matchingName="One column text">
+<p:sldLayout xmlns:a="http://schemas.openxmlformats.org/drawingml/2006/main" xmlns:r="http://schemas.openxmlformats.org/officeDocument/2006/relationships" xmlns:p="http://schemas.openxmlformats.org/presentationml/2006/main" matchingName="One column text">
   <p:cSld name="ONE_COLUMN_TEXT">
     <p:spTree>
       <p:nvGrpSpPr>
-        <p:cNvPr id="32" name="Shape 32"/>
+        <p:cNvPr id="1" name="Shape 32"/>
         <p:cNvGrpSpPr/>
         <p:nvPr/>
       </p:nvGrpSpPr>
@@ -3746,7 +3966,9 @@
       <p:sp>
         <p:nvSpPr>
           <p:cNvPr id="33" name="Google Shape;33;p7"/>
-          <p:cNvSpPr txBox="1"/>
+          <p:cNvSpPr txBox="1">
+            <a:spLocks noGrp="1"/>
+          </p:cNvSpPr>
           <p:nvPr>
             <p:ph type="title"/>
           </p:nvPr>
@@ -3761,7 +3983,7 @@
           </a:prstGeom>
         </p:spPr>
         <p:txBody>
-          <a:bodyPr anchorCtr="0" anchor="b" bIns="91425" lIns="91425" spcFirstLastPara="1" rIns="91425" wrap="square" tIns="91425">
+          <a:bodyPr spcFirstLastPara="1" wrap="square" lIns="91425" tIns="91425" rIns="91425" bIns="91425" anchor="b" anchorCtr="0">
             <a:noAutofit/>
           </a:bodyPr>
           <a:lstStyle>
@@ -3865,15 +4087,19 @@
               <a:defRPr sz="2400"/>
             </a:lvl9pPr>
           </a:lstStyle>
-          <a:p/>
+          <a:p>
+            <a:endParaRPr/>
+          </a:p>
         </p:txBody>
       </p:sp>
       <p:sp>
         <p:nvSpPr>
           <p:cNvPr id="34" name="Google Shape;34;p7"/>
-          <p:cNvSpPr txBox="1"/>
+          <p:cNvSpPr txBox="1">
+            <a:spLocks noGrp="1"/>
+          </p:cNvSpPr>
           <p:nvPr>
-            <p:ph idx="1" type="body"/>
+            <p:ph type="body" idx="1"/>
           </p:nvPr>
         </p:nvSpPr>
         <p:spPr>
@@ -3886,11 +4112,11 @@
           </a:prstGeom>
         </p:spPr>
         <p:txBody>
-          <a:bodyPr anchorCtr="0" anchor="t" bIns="91425" lIns="91425" spcFirstLastPara="1" rIns="91425" wrap="square" tIns="91425">
+          <a:bodyPr spcFirstLastPara="1" wrap="square" lIns="91425" tIns="91425" rIns="91425" bIns="91425" anchor="t" anchorCtr="0">
             <a:noAutofit/>
           </a:bodyPr>
           <a:lstStyle>
-            <a:lvl1pPr indent="-304800" lvl="0" marL="457200">
+            <a:lvl1pPr marL="457200" lvl="0" indent="-304800">
               <a:spcBef>
                 <a:spcPts val="0"/>
               </a:spcBef>
@@ -3901,7 +4127,7 @@
               <a:buChar char="●"/>
               <a:defRPr sz="1200"/>
             </a:lvl1pPr>
-            <a:lvl2pPr indent="-304800" lvl="1" marL="914400">
+            <a:lvl2pPr marL="914400" lvl="1" indent="-304800">
               <a:spcBef>
                 <a:spcPts val="1600"/>
               </a:spcBef>
@@ -3912,7 +4138,7 @@
               <a:buChar char="○"/>
               <a:defRPr sz="1200"/>
             </a:lvl2pPr>
-            <a:lvl3pPr indent="-304800" lvl="2" marL="1371600">
+            <a:lvl3pPr marL="1371600" lvl="2" indent="-304800">
               <a:spcBef>
                 <a:spcPts val="1600"/>
               </a:spcBef>
@@ -3923,7 +4149,7 @@
               <a:buChar char="■"/>
               <a:defRPr sz="1200"/>
             </a:lvl3pPr>
-            <a:lvl4pPr indent="-304800" lvl="3" marL="1828800">
+            <a:lvl4pPr marL="1828800" lvl="3" indent="-304800">
               <a:spcBef>
                 <a:spcPts val="1600"/>
               </a:spcBef>
@@ -3934,7 +4160,7 @@
               <a:buChar char="●"/>
               <a:defRPr sz="1200"/>
             </a:lvl4pPr>
-            <a:lvl5pPr indent="-304800" lvl="4" marL="2286000">
+            <a:lvl5pPr marL="2286000" lvl="4" indent="-304800">
               <a:spcBef>
                 <a:spcPts val="1600"/>
               </a:spcBef>
@@ -3945,7 +4171,7 @@
               <a:buChar char="○"/>
               <a:defRPr sz="1200"/>
             </a:lvl5pPr>
-            <a:lvl6pPr indent="-304800" lvl="5" marL="2743200">
+            <a:lvl6pPr marL="2743200" lvl="5" indent="-304800">
               <a:spcBef>
                 <a:spcPts val="1600"/>
               </a:spcBef>
@@ -3956,7 +4182,7 @@
               <a:buChar char="■"/>
               <a:defRPr sz="1200"/>
             </a:lvl6pPr>
-            <a:lvl7pPr indent="-304800" lvl="6" marL="3200400">
+            <a:lvl7pPr marL="3200400" lvl="6" indent="-304800">
               <a:spcBef>
                 <a:spcPts val="1600"/>
               </a:spcBef>
@@ -3967,7 +4193,7 @@
               <a:buChar char="●"/>
               <a:defRPr sz="1200"/>
             </a:lvl7pPr>
-            <a:lvl8pPr indent="-304800" lvl="7" marL="3657600">
+            <a:lvl8pPr marL="3657600" lvl="7" indent="-304800">
               <a:spcBef>
                 <a:spcPts val="1600"/>
               </a:spcBef>
@@ -3978,7 +4204,7 @@
               <a:buChar char="○"/>
               <a:defRPr sz="1200"/>
             </a:lvl8pPr>
-            <a:lvl9pPr indent="-304800" lvl="8" marL="4114800">
+            <a:lvl9pPr marL="4114800" lvl="8" indent="-304800">
               <a:spcBef>
                 <a:spcPts val="1600"/>
               </a:spcBef>
@@ -3990,15 +4216,19 @@
               <a:defRPr sz="1200"/>
             </a:lvl9pPr>
           </a:lstStyle>
-          <a:p/>
+          <a:p>
+            <a:endParaRPr/>
+          </a:p>
         </p:txBody>
       </p:sp>
       <p:sp>
         <p:nvSpPr>
           <p:cNvPr id="35" name="Google Shape;35;p7"/>
-          <p:cNvSpPr txBox="1"/>
+          <p:cNvSpPr txBox="1">
+            <a:spLocks noGrp="1"/>
+          </p:cNvSpPr>
           <p:nvPr>
-            <p:ph idx="12" type="sldNum"/>
+            <p:ph type="sldNum" idx="12"/>
           </p:nvPr>
         </p:nvSpPr>
         <p:spPr>
@@ -4011,7 +4241,7 @@
           </a:prstGeom>
         </p:spPr>
         <p:txBody>
-          <a:bodyPr anchorCtr="0" anchor="ctr" bIns="91425" lIns="91425" spcFirstLastPara="1" rIns="91425" wrap="square" tIns="91425">
+          <a:bodyPr spcFirstLastPara="1" wrap="square" lIns="91425" tIns="91425" rIns="91425" bIns="91425" anchor="ctr" anchorCtr="0">
             <a:noAutofit/>
           </a:bodyPr>
           <a:lstStyle>
@@ -4053,7 +4283,7 @@
             </a:lvl9pPr>
           </a:lstStyle>
           <a:p>
-            <a:pPr indent="0" lvl="0" marL="0" rtl="0" algn="r">
+            <a:pPr marL="0" lvl="0" indent="0" algn="r" rtl="0">
               <a:spcBef>
                 <a:spcPts val="0"/>
               </a:spcBef>
@@ -4064,7 +4294,7 @@
             </a:pPr>
             <a:fld id="{00000000-1234-1234-1234-123412341234}" type="slidenum">
               <a:rPr lang="it"/>
-              <a:t>‹#›</a:t>
+              <a:t>‹N›</a:t>
             </a:fld>
             <a:endParaRPr/>
           </a:p>
@@ -4079,18 +4309,19 @@
 </file>
 
 <file path=ppt/slideLayouts/slideLayout7.xml><?xml version="1.0" encoding="utf-8"?>
-<p:sldLayout xmlns:a="http://schemas.openxmlformats.org/drawingml/2006/main" xmlns:r="http://schemas.openxmlformats.org/officeDocument/2006/relationships" xmlns:mc="http://schemas.openxmlformats.org/markup-compatibility/2006" xmlns:mv="urn:schemas-microsoft-com:mac:vml" xmlns:p="http://schemas.openxmlformats.org/presentationml/2006/main" xmlns:c="http://schemas.openxmlformats.org/drawingml/2006/chart" xmlns:dgm="http://schemas.openxmlformats.org/drawingml/2006/diagram" xmlns:o="urn:schemas-microsoft-com:office:office" xmlns:v="urn:schemas-microsoft-com:vml" xmlns:pvml="urn:schemas-microsoft-com:office:powerpoint" xmlns:com="http://schemas.openxmlformats.org/drawingml/2006/compatibility" xmlns:p14="http://schemas.microsoft.com/office/powerpoint/2010/main" xmlns:p15="http://schemas.microsoft.com/office/powerpoint/2012/main" xmlns:ahyp="http://schemas.microsoft.com/office/drawing/2018/hyperlinkcolor" matchingName="Main point">
+<p:sldLayout xmlns:a="http://schemas.openxmlformats.org/drawingml/2006/main" xmlns:r="http://schemas.openxmlformats.org/officeDocument/2006/relationships" xmlns:p="http://schemas.openxmlformats.org/presentationml/2006/main" matchingName="Main point">
   <p:cSld name="MAIN_POINT">
     <p:bg>
       <p:bgPr>
         <a:solidFill>
           <a:schemeClr val="lt2"/>
         </a:solidFill>
+        <a:effectLst/>
       </p:bgPr>
     </p:bg>
     <p:spTree>
       <p:nvGrpSpPr>
-        <p:cNvPr id="36" name="Shape 36"/>
+        <p:cNvPr id="1" name="Shape 36"/>
         <p:cNvGrpSpPr/>
         <p:nvPr/>
       </p:nvGrpSpPr>
@@ -4105,7 +4336,9 @@
       <p:sp>
         <p:nvSpPr>
           <p:cNvPr id="37" name="Google Shape;37;p8"/>
-          <p:cNvSpPr txBox="1"/>
+          <p:cNvSpPr txBox="1">
+            <a:spLocks noGrp="1"/>
+          </p:cNvSpPr>
           <p:nvPr>
             <p:ph type="title"/>
           </p:nvPr>
@@ -4120,7 +4353,7 @@
           </a:prstGeom>
         </p:spPr>
         <p:txBody>
-          <a:bodyPr anchorCtr="0" anchor="ctr" bIns="91425" lIns="91425" spcFirstLastPara="1" rIns="91425" wrap="square" tIns="91425">
+          <a:bodyPr spcFirstLastPara="1" wrap="square" lIns="91425" tIns="91425" rIns="91425" bIns="91425" anchor="ctr" anchorCtr="0">
             <a:noAutofit/>
           </a:bodyPr>
           <a:lstStyle>
@@ -4287,15 +4520,19 @@
               </a:defRPr>
             </a:lvl9pPr>
           </a:lstStyle>
-          <a:p/>
+          <a:p>
+            <a:endParaRPr/>
+          </a:p>
         </p:txBody>
       </p:sp>
       <p:sp>
         <p:nvSpPr>
           <p:cNvPr id="38" name="Google Shape;38;p8"/>
-          <p:cNvSpPr txBox="1"/>
+          <p:cNvSpPr txBox="1">
+            <a:spLocks noGrp="1"/>
+          </p:cNvSpPr>
           <p:nvPr>
-            <p:ph idx="12" type="sldNum"/>
+            <p:ph type="sldNum" idx="12"/>
           </p:nvPr>
         </p:nvSpPr>
         <p:spPr>
@@ -4308,7 +4545,7 @@
           </a:prstGeom>
         </p:spPr>
         <p:txBody>
-          <a:bodyPr anchorCtr="0" anchor="ctr" bIns="91425" lIns="91425" spcFirstLastPara="1" rIns="91425" wrap="square" tIns="91425">
+          <a:bodyPr spcFirstLastPara="1" wrap="square" lIns="91425" tIns="91425" rIns="91425" bIns="91425" anchor="ctr" anchorCtr="0">
             <a:noAutofit/>
           </a:bodyPr>
           <a:lstStyle>
@@ -4386,7 +4623,7 @@
             </a:lvl9pPr>
           </a:lstStyle>
           <a:p>
-            <a:pPr indent="0" lvl="0" marL="0" rtl="0" algn="r">
+            <a:pPr marL="0" lvl="0" indent="0" algn="r" rtl="0">
               <a:spcBef>
                 <a:spcPts val="0"/>
               </a:spcBef>
@@ -4397,7 +4634,7 @@
             </a:pPr>
             <a:fld id="{00000000-1234-1234-1234-123412341234}" type="slidenum">
               <a:rPr lang="it"/>
-              <a:t>‹#›</a:t>
+              <a:t>‹N›</a:t>
             </a:fld>
             <a:endParaRPr/>
           </a:p>
@@ -4412,11 +4649,11 @@
 </file>
 
 <file path=ppt/slideLayouts/slideLayout8.xml><?xml version="1.0" encoding="utf-8"?>
-<p:sldLayout xmlns:a="http://schemas.openxmlformats.org/drawingml/2006/main" xmlns:r="http://schemas.openxmlformats.org/officeDocument/2006/relationships" xmlns:mc="http://schemas.openxmlformats.org/markup-compatibility/2006" xmlns:mv="urn:schemas-microsoft-com:mac:vml" xmlns:p="http://schemas.openxmlformats.org/presentationml/2006/main" xmlns:c="http://schemas.openxmlformats.org/drawingml/2006/chart" xmlns:dgm="http://schemas.openxmlformats.org/drawingml/2006/diagram" xmlns:o="urn:schemas-microsoft-com:office:office" xmlns:v="urn:schemas-microsoft-com:vml" xmlns:pvml="urn:schemas-microsoft-com:office:powerpoint" xmlns:com="http://schemas.openxmlformats.org/drawingml/2006/compatibility" xmlns:p14="http://schemas.microsoft.com/office/powerpoint/2010/main" xmlns:p15="http://schemas.microsoft.com/office/powerpoint/2012/main" xmlns:ahyp="http://schemas.microsoft.com/office/drawing/2018/hyperlinkcolor" matchingName="Section title and description">
+<p:sldLayout xmlns:a="http://schemas.openxmlformats.org/drawingml/2006/main" xmlns:r="http://schemas.openxmlformats.org/officeDocument/2006/relationships" xmlns:p="http://schemas.openxmlformats.org/presentationml/2006/main" matchingName="Section title and description">
   <p:cSld name="SECTION_TITLE_AND_DESCRIPTION">
     <p:spTree>
       <p:nvGrpSpPr>
-        <p:cNvPr id="39" name="Shape 39"/>
+        <p:cNvPr id="1" name="Shape 39"/>
         <p:cNvGrpSpPr/>
         <p:nvPr/>
       </p:nvGrpSpPr>
@@ -4450,12 +4687,12 @@
           </a:ln>
         </p:spPr>
         <p:txBody>
-          <a:bodyPr anchorCtr="0" anchor="ctr" bIns="91425" lIns="91425" spcFirstLastPara="1" rIns="91425" wrap="square" tIns="91425">
+          <a:bodyPr spcFirstLastPara="1" wrap="square" lIns="91425" tIns="91425" rIns="91425" bIns="91425" anchor="ctr" anchorCtr="0">
             <a:noAutofit/>
           </a:bodyPr>
           <a:lstStyle/>
           <a:p>
-            <a:pPr indent="0" lvl="0" marL="0" rtl="0" algn="l">
+            <a:pPr marL="0" lvl="0" indent="0" algn="l" rtl="0">
               <a:spcBef>
                 <a:spcPts val="0"/>
               </a:spcBef>
@@ -4464,9 +4701,6 @@
               </a:spcAft>
               <a:buNone/>
             </a:pPr>
-            <a:r>
-              <a:t/>
-            </a:r>
             <a:endParaRPr/>
           </a:p>
         </p:txBody>
@@ -4486,21 +4720,23 @@
             <a:avLst/>
           </a:prstGeom>
           <a:noFill/>
-          <a:ln cap="flat" cmpd="sng" w="19050">
+          <a:ln w="19050" cap="flat" cmpd="sng">
             <a:solidFill>
               <a:schemeClr val="lt2"/>
             </a:solidFill>
             <a:prstDash val="solid"/>
             <a:round/>
-            <a:headEnd len="sm" w="sm" type="none"/>
-            <a:tailEnd len="sm" w="sm" type="none"/>
+            <a:headEnd type="none" w="sm" len="sm"/>
+            <a:tailEnd type="none" w="sm" len="sm"/>
           </a:ln>
         </p:spPr>
       </p:cxnSp>
       <p:sp>
         <p:nvSpPr>
           <p:cNvPr id="42" name="Google Shape;42;p9"/>
-          <p:cNvSpPr txBox="1"/>
+          <p:cNvSpPr txBox="1">
+            <a:spLocks noGrp="1"/>
+          </p:cNvSpPr>
           <p:nvPr>
             <p:ph type="title"/>
           </p:nvPr>
@@ -4515,7 +4751,7 @@
           </a:prstGeom>
         </p:spPr>
         <p:txBody>
-          <a:bodyPr anchorCtr="0" anchor="b" bIns="91425" lIns="91425" spcFirstLastPara="1" rIns="91425" wrap="square" tIns="91425">
+          <a:bodyPr spcFirstLastPara="1" wrap="square" lIns="91425" tIns="91425" rIns="91425" bIns="91425" anchor="b" anchorCtr="0">
             <a:noAutofit/>
           </a:bodyPr>
           <a:lstStyle>
@@ -4682,15 +4918,19 @@
               </a:defRPr>
             </a:lvl9pPr>
           </a:lstStyle>
-          <a:p/>
+          <a:p>
+            <a:endParaRPr/>
+          </a:p>
         </p:txBody>
       </p:sp>
       <p:sp>
         <p:nvSpPr>
           <p:cNvPr id="43" name="Google Shape;43;p9"/>
-          <p:cNvSpPr txBox="1"/>
+          <p:cNvSpPr txBox="1">
+            <a:spLocks noGrp="1"/>
+          </p:cNvSpPr>
           <p:nvPr>
-            <p:ph idx="1" type="subTitle"/>
+            <p:ph type="subTitle" idx="1"/>
           </p:nvPr>
         </p:nvSpPr>
         <p:spPr>
@@ -4703,7 +4943,7 @@
           </a:prstGeom>
         </p:spPr>
         <p:txBody>
-          <a:bodyPr anchorCtr="0" anchor="t" bIns="91425" lIns="91425" spcFirstLastPara="1" rIns="91425" wrap="square" tIns="91425">
+          <a:bodyPr spcFirstLastPara="1" wrap="square" lIns="91425" tIns="91425" rIns="91425" bIns="91425" anchor="t" anchorCtr="0">
             <a:noAutofit/>
           </a:bodyPr>
           <a:lstStyle>
@@ -4834,15 +5074,19 @@
               <a:defRPr sz="2100"/>
             </a:lvl9pPr>
           </a:lstStyle>
-          <a:p/>
+          <a:p>
+            <a:endParaRPr/>
+          </a:p>
         </p:txBody>
       </p:sp>
       <p:sp>
         <p:nvSpPr>
           <p:cNvPr id="44" name="Google Shape;44;p9"/>
-          <p:cNvSpPr txBox="1"/>
+          <p:cNvSpPr txBox="1">
+            <a:spLocks noGrp="1"/>
+          </p:cNvSpPr>
           <p:nvPr>
-            <p:ph idx="2" type="body"/>
+            <p:ph type="body" idx="2"/>
           </p:nvPr>
         </p:nvSpPr>
         <p:spPr>
@@ -4855,11 +5099,11 @@
           </a:prstGeom>
         </p:spPr>
         <p:txBody>
-          <a:bodyPr anchorCtr="0" anchor="ctr" bIns="91425" lIns="91425" spcFirstLastPara="1" rIns="91425" wrap="square" tIns="91425">
+          <a:bodyPr spcFirstLastPara="1" wrap="square" lIns="91425" tIns="91425" rIns="91425" bIns="91425" anchor="ctr" anchorCtr="0">
             <a:noAutofit/>
           </a:bodyPr>
           <a:lstStyle>
-            <a:lvl1pPr indent="-342900" lvl="0" marL="457200">
+            <a:lvl1pPr marL="457200" lvl="0" indent="-342900">
               <a:spcBef>
                 <a:spcPts val="0"/>
               </a:spcBef>
@@ -4877,7 +5121,7 @@
                 </a:solidFill>
               </a:defRPr>
             </a:lvl1pPr>
-            <a:lvl2pPr indent="-317500" lvl="1" marL="914400">
+            <a:lvl2pPr marL="914400" lvl="1" indent="-317500">
               <a:spcBef>
                 <a:spcPts val="1600"/>
               </a:spcBef>
@@ -4895,7 +5139,7 @@
                 </a:solidFill>
               </a:defRPr>
             </a:lvl2pPr>
-            <a:lvl3pPr indent="-317500" lvl="2" marL="1371600">
+            <a:lvl3pPr marL="1371600" lvl="2" indent="-317500">
               <a:spcBef>
                 <a:spcPts val="1600"/>
               </a:spcBef>
@@ -4913,7 +5157,7 @@
                 </a:solidFill>
               </a:defRPr>
             </a:lvl3pPr>
-            <a:lvl4pPr indent="-317500" lvl="3" marL="1828800">
+            <a:lvl4pPr marL="1828800" lvl="3" indent="-317500">
               <a:spcBef>
                 <a:spcPts val="1600"/>
               </a:spcBef>
@@ -4931,7 +5175,7 @@
                 </a:solidFill>
               </a:defRPr>
             </a:lvl4pPr>
-            <a:lvl5pPr indent="-317500" lvl="4" marL="2286000">
+            <a:lvl5pPr marL="2286000" lvl="4" indent="-317500">
               <a:spcBef>
                 <a:spcPts val="1600"/>
               </a:spcBef>
@@ -4949,7 +5193,7 @@
                 </a:solidFill>
               </a:defRPr>
             </a:lvl5pPr>
-            <a:lvl6pPr indent="-317500" lvl="5" marL="2743200">
+            <a:lvl6pPr marL="2743200" lvl="5" indent="-317500">
               <a:spcBef>
                 <a:spcPts val="1600"/>
               </a:spcBef>
@@ -4967,7 +5211,7 @@
                 </a:solidFill>
               </a:defRPr>
             </a:lvl6pPr>
-            <a:lvl7pPr indent="-317500" lvl="6" marL="3200400">
+            <a:lvl7pPr marL="3200400" lvl="6" indent="-317500">
               <a:spcBef>
                 <a:spcPts val="1600"/>
               </a:spcBef>
@@ -4985,7 +5229,7 @@
                 </a:solidFill>
               </a:defRPr>
             </a:lvl7pPr>
-            <a:lvl8pPr indent="-317500" lvl="7" marL="3657600">
+            <a:lvl8pPr marL="3657600" lvl="7" indent="-317500">
               <a:spcBef>
                 <a:spcPts val="1600"/>
               </a:spcBef>
@@ -5003,7 +5247,7 @@
                 </a:solidFill>
               </a:defRPr>
             </a:lvl8pPr>
-            <a:lvl9pPr indent="-317500" lvl="8" marL="4114800">
+            <a:lvl9pPr marL="4114800" lvl="8" indent="-317500">
               <a:spcBef>
                 <a:spcPts val="1600"/>
               </a:spcBef>
@@ -5022,15 +5266,19 @@
               </a:defRPr>
             </a:lvl9pPr>
           </a:lstStyle>
-          <a:p/>
+          <a:p>
+            <a:endParaRPr/>
+          </a:p>
         </p:txBody>
       </p:sp>
       <p:sp>
         <p:nvSpPr>
           <p:cNvPr id="45" name="Google Shape;45;p9"/>
-          <p:cNvSpPr txBox="1"/>
+          <p:cNvSpPr txBox="1">
+            <a:spLocks noGrp="1"/>
+          </p:cNvSpPr>
           <p:nvPr>
-            <p:ph idx="12" type="sldNum"/>
+            <p:ph type="sldNum" idx="12"/>
           </p:nvPr>
         </p:nvSpPr>
         <p:spPr>
@@ -5043,7 +5291,7 @@
           </a:prstGeom>
         </p:spPr>
         <p:txBody>
-          <a:bodyPr anchorCtr="0" anchor="ctr" bIns="91425" lIns="91425" spcFirstLastPara="1" rIns="91425" wrap="square" tIns="91425">
+          <a:bodyPr spcFirstLastPara="1" wrap="square" lIns="91425" tIns="91425" rIns="91425" bIns="91425" anchor="ctr" anchorCtr="0">
             <a:noAutofit/>
           </a:bodyPr>
           <a:lstStyle>
@@ -5121,7 +5369,7 @@
             </a:lvl9pPr>
           </a:lstStyle>
           <a:p>
-            <a:pPr indent="0" lvl="0" marL="0" rtl="0" algn="r">
+            <a:pPr marL="0" lvl="0" indent="0" algn="r" rtl="0">
               <a:spcBef>
                 <a:spcPts val="0"/>
               </a:spcBef>
@@ -5132,7 +5380,7 @@
             </a:pPr>
             <a:fld id="{00000000-1234-1234-1234-123412341234}" type="slidenum">
               <a:rPr lang="it"/>
-              <a:t>‹#›</a:t>
+              <a:t>‹N›</a:t>
             </a:fld>
             <a:endParaRPr/>
           </a:p>
@@ -5147,11 +5395,11 @@
 </file>
 
 <file path=ppt/slideLayouts/slideLayout9.xml><?xml version="1.0" encoding="utf-8"?>
-<p:sldLayout xmlns:a="http://schemas.openxmlformats.org/drawingml/2006/main" xmlns:r="http://schemas.openxmlformats.org/officeDocument/2006/relationships" xmlns:mc="http://schemas.openxmlformats.org/markup-compatibility/2006" xmlns:mv="urn:schemas-microsoft-com:mac:vml" xmlns:p="http://schemas.openxmlformats.org/presentationml/2006/main" xmlns:c="http://schemas.openxmlformats.org/drawingml/2006/chart" xmlns:dgm="http://schemas.openxmlformats.org/drawingml/2006/diagram" xmlns:o="urn:schemas-microsoft-com:office:office" xmlns:v="urn:schemas-microsoft-com:vml" xmlns:pvml="urn:schemas-microsoft-com:office:powerpoint" xmlns:com="http://schemas.openxmlformats.org/drawingml/2006/compatibility" xmlns:p14="http://schemas.microsoft.com/office/powerpoint/2010/main" xmlns:p15="http://schemas.microsoft.com/office/powerpoint/2012/main" xmlns:ahyp="http://schemas.microsoft.com/office/drawing/2018/hyperlinkcolor" matchingName="Caption">
+<p:sldLayout xmlns:a="http://schemas.openxmlformats.org/drawingml/2006/main" xmlns:r="http://schemas.openxmlformats.org/officeDocument/2006/relationships" xmlns:p="http://schemas.openxmlformats.org/presentationml/2006/main" matchingName="Caption">
   <p:cSld name="CAPTION_ONLY">
     <p:spTree>
       <p:nvGrpSpPr>
-        <p:cNvPr id="46" name="Shape 46"/>
+        <p:cNvPr id="1" name="Shape 46"/>
         <p:cNvGrpSpPr/>
         <p:nvPr/>
       </p:nvGrpSpPr>
@@ -5166,9 +5414,11 @@
       <p:sp>
         <p:nvSpPr>
           <p:cNvPr id="47" name="Google Shape;47;p10"/>
-          <p:cNvSpPr txBox="1"/>
+          <p:cNvSpPr txBox="1">
+            <a:spLocks noGrp="1"/>
+          </p:cNvSpPr>
           <p:nvPr>
-            <p:ph idx="1" type="body"/>
+            <p:ph type="body" idx="1"/>
           </p:nvPr>
         </p:nvSpPr>
         <p:spPr>
@@ -5181,11 +5431,11 @@
           </a:prstGeom>
         </p:spPr>
         <p:txBody>
-          <a:bodyPr anchorCtr="0" anchor="ctr" bIns="91425" lIns="91425" spcFirstLastPara="1" rIns="91425" wrap="square" tIns="91425">
+          <a:bodyPr spcFirstLastPara="1" wrap="square" lIns="91425" tIns="91425" rIns="91425" bIns="91425" anchor="ctr" anchorCtr="0">
             <a:noAutofit/>
           </a:bodyPr>
           <a:lstStyle>
-            <a:lvl1pPr indent="-228600" lvl="0" marL="457200">
+            <a:lvl1pPr marL="457200" lvl="0" indent="-228600">
               <a:lnSpc>
                 <a:spcPct val="100000"/>
               </a:lnSpc>
@@ -5200,15 +5450,19 @@
               <a:defRPr/>
             </a:lvl1pPr>
           </a:lstStyle>
-          <a:p/>
+          <a:p>
+            <a:endParaRPr/>
+          </a:p>
         </p:txBody>
       </p:sp>
       <p:sp>
         <p:nvSpPr>
           <p:cNvPr id="48" name="Google Shape;48;p10"/>
-          <p:cNvSpPr txBox="1"/>
+          <p:cNvSpPr txBox="1">
+            <a:spLocks noGrp="1"/>
+          </p:cNvSpPr>
           <p:nvPr>
-            <p:ph idx="12" type="sldNum"/>
+            <p:ph type="sldNum" idx="12"/>
           </p:nvPr>
         </p:nvSpPr>
         <p:spPr>
@@ -5221,7 +5475,7 @@
           </a:prstGeom>
         </p:spPr>
         <p:txBody>
-          <a:bodyPr anchorCtr="0" anchor="ctr" bIns="91425" lIns="91425" spcFirstLastPara="1" rIns="91425" wrap="square" tIns="91425">
+          <a:bodyPr spcFirstLastPara="1" wrap="square" lIns="91425" tIns="91425" rIns="91425" bIns="91425" anchor="ctr" anchorCtr="0">
             <a:noAutofit/>
           </a:bodyPr>
           <a:lstStyle>
@@ -5263,7 +5517,7 @@
             </a:lvl9pPr>
           </a:lstStyle>
           <a:p>
-            <a:pPr indent="0" lvl="0" marL="0" rtl="0" algn="r">
+            <a:pPr marL="0" lvl="0" indent="0" algn="r" rtl="0">
               <a:spcBef>
                 <a:spcPts val="0"/>
               </a:spcBef>
@@ -5274,7 +5528,7 @@
             </a:pPr>
             <a:fld id="{00000000-1234-1234-1234-123412341234}" type="slidenum">
               <a:rPr lang="it"/>
-              <a:t>‹#›</a:t>
+              <a:t>‹N›</a:t>
             </a:fld>
             <a:endParaRPr/>
           </a:p>
@@ -5289,18 +5543,19 @@
 </file>
 
 <file path=ppt/slideMasters/slideMaster1.xml><?xml version="1.0" encoding="utf-8"?>
-<p:sldMaster xmlns:a="http://schemas.openxmlformats.org/drawingml/2006/main" xmlns:r="http://schemas.openxmlformats.org/officeDocument/2006/relationships" xmlns:mc="http://schemas.openxmlformats.org/markup-compatibility/2006" xmlns:mv="urn:schemas-microsoft-com:mac:vml" xmlns:p="http://schemas.openxmlformats.org/presentationml/2006/main" xmlns:c="http://schemas.openxmlformats.org/drawingml/2006/chart" xmlns:dgm="http://schemas.openxmlformats.org/drawingml/2006/diagram" xmlns:o="urn:schemas-microsoft-com:office:office" xmlns:v="urn:schemas-microsoft-com:vml" xmlns:pvml="urn:schemas-microsoft-com:office:powerpoint" xmlns:com="http://schemas.openxmlformats.org/drawingml/2006/compatibility" xmlns:p14="http://schemas.microsoft.com/office/powerpoint/2010/main" xmlns:p15="http://schemas.microsoft.com/office/powerpoint/2012/main" xmlns:ahyp="http://schemas.microsoft.com/office/drawing/2018/hyperlinkcolor">
+<p:sldMaster xmlns:a="http://schemas.openxmlformats.org/drawingml/2006/main" xmlns:r="http://schemas.openxmlformats.org/officeDocument/2006/relationships" xmlns:p="http://schemas.openxmlformats.org/presentationml/2006/main">
   <p:cSld name="paperback">
     <p:bg>
       <p:bgPr>
         <a:solidFill>
           <a:schemeClr val="accent1"/>
         </a:solidFill>
+        <a:effectLst/>
       </p:bgPr>
     </p:bg>
     <p:spTree>
       <p:nvGrpSpPr>
-        <p:cNvPr id="5" name="Shape 5"/>
+        <p:cNvPr id="1" name="Shape 5"/>
         <p:cNvGrpSpPr/>
         <p:nvPr/>
       </p:nvGrpSpPr>
@@ -5315,7 +5570,9 @@
       <p:sp>
         <p:nvSpPr>
           <p:cNvPr id="6" name="Google Shape;6;p1"/>
-          <p:cNvSpPr txBox="1"/>
+          <p:cNvSpPr txBox="1">
+            <a:spLocks noGrp="1"/>
+          </p:cNvSpPr>
           <p:nvPr>
             <p:ph type="title"/>
           </p:nvPr>
@@ -5334,7 +5591,7 @@
           </a:ln>
         </p:spPr>
         <p:txBody>
-          <a:bodyPr anchorCtr="0" anchor="t" bIns="91425" lIns="91425" spcFirstLastPara="1" rIns="91425" wrap="square" tIns="91425">
+          <a:bodyPr spcFirstLastPara="1" wrap="square" lIns="91425" tIns="91425" rIns="91425" bIns="91425" anchor="t" anchorCtr="0">
             <a:noAutofit/>
           </a:bodyPr>
           <a:lstStyle>
@@ -5546,15 +5803,19 @@
               </a:defRPr>
             </a:lvl9pPr>
           </a:lstStyle>
-          <a:p/>
+          <a:p>
+            <a:endParaRPr/>
+          </a:p>
         </p:txBody>
       </p:sp>
       <p:sp>
         <p:nvSpPr>
           <p:cNvPr id="7" name="Google Shape;7;p1"/>
-          <p:cNvSpPr txBox="1"/>
+          <p:cNvSpPr txBox="1">
+            <a:spLocks noGrp="1"/>
+          </p:cNvSpPr>
           <p:nvPr>
-            <p:ph idx="1" type="body"/>
+            <p:ph type="body" idx="1"/>
           </p:nvPr>
         </p:nvSpPr>
         <p:spPr>
@@ -5571,11 +5832,11 @@
           </a:ln>
         </p:spPr>
         <p:txBody>
-          <a:bodyPr anchorCtr="0" anchor="t" bIns="91425" lIns="91425" spcFirstLastPara="1" rIns="91425" wrap="square" tIns="91425">
+          <a:bodyPr spcFirstLastPara="1" wrap="square" lIns="91425" tIns="91425" rIns="91425" bIns="91425" anchor="t" anchorCtr="0">
             <a:noAutofit/>
           </a:bodyPr>
           <a:lstStyle>
-            <a:lvl1pPr indent="-342900" lvl="0" marL="457200">
+            <a:lvl1pPr marL="457200" lvl="0" indent="-342900">
               <a:lnSpc>
                 <a:spcPct val="115000"/>
               </a:lnSpc>
@@ -5601,7 +5862,7 @@
                 <a:sym typeface="Old Standard TT"/>
               </a:defRPr>
             </a:lvl1pPr>
-            <a:lvl2pPr indent="-317500" lvl="1" marL="914400">
+            <a:lvl2pPr marL="914400" lvl="1" indent="-317500">
               <a:lnSpc>
                 <a:spcPct val="115000"/>
               </a:lnSpc>
@@ -5627,7 +5888,7 @@
                 <a:sym typeface="Old Standard TT"/>
               </a:defRPr>
             </a:lvl2pPr>
-            <a:lvl3pPr indent="-317500" lvl="2" marL="1371600">
+            <a:lvl3pPr marL="1371600" lvl="2" indent="-317500">
               <a:lnSpc>
                 <a:spcPct val="115000"/>
               </a:lnSpc>
@@ -5653,7 +5914,7 @@
                 <a:sym typeface="Old Standard TT"/>
               </a:defRPr>
             </a:lvl3pPr>
-            <a:lvl4pPr indent="-317500" lvl="3" marL="1828800">
+            <a:lvl4pPr marL="1828800" lvl="3" indent="-317500">
               <a:lnSpc>
                 <a:spcPct val="115000"/>
               </a:lnSpc>
@@ -5679,7 +5940,7 @@
                 <a:sym typeface="Old Standard TT"/>
               </a:defRPr>
             </a:lvl4pPr>
-            <a:lvl5pPr indent="-317500" lvl="4" marL="2286000">
+            <a:lvl5pPr marL="2286000" lvl="4" indent="-317500">
               <a:lnSpc>
                 <a:spcPct val="115000"/>
               </a:lnSpc>
@@ -5705,7 +5966,7 @@
                 <a:sym typeface="Old Standard TT"/>
               </a:defRPr>
             </a:lvl5pPr>
-            <a:lvl6pPr indent="-317500" lvl="5" marL="2743200">
+            <a:lvl6pPr marL="2743200" lvl="5" indent="-317500">
               <a:lnSpc>
                 <a:spcPct val="115000"/>
               </a:lnSpc>
@@ -5731,7 +5992,7 @@
                 <a:sym typeface="Old Standard TT"/>
               </a:defRPr>
             </a:lvl6pPr>
-            <a:lvl7pPr indent="-317500" lvl="6" marL="3200400">
+            <a:lvl7pPr marL="3200400" lvl="6" indent="-317500">
               <a:lnSpc>
                 <a:spcPct val="115000"/>
               </a:lnSpc>
@@ -5757,7 +6018,7 @@
                 <a:sym typeface="Old Standard TT"/>
               </a:defRPr>
             </a:lvl7pPr>
-            <a:lvl8pPr indent="-317500" lvl="7" marL="3657600">
+            <a:lvl8pPr marL="3657600" lvl="7" indent="-317500">
               <a:lnSpc>
                 <a:spcPct val="115000"/>
               </a:lnSpc>
@@ -5783,7 +6044,7 @@
                 <a:sym typeface="Old Standard TT"/>
               </a:defRPr>
             </a:lvl8pPr>
-            <a:lvl9pPr indent="-317500" lvl="8" marL="4114800">
+            <a:lvl9pPr marL="4114800" lvl="8" indent="-317500">
               <a:lnSpc>
                 <a:spcPct val="115000"/>
               </a:lnSpc>
@@ -5810,15 +6071,19 @@
               </a:defRPr>
             </a:lvl9pPr>
           </a:lstStyle>
-          <a:p/>
+          <a:p>
+            <a:endParaRPr/>
+          </a:p>
         </p:txBody>
       </p:sp>
       <p:sp>
         <p:nvSpPr>
           <p:cNvPr id="8" name="Google Shape;8;p1"/>
-          <p:cNvSpPr txBox="1"/>
+          <p:cNvSpPr txBox="1">
+            <a:spLocks noGrp="1"/>
+          </p:cNvSpPr>
           <p:nvPr>
-            <p:ph idx="12" type="sldNum"/>
+            <p:ph type="sldNum" idx="12"/>
           </p:nvPr>
         </p:nvSpPr>
         <p:spPr>
@@ -5835,7 +6100,7 @@
           </a:ln>
         </p:spPr>
         <p:txBody>
-          <a:bodyPr anchorCtr="0" anchor="ctr" bIns="91425" lIns="91425" spcFirstLastPara="1" rIns="91425" wrap="square" tIns="91425">
+          <a:bodyPr spcFirstLastPara="1" wrap="square" lIns="91425" tIns="91425" rIns="91425" bIns="91425" anchor="ctr" anchorCtr="0">
             <a:noAutofit/>
           </a:bodyPr>
           <a:lstStyle>
@@ -5949,7 +6214,7 @@
             </a:lvl9pPr>
           </a:lstStyle>
           <a:p>
-            <a:pPr indent="0" lvl="0" marL="0" rtl="0" algn="r">
+            <a:pPr marL="0" lvl="0" indent="0" algn="r" rtl="0">
               <a:spcBef>
                 <a:spcPts val="0"/>
               </a:spcBef>
@@ -5960,7 +6225,7 @@
             </a:pPr>
             <a:fld id="{00000000-1234-1234-1234-123412341234}" type="slidenum">
               <a:rPr lang="it"/>
-              <a:t>‹#›</a:t>
+              <a:t>‹N›</a:t>
             </a:fld>
             <a:endParaRPr/>
           </a:p>
@@ -5968,7 +6233,7 @@
       </p:sp>
     </p:spTree>
   </p:cSld>
-  <p:clrMap accent1="accent1" accent2="accent2" accent3="accent3" accent4="accent4" accent5="accent5" accent6="accent6" bg1="lt1" bg2="dk2" tx1="dk1" tx2="lt2" folHlink="folHlink" hlink="hlink"/>
+  <p:clrMap bg1="lt1" tx1="dk1" bg2="dk2" tx2="lt2" accent1="accent1" accent2="accent2" accent3="accent3" accent4="accent4" accent5="accent5" accent6="accent6" hlink="hlink" folHlink="folHlink"/>
   <p:sldLayoutIdLst>
     <p:sldLayoutId id="2147483648" r:id="rId1"/>
     <p:sldLayoutId id="2147483649" r:id="rId2"/>
@@ -5982,10 +6247,10 @@
     <p:sldLayoutId id="2147483657" r:id="rId10"/>
     <p:sldLayoutId id="2147483658" r:id="rId11"/>
   </p:sldLayoutIdLst>
-  <p:hf dt="0" ftr="0" hdr="0" sldNum="0"/>
+  <p:hf sldNum="0" hdr="0" ftr="0" dt="0"/>
   <p:txStyles>
     <p:titleStyle>
-      <a:defPPr lvl="0" marR="0" rtl="0" algn="l">
+      <a:defPPr marR="0" lvl="0" algn="l" rtl="0">
         <a:lnSpc>
           <a:spcPct val="100000"/>
         </a:lnSpc>
@@ -5996,7 +6261,7 @@
           <a:spcPts val="0"/>
         </a:spcAft>
       </a:defPPr>
-      <a:lvl1pPr lvl="0" marR="0" rtl="0" algn="l">
+      <a:lvl1pPr marR="0" lvl="0" algn="l" rtl="0">
         <a:lnSpc>
           <a:spcPct val="100000"/>
         </a:lnSpc>
@@ -6010,7 +6275,7 @@
           <a:srgbClr val="000000"/>
         </a:buClr>
         <a:buFont typeface="Arial"/>
-        <a:defRPr b="0" i="0" sz="1400" u="none" cap="none" strike="noStrike">
+        <a:defRPr sz="1400" b="0" i="0" u="none" strike="noStrike" cap="none">
           <a:solidFill>
             <a:srgbClr val="000000"/>
           </a:solidFill>
@@ -6020,7 +6285,7 @@
           <a:sym typeface="Arial"/>
         </a:defRPr>
       </a:lvl1pPr>
-      <a:lvl2pPr lvl="1" marR="0" rtl="0" algn="l">
+      <a:lvl2pPr marR="0" lvl="1" algn="l" rtl="0">
         <a:lnSpc>
           <a:spcPct val="100000"/>
         </a:lnSpc>
@@ -6034,7 +6299,7 @@
           <a:srgbClr val="000000"/>
         </a:buClr>
         <a:buFont typeface="Arial"/>
-        <a:defRPr b="0" i="0" sz="1400" u="none" cap="none" strike="noStrike">
+        <a:defRPr sz="1400" b="0" i="0" u="none" strike="noStrike" cap="none">
           <a:solidFill>
             <a:srgbClr val="000000"/>
           </a:solidFill>
@@ -6044,7 +6309,7 @@
           <a:sym typeface="Arial"/>
         </a:defRPr>
       </a:lvl2pPr>
-      <a:lvl3pPr lvl="2" marR="0" rtl="0" algn="l">
+      <a:lvl3pPr marR="0" lvl="2" algn="l" rtl="0">
         <a:lnSpc>
           <a:spcPct val="100000"/>
         </a:lnSpc>
@@ -6058,7 +6323,7 @@
           <a:srgbClr val="000000"/>
         </a:buClr>
         <a:buFont typeface="Arial"/>
-        <a:defRPr b="0" i="0" sz="1400" u="none" cap="none" strike="noStrike">
+        <a:defRPr sz="1400" b="0" i="0" u="none" strike="noStrike" cap="none">
           <a:solidFill>
             <a:srgbClr val="000000"/>
           </a:solidFill>
@@ -6068,7 +6333,7 @@
           <a:sym typeface="Arial"/>
         </a:defRPr>
       </a:lvl3pPr>
-      <a:lvl4pPr lvl="3" marR="0" rtl="0" algn="l">
+      <a:lvl4pPr marR="0" lvl="3" algn="l" rtl="0">
         <a:lnSpc>
           <a:spcPct val="100000"/>
         </a:lnSpc>
@@ -6082,7 +6347,7 @@
           <a:srgbClr val="000000"/>
         </a:buClr>
         <a:buFont typeface="Arial"/>
-        <a:defRPr b="0" i="0" sz="1400" u="none" cap="none" strike="noStrike">
+        <a:defRPr sz="1400" b="0" i="0" u="none" strike="noStrike" cap="none">
           <a:solidFill>
             <a:srgbClr val="000000"/>
           </a:solidFill>
@@ -6092,7 +6357,7 @@
           <a:sym typeface="Arial"/>
         </a:defRPr>
       </a:lvl4pPr>
-      <a:lvl5pPr lvl="4" marR="0" rtl="0" algn="l">
+      <a:lvl5pPr marR="0" lvl="4" algn="l" rtl="0">
         <a:lnSpc>
           <a:spcPct val="100000"/>
         </a:lnSpc>
@@ -6106,7 +6371,7 @@
           <a:srgbClr val="000000"/>
         </a:buClr>
         <a:buFont typeface="Arial"/>
-        <a:defRPr b="0" i="0" sz="1400" u="none" cap="none" strike="noStrike">
+        <a:defRPr sz="1400" b="0" i="0" u="none" strike="noStrike" cap="none">
           <a:solidFill>
             <a:srgbClr val="000000"/>
           </a:solidFill>
@@ -6116,7 +6381,7 @@
           <a:sym typeface="Arial"/>
         </a:defRPr>
       </a:lvl5pPr>
-      <a:lvl6pPr lvl="5" marR="0" rtl="0" algn="l">
+      <a:lvl6pPr marR="0" lvl="5" algn="l" rtl="0">
         <a:lnSpc>
           <a:spcPct val="100000"/>
         </a:lnSpc>
@@ -6130,7 +6395,7 @@
           <a:srgbClr val="000000"/>
         </a:buClr>
         <a:buFont typeface="Arial"/>
-        <a:defRPr b="0" i="0" sz="1400" u="none" cap="none" strike="noStrike">
+        <a:defRPr sz="1400" b="0" i="0" u="none" strike="noStrike" cap="none">
           <a:solidFill>
             <a:srgbClr val="000000"/>
           </a:solidFill>
@@ -6140,7 +6405,7 @@
           <a:sym typeface="Arial"/>
         </a:defRPr>
       </a:lvl6pPr>
-      <a:lvl7pPr lvl="6" marR="0" rtl="0" algn="l">
+      <a:lvl7pPr marR="0" lvl="6" algn="l" rtl="0">
         <a:lnSpc>
           <a:spcPct val="100000"/>
         </a:lnSpc>
@@ -6154,7 +6419,7 @@
           <a:srgbClr val="000000"/>
         </a:buClr>
         <a:buFont typeface="Arial"/>
-        <a:defRPr b="0" i="0" sz="1400" u="none" cap="none" strike="noStrike">
+        <a:defRPr sz="1400" b="0" i="0" u="none" strike="noStrike" cap="none">
           <a:solidFill>
             <a:srgbClr val="000000"/>
           </a:solidFill>
@@ -6164,7 +6429,7 @@
           <a:sym typeface="Arial"/>
         </a:defRPr>
       </a:lvl7pPr>
-      <a:lvl8pPr lvl="7" marR="0" rtl="0" algn="l">
+      <a:lvl8pPr marR="0" lvl="7" algn="l" rtl="0">
         <a:lnSpc>
           <a:spcPct val="100000"/>
         </a:lnSpc>
@@ -6178,7 +6443,7 @@
           <a:srgbClr val="000000"/>
         </a:buClr>
         <a:buFont typeface="Arial"/>
-        <a:defRPr b="0" i="0" sz="1400" u="none" cap="none" strike="noStrike">
+        <a:defRPr sz="1400" b="0" i="0" u="none" strike="noStrike" cap="none">
           <a:solidFill>
             <a:srgbClr val="000000"/>
           </a:solidFill>
@@ -6188,7 +6453,7 @@
           <a:sym typeface="Arial"/>
         </a:defRPr>
       </a:lvl8pPr>
-      <a:lvl9pPr lvl="8" marR="0" rtl="0" algn="l">
+      <a:lvl9pPr marR="0" lvl="8" algn="l" rtl="0">
         <a:lnSpc>
           <a:spcPct val="100000"/>
         </a:lnSpc>
@@ -6202,7 +6467,7 @@
           <a:srgbClr val="000000"/>
         </a:buClr>
         <a:buFont typeface="Arial"/>
-        <a:defRPr b="0" i="0" sz="1400" u="none" cap="none" strike="noStrike">
+        <a:defRPr sz="1400" b="0" i="0" u="none" strike="noStrike" cap="none">
           <a:solidFill>
             <a:srgbClr val="000000"/>
           </a:solidFill>
@@ -6214,7 +6479,7 @@
       </a:lvl9pPr>
     </p:titleStyle>
     <p:bodyStyle>
-      <a:defPPr lvl="0" marR="0" rtl="0" algn="l">
+      <a:defPPr marR="0" lvl="0" algn="l" rtl="0">
         <a:lnSpc>
           <a:spcPct val="100000"/>
         </a:lnSpc>
@@ -6225,7 +6490,7 @@
           <a:spcPts val="0"/>
         </a:spcAft>
       </a:defPPr>
-      <a:lvl1pPr lvl="0" marR="0" rtl="0" algn="l">
+      <a:lvl1pPr marR="0" lvl="0" algn="l" rtl="0">
         <a:lnSpc>
           <a:spcPct val="100000"/>
         </a:lnSpc>
@@ -6239,7 +6504,7 @@
           <a:srgbClr val="000000"/>
         </a:buClr>
         <a:buFont typeface="Arial"/>
-        <a:defRPr b="0" i="0" sz="1400" u="none" cap="none" strike="noStrike">
+        <a:defRPr sz="1400" b="0" i="0" u="none" strike="noStrike" cap="none">
           <a:solidFill>
             <a:srgbClr val="000000"/>
           </a:solidFill>
@@ -6249,7 +6514,7 @@
           <a:sym typeface="Arial"/>
         </a:defRPr>
       </a:lvl1pPr>
-      <a:lvl2pPr lvl="1" marR="0" rtl="0" algn="l">
+      <a:lvl2pPr marR="0" lvl="1" algn="l" rtl="0">
         <a:lnSpc>
           <a:spcPct val="100000"/>
         </a:lnSpc>
@@ -6263,7 +6528,7 @@
           <a:srgbClr val="000000"/>
         </a:buClr>
         <a:buFont typeface="Arial"/>
-        <a:defRPr b="0" i="0" sz="1400" u="none" cap="none" strike="noStrike">
+        <a:defRPr sz="1400" b="0" i="0" u="none" strike="noStrike" cap="none">
           <a:solidFill>
             <a:srgbClr val="000000"/>
           </a:solidFill>
@@ -6273,7 +6538,7 @@
           <a:sym typeface="Arial"/>
         </a:defRPr>
       </a:lvl2pPr>
-      <a:lvl3pPr lvl="2" marR="0" rtl="0" algn="l">
+      <a:lvl3pPr marR="0" lvl="2" algn="l" rtl="0">
         <a:lnSpc>
           <a:spcPct val="100000"/>
         </a:lnSpc>
@@ -6287,7 +6552,7 @@
           <a:srgbClr val="000000"/>
         </a:buClr>
         <a:buFont typeface="Arial"/>
-        <a:defRPr b="0" i="0" sz="1400" u="none" cap="none" strike="noStrike">
+        <a:defRPr sz="1400" b="0" i="0" u="none" strike="noStrike" cap="none">
           <a:solidFill>
             <a:srgbClr val="000000"/>
           </a:solidFill>
@@ -6297,7 +6562,7 @@
           <a:sym typeface="Arial"/>
         </a:defRPr>
       </a:lvl3pPr>
-      <a:lvl4pPr lvl="3" marR="0" rtl="0" algn="l">
+      <a:lvl4pPr marR="0" lvl="3" algn="l" rtl="0">
         <a:lnSpc>
           <a:spcPct val="100000"/>
         </a:lnSpc>
@@ -6311,7 +6576,7 @@
           <a:srgbClr val="000000"/>
         </a:buClr>
         <a:buFont typeface="Arial"/>
-        <a:defRPr b="0" i="0" sz="1400" u="none" cap="none" strike="noStrike">
+        <a:defRPr sz="1400" b="0" i="0" u="none" strike="noStrike" cap="none">
           <a:solidFill>
             <a:srgbClr val="000000"/>
           </a:solidFill>
@@ -6321,7 +6586,7 @@
           <a:sym typeface="Arial"/>
         </a:defRPr>
       </a:lvl4pPr>
-      <a:lvl5pPr lvl="4" marR="0" rtl="0" algn="l">
+      <a:lvl5pPr marR="0" lvl="4" algn="l" rtl="0">
         <a:lnSpc>
           <a:spcPct val="100000"/>
         </a:lnSpc>
@@ -6335,7 +6600,7 @@
           <a:srgbClr val="000000"/>
         </a:buClr>
         <a:buFont typeface="Arial"/>
-        <a:defRPr b="0" i="0" sz="1400" u="none" cap="none" strike="noStrike">
+        <a:defRPr sz="1400" b="0" i="0" u="none" strike="noStrike" cap="none">
           <a:solidFill>
             <a:srgbClr val="000000"/>
           </a:solidFill>
@@ -6345,7 +6610,7 @@
           <a:sym typeface="Arial"/>
         </a:defRPr>
       </a:lvl5pPr>
-      <a:lvl6pPr lvl="5" marR="0" rtl="0" algn="l">
+      <a:lvl6pPr marR="0" lvl="5" algn="l" rtl="0">
         <a:lnSpc>
           <a:spcPct val="100000"/>
         </a:lnSpc>
@@ -6359,7 +6624,7 @@
           <a:srgbClr val="000000"/>
         </a:buClr>
         <a:buFont typeface="Arial"/>
-        <a:defRPr b="0" i="0" sz="1400" u="none" cap="none" strike="noStrike">
+        <a:defRPr sz="1400" b="0" i="0" u="none" strike="noStrike" cap="none">
           <a:solidFill>
             <a:srgbClr val="000000"/>
           </a:solidFill>
@@ -6369,7 +6634,7 @@
           <a:sym typeface="Arial"/>
         </a:defRPr>
       </a:lvl6pPr>
-      <a:lvl7pPr lvl="6" marR="0" rtl="0" algn="l">
+      <a:lvl7pPr marR="0" lvl="6" algn="l" rtl="0">
         <a:lnSpc>
           <a:spcPct val="100000"/>
         </a:lnSpc>
@@ -6383,7 +6648,7 @@
           <a:srgbClr val="000000"/>
         </a:buClr>
         <a:buFont typeface="Arial"/>
-        <a:defRPr b="0" i="0" sz="1400" u="none" cap="none" strike="noStrike">
+        <a:defRPr sz="1400" b="0" i="0" u="none" strike="noStrike" cap="none">
           <a:solidFill>
             <a:srgbClr val="000000"/>
           </a:solidFill>
@@ -6393,7 +6658,7 @@
           <a:sym typeface="Arial"/>
         </a:defRPr>
       </a:lvl7pPr>
-      <a:lvl8pPr lvl="7" marR="0" rtl="0" algn="l">
+      <a:lvl8pPr marR="0" lvl="7" algn="l" rtl="0">
         <a:lnSpc>
           <a:spcPct val="100000"/>
         </a:lnSpc>
@@ -6407,7 +6672,7 @@
           <a:srgbClr val="000000"/>
         </a:buClr>
         <a:buFont typeface="Arial"/>
-        <a:defRPr b="0" i="0" sz="1400" u="none" cap="none" strike="noStrike">
+        <a:defRPr sz="1400" b="0" i="0" u="none" strike="noStrike" cap="none">
           <a:solidFill>
             <a:srgbClr val="000000"/>
           </a:solidFill>
@@ -6417,7 +6682,7 @@
           <a:sym typeface="Arial"/>
         </a:defRPr>
       </a:lvl8pPr>
-      <a:lvl9pPr lvl="8" marR="0" rtl="0" algn="l">
+      <a:lvl9pPr marR="0" lvl="8" algn="l" rtl="0">
         <a:lnSpc>
           <a:spcPct val="100000"/>
         </a:lnSpc>
@@ -6431,7 +6696,7 @@
           <a:srgbClr val="000000"/>
         </a:buClr>
         <a:buFont typeface="Arial"/>
-        <a:defRPr b="0" i="0" sz="1400" u="none" cap="none" strike="noStrike">
+        <a:defRPr sz="1400" b="0" i="0" u="none" strike="noStrike" cap="none">
           <a:solidFill>
             <a:srgbClr val="000000"/>
           </a:solidFill>
@@ -6443,7 +6708,7 @@
       </a:lvl9pPr>
     </p:bodyStyle>
     <p:otherStyle>
-      <a:defPPr lvl="0" marR="0" rtl="0" algn="l">
+      <a:defPPr marR="0" lvl="0" algn="l" rtl="0">
         <a:lnSpc>
           <a:spcPct val="100000"/>
         </a:lnSpc>
@@ -6454,7 +6719,7 @@
           <a:spcPts val="0"/>
         </a:spcAft>
       </a:defPPr>
-      <a:lvl1pPr lvl="0" marR="0" rtl="0" algn="l">
+      <a:lvl1pPr marR="0" lvl="0" algn="l" rtl="0">
         <a:lnSpc>
           <a:spcPct val="100000"/>
         </a:lnSpc>
@@ -6468,7 +6733,7 @@
           <a:srgbClr val="000000"/>
         </a:buClr>
         <a:buFont typeface="Arial"/>
-        <a:defRPr b="0" i="0" sz="1400" u="none" cap="none" strike="noStrike">
+        <a:defRPr sz="1400" b="0" i="0" u="none" strike="noStrike" cap="none">
           <a:solidFill>
             <a:srgbClr val="000000"/>
           </a:solidFill>
@@ -6478,7 +6743,7 @@
           <a:sym typeface="Arial"/>
         </a:defRPr>
       </a:lvl1pPr>
-      <a:lvl2pPr lvl="1" marR="0" rtl="0" algn="l">
+      <a:lvl2pPr marR="0" lvl="1" algn="l" rtl="0">
         <a:lnSpc>
           <a:spcPct val="100000"/>
         </a:lnSpc>
@@ -6492,7 +6757,7 @@
           <a:srgbClr val="000000"/>
         </a:buClr>
         <a:buFont typeface="Arial"/>
-        <a:defRPr b="0" i="0" sz="1400" u="none" cap="none" strike="noStrike">
+        <a:defRPr sz="1400" b="0" i="0" u="none" strike="noStrike" cap="none">
           <a:solidFill>
             <a:srgbClr val="000000"/>
           </a:solidFill>
@@ -6502,7 +6767,7 @@
           <a:sym typeface="Arial"/>
         </a:defRPr>
       </a:lvl2pPr>
-      <a:lvl3pPr lvl="2" marR="0" rtl="0" algn="l">
+      <a:lvl3pPr marR="0" lvl="2" algn="l" rtl="0">
         <a:lnSpc>
           <a:spcPct val="100000"/>
         </a:lnSpc>
@@ -6516,7 +6781,7 @@
           <a:srgbClr val="000000"/>
         </a:buClr>
         <a:buFont typeface="Arial"/>
-        <a:defRPr b="0" i="0" sz="1400" u="none" cap="none" strike="noStrike">
+        <a:defRPr sz="1400" b="0" i="0" u="none" strike="noStrike" cap="none">
           <a:solidFill>
             <a:srgbClr val="000000"/>
           </a:solidFill>
@@ -6526,7 +6791,7 @@
           <a:sym typeface="Arial"/>
         </a:defRPr>
       </a:lvl3pPr>
-      <a:lvl4pPr lvl="3" marR="0" rtl="0" algn="l">
+      <a:lvl4pPr marR="0" lvl="3" algn="l" rtl="0">
         <a:lnSpc>
           <a:spcPct val="100000"/>
         </a:lnSpc>
@@ -6540,7 +6805,7 @@
           <a:srgbClr val="000000"/>
         </a:buClr>
         <a:buFont typeface="Arial"/>
-        <a:defRPr b="0" i="0" sz="1400" u="none" cap="none" strike="noStrike">
+        <a:defRPr sz="1400" b="0" i="0" u="none" strike="noStrike" cap="none">
           <a:solidFill>
             <a:srgbClr val="000000"/>
           </a:solidFill>
@@ -6550,7 +6815,7 @@
           <a:sym typeface="Arial"/>
         </a:defRPr>
       </a:lvl4pPr>
-      <a:lvl5pPr lvl="4" marR="0" rtl="0" algn="l">
+      <a:lvl5pPr marR="0" lvl="4" algn="l" rtl="0">
         <a:lnSpc>
           <a:spcPct val="100000"/>
         </a:lnSpc>
@@ -6564,7 +6829,7 @@
           <a:srgbClr val="000000"/>
         </a:buClr>
         <a:buFont typeface="Arial"/>
-        <a:defRPr b="0" i="0" sz="1400" u="none" cap="none" strike="noStrike">
+        <a:defRPr sz="1400" b="0" i="0" u="none" strike="noStrike" cap="none">
           <a:solidFill>
             <a:srgbClr val="000000"/>
           </a:solidFill>
@@ -6574,7 +6839,7 @@
           <a:sym typeface="Arial"/>
         </a:defRPr>
       </a:lvl5pPr>
-      <a:lvl6pPr lvl="5" marR="0" rtl="0" algn="l">
+      <a:lvl6pPr marR="0" lvl="5" algn="l" rtl="0">
         <a:lnSpc>
           <a:spcPct val="100000"/>
         </a:lnSpc>
@@ -6588,7 +6853,7 @@
           <a:srgbClr val="000000"/>
         </a:buClr>
         <a:buFont typeface="Arial"/>
-        <a:defRPr b="0" i="0" sz="1400" u="none" cap="none" strike="noStrike">
+        <a:defRPr sz="1400" b="0" i="0" u="none" strike="noStrike" cap="none">
           <a:solidFill>
             <a:srgbClr val="000000"/>
           </a:solidFill>
@@ -6598,7 +6863,7 @@
           <a:sym typeface="Arial"/>
         </a:defRPr>
       </a:lvl6pPr>
-      <a:lvl7pPr lvl="6" marR="0" rtl="0" algn="l">
+      <a:lvl7pPr marR="0" lvl="6" algn="l" rtl="0">
         <a:lnSpc>
           <a:spcPct val="100000"/>
         </a:lnSpc>
@@ -6612,7 +6877,7 @@
           <a:srgbClr val="000000"/>
         </a:buClr>
         <a:buFont typeface="Arial"/>
-        <a:defRPr b="0" i="0" sz="1400" u="none" cap="none" strike="noStrike">
+        <a:defRPr sz="1400" b="0" i="0" u="none" strike="noStrike" cap="none">
           <a:solidFill>
             <a:srgbClr val="000000"/>
           </a:solidFill>
@@ -6622,7 +6887,7 @@
           <a:sym typeface="Arial"/>
         </a:defRPr>
       </a:lvl7pPr>
-      <a:lvl8pPr lvl="7" marR="0" rtl="0" algn="l">
+      <a:lvl8pPr marR="0" lvl="7" algn="l" rtl="0">
         <a:lnSpc>
           <a:spcPct val="100000"/>
         </a:lnSpc>
@@ -6636,7 +6901,7 @@
           <a:srgbClr val="000000"/>
         </a:buClr>
         <a:buFont typeface="Arial"/>
-        <a:defRPr b="0" i="0" sz="1400" u="none" cap="none" strike="noStrike">
+        <a:defRPr sz="1400" b="0" i="0" u="none" strike="noStrike" cap="none">
           <a:solidFill>
             <a:srgbClr val="000000"/>
           </a:solidFill>
@@ -6646,7 +6911,7 @@
           <a:sym typeface="Arial"/>
         </a:defRPr>
       </a:lvl8pPr>
-      <a:lvl9pPr lvl="8" marR="0" rtl="0" algn="l">
+      <a:lvl9pPr marR="0" lvl="8" algn="l" rtl="0">
         <a:lnSpc>
           <a:spcPct val="100000"/>
         </a:lnSpc>
@@ -6660,7 +6925,7 @@
           <a:srgbClr val="000000"/>
         </a:buClr>
         <a:buFont typeface="Arial"/>
-        <a:defRPr b="0" i="0" sz="1400" u="none" cap="none" strike="noStrike">
+        <a:defRPr sz="1400" b="0" i="0" u="none" strike="noStrike" cap="none">
           <a:solidFill>
             <a:srgbClr val="000000"/>
           </a:solidFill>
@@ -6676,11 +6941,11 @@
 </file>
 
 <file path=ppt/slides/slide1.xml><?xml version="1.0" encoding="utf-8"?>
-<p:sld xmlns:a="http://schemas.openxmlformats.org/drawingml/2006/main" xmlns:r="http://schemas.openxmlformats.org/officeDocument/2006/relationships" xmlns:mc="http://schemas.openxmlformats.org/markup-compatibility/2006" xmlns:mv="urn:schemas-microsoft-com:mac:vml" xmlns:p="http://schemas.openxmlformats.org/presentationml/2006/main" xmlns:c="http://schemas.openxmlformats.org/drawingml/2006/chart" xmlns:dgm="http://schemas.openxmlformats.org/drawingml/2006/diagram" xmlns:o="urn:schemas-microsoft-com:office:office" xmlns:v="urn:schemas-microsoft-com:vml" xmlns:pvml="urn:schemas-microsoft-com:office:powerpoint" xmlns:com="http://schemas.openxmlformats.org/drawingml/2006/compatibility" xmlns:p14="http://schemas.microsoft.com/office/powerpoint/2010/main" xmlns:p15="http://schemas.microsoft.com/office/powerpoint/2012/main" xmlns:ahyp="http://schemas.microsoft.com/office/drawing/2018/hyperlinkcolor">
+<p:sld xmlns:a="http://schemas.openxmlformats.org/drawingml/2006/main" xmlns:r="http://schemas.openxmlformats.org/officeDocument/2006/relationships" xmlns:p="http://schemas.openxmlformats.org/presentationml/2006/main">
   <p:cSld>
     <p:spTree>
       <p:nvGrpSpPr>
-        <p:cNvPr id="58" name="Shape 58"/>
+        <p:cNvPr id="1" name="Shape 58"/>
         <p:cNvGrpSpPr/>
         <p:nvPr/>
       </p:nvGrpSpPr>
@@ -6695,7 +6960,9 @@
       <p:sp>
         <p:nvSpPr>
           <p:cNvPr id="59" name="Google Shape;59;p13"/>
-          <p:cNvSpPr txBox="1"/>
+          <p:cNvSpPr txBox="1">
+            <a:spLocks noGrp="1"/>
+          </p:cNvSpPr>
           <p:nvPr>
             <p:ph type="ctrTitle"/>
           </p:nvPr>
@@ -6710,12 +6977,12 @@
           </a:prstGeom>
         </p:spPr>
         <p:txBody>
-          <a:bodyPr anchorCtr="0" anchor="b" bIns="91425" lIns="91425" spcFirstLastPara="1" rIns="91425" wrap="square" tIns="91425">
+          <a:bodyPr spcFirstLastPara="1" wrap="square" lIns="91425" tIns="91425" rIns="91425" bIns="91425" anchor="b" anchorCtr="0">
             <a:noAutofit/>
           </a:bodyPr>
           <a:lstStyle/>
           <a:p>
-            <a:pPr indent="0" lvl="0" marL="0" rtl="0" algn="l">
+            <a:pPr marL="0" lvl="0" indent="0" algn="l" rtl="0">
               <a:spcBef>
                 <a:spcPts val="0"/>
               </a:spcBef>
@@ -6725,19 +6992,21 @@
               <a:buNone/>
             </a:pPr>
             <a:r>
-              <a:rPr lang="it"/>
-              <a:t>Crickle o crikle o appett o goku</a:t>
+              <a:rPr lang="it" dirty="0"/>
+              <a:t>Presentazione dello sviluppo di «Crickle»</a:t>
             </a:r>
-            <a:endParaRPr/>
+            <a:endParaRPr dirty="0"/>
           </a:p>
         </p:txBody>
       </p:sp>
       <p:sp>
         <p:nvSpPr>
           <p:cNvPr id="60" name="Google Shape;60;p13"/>
-          <p:cNvSpPr txBox="1"/>
+          <p:cNvSpPr txBox="1">
+            <a:spLocks noGrp="1"/>
+          </p:cNvSpPr>
           <p:nvPr>
-            <p:ph idx="1" type="subTitle"/>
+            <p:ph type="subTitle" idx="1"/>
           </p:nvPr>
         </p:nvSpPr>
         <p:spPr>
@@ -6750,12 +7019,12 @@
           </a:prstGeom>
         </p:spPr>
         <p:txBody>
-          <a:bodyPr anchorCtr="0" anchor="t" bIns="91425" lIns="91425" spcFirstLastPara="1" rIns="91425" wrap="square" tIns="91425">
+          <a:bodyPr spcFirstLastPara="1" wrap="square" lIns="91425" tIns="91425" rIns="91425" bIns="91425" anchor="t" anchorCtr="0">
             <a:noAutofit/>
           </a:bodyPr>
           <a:lstStyle/>
           <a:p>
-            <a:pPr indent="0" lvl="0" marL="0" rtl="0" algn="l">
+            <a:pPr marL="0" lvl="0" indent="0" algn="l" rtl="0">
               <a:spcBef>
                 <a:spcPts val="0"/>
               </a:spcBef>
@@ -6765,10 +7034,10 @@
               <a:buNone/>
             </a:pPr>
             <a:r>
-              <a:rPr lang="it"/>
+              <a:rPr lang="it" dirty="0"/>
               <a:t>Albertario, Gabello, Panceri, Tomasso</a:t>
             </a:r>
-            <a:endParaRPr/>
+            <a:endParaRPr dirty="0"/>
           </a:p>
         </p:txBody>
       </p:sp>
@@ -6781,11 +7050,11 @@
 </file>
 
 <file path=ppt/slides/slide2.xml><?xml version="1.0" encoding="utf-8"?>
-<p:sld xmlns:a="http://schemas.openxmlformats.org/drawingml/2006/main" xmlns:r="http://schemas.openxmlformats.org/officeDocument/2006/relationships" xmlns:mc="http://schemas.openxmlformats.org/markup-compatibility/2006" xmlns:mv="urn:schemas-microsoft-com:mac:vml" xmlns:p="http://schemas.openxmlformats.org/presentationml/2006/main" xmlns:c="http://schemas.openxmlformats.org/drawingml/2006/chart" xmlns:dgm="http://schemas.openxmlformats.org/drawingml/2006/diagram" xmlns:o="urn:schemas-microsoft-com:office:office" xmlns:v="urn:schemas-microsoft-com:vml" xmlns:pvml="urn:schemas-microsoft-com:office:powerpoint" xmlns:com="http://schemas.openxmlformats.org/drawingml/2006/compatibility" xmlns:p14="http://schemas.microsoft.com/office/powerpoint/2010/main" xmlns:p15="http://schemas.microsoft.com/office/powerpoint/2012/main" xmlns:ahyp="http://schemas.microsoft.com/office/drawing/2018/hyperlinkcolor">
+<p:sld xmlns:a="http://schemas.openxmlformats.org/drawingml/2006/main" xmlns:r="http://schemas.openxmlformats.org/officeDocument/2006/relationships" xmlns:p="http://schemas.openxmlformats.org/presentationml/2006/main">
   <p:cSld>
     <p:spTree>
       <p:nvGrpSpPr>
-        <p:cNvPr id="64" name="Shape 64"/>
+        <p:cNvPr id="1" name="Shape 64"/>
         <p:cNvGrpSpPr/>
         <p:nvPr/>
       </p:nvGrpSpPr>
@@ -6800,7 +7069,9 @@
       <p:sp>
         <p:nvSpPr>
           <p:cNvPr id="65" name="Google Shape;65;p14"/>
-          <p:cNvSpPr txBox="1"/>
+          <p:cNvSpPr txBox="1">
+            <a:spLocks noGrp="1"/>
+          </p:cNvSpPr>
           <p:nvPr>
             <p:ph type="title"/>
           </p:nvPr>
@@ -6815,12 +7086,12 @@
           </a:prstGeom>
         </p:spPr>
         <p:txBody>
-          <a:bodyPr anchorCtr="0" anchor="ctr" bIns="91425" lIns="91425" spcFirstLastPara="1" rIns="91425" wrap="square" tIns="91425">
+          <a:bodyPr spcFirstLastPara="1" wrap="square" lIns="91425" tIns="91425" rIns="91425" bIns="91425" anchor="ctr" anchorCtr="0">
             <a:noAutofit/>
           </a:bodyPr>
           <a:lstStyle/>
           <a:p>
-            <a:pPr indent="0" lvl="0" marL="0" rtl="0" algn="l">
+            <a:pPr marL="0" lvl="0" indent="0" algn="l" rtl="0">
               <a:spcBef>
                 <a:spcPts val="0"/>
               </a:spcBef>
@@ -6846,11 +7117,11 @@
 </file>
 
 <file path=ppt/slides/slide3.xml><?xml version="1.0" encoding="utf-8"?>
-<p:sld xmlns:a="http://schemas.openxmlformats.org/drawingml/2006/main" xmlns:r="http://schemas.openxmlformats.org/officeDocument/2006/relationships" xmlns:mc="http://schemas.openxmlformats.org/markup-compatibility/2006" xmlns:mv="urn:schemas-microsoft-com:mac:vml" xmlns:p="http://schemas.openxmlformats.org/presentationml/2006/main" xmlns:c="http://schemas.openxmlformats.org/drawingml/2006/chart" xmlns:dgm="http://schemas.openxmlformats.org/drawingml/2006/diagram" xmlns:o="urn:schemas-microsoft-com:office:office" xmlns:v="urn:schemas-microsoft-com:vml" xmlns:pvml="urn:schemas-microsoft-com:office:powerpoint" xmlns:com="http://schemas.openxmlformats.org/drawingml/2006/compatibility" xmlns:p14="http://schemas.microsoft.com/office/powerpoint/2010/main" xmlns:p15="http://schemas.microsoft.com/office/powerpoint/2012/main" xmlns:ahyp="http://schemas.microsoft.com/office/drawing/2018/hyperlinkcolor">
+<p:sld xmlns:a="http://schemas.openxmlformats.org/drawingml/2006/main" xmlns:r="http://schemas.openxmlformats.org/officeDocument/2006/relationships" xmlns:p="http://schemas.openxmlformats.org/presentationml/2006/main">
   <p:cSld>
     <p:spTree>
       <p:nvGrpSpPr>
-        <p:cNvPr id="69" name="Shape 69"/>
+        <p:cNvPr id="1" name="Shape 69"/>
         <p:cNvGrpSpPr/>
         <p:nvPr/>
       </p:nvGrpSpPr>
@@ -6865,7 +7136,9 @@
       <p:sp>
         <p:nvSpPr>
           <p:cNvPr id="70" name="Google Shape;70;p15"/>
-          <p:cNvSpPr txBox="1"/>
+          <p:cNvSpPr txBox="1">
+            <a:spLocks noGrp="1"/>
+          </p:cNvSpPr>
           <p:nvPr>
             <p:ph type="title"/>
           </p:nvPr>
@@ -6880,12 +7153,12 @@
           </a:prstGeom>
         </p:spPr>
         <p:txBody>
-          <a:bodyPr anchorCtr="0" anchor="t" bIns="91425" lIns="91425" spcFirstLastPara="1" rIns="91425" wrap="square" tIns="91425">
+          <a:bodyPr spcFirstLastPara="1" wrap="square" lIns="91425" tIns="91425" rIns="91425" bIns="91425" anchor="t" anchorCtr="0">
             <a:noAutofit/>
           </a:bodyPr>
           <a:lstStyle/>
           <a:p>
-            <a:pPr indent="0" lvl="0" marL="0" rtl="0" algn="ctr">
+            <a:pPr marL="0" lvl="0" indent="0" algn="ctr" rtl="0">
               <a:spcBef>
                 <a:spcPts val="0"/>
               </a:spcBef>
@@ -6905,9 +7178,11 @@
       <p:sp>
         <p:nvSpPr>
           <p:cNvPr id="71" name="Google Shape;71;p15"/>
-          <p:cNvSpPr txBox="1"/>
+          <p:cNvSpPr txBox="1">
+            <a:spLocks noGrp="1"/>
+          </p:cNvSpPr>
           <p:nvPr>
-            <p:ph idx="2" type="body"/>
+            <p:ph type="body" idx="2"/>
           </p:nvPr>
         </p:nvSpPr>
         <p:spPr>
@@ -6920,12 +7195,12 @@
           </a:prstGeom>
         </p:spPr>
         <p:txBody>
-          <a:bodyPr anchorCtr="0" anchor="ctr" bIns="91425" lIns="91425" spcFirstLastPara="1" rIns="91425" wrap="square" tIns="91425">
+          <a:bodyPr spcFirstLastPara="1" wrap="square" lIns="91425" tIns="91425" rIns="91425" bIns="91425" anchor="ctr" anchorCtr="0">
             <a:noAutofit/>
           </a:bodyPr>
           <a:lstStyle/>
           <a:p>
-            <a:pPr indent="-387350" lvl="0" marL="457200" rtl="0" algn="l">
+            <a:pPr marL="457200" lvl="0" indent="-387350" algn="l" rtl="0">
               <a:spcBef>
                 <a:spcPts val="0"/>
               </a:spcBef>
@@ -6942,7 +7217,7 @@
             <a:endParaRPr sz="2500"/>
           </a:p>
           <a:p>
-            <a:pPr indent="-387350" lvl="0" marL="457200" rtl="0" algn="l">
+            <a:pPr marL="457200" lvl="0" indent="-387350" algn="l" rtl="0">
               <a:spcBef>
                 <a:spcPts val="0"/>
               </a:spcBef>
@@ -6959,7 +7234,7 @@
             <a:endParaRPr sz="2500"/>
           </a:p>
           <a:p>
-            <a:pPr indent="-387350" lvl="0" marL="457200" rtl="0" algn="l">
+            <a:pPr marL="457200" lvl="0" indent="-387350" algn="l" rtl="0">
               <a:spcBef>
                 <a:spcPts val="0"/>
               </a:spcBef>
@@ -6976,7 +7251,7 @@
             <a:endParaRPr sz="2500"/>
           </a:p>
           <a:p>
-            <a:pPr indent="-387350" lvl="0" marL="457200" rtl="0" algn="l">
+            <a:pPr marL="457200" lvl="0" indent="-387350" algn="l" rtl="0">
               <a:spcBef>
                 <a:spcPts val="0"/>
               </a:spcBef>
@@ -6993,7 +7268,7 @@
             <a:endParaRPr sz="2500"/>
           </a:p>
           <a:p>
-            <a:pPr indent="-387350" lvl="0" marL="457200" rtl="0" algn="l">
+            <a:pPr marL="457200" lvl="0" indent="-387350" algn="l" rtl="0">
               <a:spcBef>
                 <a:spcPts val="0"/>
               </a:spcBef>
@@ -7031,12 +7306,12 @@
           </a:ln>
         </p:spPr>
         <p:txBody>
-          <a:bodyPr anchorCtr="0" anchor="ctr" bIns="91425" lIns="91425" spcFirstLastPara="1" rIns="91425" wrap="square" tIns="91425">
+          <a:bodyPr spcFirstLastPara="1" wrap="square" lIns="91425" tIns="91425" rIns="91425" bIns="91425" anchor="ctr" anchorCtr="0">
             <a:noAutofit/>
           </a:bodyPr>
           <a:lstStyle/>
           <a:p>
-            <a:pPr indent="-387350" lvl="0" marL="457200" rtl="0" algn="l">
+            <a:pPr marL="457200" lvl="0" indent="-387350" algn="l" rtl="0">
               <a:spcBef>
                 <a:spcPts val="0"/>
               </a:spcBef>
@@ -7051,7 +7326,7 @@
               <a:buChar char="●"/>
             </a:pPr>
             <a:r>
-              <a:rPr lang="it" sz="2500">
+              <a:rPr lang="it" sz="2500" dirty="0">
                 <a:solidFill>
                   <a:schemeClr val="dk1"/>
                 </a:solidFill>
@@ -7062,7 +7337,7 @@
               </a:rPr>
               <a:t>VS code</a:t>
             </a:r>
-            <a:endParaRPr sz="2500">
+            <a:endParaRPr sz="2500" dirty="0">
               <a:solidFill>
                 <a:schemeClr val="dk1"/>
               </a:solidFill>
@@ -7073,7 +7348,7 @@
             </a:endParaRPr>
           </a:p>
           <a:p>
-            <a:pPr indent="-387350" lvl="0" marL="457200" rtl="0" algn="l">
+            <a:pPr marL="457200" lvl="0" indent="-387350" algn="l" rtl="0">
               <a:spcBef>
                 <a:spcPts val="0"/>
               </a:spcBef>
@@ -7088,7 +7363,7 @@
               <a:buChar char="●"/>
             </a:pPr>
             <a:r>
-              <a:rPr lang="it" sz="2500">
+              <a:rPr lang="it" sz="2500" dirty="0">
                 <a:solidFill>
                   <a:schemeClr val="dk1"/>
                 </a:solidFill>
@@ -7099,7 +7374,7 @@
               </a:rPr>
               <a:t>Android Studio</a:t>
             </a:r>
-            <a:endParaRPr sz="2500">
+            <a:endParaRPr sz="2500" dirty="0">
               <a:solidFill>
                 <a:schemeClr val="dk1"/>
               </a:solidFill>
@@ -7110,7 +7385,7 @@
             </a:endParaRPr>
           </a:p>
           <a:p>
-            <a:pPr indent="-387350" lvl="0" marL="457200" rtl="0" algn="l">
+            <a:pPr marL="457200" lvl="0" indent="-387350" algn="l" rtl="0">
               <a:spcBef>
                 <a:spcPts val="0"/>
               </a:spcBef>
@@ -7125,7 +7400,7 @@
               <a:buChar char="●"/>
             </a:pPr>
             <a:r>
-              <a:rPr lang="it" sz="2500">
+              <a:rPr lang="it" sz="2500" dirty="0">
                 <a:solidFill>
                   <a:schemeClr val="dk1"/>
                 </a:solidFill>
@@ -7136,7 +7411,7 @@
               </a:rPr>
               <a:t>MySQL Workbench</a:t>
             </a:r>
-            <a:endParaRPr sz="2500">
+            <a:endParaRPr sz="2500" dirty="0">
               <a:solidFill>
                 <a:schemeClr val="dk1"/>
               </a:solidFill>
@@ -7151,7 +7426,9 @@
       <p:sp>
         <p:nvSpPr>
           <p:cNvPr id="73" name="Google Shape;73;p15"/>
-          <p:cNvSpPr txBox="1"/>
+          <p:cNvSpPr txBox="1">
+            <a:spLocks noGrp="1"/>
+          </p:cNvSpPr>
           <p:nvPr>
             <p:ph type="title"/>
           </p:nvPr>
@@ -7166,12 +7443,12 @@
           </a:prstGeom>
         </p:spPr>
         <p:txBody>
-          <a:bodyPr anchorCtr="0" anchor="t" bIns="91425" lIns="91425" spcFirstLastPara="1" rIns="91425" wrap="square" tIns="91425">
+          <a:bodyPr spcFirstLastPara="1" wrap="square" lIns="91425" tIns="91425" rIns="91425" bIns="91425" anchor="t" anchorCtr="0">
             <a:noAutofit/>
           </a:bodyPr>
           <a:lstStyle/>
           <a:p>
-            <a:pPr indent="0" lvl="0" marL="0" rtl="0" algn="ctr">
+            <a:pPr marL="0" lvl="0" indent="0" algn="ctr" rtl="0">
               <a:spcBef>
                 <a:spcPts val="0"/>
               </a:spcBef>
@@ -7197,11 +7474,11 @@
 </file>
 
 <file path=ppt/slides/slide4.xml><?xml version="1.0" encoding="utf-8"?>
-<p:sld xmlns:a="http://schemas.openxmlformats.org/drawingml/2006/main" xmlns:r="http://schemas.openxmlformats.org/officeDocument/2006/relationships" xmlns:mc="http://schemas.openxmlformats.org/markup-compatibility/2006" xmlns:mv="urn:schemas-microsoft-com:mac:vml" xmlns:p="http://schemas.openxmlformats.org/presentationml/2006/main" xmlns:c="http://schemas.openxmlformats.org/drawingml/2006/chart" xmlns:dgm="http://schemas.openxmlformats.org/drawingml/2006/diagram" xmlns:o="urn:schemas-microsoft-com:office:office" xmlns:v="urn:schemas-microsoft-com:vml" xmlns:pvml="urn:schemas-microsoft-com:office:powerpoint" xmlns:com="http://schemas.openxmlformats.org/drawingml/2006/compatibility" xmlns:p14="http://schemas.microsoft.com/office/powerpoint/2010/main" xmlns:p15="http://schemas.microsoft.com/office/powerpoint/2012/main" xmlns:ahyp="http://schemas.microsoft.com/office/drawing/2018/hyperlinkcolor">
+<p:sld xmlns:a="http://schemas.openxmlformats.org/drawingml/2006/main" xmlns:r="http://schemas.openxmlformats.org/officeDocument/2006/relationships" xmlns:p="http://schemas.openxmlformats.org/presentationml/2006/main">
   <p:cSld>
     <p:spTree>
       <p:nvGrpSpPr>
-        <p:cNvPr id="77" name="Shape 77"/>
+        <p:cNvPr id="1" name="Shape 77"/>
         <p:cNvGrpSpPr/>
         <p:nvPr/>
       </p:nvGrpSpPr>
@@ -7216,7 +7493,9 @@
       <p:sp>
         <p:nvSpPr>
           <p:cNvPr id="78" name="Google Shape;78;p16"/>
-          <p:cNvSpPr txBox="1"/>
+          <p:cNvSpPr txBox="1">
+            <a:spLocks noGrp="1"/>
+          </p:cNvSpPr>
           <p:nvPr>
             <p:ph type="title"/>
           </p:nvPr>
@@ -7231,12 +7510,12 @@
           </a:prstGeom>
         </p:spPr>
         <p:txBody>
-          <a:bodyPr anchorCtr="0" anchor="b" bIns="91425" lIns="91425" spcFirstLastPara="1" rIns="91425" wrap="square" tIns="91425">
+          <a:bodyPr spcFirstLastPara="1" wrap="square" lIns="91425" tIns="91425" rIns="91425" bIns="91425" anchor="b" anchorCtr="0">
             <a:noAutofit/>
           </a:bodyPr>
           <a:lstStyle/>
           <a:p>
-            <a:pPr indent="0" lvl="0" marL="0" rtl="0" algn="l">
+            <a:pPr marL="0" lvl="0" indent="0" algn="l" rtl="0">
               <a:spcBef>
                 <a:spcPts val="0"/>
               </a:spcBef>
@@ -7262,11 +7541,403 @@
 </file>
 
 <file path=ppt/slides/slide5.xml><?xml version="1.0" encoding="utf-8"?>
-<p:sld xmlns:a="http://schemas.openxmlformats.org/drawingml/2006/main" xmlns:r="http://schemas.openxmlformats.org/officeDocument/2006/relationships" xmlns:mc="http://schemas.openxmlformats.org/markup-compatibility/2006" xmlns:mv="urn:schemas-microsoft-com:mac:vml" xmlns:p="http://schemas.openxmlformats.org/presentationml/2006/main" xmlns:c="http://schemas.openxmlformats.org/drawingml/2006/chart" xmlns:dgm="http://schemas.openxmlformats.org/drawingml/2006/diagram" xmlns:o="urn:schemas-microsoft-com:office:office" xmlns:v="urn:schemas-microsoft-com:vml" xmlns:pvml="urn:schemas-microsoft-com:office:powerpoint" xmlns:com="http://schemas.openxmlformats.org/drawingml/2006/compatibility" xmlns:p14="http://schemas.microsoft.com/office/powerpoint/2010/main" xmlns:p15="http://schemas.microsoft.com/office/powerpoint/2012/main" xmlns:ahyp="http://schemas.microsoft.com/office/drawing/2018/hyperlinkcolor">
+<p:sld xmlns:a="http://schemas.openxmlformats.org/drawingml/2006/main" xmlns:r="http://schemas.openxmlformats.org/officeDocument/2006/relationships" xmlns:p="http://schemas.openxmlformats.org/presentationml/2006/main">
   <p:cSld>
     <p:spTree>
       <p:nvGrpSpPr>
-        <p:cNvPr id="82" name="Shape 82"/>
+        <p:cNvPr id="1" name="Shape 69">
+          <a:extLst>
+            <a:ext uri="{FF2B5EF4-FFF2-40B4-BE49-F238E27FC236}">
+              <a16:creationId xmlns:a16="http://schemas.microsoft.com/office/drawing/2014/main" id="{6C9F9AC3-6847-892B-5E11-98E8FA2E232A}"/>
+            </a:ext>
+          </a:extLst>
+        </p:cNvPr>
+        <p:cNvGrpSpPr/>
+        <p:nvPr/>
+      </p:nvGrpSpPr>
+      <p:grpSpPr>
+        <a:xfrm>
+          <a:off x="0" y="0"/>
+          <a:ext cx="0" cy="0"/>
+          <a:chOff x="0" y="0"/>
+          <a:chExt cx="0" cy="0"/>
+        </a:xfrm>
+      </p:grpSpPr>
+      <p:sp>
+        <p:nvSpPr>
+          <p:cNvPr id="70" name="Google Shape;70;p15">
+            <a:extLst>
+              <a:ext uri="{FF2B5EF4-FFF2-40B4-BE49-F238E27FC236}">
+                <a16:creationId xmlns:a16="http://schemas.microsoft.com/office/drawing/2014/main" id="{152F220C-F5DC-8C74-3DC5-F7CE6C402EA8}"/>
+              </a:ext>
+            </a:extLst>
+          </p:cNvPr>
+          <p:cNvSpPr txBox="1">
+            <a:spLocks noGrp="1"/>
+          </p:cNvSpPr>
+          <p:nvPr>
+            <p:ph type="title"/>
+          </p:nvPr>
+        </p:nvSpPr>
+        <p:spPr>
+          <a:xfrm>
+            <a:off x="93775" y="219175"/>
+            <a:ext cx="4373100" cy="1333200"/>
+          </a:xfrm>
+          <a:prstGeom prst="rect">
+            <a:avLst/>
+          </a:prstGeom>
+        </p:spPr>
+        <p:txBody>
+          <a:bodyPr spcFirstLastPara="1" wrap="square" lIns="91425" tIns="91425" rIns="91425" bIns="91425" anchor="t" anchorCtr="0">
+            <a:noAutofit/>
+          </a:bodyPr>
+          <a:lstStyle/>
+          <a:p>
+            <a:pPr marL="0" lvl="0" indent="0" algn="ctr" rtl="0">
+              <a:spcBef>
+                <a:spcPts val="0"/>
+              </a:spcBef>
+              <a:spcAft>
+                <a:spcPts val="0"/>
+              </a:spcAft>
+              <a:buNone/>
+            </a:pPr>
+            <a:r>
+              <a:rPr lang="it"/>
+              <a:t>I programmi </a:t>
+            </a:r>
+            <a:endParaRPr/>
+          </a:p>
+        </p:txBody>
+      </p:sp>
+      <p:sp>
+        <p:nvSpPr>
+          <p:cNvPr id="71" name="Google Shape;71;p15">
+            <a:extLst>
+              <a:ext uri="{FF2B5EF4-FFF2-40B4-BE49-F238E27FC236}">
+                <a16:creationId xmlns:a16="http://schemas.microsoft.com/office/drawing/2014/main" id="{4D712B28-C62D-192E-7260-A472937D359E}"/>
+              </a:ext>
+            </a:extLst>
+          </p:cNvPr>
+          <p:cNvSpPr txBox="1">
+            <a:spLocks noGrp="1"/>
+          </p:cNvSpPr>
+          <p:nvPr>
+            <p:ph type="body" idx="2"/>
+          </p:nvPr>
+        </p:nvSpPr>
+        <p:spPr>
+          <a:xfrm>
+            <a:off x="4931700" y="1314675"/>
+            <a:ext cx="3837000" cy="3695100"/>
+          </a:xfrm>
+          <a:prstGeom prst="rect">
+            <a:avLst/>
+          </a:prstGeom>
+        </p:spPr>
+        <p:txBody>
+          <a:bodyPr spcFirstLastPara="1" wrap="square" lIns="91425" tIns="91425" rIns="91425" bIns="91425" anchor="ctr" anchorCtr="0">
+            <a:noAutofit/>
+          </a:bodyPr>
+          <a:lstStyle/>
+          <a:p>
+            <a:pPr marL="457200" lvl="0" indent="-387350" algn="l" rtl="0">
+              <a:spcBef>
+                <a:spcPts val="0"/>
+              </a:spcBef>
+              <a:spcAft>
+                <a:spcPts val="0"/>
+              </a:spcAft>
+              <a:buSzPts val="2500"/>
+              <a:buChar char="●"/>
+            </a:pPr>
+            <a:r>
+              <a:rPr lang="it" sz="2500"/>
+              <a:t>Java</a:t>
+            </a:r>
+            <a:endParaRPr sz="2500"/>
+          </a:p>
+          <a:p>
+            <a:pPr marL="457200" lvl="0" indent="-387350" algn="l" rtl="0">
+              <a:spcBef>
+                <a:spcPts val="0"/>
+              </a:spcBef>
+              <a:spcAft>
+                <a:spcPts val="0"/>
+              </a:spcAft>
+              <a:buSzPts val="2500"/>
+              <a:buChar char="●"/>
+            </a:pPr>
+            <a:r>
+              <a:rPr lang="it" sz="2500"/>
+              <a:t>Python</a:t>
+            </a:r>
+            <a:endParaRPr sz="2500"/>
+          </a:p>
+          <a:p>
+            <a:pPr marL="457200" lvl="0" indent="-387350" algn="l" rtl="0">
+              <a:spcBef>
+                <a:spcPts val="0"/>
+              </a:spcBef>
+              <a:spcAft>
+                <a:spcPts val="0"/>
+              </a:spcAft>
+              <a:buSzPts val="2500"/>
+              <a:buChar char="●"/>
+            </a:pPr>
+            <a:r>
+              <a:rPr lang="it" sz="2500"/>
+              <a:t>HTML</a:t>
+            </a:r>
+            <a:endParaRPr sz="2500"/>
+          </a:p>
+          <a:p>
+            <a:pPr marL="457200" lvl="0" indent="-387350" algn="l" rtl="0">
+              <a:spcBef>
+                <a:spcPts val="0"/>
+              </a:spcBef>
+              <a:spcAft>
+                <a:spcPts val="0"/>
+              </a:spcAft>
+              <a:buSzPts val="2500"/>
+              <a:buChar char="●"/>
+            </a:pPr>
+            <a:r>
+              <a:rPr lang="it" sz="2500"/>
+              <a:t>XML</a:t>
+            </a:r>
+            <a:endParaRPr sz="2500"/>
+          </a:p>
+          <a:p>
+            <a:pPr marL="457200" lvl="0" indent="-387350" algn="l" rtl="0">
+              <a:spcBef>
+                <a:spcPts val="0"/>
+              </a:spcBef>
+              <a:spcAft>
+                <a:spcPts val="0"/>
+              </a:spcAft>
+              <a:buSzPts val="2500"/>
+              <a:buChar char="●"/>
+            </a:pPr>
+            <a:r>
+              <a:rPr lang="it" sz="2500"/>
+              <a:t>CSS</a:t>
+            </a:r>
+            <a:endParaRPr sz="2500"/>
+          </a:p>
+        </p:txBody>
+      </p:sp>
+      <p:sp>
+        <p:nvSpPr>
+          <p:cNvPr id="72" name="Google Shape;72;p15">
+            <a:extLst>
+              <a:ext uri="{FF2B5EF4-FFF2-40B4-BE49-F238E27FC236}">
+                <a16:creationId xmlns:a16="http://schemas.microsoft.com/office/drawing/2014/main" id="{19BF5DEB-A2E4-4B24-CD3D-BC930BE25F94}"/>
+              </a:ext>
+            </a:extLst>
+          </p:cNvPr>
+          <p:cNvSpPr txBox="1"/>
+          <p:nvPr/>
+        </p:nvSpPr>
+        <p:spPr>
+          <a:xfrm>
+            <a:off x="442825" y="1552375"/>
+            <a:ext cx="3675000" cy="3022500"/>
+          </a:xfrm>
+          <a:prstGeom prst="rect">
+            <a:avLst/>
+          </a:prstGeom>
+          <a:noFill/>
+          <a:ln>
+            <a:noFill/>
+          </a:ln>
+        </p:spPr>
+        <p:txBody>
+          <a:bodyPr spcFirstLastPara="1" wrap="square" lIns="91425" tIns="91425" rIns="91425" bIns="91425" anchor="ctr" anchorCtr="0">
+            <a:noAutofit/>
+          </a:bodyPr>
+          <a:lstStyle/>
+          <a:p>
+            <a:pPr marL="457200" lvl="0" indent="-387350" algn="l" rtl="0">
+              <a:spcBef>
+                <a:spcPts val="0"/>
+              </a:spcBef>
+              <a:spcAft>
+                <a:spcPts val="0"/>
+              </a:spcAft>
+              <a:buClr>
+                <a:schemeClr val="dk1"/>
+              </a:buClr>
+              <a:buSzPts val="2500"/>
+              <a:buFont typeface="Old Standard TT"/>
+              <a:buChar char="●"/>
+            </a:pPr>
+            <a:r>
+              <a:rPr lang="it" sz="2500" dirty="0">
+                <a:solidFill>
+                  <a:schemeClr val="dk1"/>
+                </a:solidFill>
+                <a:latin typeface="Old Standard TT"/>
+                <a:ea typeface="Old Standard TT"/>
+                <a:cs typeface="Old Standard TT"/>
+                <a:sym typeface="Old Standard TT"/>
+              </a:rPr>
+              <a:t>VS code</a:t>
+            </a:r>
+            <a:endParaRPr sz="2500" dirty="0">
+              <a:solidFill>
+                <a:schemeClr val="dk1"/>
+              </a:solidFill>
+              <a:latin typeface="Old Standard TT"/>
+              <a:ea typeface="Old Standard TT"/>
+              <a:cs typeface="Old Standard TT"/>
+              <a:sym typeface="Old Standard TT"/>
+            </a:endParaRPr>
+          </a:p>
+          <a:p>
+            <a:pPr marL="457200" lvl="0" indent="-387350" algn="l" rtl="0">
+              <a:spcBef>
+                <a:spcPts val="0"/>
+              </a:spcBef>
+              <a:spcAft>
+                <a:spcPts val="0"/>
+              </a:spcAft>
+              <a:buClr>
+                <a:schemeClr val="dk1"/>
+              </a:buClr>
+              <a:buSzPts val="2500"/>
+              <a:buFont typeface="Old Standard TT"/>
+              <a:buChar char="●"/>
+            </a:pPr>
+            <a:r>
+              <a:rPr lang="it" sz="2500" dirty="0">
+                <a:solidFill>
+                  <a:schemeClr val="dk1"/>
+                </a:solidFill>
+                <a:latin typeface="Old Standard TT"/>
+                <a:ea typeface="Old Standard TT"/>
+                <a:cs typeface="Old Standard TT"/>
+                <a:sym typeface="Old Standard TT"/>
+              </a:rPr>
+              <a:t>Android Studio</a:t>
+            </a:r>
+            <a:endParaRPr sz="2500" dirty="0">
+              <a:solidFill>
+                <a:schemeClr val="dk1"/>
+              </a:solidFill>
+              <a:latin typeface="Old Standard TT"/>
+              <a:ea typeface="Old Standard TT"/>
+              <a:cs typeface="Old Standard TT"/>
+              <a:sym typeface="Old Standard TT"/>
+            </a:endParaRPr>
+          </a:p>
+          <a:p>
+            <a:pPr marL="457200" lvl="0" indent="-387350" algn="l" rtl="0">
+              <a:spcBef>
+                <a:spcPts val="0"/>
+              </a:spcBef>
+              <a:spcAft>
+                <a:spcPts val="0"/>
+              </a:spcAft>
+              <a:buClr>
+                <a:schemeClr val="dk1"/>
+              </a:buClr>
+              <a:buSzPts val="2500"/>
+              <a:buFont typeface="Old Standard TT"/>
+              <a:buChar char="●"/>
+            </a:pPr>
+            <a:r>
+              <a:rPr lang="it" sz="2500" dirty="0">
+                <a:solidFill>
+                  <a:schemeClr val="dk1"/>
+                </a:solidFill>
+                <a:latin typeface="Old Standard TT"/>
+                <a:ea typeface="Old Standard TT"/>
+                <a:cs typeface="Old Standard TT"/>
+                <a:sym typeface="Old Standard TT"/>
+              </a:rPr>
+              <a:t>MySQL Workbench</a:t>
+            </a:r>
+            <a:endParaRPr sz="2500" dirty="0">
+              <a:solidFill>
+                <a:schemeClr val="dk1"/>
+              </a:solidFill>
+              <a:latin typeface="Old Standard TT"/>
+              <a:ea typeface="Old Standard TT"/>
+              <a:cs typeface="Old Standard TT"/>
+              <a:sym typeface="Old Standard TT"/>
+            </a:endParaRPr>
+          </a:p>
+        </p:txBody>
+      </p:sp>
+      <p:sp>
+        <p:nvSpPr>
+          <p:cNvPr id="73" name="Google Shape;73;p15">
+            <a:extLst>
+              <a:ext uri="{FF2B5EF4-FFF2-40B4-BE49-F238E27FC236}">
+                <a16:creationId xmlns:a16="http://schemas.microsoft.com/office/drawing/2014/main" id="{326F7628-9150-958B-2097-575D412B023F}"/>
+              </a:ext>
+            </a:extLst>
+          </p:cNvPr>
+          <p:cNvSpPr txBox="1">
+            <a:spLocks noGrp="1"/>
+          </p:cNvSpPr>
+          <p:nvPr>
+            <p:ph type="title"/>
+          </p:nvPr>
+        </p:nvSpPr>
+        <p:spPr>
+          <a:xfrm>
+            <a:off x="4663650" y="219175"/>
+            <a:ext cx="4373100" cy="1333200"/>
+          </a:xfrm>
+          <a:prstGeom prst="rect">
+            <a:avLst/>
+          </a:prstGeom>
+        </p:spPr>
+        <p:txBody>
+          <a:bodyPr spcFirstLastPara="1" wrap="square" lIns="91425" tIns="91425" rIns="91425" bIns="91425" anchor="t" anchorCtr="0">
+            <a:noAutofit/>
+          </a:bodyPr>
+          <a:lstStyle/>
+          <a:p>
+            <a:pPr marL="0" lvl="0" indent="0" algn="ctr" rtl="0">
+              <a:spcBef>
+                <a:spcPts val="0"/>
+              </a:spcBef>
+              <a:spcAft>
+                <a:spcPts val="0"/>
+              </a:spcAft>
+              <a:buNone/>
+            </a:pPr>
+            <a:r>
+              <a:rPr lang="it"/>
+              <a:t>I linguaggi</a:t>
+            </a:r>
+            <a:endParaRPr/>
+          </a:p>
+        </p:txBody>
+      </p:sp>
+    </p:spTree>
+    <p:extLst>
+      <p:ext uri="{BB962C8B-B14F-4D97-AF65-F5344CB8AC3E}">
+        <p14:creationId xmlns:p14="http://schemas.microsoft.com/office/powerpoint/2010/main" val="2315439384"/>
+      </p:ext>
+    </p:extLst>
+  </p:cSld>
+  <p:clrMapOvr>
+    <a:masterClrMapping/>
+  </p:clrMapOvr>
+</p:sld>
+</file>
+
+<file path=ppt/slides/slide6.xml><?xml version="1.0" encoding="utf-8"?>
+<p:sld xmlns:a="http://schemas.openxmlformats.org/drawingml/2006/main" xmlns:r="http://schemas.openxmlformats.org/officeDocument/2006/relationships" xmlns:p="http://schemas.openxmlformats.org/presentationml/2006/main">
+  <p:cSld>
+    <p:spTree>
+      <p:nvGrpSpPr>
+        <p:cNvPr id="1" name="Shape 82"/>
         <p:cNvGrpSpPr/>
         <p:nvPr/>
       </p:nvGrpSpPr>
@@ -7281,9 +7952,11 @@
       <p:sp>
         <p:nvSpPr>
           <p:cNvPr id="83" name="Google Shape;83;p17"/>
-          <p:cNvSpPr txBox="1"/>
+          <p:cNvSpPr txBox="1">
+            <a:spLocks noGrp="1"/>
+          </p:cNvSpPr>
           <p:nvPr>
-            <p:ph idx="1" type="body"/>
+            <p:ph type="body" idx="1"/>
           </p:nvPr>
         </p:nvSpPr>
         <p:spPr>
@@ -7296,12 +7969,12 @@
           </a:prstGeom>
         </p:spPr>
         <p:txBody>
-          <a:bodyPr anchorCtr="0" anchor="t" bIns="91425" lIns="91425" spcFirstLastPara="1" rIns="91425" wrap="square" tIns="91425">
+          <a:bodyPr spcFirstLastPara="1" wrap="square" lIns="91425" tIns="91425" rIns="91425" bIns="91425" anchor="t" anchorCtr="0">
             <a:noAutofit/>
           </a:bodyPr>
           <a:lstStyle/>
           <a:p>
-            <a:pPr indent="0" lvl="0" marL="0" rtl="0" algn="l">
+            <a:pPr marL="0" lvl="0" indent="0" algn="l" rtl="0">
               <a:spcBef>
                 <a:spcPts val="0"/>
               </a:spcBef>
@@ -7311,13 +7984,24 @@
               <a:buNone/>
             </a:pPr>
             <a:r>
-              <a:rPr b="1" lang="it" sz="1800"/>
+              <a:rPr lang="it" sz="1800" b="1" dirty="0"/>
               <a:t>schermate:</a:t>
             </a:r>
-            <a:endParaRPr b="1" sz="1800"/>
           </a:p>
           <a:p>
-            <a:pPr indent="-342900" lvl="0" marL="457200" rtl="0" algn="l">
+            <a:pPr marL="0" lvl="0" indent="0" algn="l" rtl="0">
+              <a:spcBef>
+                <a:spcPts val="0"/>
+              </a:spcBef>
+              <a:spcAft>
+                <a:spcPts val="0"/>
+              </a:spcAft>
+              <a:buNone/>
+            </a:pPr>
+            <a:endParaRPr lang="it-IT" sz="1800" b="1" dirty="0"/>
+          </a:p>
+          <a:p>
+            <a:pPr marL="457200" lvl="0" indent="-342900" algn="l" rtl="0">
               <a:spcBef>
                 <a:spcPts val="1600"/>
               </a:spcBef>
@@ -7328,13 +8012,13 @@
               <a:buChar char="●"/>
             </a:pPr>
             <a:r>
-              <a:rPr b="1" lang="it" sz="1800"/>
-              <a:t>home</a:t>
+              <a:rPr lang="it" sz="1800" b="1" dirty="0"/>
+              <a:t>Login utente</a:t>
             </a:r>
-            <a:endParaRPr b="1" sz="1800"/>
+            <a:endParaRPr sz="1800" b="1" dirty="0"/>
           </a:p>
           <a:p>
-            <a:pPr indent="-342900" lvl="0" marL="457200" rtl="0" algn="l">
+            <a:pPr marL="457200" lvl="0" indent="-342900" algn="l" rtl="0">
               <a:spcBef>
                 <a:spcPts val="0"/>
               </a:spcBef>
@@ -7345,13 +8029,13 @@
               <a:buChar char="●"/>
             </a:pPr>
             <a:r>
-              <a:rPr b="1" lang="it" sz="1800"/>
-              <a:t>pagina animale</a:t>
+              <a:rPr lang="it" sz="1800" b="1" dirty="0"/>
+              <a:t>Registrazione utente</a:t>
             </a:r>
-            <a:endParaRPr b="1" sz="1800"/>
+            <a:endParaRPr sz="1800" b="1" dirty="0"/>
           </a:p>
           <a:p>
-            <a:pPr indent="-342900" lvl="0" marL="457200" rtl="0" algn="l">
+            <a:pPr marL="457200" lvl="0" indent="-342900" algn="l" rtl="0">
               <a:spcBef>
                 <a:spcPts val="0"/>
               </a:spcBef>
@@ -7362,13 +8046,13 @@
               <a:buChar char="●"/>
             </a:pPr>
             <a:r>
-              <a:rPr b="1" lang="it" sz="1800"/>
-              <a:t>cartelle cliniche</a:t>
+              <a:rPr lang="it-IT" sz="1800" b="1" dirty="0"/>
+              <a:t>Home</a:t>
             </a:r>
-            <a:endParaRPr b="1" sz="1800"/>
+            <a:endParaRPr lang="it" sz="1800" b="1" dirty="0"/>
           </a:p>
           <a:p>
-            <a:pPr indent="-342900" lvl="0" marL="457200" rtl="0" algn="l">
+            <a:pPr marL="457200" lvl="0" indent="-342900" algn="l" rtl="0">
               <a:spcBef>
                 <a:spcPts val="0"/>
               </a:spcBef>
@@ -7379,17 +8063,50 @@
               <a:buChar char="●"/>
             </a:pPr>
             <a:r>
-              <a:rPr b="1" lang="it" sz="1800"/>
-              <a:t>impostazioni di modifica</a:t>
+              <a:rPr lang="it-IT" sz="1800" b="1" dirty="0"/>
+              <a:t>Cartella Clinica</a:t>
             </a:r>
-            <a:endParaRPr b="1" sz="1800"/>
+          </a:p>
+          <a:p>
+            <a:pPr marL="457200" lvl="0" indent="-342900" algn="l" rtl="0">
+              <a:spcBef>
+                <a:spcPts val="0"/>
+              </a:spcBef>
+              <a:spcAft>
+                <a:spcPts val="0"/>
+              </a:spcAft>
+              <a:buSzPts val="1800"/>
+              <a:buChar char="●"/>
+            </a:pPr>
+            <a:r>
+              <a:rPr lang="it-IT" sz="1800" b="1" dirty="0"/>
+              <a:t>Profilo animale</a:t>
+            </a:r>
+          </a:p>
+          <a:p>
+            <a:pPr marL="457200" lvl="0" indent="-342900" algn="l" rtl="0">
+              <a:spcBef>
+                <a:spcPts val="0"/>
+              </a:spcBef>
+              <a:spcAft>
+                <a:spcPts val="0"/>
+              </a:spcAft>
+              <a:buSzPts val="1800"/>
+              <a:buChar char="●"/>
+            </a:pPr>
+            <a:r>
+              <a:rPr lang="it-IT" sz="1800" b="1" dirty="0"/>
+              <a:t>Profilo utente</a:t>
+            </a:r>
           </a:p>
         </p:txBody>
       </p:sp>
       <p:sp>
         <p:nvSpPr>
           <p:cNvPr id="84" name="Google Shape;84;p17"/>
-          <p:cNvSpPr txBox="1"/>
+          <p:cNvSpPr txBox="1">
+            <a:spLocks noGrp="1"/>
+          </p:cNvSpPr>
           <p:nvPr>
             <p:ph type="title"/>
           </p:nvPr>
@@ -7404,12 +8121,12 @@
           </a:prstGeom>
         </p:spPr>
         <p:txBody>
-          <a:bodyPr anchorCtr="0" anchor="t" bIns="91425" lIns="91425" spcFirstLastPara="1" rIns="91425" wrap="square" tIns="91425">
+          <a:bodyPr spcFirstLastPara="1" wrap="square" lIns="91425" tIns="91425" rIns="91425" bIns="91425" anchor="t" anchorCtr="0">
             <a:noAutofit/>
           </a:bodyPr>
           <a:lstStyle/>
           <a:p>
-            <a:pPr indent="0" lvl="0" marL="0" rtl="0" algn="l">
+            <a:pPr marL="0" lvl="0" indent="0" algn="l" rtl="0">
               <a:spcBef>
                 <a:spcPts val="0"/>
               </a:spcBef>
@@ -7429,7 +8146,9 @@
       <p:sp>
         <p:nvSpPr>
           <p:cNvPr id="85" name="Google Shape;85;p17"/>
-          <p:cNvSpPr txBox="1"/>
+          <p:cNvSpPr txBox="1">
+            <a:spLocks noGrp="1"/>
+          </p:cNvSpPr>
           <p:nvPr>
             <p:ph type="title"/>
           </p:nvPr>
@@ -7444,12 +8163,12 @@
           </a:prstGeom>
         </p:spPr>
         <p:txBody>
-          <a:bodyPr anchorCtr="0" anchor="t" bIns="91425" lIns="91425" spcFirstLastPara="1" rIns="91425" wrap="square" tIns="91425">
+          <a:bodyPr spcFirstLastPara="1" wrap="square" lIns="91425" tIns="91425" rIns="91425" bIns="91425" anchor="t" anchorCtr="0">
             <a:noAutofit/>
           </a:bodyPr>
           <a:lstStyle/>
           <a:p>
-            <a:pPr indent="0" lvl="0" marL="0" rtl="0" algn="l">
+            <a:pPr marL="0" lvl="0" indent="0" algn="l" rtl="0">
               <a:spcBef>
                 <a:spcPts val="0"/>
               </a:spcBef>
@@ -7469,9 +8188,11 @@
       <p:sp>
         <p:nvSpPr>
           <p:cNvPr id="86" name="Google Shape;86;p17"/>
-          <p:cNvSpPr txBox="1"/>
+          <p:cNvSpPr txBox="1">
+            <a:spLocks noGrp="1"/>
+          </p:cNvSpPr>
           <p:nvPr>
-            <p:ph idx="1" type="body"/>
+            <p:ph type="body" idx="1"/>
           </p:nvPr>
         </p:nvSpPr>
         <p:spPr>
@@ -7484,12 +8205,12 @@
           </a:prstGeom>
         </p:spPr>
         <p:txBody>
-          <a:bodyPr anchorCtr="0" anchor="t" bIns="91425" lIns="91425" spcFirstLastPara="1" rIns="91425" wrap="square" tIns="91425">
+          <a:bodyPr spcFirstLastPara="1" wrap="square" lIns="91425" tIns="91425" rIns="91425" bIns="91425" anchor="t" anchorCtr="0">
             <a:noAutofit/>
           </a:bodyPr>
           <a:lstStyle/>
           <a:p>
-            <a:pPr indent="0" lvl="0" marL="0" rtl="0" algn="l">
+            <a:pPr marL="0" lvl="0" indent="0" algn="l" rtl="0">
               <a:spcBef>
                 <a:spcPts val="0"/>
               </a:spcBef>
@@ -7499,13 +8220,26 @@
               <a:buNone/>
             </a:pPr>
             <a:r>
-              <a:rPr b="1" lang="it" sz="1800"/>
+              <a:rPr lang="it" sz="1800" b="1" dirty="0"/>
               <a:t>schermate:</a:t>
             </a:r>
-            <a:endParaRPr b="1" sz="1800"/>
+            <a:endParaRPr lang="it-IT" sz="1800" b="1" dirty="0"/>
           </a:p>
           <a:p>
-            <a:pPr indent="-342900" lvl="0" marL="457200" rtl="0" algn="l">
+            <a:pPr marL="457200" lvl="0" indent="-342900" algn="l" rtl="0">
+              <a:spcBef>
+                <a:spcPts val="1600"/>
+              </a:spcBef>
+              <a:spcAft>
+                <a:spcPts val="0"/>
+              </a:spcAft>
+              <a:buSzPts val="1800"/>
+              <a:buChar char="●"/>
+            </a:pPr>
+            <a:endParaRPr lang="it-IT" sz="1800" b="1" dirty="0"/>
+          </a:p>
+          <a:p>
+            <a:pPr marL="457200" lvl="0" indent="-342900" algn="l" rtl="0">
               <a:spcBef>
                 <a:spcPts val="1600"/>
               </a:spcBef>
@@ -7516,13 +8250,12 @@
               <a:buChar char="●"/>
             </a:pPr>
             <a:r>
-              <a:rPr b="1" lang="it" sz="1800"/>
-              <a:t>home</a:t>
+              <a:rPr lang="it-IT" sz="1800" b="1" dirty="0"/>
+              <a:t>Home fornitore</a:t>
             </a:r>
-            <a:endParaRPr b="1" sz="1800"/>
           </a:p>
           <a:p>
-            <a:pPr indent="-342900" lvl="0" marL="457200" rtl="0" algn="l">
+            <a:pPr marL="457200" lvl="0" indent="-342900" algn="l" rtl="0">
               <a:spcBef>
                 <a:spcPts val="0"/>
               </a:spcBef>
@@ -7533,13 +8266,13 @@
               <a:buChar char="●"/>
             </a:pPr>
             <a:r>
-              <a:rPr b="1" lang="it" sz="1800"/>
+              <a:rPr lang="it" sz="1800" b="1" dirty="0"/>
               <a:t>pagina inserimento nuovi servizi</a:t>
             </a:r>
-            <a:endParaRPr b="1" sz="1800"/>
+            <a:endParaRPr sz="1800" b="1" dirty="0"/>
           </a:p>
           <a:p>
-            <a:pPr indent="-342900" lvl="0" marL="457200" rtl="0" algn="l">
+            <a:pPr marL="457200" lvl="0" indent="-342900" algn="l" rtl="0">
               <a:spcBef>
                 <a:spcPts val="0"/>
               </a:spcBef>
@@ -7550,13 +8283,13 @@
               <a:buChar char="●"/>
             </a:pPr>
             <a:r>
-              <a:rPr b="1" lang="it" sz="1800"/>
+              <a:rPr lang="it" sz="1800" b="1" dirty="0"/>
               <a:t>modifica delle informazioni</a:t>
             </a:r>
-            <a:endParaRPr b="1" sz="1800"/>
+            <a:endParaRPr sz="1800" b="1" dirty="0"/>
           </a:p>
           <a:p>
-            <a:pPr indent="0" lvl="0" marL="0" rtl="0" algn="l">
+            <a:pPr marL="0" lvl="0" indent="0" algn="l" rtl="0">
               <a:spcBef>
                 <a:spcPts val="1600"/>
               </a:spcBef>
@@ -7565,10 +8298,7 @@
               </a:spcAft>
               <a:buNone/>
             </a:pPr>
-            <a:r>
-              <a:t/>
-            </a:r>
-            <a:endParaRPr b="1" sz="1800"/>
+            <a:endParaRPr sz="1800" b="1" dirty="0"/>
           </a:p>
         </p:txBody>
       </p:sp>
@@ -7581,7 +8311,288 @@
 </file>
 
 <file path=ppt/theme/theme1.xml><?xml version="1.0" encoding="utf-8"?>
-<a:theme xmlns:a="http://schemas.openxmlformats.org/drawingml/2006/main" xmlns:r="http://schemas.openxmlformats.org/officeDocument/2006/relationships">
+<a:theme xmlns:a="http://schemas.openxmlformats.org/drawingml/2006/main" name="Paperback">
+  <a:themeElements>
+    <a:clrScheme name="Paperback">
+      <a:dk1>
+        <a:srgbClr val="000000"/>
+      </a:dk1>
+      <a:lt1>
+        <a:srgbClr val="FFFFFF"/>
+      </a:lt1>
+      <a:dk2>
+        <a:srgbClr val="00695C"/>
+      </a:dk2>
+      <a:lt2>
+        <a:srgbClr val="26A69A"/>
+      </a:lt2>
+      <a:accent1>
+        <a:srgbClr val="FFFBF0"/>
+      </a:accent1>
+      <a:accent2>
+        <a:srgbClr val="B7B7B7"/>
+      </a:accent2>
+      <a:accent3>
+        <a:srgbClr val="FB8C00"/>
+      </a:accent3>
+      <a:accent4>
+        <a:srgbClr val="80CBC4"/>
+      </a:accent4>
+      <a:accent5>
+        <a:srgbClr val="AF4345"/>
+      </a:accent5>
+      <a:accent6>
+        <a:srgbClr val="F58F8F"/>
+      </a:accent6>
+      <a:hlink>
+        <a:srgbClr val="AF4345"/>
+      </a:hlink>
+      <a:folHlink>
+        <a:srgbClr val="AF4345"/>
+      </a:folHlink>
+    </a:clrScheme>
+    <a:fontScheme name="Office">
+      <a:majorFont>
+        <a:latin typeface="Arial"/>
+        <a:ea typeface=""/>
+        <a:cs typeface=""/>
+        <a:font script="Jpan" typeface="ＭＳ Ｐゴシック"/>
+        <a:font script="Hang" typeface="맑은 고딕"/>
+        <a:font script="Hans" typeface="宋体"/>
+        <a:font script="Hant" typeface="新細明體"/>
+        <a:font script="Arab" typeface="Times New Roman"/>
+        <a:font script="Hebr" typeface="Times New Roman"/>
+        <a:font script="Thai" typeface="Angsana New"/>
+        <a:font script="Ethi" typeface="Nyala"/>
+        <a:font script="Beng" typeface="Vrinda"/>
+        <a:font script="Gujr" typeface="Shruti"/>
+        <a:font script="Khmr" typeface="MoolBoran"/>
+        <a:font script="Knda" typeface="Tunga"/>
+        <a:font script="Guru" typeface="Raavi"/>
+        <a:font script="Cans" typeface="Euphemia"/>
+        <a:font script="Cher" typeface="Plantagenet Cherokee"/>
+        <a:font script="Yiii" typeface="Microsoft Yi Baiti"/>
+        <a:font script="Tibt" typeface="Microsoft Himalaya"/>
+        <a:font script="Thaa" typeface="MV Boli"/>
+        <a:font script="Deva" typeface="Mangal"/>
+        <a:font script="Telu" typeface="Gautami"/>
+        <a:font script="Taml" typeface="Latha"/>
+        <a:font script="Syrc" typeface="Estrangelo Edessa"/>
+        <a:font script="Orya" typeface="Kalinga"/>
+        <a:font script="Mlym" typeface="Kartika"/>
+        <a:font script="Laoo" typeface="DokChampa"/>
+        <a:font script="Sinh" typeface="Iskoola Pota"/>
+        <a:font script="Mong" typeface="Mongolian Baiti"/>
+        <a:font script="Viet" typeface="Times New Roman"/>
+        <a:font script="Uigh" typeface="Microsoft Uighur"/>
+        <a:font script="Geor" typeface="Sylfaen"/>
+      </a:majorFont>
+      <a:minorFont>
+        <a:latin typeface="Arial"/>
+        <a:ea typeface=""/>
+        <a:cs typeface=""/>
+        <a:font script="Jpan" typeface="ＭＳ Ｐゴシック"/>
+        <a:font script="Hang" typeface="맑은 고딕"/>
+        <a:font script="Hans" typeface="宋体"/>
+        <a:font script="Hant" typeface="新細明體"/>
+        <a:font script="Arab" typeface="Arial"/>
+        <a:font script="Hebr" typeface="Arial"/>
+        <a:font script="Thai" typeface="Cordia New"/>
+        <a:font script="Ethi" typeface="Nyala"/>
+        <a:font script="Beng" typeface="Vrinda"/>
+        <a:font script="Gujr" typeface="Shruti"/>
+        <a:font script="Khmr" typeface="DaunPenh"/>
+        <a:font script="Knda" typeface="Tunga"/>
+        <a:font script="Guru" typeface="Raavi"/>
+        <a:font script="Cans" typeface="Euphemia"/>
+        <a:font script="Cher" typeface="Plantagenet Cherokee"/>
+        <a:font script="Yiii" typeface="Microsoft Yi Baiti"/>
+        <a:font script="Tibt" typeface="Microsoft Himalaya"/>
+        <a:font script="Thaa" typeface="MV Boli"/>
+        <a:font script="Deva" typeface="Mangal"/>
+        <a:font script="Telu" typeface="Gautami"/>
+        <a:font script="Taml" typeface="Latha"/>
+        <a:font script="Syrc" typeface="Estrangelo Edessa"/>
+        <a:font script="Orya" typeface="Kalinga"/>
+        <a:font script="Mlym" typeface="Kartika"/>
+        <a:font script="Laoo" typeface="DokChampa"/>
+        <a:font script="Sinh" typeface="Iskoola Pota"/>
+        <a:font script="Mong" typeface="Mongolian Baiti"/>
+        <a:font script="Viet" typeface="Arial"/>
+        <a:font script="Uigh" typeface="Microsoft Uighur"/>
+        <a:font script="Geor" typeface="Sylfaen"/>
+      </a:minorFont>
+    </a:fontScheme>
+    <a:fmtScheme name="Office">
+      <a:fillStyleLst>
+        <a:solidFill>
+          <a:schemeClr val="phClr"/>
+        </a:solidFill>
+        <a:gradFill rotWithShape="1">
+          <a:gsLst>
+            <a:gs pos="0">
+              <a:schemeClr val="phClr">
+                <a:tint val="50000"/>
+                <a:satMod val="300000"/>
+              </a:schemeClr>
+            </a:gs>
+            <a:gs pos="35000">
+              <a:schemeClr val="phClr">
+                <a:tint val="37000"/>
+                <a:satMod val="300000"/>
+              </a:schemeClr>
+            </a:gs>
+            <a:gs pos="100000">
+              <a:schemeClr val="phClr">
+                <a:tint val="15000"/>
+                <a:satMod val="350000"/>
+              </a:schemeClr>
+            </a:gs>
+          </a:gsLst>
+          <a:lin ang="16200000" scaled="1"/>
+        </a:gradFill>
+        <a:gradFill rotWithShape="1">
+          <a:gsLst>
+            <a:gs pos="0">
+              <a:schemeClr val="phClr">
+                <a:tint val="100000"/>
+                <a:shade val="100000"/>
+                <a:satMod val="130000"/>
+              </a:schemeClr>
+            </a:gs>
+            <a:gs pos="100000">
+              <a:schemeClr val="phClr">
+                <a:tint val="50000"/>
+                <a:shade val="100000"/>
+                <a:satMod val="350000"/>
+              </a:schemeClr>
+            </a:gs>
+          </a:gsLst>
+          <a:lin ang="16200000" scaled="0"/>
+        </a:gradFill>
+      </a:fillStyleLst>
+      <a:lnStyleLst>
+        <a:ln w="9525" cap="flat" cmpd="sng" algn="ctr">
+          <a:solidFill>
+            <a:schemeClr val="phClr">
+              <a:shade val="95000"/>
+              <a:satMod val="105000"/>
+            </a:schemeClr>
+          </a:solidFill>
+          <a:prstDash val="solid"/>
+        </a:ln>
+        <a:ln w="25400" cap="flat" cmpd="sng" algn="ctr">
+          <a:solidFill>
+            <a:schemeClr val="phClr"/>
+          </a:solidFill>
+          <a:prstDash val="solid"/>
+        </a:ln>
+        <a:ln w="38100" cap="flat" cmpd="sng" algn="ctr">
+          <a:solidFill>
+            <a:schemeClr val="phClr"/>
+          </a:solidFill>
+          <a:prstDash val="solid"/>
+        </a:ln>
+      </a:lnStyleLst>
+      <a:effectStyleLst>
+        <a:effectStyle>
+          <a:effectLst>
+            <a:outerShdw blurRad="40000" dist="20000" dir="5400000" rotWithShape="0">
+              <a:srgbClr val="000000">
+                <a:alpha val="38000"/>
+              </a:srgbClr>
+            </a:outerShdw>
+          </a:effectLst>
+        </a:effectStyle>
+        <a:effectStyle>
+          <a:effectLst>
+            <a:outerShdw blurRad="40000" dist="23000" dir="5400000" rotWithShape="0">
+              <a:srgbClr val="000000">
+                <a:alpha val="35000"/>
+              </a:srgbClr>
+            </a:outerShdw>
+          </a:effectLst>
+        </a:effectStyle>
+        <a:effectStyle>
+          <a:effectLst>
+            <a:outerShdw blurRad="40000" dist="23000" dir="5400000" rotWithShape="0">
+              <a:srgbClr val="000000">
+                <a:alpha val="35000"/>
+              </a:srgbClr>
+            </a:outerShdw>
+          </a:effectLst>
+          <a:scene3d>
+            <a:camera prst="orthographicFront">
+              <a:rot lat="0" lon="0" rev="0"/>
+            </a:camera>
+            <a:lightRig rig="threePt" dir="t">
+              <a:rot lat="0" lon="0" rev="1200000"/>
+            </a:lightRig>
+          </a:scene3d>
+          <a:sp3d>
+            <a:bevelT w="63500" h="25400"/>
+          </a:sp3d>
+        </a:effectStyle>
+      </a:effectStyleLst>
+      <a:bgFillStyleLst>
+        <a:solidFill>
+          <a:schemeClr val="phClr"/>
+        </a:solidFill>
+        <a:gradFill rotWithShape="1">
+          <a:gsLst>
+            <a:gs pos="0">
+              <a:schemeClr val="phClr">
+                <a:tint val="40000"/>
+                <a:satMod val="350000"/>
+              </a:schemeClr>
+            </a:gs>
+            <a:gs pos="40000">
+              <a:schemeClr val="phClr">
+                <a:tint val="45000"/>
+                <a:shade val="99000"/>
+                <a:satMod val="350000"/>
+              </a:schemeClr>
+            </a:gs>
+            <a:gs pos="100000">
+              <a:schemeClr val="phClr">
+                <a:shade val="20000"/>
+                <a:satMod val="255000"/>
+              </a:schemeClr>
+            </a:gs>
+          </a:gsLst>
+          <a:path path="circle">
+            <a:fillToRect l="50000" t="-80000" r="50000" b="180000"/>
+          </a:path>
+        </a:gradFill>
+        <a:gradFill rotWithShape="1">
+          <a:gsLst>
+            <a:gs pos="0">
+              <a:schemeClr val="phClr">
+                <a:tint val="80000"/>
+                <a:satMod val="300000"/>
+              </a:schemeClr>
+            </a:gs>
+            <a:gs pos="100000">
+              <a:schemeClr val="phClr">
+                <a:shade val="30000"/>
+                <a:satMod val="200000"/>
+              </a:schemeClr>
+            </a:gs>
+          </a:gsLst>
+          <a:path path="circle">
+            <a:fillToRect l="50000" t="50000" r="50000" b="50000"/>
+          </a:path>
+        </a:gradFill>
+      </a:bgFillStyleLst>
+    </a:fmtScheme>
+  </a:themeElements>
+  <a:objectDefaults/>
+  <a:extraClrSchemeLst/>
+</a:theme>
+</file>
+
+<file path=ppt/theme/theme2.xml><?xml version="1.0" encoding="utf-8"?>
+<a:theme xmlns:a="http://schemas.openxmlformats.org/drawingml/2006/main">
   <a:themeElements>
     <a:clrScheme name="Default">
       <a:dk1>
@@ -7856,284 +8867,7 @@
       </a:bgFillStyleLst>
     </a:fmtScheme>
   </a:themeElements>
-</a:theme>
-</file>
-
-<file path=ppt/theme/theme2.xml><?xml version="1.0" encoding="utf-8"?>
-<a:theme xmlns:a="http://schemas.openxmlformats.org/drawingml/2006/main" xmlns:r="http://schemas.openxmlformats.org/officeDocument/2006/relationships" name="Paperback">
-  <a:themeElements>
-    <a:clrScheme name="Paperback">
-      <a:dk1>
-        <a:srgbClr val="000000"/>
-      </a:dk1>
-      <a:lt1>
-        <a:srgbClr val="FFFFFF"/>
-      </a:lt1>
-      <a:dk2>
-        <a:srgbClr val="00695C"/>
-      </a:dk2>
-      <a:lt2>
-        <a:srgbClr val="26A69A"/>
-      </a:lt2>
-      <a:accent1>
-        <a:srgbClr val="FFFBF0"/>
-      </a:accent1>
-      <a:accent2>
-        <a:srgbClr val="B7B7B7"/>
-      </a:accent2>
-      <a:accent3>
-        <a:srgbClr val="FB8C00"/>
-      </a:accent3>
-      <a:accent4>
-        <a:srgbClr val="80CBC4"/>
-      </a:accent4>
-      <a:accent5>
-        <a:srgbClr val="AF4345"/>
-      </a:accent5>
-      <a:accent6>
-        <a:srgbClr val="F58F8F"/>
-      </a:accent6>
-      <a:hlink>
-        <a:srgbClr val="AF4345"/>
-      </a:hlink>
-      <a:folHlink>
-        <a:srgbClr val="AF4345"/>
-      </a:folHlink>
-    </a:clrScheme>
-    <a:fontScheme name="Office">
-      <a:majorFont>
-        <a:latin typeface="Arial"/>
-        <a:ea typeface=""/>
-        <a:cs typeface=""/>
-        <a:font script="Jpan" typeface="ＭＳ Ｐゴシック"/>
-        <a:font script="Hang" typeface="맑은 고딕"/>
-        <a:font script="Hans" typeface="宋体"/>
-        <a:font script="Hant" typeface="新細明體"/>
-        <a:font script="Arab" typeface="Times New Roman"/>
-        <a:font script="Hebr" typeface="Times New Roman"/>
-        <a:font script="Thai" typeface="Angsana New"/>
-        <a:font script="Ethi" typeface="Nyala"/>
-        <a:font script="Beng" typeface="Vrinda"/>
-        <a:font script="Gujr" typeface="Shruti"/>
-        <a:font script="Khmr" typeface="MoolBoran"/>
-        <a:font script="Knda" typeface="Tunga"/>
-        <a:font script="Guru" typeface="Raavi"/>
-        <a:font script="Cans" typeface="Euphemia"/>
-        <a:font script="Cher" typeface="Plantagenet Cherokee"/>
-        <a:font script="Yiii" typeface="Microsoft Yi Baiti"/>
-        <a:font script="Tibt" typeface="Microsoft Himalaya"/>
-        <a:font script="Thaa" typeface="MV Boli"/>
-        <a:font script="Deva" typeface="Mangal"/>
-        <a:font script="Telu" typeface="Gautami"/>
-        <a:font script="Taml" typeface="Latha"/>
-        <a:font script="Syrc" typeface="Estrangelo Edessa"/>
-        <a:font script="Orya" typeface="Kalinga"/>
-        <a:font script="Mlym" typeface="Kartika"/>
-        <a:font script="Laoo" typeface="DokChampa"/>
-        <a:font script="Sinh" typeface="Iskoola Pota"/>
-        <a:font script="Mong" typeface="Mongolian Baiti"/>
-        <a:font script="Viet" typeface="Times New Roman"/>
-        <a:font script="Uigh" typeface="Microsoft Uighur"/>
-        <a:font script="Geor" typeface="Sylfaen"/>
-      </a:majorFont>
-      <a:minorFont>
-        <a:latin typeface="Arial"/>
-        <a:ea typeface=""/>
-        <a:cs typeface=""/>
-        <a:font script="Jpan" typeface="ＭＳ Ｐゴシック"/>
-        <a:font script="Hang" typeface="맑은 고딕"/>
-        <a:font script="Hans" typeface="宋体"/>
-        <a:font script="Hant" typeface="新細明體"/>
-        <a:font script="Arab" typeface="Arial"/>
-        <a:font script="Hebr" typeface="Arial"/>
-        <a:font script="Thai" typeface="Cordia New"/>
-        <a:font script="Ethi" typeface="Nyala"/>
-        <a:font script="Beng" typeface="Vrinda"/>
-        <a:font script="Gujr" typeface="Shruti"/>
-        <a:font script="Khmr" typeface="DaunPenh"/>
-        <a:font script="Knda" typeface="Tunga"/>
-        <a:font script="Guru" typeface="Raavi"/>
-        <a:font script="Cans" typeface="Euphemia"/>
-        <a:font script="Cher" typeface="Plantagenet Cherokee"/>
-        <a:font script="Yiii" typeface="Microsoft Yi Baiti"/>
-        <a:font script="Tibt" typeface="Microsoft Himalaya"/>
-        <a:font script="Thaa" typeface="MV Boli"/>
-        <a:font script="Deva" typeface="Mangal"/>
-        <a:font script="Telu" typeface="Gautami"/>
-        <a:font script="Taml" typeface="Latha"/>
-        <a:font script="Syrc" typeface="Estrangelo Edessa"/>
-        <a:font script="Orya" typeface="Kalinga"/>
-        <a:font script="Mlym" typeface="Kartika"/>
-        <a:font script="Laoo" typeface="DokChampa"/>
-        <a:font script="Sinh" typeface="Iskoola Pota"/>
-        <a:font script="Mong" typeface="Mongolian Baiti"/>
-        <a:font script="Viet" typeface="Arial"/>
-        <a:font script="Uigh" typeface="Microsoft Uighur"/>
-        <a:font script="Geor" typeface="Sylfaen"/>
-      </a:minorFont>
-    </a:fontScheme>
-    <a:fmtScheme name="Office">
-      <a:fillStyleLst>
-        <a:solidFill>
-          <a:schemeClr val="phClr"/>
-        </a:solidFill>
-        <a:gradFill rotWithShape="1">
-          <a:gsLst>
-            <a:gs pos="0">
-              <a:schemeClr val="phClr">
-                <a:tint val="50000"/>
-                <a:satMod val="300000"/>
-              </a:schemeClr>
-            </a:gs>
-            <a:gs pos="35000">
-              <a:schemeClr val="phClr">
-                <a:tint val="37000"/>
-                <a:satMod val="300000"/>
-              </a:schemeClr>
-            </a:gs>
-            <a:gs pos="100000">
-              <a:schemeClr val="phClr">
-                <a:tint val="15000"/>
-                <a:satMod val="350000"/>
-              </a:schemeClr>
-            </a:gs>
-          </a:gsLst>
-          <a:lin ang="16200000" scaled="1"/>
-        </a:gradFill>
-        <a:gradFill rotWithShape="1">
-          <a:gsLst>
-            <a:gs pos="0">
-              <a:schemeClr val="phClr">
-                <a:tint val="100000"/>
-                <a:shade val="100000"/>
-                <a:satMod val="130000"/>
-              </a:schemeClr>
-            </a:gs>
-            <a:gs pos="100000">
-              <a:schemeClr val="phClr">
-                <a:tint val="50000"/>
-                <a:shade val="100000"/>
-                <a:satMod val="350000"/>
-              </a:schemeClr>
-            </a:gs>
-          </a:gsLst>
-          <a:lin ang="16200000" scaled="0"/>
-        </a:gradFill>
-      </a:fillStyleLst>
-      <a:lnStyleLst>
-        <a:ln w="9525" cap="flat" cmpd="sng" algn="ctr">
-          <a:solidFill>
-            <a:schemeClr val="phClr">
-              <a:shade val="95000"/>
-              <a:satMod val="105000"/>
-            </a:schemeClr>
-          </a:solidFill>
-          <a:prstDash val="solid"/>
-        </a:ln>
-        <a:ln w="25400" cap="flat" cmpd="sng" algn="ctr">
-          <a:solidFill>
-            <a:schemeClr val="phClr"/>
-          </a:solidFill>
-          <a:prstDash val="solid"/>
-        </a:ln>
-        <a:ln w="38100" cap="flat" cmpd="sng" algn="ctr">
-          <a:solidFill>
-            <a:schemeClr val="phClr"/>
-          </a:solidFill>
-          <a:prstDash val="solid"/>
-        </a:ln>
-      </a:lnStyleLst>
-      <a:effectStyleLst>
-        <a:effectStyle>
-          <a:effectLst>
-            <a:outerShdw blurRad="40000" dist="20000" dir="5400000" rotWithShape="0">
-              <a:srgbClr val="000000">
-                <a:alpha val="38000"/>
-              </a:srgbClr>
-            </a:outerShdw>
-          </a:effectLst>
-        </a:effectStyle>
-        <a:effectStyle>
-          <a:effectLst>
-            <a:outerShdw blurRad="40000" dist="23000" dir="5400000" rotWithShape="0">
-              <a:srgbClr val="000000">
-                <a:alpha val="35000"/>
-              </a:srgbClr>
-            </a:outerShdw>
-          </a:effectLst>
-        </a:effectStyle>
-        <a:effectStyle>
-          <a:effectLst>
-            <a:outerShdw blurRad="40000" dist="23000" dir="5400000" rotWithShape="0">
-              <a:srgbClr val="000000">
-                <a:alpha val="35000"/>
-              </a:srgbClr>
-            </a:outerShdw>
-          </a:effectLst>
-          <a:scene3d>
-            <a:camera prst="orthographicFront">
-              <a:rot lat="0" lon="0" rev="0"/>
-            </a:camera>
-            <a:lightRig rig="threePt" dir="t">
-              <a:rot lat="0" lon="0" rev="1200000"/>
-            </a:lightRig>
-          </a:scene3d>
-          <a:sp3d>
-            <a:bevelT w="63500" h="25400"/>
-          </a:sp3d>
-        </a:effectStyle>
-      </a:effectStyleLst>
-      <a:bgFillStyleLst>
-        <a:solidFill>
-          <a:schemeClr val="phClr"/>
-        </a:solidFill>
-        <a:gradFill rotWithShape="1">
-          <a:gsLst>
-            <a:gs pos="0">
-              <a:schemeClr val="phClr">
-                <a:tint val="40000"/>
-                <a:satMod val="350000"/>
-              </a:schemeClr>
-            </a:gs>
-            <a:gs pos="40000">
-              <a:schemeClr val="phClr">
-                <a:tint val="45000"/>
-                <a:shade val="99000"/>
-                <a:satMod val="350000"/>
-              </a:schemeClr>
-            </a:gs>
-            <a:gs pos="100000">
-              <a:schemeClr val="phClr">
-                <a:shade val="20000"/>
-                <a:satMod val="255000"/>
-              </a:schemeClr>
-            </a:gs>
-          </a:gsLst>
-          <a:path path="circle">
-            <a:fillToRect l="50000" t="-80000" r="50000" b="180000"/>
-          </a:path>
-        </a:gradFill>
-        <a:gradFill rotWithShape="1">
-          <a:gsLst>
-            <a:gs pos="0">
-              <a:schemeClr val="phClr">
-                <a:tint val="80000"/>
-                <a:satMod val="300000"/>
-              </a:schemeClr>
-            </a:gs>
-            <a:gs pos="100000">
-              <a:schemeClr val="phClr">
-                <a:shade val="30000"/>
-                <a:satMod val="200000"/>
-              </a:schemeClr>
-            </a:gs>
-          </a:gsLst>
-          <a:path path="circle">
-            <a:fillToRect l="50000" t="50000" r="50000" b="50000"/>
-          </a:path>
-        </a:gradFill>
-      </a:bgFillStyleLst>
-    </a:fmtScheme>
-  </a:themeElements>
+  <a:objectDefaults/>
+  <a:extraClrSchemeLst/>
 </a:theme>
 </file>
--- a/Documenti/Relazione Finale/PP relazione.pptx
+++ b/Documenti/Relazione Finale/PP relazione.pptx
@@ -5,24 +5,27 @@
     <p:sldMasterId id="2147483659" r:id="rId1"/>
   </p:sldMasterIdLst>
   <p:notesMasterIdLst>
-    <p:notesMasterId r:id="rId8"/>
+    <p:notesMasterId r:id="rId11"/>
   </p:notesMasterIdLst>
   <p:sldIdLst>
     <p:sldId id="256" r:id="rId2"/>
     <p:sldId id="257" r:id="rId3"/>
-    <p:sldId id="258" r:id="rId4"/>
-    <p:sldId id="259" r:id="rId5"/>
-    <p:sldId id="262" r:id="rId6"/>
-    <p:sldId id="260" r:id="rId7"/>
+    <p:sldId id="263" r:id="rId4"/>
+    <p:sldId id="264" r:id="rId5"/>
+    <p:sldId id="259" r:id="rId6"/>
+    <p:sldId id="262" r:id="rId7"/>
+    <p:sldId id="265" r:id="rId8"/>
+    <p:sldId id="266" r:id="rId9"/>
+    <p:sldId id="260" r:id="rId10"/>
   </p:sldIdLst>
   <p:sldSz cx="9144000" cy="5143500" type="screen16x9"/>
   <p:notesSz cx="6858000" cy="9144000"/>
   <p:embeddedFontLst>
     <p:embeddedFont>
       <p:font typeface="Old Standard TT" panose="020B0604020202020204" charset="0"/>
-      <p:regular r:id="rId9"/>
-      <p:bold r:id="rId10"/>
-      <p:italic r:id="rId11"/>
+      <p:regular r:id="rId12"/>
+      <p:bold r:id="rId13"/>
+      <p:italic r:id="rId14"/>
     </p:embeddedFont>
   </p:embeddedFontLst>
   <p:defaultTextStyle>
@@ -927,110 +930,6 @@
   <p:cSld>
     <p:spTree>
       <p:nvGrpSpPr>
-        <p:cNvPr id="1" name="Shape 66"/>
-        <p:cNvGrpSpPr/>
-        <p:nvPr/>
-      </p:nvGrpSpPr>
-      <p:grpSpPr>
-        <a:xfrm>
-          <a:off x="0" y="0"/>
-          <a:ext cx="0" cy="0"/>
-          <a:chOff x="0" y="0"/>
-          <a:chExt cx="0" cy="0"/>
-        </a:xfrm>
-      </p:grpSpPr>
-      <p:sp>
-        <p:nvSpPr>
-          <p:cNvPr id="67" name="Google Shape;67;gc6f90357f_0_13:notes"/>
-          <p:cNvSpPr>
-            <a:spLocks noGrp="1" noRot="1" noChangeAspect="1"/>
-          </p:cNvSpPr>
-          <p:nvPr>
-            <p:ph type="sldImg" idx="2"/>
-          </p:nvPr>
-        </p:nvSpPr>
-        <p:spPr>
-          <a:xfrm>
-            <a:off x="381188" y="685800"/>
-            <a:ext cx="6096300" cy="3429000"/>
-          </a:xfrm>
-          <a:custGeom>
-            <a:avLst/>
-            <a:gdLst/>
-            <a:ahLst/>
-            <a:cxnLst/>
-            <a:rect l="l" t="t" r="r" b="b"/>
-            <a:pathLst>
-              <a:path w="120000" h="120000" extrusionOk="0">
-                <a:moveTo>
-                  <a:pt x="0" y="0"/>
-                </a:moveTo>
-                <a:lnTo>
-                  <a:pt x="120000" y="0"/>
-                </a:lnTo>
-                <a:lnTo>
-                  <a:pt x="120000" y="120000"/>
-                </a:lnTo>
-                <a:lnTo>
-                  <a:pt x="0" y="120000"/>
-                </a:lnTo>
-                <a:close/>
-              </a:path>
-            </a:pathLst>
-          </a:custGeom>
-        </p:spPr>
-      </p:sp>
-      <p:sp>
-        <p:nvSpPr>
-          <p:cNvPr id="68" name="Google Shape;68;gc6f90357f_0_13:notes"/>
-          <p:cNvSpPr txBox="1">
-            <a:spLocks noGrp="1"/>
-          </p:cNvSpPr>
-          <p:nvPr>
-            <p:ph type="body" idx="1"/>
-          </p:nvPr>
-        </p:nvSpPr>
-        <p:spPr>
-          <a:xfrm>
-            <a:off x="685800" y="4343400"/>
-            <a:ext cx="5486400" cy="4114800"/>
-          </a:xfrm>
-          <a:prstGeom prst="rect">
-            <a:avLst/>
-          </a:prstGeom>
-        </p:spPr>
-        <p:txBody>
-          <a:bodyPr spcFirstLastPara="1" wrap="square" lIns="91425" tIns="91425" rIns="91425" bIns="91425" anchor="t" anchorCtr="0">
-            <a:noAutofit/>
-          </a:bodyPr>
-          <a:lstStyle/>
-          <a:p>
-            <a:pPr marL="0" lvl="0" indent="0" algn="l" rtl="0">
-              <a:spcBef>
-                <a:spcPts val="0"/>
-              </a:spcBef>
-              <a:spcAft>
-                <a:spcPts val="0"/>
-              </a:spcAft>
-              <a:buNone/>
-            </a:pPr>
-            <a:endParaRPr/>
-          </a:p>
-        </p:txBody>
-      </p:sp>
-    </p:spTree>
-  </p:cSld>
-  <p:clrMapOvr>
-    <a:masterClrMapping/>
-  </p:clrMapOvr>
-</p:notes>
-</file>
-
-<file path=ppt/notesSlides/notesSlide4.xml><?xml version="1.0" encoding="utf-8"?>
-<p:notes xmlns:a="http://schemas.openxmlformats.org/drawingml/2006/main" xmlns:r="http://schemas.openxmlformats.org/officeDocument/2006/relationships" xmlns:p="http://schemas.openxmlformats.org/presentationml/2006/main" showMasterSp="0" showMasterPhAnim="0">
-  <p:cSld>
-    <p:spTree>
-      <p:nvGrpSpPr>
         <p:cNvPr id="1" name="Shape 74"/>
         <p:cNvGrpSpPr/>
         <p:nvPr/>
@@ -1130,7 +1029,7 @@
 </p:notes>
 </file>
 
-<file path=ppt/notesSlides/notesSlide5.xml><?xml version="1.0" encoding="utf-8"?>
+<file path=ppt/notesSlides/notesSlide4.xml><?xml version="1.0" encoding="utf-8"?>
 <p:notes xmlns:a="http://schemas.openxmlformats.org/drawingml/2006/main" xmlns:r="http://schemas.openxmlformats.org/officeDocument/2006/relationships" xmlns:p="http://schemas.openxmlformats.org/presentationml/2006/main" showMasterSp="0" showMasterPhAnim="0">
   <p:cSld>
     <p:spTree>
@@ -1257,7 +1156,7 @@
 </p:notes>
 </file>
 
-<file path=ppt/notesSlides/notesSlide6.xml><?xml version="1.0" encoding="utf-8"?>
+<file path=ppt/notesSlides/notesSlide5.xml><?xml version="1.0" encoding="utf-8"?>
 <p:notes xmlns:a="http://schemas.openxmlformats.org/drawingml/2006/main" xmlns:r="http://schemas.openxmlformats.org/officeDocument/2006/relationships" xmlns:p="http://schemas.openxmlformats.org/presentationml/2006/main" showMasterSp="0" showMasterPhAnim="0">
   <p:cSld>
     <p:spTree>
@@ -7121,7 +7020,7 @@
   <p:cSld>
     <p:spTree>
       <p:nvGrpSpPr>
-        <p:cNvPr id="1" name="Shape 69"/>
+        <p:cNvPr id="1" name=""/>
         <p:cNvGrpSpPr/>
         <p:nvPr/>
       </p:nvGrpSpPr>
@@ -7135,337 +7034,114 @@
       </p:grpSpPr>
       <p:sp>
         <p:nvSpPr>
-          <p:cNvPr id="70" name="Google Shape;70;p15"/>
-          <p:cNvSpPr txBox="1">
+          <p:cNvPr id="2" name="Titolo 1">
+            <a:extLst>
+              <a:ext uri="{FF2B5EF4-FFF2-40B4-BE49-F238E27FC236}">
+                <a16:creationId xmlns:a16="http://schemas.microsoft.com/office/drawing/2014/main" id="{6FE27422-26B7-28E8-E9AA-27C21C249C9D}"/>
+              </a:ext>
+            </a:extLst>
+          </p:cNvPr>
+          <p:cNvSpPr>
             <a:spLocks noGrp="1"/>
           </p:cNvSpPr>
           <p:nvPr>
             <p:ph type="title"/>
           </p:nvPr>
         </p:nvSpPr>
-        <p:spPr>
-          <a:xfrm>
-            <a:off x="93775" y="219175"/>
-            <a:ext cx="4373100" cy="1333200"/>
-          </a:xfrm>
-          <a:prstGeom prst="rect">
-            <a:avLst/>
-          </a:prstGeom>
-        </p:spPr>
+        <p:spPr/>
         <p:txBody>
-          <a:bodyPr spcFirstLastPara="1" wrap="square" lIns="91425" tIns="91425" rIns="91425" bIns="91425" anchor="t" anchorCtr="0">
-            <a:noAutofit/>
-          </a:bodyPr>
+          <a:bodyPr/>
           <a:lstStyle/>
           <a:p>
-            <a:pPr marL="0" lvl="0" indent="0" algn="ctr" rtl="0">
-              <a:spcBef>
-                <a:spcPts val="0"/>
-              </a:spcBef>
-              <a:spcAft>
-                <a:spcPts val="0"/>
-              </a:spcAft>
-              <a:buNone/>
-            </a:pPr>
             <a:r>
-              <a:rPr lang="it"/>
-              <a:t>I programmi </a:t>
+              <a:rPr lang="it-IT" dirty="0"/>
+              <a:t>CRIKLE – L’APP PER GESTIRE IL TUO PET</a:t>
             </a:r>
-            <a:endParaRPr/>
           </a:p>
         </p:txBody>
       </p:sp>
       <p:sp>
         <p:nvSpPr>
-          <p:cNvPr id="71" name="Google Shape;71;p15"/>
-          <p:cNvSpPr txBox="1">
+          <p:cNvPr id="3" name="Segnaposto testo 2">
+            <a:extLst>
+              <a:ext uri="{FF2B5EF4-FFF2-40B4-BE49-F238E27FC236}">
+                <a16:creationId xmlns:a16="http://schemas.microsoft.com/office/drawing/2014/main" id="{4E61A087-3BF6-C228-0496-FCA0DD5ADD35}"/>
+              </a:ext>
+            </a:extLst>
+          </p:cNvPr>
+          <p:cNvSpPr>
             <a:spLocks noGrp="1"/>
           </p:cNvSpPr>
           <p:nvPr>
-            <p:ph type="body" idx="2"/>
+            <p:ph type="body" idx="1"/>
           </p:nvPr>
         </p:nvSpPr>
-        <p:spPr>
-          <a:xfrm>
-            <a:off x="4931700" y="1314675"/>
-            <a:ext cx="3837000" cy="3695100"/>
-          </a:xfrm>
-          <a:prstGeom prst="rect">
-            <a:avLst/>
-          </a:prstGeom>
-        </p:spPr>
+        <p:spPr/>
         <p:txBody>
-          <a:bodyPr spcFirstLastPara="1" wrap="square" lIns="91425" tIns="91425" rIns="91425" bIns="91425" anchor="ctr" anchorCtr="0">
-            <a:noAutofit/>
-          </a:bodyPr>
+          <a:bodyPr/>
           <a:lstStyle/>
           <a:p>
-            <a:pPr marL="457200" lvl="0" indent="-387350" algn="l" rtl="0">
-              <a:spcBef>
-                <a:spcPts val="0"/>
-              </a:spcBef>
-              <a:spcAft>
-                <a:spcPts val="0"/>
-              </a:spcAft>
-              <a:buSzPts val="2500"/>
-              <a:buChar char="●"/>
+            <a:pPr marL="114300" indent="0">
+              <a:buNone/>
             </a:pPr>
             <a:r>
-              <a:rPr lang="it" sz="2500"/>
-              <a:t>Java</a:t>
+              <a:rPr lang="it-IT" dirty="0"/>
+              <a:t>SCOPO DI APPLICAZIONE MOBILE:</a:t>
             </a:r>
-            <a:endParaRPr sz="2500"/>
           </a:p>
           <a:p>
-            <a:pPr marL="457200" lvl="0" indent="-387350" algn="l" rtl="0">
-              <a:spcBef>
-                <a:spcPts val="0"/>
-              </a:spcBef>
-              <a:spcAft>
-                <a:spcPts val="0"/>
-              </a:spcAft>
-              <a:buSzPts val="2500"/>
-              <a:buChar char="●"/>
-            </a:pPr>
             <a:r>
-              <a:rPr lang="it" sz="2500"/>
-              <a:t>Python</a:t>
+              <a:rPr lang="it-IT" dirty="0"/>
+              <a:t>Registrazione Utente</a:t>
             </a:r>
-            <a:endParaRPr sz="2500"/>
           </a:p>
           <a:p>
-            <a:pPr marL="457200" lvl="0" indent="-387350" algn="l" rtl="0">
-              <a:spcBef>
-                <a:spcPts val="0"/>
-              </a:spcBef>
-              <a:spcAft>
-                <a:spcPts val="0"/>
-              </a:spcAft>
-              <a:buSzPts val="2500"/>
-              <a:buChar char="●"/>
-            </a:pPr>
             <a:r>
-              <a:rPr lang="it" sz="2500"/>
-              <a:t>HTML</a:t>
+              <a:rPr lang="it-IT" dirty="0"/>
+              <a:t>Registrazione animali utente</a:t>
             </a:r>
-            <a:endParaRPr sz="2500"/>
           </a:p>
           <a:p>
-            <a:pPr marL="457200" lvl="0" indent="-387350" algn="l" rtl="0">
-              <a:spcBef>
-                <a:spcPts val="0"/>
-              </a:spcBef>
-              <a:spcAft>
-                <a:spcPts val="0"/>
-              </a:spcAft>
-              <a:buSzPts val="2500"/>
-              <a:buChar char="●"/>
-            </a:pPr>
             <a:r>
-              <a:rPr lang="it" sz="2500"/>
-              <a:t>XML</a:t>
+              <a:rPr lang="it-IT" dirty="0"/>
+              <a:t>Agenda delle attività da svolgere con e per il/i proprio/i animale/i</a:t>
             </a:r>
-            <a:endParaRPr sz="2500"/>
           </a:p>
           <a:p>
-            <a:pPr marL="457200" lvl="0" indent="-387350" algn="l" rtl="0">
-              <a:spcBef>
-                <a:spcPts val="0"/>
-              </a:spcBef>
-              <a:spcAft>
-                <a:spcPts val="0"/>
-              </a:spcAft>
-              <a:buSzPts val="2500"/>
-              <a:buChar char="●"/>
-            </a:pPr>
             <a:r>
-              <a:rPr lang="it" sz="2500"/>
-              <a:t>CSS</a:t>
+              <a:rPr lang="it-IT" dirty="0"/>
+              <a:t>Cartella Clinica per monitorare salute dell’animale</a:t>
             </a:r>
-            <a:endParaRPr sz="2500"/>
-          </a:p>
-        </p:txBody>
-      </p:sp>
-      <p:sp>
-        <p:nvSpPr>
-          <p:cNvPr id="72" name="Google Shape;72;p15"/>
-          <p:cNvSpPr txBox="1"/>
-          <p:nvPr/>
-        </p:nvSpPr>
-        <p:spPr>
-          <a:xfrm>
-            <a:off x="442825" y="1552375"/>
-            <a:ext cx="3675000" cy="3022500"/>
-          </a:xfrm>
-          <a:prstGeom prst="rect">
-            <a:avLst/>
-          </a:prstGeom>
-          <a:noFill/>
-          <a:ln>
-            <a:noFill/>
-          </a:ln>
-        </p:spPr>
-        <p:txBody>
-          <a:bodyPr spcFirstLastPara="1" wrap="square" lIns="91425" tIns="91425" rIns="91425" bIns="91425" anchor="ctr" anchorCtr="0">
-            <a:noAutofit/>
-          </a:bodyPr>
-          <a:lstStyle/>
-          <a:p>
-            <a:pPr marL="457200" lvl="0" indent="-387350" algn="l" rtl="0">
-              <a:spcBef>
-                <a:spcPts val="0"/>
-              </a:spcBef>
-              <a:spcAft>
-                <a:spcPts val="0"/>
-              </a:spcAft>
-              <a:buClr>
-                <a:schemeClr val="dk1"/>
-              </a:buClr>
-              <a:buSzPts val="2500"/>
-              <a:buFont typeface="Old Standard TT"/>
-              <a:buChar char="●"/>
-            </a:pPr>
-            <a:r>
-              <a:rPr lang="it" sz="2500" dirty="0">
-                <a:solidFill>
-                  <a:schemeClr val="dk1"/>
-                </a:solidFill>
-                <a:latin typeface="Old Standard TT"/>
-                <a:ea typeface="Old Standard TT"/>
-                <a:cs typeface="Old Standard TT"/>
-                <a:sym typeface="Old Standard TT"/>
-              </a:rPr>
-              <a:t>VS code</a:t>
-            </a:r>
-            <a:endParaRPr sz="2500" dirty="0">
-              <a:solidFill>
-                <a:schemeClr val="dk1"/>
-              </a:solidFill>
-              <a:latin typeface="Old Standard TT"/>
-              <a:ea typeface="Old Standard TT"/>
-              <a:cs typeface="Old Standard TT"/>
-              <a:sym typeface="Old Standard TT"/>
-            </a:endParaRPr>
           </a:p>
           <a:p>
-            <a:pPr marL="457200" lvl="0" indent="-387350" algn="l" rtl="0">
-              <a:spcBef>
-                <a:spcPts val="0"/>
-              </a:spcBef>
-              <a:spcAft>
-                <a:spcPts val="0"/>
-              </a:spcAft>
-              <a:buClr>
-                <a:schemeClr val="dk1"/>
-              </a:buClr>
-              <a:buSzPts val="2500"/>
-              <a:buFont typeface="Old Standard TT"/>
-              <a:buChar char="●"/>
-            </a:pPr>
             <a:r>
-              <a:rPr lang="it" sz="2500" dirty="0">
-                <a:solidFill>
-                  <a:schemeClr val="dk1"/>
-                </a:solidFill>
-                <a:latin typeface="Old Standard TT"/>
-                <a:ea typeface="Old Standard TT"/>
-                <a:cs typeface="Old Standard TT"/>
-                <a:sym typeface="Old Standard TT"/>
-              </a:rPr>
-              <a:t>Android Studio</a:t>
+              <a:rPr lang="it-IT" dirty="0"/>
+              <a:t>Registrazione dati emotivi, per seguire l’umore del proprio animale</a:t>
             </a:r>
-            <a:endParaRPr sz="2500" dirty="0">
-              <a:solidFill>
-                <a:schemeClr val="dk1"/>
-              </a:solidFill>
-              <a:latin typeface="Old Standard TT"/>
-              <a:ea typeface="Old Standard TT"/>
-              <a:cs typeface="Old Standard TT"/>
-              <a:sym typeface="Old Standard TT"/>
-            </a:endParaRPr>
           </a:p>
           <a:p>
-            <a:pPr marL="457200" lvl="0" indent="-387350" algn="l" rtl="0">
-              <a:spcBef>
-                <a:spcPts val="0"/>
-              </a:spcBef>
-              <a:spcAft>
-                <a:spcPts val="0"/>
-              </a:spcAft>
-              <a:buClr>
-                <a:schemeClr val="dk1"/>
-              </a:buClr>
-              <a:buSzPts val="2500"/>
-              <a:buFont typeface="Old Standard TT"/>
-              <a:buChar char="●"/>
-            </a:pPr>
             <a:r>
-              <a:rPr lang="it" sz="2500" dirty="0">
-                <a:solidFill>
-                  <a:schemeClr val="dk1"/>
-                </a:solidFill>
-                <a:latin typeface="Old Standard TT"/>
-                <a:ea typeface="Old Standard TT"/>
-                <a:cs typeface="Old Standard TT"/>
-                <a:sym typeface="Old Standard TT"/>
-              </a:rPr>
-              <a:t>MySQL Workbench</a:t>
+              <a:rPr lang="it-IT" dirty="0"/>
+              <a:t>Ricerca di servizi vari per la cura e il benessere dell’animale (da implementare in futuro)</a:t>
             </a:r>
-            <a:endParaRPr sz="2500" dirty="0">
-              <a:solidFill>
-                <a:schemeClr val="dk1"/>
-              </a:solidFill>
-              <a:latin typeface="Old Standard TT"/>
-              <a:ea typeface="Old Standard TT"/>
-              <a:cs typeface="Old Standard TT"/>
-              <a:sym typeface="Old Standard TT"/>
-            </a:endParaRPr>
           </a:p>
-        </p:txBody>
-      </p:sp>
-      <p:sp>
-        <p:nvSpPr>
-          <p:cNvPr id="73" name="Google Shape;73;p15"/>
-          <p:cNvSpPr txBox="1">
-            <a:spLocks noGrp="1"/>
-          </p:cNvSpPr>
-          <p:nvPr>
-            <p:ph type="title"/>
-          </p:nvPr>
-        </p:nvSpPr>
-        <p:spPr>
-          <a:xfrm>
-            <a:off x="4663650" y="219175"/>
-            <a:ext cx="4373100" cy="1333200"/>
-          </a:xfrm>
-          <a:prstGeom prst="rect">
-            <a:avLst/>
-          </a:prstGeom>
-        </p:spPr>
-        <p:txBody>
-          <a:bodyPr spcFirstLastPara="1" wrap="square" lIns="91425" tIns="91425" rIns="91425" bIns="91425" anchor="t" anchorCtr="0">
-            <a:noAutofit/>
-          </a:bodyPr>
-          <a:lstStyle/>
           <a:p>
-            <a:pPr marL="0" lvl="0" indent="0" algn="ctr" rtl="0">
-              <a:spcBef>
-                <a:spcPts val="0"/>
-              </a:spcBef>
-              <a:spcAft>
-                <a:spcPts val="0"/>
-              </a:spcAft>
-              <a:buNone/>
-            </a:pPr>
             <a:r>
-              <a:rPr lang="it"/>
-              <a:t>I linguaggi</a:t>
+              <a:rPr lang="it-IT" dirty="0"/>
+              <a:t>Possibilità di prenotare servizi dedicati e lasciare recensioni (prossimo sviluppo)</a:t>
             </a:r>
-            <a:endParaRPr/>
+          </a:p>
+          <a:p>
+            <a:endParaRPr lang="it-IT" dirty="0"/>
           </a:p>
         </p:txBody>
       </p:sp>
     </p:spTree>
+    <p:extLst>
+      <p:ext uri="{BB962C8B-B14F-4D97-AF65-F5344CB8AC3E}">
+        <p14:creationId xmlns:p14="http://schemas.microsoft.com/office/powerpoint/2010/main" val="2830026645"/>
+      </p:ext>
+    </p:extLst>
   </p:cSld>
   <p:clrMapOvr>
     <a:masterClrMapping/>
@@ -7474,6 +7150,125 @@
 </file>
 
 <file path=ppt/slides/slide4.xml><?xml version="1.0" encoding="utf-8"?>
+<p:sld xmlns:a="http://schemas.openxmlformats.org/drawingml/2006/main" xmlns:r="http://schemas.openxmlformats.org/officeDocument/2006/relationships" xmlns:p="http://schemas.openxmlformats.org/presentationml/2006/main">
+  <p:cSld>
+    <p:spTree>
+      <p:nvGrpSpPr>
+        <p:cNvPr id="1" name=""/>
+        <p:cNvGrpSpPr/>
+        <p:nvPr/>
+      </p:nvGrpSpPr>
+      <p:grpSpPr>
+        <a:xfrm>
+          <a:off x="0" y="0"/>
+          <a:ext cx="0" cy="0"/>
+          <a:chOff x="0" y="0"/>
+          <a:chExt cx="0" cy="0"/>
+        </a:xfrm>
+      </p:grpSpPr>
+      <p:sp>
+        <p:nvSpPr>
+          <p:cNvPr id="2" name="Titolo 1">
+            <a:extLst>
+              <a:ext uri="{FF2B5EF4-FFF2-40B4-BE49-F238E27FC236}">
+                <a16:creationId xmlns:a16="http://schemas.microsoft.com/office/drawing/2014/main" id="{ADA6BFEA-FEB4-E750-F79B-118B292191CD}"/>
+              </a:ext>
+            </a:extLst>
+          </p:cNvPr>
+          <p:cNvSpPr>
+            <a:spLocks noGrp="1"/>
+          </p:cNvSpPr>
+          <p:nvPr>
+            <p:ph type="title"/>
+          </p:nvPr>
+        </p:nvSpPr>
+        <p:spPr/>
+        <p:txBody>
+          <a:bodyPr/>
+          <a:lstStyle/>
+          <a:p>
+            <a:r>
+              <a:rPr lang="it-IT" dirty="0"/>
+              <a:t>CRIKLE – PORTALE WEB</a:t>
+            </a:r>
+          </a:p>
+        </p:txBody>
+      </p:sp>
+      <p:sp>
+        <p:nvSpPr>
+          <p:cNvPr id="3" name="Segnaposto testo 2">
+            <a:extLst>
+              <a:ext uri="{FF2B5EF4-FFF2-40B4-BE49-F238E27FC236}">
+                <a16:creationId xmlns:a16="http://schemas.microsoft.com/office/drawing/2014/main" id="{351F22DC-5A65-CBE9-E143-A08A6752C6DD}"/>
+              </a:ext>
+            </a:extLst>
+          </p:cNvPr>
+          <p:cNvSpPr>
+            <a:spLocks noGrp="1"/>
+          </p:cNvSpPr>
+          <p:nvPr>
+            <p:ph type="body" idx="1"/>
+          </p:nvPr>
+        </p:nvSpPr>
+        <p:spPr/>
+        <p:txBody>
+          <a:bodyPr/>
+          <a:lstStyle/>
+          <a:p>
+            <a:pPr marL="114300" indent="0">
+              <a:buNone/>
+            </a:pPr>
+            <a:r>
+              <a:rPr lang="it-IT" dirty="0"/>
+              <a:t>SCOPO E UTILITA’ PORTALE WEB:</a:t>
+            </a:r>
+          </a:p>
+          <a:p>
+            <a:r>
+              <a:rPr lang="it-IT" dirty="0"/>
+              <a:t>Registrazione Fornitore</a:t>
+            </a:r>
+          </a:p>
+          <a:p>
+            <a:r>
+              <a:rPr lang="it-IT" dirty="0"/>
+              <a:t>Registrazione Attività/Servizio fornito</a:t>
+            </a:r>
+          </a:p>
+          <a:p>
+            <a:r>
+              <a:rPr lang="it-IT" dirty="0"/>
+              <a:t>Visibilità della propria attività/servizio da parte degli utenti dell’app</a:t>
+            </a:r>
+          </a:p>
+          <a:p>
+            <a:r>
+              <a:rPr lang="it-IT" dirty="0"/>
+              <a:t>Gestione agenda appuntamenti </a:t>
+            </a:r>
+          </a:p>
+          <a:p>
+            <a:r>
+              <a:rPr lang="it-IT" dirty="0"/>
+              <a:t>Gestione prenotazioni dei clienti</a:t>
+            </a:r>
+          </a:p>
+        </p:txBody>
+      </p:sp>
+    </p:spTree>
+    <p:extLst>
+      <p:ext uri="{BB962C8B-B14F-4D97-AF65-F5344CB8AC3E}">
+        <p14:creationId xmlns:p14="http://schemas.microsoft.com/office/powerpoint/2010/main" val="2965883541"/>
+      </p:ext>
+    </p:extLst>
+  </p:cSld>
+  <p:clrMapOvr>
+    <a:masterClrMapping/>
+  </p:clrMapOvr>
+</p:sld>
+</file>
+
+<file path=ppt/slides/slide5.xml><?xml version="1.0" encoding="utf-8"?>
 <p:sld xmlns:a="http://schemas.openxmlformats.org/drawingml/2006/main" xmlns:r="http://schemas.openxmlformats.org/officeDocument/2006/relationships" xmlns:p="http://schemas.openxmlformats.org/presentationml/2006/main">
   <p:cSld>
     <p:spTree>
@@ -7540,7 +7335,7 @@
 </p:sld>
 </file>
 
-<file path=ppt/slides/slide5.xml><?xml version="1.0" encoding="utf-8"?>
+<file path=ppt/slides/slide6.xml><?xml version="1.0" encoding="utf-8"?>
 <p:sld xmlns:a="http://schemas.openxmlformats.org/drawingml/2006/main" xmlns:r="http://schemas.openxmlformats.org/officeDocument/2006/relationships" xmlns:p="http://schemas.openxmlformats.org/presentationml/2006/main">
   <p:cSld>
     <p:spTree>
@@ -7932,7 +7727,1816 @@
 </p:sld>
 </file>
 
-<file path=ppt/slides/slide6.xml><?xml version="1.0" encoding="utf-8"?>
+<file path=ppt/slides/slide7.xml><?xml version="1.0" encoding="utf-8"?>
+<p:sld xmlns:a="http://schemas.openxmlformats.org/drawingml/2006/main" xmlns:r="http://schemas.openxmlformats.org/officeDocument/2006/relationships" xmlns:p="http://schemas.openxmlformats.org/presentationml/2006/main">
+  <p:cSld>
+    <p:spTree>
+      <p:nvGrpSpPr>
+        <p:cNvPr id="1" name=""/>
+        <p:cNvGrpSpPr/>
+        <p:nvPr/>
+      </p:nvGrpSpPr>
+      <p:grpSpPr>
+        <a:xfrm>
+          <a:off x="0" y="0"/>
+          <a:ext cx="0" cy="0"/>
+          <a:chOff x="0" y="0"/>
+          <a:chExt cx="0" cy="0"/>
+        </a:xfrm>
+      </p:grpSpPr>
+      <p:sp>
+        <p:nvSpPr>
+          <p:cNvPr id="2" name="Titolo 1">
+            <a:extLst>
+              <a:ext uri="{FF2B5EF4-FFF2-40B4-BE49-F238E27FC236}">
+                <a16:creationId xmlns:a16="http://schemas.microsoft.com/office/drawing/2014/main" id="{CDA77C0F-428A-8B4D-B18A-BC19217C36C7}"/>
+              </a:ext>
+            </a:extLst>
+          </p:cNvPr>
+          <p:cNvSpPr>
+            <a:spLocks noGrp="1"/>
+          </p:cNvSpPr>
+          <p:nvPr>
+            <p:ph type="title"/>
+          </p:nvPr>
+        </p:nvSpPr>
+        <p:spPr/>
+        <p:txBody>
+          <a:bodyPr/>
+          <a:lstStyle/>
+          <a:p>
+            <a:pPr algn="ctr"/>
+            <a:r>
+              <a:rPr lang="it-IT" dirty="0"/>
+              <a:t>WIREFRAME DELL’APP</a:t>
+            </a:r>
+          </a:p>
+        </p:txBody>
+      </p:sp>
+      <p:pic>
+        <p:nvPicPr>
+          <p:cNvPr id="4" name="Immagine 3" descr="Immagine che contiene testo, schermata, cerchio, logo&#10;&#10;Il contenuto generato dall'IA potrebbe non essere corretto.">
+            <a:extLst>
+              <a:ext uri="{FF2B5EF4-FFF2-40B4-BE49-F238E27FC236}">
+                <a16:creationId xmlns:a16="http://schemas.microsoft.com/office/drawing/2014/main" id="{217FE4B0-D712-635C-F1D1-D43A9F7986FC}"/>
+              </a:ext>
+            </a:extLst>
+          </p:cNvPr>
+          <p:cNvPicPr>
+            <a:picLocks noChangeAspect="1"/>
+          </p:cNvPicPr>
+          <p:nvPr/>
+        </p:nvPicPr>
+        <p:blipFill>
+          <a:blip r:embed="rId2"/>
+          <a:stretch>
+            <a:fillRect/>
+          </a:stretch>
+        </p:blipFill>
+        <p:spPr>
+          <a:xfrm>
+            <a:off x="442200" y="1019785"/>
+            <a:ext cx="830804" cy="1849143"/>
+          </a:xfrm>
+          <a:prstGeom prst="rect">
+            <a:avLst/>
+          </a:prstGeom>
+        </p:spPr>
+      </p:pic>
+      <p:pic>
+        <p:nvPicPr>
+          <p:cNvPr id="26" name="Immagine 25" descr="Immagine che contiene testo, schermata, Carattere, design&#10;&#10;Il contenuto generato dall'IA potrebbe non essere corretto.">
+            <a:extLst>
+              <a:ext uri="{FF2B5EF4-FFF2-40B4-BE49-F238E27FC236}">
+                <a16:creationId xmlns:a16="http://schemas.microsoft.com/office/drawing/2014/main" id="{EB8A02DE-DEB9-3CE5-085A-AEC786AC52A0}"/>
+              </a:ext>
+            </a:extLst>
+          </p:cNvPr>
+          <p:cNvPicPr>
+            <a:picLocks noChangeAspect="1"/>
+          </p:cNvPicPr>
+          <p:nvPr/>
+        </p:nvPicPr>
+        <p:blipFill>
+          <a:blip r:embed="rId3"/>
+          <a:stretch>
+            <a:fillRect/>
+          </a:stretch>
+        </p:blipFill>
+        <p:spPr>
+          <a:xfrm flipH="1">
+            <a:off x="2628991" y="3044883"/>
+            <a:ext cx="830802" cy="1849140"/>
+          </a:xfrm>
+          <a:prstGeom prst="rect">
+            <a:avLst/>
+          </a:prstGeom>
+        </p:spPr>
+      </p:pic>
+      <p:pic>
+        <p:nvPicPr>
+          <p:cNvPr id="28" name="Immagine 27" descr="Immagine che contiene testo, schermata, Carattere, design&#10;&#10;Il contenuto generato dall'IA potrebbe non essere corretto.">
+            <a:extLst>
+              <a:ext uri="{FF2B5EF4-FFF2-40B4-BE49-F238E27FC236}">
+                <a16:creationId xmlns:a16="http://schemas.microsoft.com/office/drawing/2014/main" id="{5A62DBC2-49C9-4D2B-5B8A-40074EE76EC3}"/>
+              </a:ext>
+            </a:extLst>
+          </p:cNvPr>
+          <p:cNvPicPr>
+            <a:picLocks noChangeAspect="1"/>
+          </p:cNvPicPr>
+          <p:nvPr/>
+        </p:nvPicPr>
+        <p:blipFill>
+          <a:blip r:embed="rId4"/>
+          <a:stretch>
+            <a:fillRect/>
+          </a:stretch>
+        </p:blipFill>
+        <p:spPr>
+          <a:xfrm>
+            <a:off x="5642708" y="1067394"/>
+            <a:ext cx="864552" cy="1924258"/>
+          </a:xfrm>
+          <a:prstGeom prst="rect">
+            <a:avLst/>
+          </a:prstGeom>
+        </p:spPr>
+      </p:pic>
+      <p:pic>
+        <p:nvPicPr>
+          <p:cNvPr id="30" name="Immagine 29" descr="Immagine che contiene testo, schermata, biglietto da visita, design&#10;&#10;Il contenuto generato dall'IA potrebbe non essere corretto.">
+            <a:extLst>
+              <a:ext uri="{FF2B5EF4-FFF2-40B4-BE49-F238E27FC236}">
+                <a16:creationId xmlns:a16="http://schemas.microsoft.com/office/drawing/2014/main" id="{030715D4-13A2-9A99-BC46-49964438FCE4}"/>
+              </a:ext>
+            </a:extLst>
+          </p:cNvPr>
+          <p:cNvPicPr>
+            <a:picLocks noChangeAspect="1"/>
+          </p:cNvPicPr>
+          <p:nvPr/>
+        </p:nvPicPr>
+        <p:blipFill>
+          <a:blip r:embed="rId5"/>
+          <a:stretch>
+            <a:fillRect/>
+          </a:stretch>
+        </p:blipFill>
+        <p:spPr>
+          <a:xfrm>
+            <a:off x="6749986" y="1057344"/>
+            <a:ext cx="864552" cy="1924259"/>
+          </a:xfrm>
+          <a:prstGeom prst="rect">
+            <a:avLst/>
+          </a:prstGeom>
+        </p:spPr>
+      </p:pic>
+      <p:pic>
+        <p:nvPicPr>
+          <p:cNvPr id="32" name="Immagine 31" descr="Immagine che contiene testo, schermata, Carattere, design&#10;&#10;Il contenuto generato dall'IA potrebbe non essere corretto.">
+            <a:extLst>
+              <a:ext uri="{FF2B5EF4-FFF2-40B4-BE49-F238E27FC236}">
+                <a16:creationId xmlns:a16="http://schemas.microsoft.com/office/drawing/2014/main" id="{B7D876EF-870A-461F-D6E3-AF266C3C95B9}"/>
+              </a:ext>
+            </a:extLst>
+          </p:cNvPr>
+          <p:cNvPicPr>
+            <a:picLocks noChangeAspect="1"/>
+          </p:cNvPicPr>
+          <p:nvPr/>
+        </p:nvPicPr>
+        <p:blipFill>
+          <a:blip r:embed="rId6"/>
+          <a:stretch>
+            <a:fillRect/>
+          </a:stretch>
+        </p:blipFill>
+        <p:spPr>
+          <a:xfrm>
+            <a:off x="4845331" y="3073459"/>
+            <a:ext cx="864553" cy="1924259"/>
+          </a:xfrm>
+          <a:prstGeom prst="rect">
+            <a:avLst/>
+          </a:prstGeom>
+        </p:spPr>
+      </p:pic>
+      <p:pic>
+        <p:nvPicPr>
+          <p:cNvPr id="34" name="Immagine 33" descr="Immagine che contiene testo, schermata, logo, design&#10;&#10;Il contenuto generato dall'IA potrebbe non essere corretto.">
+            <a:extLst>
+              <a:ext uri="{FF2B5EF4-FFF2-40B4-BE49-F238E27FC236}">
+                <a16:creationId xmlns:a16="http://schemas.microsoft.com/office/drawing/2014/main" id="{C5AF193D-71B0-A3F6-0501-C0D09EAB8DF2}"/>
+              </a:ext>
+            </a:extLst>
+          </p:cNvPr>
+          <p:cNvPicPr>
+            <a:picLocks noChangeAspect="1"/>
+          </p:cNvPicPr>
+          <p:nvPr/>
+        </p:nvPicPr>
+        <p:blipFill>
+          <a:blip r:embed="rId7"/>
+          <a:stretch>
+            <a:fillRect/>
+          </a:stretch>
+        </p:blipFill>
+        <p:spPr>
+          <a:xfrm>
+            <a:off x="2459002" y="1058737"/>
+            <a:ext cx="838875" cy="1867109"/>
+          </a:xfrm>
+          <a:prstGeom prst="rect">
+            <a:avLst/>
+          </a:prstGeom>
+        </p:spPr>
+      </p:pic>
+      <p:pic>
+        <p:nvPicPr>
+          <p:cNvPr id="36" name="Immagine 35" descr="Immagine che contiene testo, schermata, numero, Carattere&#10;&#10;Il contenuto generato dall'IA potrebbe non essere corretto.">
+            <a:extLst>
+              <a:ext uri="{FF2B5EF4-FFF2-40B4-BE49-F238E27FC236}">
+                <a16:creationId xmlns:a16="http://schemas.microsoft.com/office/drawing/2014/main" id="{9F8718C3-4DCB-1ED3-E28B-E299F8ED67A2}"/>
+              </a:ext>
+            </a:extLst>
+          </p:cNvPr>
+          <p:cNvPicPr>
+            <a:picLocks noChangeAspect="1"/>
+          </p:cNvPicPr>
+          <p:nvPr/>
+        </p:nvPicPr>
+        <p:blipFill>
+          <a:blip r:embed="rId8"/>
+          <a:stretch>
+            <a:fillRect/>
+          </a:stretch>
+        </p:blipFill>
+        <p:spPr>
+          <a:xfrm>
+            <a:off x="3733124" y="3073459"/>
+            <a:ext cx="838876" cy="1867109"/>
+          </a:xfrm>
+          <a:prstGeom prst="rect">
+            <a:avLst/>
+          </a:prstGeom>
+        </p:spPr>
+      </p:pic>
+      <p:pic>
+        <p:nvPicPr>
+          <p:cNvPr id="38" name="Immagine 37" descr="Immagine che contiene testo, schermata, cerchio, Carattere&#10;&#10;Il contenuto generato dall'IA potrebbe non essere corretto.">
+            <a:extLst>
+              <a:ext uri="{FF2B5EF4-FFF2-40B4-BE49-F238E27FC236}">
+                <a16:creationId xmlns:a16="http://schemas.microsoft.com/office/drawing/2014/main" id="{81F0ABAE-28AE-C04C-9E3D-B61298F422DF}"/>
+              </a:ext>
+            </a:extLst>
+          </p:cNvPr>
+          <p:cNvPicPr>
+            <a:picLocks noChangeAspect="1"/>
+          </p:cNvPicPr>
+          <p:nvPr/>
+        </p:nvPicPr>
+        <p:blipFill>
+          <a:blip r:embed="rId9"/>
+          <a:stretch>
+            <a:fillRect/>
+          </a:stretch>
+        </p:blipFill>
+        <p:spPr>
+          <a:xfrm>
+            <a:off x="4542344" y="1048800"/>
+            <a:ext cx="838876" cy="1867109"/>
+          </a:xfrm>
+          <a:prstGeom prst="rect">
+            <a:avLst/>
+          </a:prstGeom>
+        </p:spPr>
+      </p:pic>
+      <p:pic>
+        <p:nvPicPr>
+          <p:cNvPr id="40" name="Immagine 39" descr="Immagine che contiene testo, schermata, grafica, logo&#10;&#10;Il contenuto generato dall'IA potrebbe non essere corretto.">
+            <a:extLst>
+              <a:ext uri="{FF2B5EF4-FFF2-40B4-BE49-F238E27FC236}">
+                <a16:creationId xmlns:a16="http://schemas.microsoft.com/office/drawing/2014/main" id="{5938B6A7-133E-B8E0-A180-2A475E9BADA9}"/>
+              </a:ext>
+            </a:extLst>
+          </p:cNvPr>
+          <p:cNvPicPr>
+            <a:picLocks noChangeAspect="1"/>
+          </p:cNvPicPr>
+          <p:nvPr/>
+        </p:nvPicPr>
+        <p:blipFill>
+          <a:blip r:embed="rId10"/>
+          <a:stretch>
+            <a:fillRect/>
+          </a:stretch>
+        </p:blipFill>
+        <p:spPr>
+          <a:xfrm>
+            <a:off x="7851095" y="1057344"/>
+            <a:ext cx="830803" cy="1849140"/>
+          </a:xfrm>
+          <a:prstGeom prst="rect">
+            <a:avLst/>
+          </a:prstGeom>
+        </p:spPr>
+      </p:pic>
+      <p:pic>
+        <p:nvPicPr>
+          <p:cNvPr id="42" name="Immagine 41" descr="Immagine che contiene testo, schermata, cerchio, Elementi grafici&#10;&#10;Il contenuto generato dall'IA potrebbe non essere corretto.">
+            <a:extLst>
+              <a:ext uri="{FF2B5EF4-FFF2-40B4-BE49-F238E27FC236}">
+                <a16:creationId xmlns:a16="http://schemas.microsoft.com/office/drawing/2014/main" id="{AC90764F-519C-F11F-4791-3F7545F71713}"/>
+              </a:ext>
+            </a:extLst>
+          </p:cNvPr>
+          <p:cNvPicPr>
+            <a:picLocks noChangeAspect="1"/>
+          </p:cNvPicPr>
+          <p:nvPr/>
+        </p:nvPicPr>
+        <p:blipFill>
+          <a:blip r:embed="rId11"/>
+          <a:stretch>
+            <a:fillRect/>
+          </a:stretch>
+        </p:blipFill>
+        <p:spPr>
+          <a:xfrm>
+            <a:off x="3436779" y="1039005"/>
+            <a:ext cx="890062" cy="1981036"/>
+          </a:xfrm>
+          <a:prstGeom prst="rect">
+            <a:avLst/>
+          </a:prstGeom>
+        </p:spPr>
+      </p:pic>
+      <p:pic>
+        <p:nvPicPr>
+          <p:cNvPr id="44" name="Immagine 43" descr="Immagine che contiene testo, schermata, Carattere, design&#10;&#10;Il contenuto generato dall'IA potrebbe non essere corretto.">
+            <a:extLst>
+              <a:ext uri="{FF2B5EF4-FFF2-40B4-BE49-F238E27FC236}">
+                <a16:creationId xmlns:a16="http://schemas.microsoft.com/office/drawing/2014/main" id="{D54A1AA3-F9D8-A2C5-A901-76D1109BB44B}"/>
+              </a:ext>
+            </a:extLst>
+          </p:cNvPr>
+          <p:cNvPicPr>
+            <a:picLocks noChangeAspect="1"/>
+          </p:cNvPicPr>
+          <p:nvPr/>
+        </p:nvPicPr>
+        <p:blipFill>
+          <a:blip r:embed="rId12"/>
+          <a:stretch>
+            <a:fillRect/>
+          </a:stretch>
+        </p:blipFill>
+        <p:spPr>
+          <a:xfrm>
+            <a:off x="6008393" y="3073460"/>
+            <a:ext cx="864552" cy="1924258"/>
+          </a:xfrm>
+          <a:prstGeom prst="rect">
+            <a:avLst/>
+          </a:prstGeom>
+        </p:spPr>
+      </p:pic>
+      <p:pic>
+        <p:nvPicPr>
+          <p:cNvPr id="46" name="Immagine 45" descr="Immagine che contiene testo, schermata, cerchio, design&#10;&#10;Il contenuto generato dall'IA potrebbe non essere corretto.">
+            <a:extLst>
+              <a:ext uri="{FF2B5EF4-FFF2-40B4-BE49-F238E27FC236}">
+                <a16:creationId xmlns:a16="http://schemas.microsoft.com/office/drawing/2014/main" id="{0BC4043E-2ACA-8C92-2EA6-1753C6C170A0}"/>
+              </a:ext>
+            </a:extLst>
+          </p:cNvPr>
+          <p:cNvPicPr>
+            <a:picLocks noChangeAspect="1"/>
+          </p:cNvPicPr>
+          <p:nvPr/>
+        </p:nvPicPr>
+        <p:blipFill>
+          <a:blip r:embed="rId13"/>
+          <a:stretch>
+            <a:fillRect/>
+          </a:stretch>
+        </p:blipFill>
+        <p:spPr>
+          <a:xfrm>
+            <a:off x="1433726" y="1035021"/>
+            <a:ext cx="864553" cy="1924261"/>
+          </a:xfrm>
+          <a:prstGeom prst="rect">
+            <a:avLst/>
+          </a:prstGeom>
+        </p:spPr>
+      </p:pic>
+    </p:spTree>
+    <p:extLst>
+      <p:ext uri="{BB962C8B-B14F-4D97-AF65-F5344CB8AC3E}">
+        <p14:creationId xmlns:p14="http://schemas.microsoft.com/office/powerpoint/2010/main" val="2210377371"/>
+      </p:ext>
+    </p:extLst>
+  </p:cSld>
+  <p:clrMapOvr>
+    <a:masterClrMapping/>
+  </p:clrMapOvr>
+  <p:timing>
+    <p:tnLst>
+      <p:par>
+        <p:cTn id="1" dur="indefinite" restart="never" nodeType="tmRoot">
+          <p:childTnLst>
+            <p:seq concurrent="1" nextAc="seek">
+              <p:cTn id="2" dur="indefinite" nodeType="mainSeq">
+                <p:childTnLst>
+                  <p:par>
+                    <p:cTn id="3" fill="hold">
+                      <p:stCondLst>
+                        <p:cond delay="indefinite"/>
+                      </p:stCondLst>
+                      <p:childTnLst>
+                        <p:par>
+                          <p:cTn id="4" fill="hold">
+                            <p:stCondLst>
+                              <p:cond delay="0"/>
+                            </p:stCondLst>
+                            <p:childTnLst>
+                              <p:par>
+                                <p:cTn id="5" presetID="42" presetClass="entr" presetSubtype="0" fill="hold" nodeType="clickEffect">
+                                  <p:stCondLst>
+                                    <p:cond delay="0"/>
+                                  </p:stCondLst>
+                                  <p:childTnLst>
+                                    <p:set>
+                                      <p:cBhvr>
+                                        <p:cTn id="6" dur="1" fill="hold">
+                                          <p:stCondLst>
+                                            <p:cond delay="0"/>
+                                          </p:stCondLst>
+                                        </p:cTn>
+                                        <p:tgtEl>
+                                          <p:spTgt spid="4"/>
+                                        </p:tgtEl>
+                                        <p:attrNameLst>
+                                          <p:attrName>style.visibility</p:attrName>
+                                        </p:attrNameLst>
+                                      </p:cBhvr>
+                                      <p:to>
+                                        <p:strVal val="visible"/>
+                                      </p:to>
+                                    </p:set>
+                                    <p:animEffect transition="in" filter="fade">
+                                      <p:cBhvr>
+                                        <p:cTn id="7" dur="1000"/>
+                                        <p:tgtEl>
+                                          <p:spTgt spid="4"/>
+                                        </p:tgtEl>
+                                      </p:cBhvr>
+                                    </p:animEffect>
+                                    <p:anim calcmode="lin" valueType="num">
+                                      <p:cBhvr>
+                                        <p:cTn id="8" dur="1000" fill="hold"/>
+                                        <p:tgtEl>
+                                          <p:spTgt spid="4"/>
+                                        </p:tgtEl>
+                                        <p:attrNameLst>
+                                          <p:attrName>ppt_x</p:attrName>
+                                        </p:attrNameLst>
+                                      </p:cBhvr>
+                                      <p:tavLst>
+                                        <p:tav tm="0">
+                                          <p:val>
+                                            <p:strVal val="#ppt_x"/>
+                                          </p:val>
+                                        </p:tav>
+                                        <p:tav tm="100000">
+                                          <p:val>
+                                            <p:strVal val="#ppt_x"/>
+                                          </p:val>
+                                        </p:tav>
+                                      </p:tavLst>
+                                    </p:anim>
+                                    <p:anim calcmode="lin" valueType="num">
+                                      <p:cBhvr>
+                                        <p:cTn id="9" dur="1000" fill="hold"/>
+                                        <p:tgtEl>
+                                          <p:spTgt spid="4"/>
+                                        </p:tgtEl>
+                                        <p:attrNameLst>
+                                          <p:attrName>ppt_y</p:attrName>
+                                        </p:attrNameLst>
+                                      </p:cBhvr>
+                                      <p:tavLst>
+                                        <p:tav tm="0">
+                                          <p:val>
+                                            <p:strVal val="#ppt_y+.1"/>
+                                          </p:val>
+                                        </p:tav>
+                                        <p:tav tm="100000">
+                                          <p:val>
+                                            <p:strVal val="#ppt_y"/>
+                                          </p:val>
+                                        </p:tav>
+                                      </p:tavLst>
+                                    </p:anim>
+                                  </p:childTnLst>
+                                </p:cTn>
+                              </p:par>
+                            </p:childTnLst>
+                          </p:cTn>
+                        </p:par>
+                      </p:childTnLst>
+                    </p:cTn>
+                  </p:par>
+                  <p:par>
+                    <p:cTn id="10" fill="hold">
+                      <p:stCondLst>
+                        <p:cond delay="indefinite"/>
+                      </p:stCondLst>
+                      <p:childTnLst>
+                        <p:par>
+                          <p:cTn id="11" fill="hold">
+                            <p:stCondLst>
+                              <p:cond delay="0"/>
+                            </p:stCondLst>
+                            <p:childTnLst>
+                              <p:par>
+                                <p:cTn id="12" presetID="42" presetClass="entr" presetSubtype="0" fill="hold" nodeType="clickEffect">
+                                  <p:stCondLst>
+                                    <p:cond delay="0"/>
+                                  </p:stCondLst>
+                                  <p:childTnLst>
+                                    <p:set>
+                                      <p:cBhvr>
+                                        <p:cTn id="13" dur="1" fill="hold">
+                                          <p:stCondLst>
+                                            <p:cond delay="0"/>
+                                          </p:stCondLst>
+                                        </p:cTn>
+                                        <p:tgtEl>
+                                          <p:spTgt spid="46"/>
+                                        </p:tgtEl>
+                                        <p:attrNameLst>
+                                          <p:attrName>style.visibility</p:attrName>
+                                        </p:attrNameLst>
+                                      </p:cBhvr>
+                                      <p:to>
+                                        <p:strVal val="visible"/>
+                                      </p:to>
+                                    </p:set>
+                                    <p:animEffect transition="in" filter="fade">
+                                      <p:cBhvr>
+                                        <p:cTn id="14" dur="1000"/>
+                                        <p:tgtEl>
+                                          <p:spTgt spid="46"/>
+                                        </p:tgtEl>
+                                      </p:cBhvr>
+                                    </p:animEffect>
+                                    <p:anim calcmode="lin" valueType="num">
+                                      <p:cBhvr>
+                                        <p:cTn id="15" dur="1000" fill="hold"/>
+                                        <p:tgtEl>
+                                          <p:spTgt spid="46"/>
+                                        </p:tgtEl>
+                                        <p:attrNameLst>
+                                          <p:attrName>ppt_x</p:attrName>
+                                        </p:attrNameLst>
+                                      </p:cBhvr>
+                                      <p:tavLst>
+                                        <p:tav tm="0">
+                                          <p:val>
+                                            <p:strVal val="#ppt_x"/>
+                                          </p:val>
+                                        </p:tav>
+                                        <p:tav tm="100000">
+                                          <p:val>
+                                            <p:strVal val="#ppt_x"/>
+                                          </p:val>
+                                        </p:tav>
+                                      </p:tavLst>
+                                    </p:anim>
+                                    <p:anim calcmode="lin" valueType="num">
+                                      <p:cBhvr>
+                                        <p:cTn id="16" dur="1000" fill="hold"/>
+                                        <p:tgtEl>
+                                          <p:spTgt spid="46"/>
+                                        </p:tgtEl>
+                                        <p:attrNameLst>
+                                          <p:attrName>ppt_y</p:attrName>
+                                        </p:attrNameLst>
+                                      </p:cBhvr>
+                                      <p:tavLst>
+                                        <p:tav tm="0">
+                                          <p:val>
+                                            <p:strVal val="#ppt_y+.1"/>
+                                          </p:val>
+                                        </p:tav>
+                                        <p:tav tm="100000">
+                                          <p:val>
+                                            <p:strVal val="#ppt_y"/>
+                                          </p:val>
+                                        </p:tav>
+                                      </p:tavLst>
+                                    </p:anim>
+                                  </p:childTnLst>
+                                </p:cTn>
+                              </p:par>
+                            </p:childTnLst>
+                          </p:cTn>
+                        </p:par>
+                      </p:childTnLst>
+                    </p:cTn>
+                  </p:par>
+                  <p:par>
+                    <p:cTn id="17" fill="hold">
+                      <p:stCondLst>
+                        <p:cond delay="indefinite"/>
+                      </p:stCondLst>
+                      <p:childTnLst>
+                        <p:par>
+                          <p:cTn id="18" fill="hold">
+                            <p:stCondLst>
+                              <p:cond delay="0"/>
+                            </p:stCondLst>
+                            <p:childTnLst>
+                              <p:par>
+                                <p:cTn id="19" presetID="42" presetClass="entr" presetSubtype="0" fill="hold" nodeType="clickEffect">
+                                  <p:stCondLst>
+                                    <p:cond delay="0"/>
+                                  </p:stCondLst>
+                                  <p:childTnLst>
+                                    <p:set>
+                                      <p:cBhvr>
+                                        <p:cTn id="20" dur="1" fill="hold">
+                                          <p:stCondLst>
+                                            <p:cond delay="0"/>
+                                          </p:stCondLst>
+                                        </p:cTn>
+                                        <p:tgtEl>
+                                          <p:spTgt spid="34"/>
+                                        </p:tgtEl>
+                                        <p:attrNameLst>
+                                          <p:attrName>style.visibility</p:attrName>
+                                        </p:attrNameLst>
+                                      </p:cBhvr>
+                                      <p:to>
+                                        <p:strVal val="visible"/>
+                                      </p:to>
+                                    </p:set>
+                                    <p:animEffect transition="in" filter="fade">
+                                      <p:cBhvr>
+                                        <p:cTn id="21" dur="1000"/>
+                                        <p:tgtEl>
+                                          <p:spTgt spid="34"/>
+                                        </p:tgtEl>
+                                      </p:cBhvr>
+                                    </p:animEffect>
+                                    <p:anim calcmode="lin" valueType="num">
+                                      <p:cBhvr>
+                                        <p:cTn id="22" dur="1000" fill="hold"/>
+                                        <p:tgtEl>
+                                          <p:spTgt spid="34"/>
+                                        </p:tgtEl>
+                                        <p:attrNameLst>
+                                          <p:attrName>ppt_x</p:attrName>
+                                        </p:attrNameLst>
+                                      </p:cBhvr>
+                                      <p:tavLst>
+                                        <p:tav tm="0">
+                                          <p:val>
+                                            <p:strVal val="#ppt_x"/>
+                                          </p:val>
+                                        </p:tav>
+                                        <p:tav tm="100000">
+                                          <p:val>
+                                            <p:strVal val="#ppt_x"/>
+                                          </p:val>
+                                        </p:tav>
+                                      </p:tavLst>
+                                    </p:anim>
+                                    <p:anim calcmode="lin" valueType="num">
+                                      <p:cBhvr>
+                                        <p:cTn id="23" dur="1000" fill="hold"/>
+                                        <p:tgtEl>
+                                          <p:spTgt spid="34"/>
+                                        </p:tgtEl>
+                                        <p:attrNameLst>
+                                          <p:attrName>ppt_y</p:attrName>
+                                        </p:attrNameLst>
+                                      </p:cBhvr>
+                                      <p:tavLst>
+                                        <p:tav tm="0">
+                                          <p:val>
+                                            <p:strVal val="#ppt_y+.1"/>
+                                          </p:val>
+                                        </p:tav>
+                                        <p:tav tm="100000">
+                                          <p:val>
+                                            <p:strVal val="#ppt_y"/>
+                                          </p:val>
+                                        </p:tav>
+                                      </p:tavLst>
+                                    </p:anim>
+                                  </p:childTnLst>
+                                </p:cTn>
+                              </p:par>
+                            </p:childTnLst>
+                          </p:cTn>
+                        </p:par>
+                      </p:childTnLst>
+                    </p:cTn>
+                  </p:par>
+                  <p:par>
+                    <p:cTn id="24" fill="hold">
+                      <p:stCondLst>
+                        <p:cond delay="indefinite"/>
+                      </p:stCondLst>
+                      <p:childTnLst>
+                        <p:par>
+                          <p:cTn id="25" fill="hold">
+                            <p:stCondLst>
+                              <p:cond delay="0"/>
+                            </p:stCondLst>
+                            <p:childTnLst>
+                              <p:par>
+                                <p:cTn id="26" presetID="42" presetClass="entr" presetSubtype="0" fill="hold" nodeType="clickEffect">
+                                  <p:stCondLst>
+                                    <p:cond delay="0"/>
+                                  </p:stCondLst>
+                                  <p:childTnLst>
+                                    <p:set>
+                                      <p:cBhvr>
+                                        <p:cTn id="27" dur="1" fill="hold">
+                                          <p:stCondLst>
+                                            <p:cond delay="0"/>
+                                          </p:stCondLst>
+                                        </p:cTn>
+                                        <p:tgtEl>
+                                          <p:spTgt spid="42"/>
+                                        </p:tgtEl>
+                                        <p:attrNameLst>
+                                          <p:attrName>style.visibility</p:attrName>
+                                        </p:attrNameLst>
+                                      </p:cBhvr>
+                                      <p:to>
+                                        <p:strVal val="visible"/>
+                                      </p:to>
+                                    </p:set>
+                                    <p:animEffect transition="in" filter="fade">
+                                      <p:cBhvr>
+                                        <p:cTn id="28" dur="1000"/>
+                                        <p:tgtEl>
+                                          <p:spTgt spid="42"/>
+                                        </p:tgtEl>
+                                      </p:cBhvr>
+                                    </p:animEffect>
+                                    <p:anim calcmode="lin" valueType="num">
+                                      <p:cBhvr>
+                                        <p:cTn id="29" dur="1000" fill="hold"/>
+                                        <p:tgtEl>
+                                          <p:spTgt spid="42"/>
+                                        </p:tgtEl>
+                                        <p:attrNameLst>
+                                          <p:attrName>ppt_x</p:attrName>
+                                        </p:attrNameLst>
+                                      </p:cBhvr>
+                                      <p:tavLst>
+                                        <p:tav tm="0">
+                                          <p:val>
+                                            <p:strVal val="#ppt_x"/>
+                                          </p:val>
+                                        </p:tav>
+                                        <p:tav tm="100000">
+                                          <p:val>
+                                            <p:strVal val="#ppt_x"/>
+                                          </p:val>
+                                        </p:tav>
+                                      </p:tavLst>
+                                    </p:anim>
+                                    <p:anim calcmode="lin" valueType="num">
+                                      <p:cBhvr>
+                                        <p:cTn id="30" dur="1000" fill="hold"/>
+                                        <p:tgtEl>
+                                          <p:spTgt spid="42"/>
+                                        </p:tgtEl>
+                                        <p:attrNameLst>
+                                          <p:attrName>ppt_y</p:attrName>
+                                        </p:attrNameLst>
+                                      </p:cBhvr>
+                                      <p:tavLst>
+                                        <p:tav tm="0">
+                                          <p:val>
+                                            <p:strVal val="#ppt_y+.1"/>
+                                          </p:val>
+                                        </p:tav>
+                                        <p:tav tm="100000">
+                                          <p:val>
+                                            <p:strVal val="#ppt_y"/>
+                                          </p:val>
+                                        </p:tav>
+                                      </p:tavLst>
+                                    </p:anim>
+                                  </p:childTnLst>
+                                </p:cTn>
+                              </p:par>
+                            </p:childTnLst>
+                          </p:cTn>
+                        </p:par>
+                      </p:childTnLst>
+                    </p:cTn>
+                  </p:par>
+                  <p:par>
+                    <p:cTn id="31" fill="hold">
+                      <p:stCondLst>
+                        <p:cond delay="indefinite"/>
+                      </p:stCondLst>
+                      <p:childTnLst>
+                        <p:par>
+                          <p:cTn id="32" fill="hold">
+                            <p:stCondLst>
+                              <p:cond delay="0"/>
+                            </p:stCondLst>
+                            <p:childTnLst>
+                              <p:par>
+                                <p:cTn id="33" presetID="42" presetClass="entr" presetSubtype="0" fill="hold" nodeType="clickEffect">
+                                  <p:stCondLst>
+                                    <p:cond delay="0"/>
+                                  </p:stCondLst>
+                                  <p:childTnLst>
+                                    <p:set>
+                                      <p:cBhvr>
+                                        <p:cTn id="34" dur="1" fill="hold">
+                                          <p:stCondLst>
+                                            <p:cond delay="0"/>
+                                          </p:stCondLst>
+                                        </p:cTn>
+                                        <p:tgtEl>
+                                          <p:spTgt spid="38"/>
+                                        </p:tgtEl>
+                                        <p:attrNameLst>
+                                          <p:attrName>style.visibility</p:attrName>
+                                        </p:attrNameLst>
+                                      </p:cBhvr>
+                                      <p:to>
+                                        <p:strVal val="visible"/>
+                                      </p:to>
+                                    </p:set>
+                                    <p:animEffect transition="in" filter="fade">
+                                      <p:cBhvr>
+                                        <p:cTn id="35" dur="1000"/>
+                                        <p:tgtEl>
+                                          <p:spTgt spid="38"/>
+                                        </p:tgtEl>
+                                      </p:cBhvr>
+                                    </p:animEffect>
+                                    <p:anim calcmode="lin" valueType="num">
+                                      <p:cBhvr>
+                                        <p:cTn id="36" dur="1000" fill="hold"/>
+                                        <p:tgtEl>
+                                          <p:spTgt spid="38"/>
+                                        </p:tgtEl>
+                                        <p:attrNameLst>
+                                          <p:attrName>ppt_x</p:attrName>
+                                        </p:attrNameLst>
+                                      </p:cBhvr>
+                                      <p:tavLst>
+                                        <p:tav tm="0">
+                                          <p:val>
+                                            <p:strVal val="#ppt_x"/>
+                                          </p:val>
+                                        </p:tav>
+                                        <p:tav tm="100000">
+                                          <p:val>
+                                            <p:strVal val="#ppt_x"/>
+                                          </p:val>
+                                        </p:tav>
+                                      </p:tavLst>
+                                    </p:anim>
+                                    <p:anim calcmode="lin" valueType="num">
+                                      <p:cBhvr>
+                                        <p:cTn id="37" dur="1000" fill="hold"/>
+                                        <p:tgtEl>
+                                          <p:spTgt spid="38"/>
+                                        </p:tgtEl>
+                                        <p:attrNameLst>
+                                          <p:attrName>ppt_y</p:attrName>
+                                        </p:attrNameLst>
+                                      </p:cBhvr>
+                                      <p:tavLst>
+                                        <p:tav tm="0">
+                                          <p:val>
+                                            <p:strVal val="#ppt_y+.1"/>
+                                          </p:val>
+                                        </p:tav>
+                                        <p:tav tm="100000">
+                                          <p:val>
+                                            <p:strVal val="#ppt_y"/>
+                                          </p:val>
+                                        </p:tav>
+                                      </p:tavLst>
+                                    </p:anim>
+                                  </p:childTnLst>
+                                </p:cTn>
+                              </p:par>
+                            </p:childTnLst>
+                          </p:cTn>
+                        </p:par>
+                      </p:childTnLst>
+                    </p:cTn>
+                  </p:par>
+                  <p:par>
+                    <p:cTn id="38" fill="hold">
+                      <p:stCondLst>
+                        <p:cond delay="indefinite"/>
+                      </p:stCondLst>
+                      <p:childTnLst>
+                        <p:par>
+                          <p:cTn id="39" fill="hold">
+                            <p:stCondLst>
+                              <p:cond delay="0"/>
+                            </p:stCondLst>
+                            <p:childTnLst>
+                              <p:par>
+                                <p:cTn id="40" presetID="42" presetClass="entr" presetSubtype="0" fill="hold" nodeType="clickEffect">
+                                  <p:stCondLst>
+                                    <p:cond delay="0"/>
+                                  </p:stCondLst>
+                                  <p:childTnLst>
+                                    <p:set>
+                                      <p:cBhvr>
+                                        <p:cTn id="41" dur="1" fill="hold">
+                                          <p:stCondLst>
+                                            <p:cond delay="0"/>
+                                          </p:stCondLst>
+                                        </p:cTn>
+                                        <p:tgtEl>
+                                          <p:spTgt spid="28"/>
+                                        </p:tgtEl>
+                                        <p:attrNameLst>
+                                          <p:attrName>style.visibility</p:attrName>
+                                        </p:attrNameLst>
+                                      </p:cBhvr>
+                                      <p:to>
+                                        <p:strVal val="visible"/>
+                                      </p:to>
+                                    </p:set>
+                                    <p:animEffect transition="in" filter="fade">
+                                      <p:cBhvr>
+                                        <p:cTn id="42" dur="1000"/>
+                                        <p:tgtEl>
+                                          <p:spTgt spid="28"/>
+                                        </p:tgtEl>
+                                      </p:cBhvr>
+                                    </p:animEffect>
+                                    <p:anim calcmode="lin" valueType="num">
+                                      <p:cBhvr>
+                                        <p:cTn id="43" dur="1000" fill="hold"/>
+                                        <p:tgtEl>
+                                          <p:spTgt spid="28"/>
+                                        </p:tgtEl>
+                                        <p:attrNameLst>
+                                          <p:attrName>ppt_x</p:attrName>
+                                        </p:attrNameLst>
+                                      </p:cBhvr>
+                                      <p:tavLst>
+                                        <p:tav tm="0">
+                                          <p:val>
+                                            <p:strVal val="#ppt_x"/>
+                                          </p:val>
+                                        </p:tav>
+                                        <p:tav tm="100000">
+                                          <p:val>
+                                            <p:strVal val="#ppt_x"/>
+                                          </p:val>
+                                        </p:tav>
+                                      </p:tavLst>
+                                    </p:anim>
+                                    <p:anim calcmode="lin" valueType="num">
+                                      <p:cBhvr>
+                                        <p:cTn id="44" dur="1000" fill="hold"/>
+                                        <p:tgtEl>
+                                          <p:spTgt spid="28"/>
+                                        </p:tgtEl>
+                                        <p:attrNameLst>
+                                          <p:attrName>ppt_y</p:attrName>
+                                        </p:attrNameLst>
+                                      </p:cBhvr>
+                                      <p:tavLst>
+                                        <p:tav tm="0">
+                                          <p:val>
+                                            <p:strVal val="#ppt_y+.1"/>
+                                          </p:val>
+                                        </p:tav>
+                                        <p:tav tm="100000">
+                                          <p:val>
+                                            <p:strVal val="#ppt_y"/>
+                                          </p:val>
+                                        </p:tav>
+                                      </p:tavLst>
+                                    </p:anim>
+                                  </p:childTnLst>
+                                </p:cTn>
+                              </p:par>
+                            </p:childTnLst>
+                          </p:cTn>
+                        </p:par>
+                      </p:childTnLst>
+                    </p:cTn>
+                  </p:par>
+                  <p:par>
+                    <p:cTn id="45" fill="hold">
+                      <p:stCondLst>
+                        <p:cond delay="indefinite"/>
+                      </p:stCondLst>
+                      <p:childTnLst>
+                        <p:par>
+                          <p:cTn id="46" fill="hold">
+                            <p:stCondLst>
+                              <p:cond delay="0"/>
+                            </p:stCondLst>
+                            <p:childTnLst>
+                              <p:par>
+                                <p:cTn id="47" presetID="42" presetClass="entr" presetSubtype="0" fill="hold" nodeType="clickEffect">
+                                  <p:stCondLst>
+                                    <p:cond delay="0"/>
+                                  </p:stCondLst>
+                                  <p:childTnLst>
+                                    <p:set>
+                                      <p:cBhvr>
+                                        <p:cTn id="48" dur="1" fill="hold">
+                                          <p:stCondLst>
+                                            <p:cond delay="0"/>
+                                          </p:stCondLst>
+                                        </p:cTn>
+                                        <p:tgtEl>
+                                          <p:spTgt spid="30"/>
+                                        </p:tgtEl>
+                                        <p:attrNameLst>
+                                          <p:attrName>style.visibility</p:attrName>
+                                        </p:attrNameLst>
+                                      </p:cBhvr>
+                                      <p:to>
+                                        <p:strVal val="visible"/>
+                                      </p:to>
+                                    </p:set>
+                                    <p:animEffect transition="in" filter="fade">
+                                      <p:cBhvr>
+                                        <p:cTn id="49" dur="1000"/>
+                                        <p:tgtEl>
+                                          <p:spTgt spid="30"/>
+                                        </p:tgtEl>
+                                      </p:cBhvr>
+                                    </p:animEffect>
+                                    <p:anim calcmode="lin" valueType="num">
+                                      <p:cBhvr>
+                                        <p:cTn id="50" dur="1000" fill="hold"/>
+                                        <p:tgtEl>
+                                          <p:spTgt spid="30"/>
+                                        </p:tgtEl>
+                                        <p:attrNameLst>
+                                          <p:attrName>ppt_x</p:attrName>
+                                        </p:attrNameLst>
+                                      </p:cBhvr>
+                                      <p:tavLst>
+                                        <p:tav tm="0">
+                                          <p:val>
+                                            <p:strVal val="#ppt_x"/>
+                                          </p:val>
+                                        </p:tav>
+                                        <p:tav tm="100000">
+                                          <p:val>
+                                            <p:strVal val="#ppt_x"/>
+                                          </p:val>
+                                        </p:tav>
+                                      </p:tavLst>
+                                    </p:anim>
+                                    <p:anim calcmode="lin" valueType="num">
+                                      <p:cBhvr>
+                                        <p:cTn id="51" dur="1000" fill="hold"/>
+                                        <p:tgtEl>
+                                          <p:spTgt spid="30"/>
+                                        </p:tgtEl>
+                                        <p:attrNameLst>
+                                          <p:attrName>ppt_y</p:attrName>
+                                        </p:attrNameLst>
+                                      </p:cBhvr>
+                                      <p:tavLst>
+                                        <p:tav tm="0">
+                                          <p:val>
+                                            <p:strVal val="#ppt_y+.1"/>
+                                          </p:val>
+                                        </p:tav>
+                                        <p:tav tm="100000">
+                                          <p:val>
+                                            <p:strVal val="#ppt_y"/>
+                                          </p:val>
+                                        </p:tav>
+                                      </p:tavLst>
+                                    </p:anim>
+                                  </p:childTnLst>
+                                </p:cTn>
+                              </p:par>
+                            </p:childTnLst>
+                          </p:cTn>
+                        </p:par>
+                      </p:childTnLst>
+                    </p:cTn>
+                  </p:par>
+                  <p:par>
+                    <p:cTn id="52" fill="hold">
+                      <p:stCondLst>
+                        <p:cond delay="indefinite"/>
+                      </p:stCondLst>
+                      <p:childTnLst>
+                        <p:par>
+                          <p:cTn id="53" fill="hold">
+                            <p:stCondLst>
+                              <p:cond delay="0"/>
+                            </p:stCondLst>
+                            <p:childTnLst>
+                              <p:par>
+                                <p:cTn id="54" presetID="42" presetClass="entr" presetSubtype="0" fill="hold" nodeType="clickEffect">
+                                  <p:stCondLst>
+                                    <p:cond delay="0"/>
+                                  </p:stCondLst>
+                                  <p:childTnLst>
+                                    <p:set>
+                                      <p:cBhvr>
+                                        <p:cTn id="55" dur="1" fill="hold">
+                                          <p:stCondLst>
+                                            <p:cond delay="0"/>
+                                          </p:stCondLst>
+                                        </p:cTn>
+                                        <p:tgtEl>
+                                          <p:spTgt spid="40"/>
+                                        </p:tgtEl>
+                                        <p:attrNameLst>
+                                          <p:attrName>style.visibility</p:attrName>
+                                        </p:attrNameLst>
+                                      </p:cBhvr>
+                                      <p:to>
+                                        <p:strVal val="visible"/>
+                                      </p:to>
+                                    </p:set>
+                                    <p:animEffect transition="in" filter="fade">
+                                      <p:cBhvr>
+                                        <p:cTn id="56" dur="1000"/>
+                                        <p:tgtEl>
+                                          <p:spTgt spid="40"/>
+                                        </p:tgtEl>
+                                      </p:cBhvr>
+                                    </p:animEffect>
+                                    <p:anim calcmode="lin" valueType="num">
+                                      <p:cBhvr>
+                                        <p:cTn id="57" dur="1000" fill="hold"/>
+                                        <p:tgtEl>
+                                          <p:spTgt spid="40"/>
+                                        </p:tgtEl>
+                                        <p:attrNameLst>
+                                          <p:attrName>ppt_x</p:attrName>
+                                        </p:attrNameLst>
+                                      </p:cBhvr>
+                                      <p:tavLst>
+                                        <p:tav tm="0">
+                                          <p:val>
+                                            <p:strVal val="#ppt_x"/>
+                                          </p:val>
+                                        </p:tav>
+                                        <p:tav tm="100000">
+                                          <p:val>
+                                            <p:strVal val="#ppt_x"/>
+                                          </p:val>
+                                        </p:tav>
+                                      </p:tavLst>
+                                    </p:anim>
+                                    <p:anim calcmode="lin" valueType="num">
+                                      <p:cBhvr>
+                                        <p:cTn id="58" dur="1000" fill="hold"/>
+                                        <p:tgtEl>
+                                          <p:spTgt spid="40"/>
+                                        </p:tgtEl>
+                                        <p:attrNameLst>
+                                          <p:attrName>ppt_y</p:attrName>
+                                        </p:attrNameLst>
+                                      </p:cBhvr>
+                                      <p:tavLst>
+                                        <p:tav tm="0">
+                                          <p:val>
+                                            <p:strVal val="#ppt_y+.1"/>
+                                          </p:val>
+                                        </p:tav>
+                                        <p:tav tm="100000">
+                                          <p:val>
+                                            <p:strVal val="#ppt_y"/>
+                                          </p:val>
+                                        </p:tav>
+                                      </p:tavLst>
+                                    </p:anim>
+                                  </p:childTnLst>
+                                </p:cTn>
+                              </p:par>
+                            </p:childTnLst>
+                          </p:cTn>
+                        </p:par>
+                      </p:childTnLst>
+                    </p:cTn>
+                  </p:par>
+                  <p:par>
+                    <p:cTn id="59" fill="hold">
+                      <p:stCondLst>
+                        <p:cond delay="indefinite"/>
+                      </p:stCondLst>
+                      <p:childTnLst>
+                        <p:par>
+                          <p:cTn id="60" fill="hold">
+                            <p:stCondLst>
+                              <p:cond delay="0"/>
+                            </p:stCondLst>
+                            <p:childTnLst>
+                              <p:par>
+                                <p:cTn id="61" presetID="42" presetClass="entr" presetSubtype="0" fill="hold" nodeType="clickEffect">
+                                  <p:stCondLst>
+                                    <p:cond delay="0"/>
+                                  </p:stCondLst>
+                                  <p:childTnLst>
+                                    <p:set>
+                                      <p:cBhvr>
+                                        <p:cTn id="62" dur="1" fill="hold">
+                                          <p:stCondLst>
+                                            <p:cond delay="0"/>
+                                          </p:stCondLst>
+                                        </p:cTn>
+                                        <p:tgtEl>
+                                          <p:spTgt spid="26"/>
+                                        </p:tgtEl>
+                                        <p:attrNameLst>
+                                          <p:attrName>style.visibility</p:attrName>
+                                        </p:attrNameLst>
+                                      </p:cBhvr>
+                                      <p:to>
+                                        <p:strVal val="visible"/>
+                                      </p:to>
+                                    </p:set>
+                                    <p:animEffect transition="in" filter="fade">
+                                      <p:cBhvr>
+                                        <p:cTn id="63" dur="1000"/>
+                                        <p:tgtEl>
+                                          <p:spTgt spid="26"/>
+                                        </p:tgtEl>
+                                      </p:cBhvr>
+                                    </p:animEffect>
+                                    <p:anim calcmode="lin" valueType="num">
+                                      <p:cBhvr>
+                                        <p:cTn id="64" dur="1000" fill="hold"/>
+                                        <p:tgtEl>
+                                          <p:spTgt spid="26"/>
+                                        </p:tgtEl>
+                                        <p:attrNameLst>
+                                          <p:attrName>ppt_x</p:attrName>
+                                        </p:attrNameLst>
+                                      </p:cBhvr>
+                                      <p:tavLst>
+                                        <p:tav tm="0">
+                                          <p:val>
+                                            <p:strVal val="#ppt_x"/>
+                                          </p:val>
+                                        </p:tav>
+                                        <p:tav tm="100000">
+                                          <p:val>
+                                            <p:strVal val="#ppt_x"/>
+                                          </p:val>
+                                        </p:tav>
+                                      </p:tavLst>
+                                    </p:anim>
+                                    <p:anim calcmode="lin" valueType="num">
+                                      <p:cBhvr>
+                                        <p:cTn id="65" dur="1000" fill="hold"/>
+                                        <p:tgtEl>
+                                          <p:spTgt spid="26"/>
+                                        </p:tgtEl>
+                                        <p:attrNameLst>
+                                          <p:attrName>ppt_y</p:attrName>
+                                        </p:attrNameLst>
+                                      </p:cBhvr>
+                                      <p:tavLst>
+                                        <p:tav tm="0">
+                                          <p:val>
+                                            <p:strVal val="#ppt_y+.1"/>
+                                          </p:val>
+                                        </p:tav>
+                                        <p:tav tm="100000">
+                                          <p:val>
+                                            <p:strVal val="#ppt_y"/>
+                                          </p:val>
+                                        </p:tav>
+                                      </p:tavLst>
+                                    </p:anim>
+                                  </p:childTnLst>
+                                </p:cTn>
+                              </p:par>
+                            </p:childTnLst>
+                          </p:cTn>
+                        </p:par>
+                      </p:childTnLst>
+                    </p:cTn>
+                  </p:par>
+                  <p:par>
+                    <p:cTn id="66" fill="hold">
+                      <p:stCondLst>
+                        <p:cond delay="indefinite"/>
+                      </p:stCondLst>
+                      <p:childTnLst>
+                        <p:par>
+                          <p:cTn id="67" fill="hold">
+                            <p:stCondLst>
+                              <p:cond delay="0"/>
+                            </p:stCondLst>
+                            <p:childTnLst>
+                              <p:par>
+                                <p:cTn id="68" presetID="42" presetClass="entr" presetSubtype="0" fill="hold" nodeType="clickEffect">
+                                  <p:stCondLst>
+                                    <p:cond delay="0"/>
+                                  </p:stCondLst>
+                                  <p:childTnLst>
+                                    <p:set>
+                                      <p:cBhvr>
+                                        <p:cTn id="69" dur="1" fill="hold">
+                                          <p:stCondLst>
+                                            <p:cond delay="0"/>
+                                          </p:stCondLst>
+                                        </p:cTn>
+                                        <p:tgtEl>
+                                          <p:spTgt spid="36"/>
+                                        </p:tgtEl>
+                                        <p:attrNameLst>
+                                          <p:attrName>style.visibility</p:attrName>
+                                        </p:attrNameLst>
+                                      </p:cBhvr>
+                                      <p:to>
+                                        <p:strVal val="visible"/>
+                                      </p:to>
+                                    </p:set>
+                                    <p:animEffect transition="in" filter="fade">
+                                      <p:cBhvr>
+                                        <p:cTn id="70" dur="1000"/>
+                                        <p:tgtEl>
+                                          <p:spTgt spid="36"/>
+                                        </p:tgtEl>
+                                      </p:cBhvr>
+                                    </p:animEffect>
+                                    <p:anim calcmode="lin" valueType="num">
+                                      <p:cBhvr>
+                                        <p:cTn id="71" dur="1000" fill="hold"/>
+                                        <p:tgtEl>
+                                          <p:spTgt spid="36"/>
+                                        </p:tgtEl>
+                                        <p:attrNameLst>
+                                          <p:attrName>ppt_x</p:attrName>
+                                        </p:attrNameLst>
+                                      </p:cBhvr>
+                                      <p:tavLst>
+                                        <p:tav tm="0">
+                                          <p:val>
+                                            <p:strVal val="#ppt_x"/>
+                                          </p:val>
+                                        </p:tav>
+                                        <p:tav tm="100000">
+                                          <p:val>
+                                            <p:strVal val="#ppt_x"/>
+                                          </p:val>
+                                        </p:tav>
+                                      </p:tavLst>
+                                    </p:anim>
+                                    <p:anim calcmode="lin" valueType="num">
+                                      <p:cBhvr>
+                                        <p:cTn id="72" dur="1000" fill="hold"/>
+                                        <p:tgtEl>
+                                          <p:spTgt spid="36"/>
+                                        </p:tgtEl>
+                                        <p:attrNameLst>
+                                          <p:attrName>ppt_y</p:attrName>
+                                        </p:attrNameLst>
+                                      </p:cBhvr>
+                                      <p:tavLst>
+                                        <p:tav tm="0">
+                                          <p:val>
+                                            <p:strVal val="#ppt_y+.1"/>
+                                          </p:val>
+                                        </p:tav>
+                                        <p:tav tm="100000">
+                                          <p:val>
+                                            <p:strVal val="#ppt_y"/>
+                                          </p:val>
+                                        </p:tav>
+                                      </p:tavLst>
+                                    </p:anim>
+                                  </p:childTnLst>
+                                </p:cTn>
+                              </p:par>
+                            </p:childTnLst>
+                          </p:cTn>
+                        </p:par>
+                      </p:childTnLst>
+                    </p:cTn>
+                  </p:par>
+                  <p:par>
+                    <p:cTn id="73" fill="hold">
+                      <p:stCondLst>
+                        <p:cond delay="indefinite"/>
+                      </p:stCondLst>
+                      <p:childTnLst>
+                        <p:par>
+                          <p:cTn id="74" fill="hold">
+                            <p:stCondLst>
+                              <p:cond delay="0"/>
+                            </p:stCondLst>
+                            <p:childTnLst>
+                              <p:par>
+                                <p:cTn id="75" presetID="42" presetClass="entr" presetSubtype="0" fill="hold" nodeType="clickEffect">
+                                  <p:stCondLst>
+                                    <p:cond delay="0"/>
+                                  </p:stCondLst>
+                                  <p:childTnLst>
+                                    <p:set>
+                                      <p:cBhvr>
+                                        <p:cTn id="76" dur="1" fill="hold">
+                                          <p:stCondLst>
+                                            <p:cond delay="0"/>
+                                          </p:stCondLst>
+                                        </p:cTn>
+                                        <p:tgtEl>
+                                          <p:spTgt spid="32"/>
+                                        </p:tgtEl>
+                                        <p:attrNameLst>
+                                          <p:attrName>style.visibility</p:attrName>
+                                        </p:attrNameLst>
+                                      </p:cBhvr>
+                                      <p:to>
+                                        <p:strVal val="visible"/>
+                                      </p:to>
+                                    </p:set>
+                                    <p:animEffect transition="in" filter="fade">
+                                      <p:cBhvr>
+                                        <p:cTn id="77" dur="1000"/>
+                                        <p:tgtEl>
+                                          <p:spTgt spid="32"/>
+                                        </p:tgtEl>
+                                      </p:cBhvr>
+                                    </p:animEffect>
+                                    <p:anim calcmode="lin" valueType="num">
+                                      <p:cBhvr>
+                                        <p:cTn id="78" dur="1000" fill="hold"/>
+                                        <p:tgtEl>
+                                          <p:spTgt spid="32"/>
+                                        </p:tgtEl>
+                                        <p:attrNameLst>
+                                          <p:attrName>ppt_x</p:attrName>
+                                        </p:attrNameLst>
+                                      </p:cBhvr>
+                                      <p:tavLst>
+                                        <p:tav tm="0">
+                                          <p:val>
+                                            <p:strVal val="#ppt_x"/>
+                                          </p:val>
+                                        </p:tav>
+                                        <p:tav tm="100000">
+                                          <p:val>
+                                            <p:strVal val="#ppt_x"/>
+                                          </p:val>
+                                        </p:tav>
+                                      </p:tavLst>
+                                    </p:anim>
+                                    <p:anim calcmode="lin" valueType="num">
+                                      <p:cBhvr>
+                                        <p:cTn id="79" dur="1000" fill="hold"/>
+                                        <p:tgtEl>
+                                          <p:spTgt spid="32"/>
+                                        </p:tgtEl>
+                                        <p:attrNameLst>
+                                          <p:attrName>ppt_y</p:attrName>
+                                        </p:attrNameLst>
+                                      </p:cBhvr>
+                                      <p:tavLst>
+                                        <p:tav tm="0">
+                                          <p:val>
+                                            <p:strVal val="#ppt_y+.1"/>
+                                          </p:val>
+                                        </p:tav>
+                                        <p:tav tm="100000">
+                                          <p:val>
+                                            <p:strVal val="#ppt_y"/>
+                                          </p:val>
+                                        </p:tav>
+                                      </p:tavLst>
+                                    </p:anim>
+                                  </p:childTnLst>
+                                </p:cTn>
+                              </p:par>
+                            </p:childTnLst>
+                          </p:cTn>
+                        </p:par>
+                      </p:childTnLst>
+                    </p:cTn>
+                  </p:par>
+                  <p:par>
+                    <p:cTn id="80" fill="hold">
+                      <p:stCondLst>
+                        <p:cond delay="indefinite"/>
+                      </p:stCondLst>
+                      <p:childTnLst>
+                        <p:par>
+                          <p:cTn id="81" fill="hold">
+                            <p:stCondLst>
+                              <p:cond delay="0"/>
+                            </p:stCondLst>
+                            <p:childTnLst>
+                              <p:par>
+                                <p:cTn id="82" presetID="42" presetClass="entr" presetSubtype="0" fill="hold" nodeType="clickEffect">
+                                  <p:stCondLst>
+                                    <p:cond delay="0"/>
+                                  </p:stCondLst>
+                                  <p:childTnLst>
+                                    <p:set>
+                                      <p:cBhvr>
+                                        <p:cTn id="83" dur="1" fill="hold">
+                                          <p:stCondLst>
+                                            <p:cond delay="0"/>
+                                          </p:stCondLst>
+                                        </p:cTn>
+                                        <p:tgtEl>
+                                          <p:spTgt spid="44"/>
+                                        </p:tgtEl>
+                                        <p:attrNameLst>
+                                          <p:attrName>style.visibility</p:attrName>
+                                        </p:attrNameLst>
+                                      </p:cBhvr>
+                                      <p:to>
+                                        <p:strVal val="visible"/>
+                                      </p:to>
+                                    </p:set>
+                                    <p:animEffect transition="in" filter="fade">
+                                      <p:cBhvr>
+                                        <p:cTn id="84" dur="1000"/>
+                                        <p:tgtEl>
+                                          <p:spTgt spid="44"/>
+                                        </p:tgtEl>
+                                      </p:cBhvr>
+                                    </p:animEffect>
+                                    <p:anim calcmode="lin" valueType="num">
+                                      <p:cBhvr>
+                                        <p:cTn id="85" dur="1000" fill="hold"/>
+                                        <p:tgtEl>
+                                          <p:spTgt spid="44"/>
+                                        </p:tgtEl>
+                                        <p:attrNameLst>
+                                          <p:attrName>ppt_x</p:attrName>
+                                        </p:attrNameLst>
+                                      </p:cBhvr>
+                                      <p:tavLst>
+                                        <p:tav tm="0">
+                                          <p:val>
+                                            <p:strVal val="#ppt_x"/>
+                                          </p:val>
+                                        </p:tav>
+                                        <p:tav tm="100000">
+                                          <p:val>
+                                            <p:strVal val="#ppt_x"/>
+                                          </p:val>
+                                        </p:tav>
+                                      </p:tavLst>
+                                    </p:anim>
+                                    <p:anim calcmode="lin" valueType="num">
+                                      <p:cBhvr>
+                                        <p:cTn id="86" dur="1000" fill="hold"/>
+                                        <p:tgtEl>
+                                          <p:spTgt spid="44"/>
+                                        </p:tgtEl>
+                                        <p:attrNameLst>
+                                          <p:attrName>ppt_y</p:attrName>
+                                        </p:attrNameLst>
+                                      </p:cBhvr>
+                                      <p:tavLst>
+                                        <p:tav tm="0">
+                                          <p:val>
+                                            <p:strVal val="#ppt_y+.1"/>
+                                          </p:val>
+                                        </p:tav>
+                                        <p:tav tm="100000">
+                                          <p:val>
+                                            <p:strVal val="#ppt_y"/>
+                                          </p:val>
+                                        </p:tav>
+                                      </p:tavLst>
+                                    </p:anim>
+                                  </p:childTnLst>
+                                </p:cTn>
+                              </p:par>
+                            </p:childTnLst>
+                          </p:cTn>
+                        </p:par>
+                      </p:childTnLst>
+                    </p:cTn>
+                  </p:par>
+                </p:childTnLst>
+              </p:cTn>
+              <p:prevCondLst>
+                <p:cond evt="onPrev" delay="0">
+                  <p:tgtEl>
+                    <p:sldTgt/>
+                  </p:tgtEl>
+                </p:cond>
+              </p:prevCondLst>
+              <p:nextCondLst>
+                <p:cond evt="onNext" delay="0">
+                  <p:tgtEl>
+                    <p:sldTgt/>
+                  </p:tgtEl>
+                </p:cond>
+              </p:nextCondLst>
+            </p:seq>
+          </p:childTnLst>
+        </p:cTn>
+      </p:par>
+    </p:tnLst>
+  </p:timing>
+</p:sld>
+</file>
+
+<file path=ppt/slides/slide8.xml><?xml version="1.0" encoding="utf-8"?>
+<p:sld xmlns:a="http://schemas.openxmlformats.org/drawingml/2006/main" xmlns:r="http://schemas.openxmlformats.org/officeDocument/2006/relationships" xmlns:p="http://schemas.openxmlformats.org/presentationml/2006/main">
+  <p:cSld>
+    <p:spTree>
+      <p:nvGrpSpPr>
+        <p:cNvPr id="1" name=""/>
+        <p:cNvGrpSpPr/>
+        <p:nvPr/>
+      </p:nvGrpSpPr>
+      <p:grpSpPr>
+        <a:xfrm>
+          <a:off x="0" y="0"/>
+          <a:ext cx="0" cy="0"/>
+          <a:chOff x="0" y="0"/>
+          <a:chExt cx="0" cy="0"/>
+        </a:xfrm>
+      </p:grpSpPr>
+      <p:sp>
+        <p:nvSpPr>
+          <p:cNvPr id="2" name="Titolo 1">
+            <a:extLst>
+              <a:ext uri="{FF2B5EF4-FFF2-40B4-BE49-F238E27FC236}">
+                <a16:creationId xmlns:a16="http://schemas.microsoft.com/office/drawing/2014/main" id="{F5A6D474-D27D-69CB-795C-6991DFE04FCF}"/>
+              </a:ext>
+            </a:extLst>
+          </p:cNvPr>
+          <p:cNvSpPr>
+            <a:spLocks noGrp="1"/>
+          </p:cNvSpPr>
+          <p:nvPr>
+            <p:ph type="title"/>
+          </p:nvPr>
+        </p:nvSpPr>
+        <p:spPr/>
+        <p:txBody>
+          <a:bodyPr/>
+          <a:lstStyle/>
+          <a:p>
+            <a:pPr algn="ctr"/>
+            <a:r>
+              <a:rPr lang="it-IT" dirty="0"/>
+              <a:t>SCHEMA ER</a:t>
+            </a:r>
+          </a:p>
+        </p:txBody>
+      </p:sp>
+      <p:pic>
+        <p:nvPicPr>
+          <p:cNvPr id="4" name="Immagine 3" descr="Immagine che contiene diagramma, linea, Policromia, design&#10;&#10;Il contenuto generato dall'IA potrebbe non essere corretto.">
+            <a:extLst>
+              <a:ext uri="{FF2B5EF4-FFF2-40B4-BE49-F238E27FC236}">
+                <a16:creationId xmlns:a16="http://schemas.microsoft.com/office/drawing/2014/main" id="{BE05FA8C-E45B-A594-DA54-61D463F2B37A}"/>
+              </a:ext>
+            </a:extLst>
+          </p:cNvPr>
+          <p:cNvPicPr>
+            <a:picLocks noChangeAspect="1"/>
+          </p:cNvPicPr>
+          <p:nvPr/>
+        </p:nvPicPr>
+        <p:blipFill>
+          <a:blip r:embed="rId2"/>
+          <a:stretch>
+            <a:fillRect/>
+          </a:stretch>
+        </p:blipFill>
+        <p:spPr>
+          <a:xfrm>
+            <a:off x="1455514" y="948326"/>
+            <a:ext cx="6610455" cy="3984806"/>
+          </a:xfrm>
+          <a:prstGeom prst="rect">
+            <a:avLst/>
+          </a:prstGeom>
+        </p:spPr>
+      </p:pic>
+    </p:spTree>
+    <p:extLst>
+      <p:ext uri="{BB962C8B-B14F-4D97-AF65-F5344CB8AC3E}">
+        <p14:creationId xmlns:p14="http://schemas.microsoft.com/office/powerpoint/2010/main" val="4170710722"/>
+      </p:ext>
+    </p:extLst>
+  </p:cSld>
+  <p:clrMapOvr>
+    <a:masterClrMapping/>
+  </p:clrMapOvr>
+  <p:timing>
+    <p:tnLst>
+      <p:par>
+        <p:cTn id="1" dur="indefinite" restart="never" nodeType="tmRoot">
+          <p:childTnLst>
+            <p:seq concurrent="1" nextAc="seek">
+              <p:cTn id="2" dur="indefinite" nodeType="mainSeq">
+                <p:childTnLst>
+                  <p:par>
+                    <p:cTn id="3" fill="hold">
+                      <p:stCondLst>
+                        <p:cond delay="indefinite"/>
+                      </p:stCondLst>
+                      <p:childTnLst>
+                        <p:par>
+                          <p:cTn id="4" fill="hold">
+                            <p:stCondLst>
+                              <p:cond delay="0"/>
+                            </p:stCondLst>
+                            <p:childTnLst>
+                              <p:par>
+                                <p:cTn id="5" presetID="22" presetClass="entr" presetSubtype="4" fill="hold" nodeType="clickEffect">
+                                  <p:stCondLst>
+                                    <p:cond delay="0"/>
+                                  </p:stCondLst>
+                                  <p:childTnLst>
+                                    <p:set>
+                                      <p:cBhvr>
+                                        <p:cTn id="6" dur="1" fill="hold">
+                                          <p:stCondLst>
+                                            <p:cond delay="0"/>
+                                          </p:stCondLst>
+                                        </p:cTn>
+                                        <p:tgtEl>
+                                          <p:spTgt spid="4"/>
+                                        </p:tgtEl>
+                                        <p:attrNameLst>
+                                          <p:attrName>style.visibility</p:attrName>
+                                        </p:attrNameLst>
+                                      </p:cBhvr>
+                                      <p:to>
+                                        <p:strVal val="visible"/>
+                                      </p:to>
+                                    </p:set>
+                                    <p:animEffect transition="in" filter="wipe(down)">
+                                      <p:cBhvr>
+                                        <p:cTn id="7" dur="500"/>
+                                        <p:tgtEl>
+                                          <p:spTgt spid="4"/>
+                                        </p:tgtEl>
+                                      </p:cBhvr>
+                                    </p:animEffect>
+                                  </p:childTnLst>
+                                </p:cTn>
+                              </p:par>
+                            </p:childTnLst>
+                          </p:cTn>
+                        </p:par>
+                      </p:childTnLst>
+                    </p:cTn>
+                  </p:par>
+                </p:childTnLst>
+              </p:cTn>
+              <p:prevCondLst>
+                <p:cond evt="onPrev" delay="0">
+                  <p:tgtEl>
+                    <p:sldTgt/>
+                  </p:tgtEl>
+                </p:cond>
+              </p:prevCondLst>
+              <p:nextCondLst>
+                <p:cond evt="onNext" delay="0">
+                  <p:tgtEl>
+                    <p:sldTgt/>
+                  </p:tgtEl>
+                </p:cond>
+              </p:nextCondLst>
+            </p:seq>
+          </p:childTnLst>
+        </p:cTn>
+      </p:par>
+    </p:tnLst>
+  </p:timing>
+</p:sld>
+</file>
+
+<file path=ppt/slides/slide9.xml><?xml version="1.0" encoding="utf-8"?>
 <p:sld xmlns:a="http://schemas.openxmlformats.org/drawingml/2006/main" xmlns:r="http://schemas.openxmlformats.org/officeDocument/2006/relationships" xmlns:p="http://schemas.openxmlformats.org/presentationml/2006/main">
   <p:cSld>
     <p:spTree>

--- a/Documenti/Relazione Finale/PP relazione.pptx
+++ b/Documenti/Relazione Finale/PP relazione.pptx
@@ -5,7 +5,7 @@
     <p:sldMasterId id="2147483659" r:id="rId1"/>
   </p:sldMasterIdLst>
   <p:notesMasterIdLst>
-    <p:notesMasterId r:id="rId11"/>
+    <p:notesMasterId r:id="rId21"/>
   </p:notesMasterIdLst>
   <p:sldIdLst>
     <p:sldId id="256" r:id="rId2"/>
@@ -13,19 +13,36 @@
     <p:sldId id="263" r:id="rId4"/>
     <p:sldId id="264" r:id="rId5"/>
     <p:sldId id="259" r:id="rId6"/>
-    <p:sldId id="262" r:id="rId7"/>
-    <p:sldId id="265" r:id="rId8"/>
-    <p:sldId id="266" r:id="rId9"/>
-    <p:sldId id="260" r:id="rId10"/>
+    <p:sldId id="266" r:id="rId7"/>
+    <p:sldId id="268" r:id="rId8"/>
+    <p:sldId id="262" r:id="rId9"/>
+    <p:sldId id="265" r:id="rId10"/>
+    <p:sldId id="260" r:id="rId11"/>
+    <p:sldId id="267" r:id="rId12"/>
+    <p:sldId id="269" r:id="rId13"/>
+    <p:sldId id="270" r:id="rId14"/>
+    <p:sldId id="271" r:id="rId15"/>
+    <p:sldId id="272" r:id="rId16"/>
+    <p:sldId id="273" r:id="rId17"/>
+    <p:sldId id="274" r:id="rId18"/>
+    <p:sldId id="275" r:id="rId19"/>
+    <p:sldId id="276" r:id="rId20"/>
   </p:sldIdLst>
   <p:sldSz cx="9144000" cy="5143500" type="screen16x9"/>
   <p:notesSz cx="6858000" cy="9144000"/>
   <p:embeddedFontLst>
     <p:embeddedFont>
+      <p:font typeface="Amasis MT Pro" panose="02040504050005020304" pitchFamily="18" charset="0"/>
+      <p:regular r:id="rId22"/>
+      <p:bold r:id="rId23"/>
+      <p:italic r:id="rId24"/>
+      <p:boldItalic r:id="rId25"/>
+    </p:embeddedFont>
+    <p:embeddedFont>
       <p:font typeface="Old Standard TT" panose="020B0604020202020204" charset="0"/>
-      <p:regular r:id="rId12"/>
-      <p:bold r:id="rId13"/>
-      <p:italic r:id="rId14"/>
+      <p:regular r:id="rId26"/>
+      <p:bold r:id="rId27"/>
+      <p:italic r:id="rId28"/>
     </p:embeddedFont>
   </p:embeddedFontLst>
   <p:defaultTextStyle>
@@ -1253,6 +1270,72 @@
         </p:txBody>
       </p:sp>
     </p:spTree>
+  </p:cSld>
+  <p:clrMapOvr>
+    <a:masterClrMapping/>
+  </p:clrMapOvr>
+</p:notes>
+</file>
+
+<file path=ppt/notesSlides/notesSlide6.xml><?xml version="1.0" encoding="utf-8"?>
+<p:notes xmlns:a="http://schemas.openxmlformats.org/drawingml/2006/main" xmlns:r="http://schemas.openxmlformats.org/officeDocument/2006/relationships" xmlns:p="http://schemas.openxmlformats.org/presentationml/2006/main">
+  <p:cSld>
+    <p:spTree>
+      <p:nvGrpSpPr>
+        <p:cNvPr id="1" name=""/>
+        <p:cNvGrpSpPr/>
+        <p:nvPr/>
+      </p:nvGrpSpPr>
+      <p:grpSpPr>
+        <a:xfrm>
+          <a:off x="0" y="0"/>
+          <a:ext cx="0" cy="0"/>
+          <a:chOff x="0" y="0"/>
+          <a:chExt cx="0" cy="0"/>
+        </a:xfrm>
+      </p:grpSpPr>
+      <p:sp>
+        <p:nvSpPr>
+          <p:cNvPr id="2" name="Segnaposto immagine diapositiva 1"/>
+          <p:cNvSpPr>
+            <a:spLocks noGrp="1" noRot="1" noChangeAspect="1"/>
+          </p:cNvSpPr>
+          <p:nvPr>
+            <p:ph type="sldImg"/>
+          </p:nvPr>
+        </p:nvSpPr>
+        <p:spPr>
+          <a:xfrm>
+            <a:off x="381000" y="685800"/>
+            <a:ext cx="6096000" cy="3429000"/>
+          </a:xfrm>
+        </p:spPr>
+      </p:sp>
+      <p:sp>
+        <p:nvSpPr>
+          <p:cNvPr id="3" name="Segnaposto note 2"/>
+          <p:cNvSpPr>
+            <a:spLocks noGrp="1"/>
+          </p:cNvSpPr>
+          <p:nvPr>
+            <p:ph type="body" idx="1"/>
+          </p:nvPr>
+        </p:nvSpPr>
+        <p:spPr/>
+        <p:txBody>
+          <a:bodyPr/>
+          <a:lstStyle/>
+          <a:p>
+            <a:endParaRPr lang="it-IT" dirty="0"/>
+          </a:p>
+        </p:txBody>
+      </p:sp>
+    </p:spTree>
+    <p:extLst>
+      <p:ext uri="{BB962C8B-B14F-4D97-AF65-F5344CB8AC3E}">
+        <p14:creationId xmlns:p14="http://schemas.microsoft.com/office/powerpoint/2010/main" val="4103418089"/>
+      </p:ext>
+    </p:extLst>
   </p:cSld>
   <p:clrMapOvr>
     <a:masterClrMapping/>
@@ -6948,6 +7031,3274 @@
 </p:sld>
 </file>
 
+<file path=ppt/slides/slide10.xml><?xml version="1.0" encoding="utf-8"?>
+<p:sld xmlns:a="http://schemas.openxmlformats.org/drawingml/2006/main" xmlns:r="http://schemas.openxmlformats.org/officeDocument/2006/relationships" xmlns:p="http://schemas.openxmlformats.org/presentationml/2006/main">
+  <p:cSld>
+    <p:spTree>
+      <p:nvGrpSpPr>
+        <p:cNvPr id="1" name="Shape 82"/>
+        <p:cNvGrpSpPr/>
+        <p:nvPr/>
+      </p:nvGrpSpPr>
+      <p:grpSpPr>
+        <a:xfrm>
+          <a:off x="0" y="0"/>
+          <a:ext cx="0" cy="0"/>
+          <a:chOff x="0" y="0"/>
+          <a:chExt cx="0" cy="0"/>
+        </a:xfrm>
+      </p:grpSpPr>
+      <p:sp>
+        <p:nvSpPr>
+          <p:cNvPr id="83" name="Google Shape;83;p17"/>
+          <p:cNvSpPr txBox="1">
+            <a:spLocks noGrp="1"/>
+          </p:cNvSpPr>
+          <p:nvPr>
+            <p:ph type="body" idx="1"/>
+          </p:nvPr>
+        </p:nvSpPr>
+        <p:spPr>
+          <a:xfrm>
+            <a:off x="311700" y="1171675"/>
+            <a:ext cx="3999900" cy="3397200"/>
+          </a:xfrm>
+          <a:prstGeom prst="rect">
+            <a:avLst/>
+          </a:prstGeom>
+        </p:spPr>
+        <p:txBody>
+          <a:bodyPr spcFirstLastPara="1" wrap="square" lIns="91425" tIns="91425" rIns="91425" bIns="91425" anchor="t" anchorCtr="0">
+            <a:noAutofit/>
+          </a:bodyPr>
+          <a:lstStyle/>
+          <a:p>
+            <a:pPr marL="0" lvl="0" indent="0" algn="l" rtl="0">
+              <a:spcBef>
+                <a:spcPts val="0"/>
+              </a:spcBef>
+              <a:spcAft>
+                <a:spcPts val="0"/>
+              </a:spcAft>
+              <a:buNone/>
+            </a:pPr>
+            <a:r>
+              <a:rPr lang="it" sz="1800" b="1" dirty="0"/>
+              <a:t>schermate:</a:t>
+            </a:r>
+          </a:p>
+          <a:p>
+            <a:pPr marL="0" lvl="0" indent="0" algn="l" rtl="0">
+              <a:spcBef>
+                <a:spcPts val="0"/>
+              </a:spcBef>
+              <a:spcAft>
+                <a:spcPts val="0"/>
+              </a:spcAft>
+              <a:buNone/>
+            </a:pPr>
+            <a:endParaRPr lang="it-IT" sz="1800" b="1" dirty="0"/>
+          </a:p>
+          <a:p>
+            <a:pPr marL="457200" lvl="0" indent="-342900" algn="l" rtl="0">
+              <a:spcBef>
+                <a:spcPts val="1600"/>
+              </a:spcBef>
+              <a:spcAft>
+                <a:spcPts val="0"/>
+              </a:spcAft>
+              <a:buSzPts val="1800"/>
+              <a:buChar char="●"/>
+            </a:pPr>
+            <a:r>
+              <a:rPr lang="it" sz="1800" b="1" dirty="0"/>
+              <a:t>Login utente</a:t>
+            </a:r>
+            <a:endParaRPr sz="1800" b="1" dirty="0"/>
+          </a:p>
+          <a:p>
+            <a:pPr marL="457200" lvl="0" indent="-342900" algn="l" rtl="0">
+              <a:spcBef>
+                <a:spcPts val="0"/>
+              </a:spcBef>
+              <a:spcAft>
+                <a:spcPts val="0"/>
+              </a:spcAft>
+              <a:buSzPts val="1800"/>
+              <a:buChar char="●"/>
+            </a:pPr>
+            <a:r>
+              <a:rPr lang="it" sz="1800" b="1" dirty="0"/>
+              <a:t>Registrazione utente</a:t>
+            </a:r>
+            <a:endParaRPr sz="1800" b="1" dirty="0"/>
+          </a:p>
+          <a:p>
+            <a:pPr marL="457200" lvl="0" indent="-342900" algn="l" rtl="0">
+              <a:spcBef>
+                <a:spcPts val="0"/>
+              </a:spcBef>
+              <a:spcAft>
+                <a:spcPts val="0"/>
+              </a:spcAft>
+              <a:buSzPts val="1800"/>
+              <a:buChar char="●"/>
+            </a:pPr>
+            <a:r>
+              <a:rPr lang="it-IT" sz="1800" b="1" dirty="0"/>
+              <a:t>Home</a:t>
+            </a:r>
+            <a:endParaRPr lang="it" sz="1800" b="1" dirty="0"/>
+          </a:p>
+          <a:p>
+            <a:pPr marL="457200" lvl="0" indent="-342900" algn="l" rtl="0">
+              <a:spcBef>
+                <a:spcPts val="0"/>
+              </a:spcBef>
+              <a:spcAft>
+                <a:spcPts val="0"/>
+              </a:spcAft>
+              <a:buSzPts val="1800"/>
+              <a:buChar char="●"/>
+            </a:pPr>
+            <a:r>
+              <a:rPr lang="it-IT" sz="1800" b="1" dirty="0"/>
+              <a:t>Cartella Clinica</a:t>
+            </a:r>
+          </a:p>
+          <a:p>
+            <a:pPr marL="457200" lvl="0" indent="-342900" algn="l" rtl="0">
+              <a:spcBef>
+                <a:spcPts val="0"/>
+              </a:spcBef>
+              <a:spcAft>
+                <a:spcPts val="0"/>
+              </a:spcAft>
+              <a:buSzPts val="1800"/>
+              <a:buChar char="●"/>
+            </a:pPr>
+            <a:r>
+              <a:rPr lang="it-IT" sz="1800" b="1" dirty="0"/>
+              <a:t>Profilo animale</a:t>
+            </a:r>
+          </a:p>
+          <a:p>
+            <a:pPr marL="457200" lvl="0" indent="-342900" algn="l" rtl="0">
+              <a:spcBef>
+                <a:spcPts val="0"/>
+              </a:spcBef>
+              <a:spcAft>
+                <a:spcPts val="0"/>
+              </a:spcAft>
+              <a:buSzPts val="1800"/>
+              <a:buChar char="●"/>
+            </a:pPr>
+            <a:r>
+              <a:rPr lang="it-IT" sz="1800" b="1" dirty="0"/>
+              <a:t>Profilo utente</a:t>
+            </a:r>
+          </a:p>
+          <a:p>
+            <a:pPr marL="457200" lvl="0" indent="-342900" algn="l" rtl="0">
+              <a:spcBef>
+                <a:spcPts val="0"/>
+              </a:spcBef>
+              <a:spcAft>
+                <a:spcPts val="0"/>
+              </a:spcAft>
+              <a:buSzPts val="1800"/>
+              <a:buChar char="●"/>
+            </a:pPr>
+            <a:r>
+              <a:rPr lang="it-IT" sz="1800" b="1" dirty="0"/>
+              <a:t>Calendario utente per salvare eventi</a:t>
+            </a:r>
+          </a:p>
+        </p:txBody>
+      </p:sp>
+      <p:sp>
+        <p:nvSpPr>
+          <p:cNvPr id="84" name="Google Shape;84;p17"/>
+          <p:cNvSpPr txBox="1">
+            <a:spLocks noGrp="1"/>
+          </p:cNvSpPr>
+          <p:nvPr>
+            <p:ph type="title"/>
+          </p:nvPr>
+        </p:nvSpPr>
+        <p:spPr>
+          <a:xfrm>
+            <a:off x="311700" y="445025"/>
+            <a:ext cx="4260300" cy="613200"/>
+          </a:xfrm>
+          <a:prstGeom prst="rect">
+            <a:avLst/>
+          </a:prstGeom>
+        </p:spPr>
+        <p:txBody>
+          <a:bodyPr spcFirstLastPara="1" wrap="square" lIns="91425" tIns="91425" rIns="91425" bIns="91425" anchor="t" anchorCtr="0">
+            <a:noAutofit/>
+          </a:bodyPr>
+          <a:lstStyle/>
+          <a:p>
+            <a:pPr marL="0" lvl="0" indent="0" algn="l" rtl="0">
+              <a:spcBef>
+                <a:spcPts val="0"/>
+              </a:spcBef>
+              <a:spcAft>
+                <a:spcPts val="0"/>
+              </a:spcAft>
+              <a:buNone/>
+            </a:pPr>
+            <a:r>
+              <a:rPr lang="it"/>
+              <a:t>L’APP</a:t>
+            </a:r>
+            <a:endParaRPr/>
+          </a:p>
+        </p:txBody>
+      </p:sp>
+      <p:sp>
+        <p:nvSpPr>
+          <p:cNvPr id="85" name="Google Shape;85;p17"/>
+          <p:cNvSpPr txBox="1">
+            <a:spLocks noGrp="1"/>
+          </p:cNvSpPr>
+          <p:nvPr>
+            <p:ph type="title"/>
+          </p:nvPr>
+        </p:nvSpPr>
+        <p:spPr>
+          <a:xfrm>
+            <a:off x="4752925" y="445025"/>
+            <a:ext cx="4260300" cy="613200"/>
+          </a:xfrm>
+          <a:prstGeom prst="rect">
+            <a:avLst/>
+          </a:prstGeom>
+        </p:spPr>
+        <p:txBody>
+          <a:bodyPr spcFirstLastPara="1" wrap="square" lIns="91425" tIns="91425" rIns="91425" bIns="91425" anchor="t" anchorCtr="0">
+            <a:noAutofit/>
+          </a:bodyPr>
+          <a:lstStyle/>
+          <a:p>
+            <a:pPr marL="0" lvl="0" indent="0" algn="l" rtl="0">
+              <a:spcBef>
+                <a:spcPts val="0"/>
+              </a:spcBef>
+              <a:spcAft>
+                <a:spcPts val="0"/>
+              </a:spcAft>
+              <a:buNone/>
+            </a:pPr>
+            <a:r>
+              <a:rPr lang="it"/>
+              <a:t>IL SITO</a:t>
+            </a:r>
+            <a:endParaRPr/>
+          </a:p>
+        </p:txBody>
+      </p:sp>
+      <p:sp>
+        <p:nvSpPr>
+          <p:cNvPr id="86" name="Google Shape;86;p17"/>
+          <p:cNvSpPr txBox="1">
+            <a:spLocks noGrp="1"/>
+          </p:cNvSpPr>
+          <p:nvPr>
+            <p:ph type="body" idx="1"/>
+          </p:nvPr>
+        </p:nvSpPr>
+        <p:spPr>
+          <a:xfrm>
+            <a:off x="4752925" y="1171675"/>
+            <a:ext cx="3999900" cy="3397200"/>
+          </a:xfrm>
+          <a:prstGeom prst="rect">
+            <a:avLst/>
+          </a:prstGeom>
+        </p:spPr>
+        <p:txBody>
+          <a:bodyPr spcFirstLastPara="1" wrap="square" lIns="91425" tIns="91425" rIns="91425" bIns="91425" anchor="t" anchorCtr="0">
+            <a:noAutofit/>
+          </a:bodyPr>
+          <a:lstStyle/>
+          <a:p>
+            <a:pPr marL="0" lvl="0" indent="0" algn="l" rtl="0">
+              <a:spcBef>
+                <a:spcPts val="0"/>
+              </a:spcBef>
+              <a:spcAft>
+                <a:spcPts val="0"/>
+              </a:spcAft>
+              <a:buNone/>
+            </a:pPr>
+            <a:r>
+              <a:rPr lang="it" sz="1800" b="1" dirty="0"/>
+              <a:t>schermate:</a:t>
+            </a:r>
+            <a:endParaRPr lang="it-IT" sz="1800" b="1" dirty="0"/>
+          </a:p>
+          <a:p>
+            <a:pPr marL="457200" lvl="0" indent="-342900" algn="l" rtl="0">
+              <a:spcBef>
+                <a:spcPts val="1600"/>
+              </a:spcBef>
+              <a:spcAft>
+                <a:spcPts val="0"/>
+              </a:spcAft>
+              <a:buSzPts val="1800"/>
+              <a:buChar char="●"/>
+            </a:pPr>
+            <a:endParaRPr lang="it-IT" sz="1800" b="1" dirty="0"/>
+          </a:p>
+          <a:p>
+            <a:pPr marL="457200" lvl="0" indent="-342900" algn="l" rtl="0">
+              <a:spcBef>
+                <a:spcPts val="1600"/>
+              </a:spcBef>
+              <a:spcAft>
+                <a:spcPts val="0"/>
+              </a:spcAft>
+              <a:buSzPts val="1800"/>
+              <a:buChar char="●"/>
+            </a:pPr>
+            <a:r>
+              <a:rPr lang="it-IT" sz="1800" b="1" dirty="0"/>
+              <a:t>Home fornitore</a:t>
+            </a:r>
+          </a:p>
+          <a:p>
+            <a:pPr marL="457200" lvl="0" indent="-342900" algn="l" rtl="0">
+              <a:spcBef>
+                <a:spcPts val="0"/>
+              </a:spcBef>
+              <a:spcAft>
+                <a:spcPts val="0"/>
+              </a:spcAft>
+              <a:buSzPts val="1800"/>
+              <a:buChar char="●"/>
+            </a:pPr>
+            <a:r>
+              <a:rPr lang="it" sz="1800" b="1" dirty="0"/>
+              <a:t>pagina inserimento nuovi servizi</a:t>
+            </a:r>
+            <a:endParaRPr sz="1800" b="1" dirty="0"/>
+          </a:p>
+          <a:p>
+            <a:pPr marL="457200" lvl="0" indent="-342900" algn="l" rtl="0">
+              <a:spcBef>
+                <a:spcPts val="0"/>
+              </a:spcBef>
+              <a:spcAft>
+                <a:spcPts val="0"/>
+              </a:spcAft>
+              <a:buSzPts val="1800"/>
+              <a:buChar char="●"/>
+            </a:pPr>
+            <a:r>
+              <a:rPr lang="it" sz="1800" b="1" dirty="0"/>
+              <a:t>modifica delle informazioni</a:t>
+            </a:r>
+            <a:endParaRPr sz="1800" b="1" dirty="0"/>
+          </a:p>
+          <a:p>
+            <a:pPr marL="0" lvl="0" indent="0" algn="l" rtl="0">
+              <a:spcBef>
+                <a:spcPts val="1600"/>
+              </a:spcBef>
+              <a:spcAft>
+                <a:spcPts val="1600"/>
+              </a:spcAft>
+              <a:buNone/>
+            </a:pPr>
+            <a:endParaRPr sz="1800" b="1" dirty="0"/>
+          </a:p>
+        </p:txBody>
+      </p:sp>
+    </p:spTree>
+  </p:cSld>
+  <p:clrMapOvr>
+    <a:masterClrMapping/>
+  </p:clrMapOvr>
+</p:sld>
+</file>
+
+<file path=ppt/slides/slide11.xml><?xml version="1.0" encoding="utf-8"?>
+<p:sld xmlns:a="http://schemas.openxmlformats.org/drawingml/2006/main" xmlns:r="http://schemas.openxmlformats.org/officeDocument/2006/relationships" xmlns:p="http://schemas.openxmlformats.org/presentationml/2006/main">
+  <p:cSld>
+    <p:spTree>
+      <p:nvGrpSpPr>
+        <p:cNvPr id="1" name=""/>
+        <p:cNvGrpSpPr/>
+        <p:nvPr/>
+      </p:nvGrpSpPr>
+      <p:grpSpPr>
+        <a:xfrm>
+          <a:off x="0" y="0"/>
+          <a:ext cx="0" cy="0"/>
+          <a:chOff x="0" y="0"/>
+          <a:chExt cx="0" cy="0"/>
+        </a:xfrm>
+      </p:grpSpPr>
+      <p:sp>
+        <p:nvSpPr>
+          <p:cNvPr id="2" name="Titolo 1">
+            <a:extLst>
+              <a:ext uri="{FF2B5EF4-FFF2-40B4-BE49-F238E27FC236}">
+                <a16:creationId xmlns:a16="http://schemas.microsoft.com/office/drawing/2014/main" id="{A05A74FC-2392-6C82-B228-D989AD37A21C}"/>
+              </a:ext>
+            </a:extLst>
+          </p:cNvPr>
+          <p:cNvSpPr>
+            <a:spLocks noGrp="1"/>
+          </p:cNvSpPr>
+          <p:nvPr>
+            <p:ph type="title"/>
+          </p:nvPr>
+        </p:nvSpPr>
+        <p:spPr/>
+        <p:txBody>
+          <a:bodyPr/>
+          <a:lstStyle/>
+          <a:p>
+            <a:r>
+              <a:rPr lang="it-IT" dirty="0" err="1"/>
+              <a:t>Backend</a:t>
+            </a:r>
+            <a:r>
+              <a:rPr lang="it-IT" dirty="0"/>
+              <a:t>:</a:t>
+            </a:r>
+            <a:br>
+              <a:rPr lang="it-IT" dirty="0"/>
+            </a:br>
+            <a:endParaRPr lang="it-IT" dirty="0"/>
+          </a:p>
+        </p:txBody>
+      </p:sp>
+      <p:sp>
+        <p:nvSpPr>
+          <p:cNvPr id="3" name="Segnaposto testo 2">
+            <a:extLst>
+              <a:ext uri="{FF2B5EF4-FFF2-40B4-BE49-F238E27FC236}">
+                <a16:creationId xmlns:a16="http://schemas.microsoft.com/office/drawing/2014/main" id="{2F17B37D-25B2-0066-AB5D-E47A9FFD93C0}"/>
+              </a:ext>
+            </a:extLst>
+          </p:cNvPr>
+          <p:cNvSpPr>
+            <a:spLocks noGrp="1"/>
+          </p:cNvSpPr>
+          <p:nvPr>
+            <p:ph type="body" idx="1"/>
+          </p:nvPr>
+        </p:nvSpPr>
+        <p:spPr/>
+        <p:txBody>
+          <a:bodyPr/>
+          <a:lstStyle/>
+          <a:p>
+            <a:pPr marL="114300" indent="0">
+              <a:buNone/>
+            </a:pPr>
+            <a:r>
+              <a:rPr lang="it-IT" dirty="0"/>
+              <a:t>FLASK: Framework per gestire le API, ossia quello strumento che permette l’interazione tra </a:t>
+            </a:r>
+            <a:r>
+              <a:rPr lang="it-IT" dirty="0" err="1"/>
+              <a:t>frontend</a:t>
+            </a:r>
+            <a:r>
+              <a:rPr lang="it-IT" dirty="0"/>
+              <a:t> (Sito WEB o APP) e </a:t>
+            </a:r>
+            <a:r>
+              <a:rPr lang="it-IT" dirty="0" err="1"/>
+              <a:t>backend</a:t>
+            </a:r>
+            <a:r>
+              <a:rPr lang="it-IT" dirty="0"/>
+              <a:t>, ossia l’interfaccia utente e la logica di programmazione, nonché le interazioni con il DB.</a:t>
+            </a:r>
+          </a:p>
+          <a:p>
+            <a:pPr marL="114300" indent="0">
+              <a:buNone/>
+            </a:pPr>
+            <a:r>
+              <a:rPr lang="it-IT" dirty="0"/>
+              <a:t>Come linguaggio di programmazione per le API </a:t>
+            </a:r>
+            <a:r>
+              <a:rPr lang="it-IT" dirty="0" err="1"/>
+              <a:t>Flask</a:t>
+            </a:r>
+            <a:r>
+              <a:rPr lang="it-IT" dirty="0"/>
+              <a:t> viene </a:t>
+            </a:r>
+            <a:r>
+              <a:rPr lang="it-IT" dirty="0" err="1"/>
+              <a:t>uttilizzato</a:t>
+            </a:r>
+            <a:r>
+              <a:rPr lang="it-IT" dirty="0"/>
+              <a:t> PYTHON.</a:t>
+            </a:r>
+          </a:p>
+          <a:p>
+            <a:pPr marL="114300" indent="0">
+              <a:buNone/>
+            </a:pPr>
+            <a:r>
+              <a:rPr lang="it-IT" dirty="0"/>
+              <a:t>Come ambiente di sviluppo invece VISUAL STUDIO CODE.</a:t>
+            </a:r>
+          </a:p>
+          <a:p>
+            <a:pPr marL="114300" indent="0">
+              <a:buNone/>
+            </a:pPr>
+            <a:r>
+              <a:rPr lang="it-IT" dirty="0"/>
+              <a:t>Per il </a:t>
+            </a:r>
+            <a:r>
+              <a:rPr lang="it-IT" dirty="0" err="1"/>
+              <a:t>DataBase</a:t>
+            </a:r>
+            <a:r>
+              <a:rPr lang="it-IT" dirty="0"/>
+              <a:t> si è scelto un tipo di DB relazionale, MYSQL, e come ambiente di sviluppo del DB è stato utilizzato WORKBENCH.</a:t>
+            </a:r>
+          </a:p>
+        </p:txBody>
+      </p:sp>
+    </p:spTree>
+    <p:extLst>
+      <p:ext uri="{BB962C8B-B14F-4D97-AF65-F5344CB8AC3E}">
+        <p14:creationId xmlns:p14="http://schemas.microsoft.com/office/powerpoint/2010/main" val="3964257373"/>
+      </p:ext>
+    </p:extLst>
+  </p:cSld>
+  <p:clrMapOvr>
+    <a:masterClrMapping/>
+  </p:clrMapOvr>
+</p:sld>
+</file>
+
+<file path=ppt/slides/slide12.xml><?xml version="1.0" encoding="utf-8"?>
+<p:sld xmlns:a="http://schemas.openxmlformats.org/drawingml/2006/main" xmlns:r="http://schemas.openxmlformats.org/officeDocument/2006/relationships" xmlns:p="http://schemas.openxmlformats.org/presentationml/2006/main">
+  <p:cSld>
+    <p:spTree>
+      <p:nvGrpSpPr>
+        <p:cNvPr id="1" name=""/>
+        <p:cNvGrpSpPr/>
+        <p:nvPr/>
+      </p:nvGrpSpPr>
+      <p:grpSpPr>
+        <a:xfrm>
+          <a:off x="0" y="0"/>
+          <a:ext cx="0" cy="0"/>
+          <a:chOff x="0" y="0"/>
+          <a:chExt cx="0" cy="0"/>
+        </a:xfrm>
+      </p:grpSpPr>
+      <p:sp>
+        <p:nvSpPr>
+          <p:cNvPr id="2" name="Titolo 1">
+            <a:extLst>
+              <a:ext uri="{FF2B5EF4-FFF2-40B4-BE49-F238E27FC236}">
+                <a16:creationId xmlns:a16="http://schemas.microsoft.com/office/drawing/2014/main" id="{3CD9EF37-8F27-BC8E-AAF6-322944516B0D}"/>
+              </a:ext>
+            </a:extLst>
+          </p:cNvPr>
+          <p:cNvSpPr>
+            <a:spLocks noGrp="1"/>
+          </p:cNvSpPr>
+          <p:nvPr>
+            <p:ph type="title"/>
+          </p:nvPr>
+        </p:nvSpPr>
+        <p:spPr/>
+        <p:txBody>
+          <a:bodyPr/>
+          <a:lstStyle/>
+          <a:p>
+            <a:r>
+              <a:rPr lang="it-IT" dirty="0" err="1"/>
+              <a:t>FrontEnd</a:t>
+            </a:r>
+            <a:r>
+              <a:rPr lang="it-IT" dirty="0"/>
+              <a:t>:</a:t>
+            </a:r>
+          </a:p>
+        </p:txBody>
+      </p:sp>
+      <p:sp>
+        <p:nvSpPr>
+          <p:cNvPr id="3" name="Segnaposto testo 2">
+            <a:extLst>
+              <a:ext uri="{FF2B5EF4-FFF2-40B4-BE49-F238E27FC236}">
+                <a16:creationId xmlns:a16="http://schemas.microsoft.com/office/drawing/2014/main" id="{295D409D-E62D-C19E-4EB3-D40E092688C1}"/>
+              </a:ext>
+            </a:extLst>
+          </p:cNvPr>
+          <p:cNvSpPr>
+            <a:spLocks noGrp="1"/>
+          </p:cNvSpPr>
+          <p:nvPr>
+            <p:ph type="body" idx="1"/>
+          </p:nvPr>
+        </p:nvSpPr>
+        <p:spPr/>
+        <p:txBody>
+          <a:bodyPr/>
+          <a:lstStyle/>
+          <a:p>
+            <a:pPr marL="114300" indent="0">
+              <a:buNone/>
+            </a:pPr>
+            <a:r>
+              <a:rPr lang="it-IT" dirty="0"/>
+              <a:t>Per il </a:t>
+            </a:r>
+            <a:r>
+              <a:rPr lang="it-IT" dirty="0" err="1"/>
+              <a:t>FrontEnd</a:t>
+            </a:r>
+            <a:r>
+              <a:rPr lang="it-IT" dirty="0"/>
+              <a:t> dell’App Mobile, si utilizza Android, come linguaggio di programmazione JAVA (e XML come linguaggio di scripting per i layout grafici), e come IDE ANDROID STUDIO.</a:t>
+            </a:r>
+          </a:p>
+          <a:p>
+            <a:pPr marL="114300" indent="0">
+              <a:buNone/>
+            </a:pPr>
+            <a:endParaRPr lang="it-IT" dirty="0"/>
+          </a:p>
+          <a:p>
+            <a:pPr marL="114300" indent="0">
+              <a:buNone/>
+            </a:pPr>
+            <a:r>
+              <a:rPr lang="it-IT" dirty="0"/>
+              <a:t>Per il </a:t>
+            </a:r>
+            <a:r>
+              <a:rPr lang="it-IT" dirty="0" err="1"/>
+              <a:t>FrontEnd</a:t>
+            </a:r>
+            <a:r>
+              <a:rPr lang="it-IT" dirty="0"/>
+              <a:t> del sito Web si utilizzano HTML per la struttura e CSS per lo stile grafico.</a:t>
+            </a:r>
+          </a:p>
+        </p:txBody>
+      </p:sp>
+    </p:spTree>
+    <p:extLst>
+      <p:ext uri="{BB962C8B-B14F-4D97-AF65-F5344CB8AC3E}">
+        <p14:creationId xmlns:p14="http://schemas.microsoft.com/office/powerpoint/2010/main" val="2983094270"/>
+      </p:ext>
+    </p:extLst>
+  </p:cSld>
+  <p:clrMapOvr>
+    <a:masterClrMapping/>
+  </p:clrMapOvr>
+</p:sld>
+</file>
+
+<file path=ppt/slides/slide13.xml><?xml version="1.0" encoding="utf-8"?>
+<p:sld xmlns:a="http://schemas.openxmlformats.org/drawingml/2006/main" xmlns:r="http://schemas.openxmlformats.org/officeDocument/2006/relationships" xmlns:p="http://schemas.openxmlformats.org/presentationml/2006/main">
+  <p:cSld>
+    <p:spTree>
+      <p:nvGrpSpPr>
+        <p:cNvPr id="1" name=""/>
+        <p:cNvGrpSpPr/>
+        <p:nvPr/>
+      </p:nvGrpSpPr>
+      <p:grpSpPr>
+        <a:xfrm>
+          <a:off x="0" y="0"/>
+          <a:ext cx="0" cy="0"/>
+          <a:chOff x="0" y="0"/>
+          <a:chExt cx="0" cy="0"/>
+        </a:xfrm>
+      </p:grpSpPr>
+      <p:sp>
+        <p:nvSpPr>
+          <p:cNvPr id="2" name="Titolo 1">
+            <a:extLst>
+              <a:ext uri="{FF2B5EF4-FFF2-40B4-BE49-F238E27FC236}">
+                <a16:creationId xmlns:a16="http://schemas.microsoft.com/office/drawing/2014/main" id="{64409BA0-8EEF-C875-3258-62B10C48939D}"/>
+              </a:ext>
+            </a:extLst>
+          </p:cNvPr>
+          <p:cNvSpPr>
+            <a:spLocks noGrp="1"/>
+          </p:cNvSpPr>
+          <p:nvPr>
+            <p:ph type="title"/>
+          </p:nvPr>
+        </p:nvSpPr>
+        <p:spPr>
+          <a:xfrm>
+            <a:off x="265500" y="1382350"/>
+            <a:ext cx="4045200" cy="699543"/>
+          </a:xfrm>
+        </p:spPr>
+        <p:txBody>
+          <a:bodyPr/>
+          <a:lstStyle/>
+          <a:p>
+            <a:r>
+              <a:rPr lang="it-IT" dirty="0"/>
+              <a:t>Schermate App</a:t>
+            </a:r>
+          </a:p>
+        </p:txBody>
+      </p:sp>
+      <p:sp>
+        <p:nvSpPr>
+          <p:cNvPr id="3" name="Sottotitolo 2">
+            <a:extLst>
+              <a:ext uri="{FF2B5EF4-FFF2-40B4-BE49-F238E27FC236}">
+                <a16:creationId xmlns:a16="http://schemas.microsoft.com/office/drawing/2014/main" id="{728CDC97-0B7A-1406-1CE0-421668C22F72}"/>
+              </a:ext>
+            </a:extLst>
+          </p:cNvPr>
+          <p:cNvSpPr>
+            <a:spLocks noGrp="1"/>
+          </p:cNvSpPr>
+          <p:nvPr>
+            <p:ph type="subTitle" idx="1"/>
+          </p:nvPr>
+        </p:nvSpPr>
+        <p:spPr>
+          <a:xfrm>
+            <a:off x="0" y="2115858"/>
+            <a:ext cx="4045200" cy="3027642"/>
+          </a:xfrm>
+        </p:spPr>
+        <p:txBody>
+          <a:bodyPr/>
+          <a:lstStyle/>
+          <a:p>
+            <a:r>
+              <a:rPr lang="it-IT" dirty="0">
+                <a:solidFill>
+                  <a:srgbClr val="FF0000"/>
+                </a:solidFill>
+              </a:rPr>
+              <a:t>Schermata Home</a:t>
+            </a:r>
+            <a:r>
+              <a:rPr lang="it-IT" dirty="0"/>
+              <a:t>:</a:t>
+            </a:r>
+          </a:p>
+          <a:p>
+            <a:pPr>
+              <a:lnSpc>
+                <a:spcPct val="115000"/>
+              </a:lnSpc>
+              <a:spcAft>
+                <a:spcPts val="800"/>
+              </a:spcAft>
+              <a:buNone/>
+            </a:pPr>
+            <a:r>
+              <a:rPr lang="it-IT" sz="1800" kern="100" dirty="0">
+                <a:effectLst/>
+                <a:latin typeface="Amasis MT Pro" panose="02040504050005020304" pitchFamily="18" charset="0"/>
+                <a:ea typeface="Aptos" panose="020B0004020202020204" pitchFamily="34" charset="0"/>
+                <a:cs typeface="Times New Roman" panose="02020603050405020304" pitchFamily="18" charset="0"/>
+              </a:rPr>
+              <a:t>- lista con tutti i nostri animali</a:t>
+            </a:r>
+            <a:endParaRPr lang="it-IT" sz="1800" kern="100" dirty="0">
+              <a:effectLst/>
+              <a:latin typeface="Aptos" panose="020B0004020202020204" pitchFamily="34" charset="0"/>
+              <a:ea typeface="Aptos" panose="020B0004020202020204" pitchFamily="34" charset="0"/>
+              <a:cs typeface="Times New Roman" panose="02020603050405020304" pitchFamily="18" charset="0"/>
+            </a:endParaRPr>
+          </a:p>
+          <a:p>
+            <a:pPr>
+              <a:lnSpc>
+                <a:spcPct val="115000"/>
+              </a:lnSpc>
+              <a:spcAft>
+                <a:spcPts val="800"/>
+              </a:spcAft>
+              <a:buNone/>
+            </a:pPr>
+            <a:r>
+              <a:rPr lang="it-IT" sz="1800" kern="100" dirty="0">
+                <a:effectLst/>
+                <a:latin typeface="Amasis MT Pro" panose="02040504050005020304" pitchFamily="18" charset="0"/>
+                <a:ea typeface="Aptos" panose="020B0004020202020204" pitchFamily="34" charset="0"/>
+                <a:cs typeface="Times New Roman" panose="02020603050405020304" pitchFamily="18" charset="0"/>
+              </a:rPr>
+              <a:t>       - possibilità di registrarne di nuovi</a:t>
+            </a:r>
+            <a:endParaRPr lang="it-IT" sz="1800" kern="100" dirty="0">
+              <a:effectLst/>
+              <a:latin typeface="Aptos" panose="020B0004020202020204" pitchFamily="34" charset="0"/>
+              <a:ea typeface="Aptos" panose="020B0004020202020204" pitchFamily="34" charset="0"/>
+              <a:cs typeface="Times New Roman" panose="02020603050405020304" pitchFamily="18" charset="0"/>
+            </a:endParaRPr>
+          </a:p>
+          <a:p>
+            <a:pPr>
+              <a:lnSpc>
+                <a:spcPct val="115000"/>
+              </a:lnSpc>
+              <a:spcAft>
+                <a:spcPts val="800"/>
+              </a:spcAft>
+              <a:buNone/>
+            </a:pPr>
+            <a:r>
+              <a:rPr lang="it-IT" sz="1800" kern="100" dirty="0">
+                <a:effectLst/>
+                <a:latin typeface="Amasis MT Pro" panose="02040504050005020304" pitchFamily="18" charset="0"/>
+                <a:ea typeface="Aptos" panose="020B0004020202020204" pitchFamily="34" charset="0"/>
+                <a:cs typeface="Times New Roman" panose="02020603050405020304" pitchFamily="18" charset="0"/>
+              </a:rPr>
+              <a:t>     - lista di attività registrate di oggi </a:t>
+            </a:r>
+            <a:endParaRPr lang="it-IT" sz="1800" kern="100" dirty="0">
+              <a:effectLst/>
+              <a:latin typeface="Aptos" panose="020B0004020202020204" pitchFamily="34" charset="0"/>
+              <a:ea typeface="Aptos" panose="020B0004020202020204" pitchFamily="34" charset="0"/>
+              <a:cs typeface="Times New Roman" panose="02020603050405020304" pitchFamily="18" charset="0"/>
+            </a:endParaRPr>
+          </a:p>
+          <a:p>
+            <a:pPr>
+              <a:lnSpc>
+                <a:spcPct val="115000"/>
+              </a:lnSpc>
+              <a:spcAft>
+                <a:spcPts val="800"/>
+              </a:spcAft>
+            </a:pPr>
+            <a:r>
+              <a:rPr lang="it-IT" sz="1800" kern="100" dirty="0">
+                <a:latin typeface="Amasis MT Pro" panose="02040504050005020304" pitchFamily="18" charset="0"/>
+                <a:ea typeface="Aptos" panose="020B0004020202020204" pitchFamily="34" charset="0"/>
+                <a:cs typeface="Times New Roman" panose="02020603050405020304" pitchFamily="18" charset="0"/>
+              </a:rPr>
+              <a:t>  </a:t>
+            </a:r>
+            <a:r>
+              <a:rPr lang="it-IT" sz="1800" kern="100" dirty="0">
+                <a:effectLst/>
+                <a:latin typeface="Amasis MT Pro" panose="02040504050005020304" pitchFamily="18" charset="0"/>
+                <a:ea typeface="Aptos" panose="020B0004020202020204" pitchFamily="34" charset="0"/>
+                <a:cs typeface="Times New Roman" panose="02020603050405020304" pitchFamily="18" charset="0"/>
+              </a:rPr>
+              <a:t> - bottone per cercare servizi nell’area</a:t>
+            </a:r>
+            <a:endParaRPr lang="it-IT" sz="1800" kern="100" dirty="0">
+              <a:effectLst/>
+              <a:latin typeface="Aptos" panose="020B0004020202020204" pitchFamily="34" charset="0"/>
+              <a:ea typeface="Aptos" panose="020B0004020202020204" pitchFamily="34" charset="0"/>
+              <a:cs typeface="Times New Roman" panose="02020603050405020304" pitchFamily="18" charset="0"/>
+            </a:endParaRPr>
+          </a:p>
+          <a:p>
+            <a:endParaRPr lang="it-IT" dirty="0"/>
+          </a:p>
+        </p:txBody>
+      </p:sp>
+      <p:pic>
+        <p:nvPicPr>
+          <p:cNvPr id="6" name="Immagine 5" descr="Immagine che contiene testo, schermata, design&#10;&#10;Il contenuto generato dall'IA potrebbe non essere corretto.">
+            <a:extLst>
+              <a:ext uri="{FF2B5EF4-FFF2-40B4-BE49-F238E27FC236}">
+                <a16:creationId xmlns:a16="http://schemas.microsoft.com/office/drawing/2014/main" id="{AD73E6A9-D057-7B2B-3A8B-8EB6C237A064}"/>
+              </a:ext>
+            </a:extLst>
+          </p:cNvPr>
+          <p:cNvPicPr>
+            <a:picLocks noChangeAspect="1"/>
+          </p:cNvPicPr>
+          <p:nvPr/>
+        </p:nvPicPr>
+        <p:blipFill>
+          <a:blip r:embed="rId3"/>
+          <a:stretch>
+            <a:fillRect/>
+          </a:stretch>
+        </p:blipFill>
+        <p:spPr>
+          <a:xfrm>
+            <a:off x="5864656" y="812703"/>
+            <a:ext cx="1986687" cy="3518093"/>
+          </a:xfrm>
+          <a:prstGeom prst="rect">
+            <a:avLst/>
+          </a:prstGeom>
+        </p:spPr>
+      </p:pic>
+    </p:spTree>
+    <p:extLst>
+      <p:ext uri="{BB962C8B-B14F-4D97-AF65-F5344CB8AC3E}">
+        <p14:creationId xmlns:p14="http://schemas.microsoft.com/office/powerpoint/2010/main" val="2301234427"/>
+      </p:ext>
+    </p:extLst>
+  </p:cSld>
+  <p:clrMapOvr>
+    <a:masterClrMapping/>
+  </p:clrMapOvr>
+  <p:timing>
+    <p:tnLst>
+      <p:par>
+        <p:cTn id="1" dur="indefinite" restart="never" nodeType="tmRoot">
+          <p:childTnLst>
+            <p:seq concurrent="1" nextAc="seek">
+              <p:cTn id="2" dur="indefinite" nodeType="mainSeq">
+                <p:childTnLst>
+                  <p:par>
+                    <p:cTn id="3" fill="hold">
+                      <p:stCondLst>
+                        <p:cond delay="indefinite"/>
+                      </p:stCondLst>
+                      <p:childTnLst>
+                        <p:par>
+                          <p:cTn id="4" fill="hold">
+                            <p:stCondLst>
+                              <p:cond delay="0"/>
+                            </p:stCondLst>
+                            <p:childTnLst>
+                              <p:par>
+                                <p:cTn id="5" presetID="2" presetClass="entr" presetSubtype="4" fill="hold" nodeType="clickEffect">
+                                  <p:stCondLst>
+                                    <p:cond delay="0"/>
+                                  </p:stCondLst>
+                                  <p:childTnLst>
+                                    <p:set>
+                                      <p:cBhvr>
+                                        <p:cTn id="6" dur="1" fill="hold">
+                                          <p:stCondLst>
+                                            <p:cond delay="0"/>
+                                          </p:stCondLst>
+                                        </p:cTn>
+                                        <p:tgtEl>
+                                          <p:spTgt spid="6"/>
+                                        </p:tgtEl>
+                                        <p:attrNameLst>
+                                          <p:attrName>style.visibility</p:attrName>
+                                        </p:attrNameLst>
+                                      </p:cBhvr>
+                                      <p:to>
+                                        <p:strVal val="visible"/>
+                                      </p:to>
+                                    </p:set>
+                                    <p:anim calcmode="lin" valueType="num">
+                                      <p:cBhvr additive="base">
+                                        <p:cTn id="7" dur="500" fill="hold"/>
+                                        <p:tgtEl>
+                                          <p:spTgt spid="6"/>
+                                        </p:tgtEl>
+                                        <p:attrNameLst>
+                                          <p:attrName>ppt_x</p:attrName>
+                                        </p:attrNameLst>
+                                      </p:cBhvr>
+                                      <p:tavLst>
+                                        <p:tav tm="0">
+                                          <p:val>
+                                            <p:strVal val="#ppt_x"/>
+                                          </p:val>
+                                        </p:tav>
+                                        <p:tav tm="100000">
+                                          <p:val>
+                                            <p:strVal val="#ppt_x"/>
+                                          </p:val>
+                                        </p:tav>
+                                      </p:tavLst>
+                                    </p:anim>
+                                    <p:anim calcmode="lin" valueType="num">
+                                      <p:cBhvr additive="base">
+                                        <p:cTn id="8" dur="500" fill="hold"/>
+                                        <p:tgtEl>
+                                          <p:spTgt spid="6"/>
+                                        </p:tgtEl>
+                                        <p:attrNameLst>
+                                          <p:attrName>ppt_y</p:attrName>
+                                        </p:attrNameLst>
+                                      </p:cBhvr>
+                                      <p:tavLst>
+                                        <p:tav tm="0">
+                                          <p:val>
+                                            <p:strVal val="1+#ppt_h/2"/>
+                                          </p:val>
+                                        </p:tav>
+                                        <p:tav tm="100000">
+                                          <p:val>
+                                            <p:strVal val="#ppt_y"/>
+                                          </p:val>
+                                        </p:tav>
+                                      </p:tavLst>
+                                    </p:anim>
+                                  </p:childTnLst>
+                                </p:cTn>
+                              </p:par>
+                            </p:childTnLst>
+                          </p:cTn>
+                        </p:par>
+                      </p:childTnLst>
+                    </p:cTn>
+                  </p:par>
+                </p:childTnLst>
+              </p:cTn>
+              <p:prevCondLst>
+                <p:cond evt="onPrev" delay="0">
+                  <p:tgtEl>
+                    <p:sldTgt/>
+                  </p:tgtEl>
+                </p:cond>
+              </p:prevCondLst>
+              <p:nextCondLst>
+                <p:cond evt="onNext" delay="0">
+                  <p:tgtEl>
+                    <p:sldTgt/>
+                  </p:tgtEl>
+                </p:cond>
+              </p:nextCondLst>
+            </p:seq>
+          </p:childTnLst>
+        </p:cTn>
+      </p:par>
+    </p:tnLst>
+  </p:timing>
+</p:sld>
+</file>
+
+<file path=ppt/slides/slide14.xml><?xml version="1.0" encoding="utf-8"?>
+<p:sld xmlns:a="http://schemas.openxmlformats.org/drawingml/2006/main" xmlns:r="http://schemas.openxmlformats.org/officeDocument/2006/relationships" xmlns:p="http://schemas.openxmlformats.org/presentationml/2006/main">
+  <p:cSld>
+    <p:spTree>
+      <p:nvGrpSpPr>
+        <p:cNvPr id="1" name=""/>
+        <p:cNvGrpSpPr/>
+        <p:nvPr/>
+      </p:nvGrpSpPr>
+      <p:grpSpPr>
+        <a:xfrm>
+          <a:off x="0" y="0"/>
+          <a:ext cx="0" cy="0"/>
+          <a:chOff x="0" y="0"/>
+          <a:chExt cx="0" cy="0"/>
+        </a:xfrm>
+      </p:grpSpPr>
+      <p:sp>
+        <p:nvSpPr>
+          <p:cNvPr id="3" name="Sottotitolo 2">
+            <a:extLst>
+              <a:ext uri="{FF2B5EF4-FFF2-40B4-BE49-F238E27FC236}">
+                <a16:creationId xmlns:a16="http://schemas.microsoft.com/office/drawing/2014/main" id="{B926161D-599C-A7B6-3E6D-E02FBD6A4597}"/>
+              </a:ext>
+            </a:extLst>
+          </p:cNvPr>
+          <p:cNvSpPr>
+            <a:spLocks noGrp="1"/>
+          </p:cNvSpPr>
+          <p:nvPr>
+            <p:ph type="subTitle" idx="1"/>
+          </p:nvPr>
+        </p:nvSpPr>
+        <p:spPr>
+          <a:xfrm>
+            <a:off x="265500" y="1307592"/>
+            <a:ext cx="4045200" cy="2807207"/>
+          </a:xfrm>
+        </p:spPr>
+        <p:txBody>
+          <a:bodyPr/>
+          <a:lstStyle/>
+          <a:p>
+            <a:r>
+              <a:rPr lang="it-IT" dirty="0">
+                <a:solidFill>
+                  <a:srgbClr val="FF0000"/>
+                </a:solidFill>
+              </a:rPr>
+              <a:t>Profilo Animale:</a:t>
+            </a:r>
+          </a:p>
+          <a:p>
+            <a:r>
+              <a:rPr lang="it-IT" dirty="0"/>
+              <a:t>Riepilogo Info Animale</a:t>
+            </a:r>
+          </a:p>
+          <a:p>
+            <a:r>
+              <a:rPr lang="it-IT" dirty="0"/>
+              <a:t>Accesso a modifica delle info</a:t>
+            </a:r>
+          </a:p>
+          <a:p>
+            <a:r>
+              <a:rPr lang="it-IT" dirty="0"/>
+              <a:t>Accesso cartella clinica</a:t>
+            </a:r>
+          </a:p>
+          <a:p>
+            <a:r>
+              <a:rPr lang="it-IT" dirty="0"/>
+              <a:t>Inserimento rating emotivo</a:t>
+            </a:r>
+          </a:p>
+        </p:txBody>
+      </p:sp>
+      <p:pic>
+        <p:nvPicPr>
+          <p:cNvPr id="6" name="Immagine 5" descr="Immagine che contiene testo, schermata, Carattere, design&#10;&#10;Il contenuto generato dall'IA potrebbe non essere corretto.">
+            <a:extLst>
+              <a:ext uri="{FF2B5EF4-FFF2-40B4-BE49-F238E27FC236}">
+                <a16:creationId xmlns:a16="http://schemas.microsoft.com/office/drawing/2014/main" id="{95941C5F-0264-87FF-F0D4-9C684704FEFC}"/>
+              </a:ext>
+            </a:extLst>
+          </p:cNvPr>
+          <p:cNvPicPr>
+            <a:picLocks noChangeAspect="1"/>
+          </p:cNvPicPr>
+          <p:nvPr/>
+        </p:nvPicPr>
+        <p:blipFill>
+          <a:blip r:embed="rId2"/>
+          <a:stretch>
+            <a:fillRect/>
+          </a:stretch>
+        </p:blipFill>
+        <p:spPr>
+          <a:xfrm>
+            <a:off x="5856925" y="603181"/>
+            <a:ext cx="2176731" cy="3659683"/>
+          </a:xfrm>
+          <a:prstGeom prst="rect">
+            <a:avLst/>
+          </a:prstGeom>
+        </p:spPr>
+      </p:pic>
+    </p:spTree>
+    <p:extLst>
+      <p:ext uri="{BB962C8B-B14F-4D97-AF65-F5344CB8AC3E}">
+        <p14:creationId xmlns:p14="http://schemas.microsoft.com/office/powerpoint/2010/main" val="1358515317"/>
+      </p:ext>
+    </p:extLst>
+  </p:cSld>
+  <p:clrMapOvr>
+    <a:masterClrMapping/>
+  </p:clrMapOvr>
+  <p:timing>
+    <p:tnLst>
+      <p:par>
+        <p:cTn id="1" dur="indefinite" restart="never" nodeType="tmRoot">
+          <p:childTnLst>
+            <p:seq concurrent="1" nextAc="seek">
+              <p:cTn id="2" dur="indefinite" nodeType="mainSeq">
+                <p:childTnLst>
+                  <p:par>
+                    <p:cTn id="3" fill="hold">
+                      <p:stCondLst>
+                        <p:cond delay="indefinite"/>
+                      </p:stCondLst>
+                      <p:childTnLst>
+                        <p:par>
+                          <p:cTn id="4" fill="hold">
+                            <p:stCondLst>
+                              <p:cond delay="0"/>
+                            </p:stCondLst>
+                            <p:childTnLst>
+                              <p:par>
+                                <p:cTn id="5" presetID="2" presetClass="entr" presetSubtype="4" fill="hold" nodeType="clickEffect">
+                                  <p:stCondLst>
+                                    <p:cond delay="0"/>
+                                  </p:stCondLst>
+                                  <p:childTnLst>
+                                    <p:set>
+                                      <p:cBhvr>
+                                        <p:cTn id="6" dur="1" fill="hold">
+                                          <p:stCondLst>
+                                            <p:cond delay="0"/>
+                                          </p:stCondLst>
+                                        </p:cTn>
+                                        <p:tgtEl>
+                                          <p:spTgt spid="6"/>
+                                        </p:tgtEl>
+                                        <p:attrNameLst>
+                                          <p:attrName>style.visibility</p:attrName>
+                                        </p:attrNameLst>
+                                      </p:cBhvr>
+                                      <p:to>
+                                        <p:strVal val="visible"/>
+                                      </p:to>
+                                    </p:set>
+                                    <p:anim calcmode="lin" valueType="num">
+                                      <p:cBhvr additive="base">
+                                        <p:cTn id="7" dur="500" fill="hold"/>
+                                        <p:tgtEl>
+                                          <p:spTgt spid="6"/>
+                                        </p:tgtEl>
+                                        <p:attrNameLst>
+                                          <p:attrName>ppt_x</p:attrName>
+                                        </p:attrNameLst>
+                                      </p:cBhvr>
+                                      <p:tavLst>
+                                        <p:tav tm="0">
+                                          <p:val>
+                                            <p:strVal val="#ppt_x"/>
+                                          </p:val>
+                                        </p:tav>
+                                        <p:tav tm="100000">
+                                          <p:val>
+                                            <p:strVal val="#ppt_x"/>
+                                          </p:val>
+                                        </p:tav>
+                                      </p:tavLst>
+                                    </p:anim>
+                                    <p:anim calcmode="lin" valueType="num">
+                                      <p:cBhvr additive="base">
+                                        <p:cTn id="8" dur="500" fill="hold"/>
+                                        <p:tgtEl>
+                                          <p:spTgt spid="6"/>
+                                        </p:tgtEl>
+                                        <p:attrNameLst>
+                                          <p:attrName>ppt_y</p:attrName>
+                                        </p:attrNameLst>
+                                      </p:cBhvr>
+                                      <p:tavLst>
+                                        <p:tav tm="0">
+                                          <p:val>
+                                            <p:strVal val="1+#ppt_h/2"/>
+                                          </p:val>
+                                        </p:tav>
+                                        <p:tav tm="100000">
+                                          <p:val>
+                                            <p:strVal val="#ppt_y"/>
+                                          </p:val>
+                                        </p:tav>
+                                      </p:tavLst>
+                                    </p:anim>
+                                  </p:childTnLst>
+                                </p:cTn>
+                              </p:par>
+                            </p:childTnLst>
+                          </p:cTn>
+                        </p:par>
+                      </p:childTnLst>
+                    </p:cTn>
+                  </p:par>
+                </p:childTnLst>
+              </p:cTn>
+              <p:prevCondLst>
+                <p:cond evt="onPrev" delay="0">
+                  <p:tgtEl>
+                    <p:sldTgt/>
+                  </p:tgtEl>
+                </p:cond>
+              </p:prevCondLst>
+              <p:nextCondLst>
+                <p:cond evt="onNext" delay="0">
+                  <p:tgtEl>
+                    <p:sldTgt/>
+                  </p:tgtEl>
+                </p:cond>
+              </p:nextCondLst>
+            </p:seq>
+          </p:childTnLst>
+        </p:cTn>
+      </p:par>
+    </p:tnLst>
+  </p:timing>
+</p:sld>
+</file>
+
+<file path=ppt/slides/slide15.xml><?xml version="1.0" encoding="utf-8"?>
+<p:sld xmlns:a="http://schemas.openxmlformats.org/drawingml/2006/main" xmlns:r="http://schemas.openxmlformats.org/officeDocument/2006/relationships" xmlns:p="http://schemas.openxmlformats.org/presentationml/2006/main">
+  <p:cSld>
+    <p:spTree>
+      <p:nvGrpSpPr>
+        <p:cNvPr id="1" name=""/>
+        <p:cNvGrpSpPr/>
+        <p:nvPr/>
+      </p:nvGrpSpPr>
+      <p:grpSpPr>
+        <a:xfrm>
+          <a:off x="0" y="0"/>
+          <a:ext cx="0" cy="0"/>
+          <a:chOff x="0" y="0"/>
+          <a:chExt cx="0" cy="0"/>
+        </a:xfrm>
+      </p:grpSpPr>
+      <p:sp>
+        <p:nvSpPr>
+          <p:cNvPr id="3" name="Sottotitolo 2">
+            <a:extLst>
+              <a:ext uri="{FF2B5EF4-FFF2-40B4-BE49-F238E27FC236}">
+                <a16:creationId xmlns:a16="http://schemas.microsoft.com/office/drawing/2014/main" id="{0EC3D98B-6209-4992-EBC1-F1519CFA9164}"/>
+              </a:ext>
+            </a:extLst>
+          </p:cNvPr>
+          <p:cNvSpPr>
+            <a:spLocks noGrp="1"/>
+          </p:cNvSpPr>
+          <p:nvPr>
+            <p:ph type="subTitle" idx="1"/>
+          </p:nvPr>
+        </p:nvSpPr>
+        <p:spPr>
+          <a:xfrm>
+            <a:off x="281829" y="1552522"/>
+            <a:ext cx="4045200" cy="2866778"/>
+          </a:xfrm>
+        </p:spPr>
+        <p:txBody>
+          <a:bodyPr/>
+          <a:lstStyle/>
+          <a:p>
+            <a:r>
+              <a:rPr lang="it-IT" dirty="0">
+                <a:solidFill>
+                  <a:srgbClr val="FF0000"/>
+                </a:solidFill>
+              </a:rPr>
+              <a:t>Schermata Cartella Clinica:</a:t>
+            </a:r>
+          </a:p>
+          <a:p>
+            <a:pPr>
+              <a:buFontTx/>
+              <a:buChar char="-"/>
+            </a:pPr>
+            <a:r>
+              <a:rPr lang="it-IT" dirty="0">
+                <a:solidFill>
+                  <a:schemeClr val="tx1"/>
+                </a:solidFill>
+              </a:rPr>
+              <a:t>Tasto per inserire nuovi dati</a:t>
+            </a:r>
+          </a:p>
+          <a:p>
+            <a:pPr>
+              <a:buFontTx/>
+              <a:buChar char="-"/>
+            </a:pPr>
+            <a:r>
+              <a:rPr lang="it-IT" dirty="0">
+                <a:solidFill>
+                  <a:schemeClr val="tx1"/>
+                </a:solidFill>
+              </a:rPr>
+              <a:t>Finestra di dialogo per inserimento e salvataggio</a:t>
+            </a:r>
+          </a:p>
+          <a:p>
+            <a:pPr>
+              <a:buFontTx/>
+              <a:buChar char="-"/>
+            </a:pPr>
+            <a:r>
+              <a:rPr lang="it-IT" dirty="0">
+                <a:solidFill>
+                  <a:schemeClr val="tx1"/>
+                </a:solidFill>
+              </a:rPr>
+              <a:t>Lista dove vengono visualizzati i dati </a:t>
+            </a:r>
+          </a:p>
+          <a:p>
+            <a:pPr>
+              <a:buFontTx/>
+              <a:buChar char="-"/>
+            </a:pPr>
+            <a:r>
+              <a:rPr lang="it-IT" dirty="0">
+                <a:solidFill>
+                  <a:schemeClr val="tx1"/>
+                </a:solidFill>
+              </a:rPr>
+              <a:t>Possibilità di eliminare singola voce</a:t>
+            </a:r>
+          </a:p>
+        </p:txBody>
+      </p:sp>
+      <p:pic>
+        <p:nvPicPr>
+          <p:cNvPr id="8" name="Immagine 7" descr="Immagine che contiene testo, schermata, numero, Carattere&#10;&#10;Il contenuto generato dall'IA potrebbe non essere corretto.">
+            <a:extLst>
+              <a:ext uri="{FF2B5EF4-FFF2-40B4-BE49-F238E27FC236}">
+                <a16:creationId xmlns:a16="http://schemas.microsoft.com/office/drawing/2014/main" id="{8F2F0E1C-DCAC-E145-8798-37789B6A543A}"/>
+              </a:ext>
+            </a:extLst>
+          </p:cNvPr>
+          <p:cNvPicPr>
+            <a:picLocks noChangeAspect="1"/>
+          </p:cNvPicPr>
+          <p:nvPr/>
+        </p:nvPicPr>
+        <p:blipFill>
+          <a:blip r:embed="rId2"/>
+          <a:stretch>
+            <a:fillRect/>
+          </a:stretch>
+        </p:blipFill>
+        <p:spPr>
+          <a:xfrm>
+            <a:off x="4940268" y="885075"/>
+            <a:ext cx="1852417" cy="3373349"/>
+          </a:xfrm>
+          <a:prstGeom prst="rect">
+            <a:avLst/>
+          </a:prstGeom>
+        </p:spPr>
+      </p:pic>
+      <p:pic>
+        <p:nvPicPr>
+          <p:cNvPr id="10" name="Immagine 9" descr="Immagine che contiene schermata, testo, Carattere, design&#10;&#10;Il contenuto generato dall'IA potrebbe non essere corretto.">
+            <a:extLst>
+              <a:ext uri="{FF2B5EF4-FFF2-40B4-BE49-F238E27FC236}">
+                <a16:creationId xmlns:a16="http://schemas.microsoft.com/office/drawing/2014/main" id="{1AA41953-505A-73C6-6E1E-B7BE4EEC3C4C}"/>
+              </a:ext>
+            </a:extLst>
+          </p:cNvPr>
+          <p:cNvPicPr>
+            <a:picLocks noChangeAspect="1"/>
+          </p:cNvPicPr>
+          <p:nvPr/>
+        </p:nvPicPr>
+        <p:blipFill>
+          <a:blip r:embed="rId3"/>
+          <a:stretch>
+            <a:fillRect/>
+          </a:stretch>
+        </p:blipFill>
+        <p:spPr>
+          <a:xfrm>
+            <a:off x="7007876" y="2077814"/>
+            <a:ext cx="1854295" cy="908097"/>
+          </a:xfrm>
+          <a:prstGeom prst="rect">
+            <a:avLst/>
+          </a:prstGeom>
+        </p:spPr>
+      </p:pic>
+    </p:spTree>
+    <p:extLst>
+      <p:ext uri="{BB962C8B-B14F-4D97-AF65-F5344CB8AC3E}">
+        <p14:creationId xmlns:p14="http://schemas.microsoft.com/office/powerpoint/2010/main" val="4229863482"/>
+      </p:ext>
+    </p:extLst>
+  </p:cSld>
+  <p:clrMapOvr>
+    <a:masterClrMapping/>
+  </p:clrMapOvr>
+  <p:timing>
+    <p:tnLst>
+      <p:par>
+        <p:cTn id="1" dur="indefinite" restart="never" nodeType="tmRoot">
+          <p:childTnLst>
+            <p:seq concurrent="1" nextAc="seek">
+              <p:cTn id="2" dur="indefinite" nodeType="mainSeq">
+                <p:childTnLst>
+                  <p:par>
+                    <p:cTn id="3" fill="hold">
+                      <p:stCondLst>
+                        <p:cond delay="indefinite"/>
+                      </p:stCondLst>
+                      <p:childTnLst>
+                        <p:par>
+                          <p:cTn id="4" fill="hold">
+                            <p:stCondLst>
+                              <p:cond delay="0"/>
+                            </p:stCondLst>
+                            <p:childTnLst>
+                              <p:par>
+                                <p:cTn id="5" presetID="2" presetClass="entr" presetSubtype="4" fill="hold" nodeType="clickEffect">
+                                  <p:stCondLst>
+                                    <p:cond delay="0"/>
+                                  </p:stCondLst>
+                                  <p:childTnLst>
+                                    <p:set>
+                                      <p:cBhvr>
+                                        <p:cTn id="6" dur="1" fill="hold">
+                                          <p:stCondLst>
+                                            <p:cond delay="0"/>
+                                          </p:stCondLst>
+                                        </p:cTn>
+                                        <p:tgtEl>
+                                          <p:spTgt spid="8"/>
+                                        </p:tgtEl>
+                                        <p:attrNameLst>
+                                          <p:attrName>style.visibility</p:attrName>
+                                        </p:attrNameLst>
+                                      </p:cBhvr>
+                                      <p:to>
+                                        <p:strVal val="visible"/>
+                                      </p:to>
+                                    </p:set>
+                                    <p:anim calcmode="lin" valueType="num">
+                                      <p:cBhvr additive="base">
+                                        <p:cTn id="7" dur="500" fill="hold"/>
+                                        <p:tgtEl>
+                                          <p:spTgt spid="8"/>
+                                        </p:tgtEl>
+                                        <p:attrNameLst>
+                                          <p:attrName>ppt_x</p:attrName>
+                                        </p:attrNameLst>
+                                      </p:cBhvr>
+                                      <p:tavLst>
+                                        <p:tav tm="0">
+                                          <p:val>
+                                            <p:strVal val="#ppt_x"/>
+                                          </p:val>
+                                        </p:tav>
+                                        <p:tav tm="100000">
+                                          <p:val>
+                                            <p:strVal val="#ppt_x"/>
+                                          </p:val>
+                                        </p:tav>
+                                      </p:tavLst>
+                                    </p:anim>
+                                    <p:anim calcmode="lin" valueType="num">
+                                      <p:cBhvr additive="base">
+                                        <p:cTn id="8" dur="500" fill="hold"/>
+                                        <p:tgtEl>
+                                          <p:spTgt spid="8"/>
+                                        </p:tgtEl>
+                                        <p:attrNameLst>
+                                          <p:attrName>ppt_y</p:attrName>
+                                        </p:attrNameLst>
+                                      </p:cBhvr>
+                                      <p:tavLst>
+                                        <p:tav tm="0">
+                                          <p:val>
+                                            <p:strVal val="1+#ppt_h/2"/>
+                                          </p:val>
+                                        </p:tav>
+                                        <p:tav tm="100000">
+                                          <p:val>
+                                            <p:strVal val="#ppt_y"/>
+                                          </p:val>
+                                        </p:tav>
+                                      </p:tavLst>
+                                    </p:anim>
+                                  </p:childTnLst>
+                                </p:cTn>
+                              </p:par>
+                              <p:par>
+                                <p:cTn id="9" presetID="2" presetClass="entr" presetSubtype="4" fill="hold" nodeType="withEffect">
+                                  <p:stCondLst>
+                                    <p:cond delay="0"/>
+                                  </p:stCondLst>
+                                  <p:childTnLst>
+                                    <p:set>
+                                      <p:cBhvr>
+                                        <p:cTn id="10" dur="1" fill="hold">
+                                          <p:stCondLst>
+                                            <p:cond delay="0"/>
+                                          </p:stCondLst>
+                                        </p:cTn>
+                                        <p:tgtEl>
+                                          <p:spTgt spid="10"/>
+                                        </p:tgtEl>
+                                        <p:attrNameLst>
+                                          <p:attrName>style.visibility</p:attrName>
+                                        </p:attrNameLst>
+                                      </p:cBhvr>
+                                      <p:to>
+                                        <p:strVal val="visible"/>
+                                      </p:to>
+                                    </p:set>
+                                    <p:anim calcmode="lin" valueType="num">
+                                      <p:cBhvr additive="base">
+                                        <p:cTn id="11" dur="500" fill="hold"/>
+                                        <p:tgtEl>
+                                          <p:spTgt spid="10"/>
+                                        </p:tgtEl>
+                                        <p:attrNameLst>
+                                          <p:attrName>ppt_x</p:attrName>
+                                        </p:attrNameLst>
+                                      </p:cBhvr>
+                                      <p:tavLst>
+                                        <p:tav tm="0">
+                                          <p:val>
+                                            <p:strVal val="#ppt_x"/>
+                                          </p:val>
+                                        </p:tav>
+                                        <p:tav tm="100000">
+                                          <p:val>
+                                            <p:strVal val="#ppt_x"/>
+                                          </p:val>
+                                        </p:tav>
+                                      </p:tavLst>
+                                    </p:anim>
+                                    <p:anim calcmode="lin" valueType="num">
+                                      <p:cBhvr additive="base">
+                                        <p:cTn id="12" dur="500" fill="hold"/>
+                                        <p:tgtEl>
+                                          <p:spTgt spid="10"/>
+                                        </p:tgtEl>
+                                        <p:attrNameLst>
+                                          <p:attrName>ppt_y</p:attrName>
+                                        </p:attrNameLst>
+                                      </p:cBhvr>
+                                      <p:tavLst>
+                                        <p:tav tm="0">
+                                          <p:val>
+                                            <p:strVal val="1+#ppt_h/2"/>
+                                          </p:val>
+                                        </p:tav>
+                                        <p:tav tm="100000">
+                                          <p:val>
+                                            <p:strVal val="#ppt_y"/>
+                                          </p:val>
+                                        </p:tav>
+                                      </p:tavLst>
+                                    </p:anim>
+                                  </p:childTnLst>
+                                </p:cTn>
+                              </p:par>
+                            </p:childTnLst>
+                          </p:cTn>
+                        </p:par>
+                      </p:childTnLst>
+                    </p:cTn>
+                  </p:par>
+                </p:childTnLst>
+              </p:cTn>
+              <p:prevCondLst>
+                <p:cond evt="onPrev" delay="0">
+                  <p:tgtEl>
+                    <p:sldTgt/>
+                  </p:tgtEl>
+                </p:cond>
+              </p:prevCondLst>
+              <p:nextCondLst>
+                <p:cond evt="onNext" delay="0">
+                  <p:tgtEl>
+                    <p:sldTgt/>
+                  </p:tgtEl>
+                </p:cond>
+              </p:nextCondLst>
+            </p:seq>
+          </p:childTnLst>
+        </p:cTn>
+      </p:par>
+    </p:tnLst>
+  </p:timing>
+</p:sld>
+</file>
+
+<file path=ppt/slides/slide16.xml><?xml version="1.0" encoding="utf-8"?>
+<p:sld xmlns:a="http://schemas.openxmlformats.org/drawingml/2006/main" xmlns:r="http://schemas.openxmlformats.org/officeDocument/2006/relationships" xmlns:p="http://schemas.openxmlformats.org/presentationml/2006/main">
+  <p:cSld>
+    <p:spTree>
+      <p:nvGrpSpPr>
+        <p:cNvPr id="1" name=""/>
+        <p:cNvGrpSpPr/>
+        <p:nvPr/>
+      </p:nvGrpSpPr>
+      <p:grpSpPr>
+        <a:xfrm>
+          <a:off x="0" y="0"/>
+          <a:ext cx="0" cy="0"/>
+          <a:chOff x="0" y="0"/>
+          <a:chExt cx="0" cy="0"/>
+        </a:xfrm>
+      </p:grpSpPr>
+      <p:sp>
+        <p:nvSpPr>
+          <p:cNvPr id="3" name="Sottotitolo 2">
+            <a:extLst>
+              <a:ext uri="{FF2B5EF4-FFF2-40B4-BE49-F238E27FC236}">
+                <a16:creationId xmlns:a16="http://schemas.microsoft.com/office/drawing/2014/main" id="{B683FB08-460E-B52F-C940-FFEC72A827ED}"/>
+              </a:ext>
+            </a:extLst>
+          </p:cNvPr>
+          <p:cNvSpPr>
+            <a:spLocks noGrp="1"/>
+          </p:cNvSpPr>
+          <p:nvPr>
+            <p:ph type="subTitle" idx="1"/>
+          </p:nvPr>
+        </p:nvSpPr>
+        <p:spPr>
+          <a:xfrm>
+            <a:off x="224678" y="1226249"/>
+            <a:ext cx="4045200" cy="3043671"/>
+          </a:xfrm>
+        </p:spPr>
+        <p:txBody>
+          <a:bodyPr/>
+          <a:lstStyle/>
+          <a:p>
+            <a:r>
+              <a:rPr lang="it-IT" dirty="0">
+                <a:solidFill>
+                  <a:srgbClr val="FF0000"/>
+                </a:solidFill>
+              </a:rPr>
+              <a:t>Calendario:</a:t>
+            </a:r>
+          </a:p>
+          <a:p>
+            <a:r>
+              <a:rPr lang="it-IT" dirty="0"/>
+              <a:t>-Selezione di un giorno con apertura </a:t>
+            </a:r>
+            <a:r>
+              <a:rPr lang="it-IT" dirty="0" err="1"/>
+              <a:t>dialog</a:t>
+            </a:r>
+            <a:r>
+              <a:rPr lang="it-IT" dirty="0"/>
+              <a:t> per aggiungere evento</a:t>
+            </a:r>
+          </a:p>
+          <a:p>
+            <a:r>
+              <a:rPr lang="it-IT" dirty="0"/>
+              <a:t>-Con la pressione prolungata del giorno visualizza lista eventi con icona per rimozione</a:t>
+            </a:r>
+          </a:p>
+        </p:txBody>
+      </p:sp>
+      <p:pic>
+        <p:nvPicPr>
+          <p:cNvPr id="6" name="Immagine 5" descr="Immagine che contiene testo, schermata, Sistema operativo, software&#10;&#10;Il contenuto generato dall'IA potrebbe non essere corretto.">
+            <a:extLst>
+              <a:ext uri="{FF2B5EF4-FFF2-40B4-BE49-F238E27FC236}">
+                <a16:creationId xmlns:a16="http://schemas.microsoft.com/office/drawing/2014/main" id="{C967C7ED-0BFC-3B58-BFD8-8A8700C10812}"/>
+              </a:ext>
+            </a:extLst>
+          </p:cNvPr>
+          <p:cNvPicPr>
+            <a:picLocks noChangeAspect="1"/>
+          </p:cNvPicPr>
+          <p:nvPr/>
+        </p:nvPicPr>
+        <p:blipFill>
+          <a:blip r:embed="rId2"/>
+          <a:stretch>
+            <a:fillRect/>
+          </a:stretch>
+        </p:blipFill>
+        <p:spPr>
+          <a:xfrm>
+            <a:off x="4777410" y="494095"/>
+            <a:ext cx="1868320" cy="4155310"/>
+          </a:xfrm>
+          <a:prstGeom prst="rect">
+            <a:avLst/>
+          </a:prstGeom>
+        </p:spPr>
+      </p:pic>
+      <p:pic>
+        <p:nvPicPr>
+          <p:cNvPr id="8" name="Immagine 7" descr="Immagine che contiene testo, schermata, Carattere, logo&#10;&#10;Il contenuto generato dall'IA potrebbe non essere corretto.">
+            <a:extLst>
+              <a:ext uri="{FF2B5EF4-FFF2-40B4-BE49-F238E27FC236}">
+                <a16:creationId xmlns:a16="http://schemas.microsoft.com/office/drawing/2014/main" id="{2AED0D5E-9647-D25D-ABC8-3D4767F4CF81}"/>
+              </a:ext>
+            </a:extLst>
+          </p:cNvPr>
+          <p:cNvPicPr>
+            <a:picLocks noChangeAspect="1"/>
+          </p:cNvPicPr>
+          <p:nvPr/>
+        </p:nvPicPr>
+        <p:blipFill>
+          <a:blip r:embed="rId3"/>
+          <a:stretch>
+            <a:fillRect/>
+          </a:stretch>
+        </p:blipFill>
+        <p:spPr>
+          <a:xfrm>
+            <a:off x="6844585" y="1104825"/>
+            <a:ext cx="1968601" cy="1466925"/>
+          </a:xfrm>
+          <a:prstGeom prst="rect">
+            <a:avLst/>
+          </a:prstGeom>
+        </p:spPr>
+      </p:pic>
+      <p:pic>
+        <p:nvPicPr>
+          <p:cNvPr id="10" name="Immagine 9" descr="Immagine che contiene testo, schermata, Carattere, numero&#10;&#10;Il contenuto generato dall'IA potrebbe non essere corretto.">
+            <a:extLst>
+              <a:ext uri="{FF2B5EF4-FFF2-40B4-BE49-F238E27FC236}">
+                <a16:creationId xmlns:a16="http://schemas.microsoft.com/office/drawing/2014/main" id="{C86F3A8D-F5A4-EAD1-6C8E-C212F348B169}"/>
+              </a:ext>
+            </a:extLst>
+          </p:cNvPr>
+          <p:cNvPicPr>
+            <a:picLocks noChangeAspect="1"/>
+          </p:cNvPicPr>
+          <p:nvPr/>
+        </p:nvPicPr>
+        <p:blipFill>
+          <a:blip r:embed="rId4"/>
+          <a:stretch>
+            <a:fillRect/>
+          </a:stretch>
+        </p:blipFill>
+        <p:spPr>
+          <a:xfrm>
+            <a:off x="6844585" y="2861089"/>
+            <a:ext cx="1968601" cy="1511378"/>
+          </a:xfrm>
+          <a:prstGeom prst="rect">
+            <a:avLst/>
+          </a:prstGeom>
+        </p:spPr>
+      </p:pic>
+    </p:spTree>
+    <p:extLst>
+      <p:ext uri="{BB962C8B-B14F-4D97-AF65-F5344CB8AC3E}">
+        <p14:creationId xmlns:p14="http://schemas.microsoft.com/office/powerpoint/2010/main" val="3607548329"/>
+      </p:ext>
+    </p:extLst>
+  </p:cSld>
+  <p:clrMapOvr>
+    <a:masterClrMapping/>
+  </p:clrMapOvr>
+  <p:timing>
+    <p:tnLst>
+      <p:par>
+        <p:cTn id="1" dur="indefinite" restart="never" nodeType="tmRoot">
+          <p:childTnLst>
+            <p:seq concurrent="1" nextAc="seek">
+              <p:cTn id="2" dur="indefinite" nodeType="mainSeq">
+                <p:childTnLst>
+                  <p:par>
+                    <p:cTn id="3" fill="hold">
+                      <p:stCondLst>
+                        <p:cond delay="indefinite"/>
+                      </p:stCondLst>
+                      <p:childTnLst>
+                        <p:par>
+                          <p:cTn id="4" fill="hold">
+                            <p:stCondLst>
+                              <p:cond delay="0"/>
+                            </p:stCondLst>
+                            <p:childTnLst>
+                              <p:par>
+                                <p:cTn id="5" presetID="2" presetClass="entr" presetSubtype="4" fill="hold" nodeType="clickEffect">
+                                  <p:stCondLst>
+                                    <p:cond delay="0"/>
+                                  </p:stCondLst>
+                                  <p:childTnLst>
+                                    <p:set>
+                                      <p:cBhvr>
+                                        <p:cTn id="6" dur="1" fill="hold">
+                                          <p:stCondLst>
+                                            <p:cond delay="0"/>
+                                          </p:stCondLst>
+                                        </p:cTn>
+                                        <p:tgtEl>
+                                          <p:spTgt spid="6"/>
+                                        </p:tgtEl>
+                                        <p:attrNameLst>
+                                          <p:attrName>style.visibility</p:attrName>
+                                        </p:attrNameLst>
+                                      </p:cBhvr>
+                                      <p:to>
+                                        <p:strVal val="visible"/>
+                                      </p:to>
+                                    </p:set>
+                                    <p:anim calcmode="lin" valueType="num">
+                                      <p:cBhvr additive="base">
+                                        <p:cTn id="7" dur="500" fill="hold"/>
+                                        <p:tgtEl>
+                                          <p:spTgt spid="6"/>
+                                        </p:tgtEl>
+                                        <p:attrNameLst>
+                                          <p:attrName>ppt_x</p:attrName>
+                                        </p:attrNameLst>
+                                      </p:cBhvr>
+                                      <p:tavLst>
+                                        <p:tav tm="0">
+                                          <p:val>
+                                            <p:strVal val="#ppt_x"/>
+                                          </p:val>
+                                        </p:tav>
+                                        <p:tav tm="100000">
+                                          <p:val>
+                                            <p:strVal val="#ppt_x"/>
+                                          </p:val>
+                                        </p:tav>
+                                      </p:tavLst>
+                                    </p:anim>
+                                    <p:anim calcmode="lin" valueType="num">
+                                      <p:cBhvr additive="base">
+                                        <p:cTn id="8" dur="500" fill="hold"/>
+                                        <p:tgtEl>
+                                          <p:spTgt spid="6"/>
+                                        </p:tgtEl>
+                                        <p:attrNameLst>
+                                          <p:attrName>ppt_y</p:attrName>
+                                        </p:attrNameLst>
+                                      </p:cBhvr>
+                                      <p:tavLst>
+                                        <p:tav tm="0">
+                                          <p:val>
+                                            <p:strVal val="1+#ppt_h/2"/>
+                                          </p:val>
+                                        </p:tav>
+                                        <p:tav tm="100000">
+                                          <p:val>
+                                            <p:strVal val="#ppt_y"/>
+                                          </p:val>
+                                        </p:tav>
+                                      </p:tavLst>
+                                    </p:anim>
+                                  </p:childTnLst>
+                                </p:cTn>
+                              </p:par>
+                              <p:par>
+                                <p:cTn id="9" presetID="2" presetClass="entr" presetSubtype="4" fill="hold" nodeType="withEffect">
+                                  <p:stCondLst>
+                                    <p:cond delay="0"/>
+                                  </p:stCondLst>
+                                  <p:childTnLst>
+                                    <p:set>
+                                      <p:cBhvr>
+                                        <p:cTn id="10" dur="1" fill="hold">
+                                          <p:stCondLst>
+                                            <p:cond delay="0"/>
+                                          </p:stCondLst>
+                                        </p:cTn>
+                                        <p:tgtEl>
+                                          <p:spTgt spid="8"/>
+                                        </p:tgtEl>
+                                        <p:attrNameLst>
+                                          <p:attrName>style.visibility</p:attrName>
+                                        </p:attrNameLst>
+                                      </p:cBhvr>
+                                      <p:to>
+                                        <p:strVal val="visible"/>
+                                      </p:to>
+                                    </p:set>
+                                    <p:anim calcmode="lin" valueType="num">
+                                      <p:cBhvr additive="base">
+                                        <p:cTn id="11" dur="500" fill="hold"/>
+                                        <p:tgtEl>
+                                          <p:spTgt spid="8"/>
+                                        </p:tgtEl>
+                                        <p:attrNameLst>
+                                          <p:attrName>ppt_x</p:attrName>
+                                        </p:attrNameLst>
+                                      </p:cBhvr>
+                                      <p:tavLst>
+                                        <p:tav tm="0">
+                                          <p:val>
+                                            <p:strVal val="#ppt_x"/>
+                                          </p:val>
+                                        </p:tav>
+                                        <p:tav tm="100000">
+                                          <p:val>
+                                            <p:strVal val="#ppt_x"/>
+                                          </p:val>
+                                        </p:tav>
+                                      </p:tavLst>
+                                    </p:anim>
+                                    <p:anim calcmode="lin" valueType="num">
+                                      <p:cBhvr additive="base">
+                                        <p:cTn id="12" dur="500" fill="hold"/>
+                                        <p:tgtEl>
+                                          <p:spTgt spid="8"/>
+                                        </p:tgtEl>
+                                        <p:attrNameLst>
+                                          <p:attrName>ppt_y</p:attrName>
+                                        </p:attrNameLst>
+                                      </p:cBhvr>
+                                      <p:tavLst>
+                                        <p:tav tm="0">
+                                          <p:val>
+                                            <p:strVal val="1+#ppt_h/2"/>
+                                          </p:val>
+                                        </p:tav>
+                                        <p:tav tm="100000">
+                                          <p:val>
+                                            <p:strVal val="#ppt_y"/>
+                                          </p:val>
+                                        </p:tav>
+                                      </p:tavLst>
+                                    </p:anim>
+                                  </p:childTnLst>
+                                </p:cTn>
+                              </p:par>
+                              <p:par>
+                                <p:cTn id="13" presetID="2" presetClass="entr" presetSubtype="4" fill="hold" nodeType="withEffect">
+                                  <p:stCondLst>
+                                    <p:cond delay="0"/>
+                                  </p:stCondLst>
+                                  <p:childTnLst>
+                                    <p:set>
+                                      <p:cBhvr>
+                                        <p:cTn id="14" dur="1" fill="hold">
+                                          <p:stCondLst>
+                                            <p:cond delay="0"/>
+                                          </p:stCondLst>
+                                        </p:cTn>
+                                        <p:tgtEl>
+                                          <p:spTgt spid="10"/>
+                                        </p:tgtEl>
+                                        <p:attrNameLst>
+                                          <p:attrName>style.visibility</p:attrName>
+                                        </p:attrNameLst>
+                                      </p:cBhvr>
+                                      <p:to>
+                                        <p:strVal val="visible"/>
+                                      </p:to>
+                                    </p:set>
+                                    <p:anim calcmode="lin" valueType="num">
+                                      <p:cBhvr additive="base">
+                                        <p:cTn id="15" dur="500" fill="hold"/>
+                                        <p:tgtEl>
+                                          <p:spTgt spid="10"/>
+                                        </p:tgtEl>
+                                        <p:attrNameLst>
+                                          <p:attrName>ppt_x</p:attrName>
+                                        </p:attrNameLst>
+                                      </p:cBhvr>
+                                      <p:tavLst>
+                                        <p:tav tm="0">
+                                          <p:val>
+                                            <p:strVal val="#ppt_x"/>
+                                          </p:val>
+                                        </p:tav>
+                                        <p:tav tm="100000">
+                                          <p:val>
+                                            <p:strVal val="#ppt_x"/>
+                                          </p:val>
+                                        </p:tav>
+                                      </p:tavLst>
+                                    </p:anim>
+                                    <p:anim calcmode="lin" valueType="num">
+                                      <p:cBhvr additive="base">
+                                        <p:cTn id="16" dur="500" fill="hold"/>
+                                        <p:tgtEl>
+                                          <p:spTgt spid="10"/>
+                                        </p:tgtEl>
+                                        <p:attrNameLst>
+                                          <p:attrName>ppt_y</p:attrName>
+                                        </p:attrNameLst>
+                                      </p:cBhvr>
+                                      <p:tavLst>
+                                        <p:tav tm="0">
+                                          <p:val>
+                                            <p:strVal val="1+#ppt_h/2"/>
+                                          </p:val>
+                                        </p:tav>
+                                        <p:tav tm="100000">
+                                          <p:val>
+                                            <p:strVal val="#ppt_y"/>
+                                          </p:val>
+                                        </p:tav>
+                                      </p:tavLst>
+                                    </p:anim>
+                                  </p:childTnLst>
+                                </p:cTn>
+                              </p:par>
+                            </p:childTnLst>
+                          </p:cTn>
+                        </p:par>
+                      </p:childTnLst>
+                    </p:cTn>
+                  </p:par>
+                </p:childTnLst>
+              </p:cTn>
+              <p:prevCondLst>
+                <p:cond evt="onPrev" delay="0">
+                  <p:tgtEl>
+                    <p:sldTgt/>
+                  </p:tgtEl>
+                </p:cond>
+              </p:prevCondLst>
+              <p:nextCondLst>
+                <p:cond evt="onNext" delay="0">
+                  <p:tgtEl>
+                    <p:sldTgt/>
+                  </p:tgtEl>
+                </p:cond>
+              </p:nextCondLst>
+            </p:seq>
+          </p:childTnLst>
+        </p:cTn>
+      </p:par>
+    </p:tnLst>
+  </p:timing>
+</p:sld>
+</file>
+
+<file path=ppt/slides/slide17.xml><?xml version="1.0" encoding="utf-8"?>
+<p:sld xmlns:a="http://schemas.openxmlformats.org/drawingml/2006/main" xmlns:r="http://schemas.openxmlformats.org/officeDocument/2006/relationships" xmlns:p="http://schemas.openxmlformats.org/presentationml/2006/main">
+  <p:cSld>
+    <p:spTree>
+      <p:nvGrpSpPr>
+        <p:cNvPr id="1" name=""/>
+        <p:cNvGrpSpPr/>
+        <p:nvPr/>
+      </p:nvGrpSpPr>
+      <p:grpSpPr>
+        <a:xfrm>
+          <a:off x="0" y="0"/>
+          <a:ext cx="0" cy="0"/>
+          <a:chOff x="0" y="0"/>
+          <a:chExt cx="0" cy="0"/>
+        </a:xfrm>
+      </p:grpSpPr>
+      <p:sp>
+        <p:nvSpPr>
+          <p:cNvPr id="3" name="Sottotitolo 2">
+            <a:extLst>
+              <a:ext uri="{FF2B5EF4-FFF2-40B4-BE49-F238E27FC236}">
+                <a16:creationId xmlns:a16="http://schemas.microsoft.com/office/drawing/2014/main" id="{68F8C9A6-B4FB-88FB-F809-3F6F07162461}"/>
+              </a:ext>
+            </a:extLst>
+          </p:cNvPr>
+          <p:cNvSpPr>
+            <a:spLocks noGrp="1"/>
+          </p:cNvSpPr>
+          <p:nvPr>
+            <p:ph type="subTitle" idx="1"/>
+          </p:nvPr>
+        </p:nvSpPr>
+        <p:spPr>
+          <a:xfrm>
+            <a:off x="208350" y="1821289"/>
+            <a:ext cx="4045200" cy="1500921"/>
+          </a:xfrm>
+        </p:spPr>
+        <p:txBody>
+          <a:bodyPr/>
+          <a:lstStyle/>
+          <a:p>
+            <a:r>
+              <a:rPr lang="it-IT" dirty="0">
+                <a:solidFill>
+                  <a:srgbClr val="FF0000"/>
+                </a:solidFill>
+              </a:rPr>
+              <a:t>Registrazione Animale:</a:t>
+            </a:r>
+          </a:p>
+          <a:p>
+            <a:r>
+              <a:rPr lang="it-IT" dirty="0"/>
+              <a:t>-Campi Nome, Altezza, Peso, Sesso, Descrizione</a:t>
+            </a:r>
+          </a:p>
+        </p:txBody>
+      </p:sp>
+      <p:pic>
+        <p:nvPicPr>
+          <p:cNvPr id="6" name="Immagine 5" descr="Immagine che contiene testo, schermata, design&#10;&#10;Il contenuto generato dall'IA potrebbe non essere corretto.">
+            <a:extLst>
+              <a:ext uri="{FF2B5EF4-FFF2-40B4-BE49-F238E27FC236}">
+                <a16:creationId xmlns:a16="http://schemas.microsoft.com/office/drawing/2014/main" id="{CC92AFB8-57C0-38BB-AFBD-B840D38957CE}"/>
+              </a:ext>
+            </a:extLst>
+          </p:cNvPr>
+          <p:cNvPicPr>
+            <a:picLocks noChangeAspect="1"/>
+          </p:cNvPicPr>
+          <p:nvPr/>
+        </p:nvPicPr>
+        <p:blipFill>
+          <a:blip r:embed="rId2"/>
+          <a:stretch>
+            <a:fillRect/>
+          </a:stretch>
+        </p:blipFill>
+        <p:spPr>
+          <a:xfrm>
+            <a:off x="5774361" y="310858"/>
+            <a:ext cx="2000130" cy="4521784"/>
+          </a:xfrm>
+          <a:prstGeom prst="rect">
+            <a:avLst/>
+          </a:prstGeom>
+        </p:spPr>
+      </p:pic>
+    </p:spTree>
+    <p:extLst>
+      <p:ext uri="{BB962C8B-B14F-4D97-AF65-F5344CB8AC3E}">
+        <p14:creationId xmlns:p14="http://schemas.microsoft.com/office/powerpoint/2010/main" val="2245002081"/>
+      </p:ext>
+    </p:extLst>
+  </p:cSld>
+  <p:clrMapOvr>
+    <a:masterClrMapping/>
+  </p:clrMapOvr>
+  <p:timing>
+    <p:tnLst>
+      <p:par>
+        <p:cTn id="1" dur="indefinite" restart="never" nodeType="tmRoot">
+          <p:childTnLst>
+            <p:seq concurrent="1" nextAc="seek">
+              <p:cTn id="2" dur="indefinite" nodeType="mainSeq">
+                <p:childTnLst>
+                  <p:par>
+                    <p:cTn id="3" fill="hold">
+                      <p:stCondLst>
+                        <p:cond delay="indefinite"/>
+                      </p:stCondLst>
+                      <p:childTnLst>
+                        <p:par>
+                          <p:cTn id="4" fill="hold">
+                            <p:stCondLst>
+                              <p:cond delay="0"/>
+                            </p:stCondLst>
+                            <p:childTnLst>
+                              <p:par>
+                                <p:cTn id="5" presetID="2" presetClass="entr" presetSubtype="4" fill="hold" nodeType="clickEffect">
+                                  <p:stCondLst>
+                                    <p:cond delay="0"/>
+                                  </p:stCondLst>
+                                  <p:childTnLst>
+                                    <p:set>
+                                      <p:cBhvr>
+                                        <p:cTn id="6" dur="1" fill="hold">
+                                          <p:stCondLst>
+                                            <p:cond delay="0"/>
+                                          </p:stCondLst>
+                                        </p:cTn>
+                                        <p:tgtEl>
+                                          <p:spTgt spid="6"/>
+                                        </p:tgtEl>
+                                        <p:attrNameLst>
+                                          <p:attrName>style.visibility</p:attrName>
+                                        </p:attrNameLst>
+                                      </p:cBhvr>
+                                      <p:to>
+                                        <p:strVal val="visible"/>
+                                      </p:to>
+                                    </p:set>
+                                    <p:anim calcmode="lin" valueType="num">
+                                      <p:cBhvr additive="base">
+                                        <p:cTn id="7" dur="500" fill="hold"/>
+                                        <p:tgtEl>
+                                          <p:spTgt spid="6"/>
+                                        </p:tgtEl>
+                                        <p:attrNameLst>
+                                          <p:attrName>ppt_x</p:attrName>
+                                        </p:attrNameLst>
+                                      </p:cBhvr>
+                                      <p:tavLst>
+                                        <p:tav tm="0">
+                                          <p:val>
+                                            <p:strVal val="#ppt_x"/>
+                                          </p:val>
+                                        </p:tav>
+                                        <p:tav tm="100000">
+                                          <p:val>
+                                            <p:strVal val="#ppt_x"/>
+                                          </p:val>
+                                        </p:tav>
+                                      </p:tavLst>
+                                    </p:anim>
+                                    <p:anim calcmode="lin" valueType="num">
+                                      <p:cBhvr additive="base">
+                                        <p:cTn id="8" dur="500" fill="hold"/>
+                                        <p:tgtEl>
+                                          <p:spTgt spid="6"/>
+                                        </p:tgtEl>
+                                        <p:attrNameLst>
+                                          <p:attrName>ppt_y</p:attrName>
+                                        </p:attrNameLst>
+                                      </p:cBhvr>
+                                      <p:tavLst>
+                                        <p:tav tm="0">
+                                          <p:val>
+                                            <p:strVal val="1+#ppt_h/2"/>
+                                          </p:val>
+                                        </p:tav>
+                                        <p:tav tm="100000">
+                                          <p:val>
+                                            <p:strVal val="#ppt_y"/>
+                                          </p:val>
+                                        </p:tav>
+                                      </p:tavLst>
+                                    </p:anim>
+                                  </p:childTnLst>
+                                </p:cTn>
+                              </p:par>
+                            </p:childTnLst>
+                          </p:cTn>
+                        </p:par>
+                      </p:childTnLst>
+                    </p:cTn>
+                  </p:par>
+                </p:childTnLst>
+              </p:cTn>
+              <p:prevCondLst>
+                <p:cond evt="onPrev" delay="0">
+                  <p:tgtEl>
+                    <p:sldTgt/>
+                  </p:tgtEl>
+                </p:cond>
+              </p:prevCondLst>
+              <p:nextCondLst>
+                <p:cond evt="onNext" delay="0">
+                  <p:tgtEl>
+                    <p:sldTgt/>
+                  </p:tgtEl>
+                </p:cond>
+              </p:nextCondLst>
+            </p:seq>
+          </p:childTnLst>
+        </p:cTn>
+      </p:par>
+    </p:tnLst>
+  </p:timing>
+</p:sld>
+</file>
+
+<file path=ppt/slides/slide18.xml><?xml version="1.0" encoding="utf-8"?>
+<p:sld xmlns:a="http://schemas.openxmlformats.org/drawingml/2006/main" xmlns:r="http://schemas.openxmlformats.org/officeDocument/2006/relationships" xmlns:p="http://schemas.openxmlformats.org/presentationml/2006/main">
+  <p:cSld>
+    <p:spTree>
+      <p:nvGrpSpPr>
+        <p:cNvPr id="1" name=""/>
+        <p:cNvGrpSpPr/>
+        <p:nvPr/>
+      </p:nvGrpSpPr>
+      <p:grpSpPr>
+        <a:xfrm>
+          <a:off x="0" y="0"/>
+          <a:ext cx="0" cy="0"/>
+          <a:chOff x="0" y="0"/>
+          <a:chExt cx="0" cy="0"/>
+        </a:xfrm>
+      </p:grpSpPr>
+      <p:sp>
+        <p:nvSpPr>
+          <p:cNvPr id="3" name="Sottotitolo 2">
+            <a:extLst>
+              <a:ext uri="{FF2B5EF4-FFF2-40B4-BE49-F238E27FC236}">
+                <a16:creationId xmlns:a16="http://schemas.microsoft.com/office/drawing/2014/main" id="{BB8EB369-F853-45C9-1940-5B5E18E528E2}"/>
+              </a:ext>
+            </a:extLst>
+          </p:cNvPr>
+          <p:cNvSpPr>
+            <a:spLocks noGrp="1"/>
+          </p:cNvSpPr>
+          <p:nvPr>
+            <p:ph type="subTitle" idx="1"/>
+          </p:nvPr>
+        </p:nvSpPr>
+        <p:spPr>
+          <a:xfrm>
+            <a:off x="281828" y="1805616"/>
+            <a:ext cx="4045200" cy="1345500"/>
+          </a:xfrm>
+        </p:spPr>
+        <p:txBody>
+          <a:bodyPr/>
+          <a:lstStyle/>
+          <a:p>
+            <a:r>
+              <a:rPr lang="it-IT" dirty="0">
+                <a:solidFill>
+                  <a:srgbClr val="FF0000"/>
+                </a:solidFill>
+              </a:rPr>
+              <a:t>Registrazione Utente:</a:t>
+            </a:r>
+          </a:p>
+          <a:p>
+            <a:r>
+              <a:rPr lang="it-IT" dirty="0"/>
+              <a:t>-Campi da compilare: Nome, Cognome, Telefono, Email, Indirizzo, Password</a:t>
+            </a:r>
+          </a:p>
+        </p:txBody>
+      </p:sp>
+      <p:pic>
+        <p:nvPicPr>
+          <p:cNvPr id="6" name="Immagine 5" descr="Immagine che contiene testo, schermata, design&#10;&#10;Il contenuto generato dall'IA potrebbe non essere corretto.">
+            <a:extLst>
+              <a:ext uri="{FF2B5EF4-FFF2-40B4-BE49-F238E27FC236}">
+                <a16:creationId xmlns:a16="http://schemas.microsoft.com/office/drawing/2014/main" id="{61CAAC37-8841-E27A-5D15-D68581937B8E}"/>
+              </a:ext>
+            </a:extLst>
+          </p:cNvPr>
+          <p:cNvPicPr>
+            <a:picLocks noChangeAspect="1"/>
+          </p:cNvPicPr>
+          <p:nvPr/>
+        </p:nvPicPr>
+        <p:blipFill>
+          <a:blip r:embed="rId2"/>
+          <a:stretch>
+            <a:fillRect/>
+          </a:stretch>
+        </p:blipFill>
+        <p:spPr>
+          <a:xfrm>
+            <a:off x="5848292" y="272014"/>
+            <a:ext cx="2013853" cy="4471436"/>
+          </a:xfrm>
+          <a:prstGeom prst="rect">
+            <a:avLst/>
+          </a:prstGeom>
+        </p:spPr>
+      </p:pic>
+    </p:spTree>
+    <p:extLst>
+      <p:ext uri="{BB962C8B-B14F-4D97-AF65-F5344CB8AC3E}">
+        <p14:creationId xmlns:p14="http://schemas.microsoft.com/office/powerpoint/2010/main" val="2757172698"/>
+      </p:ext>
+    </p:extLst>
+  </p:cSld>
+  <p:clrMapOvr>
+    <a:masterClrMapping/>
+  </p:clrMapOvr>
+  <p:timing>
+    <p:tnLst>
+      <p:par>
+        <p:cTn id="1" dur="indefinite" restart="never" nodeType="tmRoot">
+          <p:childTnLst>
+            <p:seq concurrent="1" nextAc="seek">
+              <p:cTn id="2" dur="indefinite" nodeType="mainSeq">
+                <p:childTnLst>
+                  <p:par>
+                    <p:cTn id="3" fill="hold">
+                      <p:stCondLst>
+                        <p:cond delay="indefinite"/>
+                      </p:stCondLst>
+                      <p:childTnLst>
+                        <p:par>
+                          <p:cTn id="4" fill="hold">
+                            <p:stCondLst>
+                              <p:cond delay="0"/>
+                            </p:stCondLst>
+                            <p:childTnLst>
+                              <p:par>
+                                <p:cTn id="5" presetID="2" presetClass="entr" presetSubtype="4" fill="hold" nodeType="clickEffect">
+                                  <p:stCondLst>
+                                    <p:cond delay="0"/>
+                                  </p:stCondLst>
+                                  <p:childTnLst>
+                                    <p:set>
+                                      <p:cBhvr>
+                                        <p:cTn id="6" dur="1" fill="hold">
+                                          <p:stCondLst>
+                                            <p:cond delay="0"/>
+                                          </p:stCondLst>
+                                        </p:cTn>
+                                        <p:tgtEl>
+                                          <p:spTgt spid="6"/>
+                                        </p:tgtEl>
+                                        <p:attrNameLst>
+                                          <p:attrName>style.visibility</p:attrName>
+                                        </p:attrNameLst>
+                                      </p:cBhvr>
+                                      <p:to>
+                                        <p:strVal val="visible"/>
+                                      </p:to>
+                                    </p:set>
+                                    <p:anim calcmode="lin" valueType="num">
+                                      <p:cBhvr additive="base">
+                                        <p:cTn id="7" dur="500" fill="hold"/>
+                                        <p:tgtEl>
+                                          <p:spTgt spid="6"/>
+                                        </p:tgtEl>
+                                        <p:attrNameLst>
+                                          <p:attrName>ppt_x</p:attrName>
+                                        </p:attrNameLst>
+                                      </p:cBhvr>
+                                      <p:tavLst>
+                                        <p:tav tm="0">
+                                          <p:val>
+                                            <p:strVal val="#ppt_x"/>
+                                          </p:val>
+                                        </p:tav>
+                                        <p:tav tm="100000">
+                                          <p:val>
+                                            <p:strVal val="#ppt_x"/>
+                                          </p:val>
+                                        </p:tav>
+                                      </p:tavLst>
+                                    </p:anim>
+                                    <p:anim calcmode="lin" valueType="num">
+                                      <p:cBhvr additive="base">
+                                        <p:cTn id="8" dur="500" fill="hold"/>
+                                        <p:tgtEl>
+                                          <p:spTgt spid="6"/>
+                                        </p:tgtEl>
+                                        <p:attrNameLst>
+                                          <p:attrName>ppt_y</p:attrName>
+                                        </p:attrNameLst>
+                                      </p:cBhvr>
+                                      <p:tavLst>
+                                        <p:tav tm="0">
+                                          <p:val>
+                                            <p:strVal val="1+#ppt_h/2"/>
+                                          </p:val>
+                                        </p:tav>
+                                        <p:tav tm="100000">
+                                          <p:val>
+                                            <p:strVal val="#ppt_y"/>
+                                          </p:val>
+                                        </p:tav>
+                                      </p:tavLst>
+                                    </p:anim>
+                                  </p:childTnLst>
+                                </p:cTn>
+                              </p:par>
+                            </p:childTnLst>
+                          </p:cTn>
+                        </p:par>
+                      </p:childTnLst>
+                    </p:cTn>
+                  </p:par>
+                </p:childTnLst>
+              </p:cTn>
+              <p:prevCondLst>
+                <p:cond evt="onPrev" delay="0">
+                  <p:tgtEl>
+                    <p:sldTgt/>
+                  </p:tgtEl>
+                </p:cond>
+              </p:prevCondLst>
+              <p:nextCondLst>
+                <p:cond evt="onNext" delay="0">
+                  <p:tgtEl>
+                    <p:sldTgt/>
+                  </p:tgtEl>
+                </p:cond>
+              </p:nextCondLst>
+            </p:seq>
+          </p:childTnLst>
+        </p:cTn>
+      </p:par>
+    </p:tnLst>
+  </p:timing>
+</p:sld>
+</file>
+
+<file path=ppt/slides/slide19.xml><?xml version="1.0" encoding="utf-8"?>
+<p:sld xmlns:a="http://schemas.openxmlformats.org/drawingml/2006/main" xmlns:r="http://schemas.openxmlformats.org/officeDocument/2006/relationships" xmlns:p="http://schemas.openxmlformats.org/presentationml/2006/main">
+  <p:cSld>
+    <p:spTree>
+      <p:nvGrpSpPr>
+        <p:cNvPr id="1" name=""/>
+        <p:cNvGrpSpPr/>
+        <p:nvPr/>
+      </p:nvGrpSpPr>
+      <p:grpSpPr>
+        <a:xfrm>
+          <a:off x="0" y="0"/>
+          <a:ext cx="0" cy="0"/>
+          <a:chOff x="0" y="0"/>
+          <a:chExt cx="0" cy="0"/>
+        </a:xfrm>
+      </p:grpSpPr>
+      <p:sp>
+        <p:nvSpPr>
+          <p:cNvPr id="2" name="Titolo 1">
+            <a:extLst>
+              <a:ext uri="{FF2B5EF4-FFF2-40B4-BE49-F238E27FC236}">
+                <a16:creationId xmlns:a16="http://schemas.microsoft.com/office/drawing/2014/main" id="{8612D28D-EE75-A61C-A287-48DDD4624EE8}"/>
+              </a:ext>
+            </a:extLst>
+          </p:cNvPr>
+          <p:cNvSpPr>
+            <a:spLocks noGrp="1"/>
+          </p:cNvSpPr>
+          <p:nvPr>
+            <p:ph type="title"/>
+          </p:nvPr>
+        </p:nvSpPr>
+        <p:spPr/>
+        <p:txBody>
+          <a:bodyPr/>
+          <a:lstStyle/>
+          <a:p>
+            <a:r>
+              <a:rPr lang="it-IT" dirty="0" err="1"/>
+              <a:t>Backend</a:t>
+            </a:r>
+            <a:r>
+              <a:rPr lang="it-IT" dirty="0"/>
+              <a:t> API:</a:t>
+            </a:r>
+          </a:p>
+        </p:txBody>
+      </p:sp>
+      <p:sp>
+        <p:nvSpPr>
+          <p:cNvPr id="3" name="Segnaposto testo 2">
+            <a:extLst>
+              <a:ext uri="{FF2B5EF4-FFF2-40B4-BE49-F238E27FC236}">
+                <a16:creationId xmlns:a16="http://schemas.microsoft.com/office/drawing/2014/main" id="{53421EB6-7FA7-C1EC-BF77-1407BC6195AF}"/>
+              </a:ext>
+            </a:extLst>
+          </p:cNvPr>
+          <p:cNvSpPr>
+            <a:spLocks noGrp="1"/>
+          </p:cNvSpPr>
+          <p:nvPr>
+            <p:ph type="body" idx="1"/>
+          </p:nvPr>
+        </p:nvSpPr>
+        <p:spPr>
+          <a:xfrm>
+            <a:off x="311700" y="1171600"/>
+            <a:ext cx="8611864" cy="477586"/>
+          </a:xfrm>
+        </p:spPr>
+        <p:txBody>
+          <a:bodyPr/>
+          <a:lstStyle/>
+          <a:p>
+            <a:pPr marL="114300" indent="0">
+              <a:buNone/>
+            </a:pPr>
+            <a:r>
+              <a:rPr lang="it-IT" dirty="0"/>
+              <a:t>Esempio di chiamata API per login utente:</a:t>
+            </a:r>
+          </a:p>
+          <a:p>
+            <a:pPr marL="114300" indent="0">
+              <a:buNone/>
+            </a:pPr>
+            <a:endParaRPr lang="it-IT" dirty="0"/>
+          </a:p>
+        </p:txBody>
+      </p:sp>
+      <p:pic>
+        <p:nvPicPr>
+          <p:cNvPr id="5" name="Immagine 4" descr="Immagine che contiene testo, Carattere, schermata&#10;&#10;Il contenuto generato dall'IA potrebbe non essere corretto.">
+            <a:extLst>
+              <a:ext uri="{FF2B5EF4-FFF2-40B4-BE49-F238E27FC236}">
+                <a16:creationId xmlns:a16="http://schemas.microsoft.com/office/drawing/2014/main" id="{C87F5838-F357-6E8D-FED6-7151B6760BDE}"/>
+              </a:ext>
+            </a:extLst>
+          </p:cNvPr>
+          <p:cNvPicPr>
+            <a:picLocks noChangeAspect="1"/>
+          </p:cNvPicPr>
+          <p:nvPr/>
+        </p:nvPicPr>
+        <p:blipFill>
+          <a:blip r:embed="rId2"/>
+          <a:stretch>
+            <a:fillRect/>
+          </a:stretch>
+        </p:blipFill>
+        <p:spPr>
+          <a:xfrm>
+            <a:off x="521372" y="1620635"/>
+            <a:ext cx="3785810" cy="842297"/>
+          </a:xfrm>
+          <a:prstGeom prst="rect">
+            <a:avLst/>
+          </a:prstGeom>
+        </p:spPr>
+      </p:pic>
+      <p:sp>
+        <p:nvSpPr>
+          <p:cNvPr id="6" name="CasellaDiTesto 5">
+            <a:extLst>
+              <a:ext uri="{FF2B5EF4-FFF2-40B4-BE49-F238E27FC236}">
+                <a16:creationId xmlns:a16="http://schemas.microsoft.com/office/drawing/2014/main" id="{110E82A1-BB3C-27F5-0B41-9C7C53CF5534}"/>
+              </a:ext>
+            </a:extLst>
+          </p:cNvPr>
+          <p:cNvSpPr txBox="1"/>
+          <p:nvPr/>
+        </p:nvSpPr>
+        <p:spPr>
+          <a:xfrm>
+            <a:off x="4377199" y="1718617"/>
+            <a:ext cx="4644337" cy="646331"/>
+          </a:xfrm>
+          <a:prstGeom prst="rect">
+            <a:avLst/>
+          </a:prstGeom>
+          <a:noFill/>
+        </p:spPr>
+        <p:txBody>
+          <a:bodyPr wrap="square" rtlCol="0">
+            <a:spAutoFit/>
+          </a:bodyPr>
+          <a:lstStyle/>
+          <a:p>
+            <a:r>
+              <a:rPr lang="it-IT" sz="1800" dirty="0">
+                <a:effectLst/>
+                <a:latin typeface="Amasis MT Pro" panose="02040504050005020304" pitchFamily="18" charset="0"/>
+                <a:ea typeface="Aptos" panose="020B0004020202020204" pitchFamily="34" charset="0"/>
+                <a:cs typeface="Times New Roman" panose="02020603050405020304" pitchFamily="18" charset="0"/>
+              </a:rPr>
+              <a:t>i dati inseriti dall’utente vengono salvati in due stringhe</a:t>
+            </a:r>
+            <a:endParaRPr lang="it-IT" dirty="0"/>
+          </a:p>
+        </p:txBody>
+      </p:sp>
+      <p:pic>
+        <p:nvPicPr>
+          <p:cNvPr id="8" name="Immagine 7">
+            <a:extLst>
+              <a:ext uri="{FF2B5EF4-FFF2-40B4-BE49-F238E27FC236}">
+                <a16:creationId xmlns:a16="http://schemas.microsoft.com/office/drawing/2014/main" id="{D992FD4A-42E4-C59C-1B30-E5515810EB2A}"/>
+              </a:ext>
+            </a:extLst>
+          </p:cNvPr>
+          <p:cNvPicPr>
+            <a:picLocks noChangeAspect="1"/>
+          </p:cNvPicPr>
+          <p:nvPr/>
+        </p:nvPicPr>
+        <p:blipFill>
+          <a:blip r:embed="rId3"/>
+          <a:stretch>
+            <a:fillRect/>
+          </a:stretch>
+        </p:blipFill>
+        <p:spPr>
+          <a:xfrm>
+            <a:off x="521373" y="2571750"/>
+            <a:ext cx="3785810" cy="411108"/>
+          </a:xfrm>
+          <a:prstGeom prst="rect">
+            <a:avLst/>
+          </a:prstGeom>
+        </p:spPr>
+      </p:pic>
+      <p:pic>
+        <p:nvPicPr>
+          <p:cNvPr id="10" name="Immagine 9" descr="Immagine che contiene testo, schermata, Carattere&#10;&#10;Il contenuto generato dall'IA potrebbe non essere corretto.">
+            <a:extLst>
+              <a:ext uri="{FF2B5EF4-FFF2-40B4-BE49-F238E27FC236}">
+                <a16:creationId xmlns:a16="http://schemas.microsoft.com/office/drawing/2014/main" id="{1F13FEA4-2CA5-34F7-CBA4-0427FA5B7E63}"/>
+              </a:ext>
+            </a:extLst>
+          </p:cNvPr>
+          <p:cNvPicPr>
+            <a:picLocks noChangeAspect="1"/>
+          </p:cNvPicPr>
+          <p:nvPr/>
+        </p:nvPicPr>
+        <p:blipFill>
+          <a:blip r:embed="rId4"/>
+          <a:stretch>
+            <a:fillRect/>
+          </a:stretch>
+        </p:blipFill>
+        <p:spPr>
+          <a:xfrm>
+            <a:off x="521372" y="3219421"/>
+            <a:ext cx="3791145" cy="1104957"/>
+          </a:xfrm>
+          <a:prstGeom prst="rect">
+            <a:avLst/>
+          </a:prstGeom>
+        </p:spPr>
+      </p:pic>
+      <p:sp>
+        <p:nvSpPr>
+          <p:cNvPr id="12" name="CasellaDiTesto 11">
+            <a:extLst>
+              <a:ext uri="{FF2B5EF4-FFF2-40B4-BE49-F238E27FC236}">
+                <a16:creationId xmlns:a16="http://schemas.microsoft.com/office/drawing/2014/main" id="{6432613A-C738-E41B-6245-706BA40D5BB1}"/>
+              </a:ext>
+            </a:extLst>
+          </p:cNvPr>
+          <p:cNvSpPr txBox="1"/>
+          <p:nvPr/>
+        </p:nvSpPr>
+        <p:spPr>
+          <a:xfrm>
+            <a:off x="4377199" y="2399663"/>
+            <a:ext cx="4709651" cy="923330"/>
+          </a:xfrm>
+          <a:prstGeom prst="rect">
+            <a:avLst/>
+          </a:prstGeom>
+          <a:noFill/>
+        </p:spPr>
+        <p:txBody>
+          <a:bodyPr wrap="square">
+            <a:spAutoFit/>
+          </a:bodyPr>
+          <a:lstStyle/>
+          <a:p>
+            <a:r>
+              <a:rPr lang="it-IT" sz="1800" dirty="0">
+                <a:effectLst/>
+                <a:latin typeface="Amasis MT Pro" panose="02040504050005020304" pitchFamily="18" charset="0"/>
+                <a:ea typeface="Aptos" panose="020B0004020202020204" pitchFamily="34" charset="0"/>
+                <a:cs typeface="Times New Roman" panose="02020603050405020304" pitchFamily="18" charset="0"/>
+              </a:rPr>
+              <a:t>Attraverso una classe chiamata </a:t>
+            </a:r>
+            <a:r>
+              <a:rPr lang="it-IT" sz="1800" dirty="0" err="1">
+                <a:effectLst/>
+                <a:latin typeface="Amasis MT Pro" panose="02040504050005020304" pitchFamily="18" charset="0"/>
+                <a:ea typeface="Aptos" panose="020B0004020202020204" pitchFamily="34" charset="0"/>
+                <a:cs typeface="Times New Roman" panose="02020603050405020304" pitchFamily="18" charset="0"/>
+              </a:rPr>
+              <a:t>APIService</a:t>
+            </a:r>
+            <a:r>
+              <a:rPr lang="it-IT" sz="1800" dirty="0">
+                <a:effectLst/>
+                <a:latin typeface="Amasis MT Pro" panose="02040504050005020304" pitchFamily="18" charset="0"/>
+                <a:ea typeface="Aptos" panose="020B0004020202020204" pitchFamily="34" charset="0"/>
+                <a:cs typeface="Times New Roman" panose="02020603050405020304" pitchFamily="18" charset="0"/>
+              </a:rPr>
+              <a:t>, i dati vengono inviati in formato JSON a un endpoint</a:t>
+            </a:r>
+            <a:endParaRPr lang="it-IT" sz="1600" dirty="0"/>
+          </a:p>
+        </p:txBody>
+      </p:sp>
+      <p:sp>
+        <p:nvSpPr>
+          <p:cNvPr id="14" name="CasellaDiTesto 13">
+            <a:extLst>
+              <a:ext uri="{FF2B5EF4-FFF2-40B4-BE49-F238E27FC236}">
+                <a16:creationId xmlns:a16="http://schemas.microsoft.com/office/drawing/2014/main" id="{31D92E78-E262-6FB0-37C5-0FA314D8D0FD}"/>
+              </a:ext>
+            </a:extLst>
+          </p:cNvPr>
+          <p:cNvSpPr txBox="1"/>
+          <p:nvPr/>
+        </p:nvSpPr>
+        <p:spPr>
+          <a:xfrm>
+            <a:off x="4351564" y="3357709"/>
+            <a:ext cx="4572000" cy="1200329"/>
+          </a:xfrm>
+          <a:prstGeom prst="rect">
+            <a:avLst/>
+          </a:prstGeom>
+          <a:noFill/>
+        </p:spPr>
+        <p:txBody>
+          <a:bodyPr wrap="square">
+            <a:spAutoFit/>
+          </a:bodyPr>
+          <a:lstStyle/>
+          <a:p>
+            <a:r>
+              <a:rPr lang="it-IT" sz="1800" dirty="0">
+                <a:effectLst/>
+                <a:latin typeface="Amasis MT Pro" panose="02040504050005020304" pitchFamily="18" charset="0"/>
+                <a:ea typeface="Aptos" panose="020B0004020202020204" pitchFamily="34" charset="0"/>
+                <a:cs typeface="Times New Roman" panose="02020603050405020304" pitchFamily="18" charset="0"/>
+              </a:rPr>
+              <a:t>l’endpoint di </a:t>
+            </a:r>
+            <a:r>
+              <a:rPr lang="it-IT" sz="1800" dirty="0" err="1">
+                <a:effectLst/>
+                <a:latin typeface="Amasis MT Pro" panose="02040504050005020304" pitchFamily="18" charset="0"/>
+                <a:ea typeface="Aptos" panose="020B0004020202020204" pitchFamily="34" charset="0"/>
+                <a:cs typeface="Times New Roman" panose="02020603050405020304" pitchFamily="18" charset="0"/>
+              </a:rPr>
+              <a:t>Flask</a:t>
+            </a:r>
+            <a:r>
+              <a:rPr lang="it-IT" sz="1800" dirty="0">
+                <a:effectLst/>
+                <a:latin typeface="Amasis MT Pro" panose="02040504050005020304" pitchFamily="18" charset="0"/>
+                <a:ea typeface="Aptos" panose="020B0004020202020204" pitchFamily="34" charset="0"/>
+                <a:cs typeface="Times New Roman" panose="02020603050405020304" pitchFamily="18" charset="0"/>
+              </a:rPr>
+              <a:t> prende i dati e con essi genera una richiesta(query) al server. Se un utente corrisponde alle credenziali, l’esito della richiesta sarà positivo</a:t>
+            </a:r>
+            <a:endParaRPr lang="it-IT" dirty="0"/>
+          </a:p>
+        </p:txBody>
+      </p:sp>
+    </p:spTree>
+    <p:extLst>
+      <p:ext uri="{BB962C8B-B14F-4D97-AF65-F5344CB8AC3E}">
+        <p14:creationId xmlns:p14="http://schemas.microsoft.com/office/powerpoint/2010/main" val="3710877346"/>
+      </p:ext>
+    </p:extLst>
+  </p:cSld>
+  <p:clrMapOvr>
+    <a:masterClrMapping/>
+  </p:clrMapOvr>
+  <p:timing>
+    <p:tnLst>
+      <p:par>
+        <p:cTn id="1" dur="indefinite" restart="never" nodeType="tmRoot">
+          <p:childTnLst>
+            <p:seq concurrent="1" nextAc="seek">
+              <p:cTn id="2" dur="indefinite" nodeType="mainSeq">
+                <p:childTnLst>
+                  <p:par>
+                    <p:cTn id="3" fill="hold">
+                      <p:stCondLst>
+                        <p:cond delay="indefinite"/>
+                      </p:stCondLst>
+                      <p:childTnLst>
+                        <p:par>
+                          <p:cTn id="4" fill="hold">
+                            <p:stCondLst>
+                              <p:cond delay="0"/>
+                            </p:stCondLst>
+                            <p:childTnLst>
+                              <p:par>
+                                <p:cTn id="5" presetID="10" presetClass="entr" presetSubtype="0" fill="hold" nodeType="clickEffect">
+                                  <p:stCondLst>
+                                    <p:cond delay="0"/>
+                                  </p:stCondLst>
+                                  <p:childTnLst>
+                                    <p:set>
+                                      <p:cBhvr>
+                                        <p:cTn id="6" dur="1" fill="hold">
+                                          <p:stCondLst>
+                                            <p:cond delay="0"/>
+                                          </p:stCondLst>
+                                        </p:cTn>
+                                        <p:tgtEl>
+                                          <p:spTgt spid="5"/>
+                                        </p:tgtEl>
+                                        <p:attrNameLst>
+                                          <p:attrName>style.visibility</p:attrName>
+                                        </p:attrNameLst>
+                                      </p:cBhvr>
+                                      <p:to>
+                                        <p:strVal val="visible"/>
+                                      </p:to>
+                                    </p:set>
+                                    <p:animEffect transition="in" filter="fade">
+                                      <p:cBhvr>
+                                        <p:cTn id="7" dur="500"/>
+                                        <p:tgtEl>
+                                          <p:spTgt spid="5"/>
+                                        </p:tgtEl>
+                                      </p:cBhvr>
+                                    </p:animEffect>
+                                  </p:childTnLst>
+                                </p:cTn>
+                              </p:par>
+                            </p:childTnLst>
+                          </p:cTn>
+                        </p:par>
+                      </p:childTnLst>
+                    </p:cTn>
+                  </p:par>
+                  <p:par>
+                    <p:cTn id="8" fill="hold">
+                      <p:stCondLst>
+                        <p:cond delay="indefinite"/>
+                      </p:stCondLst>
+                      <p:childTnLst>
+                        <p:par>
+                          <p:cTn id="9" fill="hold">
+                            <p:stCondLst>
+                              <p:cond delay="0"/>
+                            </p:stCondLst>
+                            <p:childTnLst>
+                              <p:par>
+                                <p:cTn id="10" presetID="10" presetClass="entr" presetSubtype="0" fill="hold" grpId="0" nodeType="clickEffect">
+                                  <p:stCondLst>
+                                    <p:cond delay="0"/>
+                                  </p:stCondLst>
+                                  <p:childTnLst>
+                                    <p:set>
+                                      <p:cBhvr>
+                                        <p:cTn id="11" dur="1" fill="hold">
+                                          <p:stCondLst>
+                                            <p:cond delay="0"/>
+                                          </p:stCondLst>
+                                        </p:cTn>
+                                        <p:tgtEl>
+                                          <p:spTgt spid="6"/>
+                                        </p:tgtEl>
+                                        <p:attrNameLst>
+                                          <p:attrName>style.visibility</p:attrName>
+                                        </p:attrNameLst>
+                                      </p:cBhvr>
+                                      <p:to>
+                                        <p:strVal val="visible"/>
+                                      </p:to>
+                                    </p:set>
+                                    <p:animEffect transition="in" filter="fade">
+                                      <p:cBhvr>
+                                        <p:cTn id="12" dur="500"/>
+                                        <p:tgtEl>
+                                          <p:spTgt spid="6"/>
+                                        </p:tgtEl>
+                                      </p:cBhvr>
+                                    </p:animEffect>
+                                  </p:childTnLst>
+                                </p:cTn>
+                              </p:par>
+                            </p:childTnLst>
+                          </p:cTn>
+                        </p:par>
+                      </p:childTnLst>
+                    </p:cTn>
+                  </p:par>
+                  <p:par>
+                    <p:cTn id="13" fill="hold">
+                      <p:stCondLst>
+                        <p:cond delay="indefinite"/>
+                      </p:stCondLst>
+                      <p:childTnLst>
+                        <p:par>
+                          <p:cTn id="14" fill="hold">
+                            <p:stCondLst>
+                              <p:cond delay="0"/>
+                            </p:stCondLst>
+                            <p:childTnLst>
+                              <p:par>
+                                <p:cTn id="15" presetID="10" presetClass="entr" presetSubtype="0" fill="hold" nodeType="clickEffect">
+                                  <p:stCondLst>
+                                    <p:cond delay="0"/>
+                                  </p:stCondLst>
+                                  <p:childTnLst>
+                                    <p:set>
+                                      <p:cBhvr>
+                                        <p:cTn id="16" dur="1" fill="hold">
+                                          <p:stCondLst>
+                                            <p:cond delay="0"/>
+                                          </p:stCondLst>
+                                        </p:cTn>
+                                        <p:tgtEl>
+                                          <p:spTgt spid="8"/>
+                                        </p:tgtEl>
+                                        <p:attrNameLst>
+                                          <p:attrName>style.visibility</p:attrName>
+                                        </p:attrNameLst>
+                                      </p:cBhvr>
+                                      <p:to>
+                                        <p:strVal val="visible"/>
+                                      </p:to>
+                                    </p:set>
+                                    <p:animEffect transition="in" filter="fade">
+                                      <p:cBhvr>
+                                        <p:cTn id="17" dur="500"/>
+                                        <p:tgtEl>
+                                          <p:spTgt spid="8"/>
+                                        </p:tgtEl>
+                                      </p:cBhvr>
+                                    </p:animEffect>
+                                  </p:childTnLst>
+                                </p:cTn>
+                              </p:par>
+                            </p:childTnLst>
+                          </p:cTn>
+                        </p:par>
+                      </p:childTnLst>
+                    </p:cTn>
+                  </p:par>
+                  <p:par>
+                    <p:cTn id="18" fill="hold">
+                      <p:stCondLst>
+                        <p:cond delay="indefinite"/>
+                      </p:stCondLst>
+                      <p:childTnLst>
+                        <p:par>
+                          <p:cTn id="19" fill="hold">
+                            <p:stCondLst>
+                              <p:cond delay="0"/>
+                            </p:stCondLst>
+                            <p:childTnLst>
+                              <p:par>
+                                <p:cTn id="20" presetID="10" presetClass="entr" presetSubtype="0" fill="hold" grpId="0" nodeType="clickEffect">
+                                  <p:stCondLst>
+                                    <p:cond delay="0"/>
+                                  </p:stCondLst>
+                                  <p:childTnLst>
+                                    <p:set>
+                                      <p:cBhvr>
+                                        <p:cTn id="21" dur="1" fill="hold">
+                                          <p:stCondLst>
+                                            <p:cond delay="0"/>
+                                          </p:stCondLst>
+                                        </p:cTn>
+                                        <p:tgtEl>
+                                          <p:spTgt spid="12"/>
+                                        </p:tgtEl>
+                                        <p:attrNameLst>
+                                          <p:attrName>style.visibility</p:attrName>
+                                        </p:attrNameLst>
+                                      </p:cBhvr>
+                                      <p:to>
+                                        <p:strVal val="visible"/>
+                                      </p:to>
+                                    </p:set>
+                                    <p:animEffect transition="in" filter="fade">
+                                      <p:cBhvr>
+                                        <p:cTn id="22" dur="500"/>
+                                        <p:tgtEl>
+                                          <p:spTgt spid="12"/>
+                                        </p:tgtEl>
+                                      </p:cBhvr>
+                                    </p:animEffect>
+                                  </p:childTnLst>
+                                </p:cTn>
+                              </p:par>
+                            </p:childTnLst>
+                          </p:cTn>
+                        </p:par>
+                      </p:childTnLst>
+                    </p:cTn>
+                  </p:par>
+                  <p:par>
+                    <p:cTn id="23" fill="hold">
+                      <p:stCondLst>
+                        <p:cond delay="indefinite"/>
+                      </p:stCondLst>
+                      <p:childTnLst>
+                        <p:par>
+                          <p:cTn id="24" fill="hold">
+                            <p:stCondLst>
+                              <p:cond delay="0"/>
+                            </p:stCondLst>
+                            <p:childTnLst>
+                              <p:par>
+                                <p:cTn id="25" presetID="10" presetClass="entr" presetSubtype="0" fill="hold" nodeType="clickEffect">
+                                  <p:stCondLst>
+                                    <p:cond delay="0"/>
+                                  </p:stCondLst>
+                                  <p:childTnLst>
+                                    <p:set>
+                                      <p:cBhvr>
+                                        <p:cTn id="26" dur="1" fill="hold">
+                                          <p:stCondLst>
+                                            <p:cond delay="0"/>
+                                          </p:stCondLst>
+                                        </p:cTn>
+                                        <p:tgtEl>
+                                          <p:spTgt spid="10"/>
+                                        </p:tgtEl>
+                                        <p:attrNameLst>
+                                          <p:attrName>style.visibility</p:attrName>
+                                        </p:attrNameLst>
+                                      </p:cBhvr>
+                                      <p:to>
+                                        <p:strVal val="visible"/>
+                                      </p:to>
+                                    </p:set>
+                                    <p:animEffect transition="in" filter="fade">
+                                      <p:cBhvr>
+                                        <p:cTn id="27" dur="500"/>
+                                        <p:tgtEl>
+                                          <p:spTgt spid="10"/>
+                                        </p:tgtEl>
+                                      </p:cBhvr>
+                                    </p:animEffect>
+                                  </p:childTnLst>
+                                </p:cTn>
+                              </p:par>
+                            </p:childTnLst>
+                          </p:cTn>
+                        </p:par>
+                      </p:childTnLst>
+                    </p:cTn>
+                  </p:par>
+                  <p:par>
+                    <p:cTn id="28" fill="hold">
+                      <p:stCondLst>
+                        <p:cond delay="indefinite"/>
+                      </p:stCondLst>
+                      <p:childTnLst>
+                        <p:par>
+                          <p:cTn id="29" fill="hold">
+                            <p:stCondLst>
+                              <p:cond delay="0"/>
+                            </p:stCondLst>
+                            <p:childTnLst>
+                              <p:par>
+                                <p:cTn id="30" presetID="10" presetClass="entr" presetSubtype="0" fill="hold" grpId="0" nodeType="clickEffect">
+                                  <p:stCondLst>
+                                    <p:cond delay="0"/>
+                                  </p:stCondLst>
+                                  <p:childTnLst>
+                                    <p:set>
+                                      <p:cBhvr>
+                                        <p:cTn id="31" dur="1" fill="hold">
+                                          <p:stCondLst>
+                                            <p:cond delay="0"/>
+                                          </p:stCondLst>
+                                        </p:cTn>
+                                        <p:tgtEl>
+                                          <p:spTgt spid="14"/>
+                                        </p:tgtEl>
+                                        <p:attrNameLst>
+                                          <p:attrName>style.visibility</p:attrName>
+                                        </p:attrNameLst>
+                                      </p:cBhvr>
+                                      <p:to>
+                                        <p:strVal val="visible"/>
+                                      </p:to>
+                                    </p:set>
+                                    <p:animEffect transition="in" filter="fade">
+                                      <p:cBhvr>
+                                        <p:cTn id="32" dur="500"/>
+                                        <p:tgtEl>
+                                          <p:spTgt spid="14"/>
+                                        </p:tgtEl>
+                                      </p:cBhvr>
+                                    </p:animEffect>
+                                  </p:childTnLst>
+                                </p:cTn>
+                              </p:par>
+                            </p:childTnLst>
+                          </p:cTn>
+                        </p:par>
+                      </p:childTnLst>
+                    </p:cTn>
+                  </p:par>
+                </p:childTnLst>
+              </p:cTn>
+              <p:prevCondLst>
+                <p:cond evt="onPrev" delay="0">
+                  <p:tgtEl>
+                    <p:sldTgt/>
+                  </p:tgtEl>
+                </p:cond>
+              </p:prevCondLst>
+              <p:nextCondLst>
+                <p:cond evt="onNext" delay="0">
+                  <p:tgtEl>
+                    <p:sldTgt/>
+                  </p:tgtEl>
+                </p:cond>
+              </p:nextCondLst>
+            </p:seq>
+          </p:childTnLst>
+        </p:cTn>
+      </p:par>
+    </p:tnLst>
+    <p:bldLst>
+      <p:bldP spid="6" grpId="0"/>
+      <p:bldP spid="12" grpId="0"/>
+      <p:bldP spid="14" grpId="0"/>
+    </p:bldLst>
+  </p:timing>
+</p:sld>
+</file>
+
 <file path=ppt/slides/slide2.xml><?xml version="1.0" encoding="utf-8"?>
 <p:sld xmlns:a="http://schemas.openxmlformats.org/drawingml/2006/main" xmlns:r="http://schemas.openxmlformats.org/officeDocument/2006/relationships" xmlns:p="http://schemas.openxmlformats.org/presentationml/2006/main">
   <p:cSld>
@@ -7244,13 +10595,13 @@
           <a:p>
             <a:r>
               <a:rPr lang="it-IT" dirty="0"/>
-              <a:t>Gestione agenda appuntamenti </a:t>
+              <a:t>Gestione agenda appuntamenti (implementazione futura)</a:t>
             </a:r>
           </a:p>
           <a:p>
             <a:r>
               <a:rPr lang="it-IT" dirty="0"/>
-              <a:t>Gestione prenotazioni dei clienti</a:t>
+              <a:t>Gestione prenotazioni dei clienti (implementazione futura)</a:t>
             </a:r>
           </a:p>
         </p:txBody>
@@ -7336,6 +10687,1709 @@
 </file>
 
 <file path=ppt/slides/slide6.xml><?xml version="1.0" encoding="utf-8"?>
+<p:sld xmlns:a="http://schemas.openxmlformats.org/drawingml/2006/main" xmlns:r="http://schemas.openxmlformats.org/officeDocument/2006/relationships" xmlns:p="http://schemas.openxmlformats.org/presentationml/2006/main">
+  <p:cSld>
+    <p:spTree>
+      <p:nvGrpSpPr>
+        <p:cNvPr id="1" name=""/>
+        <p:cNvGrpSpPr/>
+        <p:nvPr/>
+      </p:nvGrpSpPr>
+      <p:grpSpPr>
+        <a:xfrm>
+          <a:off x="0" y="0"/>
+          <a:ext cx="0" cy="0"/>
+          <a:chOff x="0" y="0"/>
+          <a:chExt cx="0" cy="0"/>
+        </a:xfrm>
+      </p:grpSpPr>
+      <p:sp>
+        <p:nvSpPr>
+          <p:cNvPr id="2" name="Titolo 1">
+            <a:extLst>
+              <a:ext uri="{FF2B5EF4-FFF2-40B4-BE49-F238E27FC236}">
+                <a16:creationId xmlns:a16="http://schemas.microsoft.com/office/drawing/2014/main" id="{F5A6D474-D27D-69CB-795C-6991DFE04FCF}"/>
+              </a:ext>
+            </a:extLst>
+          </p:cNvPr>
+          <p:cNvSpPr>
+            <a:spLocks noGrp="1"/>
+          </p:cNvSpPr>
+          <p:nvPr>
+            <p:ph type="title"/>
+          </p:nvPr>
+        </p:nvSpPr>
+        <p:spPr/>
+        <p:txBody>
+          <a:bodyPr/>
+          <a:lstStyle/>
+          <a:p>
+            <a:pPr algn="ctr"/>
+            <a:r>
+              <a:rPr lang="it-IT" dirty="0"/>
+              <a:t>SCHEMA ER</a:t>
+            </a:r>
+          </a:p>
+        </p:txBody>
+      </p:sp>
+      <p:pic>
+        <p:nvPicPr>
+          <p:cNvPr id="4" name="Immagine 3" descr="Immagine che contiene diagramma, linea, Policromia, design&#10;&#10;Il contenuto generato dall'IA potrebbe non essere corretto.">
+            <a:extLst>
+              <a:ext uri="{FF2B5EF4-FFF2-40B4-BE49-F238E27FC236}">
+                <a16:creationId xmlns:a16="http://schemas.microsoft.com/office/drawing/2014/main" id="{BE05FA8C-E45B-A594-DA54-61D463F2B37A}"/>
+              </a:ext>
+            </a:extLst>
+          </p:cNvPr>
+          <p:cNvPicPr>
+            <a:picLocks noChangeAspect="1"/>
+          </p:cNvPicPr>
+          <p:nvPr/>
+        </p:nvPicPr>
+        <p:blipFill>
+          <a:blip r:embed="rId2"/>
+          <a:stretch>
+            <a:fillRect/>
+          </a:stretch>
+        </p:blipFill>
+        <p:spPr>
+          <a:xfrm>
+            <a:off x="1455514" y="948326"/>
+            <a:ext cx="6610455" cy="3984806"/>
+          </a:xfrm>
+          <a:prstGeom prst="rect">
+            <a:avLst/>
+          </a:prstGeom>
+        </p:spPr>
+      </p:pic>
+    </p:spTree>
+    <p:extLst>
+      <p:ext uri="{BB962C8B-B14F-4D97-AF65-F5344CB8AC3E}">
+        <p14:creationId xmlns:p14="http://schemas.microsoft.com/office/powerpoint/2010/main" val="4170710722"/>
+      </p:ext>
+    </p:extLst>
+  </p:cSld>
+  <p:clrMapOvr>
+    <a:masterClrMapping/>
+  </p:clrMapOvr>
+  <p:timing>
+    <p:tnLst>
+      <p:par>
+        <p:cTn id="1" dur="indefinite" restart="never" nodeType="tmRoot">
+          <p:childTnLst>
+            <p:seq concurrent="1" nextAc="seek">
+              <p:cTn id="2" dur="indefinite" nodeType="mainSeq">
+                <p:childTnLst>
+                  <p:par>
+                    <p:cTn id="3" fill="hold">
+                      <p:stCondLst>
+                        <p:cond delay="indefinite"/>
+                      </p:stCondLst>
+                      <p:childTnLst>
+                        <p:par>
+                          <p:cTn id="4" fill="hold">
+                            <p:stCondLst>
+                              <p:cond delay="0"/>
+                            </p:stCondLst>
+                            <p:childTnLst>
+                              <p:par>
+                                <p:cTn id="5" presetID="22" presetClass="entr" presetSubtype="4" fill="hold" nodeType="clickEffect">
+                                  <p:stCondLst>
+                                    <p:cond delay="0"/>
+                                  </p:stCondLst>
+                                  <p:childTnLst>
+                                    <p:set>
+                                      <p:cBhvr>
+                                        <p:cTn id="6" dur="1" fill="hold">
+                                          <p:stCondLst>
+                                            <p:cond delay="0"/>
+                                          </p:stCondLst>
+                                        </p:cTn>
+                                        <p:tgtEl>
+                                          <p:spTgt spid="4"/>
+                                        </p:tgtEl>
+                                        <p:attrNameLst>
+                                          <p:attrName>style.visibility</p:attrName>
+                                        </p:attrNameLst>
+                                      </p:cBhvr>
+                                      <p:to>
+                                        <p:strVal val="visible"/>
+                                      </p:to>
+                                    </p:set>
+                                    <p:animEffect transition="in" filter="wipe(down)">
+                                      <p:cBhvr>
+                                        <p:cTn id="7" dur="500"/>
+                                        <p:tgtEl>
+                                          <p:spTgt spid="4"/>
+                                        </p:tgtEl>
+                                      </p:cBhvr>
+                                    </p:animEffect>
+                                  </p:childTnLst>
+                                </p:cTn>
+                              </p:par>
+                            </p:childTnLst>
+                          </p:cTn>
+                        </p:par>
+                      </p:childTnLst>
+                    </p:cTn>
+                  </p:par>
+                </p:childTnLst>
+              </p:cTn>
+              <p:prevCondLst>
+                <p:cond evt="onPrev" delay="0">
+                  <p:tgtEl>
+                    <p:sldTgt/>
+                  </p:tgtEl>
+                </p:cond>
+              </p:prevCondLst>
+              <p:nextCondLst>
+                <p:cond evt="onNext" delay="0">
+                  <p:tgtEl>
+                    <p:sldTgt/>
+                  </p:tgtEl>
+                </p:cond>
+              </p:nextCondLst>
+            </p:seq>
+          </p:childTnLst>
+        </p:cTn>
+      </p:par>
+    </p:tnLst>
+  </p:timing>
+</p:sld>
+</file>
+
+<file path=ppt/slides/slide7.xml><?xml version="1.0" encoding="utf-8"?>
+<p:sld xmlns:a="http://schemas.openxmlformats.org/drawingml/2006/main" xmlns:r="http://schemas.openxmlformats.org/officeDocument/2006/relationships" xmlns:p="http://schemas.openxmlformats.org/presentationml/2006/main">
+  <p:cSld>
+    <p:spTree>
+      <p:nvGrpSpPr>
+        <p:cNvPr id="1" name=""/>
+        <p:cNvGrpSpPr/>
+        <p:nvPr/>
+      </p:nvGrpSpPr>
+      <p:grpSpPr>
+        <a:xfrm>
+          <a:off x="0" y="0"/>
+          <a:ext cx="0" cy="0"/>
+          <a:chOff x="0" y="0"/>
+          <a:chExt cx="0" cy="0"/>
+        </a:xfrm>
+      </p:grpSpPr>
+      <p:sp>
+        <p:nvSpPr>
+          <p:cNvPr id="2" name="Titolo 1">
+            <a:extLst>
+              <a:ext uri="{FF2B5EF4-FFF2-40B4-BE49-F238E27FC236}">
+                <a16:creationId xmlns:a16="http://schemas.microsoft.com/office/drawing/2014/main" id="{4867B37A-4E82-DB05-6CE8-A77777967F99}"/>
+              </a:ext>
+            </a:extLst>
+          </p:cNvPr>
+          <p:cNvSpPr>
+            <a:spLocks noGrp="1"/>
+          </p:cNvSpPr>
+          <p:nvPr>
+            <p:ph type="title"/>
+          </p:nvPr>
+        </p:nvSpPr>
+        <p:spPr/>
+        <p:txBody>
+          <a:bodyPr/>
+          <a:lstStyle/>
+          <a:p>
+            <a:r>
+              <a:rPr lang="it-IT" dirty="0"/>
+              <a:t>STRUMENTI UTILIZZATI</a:t>
+            </a:r>
+          </a:p>
+        </p:txBody>
+      </p:sp>
+      <p:pic>
+        <p:nvPicPr>
+          <p:cNvPr id="5" name="Immagine 4" descr="Immagine che contiene cartone animato, clipart, Arte bambini, arte&#10;&#10;Il contenuto generato dall'IA potrebbe non essere corretto.">
+            <a:extLst>
+              <a:ext uri="{FF2B5EF4-FFF2-40B4-BE49-F238E27FC236}">
+                <a16:creationId xmlns:a16="http://schemas.microsoft.com/office/drawing/2014/main" id="{C938877A-CD7A-0DAB-8EFD-A25675D370A8}"/>
+              </a:ext>
+            </a:extLst>
+          </p:cNvPr>
+          <p:cNvPicPr>
+            <a:picLocks noChangeAspect="1"/>
+          </p:cNvPicPr>
+          <p:nvPr/>
+        </p:nvPicPr>
+        <p:blipFill>
+          <a:blip r:embed="rId2"/>
+          <a:stretch>
+            <a:fillRect/>
+          </a:stretch>
+        </p:blipFill>
+        <p:spPr>
+          <a:xfrm>
+            <a:off x="1198551" y="2779581"/>
+            <a:ext cx="797056" cy="794791"/>
+          </a:xfrm>
+          <a:prstGeom prst="rect">
+            <a:avLst/>
+          </a:prstGeom>
+        </p:spPr>
+      </p:pic>
+      <p:pic>
+        <p:nvPicPr>
+          <p:cNvPr id="7" name="Immagine 6" descr="Immagine che contiene schizzo, disegno, clipart, design&#10;&#10;Il contenuto generato dall'IA potrebbe non essere corretto.">
+            <a:extLst>
+              <a:ext uri="{FF2B5EF4-FFF2-40B4-BE49-F238E27FC236}">
+                <a16:creationId xmlns:a16="http://schemas.microsoft.com/office/drawing/2014/main" id="{314F113C-2975-37C6-F356-6B492F69E0D9}"/>
+              </a:ext>
+            </a:extLst>
+          </p:cNvPr>
+          <p:cNvPicPr>
+            <a:picLocks noChangeAspect="1"/>
+          </p:cNvPicPr>
+          <p:nvPr/>
+        </p:nvPicPr>
+        <p:blipFill>
+          <a:blip r:embed="rId3"/>
+          <a:stretch>
+            <a:fillRect/>
+          </a:stretch>
+        </p:blipFill>
+        <p:spPr>
+          <a:xfrm>
+            <a:off x="378950" y="2789121"/>
+            <a:ext cx="794791" cy="794791"/>
+          </a:xfrm>
+          <a:prstGeom prst="rect">
+            <a:avLst/>
+          </a:prstGeom>
+        </p:spPr>
+      </p:pic>
+      <p:sp>
+        <p:nvSpPr>
+          <p:cNvPr id="8" name="CasellaDiTesto 7">
+            <a:extLst>
+              <a:ext uri="{FF2B5EF4-FFF2-40B4-BE49-F238E27FC236}">
+                <a16:creationId xmlns:a16="http://schemas.microsoft.com/office/drawing/2014/main" id="{417C02DF-D677-32FC-1F4B-5E7EBCBD64B7}"/>
+              </a:ext>
+            </a:extLst>
+          </p:cNvPr>
+          <p:cNvSpPr txBox="1"/>
+          <p:nvPr/>
+        </p:nvSpPr>
+        <p:spPr>
+          <a:xfrm>
+            <a:off x="2090409" y="3049171"/>
+            <a:ext cx="3703258" cy="307777"/>
+          </a:xfrm>
+          <a:prstGeom prst="rect">
+            <a:avLst/>
+          </a:prstGeom>
+          <a:noFill/>
+        </p:spPr>
+        <p:txBody>
+          <a:bodyPr wrap="none" rtlCol="0">
+            <a:spAutoFit/>
+          </a:bodyPr>
+          <a:lstStyle/>
+          <a:p>
+            <a:r>
+              <a:rPr lang="it-IT" dirty="0"/>
+              <a:t>JAVA e ANDROID STUDIO per l’app Mobile</a:t>
+            </a:r>
+          </a:p>
+        </p:txBody>
+      </p:sp>
+      <p:pic>
+        <p:nvPicPr>
+          <p:cNvPr id="10" name="Immagine 9" descr="Immagine che contiene Carattere, Elementi grafici, logo, grafica&#10;&#10;Il contenuto generato dall'IA potrebbe non essere corretto.">
+            <a:extLst>
+              <a:ext uri="{FF2B5EF4-FFF2-40B4-BE49-F238E27FC236}">
+                <a16:creationId xmlns:a16="http://schemas.microsoft.com/office/drawing/2014/main" id="{08777605-3F92-4ACB-2B12-4B3814A5A347}"/>
+              </a:ext>
+            </a:extLst>
+          </p:cNvPr>
+          <p:cNvPicPr>
+            <a:picLocks noChangeAspect="1"/>
+          </p:cNvPicPr>
+          <p:nvPr/>
+        </p:nvPicPr>
+        <p:blipFill>
+          <a:blip r:embed="rId4"/>
+          <a:stretch>
+            <a:fillRect/>
+          </a:stretch>
+        </p:blipFill>
+        <p:spPr>
+          <a:xfrm>
+            <a:off x="440459" y="1335896"/>
+            <a:ext cx="1254160" cy="670248"/>
+          </a:xfrm>
+          <a:prstGeom prst="rect">
+            <a:avLst/>
+          </a:prstGeom>
+        </p:spPr>
+      </p:pic>
+      <p:sp>
+        <p:nvSpPr>
+          <p:cNvPr id="11" name="CasellaDiTesto 10">
+            <a:extLst>
+              <a:ext uri="{FF2B5EF4-FFF2-40B4-BE49-F238E27FC236}">
+                <a16:creationId xmlns:a16="http://schemas.microsoft.com/office/drawing/2014/main" id="{D9E91429-8423-37FD-3450-47DF7F80A402}"/>
+              </a:ext>
+            </a:extLst>
+          </p:cNvPr>
+          <p:cNvSpPr txBox="1"/>
+          <p:nvPr/>
+        </p:nvSpPr>
+        <p:spPr>
+          <a:xfrm>
+            <a:off x="1895798" y="1523885"/>
+            <a:ext cx="3387466" cy="307777"/>
+          </a:xfrm>
+          <a:prstGeom prst="rect">
+            <a:avLst/>
+          </a:prstGeom>
+          <a:noFill/>
+        </p:spPr>
+        <p:txBody>
+          <a:bodyPr wrap="none" rtlCol="0">
+            <a:spAutoFit/>
+          </a:bodyPr>
+          <a:lstStyle/>
+          <a:p>
+            <a:r>
+              <a:rPr lang="it-IT" dirty="0"/>
+              <a:t>FIGMA – Per </a:t>
+            </a:r>
+            <a:r>
+              <a:rPr lang="it-IT" dirty="0" err="1"/>
+              <a:t>Wireframe</a:t>
+            </a:r>
+            <a:r>
+              <a:rPr lang="it-IT" dirty="0"/>
+              <a:t> e progettazione</a:t>
+            </a:r>
+          </a:p>
+        </p:txBody>
+      </p:sp>
+      <p:pic>
+        <p:nvPicPr>
+          <p:cNvPr id="13" name="Immagine 12" descr="Immagine che contiene Carattere, logo, Elementi grafici, simbolo&#10;&#10;Il contenuto generato dall'IA potrebbe non essere corretto.">
+            <a:extLst>
+              <a:ext uri="{FF2B5EF4-FFF2-40B4-BE49-F238E27FC236}">
+                <a16:creationId xmlns:a16="http://schemas.microsoft.com/office/drawing/2014/main" id="{41F7A41D-D20F-4C9E-D636-2D61DA9F02E2}"/>
+              </a:ext>
+            </a:extLst>
+          </p:cNvPr>
+          <p:cNvPicPr>
+            <a:picLocks noChangeAspect="1"/>
+          </p:cNvPicPr>
+          <p:nvPr/>
+        </p:nvPicPr>
+        <p:blipFill>
+          <a:blip r:embed="rId5"/>
+          <a:stretch>
+            <a:fillRect/>
+          </a:stretch>
+        </p:blipFill>
+        <p:spPr>
+          <a:xfrm>
+            <a:off x="378950" y="1960203"/>
+            <a:ext cx="1449598" cy="785199"/>
+          </a:xfrm>
+          <a:prstGeom prst="rect">
+            <a:avLst/>
+          </a:prstGeom>
+        </p:spPr>
+      </p:pic>
+      <p:pic>
+        <p:nvPicPr>
+          <p:cNvPr id="15" name="Immagine 14" descr="Immagine che contiene forchetta, simbolo, Utensile da cucina&#10;&#10;Il contenuto generato dall'IA potrebbe non essere corretto.">
+            <a:extLst>
+              <a:ext uri="{FF2B5EF4-FFF2-40B4-BE49-F238E27FC236}">
+                <a16:creationId xmlns:a16="http://schemas.microsoft.com/office/drawing/2014/main" id="{825C8E7F-9F4E-FAA0-6251-14215AB6106E}"/>
+              </a:ext>
+            </a:extLst>
+          </p:cNvPr>
+          <p:cNvPicPr>
+            <a:picLocks noChangeAspect="1"/>
+          </p:cNvPicPr>
+          <p:nvPr/>
+        </p:nvPicPr>
+        <p:blipFill>
+          <a:blip r:embed="rId6"/>
+          <a:stretch>
+            <a:fillRect/>
+          </a:stretch>
+        </p:blipFill>
+        <p:spPr>
+          <a:xfrm>
+            <a:off x="1971358" y="1871417"/>
+            <a:ext cx="767697" cy="767697"/>
+          </a:xfrm>
+          <a:prstGeom prst="rect">
+            <a:avLst/>
+          </a:prstGeom>
+        </p:spPr>
+      </p:pic>
+      <p:sp>
+        <p:nvSpPr>
+          <p:cNvPr id="16" name="CasellaDiTesto 15">
+            <a:extLst>
+              <a:ext uri="{FF2B5EF4-FFF2-40B4-BE49-F238E27FC236}">
+                <a16:creationId xmlns:a16="http://schemas.microsoft.com/office/drawing/2014/main" id="{6734FAEF-37E3-1CB9-0ECB-947D6A85BADB}"/>
+              </a:ext>
+            </a:extLst>
+          </p:cNvPr>
+          <p:cNvSpPr txBox="1"/>
+          <p:nvPr/>
+        </p:nvSpPr>
+        <p:spPr>
+          <a:xfrm>
+            <a:off x="2767653" y="2145097"/>
+            <a:ext cx="3826689" cy="307777"/>
+          </a:xfrm>
+          <a:prstGeom prst="rect">
+            <a:avLst/>
+          </a:prstGeom>
+          <a:noFill/>
+        </p:spPr>
+        <p:txBody>
+          <a:bodyPr wrap="none" rtlCol="0">
+            <a:spAutoFit/>
+          </a:bodyPr>
+          <a:lstStyle/>
+          <a:p>
+            <a:r>
+              <a:rPr lang="it-IT" dirty="0"/>
+              <a:t>GITHUB e FORK per il repository del progetto</a:t>
+            </a:r>
+          </a:p>
+        </p:txBody>
+      </p:sp>
+      <p:pic>
+        <p:nvPicPr>
+          <p:cNvPr id="18" name="Immagine 17" descr="Immagine che contiene simbolo, logo, Elementi grafici, Blu elettrico&#10;&#10;Il contenuto generato dall'IA potrebbe non essere corretto.">
+            <a:extLst>
+              <a:ext uri="{FF2B5EF4-FFF2-40B4-BE49-F238E27FC236}">
+                <a16:creationId xmlns:a16="http://schemas.microsoft.com/office/drawing/2014/main" id="{3E22610F-D712-2BC7-60D2-EE4A6C94C633}"/>
+              </a:ext>
+            </a:extLst>
+          </p:cNvPr>
+          <p:cNvPicPr>
+            <a:picLocks noChangeAspect="1"/>
+          </p:cNvPicPr>
+          <p:nvPr/>
+        </p:nvPicPr>
+        <p:blipFill>
+          <a:blip r:embed="rId7"/>
+          <a:stretch>
+            <a:fillRect/>
+          </a:stretch>
+        </p:blipFill>
+        <p:spPr>
+          <a:xfrm>
+            <a:off x="1240991" y="3608499"/>
+            <a:ext cx="794791" cy="838341"/>
+          </a:xfrm>
+          <a:prstGeom prst="rect">
+            <a:avLst/>
+          </a:prstGeom>
+        </p:spPr>
+      </p:pic>
+      <p:pic>
+        <p:nvPicPr>
+          <p:cNvPr id="20" name="Immagine 19" descr="Immagine che contiene schizzo, disegno, illustrazione&#10;&#10;Il contenuto generato dall'IA potrebbe non essere corretto.">
+            <a:extLst>
+              <a:ext uri="{FF2B5EF4-FFF2-40B4-BE49-F238E27FC236}">
+                <a16:creationId xmlns:a16="http://schemas.microsoft.com/office/drawing/2014/main" id="{63F81E6E-BF62-0BE4-E571-DA846A9C01D2}"/>
+              </a:ext>
+            </a:extLst>
+          </p:cNvPr>
+          <p:cNvPicPr>
+            <a:picLocks noChangeAspect="1"/>
+          </p:cNvPicPr>
+          <p:nvPr/>
+        </p:nvPicPr>
+        <p:blipFill>
+          <a:blip r:embed="rId8"/>
+          <a:stretch>
+            <a:fillRect/>
+          </a:stretch>
+        </p:blipFill>
+        <p:spPr>
+          <a:xfrm>
+            <a:off x="2128066" y="3615501"/>
+            <a:ext cx="910507" cy="877196"/>
+          </a:xfrm>
+          <a:prstGeom prst="rect">
+            <a:avLst/>
+          </a:prstGeom>
+        </p:spPr>
+      </p:pic>
+      <p:pic>
+        <p:nvPicPr>
+          <p:cNvPr id="22" name="Immagine 21" descr="Immagine che contiene simbolo, clipart, Elementi grafici, design&#10;&#10;Il contenuto generato dall'IA potrebbe non essere corretto.">
+            <a:extLst>
+              <a:ext uri="{FF2B5EF4-FFF2-40B4-BE49-F238E27FC236}">
+                <a16:creationId xmlns:a16="http://schemas.microsoft.com/office/drawing/2014/main" id="{69704F02-6DF0-1973-9ACD-DB6714A40B53}"/>
+              </a:ext>
+            </a:extLst>
+          </p:cNvPr>
+          <p:cNvPicPr>
+            <a:picLocks noChangeAspect="1"/>
+          </p:cNvPicPr>
+          <p:nvPr/>
+        </p:nvPicPr>
+        <p:blipFill>
+          <a:blip r:embed="rId9"/>
+          <a:stretch>
+            <a:fillRect/>
+          </a:stretch>
+        </p:blipFill>
+        <p:spPr>
+          <a:xfrm>
+            <a:off x="378950" y="3670251"/>
+            <a:ext cx="819825" cy="767697"/>
+          </a:xfrm>
+          <a:prstGeom prst="rect">
+            <a:avLst/>
+          </a:prstGeom>
+        </p:spPr>
+      </p:pic>
+      <p:sp>
+        <p:nvSpPr>
+          <p:cNvPr id="23" name="CasellaDiTesto 22">
+            <a:extLst>
+              <a:ext uri="{FF2B5EF4-FFF2-40B4-BE49-F238E27FC236}">
+                <a16:creationId xmlns:a16="http://schemas.microsoft.com/office/drawing/2014/main" id="{8C9B3F7C-E1B7-421E-1A4B-FB001D0DC358}"/>
+              </a:ext>
+            </a:extLst>
+          </p:cNvPr>
+          <p:cNvSpPr txBox="1"/>
+          <p:nvPr/>
+        </p:nvSpPr>
+        <p:spPr>
+          <a:xfrm>
+            <a:off x="3189246" y="3803848"/>
+            <a:ext cx="3826688" cy="523220"/>
+          </a:xfrm>
+          <a:prstGeom prst="rect">
+            <a:avLst/>
+          </a:prstGeom>
+          <a:noFill/>
+        </p:spPr>
+        <p:txBody>
+          <a:bodyPr wrap="square" rtlCol="0">
+            <a:spAutoFit/>
+          </a:bodyPr>
+          <a:lstStyle/>
+          <a:p>
+            <a:r>
+              <a:rPr lang="it-IT" dirty="0"/>
+              <a:t>PYTHON, VISUAL STUDIO CODE e FLASK per il </a:t>
+            </a:r>
+            <a:r>
+              <a:rPr lang="it-IT" dirty="0" err="1"/>
+              <a:t>backend</a:t>
+            </a:r>
+            <a:endParaRPr lang="it-IT" dirty="0"/>
+          </a:p>
+        </p:txBody>
+      </p:sp>
+    </p:spTree>
+    <p:extLst>
+      <p:ext uri="{BB962C8B-B14F-4D97-AF65-F5344CB8AC3E}">
+        <p14:creationId xmlns:p14="http://schemas.microsoft.com/office/powerpoint/2010/main" val="771372972"/>
+      </p:ext>
+    </p:extLst>
+  </p:cSld>
+  <p:clrMapOvr>
+    <a:masterClrMapping/>
+  </p:clrMapOvr>
+  <p:timing>
+    <p:tnLst>
+      <p:par>
+        <p:cTn id="1" dur="indefinite" restart="never" nodeType="tmRoot">
+          <p:childTnLst>
+            <p:seq concurrent="1" nextAc="seek">
+              <p:cTn id="2" dur="indefinite" nodeType="mainSeq">
+                <p:childTnLst>
+                  <p:par>
+                    <p:cTn id="3" fill="hold">
+                      <p:stCondLst>
+                        <p:cond delay="indefinite"/>
+                      </p:stCondLst>
+                      <p:childTnLst>
+                        <p:par>
+                          <p:cTn id="4" fill="hold">
+                            <p:stCondLst>
+                              <p:cond delay="0"/>
+                            </p:stCondLst>
+                            <p:childTnLst>
+                              <p:par>
+                                <p:cTn id="5" presetID="42" presetClass="entr" presetSubtype="0" fill="hold" nodeType="clickEffect">
+                                  <p:stCondLst>
+                                    <p:cond delay="0"/>
+                                  </p:stCondLst>
+                                  <p:childTnLst>
+                                    <p:set>
+                                      <p:cBhvr>
+                                        <p:cTn id="6" dur="1" fill="hold">
+                                          <p:stCondLst>
+                                            <p:cond delay="0"/>
+                                          </p:stCondLst>
+                                        </p:cTn>
+                                        <p:tgtEl>
+                                          <p:spTgt spid="10"/>
+                                        </p:tgtEl>
+                                        <p:attrNameLst>
+                                          <p:attrName>style.visibility</p:attrName>
+                                        </p:attrNameLst>
+                                      </p:cBhvr>
+                                      <p:to>
+                                        <p:strVal val="visible"/>
+                                      </p:to>
+                                    </p:set>
+                                    <p:animEffect transition="in" filter="fade">
+                                      <p:cBhvr>
+                                        <p:cTn id="7" dur="1000"/>
+                                        <p:tgtEl>
+                                          <p:spTgt spid="10"/>
+                                        </p:tgtEl>
+                                      </p:cBhvr>
+                                    </p:animEffect>
+                                    <p:anim calcmode="lin" valueType="num">
+                                      <p:cBhvr>
+                                        <p:cTn id="8" dur="1000" fill="hold"/>
+                                        <p:tgtEl>
+                                          <p:spTgt spid="10"/>
+                                        </p:tgtEl>
+                                        <p:attrNameLst>
+                                          <p:attrName>ppt_x</p:attrName>
+                                        </p:attrNameLst>
+                                      </p:cBhvr>
+                                      <p:tavLst>
+                                        <p:tav tm="0">
+                                          <p:val>
+                                            <p:strVal val="#ppt_x"/>
+                                          </p:val>
+                                        </p:tav>
+                                        <p:tav tm="100000">
+                                          <p:val>
+                                            <p:strVal val="#ppt_x"/>
+                                          </p:val>
+                                        </p:tav>
+                                      </p:tavLst>
+                                    </p:anim>
+                                    <p:anim calcmode="lin" valueType="num">
+                                      <p:cBhvr>
+                                        <p:cTn id="9" dur="1000" fill="hold"/>
+                                        <p:tgtEl>
+                                          <p:spTgt spid="10"/>
+                                        </p:tgtEl>
+                                        <p:attrNameLst>
+                                          <p:attrName>ppt_y</p:attrName>
+                                        </p:attrNameLst>
+                                      </p:cBhvr>
+                                      <p:tavLst>
+                                        <p:tav tm="0">
+                                          <p:val>
+                                            <p:strVal val="#ppt_y+.1"/>
+                                          </p:val>
+                                        </p:tav>
+                                        <p:tav tm="100000">
+                                          <p:val>
+                                            <p:strVal val="#ppt_y"/>
+                                          </p:val>
+                                        </p:tav>
+                                      </p:tavLst>
+                                    </p:anim>
+                                  </p:childTnLst>
+                                </p:cTn>
+                              </p:par>
+                              <p:par>
+                                <p:cTn id="10" presetID="42" presetClass="entr" presetSubtype="0" fill="hold" grpId="0" nodeType="withEffect">
+                                  <p:stCondLst>
+                                    <p:cond delay="0"/>
+                                  </p:stCondLst>
+                                  <p:childTnLst>
+                                    <p:set>
+                                      <p:cBhvr>
+                                        <p:cTn id="11" dur="1" fill="hold">
+                                          <p:stCondLst>
+                                            <p:cond delay="0"/>
+                                          </p:stCondLst>
+                                        </p:cTn>
+                                        <p:tgtEl>
+                                          <p:spTgt spid="11"/>
+                                        </p:tgtEl>
+                                        <p:attrNameLst>
+                                          <p:attrName>style.visibility</p:attrName>
+                                        </p:attrNameLst>
+                                      </p:cBhvr>
+                                      <p:to>
+                                        <p:strVal val="visible"/>
+                                      </p:to>
+                                    </p:set>
+                                    <p:animEffect transition="in" filter="fade">
+                                      <p:cBhvr>
+                                        <p:cTn id="12" dur="1000"/>
+                                        <p:tgtEl>
+                                          <p:spTgt spid="11"/>
+                                        </p:tgtEl>
+                                      </p:cBhvr>
+                                    </p:animEffect>
+                                    <p:anim calcmode="lin" valueType="num">
+                                      <p:cBhvr>
+                                        <p:cTn id="13" dur="1000" fill="hold"/>
+                                        <p:tgtEl>
+                                          <p:spTgt spid="11"/>
+                                        </p:tgtEl>
+                                        <p:attrNameLst>
+                                          <p:attrName>ppt_x</p:attrName>
+                                        </p:attrNameLst>
+                                      </p:cBhvr>
+                                      <p:tavLst>
+                                        <p:tav tm="0">
+                                          <p:val>
+                                            <p:strVal val="#ppt_x"/>
+                                          </p:val>
+                                        </p:tav>
+                                        <p:tav tm="100000">
+                                          <p:val>
+                                            <p:strVal val="#ppt_x"/>
+                                          </p:val>
+                                        </p:tav>
+                                      </p:tavLst>
+                                    </p:anim>
+                                    <p:anim calcmode="lin" valueType="num">
+                                      <p:cBhvr>
+                                        <p:cTn id="14" dur="1000" fill="hold"/>
+                                        <p:tgtEl>
+                                          <p:spTgt spid="11"/>
+                                        </p:tgtEl>
+                                        <p:attrNameLst>
+                                          <p:attrName>ppt_y</p:attrName>
+                                        </p:attrNameLst>
+                                      </p:cBhvr>
+                                      <p:tavLst>
+                                        <p:tav tm="0">
+                                          <p:val>
+                                            <p:strVal val="#ppt_y+.1"/>
+                                          </p:val>
+                                        </p:tav>
+                                        <p:tav tm="100000">
+                                          <p:val>
+                                            <p:strVal val="#ppt_y"/>
+                                          </p:val>
+                                        </p:tav>
+                                      </p:tavLst>
+                                    </p:anim>
+                                  </p:childTnLst>
+                                </p:cTn>
+                              </p:par>
+                            </p:childTnLst>
+                          </p:cTn>
+                        </p:par>
+                      </p:childTnLst>
+                    </p:cTn>
+                  </p:par>
+                  <p:par>
+                    <p:cTn id="15" fill="hold">
+                      <p:stCondLst>
+                        <p:cond delay="indefinite"/>
+                      </p:stCondLst>
+                      <p:childTnLst>
+                        <p:par>
+                          <p:cTn id="16" fill="hold">
+                            <p:stCondLst>
+                              <p:cond delay="0"/>
+                            </p:stCondLst>
+                            <p:childTnLst>
+                              <p:par>
+                                <p:cTn id="17" presetID="42" presetClass="entr" presetSubtype="0" fill="hold" nodeType="clickEffect">
+                                  <p:stCondLst>
+                                    <p:cond delay="0"/>
+                                  </p:stCondLst>
+                                  <p:childTnLst>
+                                    <p:set>
+                                      <p:cBhvr>
+                                        <p:cTn id="18" dur="1" fill="hold">
+                                          <p:stCondLst>
+                                            <p:cond delay="0"/>
+                                          </p:stCondLst>
+                                        </p:cTn>
+                                        <p:tgtEl>
+                                          <p:spTgt spid="13"/>
+                                        </p:tgtEl>
+                                        <p:attrNameLst>
+                                          <p:attrName>style.visibility</p:attrName>
+                                        </p:attrNameLst>
+                                      </p:cBhvr>
+                                      <p:to>
+                                        <p:strVal val="visible"/>
+                                      </p:to>
+                                    </p:set>
+                                    <p:animEffect transition="in" filter="fade">
+                                      <p:cBhvr>
+                                        <p:cTn id="19" dur="1000"/>
+                                        <p:tgtEl>
+                                          <p:spTgt spid="13"/>
+                                        </p:tgtEl>
+                                      </p:cBhvr>
+                                    </p:animEffect>
+                                    <p:anim calcmode="lin" valueType="num">
+                                      <p:cBhvr>
+                                        <p:cTn id="20" dur="1000" fill="hold"/>
+                                        <p:tgtEl>
+                                          <p:spTgt spid="13"/>
+                                        </p:tgtEl>
+                                        <p:attrNameLst>
+                                          <p:attrName>ppt_x</p:attrName>
+                                        </p:attrNameLst>
+                                      </p:cBhvr>
+                                      <p:tavLst>
+                                        <p:tav tm="0">
+                                          <p:val>
+                                            <p:strVal val="#ppt_x"/>
+                                          </p:val>
+                                        </p:tav>
+                                        <p:tav tm="100000">
+                                          <p:val>
+                                            <p:strVal val="#ppt_x"/>
+                                          </p:val>
+                                        </p:tav>
+                                      </p:tavLst>
+                                    </p:anim>
+                                    <p:anim calcmode="lin" valueType="num">
+                                      <p:cBhvr>
+                                        <p:cTn id="21" dur="1000" fill="hold"/>
+                                        <p:tgtEl>
+                                          <p:spTgt spid="13"/>
+                                        </p:tgtEl>
+                                        <p:attrNameLst>
+                                          <p:attrName>ppt_y</p:attrName>
+                                        </p:attrNameLst>
+                                      </p:cBhvr>
+                                      <p:tavLst>
+                                        <p:tav tm="0">
+                                          <p:val>
+                                            <p:strVal val="#ppt_y+.1"/>
+                                          </p:val>
+                                        </p:tav>
+                                        <p:tav tm="100000">
+                                          <p:val>
+                                            <p:strVal val="#ppt_y"/>
+                                          </p:val>
+                                        </p:tav>
+                                      </p:tavLst>
+                                    </p:anim>
+                                  </p:childTnLst>
+                                </p:cTn>
+                              </p:par>
+                              <p:par>
+                                <p:cTn id="22" presetID="42" presetClass="entr" presetSubtype="0" fill="hold" nodeType="withEffect">
+                                  <p:stCondLst>
+                                    <p:cond delay="0"/>
+                                  </p:stCondLst>
+                                  <p:childTnLst>
+                                    <p:set>
+                                      <p:cBhvr>
+                                        <p:cTn id="23" dur="1" fill="hold">
+                                          <p:stCondLst>
+                                            <p:cond delay="0"/>
+                                          </p:stCondLst>
+                                        </p:cTn>
+                                        <p:tgtEl>
+                                          <p:spTgt spid="15"/>
+                                        </p:tgtEl>
+                                        <p:attrNameLst>
+                                          <p:attrName>style.visibility</p:attrName>
+                                        </p:attrNameLst>
+                                      </p:cBhvr>
+                                      <p:to>
+                                        <p:strVal val="visible"/>
+                                      </p:to>
+                                    </p:set>
+                                    <p:animEffect transition="in" filter="fade">
+                                      <p:cBhvr>
+                                        <p:cTn id="24" dur="1000"/>
+                                        <p:tgtEl>
+                                          <p:spTgt spid="15"/>
+                                        </p:tgtEl>
+                                      </p:cBhvr>
+                                    </p:animEffect>
+                                    <p:anim calcmode="lin" valueType="num">
+                                      <p:cBhvr>
+                                        <p:cTn id="25" dur="1000" fill="hold"/>
+                                        <p:tgtEl>
+                                          <p:spTgt spid="15"/>
+                                        </p:tgtEl>
+                                        <p:attrNameLst>
+                                          <p:attrName>ppt_x</p:attrName>
+                                        </p:attrNameLst>
+                                      </p:cBhvr>
+                                      <p:tavLst>
+                                        <p:tav tm="0">
+                                          <p:val>
+                                            <p:strVal val="#ppt_x"/>
+                                          </p:val>
+                                        </p:tav>
+                                        <p:tav tm="100000">
+                                          <p:val>
+                                            <p:strVal val="#ppt_x"/>
+                                          </p:val>
+                                        </p:tav>
+                                      </p:tavLst>
+                                    </p:anim>
+                                    <p:anim calcmode="lin" valueType="num">
+                                      <p:cBhvr>
+                                        <p:cTn id="26" dur="1000" fill="hold"/>
+                                        <p:tgtEl>
+                                          <p:spTgt spid="15"/>
+                                        </p:tgtEl>
+                                        <p:attrNameLst>
+                                          <p:attrName>ppt_y</p:attrName>
+                                        </p:attrNameLst>
+                                      </p:cBhvr>
+                                      <p:tavLst>
+                                        <p:tav tm="0">
+                                          <p:val>
+                                            <p:strVal val="#ppt_y+.1"/>
+                                          </p:val>
+                                        </p:tav>
+                                        <p:tav tm="100000">
+                                          <p:val>
+                                            <p:strVal val="#ppt_y"/>
+                                          </p:val>
+                                        </p:tav>
+                                      </p:tavLst>
+                                    </p:anim>
+                                  </p:childTnLst>
+                                </p:cTn>
+                              </p:par>
+                              <p:par>
+                                <p:cTn id="27" presetID="42" presetClass="entr" presetSubtype="0" fill="hold" grpId="0" nodeType="withEffect">
+                                  <p:stCondLst>
+                                    <p:cond delay="0"/>
+                                  </p:stCondLst>
+                                  <p:childTnLst>
+                                    <p:set>
+                                      <p:cBhvr>
+                                        <p:cTn id="28" dur="1" fill="hold">
+                                          <p:stCondLst>
+                                            <p:cond delay="0"/>
+                                          </p:stCondLst>
+                                        </p:cTn>
+                                        <p:tgtEl>
+                                          <p:spTgt spid="16"/>
+                                        </p:tgtEl>
+                                        <p:attrNameLst>
+                                          <p:attrName>style.visibility</p:attrName>
+                                        </p:attrNameLst>
+                                      </p:cBhvr>
+                                      <p:to>
+                                        <p:strVal val="visible"/>
+                                      </p:to>
+                                    </p:set>
+                                    <p:animEffect transition="in" filter="fade">
+                                      <p:cBhvr>
+                                        <p:cTn id="29" dur="1000"/>
+                                        <p:tgtEl>
+                                          <p:spTgt spid="16"/>
+                                        </p:tgtEl>
+                                      </p:cBhvr>
+                                    </p:animEffect>
+                                    <p:anim calcmode="lin" valueType="num">
+                                      <p:cBhvr>
+                                        <p:cTn id="30" dur="1000" fill="hold"/>
+                                        <p:tgtEl>
+                                          <p:spTgt spid="16"/>
+                                        </p:tgtEl>
+                                        <p:attrNameLst>
+                                          <p:attrName>ppt_x</p:attrName>
+                                        </p:attrNameLst>
+                                      </p:cBhvr>
+                                      <p:tavLst>
+                                        <p:tav tm="0">
+                                          <p:val>
+                                            <p:strVal val="#ppt_x"/>
+                                          </p:val>
+                                        </p:tav>
+                                        <p:tav tm="100000">
+                                          <p:val>
+                                            <p:strVal val="#ppt_x"/>
+                                          </p:val>
+                                        </p:tav>
+                                      </p:tavLst>
+                                    </p:anim>
+                                    <p:anim calcmode="lin" valueType="num">
+                                      <p:cBhvr>
+                                        <p:cTn id="31" dur="1000" fill="hold"/>
+                                        <p:tgtEl>
+                                          <p:spTgt spid="16"/>
+                                        </p:tgtEl>
+                                        <p:attrNameLst>
+                                          <p:attrName>ppt_y</p:attrName>
+                                        </p:attrNameLst>
+                                      </p:cBhvr>
+                                      <p:tavLst>
+                                        <p:tav tm="0">
+                                          <p:val>
+                                            <p:strVal val="#ppt_y+.1"/>
+                                          </p:val>
+                                        </p:tav>
+                                        <p:tav tm="100000">
+                                          <p:val>
+                                            <p:strVal val="#ppt_y"/>
+                                          </p:val>
+                                        </p:tav>
+                                      </p:tavLst>
+                                    </p:anim>
+                                  </p:childTnLst>
+                                </p:cTn>
+                              </p:par>
+                            </p:childTnLst>
+                          </p:cTn>
+                        </p:par>
+                      </p:childTnLst>
+                    </p:cTn>
+                  </p:par>
+                  <p:par>
+                    <p:cTn id="32" fill="hold">
+                      <p:stCondLst>
+                        <p:cond delay="indefinite"/>
+                      </p:stCondLst>
+                      <p:childTnLst>
+                        <p:par>
+                          <p:cTn id="33" fill="hold">
+                            <p:stCondLst>
+                              <p:cond delay="0"/>
+                            </p:stCondLst>
+                            <p:childTnLst>
+                              <p:par>
+                                <p:cTn id="34" presetID="42" presetClass="entr" presetSubtype="0" fill="hold" nodeType="clickEffect">
+                                  <p:stCondLst>
+                                    <p:cond delay="0"/>
+                                  </p:stCondLst>
+                                  <p:childTnLst>
+                                    <p:set>
+                                      <p:cBhvr>
+                                        <p:cTn id="35" dur="1" fill="hold">
+                                          <p:stCondLst>
+                                            <p:cond delay="0"/>
+                                          </p:stCondLst>
+                                        </p:cTn>
+                                        <p:tgtEl>
+                                          <p:spTgt spid="7"/>
+                                        </p:tgtEl>
+                                        <p:attrNameLst>
+                                          <p:attrName>style.visibility</p:attrName>
+                                        </p:attrNameLst>
+                                      </p:cBhvr>
+                                      <p:to>
+                                        <p:strVal val="visible"/>
+                                      </p:to>
+                                    </p:set>
+                                    <p:animEffect transition="in" filter="fade">
+                                      <p:cBhvr>
+                                        <p:cTn id="36" dur="1000"/>
+                                        <p:tgtEl>
+                                          <p:spTgt spid="7"/>
+                                        </p:tgtEl>
+                                      </p:cBhvr>
+                                    </p:animEffect>
+                                    <p:anim calcmode="lin" valueType="num">
+                                      <p:cBhvr>
+                                        <p:cTn id="37" dur="1000" fill="hold"/>
+                                        <p:tgtEl>
+                                          <p:spTgt spid="7"/>
+                                        </p:tgtEl>
+                                        <p:attrNameLst>
+                                          <p:attrName>ppt_x</p:attrName>
+                                        </p:attrNameLst>
+                                      </p:cBhvr>
+                                      <p:tavLst>
+                                        <p:tav tm="0">
+                                          <p:val>
+                                            <p:strVal val="#ppt_x"/>
+                                          </p:val>
+                                        </p:tav>
+                                        <p:tav tm="100000">
+                                          <p:val>
+                                            <p:strVal val="#ppt_x"/>
+                                          </p:val>
+                                        </p:tav>
+                                      </p:tavLst>
+                                    </p:anim>
+                                    <p:anim calcmode="lin" valueType="num">
+                                      <p:cBhvr>
+                                        <p:cTn id="38" dur="1000" fill="hold"/>
+                                        <p:tgtEl>
+                                          <p:spTgt spid="7"/>
+                                        </p:tgtEl>
+                                        <p:attrNameLst>
+                                          <p:attrName>ppt_y</p:attrName>
+                                        </p:attrNameLst>
+                                      </p:cBhvr>
+                                      <p:tavLst>
+                                        <p:tav tm="0">
+                                          <p:val>
+                                            <p:strVal val="#ppt_y+.1"/>
+                                          </p:val>
+                                        </p:tav>
+                                        <p:tav tm="100000">
+                                          <p:val>
+                                            <p:strVal val="#ppt_y"/>
+                                          </p:val>
+                                        </p:tav>
+                                      </p:tavLst>
+                                    </p:anim>
+                                  </p:childTnLst>
+                                </p:cTn>
+                              </p:par>
+                              <p:par>
+                                <p:cTn id="39" presetID="42" presetClass="entr" presetSubtype="0" fill="hold" nodeType="withEffect">
+                                  <p:stCondLst>
+                                    <p:cond delay="0"/>
+                                  </p:stCondLst>
+                                  <p:childTnLst>
+                                    <p:set>
+                                      <p:cBhvr>
+                                        <p:cTn id="40" dur="1" fill="hold">
+                                          <p:stCondLst>
+                                            <p:cond delay="0"/>
+                                          </p:stCondLst>
+                                        </p:cTn>
+                                        <p:tgtEl>
+                                          <p:spTgt spid="5"/>
+                                        </p:tgtEl>
+                                        <p:attrNameLst>
+                                          <p:attrName>style.visibility</p:attrName>
+                                        </p:attrNameLst>
+                                      </p:cBhvr>
+                                      <p:to>
+                                        <p:strVal val="visible"/>
+                                      </p:to>
+                                    </p:set>
+                                    <p:animEffect transition="in" filter="fade">
+                                      <p:cBhvr>
+                                        <p:cTn id="41" dur="1000"/>
+                                        <p:tgtEl>
+                                          <p:spTgt spid="5"/>
+                                        </p:tgtEl>
+                                      </p:cBhvr>
+                                    </p:animEffect>
+                                    <p:anim calcmode="lin" valueType="num">
+                                      <p:cBhvr>
+                                        <p:cTn id="42" dur="1000" fill="hold"/>
+                                        <p:tgtEl>
+                                          <p:spTgt spid="5"/>
+                                        </p:tgtEl>
+                                        <p:attrNameLst>
+                                          <p:attrName>ppt_x</p:attrName>
+                                        </p:attrNameLst>
+                                      </p:cBhvr>
+                                      <p:tavLst>
+                                        <p:tav tm="0">
+                                          <p:val>
+                                            <p:strVal val="#ppt_x"/>
+                                          </p:val>
+                                        </p:tav>
+                                        <p:tav tm="100000">
+                                          <p:val>
+                                            <p:strVal val="#ppt_x"/>
+                                          </p:val>
+                                        </p:tav>
+                                      </p:tavLst>
+                                    </p:anim>
+                                    <p:anim calcmode="lin" valueType="num">
+                                      <p:cBhvr>
+                                        <p:cTn id="43" dur="1000" fill="hold"/>
+                                        <p:tgtEl>
+                                          <p:spTgt spid="5"/>
+                                        </p:tgtEl>
+                                        <p:attrNameLst>
+                                          <p:attrName>ppt_y</p:attrName>
+                                        </p:attrNameLst>
+                                      </p:cBhvr>
+                                      <p:tavLst>
+                                        <p:tav tm="0">
+                                          <p:val>
+                                            <p:strVal val="#ppt_y+.1"/>
+                                          </p:val>
+                                        </p:tav>
+                                        <p:tav tm="100000">
+                                          <p:val>
+                                            <p:strVal val="#ppt_y"/>
+                                          </p:val>
+                                        </p:tav>
+                                      </p:tavLst>
+                                    </p:anim>
+                                  </p:childTnLst>
+                                </p:cTn>
+                              </p:par>
+                              <p:par>
+                                <p:cTn id="44" presetID="42" presetClass="entr" presetSubtype="0" fill="hold" grpId="0" nodeType="withEffect">
+                                  <p:stCondLst>
+                                    <p:cond delay="0"/>
+                                  </p:stCondLst>
+                                  <p:childTnLst>
+                                    <p:set>
+                                      <p:cBhvr>
+                                        <p:cTn id="45" dur="1" fill="hold">
+                                          <p:stCondLst>
+                                            <p:cond delay="0"/>
+                                          </p:stCondLst>
+                                        </p:cTn>
+                                        <p:tgtEl>
+                                          <p:spTgt spid="8"/>
+                                        </p:tgtEl>
+                                        <p:attrNameLst>
+                                          <p:attrName>style.visibility</p:attrName>
+                                        </p:attrNameLst>
+                                      </p:cBhvr>
+                                      <p:to>
+                                        <p:strVal val="visible"/>
+                                      </p:to>
+                                    </p:set>
+                                    <p:animEffect transition="in" filter="fade">
+                                      <p:cBhvr>
+                                        <p:cTn id="46" dur="1000"/>
+                                        <p:tgtEl>
+                                          <p:spTgt spid="8"/>
+                                        </p:tgtEl>
+                                      </p:cBhvr>
+                                    </p:animEffect>
+                                    <p:anim calcmode="lin" valueType="num">
+                                      <p:cBhvr>
+                                        <p:cTn id="47" dur="1000" fill="hold"/>
+                                        <p:tgtEl>
+                                          <p:spTgt spid="8"/>
+                                        </p:tgtEl>
+                                        <p:attrNameLst>
+                                          <p:attrName>ppt_x</p:attrName>
+                                        </p:attrNameLst>
+                                      </p:cBhvr>
+                                      <p:tavLst>
+                                        <p:tav tm="0">
+                                          <p:val>
+                                            <p:strVal val="#ppt_x"/>
+                                          </p:val>
+                                        </p:tav>
+                                        <p:tav tm="100000">
+                                          <p:val>
+                                            <p:strVal val="#ppt_x"/>
+                                          </p:val>
+                                        </p:tav>
+                                      </p:tavLst>
+                                    </p:anim>
+                                    <p:anim calcmode="lin" valueType="num">
+                                      <p:cBhvr>
+                                        <p:cTn id="48" dur="1000" fill="hold"/>
+                                        <p:tgtEl>
+                                          <p:spTgt spid="8"/>
+                                        </p:tgtEl>
+                                        <p:attrNameLst>
+                                          <p:attrName>ppt_y</p:attrName>
+                                        </p:attrNameLst>
+                                      </p:cBhvr>
+                                      <p:tavLst>
+                                        <p:tav tm="0">
+                                          <p:val>
+                                            <p:strVal val="#ppt_y+.1"/>
+                                          </p:val>
+                                        </p:tav>
+                                        <p:tav tm="100000">
+                                          <p:val>
+                                            <p:strVal val="#ppt_y"/>
+                                          </p:val>
+                                        </p:tav>
+                                      </p:tavLst>
+                                    </p:anim>
+                                  </p:childTnLst>
+                                </p:cTn>
+                              </p:par>
+                            </p:childTnLst>
+                          </p:cTn>
+                        </p:par>
+                      </p:childTnLst>
+                    </p:cTn>
+                  </p:par>
+                  <p:par>
+                    <p:cTn id="49" fill="hold">
+                      <p:stCondLst>
+                        <p:cond delay="indefinite"/>
+                      </p:stCondLst>
+                      <p:childTnLst>
+                        <p:par>
+                          <p:cTn id="50" fill="hold">
+                            <p:stCondLst>
+                              <p:cond delay="0"/>
+                            </p:stCondLst>
+                            <p:childTnLst>
+                              <p:par>
+                                <p:cTn id="51" presetID="42" presetClass="entr" presetSubtype="0" fill="hold" nodeType="clickEffect">
+                                  <p:stCondLst>
+                                    <p:cond delay="0"/>
+                                  </p:stCondLst>
+                                  <p:childTnLst>
+                                    <p:set>
+                                      <p:cBhvr>
+                                        <p:cTn id="52" dur="1" fill="hold">
+                                          <p:stCondLst>
+                                            <p:cond delay="0"/>
+                                          </p:stCondLst>
+                                        </p:cTn>
+                                        <p:tgtEl>
+                                          <p:spTgt spid="22"/>
+                                        </p:tgtEl>
+                                        <p:attrNameLst>
+                                          <p:attrName>style.visibility</p:attrName>
+                                        </p:attrNameLst>
+                                      </p:cBhvr>
+                                      <p:to>
+                                        <p:strVal val="visible"/>
+                                      </p:to>
+                                    </p:set>
+                                    <p:animEffect transition="in" filter="fade">
+                                      <p:cBhvr>
+                                        <p:cTn id="53" dur="1000"/>
+                                        <p:tgtEl>
+                                          <p:spTgt spid="22"/>
+                                        </p:tgtEl>
+                                      </p:cBhvr>
+                                    </p:animEffect>
+                                    <p:anim calcmode="lin" valueType="num">
+                                      <p:cBhvr>
+                                        <p:cTn id="54" dur="1000" fill="hold"/>
+                                        <p:tgtEl>
+                                          <p:spTgt spid="22"/>
+                                        </p:tgtEl>
+                                        <p:attrNameLst>
+                                          <p:attrName>ppt_x</p:attrName>
+                                        </p:attrNameLst>
+                                      </p:cBhvr>
+                                      <p:tavLst>
+                                        <p:tav tm="0">
+                                          <p:val>
+                                            <p:strVal val="#ppt_x"/>
+                                          </p:val>
+                                        </p:tav>
+                                        <p:tav tm="100000">
+                                          <p:val>
+                                            <p:strVal val="#ppt_x"/>
+                                          </p:val>
+                                        </p:tav>
+                                      </p:tavLst>
+                                    </p:anim>
+                                    <p:anim calcmode="lin" valueType="num">
+                                      <p:cBhvr>
+                                        <p:cTn id="55" dur="1000" fill="hold"/>
+                                        <p:tgtEl>
+                                          <p:spTgt spid="22"/>
+                                        </p:tgtEl>
+                                        <p:attrNameLst>
+                                          <p:attrName>ppt_y</p:attrName>
+                                        </p:attrNameLst>
+                                      </p:cBhvr>
+                                      <p:tavLst>
+                                        <p:tav tm="0">
+                                          <p:val>
+                                            <p:strVal val="#ppt_y+.1"/>
+                                          </p:val>
+                                        </p:tav>
+                                        <p:tav tm="100000">
+                                          <p:val>
+                                            <p:strVal val="#ppt_y"/>
+                                          </p:val>
+                                        </p:tav>
+                                      </p:tavLst>
+                                    </p:anim>
+                                  </p:childTnLst>
+                                </p:cTn>
+                              </p:par>
+                              <p:par>
+                                <p:cTn id="56" presetID="42" presetClass="entr" presetSubtype="0" fill="hold" nodeType="withEffect">
+                                  <p:stCondLst>
+                                    <p:cond delay="0"/>
+                                  </p:stCondLst>
+                                  <p:childTnLst>
+                                    <p:set>
+                                      <p:cBhvr>
+                                        <p:cTn id="57" dur="1" fill="hold">
+                                          <p:stCondLst>
+                                            <p:cond delay="0"/>
+                                          </p:stCondLst>
+                                        </p:cTn>
+                                        <p:tgtEl>
+                                          <p:spTgt spid="18"/>
+                                        </p:tgtEl>
+                                        <p:attrNameLst>
+                                          <p:attrName>style.visibility</p:attrName>
+                                        </p:attrNameLst>
+                                      </p:cBhvr>
+                                      <p:to>
+                                        <p:strVal val="visible"/>
+                                      </p:to>
+                                    </p:set>
+                                    <p:animEffect transition="in" filter="fade">
+                                      <p:cBhvr>
+                                        <p:cTn id="58" dur="1000"/>
+                                        <p:tgtEl>
+                                          <p:spTgt spid="18"/>
+                                        </p:tgtEl>
+                                      </p:cBhvr>
+                                    </p:animEffect>
+                                    <p:anim calcmode="lin" valueType="num">
+                                      <p:cBhvr>
+                                        <p:cTn id="59" dur="1000" fill="hold"/>
+                                        <p:tgtEl>
+                                          <p:spTgt spid="18"/>
+                                        </p:tgtEl>
+                                        <p:attrNameLst>
+                                          <p:attrName>ppt_x</p:attrName>
+                                        </p:attrNameLst>
+                                      </p:cBhvr>
+                                      <p:tavLst>
+                                        <p:tav tm="0">
+                                          <p:val>
+                                            <p:strVal val="#ppt_x"/>
+                                          </p:val>
+                                        </p:tav>
+                                        <p:tav tm="100000">
+                                          <p:val>
+                                            <p:strVal val="#ppt_x"/>
+                                          </p:val>
+                                        </p:tav>
+                                      </p:tavLst>
+                                    </p:anim>
+                                    <p:anim calcmode="lin" valueType="num">
+                                      <p:cBhvr>
+                                        <p:cTn id="60" dur="1000" fill="hold"/>
+                                        <p:tgtEl>
+                                          <p:spTgt spid="18"/>
+                                        </p:tgtEl>
+                                        <p:attrNameLst>
+                                          <p:attrName>ppt_y</p:attrName>
+                                        </p:attrNameLst>
+                                      </p:cBhvr>
+                                      <p:tavLst>
+                                        <p:tav tm="0">
+                                          <p:val>
+                                            <p:strVal val="#ppt_y+.1"/>
+                                          </p:val>
+                                        </p:tav>
+                                        <p:tav tm="100000">
+                                          <p:val>
+                                            <p:strVal val="#ppt_y"/>
+                                          </p:val>
+                                        </p:tav>
+                                      </p:tavLst>
+                                    </p:anim>
+                                  </p:childTnLst>
+                                </p:cTn>
+                              </p:par>
+                              <p:par>
+                                <p:cTn id="61" presetID="42" presetClass="entr" presetSubtype="0" fill="hold" nodeType="withEffect">
+                                  <p:stCondLst>
+                                    <p:cond delay="0"/>
+                                  </p:stCondLst>
+                                  <p:childTnLst>
+                                    <p:set>
+                                      <p:cBhvr>
+                                        <p:cTn id="62" dur="1" fill="hold">
+                                          <p:stCondLst>
+                                            <p:cond delay="0"/>
+                                          </p:stCondLst>
+                                        </p:cTn>
+                                        <p:tgtEl>
+                                          <p:spTgt spid="20"/>
+                                        </p:tgtEl>
+                                        <p:attrNameLst>
+                                          <p:attrName>style.visibility</p:attrName>
+                                        </p:attrNameLst>
+                                      </p:cBhvr>
+                                      <p:to>
+                                        <p:strVal val="visible"/>
+                                      </p:to>
+                                    </p:set>
+                                    <p:animEffect transition="in" filter="fade">
+                                      <p:cBhvr>
+                                        <p:cTn id="63" dur="1000"/>
+                                        <p:tgtEl>
+                                          <p:spTgt spid="20"/>
+                                        </p:tgtEl>
+                                      </p:cBhvr>
+                                    </p:animEffect>
+                                    <p:anim calcmode="lin" valueType="num">
+                                      <p:cBhvr>
+                                        <p:cTn id="64" dur="1000" fill="hold"/>
+                                        <p:tgtEl>
+                                          <p:spTgt spid="20"/>
+                                        </p:tgtEl>
+                                        <p:attrNameLst>
+                                          <p:attrName>ppt_x</p:attrName>
+                                        </p:attrNameLst>
+                                      </p:cBhvr>
+                                      <p:tavLst>
+                                        <p:tav tm="0">
+                                          <p:val>
+                                            <p:strVal val="#ppt_x"/>
+                                          </p:val>
+                                        </p:tav>
+                                        <p:tav tm="100000">
+                                          <p:val>
+                                            <p:strVal val="#ppt_x"/>
+                                          </p:val>
+                                        </p:tav>
+                                      </p:tavLst>
+                                    </p:anim>
+                                    <p:anim calcmode="lin" valueType="num">
+                                      <p:cBhvr>
+                                        <p:cTn id="65" dur="1000" fill="hold"/>
+                                        <p:tgtEl>
+                                          <p:spTgt spid="20"/>
+                                        </p:tgtEl>
+                                        <p:attrNameLst>
+                                          <p:attrName>ppt_y</p:attrName>
+                                        </p:attrNameLst>
+                                      </p:cBhvr>
+                                      <p:tavLst>
+                                        <p:tav tm="0">
+                                          <p:val>
+                                            <p:strVal val="#ppt_y+.1"/>
+                                          </p:val>
+                                        </p:tav>
+                                        <p:tav tm="100000">
+                                          <p:val>
+                                            <p:strVal val="#ppt_y"/>
+                                          </p:val>
+                                        </p:tav>
+                                      </p:tavLst>
+                                    </p:anim>
+                                  </p:childTnLst>
+                                </p:cTn>
+                              </p:par>
+                              <p:par>
+                                <p:cTn id="66" presetID="42" presetClass="entr" presetSubtype="0" fill="hold" grpId="0" nodeType="withEffect">
+                                  <p:stCondLst>
+                                    <p:cond delay="0"/>
+                                  </p:stCondLst>
+                                  <p:childTnLst>
+                                    <p:set>
+                                      <p:cBhvr>
+                                        <p:cTn id="67" dur="1" fill="hold">
+                                          <p:stCondLst>
+                                            <p:cond delay="0"/>
+                                          </p:stCondLst>
+                                        </p:cTn>
+                                        <p:tgtEl>
+                                          <p:spTgt spid="23"/>
+                                        </p:tgtEl>
+                                        <p:attrNameLst>
+                                          <p:attrName>style.visibility</p:attrName>
+                                        </p:attrNameLst>
+                                      </p:cBhvr>
+                                      <p:to>
+                                        <p:strVal val="visible"/>
+                                      </p:to>
+                                    </p:set>
+                                    <p:animEffect transition="in" filter="fade">
+                                      <p:cBhvr>
+                                        <p:cTn id="68" dur="1000"/>
+                                        <p:tgtEl>
+                                          <p:spTgt spid="23"/>
+                                        </p:tgtEl>
+                                      </p:cBhvr>
+                                    </p:animEffect>
+                                    <p:anim calcmode="lin" valueType="num">
+                                      <p:cBhvr>
+                                        <p:cTn id="69" dur="1000" fill="hold"/>
+                                        <p:tgtEl>
+                                          <p:spTgt spid="23"/>
+                                        </p:tgtEl>
+                                        <p:attrNameLst>
+                                          <p:attrName>ppt_x</p:attrName>
+                                        </p:attrNameLst>
+                                      </p:cBhvr>
+                                      <p:tavLst>
+                                        <p:tav tm="0">
+                                          <p:val>
+                                            <p:strVal val="#ppt_x"/>
+                                          </p:val>
+                                        </p:tav>
+                                        <p:tav tm="100000">
+                                          <p:val>
+                                            <p:strVal val="#ppt_x"/>
+                                          </p:val>
+                                        </p:tav>
+                                      </p:tavLst>
+                                    </p:anim>
+                                    <p:anim calcmode="lin" valueType="num">
+                                      <p:cBhvr>
+                                        <p:cTn id="70" dur="1000" fill="hold"/>
+                                        <p:tgtEl>
+                                          <p:spTgt spid="23"/>
+                                        </p:tgtEl>
+                                        <p:attrNameLst>
+                                          <p:attrName>ppt_y</p:attrName>
+                                        </p:attrNameLst>
+                                      </p:cBhvr>
+                                      <p:tavLst>
+                                        <p:tav tm="0">
+                                          <p:val>
+                                            <p:strVal val="#ppt_y+.1"/>
+                                          </p:val>
+                                        </p:tav>
+                                        <p:tav tm="100000">
+                                          <p:val>
+                                            <p:strVal val="#ppt_y"/>
+                                          </p:val>
+                                        </p:tav>
+                                      </p:tavLst>
+                                    </p:anim>
+                                  </p:childTnLst>
+                                </p:cTn>
+                              </p:par>
+                            </p:childTnLst>
+                          </p:cTn>
+                        </p:par>
+                      </p:childTnLst>
+                    </p:cTn>
+                  </p:par>
+                </p:childTnLst>
+              </p:cTn>
+              <p:prevCondLst>
+                <p:cond evt="onPrev" delay="0">
+                  <p:tgtEl>
+                    <p:sldTgt/>
+                  </p:tgtEl>
+                </p:cond>
+              </p:prevCondLst>
+              <p:nextCondLst>
+                <p:cond evt="onNext" delay="0">
+                  <p:tgtEl>
+                    <p:sldTgt/>
+                  </p:tgtEl>
+                </p:cond>
+              </p:nextCondLst>
+            </p:seq>
+          </p:childTnLst>
+        </p:cTn>
+      </p:par>
+    </p:tnLst>
+    <p:bldLst>
+      <p:bldP spid="8" grpId="0"/>
+      <p:bldP spid="11" grpId="0"/>
+      <p:bldP spid="16" grpId="0"/>
+      <p:bldP spid="23" grpId="0"/>
+    </p:bldLst>
+  </p:timing>
+</p:sld>
+</file>
+
+<file path=ppt/slides/slide8.xml><?xml version="1.0" encoding="utf-8"?>
 <p:sld xmlns:a="http://schemas.openxmlformats.org/drawingml/2006/main" xmlns:r="http://schemas.openxmlformats.org/officeDocument/2006/relationships" xmlns:p="http://schemas.openxmlformats.org/presentationml/2006/main">
   <p:cSld>
     <p:spTree>
@@ -7727,7 +12781,7 @@
 </p:sld>
 </file>
 
-<file path=ppt/slides/slide7.xml><?xml version="1.0" encoding="utf-8"?>
+<file path=ppt/slides/slide9.xml><?xml version="1.0" encoding="utf-8"?>
 <p:sld xmlns:a="http://schemas.openxmlformats.org/drawingml/2006/main" xmlns:r="http://schemas.openxmlformats.org/officeDocument/2006/relationships" xmlns:p="http://schemas.openxmlformats.org/presentationml/2006/main">
   <p:cSld>
     <p:spTree>
@@ -9364,556 +14418,6 @@
 </p:sld>
 </file>
 
-<file path=ppt/slides/slide8.xml><?xml version="1.0" encoding="utf-8"?>
-<p:sld xmlns:a="http://schemas.openxmlformats.org/drawingml/2006/main" xmlns:r="http://schemas.openxmlformats.org/officeDocument/2006/relationships" xmlns:p="http://schemas.openxmlformats.org/presentationml/2006/main">
-  <p:cSld>
-    <p:spTree>
-      <p:nvGrpSpPr>
-        <p:cNvPr id="1" name=""/>
-        <p:cNvGrpSpPr/>
-        <p:nvPr/>
-      </p:nvGrpSpPr>
-      <p:grpSpPr>
-        <a:xfrm>
-          <a:off x="0" y="0"/>
-          <a:ext cx="0" cy="0"/>
-          <a:chOff x="0" y="0"/>
-          <a:chExt cx="0" cy="0"/>
-        </a:xfrm>
-      </p:grpSpPr>
-      <p:sp>
-        <p:nvSpPr>
-          <p:cNvPr id="2" name="Titolo 1">
-            <a:extLst>
-              <a:ext uri="{FF2B5EF4-FFF2-40B4-BE49-F238E27FC236}">
-                <a16:creationId xmlns:a16="http://schemas.microsoft.com/office/drawing/2014/main" id="{F5A6D474-D27D-69CB-795C-6991DFE04FCF}"/>
-              </a:ext>
-            </a:extLst>
-          </p:cNvPr>
-          <p:cNvSpPr>
-            <a:spLocks noGrp="1"/>
-          </p:cNvSpPr>
-          <p:nvPr>
-            <p:ph type="title"/>
-          </p:nvPr>
-        </p:nvSpPr>
-        <p:spPr/>
-        <p:txBody>
-          <a:bodyPr/>
-          <a:lstStyle/>
-          <a:p>
-            <a:pPr algn="ctr"/>
-            <a:r>
-              <a:rPr lang="it-IT" dirty="0"/>
-              <a:t>SCHEMA ER</a:t>
-            </a:r>
-          </a:p>
-        </p:txBody>
-      </p:sp>
-      <p:pic>
-        <p:nvPicPr>
-          <p:cNvPr id="4" name="Immagine 3" descr="Immagine che contiene diagramma, linea, Policromia, design&#10;&#10;Il contenuto generato dall'IA potrebbe non essere corretto.">
-            <a:extLst>
-              <a:ext uri="{FF2B5EF4-FFF2-40B4-BE49-F238E27FC236}">
-                <a16:creationId xmlns:a16="http://schemas.microsoft.com/office/drawing/2014/main" id="{BE05FA8C-E45B-A594-DA54-61D463F2B37A}"/>
-              </a:ext>
-            </a:extLst>
-          </p:cNvPr>
-          <p:cNvPicPr>
-            <a:picLocks noChangeAspect="1"/>
-          </p:cNvPicPr>
-          <p:nvPr/>
-        </p:nvPicPr>
-        <p:blipFill>
-          <a:blip r:embed="rId2"/>
-          <a:stretch>
-            <a:fillRect/>
-          </a:stretch>
-        </p:blipFill>
-        <p:spPr>
-          <a:xfrm>
-            <a:off x="1455514" y="948326"/>
-            <a:ext cx="6610455" cy="3984806"/>
-          </a:xfrm>
-          <a:prstGeom prst="rect">
-            <a:avLst/>
-          </a:prstGeom>
-        </p:spPr>
-      </p:pic>
-    </p:spTree>
-    <p:extLst>
-      <p:ext uri="{BB962C8B-B14F-4D97-AF65-F5344CB8AC3E}">
-        <p14:creationId xmlns:p14="http://schemas.microsoft.com/office/powerpoint/2010/main" val="4170710722"/>
-      </p:ext>
-    </p:extLst>
-  </p:cSld>
-  <p:clrMapOvr>
-    <a:masterClrMapping/>
-  </p:clrMapOvr>
-  <p:timing>
-    <p:tnLst>
-      <p:par>
-        <p:cTn id="1" dur="indefinite" restart="never" nodeType="tmRoot">
-          <p:childTnLst>
-            <p:seq concurrent="1" nextAc="seek">
-              <p:cTn id="2" dur="indefinite" nodeType="mainSeq">
-                <p:childTnLst>
-                  <p:par>
-                    <p:cTn id="3" fill="hold">
-                      <p:stCondLst>
-                        <p:cond delay="indefinite"/>
-                      </p:stCondLst>
-                      <p:childTnLst>
-                        <p:par>
-                          <p:cTn id="4" fill="hold">
-                            <p:stCondLst>
-                              <p:cond delay="0"/>
-                            </p:stCondLst>
-                            <p:childTnLst>
-                              <p:par>
-                                <p:cTn id="5" presetID="22" presetClass="entr" presetSubtype="4" fill="hold" nodeType="clickEffect">
-                                  <p:stCondLst>
-                                    <p:cond delay="0"/>
-                                  </p:stCondLst>
-                                  <p:childTnLst>
-                                    <p:set>
-                                      <p:cBhvr>
-                                        <p:cTn id="6" dur="1" fill="hold">
-                                          <p:stCondLst>
-                                            <p:cond delay="0"/>
-                                          </p:stCondLst>
-                                        </p:cTn>
-                                        <p:tgtEl>
-                                          <p:spTgt spid="4"/>
-                                        </p:tgtEl>
-                                        <p:attrNameLst>
-                                          <p:attrName>style.visibility</p:attrName>
-                                        </p:attrNameLst>
-                                      </p:cBhvr>
-                                      <p:to>
-                                        <p:strVal val="visible"/>
-                                      </p:to>
-                                    </p:set>
-                                    <p:animEffect transition="in" filter="wipe(down)">
-                                      <p:cBhvr>
-                                        <p:cTn id="7" dur="500"/>
-                                        <p:tgtEl>
-                                          <p:spTgt spid="4"/>
-                                        </p:tgtEl>
-                                      </p:cBhvr>
-                                    </p:animEffect>
-                                  </p:childTnLst>
-                                </p:cTn>
-                              </p:par>
-                            </p:childTnLst>
-                          </p:cTn>
-                        </p:par>
-                      </p:childTnLst>
-                    </p:cTn>
-                  </p:par>
-                </p:childTnLst>
-              </p:cTn>
-              <p:prevCondLst>
-                <p:cond evt="onPrev" delay="0">
-                  <p:tgtEl>
-                    <p:sldTgt/>
-                  </p:tgtEl>
-                </p:cond>
-              </p:prevCondLst>
-              <p:nextCondLst>
-                <p:cond evt="onNext" delay="0">
-                  <p:tgtEl>
-                    <p:sldTgt/>
-                  </p:tgtEl>
-                </p:cond>
-              </p:nextCondLst>
-            </p:seq>
-          </p:childTnLst>
-        </p:cTn>
-      </p:par>
-    </p:tnLst>
-  </p:timing>
-</p:sld>
-</file>
-
-<file path=ppt/slides/slide9.xml><?xml version="1.0" encoding="utf-8"?>
-<p:sld xmlns:a="http://schemas.openxmlformats.org/drawingml/2006/main" xmlns:r="http://schemas.openxmlformats.org/officeDocument/2006/relationships" xmlns:p="http://schemas.openxmlformats.org/presentationml/2006/main">
-  <p:cSld>
-    <p:spTree>
-      <p:nvGrpSpPr>
-        <p:cNvPr id="1" name="Shape 82"/>
-        <p:cNvGrpSpPr/>
-        <p:nvPr/>
-      </p:nvGrpSpPr>
-      <p:grpSpPr>
-        <a:xfrm>
-          <a:off x="0" y="0"/>
-          <a:ext cx="0" cy="0"/>
-          <a:chOff x="0" y="0"/>
-          <a:chExt cx="0" cy="0"/>
-        </a:xfrm>
-      </p:grpSpPr>
-      <p:sp>
-        <p:nvSpPr>
-          <p:cNvPr id="83" name="Google Shape;83;p17"/>
-          <p:cNvSpPr txBox="1">
-            <a:spLocks noGrp="1"/>
-          </p:cNvSpPr>
-          <p:nvPr>
-            <p:ph type="body" idx="1"/>
-          </p:nvPr>
-        </p:nvSpPr>
-        <p:spPr>
-          <a:xfrm>
-            <a:off x="311700" y="1171675"/>
-            <a:ext cx="3999900" cy="3397200"/>
-          </a:xfrm>
-          <a:prstGeom prst="rect">
-            <a:avLst/>
-          </a:prstGeom>
-        </p:spPr>
-        <p:txBody>
-          <a:bodyPr spcFirstLastPara="1" wrap="square" lIns="91425" tIns="91425" rIns="91425" bIns="91425" anchor="t" anchorCtr="0">
-            <a:noAutofit/>
-          </a:bodyPr>
-          <a:lstStyle/>
-          <a:p>
-            <a:pPr marL="0" lvl="0" indent="0" algn="l" rtl="0">
-              <a:spcBef>
-                <a:spcPts val="0"/>
-              </a:spcBef>
-              <a:spcAft>
-                <a:spcPts val="0"/>
-              </a:spcAft>
-              <a:buNone/>
-            </a:pPr>
-            <a:r>
-              <a:rPr lang="it" sz="1800" b="1" dirty="0"/>
-              <a:t>schermate:</a:t>
-            </a:r>
-          </a:p>
-          <a:p>
-            <a:pPr marL="0" lvl="0" indent="0" algn="l" rtl="0">
-              <a:spcBef>
-                <a:spcPts val="0"/>
-              </a:spcBef>
-              <a:spcAft>
-                <a:spcPts val="0"/>
-              </a:spcAft>
-              <a:buNone/>
-            </a:pPr>
-            <a:endParaRPr lang="it-IT" sz="1800" b="1" dirty="0"/>
-          </a:p>
-          <a:p>
-            <a:pPr marL="457200" lvl="0" indent="-342900" algn="l" rtl="0">
-              <a:spcBef>
-                <a:spcPts val="1600"/>
-              </a:spcBef>
-              <a:spcAft>
-                <a:spcPts val="0"/>
-              </a:spcAft>
-              <a:buSzPts val="1800"/>
-              <a:buChar char="●"/>
-            </a:pPr>
-            <a:r>
-              <a:rPr lang="it" sz="1800" b="1" dirty="0"/>
-              <a:t>Login utente</a:t>
-            </a:r>
-            <a:endParaRPr sz="1800" b="1" dirty="0"/>
-          </a:p>
-          <a:p>
-            <a:pPr marL="457200" lvl="0" indent="-342900" algn="l" rtl="0">
-              <a:spcBef>
-                <a:spcPts val="0"/>
-              </a:spcBef>
-              <a:spcAft>
-                <a:spcPts val="0"/>
-              </a:spcAft>
-              <a:buSzPts val="1800"/>
-              <a:buChar char="●"/>
-            </a:pPr>
-            <a:r>
-              <a:rPr lang="it" sz="1800" b="1" dirty="0"/>
-              <a:t>Registrazione utente</a:t>
-            </a:r>
-            <a:endParaRPr sz="1800" b="1" dirty="0"/>
-          </a:p>
-          <a:p>
-            <a:pPr marL="457200" lvl="0" indent="-342900" algn="l" rtl="0">
-              <a:spcBef>
-                <a:spcPts val="0"/>
-              </a:spcBef>
-              <a:spcAft>
-                <a:spcPts val="0"/>
-              </a:spcAft>
-              <a:buSzPts val="1800"/>
-              <a:buChar char="●"/>
-            </a:pPr>
-            <a:r>
-              <a:rPr lang="it-IT" sz="1800" b="1" dirty="0"/>
-              <a:t>Home</a:t>
-            </a:r>
-            <a:endParaRPr lang="it" sz="1800" b="1" dirty="0"/>
-          </a:p>
-          <a:p>
-            <a:pPr marL="457200" lvl="0" indent="-342900" algn="l" rtl="0">
-              <a:spcBef>
-                <a:spcPts val="0"/>
-              </a:spcBef>
-              <a:spcAft>
-                <a:spcPts val="0"/>
-              </a:spcAft>
-              <a:buSzPts val="1800"/>
-              <a:buChar char="●"/>
-            </a:pPr>
-            <a:r>
-              <a:rPr lang="it-IT" sz="1800" b="1" dirty="0"/>
-              <a:t>Cartella Clinica</a:t>
-            </a:r>
-          </a:p>
-          <a:p>
-            <a:pPr marL="457200" lvl="0" indent="-342900" algn="l" rtl="0">
-              <a:spcBef>
-                <a:spcPts val="0"/>
-              </a:spcBef>
-              <a:spcAft>
-                <a:spcPts val="0"/>
-              </a:spcAft>
-              <a:buSzPts val="1800"/>
-              <a:buChar char="●"/>
-            </a:pPr>
-            <a:r>
-              <a:rPr lang="it-IT" sz="1800" b="1" dirty="0"/>
-              <a:t>Profilo animale</a:t>
-            </a:r>
-          </a:p>
-          <a:p>
-            <a:pPr marL="457200" lvl="0" indent="-342900" algn="l" rtl="0">
-              <a:spcBef>
-                <a:spcPts val="0"/>
-              </a:spcBef>
-              <a:spcAft>
-                <a:spcPts val="0"/>
-              </a:spcAft>
-              <a:buSzPts val="1800"/>
-              <a:buChar char="●"/>
-            </a:pPr>
-            <a:r>
-              <a:rPr lang="it-IT" sz="1800" b="1" dirty="0"/>
-              <a:t>Profilo utente</a:t>
-            </a:r>
-          </a:p>
-        </p:txBody>
-      </p:sp>
-      <p:sp>
-        <p:nvSpPr>
-          <p:cNvPr id="84" name="Google Shape;84;p17"/>
-          <p:cNvSpPr txBox="1">
-            <a:spLocks noGrp="1"/>
-          </p:cNvSpPr>
-          <p:nvPr>
-            <p:ph type="title"/>
-          </p:nvPr>
-        </p:nvSpPr>
-        <p:spPr>
-          <a:xfrm>
-            <a:off x="311700" y="445025"/>
-            <a:ext cx="4260300" cy="613200"/>
-          </a:xfrm>
-          <a:prstGeom prst="rect">
-            <a:avLst/>
-          </a:prstGeom>
-        </p:spPr>
-        <p:txBody>
-          <a:bodyPr spcFirstLastPara="1" wrap="square" lIns="91425" tIns="91425" rIns="91425" bIns="91425" anchor="t" anchorCtr="0">
-            <a:noAutofit/>
-          </a:bodyPr>
-          <a:lstStyle/>
-          <a:p>
-            <a:pPr marL="0" lvl="0" indent="0" algn="l" rtl="0">
-              <a:spcBef>
-                <a:spcPts val="0"/>
-              </a:spcBef>
-              <a:spcAft>
-                <a:spcPts val="0"/>
-              </a:spcAft>
-              <a:buNone/>
-            </a:pPr>
-            <a:r>
-              <a:rPr lang="it"/>
-              <a:t>L’APP</a:t>
-            </a:r>
-            <a:endParaRPr/>
-          </a:p>
-        </p:txBody>
-      </p:sp>
-      <p:sp>
-        <p:nvSpPr>
-          <p:cNvPr id="85" name="Google Shape;85;p17"/>
-          <p:cNvSpPr txBox="1">
-            <a:spLocks noGrp="1"/>
-          </p:cNvSpPr>
-          <p:nvPr>
-            <p:ph type="title"/>
-          </p:nvPr>
-        </p:nvSpPr>
-        <p:spPr>
-          <a:xfrm>
-            <a:off x="4752925" y="445025"/>
-            <a:ext cx="4260300" cy="613200"/>
-          </a:xfrm>
-          <a:prstGeom prst="rect">
-            <a:avLst/>
-          </a:prstGeom>
-        </p:spPr>
-        <p:txBody>
-          <a:bodyPr spcFirstLastPara="1" wrap="square" lIns="91425" tIns="91425" rIns="91425" bIns="91425" anchor="t" anchorCtr="0">
-            <a:noAutofit/>
-          </a:bodyPr>
-          <a:lstStyle/>
-          <a:p>
-            <a:pPr marL="0" lvl="0" indent="0" algn="l" rtl="0">
-              <a:spcBef>
-                <a:spcPts val="0"/>
-              </a:spcBef>
-              <a:spcAft>
-                <a:spcPts val="0"/>
-              </a:spcAft>
-              <a:buNone/>
-            </a:pPr>
-            <a:r>
-              <a:rPr lang="it"/>
-              <a:t>IL SITO</a:t>
-            </a:r>
-            <a:endParaRPr/>
-          </a:p>
-        </p:txBody>
-      </p:sp>
-      <p:sp>
-        <p:nvSpPr>
-          <p:cNvPr id="86" name="Google Shape;86;p17"/>
-          <p:cNvSpPr txBox="1">
-            <a:spLocks noGrp="1"/>
-          </p:cNvSpPr>
-          <p:nvPr>
-            <p:ph type="body" idx="1"/>
-          </p:nvPr>
-        </p:nvSpPr>
-        <p:spPr>
-          <a:xfrm>
-            <a:off x="4752925" y="1171675"/>
-            <a:ext cx="3999900" cy="3397200"/>
-          </a:xfrm>
-          <a:prstGeom prst="rect">
-            <a:avLst/>
-          </a:prstGeom>
-        </p:spPr>
-        <p:txBody>
-          <a:bodyPr spcFirstLastPara="1" wrap="square" lIns="91425" tIns="91425" rIns="91425" bIns="91425" anchor="t" anchorCtr="0">
-            <a:noAutofit/>
-          </a:bodyPr>
-          <a:lstStyle/>
-          <a:p>
-            <a:pPr marL="0" lvl="0" indent="0" algn="l" rtl="0">
-              <a:spcBef>
-                <a:spcPts val="0"/>
-              </a:spcBef>
-              <a:spcAft>
-                <a:spcPts val="0"/>
-              </a:spcAft>
-              <a:buNone/>
-            </a:pPr>
-            <a:r>
-              <a:rPr lang="it" sz="1800" b="1" dirty="0"/>
-              <a:t>schermate:</a:t>
-            </a:r>
-            <a:endParaRPr lang="it-IT" sz="1800" b="1" dirty="0"/>
-          </a:p>
-          <a:p>
-            <a:pPr marL="457200" lvl="0" indent="-342900" algn="l" rtl="0">
-              <a:spcBef>
-                <a:spcPts val="1600"/>
-              </a:spcBef>
-              <a:spcAft>
-                <a:spcPts val="0"/>
-              </a:spcAft>
-              <a:buSzPts val="1800"/>
-              <a:buChar char="●"/>
-            </a:pPr>
-            <a:endParaRPr lang="it-IT" sz="1800" b="1" dirty="0"/>
-          </a:p>
-          <a:p>
-            <a:pPr marL="457200" lvl="0" indent="-342900" algn="l" rtl="0">
-              <a:spcBef>
-                <a:spcPts val="1600"/>
-              </a:spcBef>
-              <a:spcAft>
-                <a:spcPts val="0"/>
-              </a:spcAft>
-              <a:buSzPts val="1800"/>
-              <a:buChar char="●"/>
-            </a:pPr>
-            <a:r>
-              <a:rPr lang="it-IT" sz="1800" b="1" dirty="0"/>
-              <a:t>Home fornitore</a:t>
-            </a:r>
-          </a:p>
-          <a:p>
-            <a:pPr marL="457200" lvl="0" indent="-342900" algn="l" rtl="0">
-              <a:spcBef>
-                <a:spcPts val="0"/>
-              </a:spcBef>
-              <a:spcAft>
-                <a:spcPts val="0"/>
-              </a:spcAft>
-              <a:buSzPts val="1800"/>
-              <a:buChar char="●"/>
-            </a:pPr>
-            <a:r>
-              <a:rPr lang="it" sz="1800" b="1" dirty="0"/>
-              <a:t>pagina inserimento nuovi servizi</a:t>
-            </a:r>
-            <a:endParaRPr sz="1800" b="1" dirty="0"/>
-          </a:p>
-          <a:p>
-            <a:pPr marL="457200" lvl="0" indent="-342900" algn="l" rtl="0">
-              <a:spcBef>
-                <a:spcPts val="0"/>
-              </a:spcBef>
-              <a:spcAft>
-                <a:spcPts val="0"/>
-              </a:spcAft>
-              <a:buSzPts val="1800"/>
-              <a:buChar char="●"/>
-            </a:pPr>
-            <a:r>
-              <a:rPr lang="it" sz="1800" b="1" dirty="0"/>
-              <a:t>modifica delle informazioni</a:t>
-            </a:r>
-            <a:endParaRPr sz="1800" b="1" dirty="0"/>
-          </a:p>
-          <a:p>
-            <a:pPr marL="0" lvl="0" indent="0" algn="l" rtl="0">
-              <a:spcBef>
-                <a:spcPts val="1600"/>
-              </a:spcBef>
-              <a:spcAft>
-                <a:spcPts val="1600"/>
-              </a:spcAft>
-              <a:buNone/>
-            </a:pPr>
-            <a:endParaRPr sz="1800" b="1" dirty="0"/>
-          </a:p>
-        </p:txBody>
-      </p:sp>
-    </p:spTree>
-  </p:cSld>
-  <p:clrMapOvr>
-    <a:masterClrMapping/>
-  </p:clrMapOvr>
-</p:sld>
-</file>
-
 <file path=ppt/theme/theme1.xml><?xml version="1.0" encoding="utf-8"?>
 <a:theme xmlns:a="http://schemas.openxmlformats.org/drawingml/2006/main" name="Paperback">
   <a:themeElements>

--- a/Documenti/Relazione Finale/PP relazione.pptx
+++ b/Documenti/Relazione Finale/PP relazione.pptx
@@ -6975,7 +6975,7 @@
             </a:pPr>
             <a:r>
               <a:rPr lang="it" dirty="0"/>
-              <a:t>Presentazione dello sviluppo di «Crickle»</a:t>
+              <a:t>Presentazione dello sviluppo di «Crikle»</a:t>
             </a:r>
             <a:endParaRPr dirty="0"/>
           </a:p>
@@ -7464,12 +7464,8 @@
           <a:lstStyle/>
           <a:p>
             <a:r>
-              <a:rPr lang="it-IT" dirty="0" err="1"/>
-              <a:t>Backend</a:t>
-            </a:r>
-            <a:r>
               <a:rPr lang="it-IT" dirty="0"/>
-              <a:t>:</a:t>
+              <a:t>Backend:</a:t>
             </a:r>
             <a:br>
               <a:rPr lang="it-IT" dirty="0"/>
@@ -7504,23 +7500,7 @@
             </a:pPr>
             <a:r>
               <a:rPr lang="it-IT" dirty="0"/>
-              <a:t>FLASK: Framework per gestire le API, ossia quello strumento che permette l’interazione tra </a:t>
-            </a:r>
-            <a:r>
-              <a:rPr lang="it-IT" dirty="0" err="1"/>
-              <a:t>frontend</a:t>
-            </a:r>
-            <a:r>
-              <a:rPr lang="it-IT" dirty="0"/>
-              <a:t> (Sito WEB o APP) e </a:t>
-            </a:r>
-            <a:r>
-              <a:rPr lang="it-IT" dirty="0" err="1"/>
-              <a:t>backend</a:t>
-            </a:r>
-            <a:r>
-              <a:rPr lang="it-IT" dirty="0"/>
-              <a:t>, ossia l’interfaccia utente e la logica di programmazione, nonché le interazioni con il DB.</a:t>
+              <a:t>FLASK: Framework per gestire le API, ossia quello strumento che permette l’interazione tra Frontend (Sito WEB o APP) e Backend, ossia l’interfaccia utente e la logica di programmazione, nonché le interazioni con il DB.</a:t>
             </a:r>
           </a:p>
           <a:p>
@@ -7529,23 +7509,7 @@
             </a:pPr>
             <a:r>
               <a:rPr lang="it-IT" dirty="0"/>
-              <a:t>Come linguaggio di programmazione per le API </a:t>
-            </a:r>
-            <a:r>
-              <a:rPr lang="it-IT" dirty="0" err="1"/>
-              <a:t>Flask</a:t>
-            </a:r>
-            <a:r>
-              <a:rPr lang="it-IT" dirty="0"/>
-              <a:t> viene </a:t>
-            </a:r>
-            <a:r>
-              <a:rPr lang="it-IT" dirty="0" err="1"/>
-              <a:t>uttilizzato</a:t>
-            </a:r>
-            <a:r>
-              <a:rPr lang="it-IT" dirty="0"/>
-              <a:t> PYTHON.</a:t>
+              <a:t>Come linguaggio di programmazione per le API Flask viene utilizzato PYTHON.</a:t>
             </a:r>
           </a:p>
           <a:p>
@@ -7563,15 +7527,7 @@
             </a:pPr>
             <a:r>
               <a:rPr lang="it-IT" dirty="0"/>
-              <a:t>Per il </a:t>
-            </a:r>
-            <a:r>
-              <a:rPr lang="it-IT" dirty="0" err="1"/>
-              <a:t>DataBase</a:t>
-            </a:r>
-            <a:r>
-              <a:rPr lang="it-IT" dirty="0"/>
-              <a:t> si è scelto un tipo di DB relazionale, MYSQL, e come ambiente di sviluppo del DB è stato utilizzato WORKBENCH.</a:t>
+              <a:t>Per il Database si è scelto un tipo di DB relazionale, MYSQL, e come ambiente di sviluppo del DB è stato utilizzato WORKBENCH.</a:t>
             </a:r>
           </a:p>
         </p:txBody>
@@ -7628,12 +7584,8 @@
           <a:lstStyle/>
           <a:p>
             <a:r>
-              <a:rPr lang="it-IT" dirty="0" err="1"/>
-              <a:t>FrontEnd</a:t>
-            </a:r>
-            <a:r>
               <a:rPr lang="it-IT" dirty="0"/>
-              <a:t>:</a:t>
+              <a:t>FrontEnd:</a:t>
             </a:r>
           </a:p>
         </p:txBody>
@@ -7664,15 +7616,7 @@
             </a:pPr>
             <a:r>
               <a:rPr lang="it-IT" dirty="0"/>
-              <a:t>Per il </a:t>
-            </a:r>
-            <a:r>
-              <a:rPr lang="it-IT" dirty="0" err="1"/>
-              <a:t>FrontEnd</a:t>
-            </a:r>
-            <a:r>
-              <a:rPr lang="it-IT" dirty="0"/>
-              <a:t> dell’App Mobile, si utilizza Android, come linguaggio di programmazione JAVA (e XML come linguaggio di scripting per i layout grafici), e come IDE ANDROID STUDIO.</a:t>
+              <a:t>Per il FrontEnd dell’App Mobile, si utilizza Android, come linguaggio di programmazione JAVA (e XML come linguaggio di scripting per i layout grafici), e come IDE ANDROID STUDIO.</a:t>
             </a:r>
           </a:p>
           <a:p>
@@ -7687,15 +7631,7 @@
             </a:pPr>
             <a:r>
               <a:rPr lang="it-IT" dirty="0"/>
-              <a:t>Per il </a:t>
-            </a:r>
-            <a:r>
-              <a:rPr lang="it-IT" dirty="0" err="1"/>
-              <a:t>FrontEnd</a:t>
-            </a:r>
-            <a:r>
-              <a:rPr lang="it-IT" dirty="0"/>
-              <a:t> del sito Web si utilizzano HTML per la struttura e CSS per lo stile grafico.</a:t>
+              <a:t>Per il FrontEnd del sito Web si utilizzano HTML per la struttura e CSS per lo stile grafico.</a:t>
             </a:r>
           </a:p>
         </p:txBody>
@@ -8756,15 +8692,7 @@
           <a:p>
             <a:r>
               <a:rPr lang="it-IT" dirty="0"/>
-              <a:t>-Selezione di un giorno con apertura </a:t>
-            </a:r>
-            <a:r>
-              <a:rPr lang="it-IT" dirty="0" err="1"/>
-              <a:t>dialog</a:t>
-            </a:r>
-            <a:r>
-              <a:rPr lang="it-IT" dirty="0"/>
-              <a:t> per aggiungere evento</a:t>
+              <a:t>-Selezione di un giorno con apertura dialog per aggiungere evento</a:t>
             </a:r>
           </a:p>
           <a:p>
@@ -9632,12 +9560,8 @@
           <a:lstStyle/>
           <a:p>
             <a:r>
-              <a:rPr lang="it-IT" dirty="0" err="1"/>
-              <a:t>Backend</a:t>
-            </a:r>
-            <a:r>
               <a:rPr lang="it-IT" dirty="0"/>
-              <a:t> API:</a:t>
+              <a:t>Backend API:</a:t>
             </a:r>
           </a:p>
         </p:txBody>
@@ -9909,25 +9833,7 @@
                 <a:ea typeface="Aptos" panose="020B0004020202020204" pitchFamily="34" charset="0"/>
                 <a:cs typeface="Times New Roman" panose="02020603050405020304" pitchFamily="18" charset="0"/>
               </a:rPr>
-              <a:t>l’endpoint di </a:t>
-            </a:r>
-            <a:r>
-              <a:rPr lang="it-IT" sz="1800" dirty="0" err="1">
-                <a:effectLst/>
-                <a:latin typeface="Amasis MT Pro" panose="02040504050005020304" pitchFamily="18" charset="0"/>
-                <a:ea typeface="Aptos" panose="020B0004020202020204" pitchFamily="34" charset="0"/>
-                <a:cs typeface="Times New Roman" panose="02020603050405020304" pitchFamily="18" charset="0"/>
-              </a:rPr>
-              <a:t>Flask</a:t>
-            </a:r>
-            <a:r>
-              <a:rPr lang="it-IT" sz="1800" dirty="0">
-                <a:effectLst/>
-                <a:latin typeface="Amasis MT Pro" panose="02040504050005020304" pitchFamily="18" charset="0"/>
-                <a:ea typeface="Aptos" panose="020B0004020202020204" pitchFamily="34" charset="0"/>
-                <a:cs typeface="Times New Roman" panose="02020603050405020304" pitchFamily="18" charset="0"/>
-              </a:rPr>
-              <a:t> prende i dati e con essi genera una richiesta(query) al server. Se un utente corrisponde alle credenziali, l’esito della richiesta sarà positivo</a:t>
+              <a:t>l’endpoint di Flask prende i dati e con essi genera una richiesta(query) al server. Se un utente corrisponde alle credenziali, l’esito della richiesta sarà positivo</a:t>
             </a:r>
             <a:endParaRPr lang="it-IT" dirty="0"/>
           </a:p>
@@ -11058,15 +10964,7 @@
           <a:p>
             <a:r>
               <a:rPr lang="it-IT" dirty="0"/>
-              <a:t>FIGMA – Per </a:t>
-            </a:r>
-            <a:r>
-              <a:rPr lang="it-IT" dirty="0" err="1"/>
-              <a:t>Wireframe</a:t>
-            </a:r>
-            <a:r>
-              <a:rPr lang="it-IT" dirty="0"/>
-              <a:t> e progettazione</a:t>
+              <a:t>FIGMA – Per Wireframe e progettazione</a:t>
             </a:r>
           </a:p>
         </p:txBody>

--- a/Documenti/Relazione Finale/PP relazione.pptx
+++ b/Documenti/Relazione Finale/PP relazione.pptx
@@ -5,7 +5,7 @@
     <p:sldMasterId id="2147483659" r:id="rId1"/>
   </p:sldMasterIdLst>
   <p:notesMasterIdLst>
-    <p:notesMasterId r:id="rId21"/>
+    <p:notesMasterId r:id="rId23"/>
   </p:notesMasterIdLst>
   <p:sldIdLst>
     <p:sldId id="256" r:id="rId2"/>
@@ -26,23 +26,25 @@
     <p:sldId id="273" r:id="rId17"/>
     <p:sldId id="274" r:id="rId18"/>
     <p:sldId id="275" r:id="rId19"/>
-    <p:sldId id="276" r:id="rId20"/>
+    <p:sldId id="277" r:id="rId20"/>
+    <p:sldId id="278" r:id="rId21"/>
+    <p:sldId id="276" r:id="rId22"/>
   </p:sldIdLst>
   <p:sldSz cx="9144000" cy="5143500" type="screen16x9"/>
   <p:notesSz cx="6858000" cy="9144000"/>
   <p:embeddedFontLst>
     <p:embeddedFont>
       <p:font typeface="Amasis MT Pro" panose="02040504050005020304" pitchFamily="18" charset="0"/>
-      <p:regular r:id="rId22"/>
-      <p:bold r:id="rId23"/>
-      <p:italic r:id="rId24"/>
-      <p:boldItalic r:id="rId25"/>
+      <p:regular r:id="rId24"/>
+      <p:bold r:id="rId25"/>
+      <p:italic r:id="rId26"/>
+      <p:boldItalic r:id="rId27"/>
     </p:embeddedFont>
     <p:embeddedFont>
       <p:font typeface="Old Standard TT" panose="020B0604020202020204" charset="0"/>
-      <p:regular r:id="rId26"/>
-      <p:bold r:id="rId27"/>
-      <p:italic r:id="rId28"/>
+      <p:regular r:id="rId28"/>
+      <p:bold r:id="rId29"/>
+      <p:italic r:id="rId30"/>
     </p:embeddedFont>
   </p:embeddedFontLst>
   <p:defaultTextStyle>
@@ -7028,6 +7030,18 @@
   <p:clrMapOvr>
     <a:masterClrMapping/>
   </p:clrMapOvr>
+  <mc:AlternateContent xmlns:mc="http://schemas.openxmlformats.org/markup-compatibility/2006" xmlns:p159="http://schemas.microsoft.com/office/powerpoint/2015/09/main">
+    <mc:Choice Requires="p159">
+      <p:transition xmlns:p14="http://schemas.microsoft.com/office/powerpoint/2010/main" spd="slow" p14:dur="2000">
+        <p159:morph option="byObject"/>
+      </p:transition>
+    </mc:Choice>
+    <mc:Fallback xmlns="">
+      <p:transition spd="slow">
+        <p:fade/>
+      </p:transition>
+    </mc:Fallback>
+  </mc:AlternateContent>
 </p:sld>
 </file>
 
@@ -9612,6 +9626,521 @@
       </p:grpSpPr>
       <p:sp>
         <p:nvSpPr>
+          <p:cNvPr id="3" name="Sottotitolo 2">
+            <a:extLst>
+              <a:ext uri="{FF2B5EF4-FFF2-40B4-BE49-F238E27FC236}">
+                <a16:creationId xmlns:a16="http://schemas.microsoft.com/office/drawing/2014/main" id="{49C205EE-47E1-205F-245D-5EA556D0923A}"/>
+              </a:ext>
+            </a:extLst>
+          </p:cNvPr>
+          <p:cNvSpPr>
+            <a:spLocks noGrp="1"/>
+          </p:cNvSpPr>
+          <p:nvPr>
+            <p:ph type="subTitle" idx="1"/>
+          </p:nvPr>
+        </p:nvSpPr>
+        <p:spPr>
+          <a:xfrm>
+            <a:off x="306322" y="1397401"/>
+            <a:ext cx="4045200" cy="1345500"/>
+          </a:xfrm>
+        </p:spPr>
+        <p:txBody>
+          <a:bodyPr/>
+          <a:lstStyle/>
+          <a:p>
+            <a:r>
+              <a:rPr lang="it-IT" dirty="0">
+                <a:solidFill>
+                  <a:srgbClr val="FF0000"/>
+                </a:solidFill>
+              </a:rPr>
+              <a:t>Schermata Login WEB:</a:t>
+            </a:r>
+          </a:p>
+          <a:p>
+            <a:r>
+              <a:rPr lang="it-IT" dirty="0"/>
+              <a:t>- Inserimento dati utente </a:t>
+            </a:r>
+          </a:p>
+        </p:txBody>
+      </p:sp>
+      <p:pic>
+        <p:nvPicPr>
+          <p:cNvPr id="6" name="Immagine 5" descr="Immagine che contiene testo, schermata, Carattere, design&#10;&#10;Il contenuto generato dall'IA potrebbe non essere corretto.">
+            <a:extLst>
+              <a:ext uri="{FF2B5EF4-FFF2-40B4-BE49-F238E27FC236}">
+                <a16:creationId xmlns:a16="http://schemas.microsoft.com/office/drawing/2014/main" id="{95BA0C4C-278C-0E3B-2337-F6071AE018DB}"/>
+              </a:ext>
+            </a:extLst>
+          </p:cNvPr>
+          <p:cNvPicPr>
+            <a:picLocks noChangeAspect="1"/>
+          </p:cNvPicPr>
+          <p:nvPr/>
+        </p:nvPicPr>
+        <p:blipFill>
+          <a:blip r:embed="rId2"/>
+          <a:stretch>
+            <a:fillRect/>
+          </a:stretch>
+        </p:blipFill>
+        <p:spPr>
+          <a:xfrm>
+            <a:off x="4707025" y="552696"/>
+            <a:ext cx="4259933" cy="3796393"/>
+          </a:xfrm>
+          <a:prstGeom prst="rect">
+            <a:avLst/>
+          </a:prstGeom>
+        </p:spPr>
+      </p:pic>
+    </p:spTree>
+    <p:extLst>
+      <p:ext uri="{BB962C8B-B14F-4D97-AF65-F5344CB8AC3E}">
+        <p14:creationId xmlns:p14="http://schemas.microsoft.com/office/powerpoint/2010/main" val="663154689"/>
+      </p:ext>
+    </p:extLst>
+  </p:cSld>
+  <p:clrMapOvr>
+    <a:masterClrMapping/>
+  </p:clrMapOvr>
+  <p:timing>
+    <p:tnLst>
+      <p:par>
+        <p:cTn id="1" dur="indefinite" restart="never" nodeType="tmRoot">
+          <p:childTnLst>
+            <p:seq concurrent="1" nextAc="seek">
+              <p:cTn id="2" dur="indefinite" nodeType="mainSeq">
+                <p:childTnLst>
+                  <p:par>
+                    <p:cTn id="3" fill="hold">
+                      <p:stCondLst>
+                        <p:cond delay="indefinite"/>
+                      </p:stCondLst>
+                      <p:childTnLst>
+                        <p:par>
+                          <p:cTn id="4" fill="hold">
+                            <p:stCondLst>
+                              <p:cond delay="0"/>
+                            </p:stCondLst>
+                            <p:childTnLst>
+                              <p:par>
+                                <p:cTn id="5" presetID="2" presetClass="entr" presetSubtype="4" fill="hold" nodeType="clickEffect">
+                                  <p:stCondLst>
+                                    <p:cond delay="0"/>
+                                  </p:stCondLst>
+                                  <p:childTnLst>
+                                    <p:set>
+                                      <p:cBhvr>
+                                        <p:cTn id="6" dur="1" fill="hold">
+                                          <p:stCondLst>
+                                            <p:cond delay="0"/>
+                                          </p:stCondLst>
+                                        </p:cTn>
+                                        <p:tgtEl>
+                                          <p:spTgt spid="6"/>
+                                        </p:tgtEl>
+                                        <p:attrNameLst>
+                                          <p:attrName>style.visibility</p:attrName>
+                                        </p:attrNameLst>
+                                      </p:cBhvr>
+                                      <p:to>
+                                        <p:strVal val="visible"/>
+                                      </p:to>
+                                    </p:set>
+                                    <p:anim calcmode="lin" valueType="num">
+                                      <p:cBhvr additive="base">
+                                        <p:cTn id="7" dur="500" fill="hold"/>
+                                        <p:tgtEl>
+                                          <p:spTgt spid="6"/>
+                                        </p:tgtEl>
+                                        <p:attrNameLst>
+                                          <p:attrName>ppt_x</p:attrName>
+                                        </p:attrNameLst>
+                                      </p:cBhvr>
+                                      <p:tavLst>
+                                        <p:tav tm="0">
+                                          <p:val>
+                                            <p:strVal val="#ppt_x"/>
+                                          </p:val>
+                                        </p:tav>
+                                        <p:tav tm="100000">
+                                          <p:val>
+                                            <p:strVal val="#ppt_x"/>
+                                          </p:val>
+                                        </p:tav>
+                                      </p:tavLst>
+                                    </p:anim>
+                                    <p:anim calcmode="lin" valueType="num">
+                                      <p:cBhvr additive="base">
+                                        <p:cTn id="8" dur="500" fill="hold"/>
+                                        <p:tgtEl>
+                                          <p:spTgt spid="6"/>
+                                        </p:tgtEl>
+                                        <p:attrNameLst>
+                                          <p:attrName>ppt_y</p:attrName>
+                                        </p:attrNameLst>
+                                      </p:cBhvr>
+                                      <p:tavLst>
+                                        <p:tav tm="0">
+                                          <p:val>
+                                            <p:strVal val="1+#ppt_h/2"/>
+                                          </p:val>
+                                        </p:tav>
+                                        <p:tav tm="100000">
+                                          <p:val>
+                                            <p:strVal val="#ppt_y"/>
+                                          </p:val>
+                                        </p:tav>
+                                      </p:tavLst>
+                                    </p:anim>
+                                  </p:childTnLst>
+                                </p:cTn>
+                              </p:par>
+                            </p:childTnLst>
+                          </p:cTn>
+                        </p:par>
+                      </p:childTnLst>
+                    </p:cTn>
+                  </p:par>
+                </p:childTnLst>
+              </p:cTn>
+              <p:prevCondLst>
+                <p:cond evt="onPrev" delay="0">
+                  <p:tgtEl>
+                    <p:sldTgt/>
+                  </p:tgtEl>
+                </p:cond>
+              </p:prevCondLst>
+              <p:nextCondLst>
+                <p:cond evt="onNext" delay="0">
+                  <p:tgtEl>
+                    <p:sldTgt/>
+                  </p:tgtEl>
+                </p:cond>
+              </p:nextCondLst>
+            </p:seq>
+          </p:childTnLst>
+        </p:cTn>
+      </p:par>
+    </p:tnLst>
+  </p:timing>
+</p:sld>
+</file>
+
+<file path=ppt/slides/slide2.xml><?xml version="1.0" encoding="utf-8"?>
+<p:sld xmlns:a="http://schemas.openxmlformats.org/drawingml/2006/main" xmlns:r="http://schemas.openxmlformats.org/officeDocument/2006/relationships" xmlns:p="http://schemas.openxmlformats.org/presentationml/2006/main">
+  <p:cSld>
+    <p:spTree>
+      <p:nvGrpSpPr>
+        <p:cNvPr id="1" name="Shape 64"/>
+        <p:cNvGrpSpPr/>
+        <p:nvPr/>
+      </p:nvGrpSpPr>
+      <p:grpSpPr>
+        <a:xfrm>
+          <a:off x="0" y="0"/>
+          <a:ext cx="0" cy="0"/>
+          <a:chOff x="0" y="0"/>
+          <a:chExt cx="0" cy="0"/>
+        </a:xfrm>
+      </p:grpSpPr>
+      <p:sp>
+        <p:nvSpPr>
+          <p:cNvPr id="65" name="Google Shape;65;p14"/>
+          <p:cNvSpPr txBox="1">
+            <a:spLocks noGrp="1"/>
+          </p:cNvSpPr>
+          <p:nvPr>
+            <p:ph type="title"/>
+          </p:nvPr>
+        </p:nvSpPr>
+        <p:spPr>
+          <a:xfrm>
+            <a:off x="490250" y="526350"/>
+            <a:ext cx="5604000" cy="4090800"/>
+          </a:xfrm>
+          <a:prstGeom prst="rect">
+            <a:avLst/>
+          </a:prstGeom>
+        </p:spPr>
+        <p:txBody>
+          <a:bodyPr spcFirstLastPara="1" wrap="square" lIns="91425" tIns="91425" rIns="91425" bIns="91425" anchor="ctr" anchorCtr="0">
+            <a:noAutofit/>
+          </a:bodyPr>
+          <a:lstStyle/>
+          <a:p>
+            <a:pPr marL="0" lvl="0" indent="0" algn="l" rtl="0">
+              <a:spcBef>
+                <a:spcPts val="0"/>
+              </a:spcBef>
+              <a:spcAft>
+                <a:spcPts val="0"/>
+              </a:spcAft>
+              <a:buNone/>
+            </a:pPr>
+            <a:r>
+              <a:rPr lang="it"/>
+              <a:t>Il progetto</a:t>
+            </a:r>
+            <a:endParaRPr/>
+          </a:p>
+        </p:txBody>
+      </p:sp>
+    </p:spTree>
+  </p:cSld>
+  <p:clrMapOvr>
+    <a:masterClrMapping/>
+  </p:clrMapOvr>
+</p:sld>
+</file>
+
+<file path=ppt/slides/slide20.xml><?xml version="1.0" encoding="utf-8"?>
+<p:sld xmlns:a="http://schemas.openxmlformats.org/drawingml/2006/main" xmlns:r="http://schemas.openxmlformats.org/officeDocument/2006/relationships" xmlns:p="http://schemas.openxmlformats.org/presentationml/2006/main">
+  <p:cSld>
+    <p:spTree>
+      <p:nvGrpSpPr>
+        <p:cNvPr id="1" name=""/>
+        <p:cNvGrpSpPr/>
+        <p:nvPr/>
+      </p:nvGrpSpPr>
+      <p:grpSpPr>
+        <a:xfrm>
+          <a:off x="0" y="0"/>
+          <a:ext cx="0" cy="0"/>
+          <a:chOff x="0" y="0"/>
+          <a:chExt cx="0" cy="0"/>
+        </a:xfrm>
+      </p:grpSpPr>
+      <p:sp>
+        <p:nvSpPr>
+          <p:cNvPr id="3" name="Sottotitolo 2">
+            <a:extLst>
+              <a:ext uri="{FF2B5EF4-FFF2-40B4-BE49-F238E27FC236}">
+                <a16:creationId xmlns:a16="http://schemas.microsoft.com/office/drawing/2014/main" id="{C3506336-8AD7-FA48-AEB0-FC32DB17DFCB}"/>
+              </a:ext>
+            </a:extLst>
+          </p:cNvPr>
+          <p:cNvSpPr>
+            <a:spLocks noGrp="1"/>
+          </p:cNvSpPr>
+          <p:nvPr>
+            <p:ph type="subTitle" idx="1"/>
+          </p:nvPr>
+        </p:nvSpPr>
+        <p:spPr>
+          <a:xfrm>
+            <a:off x="132423" y="1397401"/>
+            <a:ext cx="4045200" cy="1345500"/>
+          </a:xfrm>
+        </p:spPr>
+        <p:txBody>
+          <a:bodyPr/>
+          <a:lstStyle/>
+          <a:p>
+            <a:r>
+              <a:rPr lang="it-IT" dirty="0">
+                <a:solidFill>
+                  <a:srgbClr val="FF0000"/>
+                </a:solidFill>
+              </a:rPr>
+              <a:t>Registrazione Fornitore:</a:t>
+            </a:r>
+          </a:p>
+          <a:p>
+            <a:r>
+              <a:rPr lang="it-IT" dirty="0"/>
+              <a:t>- Campi per inserimento dati fornitore: Nome, Cognome, Email, Telefono, Password, Conferma Password</a:t>
+            </a:r>
+          </a:p>
+        </p:txBody>
+      </p:sp>
+      <p:pic>
+        <p:nvPicPr>
+          <p:cNvPr id="6" name="Immagine 5" descr="Immagine che contiene testo, schermata, numero, Carattere&#10;&#10;Il contenuto generato dall'IA potrebbe non essere corretto.">
+            <a:extLst>
+              <a:ext uri="{FF2B5EF4-FFF2-40B4-BE49-F238E27FC236}">
+                <a16:creationId xmlns:a16="http://schemas.microsoft.com/office/drawing/2014/main" id="{FC44E5AB-7344-D073-74E6-5A05D5AAE944}"/>
+              </a:ext>
+            </a:extLst>
+          </p:cNvPr>
+          <p:cNvPicPr>
+            <a:picLocks noChangeAspect="1"/>
+          </p:cNvPicPr>
+          <p:nvPr/>
+        </p:nvPicPr>
+        <p:blipFill>
+          <a:blip r:embed="rId2"/>
+          <a:stretch>
+            <a:fillRect/>
+          </a:stretch>
+        </p:blipFill>
+        <p:spPr>
+          <a:xfrm>
+            <a:off x="4672066" y="391887"/>
+            <a:ext cx="4339511" cy="3886200"/>
+          </a:xfrm>
+          <a:prstGeom prst="rect">
+            <a:avLst/>
+          </a:prstGeom>
+        </p:spPr>
+      </p:pic>
+    </p:spTree>
+    <p:extLst>
+      <p:ext uri="{BB962C8B-B14F-4D97-AF65-F5344CB8AC3E}">
+        <p14:creationId xmlns:p14="http://schemas.microsoft.com/office/powerpoint/2010/main" val="1703540532"/>
+      </p:ext>
+    </p:extLst>
+  </p:cSld>
+  <p:clrMapOvr>
+    <a:masterClrMapping/>
+  </p:clrMapOvr>
+  <p:timing>
+    <p:tnLst>
+      <p:par>
+        <p:cTn id="1" dur="indefinite" restart="never" nodeType="tmRoot">
+          <p:childTnLst>
+            <p:seq concurrent="1" nextAc="seek">
+              <p:cTn id="2" dur="indefinite" nodeType="mainSeq">
+                <p:childTnLst>
+                  <p:par>
+                    <p:cTn id="3" fill="hold">
+                      <p:stCondLst>
+                        <p:cond delay="indefinite"/>
+                      </p:stCondLst>
+                      <p:childTnLst>
+                        <p:par>
+                          <p:cTn id="4" fill="hold">
+                            <p:stCondLst>
+                              <p:cond delay="0"/>
+                            </p:stCondLst>
+                            <p:childTnLst>
+                              <p:par>
+                                <p:cTn id="5" presetID="2" presetClass="entr" presetSubtype="4" fill="hold" nodeType="clickEffect">
+                                  <p:stCondLst>
+                                    <p:cond delay="0"/>
+                                  </p:stCondLst>
+                                  <p:childTnLst>
+                                    <p:set>
+                                      <p:cBhvr>
+                                        <p:cTn id="6" dur="1" fill="hold">
+                                          <p:stCondLst>
+                                            <p:cond delay="0"/>
+                                          </p:stCondLst>
+                                        </p:cTn>
+                                        <p:tgtEl>
+                                          <p:spTgt spid="6"/>
+                                        </p:tgtEl>
+                                        <p:attrNameLst>
+                                          <p:attrName>style.visibility</p:attrName>
+                                        </p:attrNameLst>
+                                      </p:cBhvr>
+                                      <p:to>
+                                        <p:strVal val="visible"/>
+                                      </p:to>
+                                    </p:set>
+                                    <p:anim calcmode="lin" valueType="num">
+                                      <p:cBhvr additive="base">
+                                        <p:cTn id="7" dur="500" fill="hold"/>
+                                        <p:tgtEl>
+                                          <p:spTgt spid="6"/>
+                                        </p:tgtEl>
+                                        <p:attrNameLst>
+                                          <p:attrName>ppt_x</p:attrName>
+                                        </p:attrNameLst>
+                                      </p:cBhvr>
+                                      <p:tavLst>
+                                        <p:tav tm="0">
+                                          <p:val>
+                                            <p:strVal val="#ppt_x"/>
+                                          </p:val>
+                                        </p:tav>
+                                        <p:tav tm="100000">
+                                          <p:val>
+                                            <p:strVal val="#ppt_x"/>
+                                          </p:val>
+                                        </p:tav>
+                                      </p:tavLst>
+                                    </p:anim>
+                                    <p:anim calcmode="lin" valueType="num">
+                                      <p:cBhvr additive="base">
+                                        <p:cTn id="8" dur="500" fill="hold"/>
+                                        <p:tgtEl>
+                                          <p:spTgt spid="6"/>
+                                        </p:tgtEl>
+                                        <p:attrNameLst>
+                                          <p:attrName>ppt_y</p:attrName>
+                                        </p:attrNameLst>
+                                      </p:cBhvr>
+                                      <p:tavLst>
+                                        <p:tav tm="0">
+                                          <p:val>
+                                            <p:strVal val="1+#ppt_h/2"/>
+                                          </p:val>
+                                        </p:tav>
+                                        <p:tav tm="100000">
+                                          <p:val>
+                                            <p:strVal val="#ppt_y"/>
+                                          </p:val>
+                                        </p:tav>
+                                      </p:tavLst>
+                                    </p:anim>
+                                  </p:childTnLst>
+                                </p:cTn>
+                              </p:par>
+                            </p:childTnLst>
+                          </p:cTn>
+                        </p:par>
+                      </p:childTnLst>
+                    </p:cTn>
+                  </p:par>
+                </p:childTnLst>
+              </p:cTn>
+              <p:prevCondLst>
+                <p:cond evt="onPrev" delay="0">
+                  <p:tgtEl>
+                    <p:sldTgt/>
+                  </p:tgtEl>
+                </p:cond>
+              </p:prevCondLst>
+              <p:nextCondLst>
+                <p:cond evt="onNext" delay="0">
+                  <p:tgtEl>
+                    <p:sldTgt/>
+                  </p:tgtEl>
+                </p:cond>
+              </p:nextCondLst>
+            </p:seq>
+          </p:childTnLst>
+        </p:cTn>
+      </p:par>
+    </p:tnLst>
+  </p:timing>
+</p:sld>
+</file>
+
+<file path=ppt/slides/slide21.xml><?xml version="1.0" encoding="utf-8"?>
+<p:sld xmlns:a="http://schemas.openxmlformats.org/drawingml/2006/main" xmlns:r="http://schemas.openxmlformats.org/officeDocument/2006/relationships" xmlns:p="http://schemas.openxmlformats.org/presentationml/2006/main">
+  <p:cSld>
+    <p:spTree>
+      <p:nvGrpSpPr>
+        <p:cNvPr id="1" name=""/>
+        <p:cNvGrpSpPr/>
+        <p:nvPr/>
+      </p:nvGrpSpPr>
+      <p:grpSpPr>
+        <a:xfrm>
+          <a:off x="0" y="0"/>
+          <a:ext cx="0" cy="0"/>
+          <a:chOff x="0" y="0"/>
+          <a:chExt cx="0" cy="0"/>
+        </a:xfrm>
+      </p:grpSpPr>
+      <p:sp>
+        <p:nvSpPr>
           <p:cNvPr id="2" name="Titolo 1">
             <a:extLst>
               <a:ext uri="{FF2B5EF4-FFF2-40B4-BE49-F238E27FC236}">
@@ -10296,73 +10825,6 @@
       <p:bldP spid="14" grpId="0"/>
     </p:bldLst>
   </p:timing>
-</p:sld>
-</file>
-
-<file path=ppt/slides/slide2.xml><?xml version="1.0" encoding="utf-8"?>
-<p:sld xmlns:a="http://schemas.openxmlformats.org/drawingml/2006/main" xmlns:r="http://schemas.openxmlformats.org/officeDocument/2006/relationships" xmlns:p="http://schemas.openxmlformats.org/presentationml/2006/main">
-  <p:cSld>
-    <p:spTree>
-      <p:nvGrpSpPr>
-        <p:cNvPr id="1" name="Shape 64"/>
-        <p:cNvGrpSpPr/>
-        <p:nvPr/>
-      </p:nvGrpSpPr>
-      <p:grpSpPr>
-        <a:xfrm>
-          <a:off x="0" y="0"/>
-          <a:ext cx="0" cy="0"/>
-          <a:chOff x="0" y="0"/>
-          <a:chExt cx="0" cy="0"/>
-        </a:xfrm>
-      </p:grpSpPr>
-      <p:sp>
-        <p:nvSpPr>
-          <p:cNvPr id="65" name="Google Shape;65;p14"/>
-          <p:cNvSpPr txBox="1">
-            <a:spLocks noGrp="1"/>
-          </p:cNvSpPr>
-          <p:nvPr>
-            <p:ph type="title"/>
-          </p:nvPr>
-        </p:nvSpPr>
-        <p:spPr>
-          <a:xfrm>
-            <a:off x="490250" y="526350"/>
-            <a:ext cx="5604000" cy="4090800"/>
-          </a:xfrm>
-          <a:prstGeom prst="rect">
-            <a:avLst/>
-          </a:prstGeom>
-        </p:spPr>
-        <p:txBody>
-          <a:bodyPr spcFirstLastPara="1" wrap="square" lIns="91425" tIns="91425" rIns="91425" bIns="91425" anchor="ctr" anchorCtr="0">
-            <a:noAutofit/>
-          </a:bodyPr>
-          <a:lstStyle/>
-          <a:p>
-            <a:pPr marL="0" lvl="0" indent="0" algn="l" rtl="0">
-              <a:spcBef>
-                <a:spcPts val="0"/>
-              </a:spcBef>
-              <a:spcAft>
-                <a:spcPts val="0"/>
-              </a:spcAft>
-              <a:buNone/>
-            </a:pPr>
-            <a:r>
-              <a:rPr lang="it"/>
-              <a:t>Il progetto</a:t>
-            </a:r>
-            <a:endParaRPr/>
-          </a:p>
-        </p:txBody>
-      </p:sp>
-    </p:spTree>
-  </p:cSld>
-  <p:clrMapOvr>
-    <a:masterClrMapping/>
-  </p:clrMapOvr>
 </p:sld>
 </file>
 

--- a/Documenti/Relazione Finale/PP relazione.pptx
+++ b/Documenti/Relazione Finale/PP relazione.pptx
@@ -5,7 +5,7 @@
     <p:sldMasterId id="2147483659" r:id="rId1"/>
   </p:sldMasterIdLst>
   <p:notesMasterIdLst>
-    <p:notesMasterId r:id="rId23"/>
+    <p:notesMasterId r:id="rId24"/>
   </p:notesMasterIdLst>
   <p:sldIdLst>
     <p:sldId id="256" r:id="rId2"/>
@@ -18,33 +18,34 @@
     <p:sldId id="262" r:id="rId9"/>
     <p:sldId id="265" r:id="rId10"/>
     <p:sldId id="260" r:id="rId11"/>
-    <p:sldId id="267" r:id="rId12"/>
-    <p:sldId id="269" r:id="rId13"/>
-    <p:sldId id="270" r:id="rId14"/>
-    <p:sldId id="271" r:id="rId15"/>
-    <p:sldId id="272" r:id="rId16"/>
-    <p:sldId id="273" r:id="rId17"/>
-    <p:sldId id="274" r:id="rId18"/>
-    <p:sldId id="275" r:id="rId19"/>
-    <p:sldId id="277" r:id="rId20"/>
-    <p:sldId id="278" r:id="rId21"/>
-    <p:sldId id="276" r:id="rId22"/>
+    <p:sldId id="279" r:id="rId12"/>
+    <p:sldId id="267" r:id="rId13"/>
+    <p:sldId id="269" r:id="rId14"/>
+    <p:sldId id="270" r:id="rId15"/>
+    <p:sldId id="271" r:id="rId16"/>
+    <p:sldId id="272" r:id="rId17"/>
+    <p:sldId id="273" r:id="rId18"/>
+    <p:sldId id="274" r:id="rId19"/>
+    <p:sldId id="275" r:id="rId20"/>
+    <p:sldId id="277" r:id="rId21"/>
+    <p:sldId id="278" r:id="rId22"/>
+    <p:sldId id="276" r:id="rId23"/>
   </p:sldIdLst>
   <p:sldSz cx="9144000" cy="5143500" type="screen16x9"/>
   <p:notesSz cx="6858000" cy="9144000"/>
   <p:embeddedFontLst>
     <p:embeddedFont>
       <p:font typeface="Amasis MT Pro" panose="02040504050005020304" pitchFamily="18" charset="0"/>
-      <p:regular r:id="rId24"/>
-      <p:bold r:id="rId25"/>
-      <p:italic r:id="rId26"/>
-      <p:boldItalic r:id="rId27"/>
+      <p:regular r:id="rId25"/>
+      <p:bold r:id="rId26"/>
+      <p:italic r:id="rId27"/>
+      <p:boldItalic r:id="rId28"/>
     </p:embeddedFont>
     <p:embeddedFont>
       <p:font typeface="Old Standard TT" panose="020B0604020202020204" charset="0"/>
-      <p:regular r:id="rId28"/>
-      <p:bold r:id="rId29"/>
-      <p:italic r:id="rId30"/>
+      <p:regular r:id="rId29"/>
+      <p:bold r:id="rId30"/>
+      <p:italic r:id="rId31"/>
     </p:embeddedFont>
   </p:embeddedFontLst>
   <p:defaultTextStyle>
@@ -7461,6 +7462,525 @@
           <p:cNvPr id="2" name="Titolo 1">
             <a:extLst>
               <a:ext uri="{FF2B5EF4-FFF2-40B4-BE49-F238E27FC236}">
+                <a16:creationId xmlns:a16="http://schemas.microsoft.com/office/drawing/2014/main" id="{D7801592-9091-B6BB-BCF7-AC7640166F9F}"/>
+              </a:ext>
+            </a:extLst>
+          </p:cNvPr>
+          <p:cNvSpPr>
+            <a:spLocks noGrp="1"/>
+          </p:cNvSpPr>
+          <p:nvPr>
+            <p:ph type="title"/>
+          </p:nvPr>
+        </p:nvSpPr>
+        <p:spPr/>
+        <p:txBody>
+          <a:bodyPr/>
+          <a:lstStyle/>
+          <a:p>
+            <a:pPr algn="ctr"/>
+            <a:r>
+              <a:rPr lang="it-IT" dirty="0" err="1"/>
+              <a:t>WireFrame</a:t>
+            </a:r>
+            <a:r>
+              <a:rPr lang="it-IT" dirty="0"/>
+              <a:t> Sito Web</a:t>
+            </a:r>
+          </a:p>
+        </p:txBody>
+      </p:sp>
+      <p:pic>
+        <p:nvPicPr>
+          <p:cNvPr id="4" name="Immagine 3" descr="Immagine che contiene schermata, testo, logo, design&#10;&#10;Il contenuto generato dall'IA potrebbe non essere corretto.">
+            <a:extLst>
+              <a:ext uri="{FF2B5EF4-FFF2-40B4-BE49-F238E27FC236}">
+                <a16:creationId xmlns:a16="http://schemas.microsoft.com/office/drawing/2014/main" id="{C21A3941-3879-616F-57A1-40E55E67E071}"/>
+              </a:ext>
+            </a:extLst>
+          </p:cNvPr>
+          <p:cNvPicPr>
+            <a:picLocks noChangeAspect="1"/>
+          </p:cNvPicPr>
+          <p:nvPr/>
+        </p:nvPicPr>
+        <p:blipFill>
+          <a:blip r:embed="rId2"/>
+          <a:stretch>
+            <a:fillRect/>
+          </a:stretch>
+        </p:blipFill>
+        <p:spPr>
+          <a:xfrm>
+            <a:off x="311700" y="1078110"/>
+            <a:ext cx="2128393" cy="1513524"/>
+          </a:xfrm>
+          <a:prstGeom prst="rect">
+            <a:avLst/>
+          </a:prstGeom>
+        </p:spPr>
+      </p:pic>
+      <p:pic>
+        <p:nvPicPr>
+          <p:cNvPr id="6" name="Immagine 5" descr="Immagine che contiene testo, schermata, cerchio, diagramma&#10;&#10;Il contenuto generato dall'IA potrebbe non essere corretto.">
+            <a:extLst>
+              <a:ext uri="{FF2B5EF4-FFF2-40B4-BE49-F238E27FC236}">
+                <a16:creationId xmlns:a16="http://schemas.microsoft.com/office/drawing/2014/main" id="{777AEA47-1166-EF02-2650-BCA802532B41}"/>
+              </a:ext>
+            </a:extLst>
+          </p:cNvPr>
+          <p:cNvPicPr>
+            <a:picLocks noChangeAspect="1"/>
+          </p:cNvPicPr>
+          <p:nvPr/>
+        </p:nvPicPr>
+        <p:blipFill>
+          <a:blip r:embed="rId3"/>
+          <a:stretch>
+            <a:fillRect/>
+          </a:stretch>
+        </p:blipFill>
+        <p:spPr>
+          <a:xfrm>
+            <a:off x="2592044" y="1089019"/>
+            <a:ext cx="2085090" cy="1482731"/>
+          </a:xfrm>
+          <a:prstGeom prst="rect">
+            <a:avLst/>
+          </a:prstGeom>
+        </p:spPr>
+      </p:pic>
+      <p:pic>
+        <p:nvPicPr>
+          <p:cNvPr id="8" name="Immagine 7" descr="Immagine che contiene schermata, testo, design, Elementi grafici&#10;&#10;Il contenuto generato dall'IA potrebbe non essere corretto.">
+            <a:extLst>
+              <a:ext uri="{FF2B5EF4-FFF2-40B4-BE49-F238E27FC236}">
+                <a16:creationId xmlns:a16="http://schemas.microsoft.com/office/drawing/2014/main" id="{8236F5C8-2173-2BCF-EAA8-427E84649554}"/>
+              </a:ext>
+            </a:extLst>
+          </p:cNvPr>
+          <p:cNvPicPr>
+            <a:picLocks noChangeAspect="1"/>
+          </p:cNvPicPr>
+          <p:nvPr/>
+        </p:nvPicPr>
+        <p:blipFill>
+          <a:blip r:embed="rId4"/>
+          <a:stretch>
+            <a:fillRect/>
+          </a:stretch>
+        </p:blipFill>
+        <p:spPr>
+          <a:xfrm>
+            <a:off x="4829085" y="1078110"/>
+            <a:ext cx="2128393" cy="1513524"/>
+          </a:xfrm>
+          <a:prstGeom prst="rect">
+            <a:avLst/>
+          </a:prstGeom>
+        </p:spPr>
+      </p:pic>
+      <p:pic>
+        <p:nvPicPr>
+          <p:cNvPr id="10" name="Immagine 9" descr="Immagine che contiene schermata, testo, cerchio, design&#10;&#10;Il contenuto generato dall'IA potrebbe non essere corretto.">
+            <a:extLst>
+              <a:ext uri="{FF2B5EF4-FFF2-40B4-BE49-F238E27FC236}">
+                <a16:creationId xmlns:a16="http://schemas.microsoft.com/office/drawing/2014/main" id="{C4AD75DE-06D1-537A-DB7A-87D75298689F}"/>
+              </a:ext>
+            </a:extLst>
+          </p:cNvPr>
+          <p:cNvPicPr>
+            <a:picLocks noChangeAspect="1"/>
+          </p:cNvPicPr>
+          <p:nvPr/>
+        </p:nvPicPr>
+        <p:blipFill>
+          <a:blip r:embed="rId5"/>
+          <a:stretch>
+            <a:fillRect/>
+          </a:stretch>
+        </p:blipFill>
+        <p:spPr>
+          <a:xfrm>
+            <a:off x="1748763" y="2838509"/>
+            <a:ext cx="2240972" cy="1593580"/>
+          </a:xfrm>
+          <a:prstGeom prst="rect">
+            <a:avLst/>
+          </a:prstGeom>
+        </p:spPr>
+      </p:pic>
+      <p:pic>
+        <p:nvPicPr>
+          <p:cNvPr id="12" name="Immagine 11" descr="Immagine che contiene testo, schermata, cerchio, diagramma&#10;&#10;Il contenuto generato dall'IA potrebbe non essere corretto.">
+            <a:extLst>
+              <a:ext uri="{FF2B5EF4-FFF2-40B4-BE49-F238E27FC236}">
+                <a16:creationId xmlns:a16="http://schemas.microsoft.com/office/drawing/2014/main" id="{AEAE007B-6A8C-99BD-7749-F1EBF1475769}"/>
+              </a:ext>
+            </a:extLst>
+          </p:cNvPr>
+          <p:cNvPicPr>
+            <a:picLocks noChangeAspect="1"/>
+          </p:cNvPicPr>
+          <p:nvPr/>
+        </p:nvPicPr>
+        <p:blipFill>
+          <a:blip r:embed="rId6"/>
+          <a:stretch>
+            <a:fillRect/>
+          </a:stretch>
+        </p:blipFill>
+        <p:spPr>
+          <a:xfrm>
+            <a:off x="6478749" y="2838509"/>
+            <a:ext cx="2240972" cy="1593580"/>
+          </a:xfrm>
+          <a:prstGeom prst="rect">
+            <a:avLst/>
+          </a:prstGeom>
+        </p:spPr>
+      </p:pic>
+      <p:pic>
+        <p:nvPicPr>
+          <p:cNvPr id="14" name="Immagine 13" descr="Immagine che contiene testo, schermata, cerchio, Carattere&#10;&#10;Il contenuto generato dall'IA potrebbe non essere corretto.">
+            <a:extLst>
+              <a:ext uri="{FF2B5EF4-FFF2-40B4-BE49-F238E27FC236}">
+                <a16:creationId xmlns:a16="http://schemas.microsoft.com/office/drawing/2014/main" id="{D95841B2-2456-E748-DEA3-96AA3DD12DD3}"/>
+              </a:ext>
+            </a:extLst>
+          </p:cNvPr>
+          <p:cNvPicPr>
+            <a:picLocks noChangeAspect="1"/>
+          </p:cNvPicPr>
+          <p:nvPr/>
+        </p:nvPicPr>
+        <p:blipFill>
+          <a:blip r:embed="rId7"/>
+          <a:stretch>
+            <a:fillRect/>
+          </a:stretch>
+        </p:blipFill>
+        <p:spPr>
+          <a:xfrm>
+            <a:off x="4113756" y="2838509"/>
+            <a:ext cx="2240972" cy="1593580"/>
+          </a:xfrm>
+          <a:prstGeom prst="rect">
+            <a:avLst/>
+          </a:prstGeom>
+        </p:spPr>
+      </p:pic>
+    </p:spTree>
+    <p:extLst>
+      <p:ext uri="{BB962C8B-B14F-4D97-AF65-F5344CB8AC3E}">
+        <p14:creationId xmlns:p14="http://schemas.microsoft.com/office/powerpoint/2010/main" val="4143030323"/>
+      </p:ext>
+    </p:extLst>
+  </p:cSld>
+  <p:clrMapOvr>
+    <a:masterClrMapping/>
+  </p:clrMapOvr>
+  <p:timing>
+    <p:tnLst>
+      <p:par>
+        <p:cTn id="1" dur="indefinite" restart="never" nodeType="tmRoot">
+          <p:childTnLst>
+            <p:seq concurrent="1" nextAc="seek">
+              <p:cTn id="2" dur="indefinite" nodeType="mainSeq">
+                <p:childTnLst>
+                  <p:par>
+                    <p:cTn id="3" fill="hold">
+                      <p:stCondLst>
+                        <p:cond delay="indefinite"/>
+                      </p:stCondLst>
+                      <p:childTnLst>
+                        <p:par>
+                          <p:cTn id="4" fill="hold">
+                            <p:stCondLst>
+                              <p:cond delay="0"/>
+                            </p:stCondLst>
+                            <p:childTnLst>
+                              <p:par>
+                                <p:cTn id="5" presetID="10" presetClass="entr" presetSubtype="0" fill="hold" nodeType="clickEffect">
+                                  <p:stCondLst>
+                                    <p:cond delay="0"/>
+                                  </p:stCondLst>
+                                  <p:childTnLst>
+                                    <p:set>
+                                      <p:cBhvr>
+                                        <p:cTn id="6" dur="1" fill="hold">
+                                          <p:stCondLst>
+                                            <p:cond delay="0"/>
+                                          </p:stCondLst>
+                                        </p:cTn>
+                                        <p:tgtEl>
+                                          <p:spTgt spid="4"/>
+                                        </p:tgtEl>
+                                        <p:attrNameLst>
+                                          <p:attrName>style.visibility</p:attrName>
+                                        </p:attrNameLst>
+                                      </p:cBhvr>
+                                      <p:to>
+                                        <p:strVal val="visible"/>
+                                      </p:to>
+                                    </p:set>
+                                    <p:animEffect transition="in" filter="fade">
+                                      <p:cBhvr>
+                                        <p:cTn id="7" dur="500"/>
+                                        <p:tgtEl>
+                                          <p:spTgt spid="4"/>
+                                        </p:tgtEl>
+                                      </p:cBhvr>
+                                    </p:animEffect>
+                                  </p:childTnLst>
+                                </p:cTn>
+                              </p:par>
+                              <p:par>
+                                <p:cTn id="8" presetID="10" presetClass="entr" presetSubtype="0" fill="hold" nodeType="withEffect">
+                                  <p:stCondLst>
+                                    <p:cond delay="0"/>
+                                  </p:stCondLst>
+                                  <p:childTnLst>
+                                    <p:set>
+                                      <p:cBhvr>
+                                        <p:cTn id="9" dur="1" fill="hold">
+                                          <p:stCondLst>
+                                            <p:cond delay="0"/>
+                                          </p:stCondLst>
+                                        </p:cTn>
+                                        <p:tgtEl>
+                                          <p:spTgt spid="6"/>
+                                        </p:tgtEl>
+                                        <p:attrNameLst>
+                                          <p:attrName>style.visibility</p:attrName>
+                                        </p:attrNameLst>
+                                      </p:cBhvr>
+                                      <p:to>
+                                        <p:strVal val="visible"/>
+                                      </p:to>
+                                    </p:set>
+                                    <p:animEffect transition="in" filter="fade">
+                                      <p:cBhvr>
+                                        <p:cTn id="10" dur="500"/>
+                                        <p:tgtEl>
+                                          <p:spTgt spid="6"/>
+                                        </p:tgtEl>
+                                      </p:cBhvr>
+                                    </p:animEffect>
+                                  </p:childTnLst>
+                                </p:cTn>
+                              </p:par>
+                              <p:par>
+                                <p:cTn id="11" presetID="10" presetClass="entr" presetSubtype="0" fill="hold" nodeType="withEffect">
+                                  <p:stCondLst>
+                                    <p:cond delay="0"/>
+                                  </p:stCondLst>
+                                  <p:childTnLst>
+                                    <p:set>
+                                      <p:cBhvr>
+                                        <p:cTn id="12" dur="1" fill="hold">
+                                          <p:stCondLst>
+                                            <p:cond delay="0"/>
+                                          </p:stCondLst>
+                                        </p:cTn>
+                                        <p:tgtEl>
+                                          <p:spTgt spid="8"/>
+                                        </p:tgtEl>
+                                        <p:attrNameLst>
+                                          <p:attrName>style.visibility</p:attrName>
+                                        </p:attrNameLst>
+                                      </p:cBhvr>
+                                      <p:to>
+                                        <p:strVal val="visible"/>
+                                      </p:to>
+                                    </p:set>
+                                    <p:animEffect transition="in" filter="fade">
+                                      <p:cBhvr>
+                                        <p:cTn id="13" dur="500"/>
+                                        <p:tgtEl>
+                                          <p:spTgt spid="8"/>
+                                        </p:tgtEl>
+                                      </p:cBhvr>
+                                    </p:animEffect>
+                                  </p:childTnLst>
+                                </p:cTn>
+                              </p:par>
+                            </p:childTnLst>
+                          </p:cTn>
+                        </p:par>
+                      </p:childTnLst>
+                    </p:cTn>
+                  </p:par>
+                  <p:par>
+                    <p:cTn id="14" fill="hold">
+                      <p:stCondLst>
+                        <p:cond delay="indefinite"/>
+                      </p:stCondLst>
+                      <p:childTnLst>
+                        <p:par>
+                          <p:cTn id="15" fill="hold">
+                            <p:stCondLst>
+                              <p:cond delay="0"/>
+                            </p:stCondLst>
+                            <p:childTnLst>
+                              <p:par>
+                                <p:cTn id="16" presetID="10" presetClass="entr" presetSubtype="0" fill="hold" nodeType="clickEffect">
+                                  <p:stCondLst>
+                                    <p:cond delay="0"/>
+                                  </p:stCondLst>
+                                  <p:childTnLst>
+                                    <p:set>
+                                      <p:cBhvr>
+                                        <p:cTn id="17" dur="1" fill="hold">
+                                          <p:stCondLst>
+                                            <p:cond delay="0"/>
+                                          </p:stCondLst>
+                                        </p:cTn>
+                                        <p:tgtEl>
+                                          <p:spTgt spid="10"/>
+                                        </p:tgtEl>
+                                        <p:attrNameLst>
+                                          <p:attrName>style.visibility</p:attrName>
+                                        </p:attrNameLst>
+                                      </p:cBhvr>
+                                      <p:to>
+                                        <p:strVal val="visible"/>
+                                      </p:to>
+                                    </p:set>
+                                    <p:animEffect transition="in" filter="fade">
+                                      <p:cBhvr>
+                                        <p:cTn id="18" dur="500"/>
+                                        <p:tgtEl>
+                                          <p:spTgt spid="10"/>
+                                        </p:tgtEl>
+                                      </p:cBhvr>
+                                    </p:animEffect>
+                                  </p:childTnLst>
+                                </p:cTn>
+                              </p:par>
+                              <p:par>
+                                <p:cTn id="19" presetID="10" presetClass="entr" presetSubtype="0" fill="hold" nodeType="withEffect">
+                                  <p:stCondLst>
+                                    <p:cond delay="0"/>
+                                  </p:stCondLst>
+                                  <p:childTnLst>
+                                    <p:set>
+                                      <p:cBhvr>
+                                        <p:cTn id="20" dur="1" fill="hold">
+                                          <p:stCondLst>
+                                            <p:cond delay="0"/>
+                                          </p:stCondLst>
+                                        </p:cTn>
+                                        <p:tgtEl>
+                                          <p:spTgt spid="14"/>
+                                        </p:tgtEl>
+                                        <p:attrNameLst>
+                                          <p:attrName>style.visibility</p:attrName>
+                                        </p:attrNameLst>
+                                      </p:cBhvr>
+                                      <p:to>
+                                        <p:strVal val="visible"/>
+                                      </p:to>
+                                    </p:set>
+                                    <p:animEffect transition="in" filter="fade">
+                                      <p:cBhvr>
+                                        <p:cTn id="21" dur="500"/>
+                                        <p:tgtEl>
+                                          <p:spTgt spid="14"/>
+                                        </p:tgtEl>
+                                      </p:cBhvr>
+                                    </p:animEffect>
+                                  </p:childTnLst>
+                                </p:cTn>
+                              </p:par>
+                              <p:par>
+                                <p:cTn id="22" presetID="10" presetClass="entr" presetSubtype="0" fill="hold" nodeType="withEffect">
+                                  <p:stCondLst>
+                                    <p:cond delay="0"/>
+                                  </p:stCondLst>
+                                  <p:childTnLst>
+                                    <p:set>
+                                      <p:cBhvr>
+                                        <p:cTn id="23" dur="1" fill="hold">
+                                          <p:stCondLst>
+                                            <p:cond delay="0"/>
+                                          </p:stCondLst>
+                                        </p:cTn>
+                                        <p:tgtEl>
+                                          <p:spTgt spid="12"/>
+                                        </p:tgtEl>
+                                        <p:attrNameLst>
+                                          <p:attrName>style.visibility</p:attrName>
+                                        </p:attrNameLst>
+                                      </p:cBhvr>
+                                      <p:to>
+                                        <p:strVal val="visible"/>
+                                      </p:to>
+                                    </p:set>
+                                    <p:animEffect transition="in" filter="fade">
+                                      <p:cBhvr>
+                                        <p:cTn id="24" dur="500"/>
+                                        <p:tgtEl>
+                                          <p:spTgt spid="12"/>
+                                        </p:tgtEl>
+                                      </p:cBhvr>
+                                    </p:animEffect>
+                                  </p:childTnLst>
+                                </p:cTn>
+                              </p:par>
+                            </p:childTnLst>
+                          </p:cTn>
+                        </p:par>
+                      </p:childTnLst>
+                    </p:cTn>
+                  </p:par>
+                </p:childTnLst>
+              </p:cTn>
+              <p:prevCondLst>
+                <p:cond evt="onPrev" delay="0">
+                  <p:tgtEl>
+                    <p:sldTgt/>
+                  </p:tgtEl>
+                </p:cond>
+              </p:prevCondLst>
+              <p:nextCondLst>
+                <p:cond evt="onNext" delay="0">
+                  <p:tgtEl>
+                    <p:sldTgt/>
+                  </p:tgtEl>
+                </p:cond>
+              </p:nextCondLst>
+            </p:seq>
+          </p:childTnLst>
+        </p:cTn>
+      </p:par>
+    </p:tnLst>
+  </p:timing>
+</p:sld>
+</file>
+
+<file path=ppt/slides/slide12.xml><?xml version="1.0" encoding="utf-8"?>
+<p:sld xmlns:a="http://schemas.openxmlformats.org/drawingml/2006/main" xmlns:r="http://schemas.openxmlformats.org/officeDocument/2006/relationships" xmlns:p="http://schemas.openxmlformats.org/presentationml/2006/main">
+  <p:cSld>
+    <p:spTree>
+      <p:nvGrpSpPr>
+        <p:cNvPr id="1" name=""/>
+        <p:cNvGrpSpPr/>
+        <p:nvPr/>
+      </p:nvGrpSpPr>
+      <p:grpSpPr>
+        <a:xfrm>
+          <a:off x="0" y="0"/>
+          <a:ext cx="0" cy="0"/>
+          <a:chOff x="0" y="0"/>
+          <a:chExt cx="0" cy="0"/>
+        </a:xfrm>
+      </p:grpSpPr>
+      <p:sp>
+        <p:nvSpPr>
+          <p:cNvPr id="2" name="Titolo 1">
+            <a:extLst>
+              <a:ext uri="{FF2B5EF4-FFF2-40B4-BE49-F238E27FC236}">
                 <a16:creationId xmlns:a16="http://schemas.microsoft.com/office/drawing/2014/main" id="{A05A74FC-2392-6C82-B228-D989AD37A21C}"/>
               </a:ext>
             </a:extLst>
@@ -7603,7 +8123,7 @@
 </p:sld>
 </file>
 
-<file path=ppt/slides/slide12.xml><?xml version="1.0" encoding="utf-8"?>
+<file path=ppt/slides/slide13.xml><?xml version="1.0" encoding="utf-8"?>
 <p:sld xmlns:a="http://schemas.openxmlformats.org/drawingml/2006/main" xmlns:r="http://schemas.openxmlformats.org/officeDocument/2006/relationships" xmlns:p="http://schemas.openxmlformats.org/presentationml/2006/main">
   <p:cSld>
     <p:spTree>
@@ -7727,7 +8247,7 @@
 </p:sld>
 </file>
 
-<file path=ppt/slides/slide13.xml><?xml version="1.0" encoding="utf-8"?>
+<file path=ppt/slides/slide14.xml><?xml version="1.0" encoding="utf-8"?>
 <p:sld xmlns:a="http://schemas.openxmlformats.org/drawingml/2006/main" xmlns:r="http://schemas.openxmlformats.org/officeDocument/2006/relationships" xmlns:p="http://schemas.openxmlformats.org/presentationml/2006/main">
   <p:cSld>
     <p:spTree>
@@ -8096,7 +8616,7 @@
 </p:sld>
 </file>
 
-<file path=ppt/slides/slide14.xml><?xml version="1.0" encoding="utf-8"?>
+<file path=ppt/slides/slide15.xml><?xml version="1.0" encoding="utf-8"?>
 <p:sld xmlns:a="http://schemas.openxmlformats.org/drawingml/2006/main" xmlns:r="http://schemas.openxmlformats.org/officeDocument/2006/relationships" xmlns:p="http://schemas.openxmlformats.org/presentationml/2006/main">
   <p:cSld>
     <p:spTree>
@@ -8338,7 +8858,7 @@
 </p:sld>
 </file>
 
-<file path=ppt/slides/slide15.xml><?xml version="1.0" encoding="utf-8"?>
+<file path=ppt/slides/slide16.xml><?xml version="1.0" encoding="utf-8"?>
 <p:sld xmlns:a="http://schemas.openxmlformats.org/drawingml/2006/main" xmlns:r="http://schemas.openxmlformats.org/officeDocument/2006/relationships" xmlns:p="http://schemas.openxmlformats.org/presentationml/2006/main">
   <p:cSld>
     <p:spTree>
@@ -8715,7 +9235,7 @@
 </p:sld>
 </file>
 
-<file path=ppt/slides/slide16.xml><?xml version="1.0" encoding="utf-8"?>
+<file path=ppt/slides/slide17.xml><?xml version="1.0" encoding="utf-8"?>
 <p:sld xmlns:a="http://schemas.openxmlformats.org/drawingml/2006/main" xmlns:r="http://schemas.openxmlformats.org/officeDocument/2006/relationships" xmlns:p="http://schemas.openxmlformats.org/presentationml/2006/main">
   <p:cSld>
     <p:spTree>
@@ -9159,7 +9679,7 @@
 </p:sld>
 </file>
 
-<file path=ppt/slides/slide17.xml><?xml version="1.0" encoding="utf-8"?>
+<file path=ppt/slides/slide18.xml><?xml version="1.0" encoding="utf-8"?>
 <p:sld xmlns:a="http://schemas.openxmlformats.org/drawingml/2006/main" xmlns:r="http://schemas.openxmlformats.org/officeDocument/2006/relationships" xmlns:p="http://schemas.openxmlformats.org/presentationml/2006/main">
   <p:cSld>
     <p:spTree>
@@ -9383,7 +9903,7 @@
 </p:sld>
 </file>
 
-<file path=ppt/slides/slide18.xml><?xml version="1.0" encoding="utf-8"?>
+<file path=ppt/slides/slide19.xml><?xml version="1.0" encoding="utf-8"?>
 <p:sld xmlns:a="http://schemas.openxmlformats.org/drawingml/2006/main" xmlns:r="http://schemas.openxmlformats.org/officeDocument/2006/relationships" xmlns:p="http://schemas.openxmlformats.org/presentationml/2006/main">
   <p:cSld>
     <p:spTree>
@@ -9607,7 +10127,74 @@
 </p:sld>
 </file>
 
-<file path=ppt/slides/slide19.xml><?xml version="1.0" encoding="utf-8"?>
+<file path=ppt/slides/slide2.xml><?xml version="1.0" encoding="utf-8"?>
+<p:sld xmlns:a="http://schemas.openxmlformats.org/drawingml/2006/main" xmlns:r="http://schemas.openxmlformats.org/officeDocument/2006/relationships" xmlns:p="http://schemas.openxmlformats.org/presentationml/2006/main">
+  <p:cSld>
+    <p:spTree>
+      <p:nvGrpSpPr>
+        <p:cNvPr id="1" name="Shape 64"/>
+        <p:cNvGrpSpPr/>
+        <p:nvPr/>
+      </p:nvGrpSpPr>
+      <p:grpSpPr>
+        <a:xfrm>
+          <a:off x="0" y="0"/>
+          <a:ext cx="0" cy="0"/>
+          <a:chOff x="0" y="0"/>
+          <a:chExt cx="0" cy="0"/>
+        </a:xfrm>
+      </p:grpSpPr>
+      <p:sp>
+        <p:nvSpPr>
+          <p:cNvPr id="65" name="Google Shape;65;p14"/>
+          <p:cNvSpPr txBox="1">
+            <a:spLocks noGrp="1"/>
+          </p:cNvSpPr>
+          <p:nvPr>
+            <p:ph type="title"/>
+          </p:nvPr>
+        </p:nvSpPr>
+        <p:spPr>
+          <a:xfrm>
+            <a:off x="490250" y="526350"/>
+            <a:ext cx="5604000" cy="4090800"/>
+          </a:xfrm>
+          <a:prstGeom prst="rect">
+            <a:avLst/>
+          </a:prstGeom>
+        </p:spPr>
+        <p:txBody>
+          <a:bodyPr spcFirstLastPara="1" wrap="square" lIns="91425" tIns="91425" rIns="91425" bIns="91425" anchor="ctr" anchorCtr="0">
+            <a:noAutofit/>
+          </a:bodyPr>
+          <a:lstStyle/>
+          <a:p>
+            <a:pPr marL="0" lvl="0" indent="0" algn="l" rtl="0">
+              <a:spcBef>
+                <a:spcPts val="0"/>
+              </a:spcBef>
+              <a:spcAft>
+                <a:spcPts val="0"/>
+              </a:spcAft>
+              <a:buNone/>
+            </a:pPr>
+            <a:r>
+              <a:rPr lang="it"/>
+              <a:t>Il progetto</a:t>
+            </a:r>
+            <a:endParaRPr/>
+          </a:p>
+        </p:txBody>
+      </p:sp>
+    </p:spTree>
+  </p:cSld>
+  <p:clrMapOvr>
+    <a:masterClrMapping/>
+  </p:clrMapOvr>
+</p:sld>
+</file>
+
+<file path=ppt/slides/slide20.xml><?xml version="1.0" encoding="utf-8"?>
 <p:sld xmlns:a="http://schemas.openxmlformats.org/drawingml/2006/main" xmlns:r="http://schemas.openxmlformats.org/officeDocument/2006/relationships" xmlns:p="http://schemas.openxmlformats.org/presentationml/2006/main">
   <p:cSld>
     <p:spTree>
@@ -9831,74 +10418,7 @@
 </p:sld>
 </file>
 
-<file path=ppt/slides/slide2.xml><?xml version="1.0" encoding="utf-8"?>
-<p:sld xmlns:a="http://schemas.openxmlformats.org/drawingml/2006/main" xmlns:r="http://schemas.openxmlformats.org/officeDocument/2006/relationships" xmlns:p="http://schemas.openxmlformats.org/presentationml/2006/main">
-  <p:cSld>
-    <p:spTree>
-      <p:nvGrpSpPr>
-        <p:cNvPr id="1" name="Shape 64"/>
-        <p:cNvGrpSpPr/>
-        <p:nvPr/>
-      </p:nvGrpSpPr>
-      <p:grpSpPr>
-        <a:xfrm>
-          <a:off x="0" y="0"/>
-          <a:ext cx="0" cy="0"/>
-          <a:chOff x="0" y="0"/>
-          <a:chExt cx="0" cy="0"/>
-        </a:xfrm>
-      </p:grpSpPr>
-      <p:sp>
-        <p:nvSpPr>
-          <p:cNvPr id="65" name="Google Shape;65;p14"/>
-          <p:cNvSpPr txBox="1">
-            <a:spLocks noGrp="1"/>
-          </p:cNvSpPr>
-          <p:nvPr>
-            <p:ph type="title"/>
-          </p:nvPr>
-        </p:nvSpPr>
-        <p:spPr>
-          <a:xfrm>
-            <a:off x="490250" y="526350"/>
-            <a:ext cx="5604000" cy="4090800"/>
-          </a:xfrm>
-          <a:prstGeom prst="rect">
-            <a:avLst/>
-          </a:prstGeom>
-        </p:spPr>
-        <p:txBody>
-          <a:bodyPr spcFirstLastPara="1" wrap="square" lIns="91425" tIns="91425" rIns="91425" bIns="91425" anchor="ctr" anchorCtr="0">
-            <a:noAutofit/>
-          </a:bodyPr>
-          <a:lstStyle/>
-          <a:p>
-            <a:pPr marL="0" lvl="0" indent="0" algn="l" rtl="0">
-              <a:spcBef>
-                <a:spcPts val="0"/>
-              </a:spcBef>
-              <a:spcAft>
-                <a:spcPts val="0"/>
-              </a:spcAft>
-              <a:buNone/>
-            </a:pPr>
-            <a:r>
-              <a:rPr lang="it"/>
-              <a:t>Il progetto</a:t>
-            </a:r>
-            <a:endParaRPr/>
-          </a:p>
-        </p:txBody>
-      </p:sp>
-    </p:spTree>
-  </p:cSld>
-  <p:clrMapOvr>
-    <a:masterClrMapping/>
-  </p:clrMapOvr>
-</p:sld>
-</file>
-
-<file path=ppt/slides/slide20.xml><?xml version="1.0" encoding="utf-8"?>
+<file path=ppt/slides/slide21.xml><?xml version="1.0" encoding="utf-8"?>
 <p:sld xmlns:a="http://schemas.openxmlformats.org/drawingml/2006/main" xmlns:r="http://schemas.openxmlformats.org/officeDocument/2006/relationships" xmlns:p="http://schemas.openxmlformats.org/presentationml/2006/main">
   <p:cSld>
     <p:spTree>
@@ -10122,7 +10642,7 @@
 </p:sld>
 </file>
 
-<file path=ppt/slides/slide21.xml><?xml version="1.0" encoding="utf-8"?>
+<file path=ppt/slides/slide22.xml><?xml version="1.0" encoding="utf-8"?>
 <p:sld xmlns:a="http://schemas.openxmlformats.org/drawingml/2006/main" xmlns:r="http://schemas.openxmlformats.org/officeDocument/2006/relationships" xmlns:p="http://schemas.openxmlformats.org/presentationml/2006/main">
   <p:cSld>
     <p:spTree>

--- a/Documenti/Relazione Finale/PP relazione.pptx
+++ b/Documenti/Relazione Finale/PP relazione.pptx
@@ -5,7 +5,7 @@
     <p:sldMasterId id="2147483659" r:id="rId1"/>
   </p:sldMasterIdLst>
   <p:notesMasterIdLst>
-    <p:notesMasterId r:id="rId24"/>
+    <p:notesMasterId r:id="rId25"/>
   </p:notesMasterIdLst>
   <p:sldIdLst>
     <p:sldId id="256" r:id="rId2"/>
@@ -19,33 +19,34 @@
     <p:sldId id="265" r:id="rId10"/>
     <p:sldId id="260" r:id="rId11"/>
     <p:sldId id="279" r:id="rId12"/>
-    <p:sldId id="267" r:id="rId13"/>
-    <p:sldId id="269" r:id="rId14"/>
-    <p:sldId id="270" r:id="rId15"/>
-    <p:sldId id="271" r:id="rId16"/>
-    <p:sldId id="272" r:id="rId17"/>
-    <p:sldId id="273" r:id="rId18"/>
-    <p:sldId id="274" r:id="rId19"/>
-    <p:sldId id="275" r:id="rId20"/>
-    <p:sldId id="277" r:id="rId21"/>
-    <p:sldId id="278" r:id="rId22"/>
-    <p:sldId id="276" r:id="rId23"/>
+    <p:sldId id="280" r:id="rId13"/>
+    <p:sldId id="267" r:id="rId14"/>
+    <p:sldId id="269" r:id="rId15"/>
+    <p:sldId id="270" r:id="rId16"/>
+    <p:sldId id="271" r:id="rId17"/>
+    <p:sldId id="272" r:id="rId18"/>
+    <p:sldId id="273" r:id="rId19"/>
+    <p:sldId id="274" r:id="rId20"/>
+    <p:sldId id="275" r:id="rId21"/>
+    <p:sldId id="277" r:id="rId22"/>
+    <p:sldId id="278" r:id="rId23"/>
+    <p:sldId id="276" r:id="rId24"/>
   </p:sldIdLst>
   <p:sldSz cx="9144000" cy="5143500" type="screen16x9"/>
   <p:notesSz cx="6858000" cy="9144000"/>
   <p:embeddedFontLst>
     <p:embeddedFont>
       <p:font typeface="Amasis MT Pro" panose="02040504050005020304" pitchFamily="18" charset="0"/>
-      <p:regular r:id="rId25"/>
-      <p:bold r:id="rId26"/>
-      <p:italic r:id="rId27"/>
-      <p:boldItalic r:id="rId28"/>
+      <p:regular r:id="rId26"/>
+      <p:bold r:id="rId27"/>
+      <p:italic r:id="rId28"/>
+      <p:boldItalic r:id="rId29"/>
     </p:embeddedFont>
     <p:embeddedFont>
       <p:font typeface="Old Standard TT" panose="020B0604020202020204" charset="0"/>
-      <p:regular r:id="rId29"/>
-      <p:bold r:id="rId30"/>
-      <p:italic r:id="rId31"/>
+      <p:regular r:id="rId30"/>
+      <p:bold r:id="rId31"/>
+      <p:italic r:id="rId32"/>
     </p:embeddedFont>
   </p:embeddedFontLst>
   <p:defaultTextStyle>
@@ -7981,6 +7982,466 @@
           <p:cNvPr id="2" name="Titolo 1">
             <a:extLst>
               <a:ext uri="{FF2B5EF4-FFF2-40B4-BE49-F238E27FC236}">
+                <a16:creationId xmlns:a16="http://schemas.microsoft.com/office/drawing/2014/main" id="{E37A1EEA-6AF2-7B2F-FC04-0640DADB58C3}"/>
+              </a:ext>
+            </a:extLst>
+          </p:cNvPr>
+          <p:cNvSpPr>
+            <a:spLocks noGrp="1"/>
+          </p:cNvSpPr>
+          <p:nvPr>
+            <p:ph type="title"/>
+          </p:nvPr>
+        </p:nvSpPr>
+        <p:spPr/>
+        <p:txBody>
+          <a:bodyPr/>
+          <a:lstStyle/>
+          <a:p>
+            <a:pPr algn="ctr"/>
+            <a:r>
+              <a:rPr lang="it-IT" dirty="0"/>
+              <a:t>Struttura </a:t>
+            </a:r>
+            <a:r>
+              <a:rPr lang="it-IT" dirty="0" err="1"/>
+              <a:t>DataBase</a:t>
+            </a:r>
+            <a:r>
+              <a:rPr lang="it-IT" dirty="0"/>
+              <a:t> SQL</a:t>
+            </a:r>
+          </a:p>
+        </p:txBody>
+      </p:sp>
+      <p:pic>
+        <p:nvPicPr>
+          <p:cNvPr id="4" name="Immagine 3" descr="Immagine che contiene testo, schermata, Carattere, linea&#10;&#10;Il contenuto generato dall'IA potrebbe non essere corretto.">
+            <a:extLst>
+              <a:ext uri="{FF2B5EF4-FFF2-40B4-BE49-F238E27FC236}">
+                <a16:creationId xmlns:a16="http://schemas.microsoft.com/office/drawing/2014/main" id="{3A88FB4C-CC61-BC27-1DBC-EBF02223BC0C}"/>
+              </a:ext>
+            </a:extLst>
+          </p:cNvPr>
+          <p:cNvPicPr>
+            <a:picLocks noChangeAspect="1"/>
+          </p:cNvPicPr>
+          <p:nvPr/>
+        </p:nvPicPr>
+        <p:blipFill>
+          <a:blip r:embed="rId2"/>
+          <a:stretch>
+            <a:fillRect/>
+          </a:stretch>
+        </p:blipFill>
+        <p:spPr>
+          <a:xfrm>
+            <a:off x="2450475" y="997820"/>
+            <a:ext cx="4243048" cy="1367388"/>
+          </a:xfrm>
+          <a:prstGeom prst="rect">
+            <a:avLst/>
+          </a:prstGeom>
+        </p:spPr>
+      </p:pic>
+      <p:pic>
+        <p:nvPicPr>
+          <p:cNvPr id="6" name="Immagine 5" descr="Immagine che contiene testo, schermata, Carattere, linea&#10;&#10;Il contenuto generato dall'IA potrebbe non essere corretto.">
+            <a:extLst>
+              <a:ext uri="{FF2B5EF4-FFF2-40B4-BE49-F238E27FC236}">
+                <a16:creationId xmlns:a16="http://schemas.microsoft.com/office/drawing/2014/main" id="{A31ABDCE-E2A6-EA34-D785-76A91AE119E6}"/>
+              </a:ext>
+            </a:extLst>
+          </p:cNvPr>
+          <p:cNvPicPr>
+            <a:picLocks noChangeAspect="1"/>
+          </p:cNvPicPr>
+          <p:nvPr/>
+        </p:nvPicPr>
+        <p:blipFill>
+          <a:blip r:embed="rId3"/>
+          <a:stretch>
+            <a:fillRect/>
+          </a:stretch>
+        </p:blipFill>
+        <p:spPr>
+          <a:xfrm>
+            <a:off x="2805621" y="2363907"/>
+            <a:ext cx="3289018" cy="1292661"/>
+          </a:xfrm>
+          <a:prstGeom prst="rect">
+            <a:avLst/>
+          </a:prstGeom>
+        </p:spPr>
+      </p:pic>
+      <p:pic>
+        <p:nvPicPr>
+          <p:cNvPr id="8" name="Immagine 7" descr="Immagine che contiene testo, schermata, Carattere, numero&#10;&#10;Il contenuto generato dall'IA potrebbe non essere corretto.">
+            <a:extLst>
+              <a:ext uri="{FF2B5EF4-FFF2-40B4-BE49-F238E27FC236}">
+                <a16:creationId xmlns:a16="http://schemas.microsoft.com/office/drawing/2014/main" id="{E420661F-4F64-BDA6-6746-3E208A6A7A0B}"/>
+              </a:ext>
+            </a:extLst>
+          </p:cNvPr>
+          <p:cNvPicPr>
+            <a:picLocks noChangeAspect="1"/>
+          </p:cNvPicPr>
+          <p:nvPr/>
+        </p:nvPicPr>
+        <p:blipFill>
+          <a:blip r:embed="rId4"/>
+          <a:stretch>
+            <a:fillRect/>
+          </a:stretch>
+        </p:blipFill>
+        <p:spPr>
+          <a:xfrm>
+            <a:off x="3001506" y="3656568"/>
+            <a:ext cx="2897247" cy="1401459"/>
+          </a:xfrm>
+          <a:prstGeom prst="rect">
+            <a:avLst/>
+          </a:prstGeom>
+        </p:spPr>
+      </p:pic>
+    </p:spTree>
+    <p:extLst>
+      <p:ext uri="{BB962C8B-B14F-4D97-AF65-F5344CB8AC3E}">
+        <p14:creationId xmlns:p14="http://schemas.microsoft.com/office/powerpoint/2010/main" val="622900377"/>
+      </p:ext>
+    </p:extLst>
+  </p:cSld>
+  <p:clrMapOvr>
+    <a:masterClrMapping/>
+  </p:clrMapOvr>
+  <p:timing>
+    <p:tnLst>
+      <p:par>
+        <p:cTn id="1" dur="indefinite" restart="never" nodeType="tmRoot">
+          <p:childTnLst>
+            <p:seq concurrent="1" nextAc="seek">
+              <p:cTn id="2" dur="indefinite" nodeType="mainSeq">
+                <p:childTnLst>
+                  <p:par>
+                    <p:cTn id="3" fill="hold">
+                      <p:stCondLst>
+                        <p:cond delay="indefinite"/>
+                      </p:stCondLst>
+                      <p:childTnLst>
+                        <p:par>
+                          <p:cTn id="4" fill="hold">
+                            <p:stCondLst>
+                              <p:cond delay="0"/>
+                            </p:stCondLst>
+                            <p:childTnLst>
+                              <p:par>
+                                <p:cTn id="5" presetID="2" presetClass="entr" presetSubtype="4" fill="hold" nodeType="clickEffect">
+                                  <p:stCondLst>
+                                    <p:cond delay="0"/>
+                                  </p:stCondLst>
+                                  <p:childTnLst>
+                                    <p:set>
+                                      <p:cBhvr>
+                                        <p:cTn id="6" dur="1" fill="hold">
+                                          <p:stCondLst>
+                                            <p:cond delay="0"/>
+                                          </p:stCondLst>
+                                        </p:cTn>
+                                        <p:tgtEl>
+                                          <p:spTgt spid="4"/>
+                                        </p:tgtEl>
+                                        <p:attrNameLst>
+                                          <p:attrName>style.visibility</p:attrName>
+                                        </p:attrNameLst>
+                                      </p:cBhvr>
+                                      <p:to>
+                                        <p:strVal val="visible"/>
+                                      </p:to>
+                                    </p:set>
+                                    <p:anim calcmode="lin" valueType="num">
+                                      <p:cBhvr additive="base">
+                                        <p:cTn id="7" dur="500" fill="hold"/>
+                                        <p:tgtEl>
+                                          <p:spTgt spid="4"/>
+                                        </p:tgtEl>
+                                        <p:attrNameLst>
+                                          <p:attrName>ppt_x</p:attrName>
+                                        </p:attrNameLst>
+                                      </p:cBhvr>
+                                      <p:tavLst>
+                                        <p:tav tm="0">
+                                          <p:val>
+                                            <p:strVal val="#ppt_x"/>
+                                          </p:val>
+                                        </p:tav>
+                                        <p:tav tm="100000">
+                                          <p:val>
+                                            <p:strVal val="#ppt_x"/>
+                                          </p:val>
+                                        </p:tav>
+                                      </p:tavLst>
+                                    </p:anim>
+                                    <p:anim calcmode="lin" valueType="num">
+                                      <p:cBhvr additive="base">
+                                        <p:cTn id="8" dur="500" fill="hold"/>
+                                        <p:tgtEl>
+                                          <p:spTgt spid="4"/>
+                                        </p:tgtEl>
+                                        <p:attrNameLst>
+                                          <p:attrName>ppt_y</p:attrName>
+                                        </p:attrNameLst>
+                                      </p:cBhvr>
+                                      <p:tavLst>
+                                        <p:tav tm="0">
+                                          <p:val>
+                                            <p:strVal val="1+#ppt_h/2"/>
+                                          </p:val>
+                                        </p:tav>
+                                        <p:tav tm="100000">
+                                          <p:val>
+                                            <p:strVal val="#ppt_y"/>
+                                          </p:val>
+                                        </p:tav>
+                                      </p:tavLst>
+                                    </p:anim>
+                                  </p:childTnLst>
+                                </p:cTn>
+                              </p:par>
+                            </p:childTnLst>
+                          </p:cTn>
+                        </p:par>
+                      </p:childTnLst>
+                    </p:cTn>
+                  </p:par>
+                  <p:par>
+                    <p:cTn id="9" fill="hold">
+                      <p:stCondLst>
+                        <p:cond delay="indefinite"/>
+                      </p:stCondLst>
+                      <p:childTnLst>
+                        <p:par>
+                          <p:cTn id="10" fill="hold">
+                            <p:stCondLst>
+                              <p:cond delay="0"/>
+                            </p:stCondLst>
+                            <p:childTnLst>
+                              <p:par>
+                                <p:cTn id="11" presetID="2" presetClass="entr" presetSubtype="4" fill="hold" nodeType="clickEffect">
+                                  <p:stCondLst>
+                                    <p:cond delay="0"/>
+                                  </p:stCondLst>
+                                  <p:childTnLst>
+                                    <p:set>
+                                      <p:cBhvr>
+                                        <p:cTn id="12" dur="1" fill="hold">
+                                          <p:stCondLst>
+                                            <p:cond delay="0"/>
+                                          </p:stCondLst>
+                                        </p:cTn>
+                                        <p:tgtEl>
+                                          <p:spTgt spid="6"/>
+                                        </p:tgtEl>
+                                        <p:attrNameLst>
+                                          <p:attrName>style.visibility</p:attrName>
+                                        </p:attrNameLst>
+                                      </p:cBhvr>
+                                      <p:to>
+                                        <p:strVal val="visible"/>
+                                      </p:to>
+                                    </p:set>
+                                    <p:anim calcmode="lin" valueType="num">
+                                      <p:cBhvr additive="base">
+                                        <p:cTn id="13" dur="500" fill="hold"/>
+                                        <p:tgtEl>
+                                          <p:spTgt spid="6"/>
+                                        </p:tgtEl>
+                                        <p:attrNameLst>
+                                          <p:attrName>ppt_x</p:attrName>
+                                        </p:attrNameLst>
+                                      </p:cBhvr>
+                                      <p:tavLst>
+                                        <p:tav tm="0">
+                                          <p:val>
+                                            <p:strVal val="#ppt_x"/>
+                                          </p:val>
+                                        </p:tav>
+                                        <p:tav tm="100000">
+                                          <p:val>
+                                            <p:strVal val="#ppt_x"/>
+                                          </p:val>
+                                        </p:tav>
+                                      </p:tavLst>
+                                    </p:anim>
+                                    <p:anim calcmode="lin" valueType="num">
+                                      <p:cBhvr additive="base">
+                                        <p:cTn id="14" dur="500" fill="hold"/>
+                                        <p:tgtEl>
+                                          <p:spTgt spid="6"/>
+                                        </p:tgtEl>
+                                        <p:attrNameLst>
+                                          <p:attrName>ppt_y</p:attrName>
+                                        </p:attrNameLst>
+                                      </p:cBhvr>
+                                      <p:tavLst>
+                                        <p:tav tm="0">
+                                          <p:val>
+                                            <p:strVal val="1+#ppt_h/2"/>
+                                          </p:val>
+                                        </p:tav>
+                                        <p:tav tm="100000">
+                                          <p:val>
+                                            <p:strVal val="#ppt_y"/>
+                                          </p:val>
+                                        </p:tav>
+                                      </p:tavLst>
+                                    </p:anim>
+                                  </p:childTnLst>
+                                </p:cTn>
+                              </p:par>
+                            </p:childTnLst>
+                          </p:cTn>
+                        </p:par>
+                      </p:childTnLst>
+                    </p:cTn>
+                  </p:par>
+                  <p:par>
+                    <p:cTn id="15" fill="hold">
+                      <p:stCondLst>
+                        <p:cond delay="indefinite"/>
+                      </p:stCondLst>
+                      <p:childTnLst>
+                        <p:par>
+                          <p:cTn id="16" fill="hold">
+                            <p:stCondLst>
+                              <p:cond delay="0"/>
+                            </p:stCondLst>
+                            <p:childTnLst>
+                              <p:par>
+                                <p:cTn id="17" presetID="2" presetClass="entr" presetSubtype="4" fill="hold" nodeType="clickEffect">
+                                  <p:stCondLst>
+                                    <p:cond delay="0"/>
+                                  </p:stCondLst>
+                                  <p:childTnLst>
+                                    <p:set>
+                                      <p:cBhvr>
+                                        <p:cTn id="18" dur="1" fill="hold">
+                                          <p:stCondLst>
+                                            <p:cond delay="0"/>
+                                          </p:stCondLst>
+                                        </p:cTn>
+                                        <p:tgtEl>
+                                          <p:spTgt spid="8"/>
+                                        </p:tgtEl>
+                                        <p:attrNameLst>
+                                          <p:attrName>style.visibility</p:attrName>
+                                        </p:attrNameLst>
+                                      </p:cBhvr>
+                                      <p:to>
+                                        <p:strVal val="visible"/>
+                                      </p:to>
+                                    </p:set>
+                                    <p:anim calcmode="lin" valueType="num">
+                                      <p:cBhvr additive="base">
+                                        <p:cTn id="19" dur="500" fill="hold"/>
+                                        <p:tgtEl>
+                                          <p:spTgt spid="8"/>
+                                        </p:tgtEl>
+                                        <p:attrNameLst>
+                                          <p:attrName>ppt_x</p:attrName>
+                                        </p:attrNameLst>
+                                      </p:cBhvr>
+                                      <p:tavLst>
+                                        <p:tav tm="0">
+                                          <p:val>
+                                            <p:strVal val="#ppt_x"/>
+                                          </p:val>
+                                        </p:tav>
+                                        <p:tav tm="100000">
+                                          <p:val>
+                                            <p:strVal val="#ppt_x"/>
+                                          </p:val>
+                                        </p:tav>
+                                      </p:tavLst>
+                                    </p:anim>
+                                    <p:anim calcmode="lin" valueType="num">
+                                      <p:cBhvr additive="base">
+                                        <p:cTn id="20" dur="500" fill="hold"/>
+                                        <p:tgtEl>
+                                          <p:spTgt spid="8"/>
+                                        </p:tgtEl>
+                                        <p:attrNameLst>
+                                          <p:attrName>ppt_y</p:attrName>
+                                        </p:attrNameLst>
+                                      </p:cBhvr>
+                                      <p:tavLst>
+                                        <p:tav tm="0">
+                                          <p:val>
+                                            <p:strVal val="1+#ppt_h/2"/>
+                                          </p:val>
+                                        </p:tav>
+                                        <p:tav tm="100000">
+                                          <p:val>
+                                            <p:strVal val="#ppt_y"/>
+                                          </p:val>
+                                        </p:tav>
+                                      </p:tavLst>
+                                    </p:anim>
+                                  </p:childTnLst>
+                                </p:cTn>
+                              </p:par>
+                            </p:childTnLst>
+                          </p:cTn>
+                        </p:par>
+                      </p:childTnLst>
+                    </p:cTn>
+                  </p:par>
+                </p:childTnLst>
+              </p:cTn>
+              <p:prevCondLst>
+                <p:cond evt="onPrev" delay="0">
+                  <p:tgtEl>
+                    <p:sldTgt/>
+                  </p:tgtEl>
+                </p:cond>
+              </p:prevCondLst>
+              <p:nextCondLst>
+                <p:cond evt="onNext" delay="0">
+                  <p:tgtEl>
+                    <p:sldTgt/>
+                  </p:tgtEl>
+                </p:cond>
+              </p:nextCondLst>
+            </p:seq>
+          </p:childTnLst>
+        </p:cTn>
+      </p:par>
+    </p:tnLst>
+  </p:timing>
+</p:sld>
+</file>
+
+<file path=ppt/slides/slide13.xml><?xml version="1.0" encoding="utf-8"?>
+<p:sld xmlns:a="http://schemas.openxmlformats.org/drawingml/2006/main" xmlns:r="http://schemas.openxmlformats.org/officeDocument/2006/relationships" xmlns:p="http://schemas.openxmlformats.org/presentationml/2006/main">
+  <p:cSld>
+    <p:spTree>
+      <p:nvGrpSpPr>
+        <p:cNvPr id="1" name=""/>
+        <p:cNvGrpSpPr/>
+        <p:nvPr/>
+      </p:nvGrpSpPr>
+      <p:grpSpPr>
+        <a:xfrm>
+          <a:off x="0" y="0"/>
+          <a:ext cx="0" cy="0"/>
+          <a:chOff x="0" y="0"/>
+          <a:chExt cx="0" cy="0"/>
+        </a:xfrm>
+      </p:grpSpPr>
+      <p:sp>
+        <p:nvSpPr>
+          <p:cNvPr id="2" name="Titolo 1">
+            <a:extLst>
+              <a:ext uri="{FF2B5EF4-FFF2-40B4-BE49-F238E27FC236}">
                 <a16:creationId xmlns:a16="http://schemas.microsoft.com/office/drawing/2014/main" id="{A05A74FC-2392-6C82-B228-D989AD37A21C}"/>
               </a:ext>
             </a:extLst>
@@ -8123,7 +8584,7 @@
 </p:sld>
 </file>
 
-<file path=ppt/slides/slide13.xml><?xml version="1.0" encoding="utf-8"?>
+<file path=ppt/slides/slide14.xml><?xml version="1.0" encoding="utf-8"?>
 <p:sld xmlns:a="http://schemas.openxmlformats.org/drawingml/2006/main" xmlns:r="http://schemas.openxmlformats.org/officeDocument/2006/relationships" xmlns:p="http://schemas.openxmlformats.org/presentationml/2006/main">
   <p:cSld>
     <p:spTree>
@@ -8247,7 +8708,7 @@
 </p:sld>
 </file>
 
-<file path=ppt/slides/slide14.xml><?xml version="1.0" encoding="utf-8"?>
+<file path=ppt/slides/slide15.xml><?xml version="1.0" encoding="utf-8"?>
 <p:sld xmlns:a="http://schemas.openxmlformats.org/drawingml/2006/main" xmlns:r="http://schemas.openxmlformats.org/officeDocument/2006/relationships" xmlns:p="http://schemas.openxmlformats.org/presentationml/2006/main">
   <p:cSld>
     <p:spTree>
@@ -8616,7 +9077,7 @@
 </p:sld>
 </file>
 
-<file path=ppt/slides/slide15.xml><?xml version="1.0" encoding="utf-8"?>
+<file path=ppt/slides/slide16.xml><?xml version="1.0" encoding="utf-8"?>
 <p:sld xmlns:a="http://schemas.openxmlformats.org/drawingml/2006/main" xmlns:r="http://schemas.openxmlformats.org/officeDocument/2006/relationships" xmlns:p="http://schemas.openxmlformats.org/presentationml/2006/main">
   <p:cSld>
     <p:spTree>
@@ -8858,7 +9319,7 @@
 </p:sld>
 </file>
 
-<file path=ppt/slides/slide16.xml><?xml version="1.0" encoding="utf-8"?>
+<file path=ppt/slides/slide17.xml><?xml version="1.0" encoding="utf-8"?>
 <p:sld xmlns:a="http://schemas.openxmlformats.org/drawingml/2006/main" xmlns:r="http://schemas.openxmlformats.org/officeDocument/2006/relationships" xmlns:p="http://schemas.openxmlformats.org/presentationml/2006/main">
   <p:cSld>
     <p:spTree>
@@ -9235,7 +9696,7 @@
 </p:sld>
 </file>
 
-<file path=ppt/slides/slide17.xml><?xml version="1.0" encoding="utf-8"?>
+<file path=ppt/slides/slide18.xml><?xml version="1.0" encoding="utf-8"?>
 <p:sld xmlns:a="http://schemas.openxmlformats.org/drawingml/2006/main" xmlns:r="http://schemas.openxmlformats.org/officeDocument/2006/relationships" xmlns:p="http://schemas.openxmlformats.org/presentationml/2006/main">
   <p:cSld>
     <p:spTree>
@@ -9679,7 +10140,7 @@
 </p:sld>
 </file>
 
-<file path=ppt/slides/slide18.xml><?xml version="1.0" encoding="utf-8"?>
+<file path=ppt/slides/slide19.xml><?xml version="1.0" encoding="utf-8"?>
 <p:sld xmlns:a="http://schemas.openxmlformats.org/drawingml/2006/main" xmlns:r="http://schemas.openxmlformats.org/officeDocument/2006/relationships" xmlns:p="http://schemas.openxmlformats.org/presentationml/2006/main">
   <p:cSld>
     <p:spTree>
@@ -9903,7 +10364,74 @@
 </p:sld>
 </file>
 
-<file path=ppt/slides/slide19.xml><?xml version="1.0" encoding="utf-8"?>
+<file path=ppt/slides/slide2.xml><?xml version="1.0" encoding="utf-8"?>
+<p:sld xmlns:a="http://schemas.openxmlformats.org/drawingml/2006/main" xmlns:r="http://schemas.openxmlformats.org/officeDocument/2006/relationships" xmlns:p="http://schemas.openxmlformats.org/presentationml/2006/main">
+  <p:cSld>
+    <p:spTree>
+      <p:nvGrpSpPr>
+        <p:cNvPr id="1" name="Shape 64"/>
+        <p:cNvGrpSpPr/>
+        <p:nvPr/>
+      </p:nvGrpSpPr>
+      <p:grpSpPr>
+        <a:xfrm>
+          <a:off x="0" y="0"/>
+          <a:ext cx="0" cy="0"/>
+          <a:chOff x="0" y="0"/>
+          <a:chExt cx="0" cy="0"/>
+        </a:xfrm>
+      </p:grpSpPr>
+      <p:sp>
+        <p:nvSpPr>
+          <p:cNvPr id="65" name="Google Shape;65;p14"/>
+          <p:cNvSpPr txBox="1">
+            <a:spLocks noGrp="1"/>
+          </p:cNvSpPr>
+          <p:nvPr>
+            <p:ph type="title"/>
+          </p:nvPr>
+        </p:nvSpPr>
+        <p:spPr>
+          <a:xfrm>
+            <a:off x="490250" y="526350"/>
+            <a:ext cx="5604000" cy="4090800"/>
+          </a:xfrm>
+          <a:prstGeom prst="rect">
+            <a:avLst/>
+          </a:prstGeom>
+        </p:spPr>
+        <p:txBody>
+          <a:bodyPr spcFirstLastPara="1" wrap="square" lIns="91425" tIns="91425" rIns="91425" bIns="91425" anchor="ctr" anchorCtr="0">
+            <a:noAutofit/>
+          </a:bodyPr>
+          <a:lstStyle/>
+          <a:p>
+            <a:pPr marL="0" lvl="0" indent="0" algn="l" rtl="0">
+              <a:spcBef>
+                <a:spcPts val="0"/>
+              </a:spcBef>
+              <a:spcAft>
+                <a:spcPts val="0"/>
+              </a:spcAft>
+              <a:buNone/>
+            </a:pPr>
+            <a:r>
+              <a:rPr lang="it"/>
+              <a:t>Il progetto</a:t>
+            </a:r>
+            <a:endParaRPr/>
+          </a:p>
+        </p:txBody>
+      </p:sp>
+    </p:spTree>
+  </p:cSld>
+  <p:clrMapOvr>
+    <a:masterClrMapping/>
+  </p:clrMapOvr>
+</p:sld>
+</file>
+
+<file path=ppt/slides/slide20.xml><?xml version="1.0" encoding="utf-8"?>
 <p:sld xmlns:a="http://schemas.openxmlformats.org/drawingml/2006/main" xmlns:r="http://schemas.openxmlformats.org/officeDocument/2006/relationships" xmlns:p="http://schemas.openxmlformats.org/presentationml/2006/main">
   <p:cSld>
     <p:spTree>
@@ -10127,74 +10655,7 @@
 </p:sld>
 </file>
 
-<file path=ppt/slides/slide2.xml><?xml version="1.0" encoding="utf-8"?>
-<p:sld xmlns:a="http://schemas.openxmlformats.org/drawingml/2006/main" xmlns:r="http://schemas.openxmlformats.org/officeDocument/2006/relationships" xmlns:p="http://schemas.openxmlformats.org/presentationml/2006/main">
-  <p:cSld>
-    <p:spTree>
-      <p:nvGrpSpPr>
-        <p:cNvPr id="1" name="Shape 64"/>
-        <p:cNvGrpSpPr/>
-        <p:nvPr/>
-      </p:nvGrpSpPr>
-      <p:grpSpPr>
-        <a:xfrm>
-          <a:off x="0" y="0"/>
-          <a:ext cx="0" cy="0"/>
-          <a:chOff x="0" y="0"/>
-          <a:chExt cx="0" cy="0"/>
-        </a:xfrm>
-      </p:grpSpPr>
-      <p:sp>
-        <p:nvSpPr>
-          <p:cNvPr id="65" name="Google Shape;65;p14"/>
-          <p:cNvSpPr txBox="1">
-            <a:spLocks noGrp="1"/>
-          </p:cNvSpPr>
-          <p:nvPr>
-            <p:ph type="title"/>
-          </p:nvPr>
-        </p:nvSpPr>
-        <p:spPr>
-          <a:xfrm>
-            <a:off x="490250" y="526350"/>
-            <a:ext cx="5604000" cy="4090800"/>
-          </a:xfrm>
-          <a:prstGeom prst="rect">
-            <a:avLst/>
-          </a:prstGeom>
-        </p:spPr>
-        <p:txBody>
-          <a:bodyPr spcFirstLastPara="1" wrap="square" lIns="91425" tIns="91425" rIns="91425" bIns="91425" anchor="ctr" anchorCtr="0">
-            <a:noAutofit/>
-          </a:bodyPr>
-          <a:lstStyle/>
-          <a:p>
-            <a:pPr marL="0" lvl="0" indent="0" algn="l" rtl="0">
-              <a:spcBef>
-                <a:spcPts val="0"/>
-              </a:spcBef>
-              <a:spcAft>
-                <a:spcPts val="0"/>
-              </a:spcAft>
-              <a:buNone/>
-            </a:pPr>
-            <a:r>
-              <a:rPr lang="it"/>
-              <a:t>Il progetto</a:t>
-            </a:r>
-            <a:endParaRPr/>
-          </a:p>
-        </p:txBody>
-      </p:sp>
-    </p:spTree>
-  </p:cSld>
-  <p:clrMapOvr>
-    <a:masterClrMapping/>
-  </p:clrMapOvr>
-</p:sld>
-</file>
-
-<file path=ppt/slides/slide20.xml><?xml version="1.0" encoding="utf-8"?>
+<file path=ppt/slides/slide21.xml><?xml version="1.0" encoding="utf-8"?>
 <p:sld xmlns:a="http://schemas.openxmlformats.org/drawingml/2006/main" xmlns:r="http://schemas.openxmlformats.org/officeDocument/2006/relationships" xmlns:p="http://schemas.openxmlformats.org/presentationml/2006/main">
   <p:cSld>
     <p:spTree>
@@ -10418,7 +10879,7 @@
 </p:sld>
 </file>
 
-<file path=ppt/slides/slide21.xml><?xml version="1.0" encoding="utf-8"?>
+<file path=ppt/slides/slide22.xml><?xml version="1.0" encoding="utf-8"?>
 <p:sld xmlns:a="http://schemas.openxmlformats.org/drawingml/2006/main" xmlns:r="http://schemas.openxmlformats.org/officeDocument/2006/relationships" xmlns:p="http://schemas.openxmlformats.org/presentationml/2006/main">
   <p:cSld>
     <p:spTree>
@@ -10642,7 +11103,7 @@
 </p:sld>
 </file>
 
-<file path=ppt/slides/slide22.xml><?xml version="1.0" encoding="utf-8"?>
+<file path=ppt/slides/slide23.xml><?xml version="1.0" encoding="utf-8"?>
 <p:sld xmlns:a="http://schemas.openxmlformats.org/drawingml/2006/main" xmlns:r="http://schemas.openxmlformats.org/officeDocument/2006/relationships" xmlns:p="http://schemas.openxmlformats.org/presentationml/2006/main">
   <p:cSld>
     <p:spTree>

--- a/Documenti/Relazione Finale/PP relazione.pptx
+++ b/Documenti/Relazione Finale/PP relazione.pptx
@@ -14292,7 +14292,7 @@
         </p:blipFill>
         <p:spPr>
           <a:xfrm>
-            <a:off x="442200" y="1019785"/>
+            <a:off x="533468" y="1019785"/>
             <a:ext cx="830804" cy="1849143"/>
           </a:xfrm>
           <a:prstGeom prst="rect">
@@ -14322,7 +14322,7 @@
         </p:blipFill>
         <p:spPr>
           <a:xfrm flipH="1">
-            <a:off x="2628991" y="3044883"/>
+            <a:off x="2653483" y="3044883"/>
             <a:ext cx="830802" cy="1849140"/>
           </a:xfrm>
           <a:prstGeom prst="rect">
@@ -14352,7 +14352,7 @@
         </p:blipFill>
         <p:spPr>
           <a:xfrm>
-            <a:off x="5642708" y="1067394"/>
+            <a:off x="5667200" y="1067394"/>
             <a:ext cx="864552" cy="1924258"/>
           </a:xfrm>
           <a:prstGeom prst="rect">
@@ -14382,7 +14382,7 @@
         </p:blipFill>
         <p:spPr>
           <a:xfrm>
-            <a:off x="6749986" y="1057344"/>
+            <a:off x="6774478" y="1057344"/>
             <a:ext cx="864552" cy="1924259"/>
           </a:xfrm>
           <a:prstGeom prst="rect">
@@ -14412,7 +14412,7 @@
         </p:blipFill>
         <p:spPr>
           <a:xfrm>
-            <a:off x="4845331" y="3073459"/>
+            <a:off x="4869823" y="3073459"/>
             <a:ext cx="864553" cy="1924259"/>
           </a:xfrm>
           <a:prstGeom prst="rect">
@@ -14442,7 +14442,7 @@
         </p:blipFill>
         <p:spPr>
           <a:xfrm>
-            <a:off x="2459002" y="1058737"/>
+            <a:off x="2550270" y="1058737"/>
             <a:ext cx="838875" cy="1867109"/>
           </a:xfrm>
           <a:prstGeom prst="rect">
@@ -14472,7 +14472,7 @@
         </p:blipFill>
         <p:spPr>
           <a:xfrm>
-            <a:off x="3733124" y="3073459"/>
+            <a:off x="3757616" y="3073459"/>
             <a:ext cx="838876" cy="1867109"/>
           </a:xfrm>
           <a:prstGeom prst="rect">
@@ -14502,7 +14502,7 @@
         </p:blipFill>
         <p:spPr>
           <a:xfrm>
-            <a:off x="4542344" y="1048800"/>
+            <a:off x="4633612" y="1048800"/>
             <a:ext cx="838876" cy="1867109"/>
           </a:xfrm>
           <a:prstGeom prst="rect">
@@ -14532,7 +14532,7 @@
         </p:blipFill>
         <p:spPr>
           <a:xfrm>
-            <a:off x="7851095" y="1057344"/>
+            <a:off x="7875587" y="1057344"/>
             <a:ext cx="830803" cy="1849140"/>
           </a:xfrm>
           <a:prstGeom prst="rect">
@@ -14562,7 +14562,7 @@
         </p:blipFill>
         <p:spPr>
           <a:xfrm>
-            <a:off x="3436779" y="1039005"/>
+            <a:off x="3528047" y="1039005"/>
             <a:ext cx="890062" cy="1981036"/>
           </a:xfrm>
           <a:prstGeom prst="rect">
@@ -14622,7 +14622,7 @@
         </p:blipFill>
         <p:spPr>
           <a:xfrm>
-            <a:off x="1433726" y="1035021"/>
+            <a:off x="1524994" y="1035021"/>
             <a:ext cx="864553" cy="1924261"/>
           </a:xfrm>
           <a:prstGeom prst="rect">
@@ -14661,7 +14661,7 @@
                             </p:stCondLst>
                             <p:childTnLst>
                               <p:par>
-                                <p:cTn id="5" presetID="42" presetClass="entr" presetSubtype="0" fill="hold" nodeType="clickEffect">
+                                <p:cTn id="5" presetID="2" presetClass="entr" presetSubtype="4" fill="hold" nodeType="clickEffect">
                                   <p:stCondLst>
                                     <p:cond delay="0"/>
                                   </p:stCondLst>
@@ -14684,17 +14684,9 @@
                                         <p:strVal val="visible"/>
                                       </p:to>
                                     </p:set>
-                                    <p:animEffect transition="in" filter="fade">
-                                      <p:cBhvr>
-                                        <p:cTn id="7" dur="1000"/>
-                                        <p:tgtEl>
-                                          <p:spTgt spid="4"/>
-                                        </p:tgtEl>
-                                      </p:cBhvr>
-                                    </p:animEffect>
                                     <p:anim calcmode="lin" valueType="num">
-                                      <p:cBhvr>
-                                        <p:cTn id="8" dur="1000" fill="hold"/>
+                                      <p:cBhvr additive="base">
+                                        <p:cTn id="7" dur="500" fill="hold"/>
                                         <p:tgtEl>
                                           <p:spTgt spid="4"/>
                                         </p:tgtEl>
@@ -14716,8 +14708,8 @@
                                       </p:tavLst>
                                     </p:anim>
                                     <p:anim calcmode="lin" valueType="num">
-                                      <p:cBhvr>
-                                        <p:cTn id="9" dur="1000" fill="hold"/>
+                                      <p:cBhvr additive="base">
+                                        <p:cTn id="8" dur="500" fill="hold"/>
                                         <p:tgtEl>
                                           <p:spTgt spid="4"/>
                                         </p:tgtEl>
@@ -14728,7 +14720,7 @@
                                       <p:tavLst>
                                         <p:tav tm="0">
                                           <p:val>
-                                            <p:strVal val="#ppt_y+.1"/>
+                                            <p:strVal val="1+#ppt_h/2"/>
                                           </p:val>
                                         </p:tav>
                                         <p:tav tm="100000">
@@ -14741,33 +14733,15 @@
                                   </p:childTnLst>
                                 </p:cTn>
                               </p:par>
-                            </p:childTnLst>
-                          </p:cTn>
-                        </p:par>
-                      </p:childTnLst>
-                    </p:cTn>
-                  </p:par>
-                  <p:par>
-                    <p:cTn id="10" fill="hold">
-                      <p:stCondLst>
-                        <p:cond delay="indefinite"/>
-                      </p:stCondLst>
-                      <p:childTnLst>
-                        <p:par>
-                          <p:cTn id="11" fill="hold">
-                            <p:stCondLst>
-                              <p:cond delay="0"/>
-                            </p:stCondLst>
-                            <p:childTnLst>
                               <p:par>
-                                <p:cTn id="12" presetID="42" presetClass="entr" presetSubtype="0" fill="hold" nodeType="clickEffect">
+                                <p:cTn id="9" presetID="2" presetClass="entr" presetSubtype="4" fill="hold" nodeType="withEffect">
                                   <p:stCondLst>
                                     <p:cond delay="0"/>
                                   </p:stCondLst>
                                   <p:childTnLst>
                                     <p:set>
                                       <p:cBhvr>
-                                        <p:cTn id="13" dur="1" fill="hold">
+                                        <p:cTn id="10" dur="1" fill="hold">
                                           <p:stCondLst>
                                             <p:cond delay="0"/>
                                           </p:stCondLst>
@@ -14783,17 +14757,9 @@
                                         <p:strVal val="visible"/>
                                       </p:to>
                                     </p:set>
-                                    <p:animEffect transition="in" filter="fade">
-                                      <p:cBhvr>
-                                        <p:cTn id="14" dur="1000"/>
-                                        <p:tgtEl>
-                                          <p:spTgt spid="46"/>
-                                        </p:tgtEl>
-                                      </p:cBhvr>
-                                    </p:animEffect>
                                     <p:anim calcmode="lin" valueType="num">
-                                      <p:cBhvr>
-                                        <p:cTn id="15" dur="1000" fill="hold"/>
+                                      <p:cBhvr additive="base">
+                                        <p:cTn id="11" dur="500" fill="hold"/>
                                         <p:tgtEl>
                                           <p:spTgt spid="46"/>
                                         </p:tgtEl>
@@ -14815,8 +14781,8 @@
                                       </p:tavLst>
                                     </p:anim>
                                     <p:anim calcmode="lin" valueType="num">
-                                      <p:cBhvr>
-                                        <p:cTn id="16" dur="1000" fill="hold"/>
+                                      <p:cBhvr additive="base">
+                                        <p:cTn id="12" dur="500" fill="hold"/>
                                         <p:tgtEl>
                                           <p:spTgt spid="46"/>
                                         </p:tgtEl>
@@ -14827,7 +14793,7 @@
                                       <p:tavLst>
                                         <p:tav tm="0">
                                           <p:val>
-                                            <p:strVal val="#ppt_y+.1"/>
+                                            <p:strVal val="1+#ppt_h/2"/>
                                           </p:val>
                                         </p:tav>
                                         <p:tav tm="100000">
@@ -14840,33 +14806,15 @@
                                   </p:childTnLst>
                                 </p:cTn>
                               </p:par>
-                            </p:childTnLst>
-                          </p:cTn>
-                        </p:par>
-                      </p:childTnLst>
-                    </p:cTn>
-                  </p:par>
-                  <p:par>
-                    <p:cTn id="17" fill="hold">
-                      <p:stCondLst>
-                        <p:cond delay="indefinite"/>
-                      </p:stCondLst>
-                      <p:childTnLst>
-                        <p:par>
-                          <p:cTn id="18" fill="hold">
-                            <p:stCondLst>
-                              <p:cond delay="0"/>
-                            </p:stCondLst>
-                            <p:childTnLst>
                               <p:par>
-                                <p:cTn id="19" presetID="42" presetClass="entr" presetSubtype="0" fill="hold" nodeType="clickEffect">
+                                <p:cTn id="13" presetID="2" presetClass="entr" presetSubtype="4" fill="hold" nodeType="withEffect">
                                   <p:stCondLst>
                                     <p:cond delay="0"/>
                                   </p:stCondLst>
                                   <p:childTnLst>
                                     <p:set>
                                       <p:cBhvr>
-                                        <p:cTn id="20" dur="1" fill="hold">
+                                        <p:cTn id="14" dur="1" fill="hold">
                                           <p:stCondLst>
                                             <p:cond delay="0"/>
                                           </p:stCondLst>
@@ -14882,17 +14830,9 @@
                                         <p:strVal val="visible"/>
                                       </p:to>
                                     </p:set>
-                                    <p:animEffect transition="in" filter="fade">
-                                      <p:cBhvr>
-                                        <p:cTn id="21" dur="1000"/>
-                                        <p:tgtEl>
-                                          <p:spTgt spid="34"/>
-                                        </p:tgtEl>
-                                      </p:cBhvr>
-                                    </p:animEffect>
                                     <p:anim calcmode="lin" valueType="num">
-                                      <p:cBhvr>
-                                        <p:cTn id="22" dur="1000" fill="hold"/>
+                                      <p:cBhvr additive="base">
+                                        <p:cTn id="15" dur="500" fill="hold"/>
                                         <p:tgtEl>
                                           <p:spTgt spid="34"/>
                                         </p:tgtEl>
@@ -14914,8 +14854,8 @@
                                       </p:tavLst>
                                     </p:anim>
                                     <p:anim calcmode="lin" valueType="num">
-                                      <p:cBhvr>
-                                        <p:cTn id="23" dur="1000" fill="hold"/>
+                                      <p:cBhvr additive="base">
+                                        <p:cTn id="16" dur="500" fill="hold"/>
                                         <p:tgtEl>
                                           <p:spTgt spid="34"/>
                                         </p:tgtEl>
@@ -14926,7 +14866,7 @@
                                       <p:tavLst>
                                         <p:tav tm="0">
                                           <p:val>
-                                            <p:strVal val="#ppt_y+.1"/>
+                                            <p:strVal val="1+#ppt_h/2"/>
                                           </p:val>
                                         </p:tav>
                                         <p:tav tm="100000">
@@ -14939,33 +14879,15 @@
                                   </p:childTnLst>
                                 </p:cTn>
                               </p:par>
-                            </p:childTnLst>
-                          </p:cTn>
-                        </p:par>
-                      </p:childTnLst>
-                    </p:cTn>
-                  </p:par>
-                  <p:par>
-                    <p:cTn id="24" fill="hold">
-                      <p:stCondLst>
-                        <p:cond delay="indefinite"/>
-                      </p:stCondLst>
-                      <p:childTnLst>
-                        <p:par>
-                          <p:cTn id="25" fill="hold">
-                            <p:stCondLst>
-                              <p:cond delay="0"/>
-                            </p:stCondLst>
-                            <p:childTnLst>
                               <p:par>
-                                <p:cTn id="26" presetID="42" presetClass="entr" presetSubtype="0" fill="hold" nodeType="clickEffect">
+                                <p:cTn id="17" presetID="2" presetClass="entr" presetSubtype="4" fill="hold" nodeType="withEffect">
                                   <p:stCondLst>
                                     <p:cond delay="0"/>
                                   </p:stCondLst>
                                   <p:childTnLst>
                                     <p:set>
                                       <p:cBhvr>
-                                        <p:cTn id="27" dur="1" fill="hold">
+                                        <p:cTn id="18" dur="1" fill="hold">
                                           <p:stCondLst>
                                             <p:cond delay="0"/>
                                           </p:stCondLst>
@@ -14981,17 +14903,9 @@
                                         <p:strVal val="visible"/>
                                       </p:to>
                                     </p:set>
-                                    <p:animEffect transition="in" filter="fade">
-                                      <p:cBhvr>
-                                        <p:cTn id="28" dur="1000"/>
-                                        <p:tgtEl>
-                                          <p:spTgt spid="42"/>
-                                        </p:tgtEl>
-                                      </p:cBhvr>
-                                    </p:animEffect>
                                     <p:anim calcmode="lin" valueType="num">
-                                      <p:cBhvr>
-                                        <p:cTn id="29" dur="1000" fill="hold"/>
+                                      <p:cBhvr additive="base">
+                                        <p:cTn id="19" dur="500" fill="hold"/>
                                         <p:tgtEl>
                                           <p:spTgt spid="42"/>
                                         </p:tgtEl>
@@ -15013,8 +14927,8 @@
                                       </p:tavLst>
                                     </p:anim>
                                     <p:anim calcmode="lin" valueType="num">
-                                      <p:cBhvr>
-                                        <p:cTn id="30" dur="1000" fill="hold"/>
+                                      <p:cBhvr additive="base">
+                                        <p:cTn id="20" dur="500" fill="hold"/>
                                         <p:tgtEl>
                                           <p:spTgt spid="42"/>
                                         </p:tgtEl>
@@ -15025,7 +14939,7 @@
                                       <p:tavLst>
                                         <p:tav tm="0">
                                           <p:val>
-                                            <p:strVal val="#ppt_y+.1"/>
+                                            <p:strVal val="1+#ppt_h/2"/>
                                           </p:val>
                                         </p:tav>
                                         <p:tav tm="100000">
@@ -15038,33 +14952,15 @@
                                   </p:childTnLst>
                                 </p:cTn>
                               </p:par>
-                            </p:childTnLst>
-                          </p:cTn>
-                        </p:par>
-                      </p:childTnLst>
-                    </p:cTn>
-                  </p:par>
-                  <p:par>
-                    <p:cTn id="31" fill="hold">
-                      <p:stCondLst>
-                        <p:cond delay="indefinite"/>
-                      </p:stCondLst>
-                      <p:childTnLst>
-                        <p:par>
-                          <p:cTn id="32" fill="hold">
-                            <p:stCondLst>
-                              <p:cond delay="0"/>
-                            </p:stCondLst>
-                            <p:childTnLst>
                               <p:par>
-                                <p:cTn id="33" presetID="42" presetClass="entr" presetSubtype="0" fill="hold" nodeType="clickEffect">
+                                <p:cTn id="21" presetID="2" presetClass="entr" presetSubtype="4" fill="hold" nodeType="withEffect">
                                   <p:stCondLst>
                                     <p:cond delay="0"/>
                                   </p:stCondLst>
                                   <p:childTnLst>
                                     <p:set>
                                       <p:cBhvr>
-                                        <p:cTn id="34" dur="1" fill="hold">
+                                        <p:cTn id="22" dur="1" fill="hold">
                                           <p:stCondLst>
                                             <p:cond delay="0"/>
                                           </p:stCondLst>
@@ -15080,17 +14976,9 @@
                                         <p:strVal val="visible"/>
                                       </p:to>
                                     </p:set>
-                                    <p:animEffect transition="in" filter="fade">
-                                      <p:cBhvr>
-                                        <p:cTn id="35" dur="1000"/>
-                                        <p:tgtEl>
-                                          <p:spTgt spid="38"/>
-                                        </p:tgtEl>
-                                      </p:cBhvr>
-                                    </p:animEffect>
                                     <p:anim calcmode="lin" valueType="num">
-                                      <p:cBhvr>
-                                        <p:cTn id="36" dur="1000" fill="hold"/>
+                                      <p:cBhvr additive="base">
+                                        <p:cTn id="23" dur="500" fill="hold"/>
                                         <p:tgtEl>
                                           <p:spTgt spid="38"/>
                                         </p:tgtEl>
@@ -15112,8 +15000,8 @@
                                       </p:tavLst>
                                     </p:anim>
                                     <p:anim calcmode="lin" valueType="num">
-                                      <p:cBhvr>
-                                        <p:cTn id="37" dur="1000" fill="hold"/>
+                                      <p:cBhvr additive="base">
+                                        <p:cTn id="24" dur="500" fill="hold"/>
                                         <p:tgtEl>
                                           <p:spTgt spid="38"/>
                                         </p:tgtEl>
@@ -15124,7 +15012,7 @@
                                       <p:tavLst>
                                         <p:tav tm="0">
                                           <p:val>
-                                            <p:strVal val="#ppt_y+.1"/>
+                                            <p:strVal val="1+#ppt_h/2"/>
                                           </p:val>
                                         </p:tav>
                                         <p:tav tm="100000">
@@ -15137,33 +15025,15 @@
                                   </p:childTnLst>
                                 </p:cTn>
                               </p:par>
-                            </p:childTnLst>
-                          </p:cTn>
-                        </p:par>
-                      </p:childTnLst>
-                    </p:cTn>
-                  </p:par>
-                  <p:par>
-                    <p:cTn id="38" fill="hold">
-                      <p:stCondLst>
-                        <p:cond delay="indefinite"/>
-                      </p:stCondLst>
-                      <p:childTnLst>
-                        <p:par>
-                          <p:cTn id="39" fill="hold">
-                            <p:stCondLst>
-                              <p:cond delay="0"/>
-                            </p:stCondLst>
-                            <p:childTnLst>
                               <p:par>
-                                <p:cTn id="40" presetID="42" presetClass="entr" presetSubtype="0" fill="hold" nodeType="clickEffect">
+                                <p:cTn id="25" presetID="2" presetClass="entr" presetSubtype="4" fill="hold" nodeType="withEffect">
                                   <p:stCondLst>
                                     <p:cond delay="0"/>
                                   </p:stCondLst>
                                   <p:childTnLst>
                                     <p:set>
                                       <p:cBhvr>
-                                        <p:cTn id="41" dur="1" fill="hold">
+                                        <p:cTn id="26" dur="1" fill="hold">
                                           <p:stCondLst>
                                             <p:cond delay="0"/>
                                           </p:stCondLst>
@@ -15179,17 +15049,9 @@
                                         <p:strVal val="visible"/>
                                       </p:to>
                                     </p:set>
-                                    <p:animEffect transition="in" filter="fade">
-                                      <p:cBhvr>
-                                        <p:cTn id="42" dur="1000"/>
-                                        <p:tgtEl>
-                                          <p:spTgt spid="28"/>
-                                        </p:tgtEl>
-                                      </p:cBhvr>
-                                    </p:animEffect>
                                     <p:anim calcmode="lin" valueType="num">
-                                      <p:cBhvr>
-                                        <p:cTn id="43" dur="1000" fill="hold"/>
+                                      <p:cBhvr additive="base">
+                                        <p:cTn id="27" dur="500" fill="hold"/>
                                         <p:tgtEl>
                                           <p:spTgt spid="28"/>
                                         </p:tgtEl>
@@ -15211,8 +15073,8 @@
                                       </p:tavLst>
                                     </p:anim>
                                     <p:anim calcmode="lin" valueType="num">
-                                      <p:cBhvr>
-                                        <p:cTn id="44" dur="1000" fill="hold"/>
+                                      <p:cBhvr additive="base">
+                                        <p:cTn id="28" dur="500" fill="hold"/>
                                         <p:tgtEl>
                                           <p:spTgt spid="28"/>
                                         </p:tgtEl>
@@ -15223,7 +15085,7 @@
                                       <p:tavLst>
                                         <p:tav tm="0">
                                           <p:val>
-                                            <p:strVal val="#ppt_y+.1"/>
+                                            <p:strVal val="1+#ppt_h/2"/>
                                           </p:val>
                                         </p:tav>
                                         <p:tav tm="100000">
@@ -15236,33 +15098,15 @@
                                   </p:childTnLst>
                                 </p:cTn>
                               </p:par>
-                            </p:childTnLst>
-                          </p:cTn>
-                        </p:par>
-                      </p:childTnLst>
-                    </p:cTn>
-                  </p:par>
-                  <p:par>
-                    <p:cTn id="45" fill="hold">
-                      <p:stCondLst>
-                        <p:cond delay="indefinite"/>
-                      </p:stCondLst>
-                      <p:childTnLst>
-                        <p:par>
-                          <p:cTn id="46" fill="hold">
-                            <p:stCondLst>
-                              <p:cond delay="0"/>
-                            </p:stCondLst>
-                            <p:childTnLst>
                               <p:par>
-                                <p:cTn id="47" presetID="42" presetClass="entr" presetSubtype="0" fill="hold" nodeType="clickEffect">
+                                <p:cTn id="29" presetID="2" presetClass="entr" presetSubtype="4" fill="hold" nodeType="withEffect">
                                   <p:stCondLst>
                                     <p:cond delay="0"/>
                                   </p:stCondLst>
                                   <p:childTnLst>
                                     <p:set>
                                       <p:cBhvr>
-                                        <p:cTn id="48" dur="1" fill="hold">
+                                        <p:cTn id="30" dur="1" fill="hold">
                                           <p:stCondLst>
                                             <p:cond delay="0"/>
                                           </p:stCondLst>
@@ -15278,17 +15122,9 @@
                                         <p:strVal val="visible"/>
                                       </p:to>
                                     </p:set>
-                                    <p:animEffect transition="in" filter="fade">
-                                      <p:cBhvr>
-                                        <p:cTn id="49" dur="1000"/>
-                                        <p:tgtEl>
-                                          <p:spTgt spid="30"/>
-                                        </p:tgtEl>
-                                      </p:cBhvr>
-                                    </p:animEffect>
                                     <p:anim calcmode="lin" valueType="num">
-                                      <p:cBhvr>
-                                        <p:cTn id="50" dur="1000" fill="hold"/>
+                                      <p:cBhvr additive="base">
+                                        <p:cTn id="31" dur="500" fill="hold"/>
                                         <p:tgtEl>
                                           <p:spTgt spid="30"/>
                                         </p:tgtEl>
@@ -15310,8 +15146,8 @@
                                       </p:tavLst>
                                     </p:anim>
                                     <p:anim calcmode="lin" valueType="num">
-                                      <p:cBhvr>
-                                        <p:cTn id="51" dur="1000" fill="hold"/>
+                                      <p:cBhvr additive="base">
+                                        <p:cTn id="32" dur="500" fill="hold"/>
                                         <p:tgtEl>
                                           <p:spTgt spid="30"/>
                                         </p:tgtEl>
@@ -15322,7 +15158,7 @@
                                       <p:tavLst>
                                         <p:tav tm="0">
                                           <p:val>
-                                            <p:strVal val="#ppt_y+.1"/>
+                                            <p:strVal val="1+#ppt_h/2"/>
                                           </p:val>
                                         </p:tav>
                                         <p:tav tm="100000">
@@ -15335,33 +15171,15 @@
                                   </p:childTnLst>
                                 </p:cTn>
                               </p:par>
-                            </p:childTnLst>
-                          </p:cTn>
-                        </p:par>
-                      </p:childTnLst>
-                    </p:cTn>
-                  </p:par>
-                  <p:par>
-                    <p:cTn id="52" fill="hold">
-                      <p:stCondLst>
-                        <p:cond delay="indefinite"/>
-                      </p:stCondLst>
-                      <p:childTnLst>
-                        <p:par>
-                          <p:cTn id="53" fill="hold">
-                            <p:stCondLst>
-                              <p:cond delay="0"/>
-                            </p:stCondLst>
-                            <p:childTnLst>
                               <p:par>
-                                <p:cTn id="54" presetID="42" presetClass="entr" presetSubtype="0" fill="hold" nodeType="clickEffect">
+                                <p:cTn id="33" presetID="2" presetClass="entr" presetSubtype="4" fill="hold" nodeType="withEffect">
                                   <p:stCondLst>
                                     <p:cond delay="0"/>
                                   </p:stCondLst>
                                   <p:childTnLst>
                                     <p:set>
                                       <p:cBhvr>
-                                        <p:cTn id="55" dur="1" fill="hold">
+                                        <p:cTn id="34" dur="1" fill="hold">
                                           <p:stCondLst>
                                             <p:cond delay="0"/>
                                           </p:stCondLst>
@@ -15377,17 +15195,9 @@
                                         <p:strVal val="visible"/>
                                       </p:to>
                                     </p:set>
-                                    <p:animEffect transition="in" filter="fade">
-                                      <p:cBhvr>
-                                        <p:cTn id="56" dur="1000"/>
-                                        <p:tgtEl>
-                                          <p:spTgt spid="40"/>
-                                        </p:tgtEl>
-                                      </p:cBhvr>
-                                    </p:animEffect>
                                     <p:anim calcmode="lin" valueType="num">
-                                      <p:cBhvr>
-                                        <p:cTn id="57" dur="1000" fill="hold"/>
+                                      <p:cBhvr additive="base">
+                                        <p:cTn id="35" dur="500" fill="hold"/>
                                         <p:tgtEl>
                                           <p:spTgt spid="40"/>
                                         </p:tgtEl>
@@ -15409,8 +15219,8 @@
                                       </p:tavLst>
                                     </p:anim>
                                     <p:anim calcmode="lin" valueType="num">
-                                      <p:cBhvr>
-                                        <p:cTn id="58" dur="1000" fill="hold"/>
+                                      <p:cBhvr additive="base">
+                                        <p:cTn id="36" dur="500" fill="hold"/>
                                         <p:tgtEl>
                                           <p:spTgt spid="40"/>
                                         </p:tgtEl>
@@ -15421,7 +15231,7 @@
                                       <p:tavLst>
                                         <p:tav tm="0">
                                           <p:val>
-                                            <p:strVal val="#ppt_y+.1"/>
+                                            <p:strVal val="1+#ppt_h/2"/>
                                           </p:val>
                                         </p:tav>
                                         <p:tav tm="100000">
@@ -15434,33 +15244,15 @@
                                   </p:childTnLst>
                                 </p:cTn>
                               </p:par>
-                            </p:childTnLst>
-                          </p:cTn>
-                        </p:par>
-                      </p:childTnLst>
-                    </p:cTn>
-                  </p:par>
-                  <p:par>
-                    <p:cTn id="59" fill="hold">
-                      <p:stCondLst>
-                        <p:cond delay="indefinite"/>
-                      </p:stCondLst>
-                      <p:childTnLst>
-                        <p:par>
-                          <p:cTn id="60" fill="hold">
-                            <p:stCondLst>
-                              <p:cond delay="0"/>
-                            </p:stCondLst>
-                            <p:childTnLst>
                               <p:par>
-                                <p:cTn id="61" presetID="42" presetClass="entr" presetSubtype="0" fill="hold" nodeType="clickEffect">
+                                <p:cTn id="37" presetID="2" presetClass="entr" presetSubtype="4" fill="hold" nodeType="withEffect">
                                   <p:stCondLst>
                                     <p:cond delay="0"/>
                                   </p:stCondLst>
                                   <p:childTnLst>
                                     <p:set>
                                       <p:cBhvr>
-                                        <p:cTn id="62" dur="1" fill="hold">
+                                        <p:cTn id="38" dur="1" fill="hold">
                                           <p:stCondLst>
                                             <p:cond delay="0"/>
                                           </p:stCondLst>
@@ -15476,17 +15268,9 @@
                                         <p:strVal val="visible"/>
                                       </p:to>
                                     </p:set>
-                                    <p:animEffect transition="in" filter="fade">
-                                      <p:cBhvr>
-                                        <p:cTn id="63" dur="1000"/>
-                                        <p:tgtEl>
-                                          <p:spTgt spid="26"/>
-                                        </p:tgtEl>
-                                      </p:cBhvr>
-                                    </p:animEffect>
                                     <p:anim calcmode="lin" valueType="num">
-                                      <p:cBhvr>
-                                        <p:cTn id="64" dur="1000" fill="hold"/>
+                                      <p:cBhvr additive="base">
+                                        <p:cTn id="39" dur="500" fill="hold"/>
                                         <p:tgtEl>
                                           <p:spTgt spid="26"/>
                                         </p:tgtEl>
@@ -15508,8 +15292,8 @@
                                       </p:tavLst>
                                     </p:anim>
                                     <p:anim calcmode="lin" valueType="num">
-                                      <p:cBhvr>
-                                        <p:cTn id="65" dur="1000" fill="hold"/>
+                                      <p:cBhvr additive="base">
+                                        <p:cTn id="40" dur="500" fill="hold"/>
                                         <p:tgtEl>
                                           <p:spTgt spid="26"/>
                                         </p:tgtEl>
@@ -15520,7 +15304,7 @@
                                       <p:tavLst>
                                         <p:tav tm="0">
                                           <p:val>
-                                            <p:strVal val="#ppt_y+.1"/>
+                                            <p:strVal val="1+#ppt_h/2"/>
                                           </p:val>
                                         </p:tav>
                                         <p:tav tm="100000">
@@ -15533,33 +15317,15 @@
                                   </p:childTnLst>
                                 </p:cTn>
                               </p:par>
-                            </p:childTnLst>
-                          </p:cTn>
-                        </p:par>
-                      </p:childTnLst>
-                    </p:cTn>
-                  </p:par>
-                  <p:par>
-                    <p:cTn id="66" fill="hold">
-                      <p:stCondLst>
-                        <p:cond delay="indefinite"/>
-                      </p:stCondLst>
-                      <p:childTnLst>
-                        <p:par>
-                          <p:cTn id="67" fill="hold">
-                            <p:stCondLst>
-                              <p:cond delay="0"/>
-                            </p:stCondLst>
-                            <p:childTnLst>
                               <p:par>
-                                <p:cTn id="68" presetID="42" presetClass="entr" presetSubtype="0" fill="hold" nodeType="clickEffect">
+                                <p:cTn id="41" presetID="2" presetClass="entr" presetSubtype="4" fill="hold" nodeType="withEffect">
                                   <p:stCondLst>
                                     <p:cond delay="0"/>
                                   </p:stCondLst>
                                   <p:childTnLst>
                                     <p:set>
                                       <p:cBhvr>
-                                        <p:cTn id="69" dur="1" fill="hold">
+                                        <p:cTn id="42" dur="1" fill="hold">
                                           <p:stCondLst>
                                             <p:cond delay="0"/>
                                           </p:stCondLst>
@@ -15575,17 +15341,9 @@
                                         <p:strVal val="visible"/>
                                       </p:to>
                                     </p:set>
-                                    <p:animEffect transition="in" filter="fade">
-                                      <p:cBhvr>
-                                        <p:cTn id="70" dur="1000"/>
-                                        <p:tgtEl>
-                                          <p:spTgt spid="36"/>
-                                        </p:tgtEl>
-                                      </p:cBhvr>
-                                    </p:animEffect>
                                     <p:anim calcmode="lin" valueType="num">
-                                      <p:cBhvr>
-                                        <p:cTn id="71" dur="1000" fill="hold"/>
+                                      <p:cBhvr additive="base">
+                                        <p:cTn id="43" dur="500" fill="hold"/>
                                         <p:tgtEl>
                                           <p:spTgt spid="36"/>
                                         </p:tgtEl>
@@ -15607,8 +15365,8 @@
                                       </p:tavLst>
                                     </p:anim>
                                     <p:anim calcmode="lin" valueType="num">
-                                      <p:cBhvr>
-                                        <p:cTn id="72" dur="1000" fill="hold"/>
+                                      <p:cBhvr additive="base">
+                                        <p:cTn id="44" dur="500" fill="hold"/>
                                         <p:tgtEl>
                                           <p:spTgt spid="36"/>
                                         </p:tgtEl>
@@ -15619,7 +15377,7 @@
                                       <p:tavLst>
                                         <p:tav tm="0">
                                           <p:val>
-                                            <p:strVal val="#ppt_y+.1"/>
+                                            <p:strVal val="1+#ppt_h/2"/>
                                           </p:val>
                                         </p:tav>
                                         <p:tav tm="100000">
@@ -15632,33 +15390,15 @@
                                   </p:childTnLst>
                                 </p:cTn>
                               </p:par>
-                            </p:childTnLst>
-                          </p:cTn>
-                        </p:par>
-                      </p:childTnLst>
-                    </p:cTn>
-                  </p:par>
-                  <p:par>
-                    <p:cTn id="73" fill="hold">
-                      <p:stCondLst>
-                        <p:cond delay="indefinite"/>
-                      </p:stCondLst>
-                      <p:childTnLst>
-                        <p:par>
-                          <p:cTn id="74" fill="hold">
-                            <p:stCondLst>
-                              <p:cond delay="0"/>
-                            </p:stCondLst>
-                            <p:childTnLst>
                               <p:par>
-                                <p:cTn id="75" presetID="42" presetClass="entr" presetSubtype="0" fill="hold" nodeType="clickEffect">
+                                <p:cTn id="45" presetID="2" presetClass="entr" presetSubtype="4" fill="hold" nodeType="withEffect">
                                   <p:stCondLst>
                                     <p:cond delay="0"/>
                                   </p:stCondLst>
                                   <p:childTnLst>
                                     <p:set>
                                       <p:cBhvr>
-                                        <p:cTn id="76" dur="1" fill="hold">
+                                        <p:cTn id="46" dur="1" fill="hold">
                                           <p:stCondLst>
                                             <p:cond delay="0"/>
                                           </p:stCondLst>
@@ -15674,17 +15414,9 @@
                                         <p:strVal val="visible"/>
                                       </p:to>
                                     </p:set>
-                                    <p:animEffect transition="in" filter="fade">
-                                      <p:cBhvr>
-                                        <p:cTn id="77" dur="1000"/>
-                                        <p:tgtEl>
-                                          <p:spTgt spid="32"/>
-                                        </p:tgtEl>
-                                      </p:cBhvr>
-                                    </p:animEffect>
                                     <p:anim calcmode="lin" valueType="num">
-                                      <p:cBhvr>
-                                        <p:cTn id="78" dur="1000" fill="hold"/>
+                                      <p:cBhvr additive="base">
+                                        <p:cTn id="47" dur="500" fill="hold"/>
                                         <p:tgtEl>
                                           <p:spTgt spid="32"/>
                                         </p:tgtEl>
@@ -15706,8 +15438,8 @@
                                       </p:tavLst>
                                     </p:anim>
                                     <p:anim calcmode="lin" valueType="num">
-                                      <p:cBhvr>
-                                        <p:cTn id="79" dur="1000" fill="hold"/>
+                                      <p:cBhvr additive="base">
+                                        <p:cTn id="48" dur="500" fill="hold"/>
                                         <p:tgtEl>
                                           <p:spTgt spid="32"/>
                                         </p:tgtEl>
@@ -15718,7 +15450,7 @@
                                       <p:tavLst>
                                         <p:tav tm="0">
                                           <p:val>
-                                            <p:strVal val="#ppt_y+.1"/>
+                                            <p:strVal val="1+#ppt_h/2"/>
                                           </p:val>
                                         </p:tav>
                                         <p:tav tm="100000">
@@ -15731,33 +15463,15 @@
                                   </p:childTnLst>
                                 </p:cTn>
                               </p:par>
-                            </p:childTnLst>
-                          </p:cTn>
-                        </p:par>
-                      </p:childTnLst>
-                    </p:cTn>
-                  </p:par>
-                  <p:par>
-                    <p:cTn id="80" fill="hold">
-                      <p:stCondLst>
-                        <p:cond delay="indefinite"/>
-                      </p:stCondLst>
-                      <p:childTnLst>
-                        <p:par>
-                          <p:cTn id="81" fill="hold">
-                            <p:stCondLst>
-                              <p:cond delay="0"/>
-                            </p:stCondLst>
-                            <p:childTnLst>
                               <p:par>
-                                <p:cTn id="82" presetID="42" presetClass="entr" presetSubtype="0" fill="hold" nodeType="clickEffect">
+                                <p:cTn id="49" presetID="2" presetClass="entr" presetSubtype="4" fill="hold" nodeType="withEffect">
                                   <p:stCondLst>
                                     <p:cond delay="0"/>
                                   </p:stCondLst>
                                   <p:childTnLst>
                                     <p:set>
                                       <p:cBhvr>
-                                        <p:cTn id="83" dur="1" fill="hold">
+                                        <p:cTn id="50" dur="1" fill="hold">
                                           <p:stCondLst>
                                             <p:cond delay="0"/>
                                           </p:stCondLst>
@@ -15773,17 +15487,9 @@
                                         <p:strVal val="visible"/>
                                       </p:to>
                                     </p:set>
-                                    <p:animEffect transition="in" filter="fade">
-                                      <p:cBhvr>
-                                        <p:cTn id="84" dur="1000"/>
-                                        <p:tgtEl>
-                                          <p:spTgt spid="44"/>
-                                        </p:tgtEl>
-                                      </p:cBhvr>
-                                    </p:animEffect>
                                     <p:anim calcmode="lin" valueType="num">
-                                      <p:cBhvr>
-                                        <p:cTn id="85" dur="1000" fill="hold"/>
+                                      <p:cBhvr additive="base">
+                                        <p:cTn id="51" dur="500" fill="hold"/>
                                         <p:tgtEl>
                                           <p:spTgt spid="44"/>
                                         </p:tgtEl>
@@ -15805,8 +15511,8 @@
                                       </p:tavLst>
                                     </p:anim>
                                     <p:anim calcmode="lin" valueType="num">
-                                      <p:cBhvr>
-                                        <p:cTn id="86" dur="1000" fill="hold"/>
+                                      <p:cBhvr additive="base">
+                                        <p:cTn id="52" dur="500" fill="hold"/>
                                         <p:tgtEl>
                                           <p:spTgt spid="44"/>
                                         </p:tgtEl>
@@ -15817,7 +15523,7 @@
                                       <p:tavLst>
                                         <p:tav tm="0">
                                           <p:val>
-                                            <p:strVal val="#ppt_y+.1"/>
+                                            <p:strVal val="1+#ppt_h/2"/>
                                           </p:val>
                                         </p:tav>
                                         <p:tav tm="100000">

--- a/Documenti/Relazione Finale/PP relazione.pptx
+++ b/Documenti/Relazione Finale/PP relazione.pptx
@@ -17,9 +17,9 @@
     <p:sldId id="268" r:id="rId8"/>
     <p:sldId id="262" r:id="rId9"/>
     <p:sldId id="265" r:id="rId10"/>
-    <p:sldId id="260" r:id="rId11"/>
-    <p:sldId id="279" r:id="rId12"/>
-    <p:sldId id="280" r:id="rId13"/>
+    <p:sldId id="279" r:id="rId11"/>
+    <p:sldId id="280" r:id="rId12"/>
+    <p:sldId id="260" r:id="rId13"/>
     <p:sldId id="267" r:id="rId14"/>
     <p:sldId id="269" r:id="rId15"/>
     <p:sldId id="270" r:id="rId16"/>
@@ -7052,400 +7052,6 @@
   <p:cSld>
     <p:spTree>
       <p:nvGrpSpPr>
-        <p:cNvPr id="1" name="Shape 82"/>
-        <p:cNvGrpSpPr/>
-        <p:nvPr/>
-      </p:nvGrpSpPr>
-      <p:grpSpPr>
-        <a:xfrm>
-          <a:off x="0" y="0"/>
-          <a:ext cx="0" cy="0"/>
-          <a:chOff x="0" y="0"/>
-          <a:chExt cx="0" cy="0"/>
-        </a:xfrm>
-      </p:grpSpPr>
-      <p:sp>
-        <p:nvSpPr>
-          <p:cNvPr id="83" name="Google Shape;83;p17"/>
-          <p:cNvSpPr txBox="1">
-            <a:spLocks noGrp="1"/>
-          </p:cNvSpPr>
-          <p:nvPr>
-            <p:ph type="body" idx="1"/>
-          </p:nvPr>
-        </p:nvSpPr>
-        <p:spPr>
-          <a:xfrm>
-            <a:off x="311700" y="1171675"/>
-            <a:ext cx="3999900" cy="3397200"/>
-          </a:xfrm>
-          <a:prstGeom prst="rect">
-            <a:avLst/>
-          </a:prstGeom>
-        </p:spPr>
-        <p:txBody>
-          <a:bodyPr spcFirstLastPara="1" wrap="square" lIns="91425" tIns="91425" rIns="91425" bIns="91425" anchor="t" anchorCtr="0">
-            <a:noAutofit/>
-          </a:bodyPr>
-          <a:lstStyle/>
-          <a:p>
-            <a:pPr marL="0" lvl="0" indent="0" algn="l" rtl="0">
-              <a:spcBef>
-                <a:spcPts val="0"/>
-              </a:spcBef>
-              <a:spcAft>
-                <a:spcPts val="0"/>
-              </a:spcAft>
-              <a:buNone/>
-            </a:pPr>
-            <a:r>
-              <a:rPr lang="it" sz="1800" b="1" dirty="0"/>
-              <a:t>schermate:</a:t>
-            </a:r>
-          </a:p>
-          <a:p>
-            <a:pPr marL="0" lvl="0" indent="0" algn="l" rtl="0">
-              <a:spcBef>
-                <a:spcPts val="0"/>
-              </a:spcBef>
-              <a:spcAft>
-                <a:spcPts val="0"/>
-              </a:spcAft>
-              <a:buNone/>
-            </a:pPr>
-            <a:endParaRPr lang="it-IT" sz="1800" b="1" dirty="0"/>
-          </a:p>
-          <a:p>
-            <a:pPr marL="457200" lvl="0" indent="-342900" algn="l" rtl="0">
-              <a:spcBef>
-                <a:spcPts val="1600"/>
-              </a:spcBef>
-              <a:spcAft>
-                <a:spcPts val="0"/>
-              </a:spcAft>
-              <a:buSzPts val="1800"/>
-              <a:buChar char="●"/>
-            </a:pPr>
-            <a:r>
-              <a:rPr lang="it" sz="1800" b="1" dirty="0"/>
-              <a:t>Login utente</a:t>
-            </a:r>
-            <a:endParaRPr sz="1800" b="1" dirty="0"/>
-          </a:p>
-          <a:p>
-            <a:pPr marL="457200" lvl="0" indent="-342900" algn="l" rtl="0">
-              <a:spcBef>
-                <a:spcPts val="0"/>
-              </a:spcBef>
-              <a:spcAft>
-                <a:spcPts val="0"/>
-              </a:spcAft>
-              <a:buSzPts val="1800"/>
-              <a:buChar char="●"/>
-            </a:pPr>
-            <a:r>
-              <a:rPr lang="it" sz="1800" b="1" dirty="0"/>
-              <a:t>Registrazione utente</a:t>
-            </a:r>
-            <a:endParaRPr sz="1800" b="1" dirty="0"/>
-          </a:p>
-          <a:p>
-            <a:pPr marL="457200" lvl="0" indent="-342900" algn="l" rtl="0">
-              <a:spcBef>
-                <a:spcPts val="0"/>
-              </a:spcBef>
-              <a:spcAft>
-                <a:spcPts val="0"/>
-              </a:spcAft>
-              <a:buSzPts val="1800"/>
-              <a:buChar char="●"/>
-            </a:pPr>
-            <a:r>
-              <a:rPr lang="it-IT" sz="1800" b="1" dirty="0"/>
-              <a:t>Home</a:t>
-            </a:r>
-            <a:endParaRPr lang="it" sz="1800" b="1" dirty="0"/>
-          </a:p>
-          <a:p>
-            <a:pPr marL="457200" lvl="0" indent="-342900" algn="l" rtl="0">
-              <a:spcBef>
-                <a:spcPts val="0"/>
-              </a:spcBef>
-              <a:spcAft>
-                <a:spcPts val="0"/>
-              </a:spcAft>
-              <a:buSzPts val="1800"/>
-              <a:buChar char="●"/>
-            </a:pPr>
-            <a:r>
-              <a:rPr lang="it-IT" sz="1800" b="1" dirty="0"/>
-              <a:t>Cartella Clinica</a:t>
-            </a:r>
-          </a:p>
-          <a:p>
-            <a:pPr marL="457200" lvl="0" indent="-342900" algn="l" rtl="0">
-              <a:spcBef>
-                <a:spcPts val="0"/>
-              </a:spcBef>
-              <a:spcAft>
-                <a:spcPts val="0"/>
-              </a:spcAft>
-              <a:buSzPts val="1800"/>
-              <a:buChar char="●"/>
-            </a:pPr>
-            <a:r>
-              <a:rPr lang="it-IT" sz="1800" b="1" dirty="0"/>
-              <a:t>Profilo animale</a:t>
-            </a:r>
-          </a:p>
-          <a:p>
-            <a:pPr marL="457200" lvl="0" indent="-342900" algn="l" rtl="0">
-              <a:spcBef>
-                <a:spcPts val="0"/>
-              </a:spcBef>
-              <a:spcAft>
-                <a:spcPts val="0"/>
-              </a:spcAft>
-              <a:buSzPts val="1800"/>
-              <a:buChar char="●"/>
-            </a:pPr>
-            <a:r>
-              <a:rPr lang="it-IT" sz="1800" b="1" dirty="0"/>
-              <a:t>Profilo utente</a:t>
-            </a:r>
-          </a:p>
-          <a:p>
-            <a:pPr marL="457200" lvl="0" indent="-342900" algn="l" rtl="0">
-              <a:spcBef>
-                <a:spcPts val="0"/>
-              </a:spcBef>
-              <a:spcAft>
-                <a:spcPts val="0"/>
-              </a:spcAft>
-              <a:buSzPts val="1800"/>
-              <a:buChar char="●"/>
-            </a:pPr>
-            <a:r>
-              <a:rPr lang="it-IT" sz="1800" b="1" dirty="0"/>
-              <a:t>Calendario utente per salvare eventi</a:t>
-            </a:r>
-          </a:p>
-        </p:txBody>
-      </p:sp>
-      <p:sp>
-        <p:nvSpPr>
-          <p:cNvPr id="84" name="Google Shape;84;p17"/>
-          <p:cNvSpPr txBox="1">
-            <a:spLocks noGrp="1"/>
-          </p:cNvSpPr>
-          <p:nvPr>
-            <p:ph type="title"/>
-          </p:nvPr>
-        </p:nvSpPr>
-        <p:spPr>
-          <a:xfrm>
-            <a:off x="311700" y="445025"/>
-            <a:ext cx="4260300" cy="613200"/>
-          </a:xfrm>
-          <a:prstGeom prst="rect">
-            <a:avLst/>
-          </a:prstGeom>
-        </p:spPr>
-        <p:txBody>
-          <a:bodyPr spcFirstLastPara="1" wrap="square" lIns="91425" tIns="91425" rIns="91425" bIns="91425" anchor="t" anchorCtr="0">
-            <a:noAutofit/>
-          </a:bodyPr>
-          <a:lstStyle/>
-          <a:p>
-            <a:pPr marL="0" lvl="0" indent="0" algn="l" rtl="0">
-              <a:spcBef>
-                <a:spcPts val="0"/>
-              </a:spcBef>
-              <a:spcAft>
-                <a:spcPts val="0"/>
-              </a:spcAft>
-              <a:buNone/>
-            </a:pPr>
-            <a:r>
-              <a:rPr lang="it"/>
-              <a:t>L’APP</a:t>
-            </a:r>
-            <a:endParaRPr/>
-          </a:p>
-        </p:txBody>
-      </p:sp>
-      <p:sp>
-        <p:nvSpPr>
-          <p:cNvPr id="85" name="Google Shape;85;p17"/>
-          <p:cNvSpPr txBox="1">
-            <a:spLocks noGrp="1"/>
-          </p:cNvSpPr>
-          <p:nvPr>
-            <p:ph type="title"/>
-          </p:nvPr>
-        </p:nvSpPr>
-        <p:spPr>
-          <a:xfrm>
-            <a:off x="4752925" y="445025"/>
-            <a:ext cx="4260300" cy="613200"/>
-          </a:xfrm>
-          <a:prstGeom prst="rect">
-            <a:avLst/>
-          </a:prstGeom>
-        </p:spPr>
-        <p:txBody>
-          <a:bodyPr spcFirstLastPara="1" wrap="square" lIns="91425" tIns="91425" rIns="91425" bIns="91425" anchor="t" anchorCtr="0">
-            <a:noAutofit/>
-          </a:bodyPr>
-          <a:lstStyle/>
-          <a:p>
-            <a:pPr marL="0" lvl="0" indent="0" algn="l" rtl="0">
-              <a:spcBef>
-                <a:spcPts val="0"/>
-              </a:spcBef>
-              <a:spcAft>
-                <a:spcPts val="0"/>
-              </a:spcAft>
-              <a:buNone/>
-            </a:pPr>
-            <a:r>
-              <a:rPr lang="it"/>
-              <a:t>IL SITO</a:t>
-            </a:r>
-            <a:endParaRPr/>
-          </a:p>
-        </p:txBody>
-      </p:sp>
-      <p:sp>
-        <p:nvSpPr>
-          <p:cNvPr id="86" name="Google Shape;86;p17"/>
-          <p:cNvSpPr txBox="1">
-            <a:spLocks noGrp="1"/>
-          </p:cNvSpPr>
-          <p:nvPr>
-            <p:ph type="body" idx="1"/>
-          </p:nvPr>
-        </p:nvSpPr>
-        <p:spPr>
-          <a:xfrm>
-            <a:off x="4752925" y="1171675"/>
-            <a:ext cx="3999900" cy="3397200"/>
-          </a:xfrm>
-          <a:prstGeom prst="rect">
-            <a:avLst/>
-          </a:prstGeom>
-        </p:spPr>
-        <p:txBody>
-          <a:bodyPr spcFirstLastPara="1" wrap="square" lIns="91425" tIns="91425" rIns="91425" bIns="91425" anchor="t" anchorCtr="0">
-            <a:noAutofit/>
-          </a:bodyPr>
-          <a:lstStyle/>
-          <a:p>
-            <a:pPr marL="0" lvl="0" indent="0" algn="l" rtl="0">
-              <a:spcBef>
-                <a:spcPts val="0"/>
-              </a:spcBef>
-              <a:spcAft>
-                <a:spcPts val="0"/>
-              </a:spcAft>
-              <a:buNone/>
-            </a:pPr>
-            <a:r>
-              <a:rPr lang="it" sz="1800" b="1" dirty="0"/>
-              <a:t>schermate:</a:t>
-            </a:r>
-            <a:endParaRPr lang="it-IT" sz="1800" b="1" dirty="0"/>
-          </a:p>
-          <a:p>
-            <a:pPr marL="457200" lvl="0" indent="-342900" algn="l" rtl="0">
-              <a:spcBef>
-                <a:spcPts val="1600"/>
-              </a:spcBef>
-              <a:spcAft>
-                <a:spcPts val="0"/>
-              </a:spcAft>
-              <a:buSzPts val="1800"/>
-              <a:buChar char="●"/>
-            </a:pPr>
-            <a:endParaRPr lang="it-IT" sz="1800" b="1" dirty="0"/>
-          </a:p>
-          <a:p>
-            <a:pPr marL="457200" lvl="0" indent="-342900" algn="l" rtl="0">
-              <a:spcBef>
-                <a:spcPts val="1600"/>
-              </a:spcBef>
-              <a:spcAft>
-                <a:spcPts val="0"/>
-              </a:spcAft>
-              <a:buSzPts val="1800"/>
-              <a:buChar char="●"/>
-            </a:pPr>
-            <a:r>
-              <a:rPr lang="it-IT" sz="1800" b="1" dirty="0"/>
-              <a:t>Home fornitore</a:t>
-            </a:r>
-          </a:p>
-          <a:p>
-            <a:pPr marL="457200" lvl="0" indent="-342900" algn="l" rtl="0">
-              <a:spcBef>
-                <a:spcPts val="0"/>
-              </a:spcBef>
-              <a:spcAft>
-                <a:spcPts val="0"/>
-              </a:spcAft>
-              <a:buSzPts val="1800"/>
-              <a:buChar char="●"/>
-            </a:pPr>
-            <a:r>
-              <a:rPr lang="it" sz="1800" b="1" dirty="0"/>
-              <a:t>pagina inserimento nuovi servizi</a:t>
-            </a:r>
-            <a:endParaRPr sz="1800" b="1" dirty="0"/>
-          </a:p>
-          <a:p>
-            <a:pPr marL="457200" lvl="0" indent="-342900" algn="l" rtl="0">
-              <a:spcBef>
-                <a:spcPts val="0"/>
-              </a:spcBef>
-              <a:spcAft>
-                <a:spcPts val="0"/>
-              </a:spcAft>
-              <a:buSzPts val="1800"/>
-              <a:buChar char="●"/>
-            </a:pPr>
-            <a:r>
-              <a:rPr lang="it" sz="1800" b="1" dirty="0"/>
-              <a:t>modifica delle informazioni</a:t>
-            </a:r>
-            <a:endParaRPr sz="1800" b="1" dirty="0"/>
-          </a:p>
-          <a:p>
-            <a:pPr marL="0" lvl="0" indent="0" algn="l" rtl="0">
-              <a:spcBef>
-                <a:spcPts val="1600"/>
-              </a:spcBef>
-              <a:spcAft>
-                <a:spcPts val="1600"/>
-              </a:spcAft>
-              <a:buNone/>
-            </a:pPr>
-            <a:endParaRPr sz="1800" b="1" dirty="0"/>
-          </a:p>
-        </p:txBody>
-      </p:sp>
-    </p:spTree>
-  </p:cSld>
-  <p:clrMapOvr>
-    <a:masterClrMapping/>
-  </p:clrMapOvr>
-</p:sld>
-</file>
-
-<file path=ppt/slides/slide11.xml><?xml version="1.0" encoding="utf-8"?>
-<p:sld xmlns:a="http://schemas.openxmlformats.org/drawingml/2006/main" xmlns:r="http://schemas.openxmlformats.org/officeDocument/2006/relationships" xmlns:p="http://schemas.openxmlformats.org/presentationml/2006/main">
-  <p:cSld>
-    <p:spTree>
-      <p:nvGrpSpPr>
         <p:cNvPr id="1" name=""/>
         <p:cNvGrpSpPr/>
         <p:nvPr/>
@@ -7960,7 +7566,7 @@
 </p:sld>
 </file>
 
-<file path=ppt/slides/slide12.xml><?xml version="1.0" encoding="utf-8"?>
+<file path=ppt/slides/slide11.xml><?xml version="1.0" encoding="utf-8"?>
 <p:sld xmlns:a="http://schemas.openxmlformats.org/drawingml/2006/main" xmlns:r="http://schemas.openxmlformats.org/officeDocument/2006/relationships" xmlns:p="http://schemas.openxmlformats.org/presentationml/2006/main">
   <p:cSld>
     <p:spTree>
@@ -8417,6 +8023,400 @@
       </p:par>
     </p:tnLst>
   </p:timing>
+</p:sld>
+</file>
+
+<file path=ppt/slides/slide12.xml><?xml version="1.0" encoding="utf-8"?>
+<p:sld xmlns:a="http://schemas.openxmlformats.org/drawingml/2006/main" xmlns:r="http://schemas.openxmlformats.org/officeDocument/2006/relationships" xmlns:p="http://schemas.openxmlformats.org/presentationml/2006/main">
+  <p:cSld>
+    <p:spTree>
+      <p:nvGrpSpPr>
+        <p:cNvPr id="1" name="Shape 82"/>
+        <p:cNvGrpSpPr/>
+        <p:nvPr/>
+      </p:nvGrpSpPr>
+      <p:grpSpPr>
+        <a:xfrm>
+          <a:off x="0" y="0"/>
+          <a:ext cx="0" cy="0"/>
+          <a:chOff x="0" y="0"/>
+          <a:chExt cx="0" cy="0"/>
+        </a:xfrm>
+      </p:grpSpPr>
+      <p:sp>
+        <p:nvSpPr>
+          <p:cNvPr id="83" name="Google Shape;83;p17"/>
+          <p:cNvSpPr txBox="1">
+            <a:spLocks noGrp="1"/>
+          </p:cNvSpPr>
+          <p:nvPr>
+            <p:ph type="body" idx="1"/>
+          </p:nvPr>
+        </p:nvSpPr>
+        <p:spPr>
+          <a:xfrm>
+            <a:off x="311700" y="1171675"/>
+            <a:ext cx="3999900" cy="3397200"/>
+          </a:xfrm>
+          <a:prstGeom prst="rect">
+            <a:avLst/>
+          </a:prstGeom>
+        </p:spPr>
+        <p:txBody>
+          <a:bodyPr spcFirstLastPara="1" wrap="square" lIns="91425" tIns="91425" rIns="91425" bIns="91425" anchor="t" anchorCtr="0">
+            <a:noAutofit/>
+          </a:bodyPr>
+          <a:lstStyle/>
+          <a:p>
+            <a:pPr marL="0" lvl="0" indent="0" algn="l" rtl="0">
+              <a:spcBef>
+                <a:spcPts val="0"/>
+              </a:spcBef>
+              <a:spcAft>
+                <a:spcPts val="0"/>
+              </a:spcAft>
+              <a:buNone/>
+            </a:pPr>
+            <a:r>
+              <a:rPr lang="it" sz="1800" b="1" dirty="0"/>
+              <a:t>schermate:</a:t>
+            </a:r>
+          </a:p>
+          <a:p>
+            <a:pPr marL="0" lvl="0" indent="0" algn="l" rtl="0">
+              <a:spcBef>
+                <a:spcPts val="0"/>
+              </a:spcBef>
+              <a:spcAft>
+                <a:spcPts val="0"/>
+              </a:spcAft>
+              <a:buNone/>
+            </a:pPr>
+            <a:endParaRPr lang="it-IT" sz="1800" b="1" dirty="0"/>
+          </a:p>
+          <a:p>
+            <a:pPr marL="457200" lvl="0" indent="-342900" algn="l" rtl="0">
+              <a:spcBef>
+                <a:spcPts val="1600"/>
+              </a:spcBef>
+              <a:spcAft>
+                <a:spcPts val="0"/>
+              </a:spcAft>
+              <a:buSzPts val="1800"/>
+              <a:buChar char="●"/>
+            </a:pPr>
+            <a:r>
+              <a:rPr lang="it" sz="1800" b="1" dirty="0"/>
+              <a:t>Login utente</a:t>
+            </a:r>
+            <a:endParaRPr sz="1800" b="1" dirty="0"/>
+          </a:p>
+          <a:p>
+            <a:pPr marL="457200" lvl="0" indent="-342900" algn="l" rtl="0">
+              <a:spcBef>
+                <a:spcPts val="0"/>
+              </a:spcBef>
+              <a:spcAft>
+                <a:spcPts val="0"/>
+              </a:spcAft>
+              <a:buSzPts val="1800"/>
+              <a:buChar char="●"/>
+            </a:pPr>
+            <a:r>
+              <a:rPr lang="it" sz="1800" b="1" dirty="0"/>
+              <a:t>Registrazione utente</a:t>
+            </a:r>
+            <a:endParaRPr sz="1800" b="1" dirty="0"/>
+          </a:p>
+          <a:p>
+            <a:pPr marL="457200" lvl="0" indent="-342900" algn="l" rtl="0">
+              <a:spcBef>
+                <a:spcPts val="0"/>
+              </a:spcBef>
+              <a:spcAft>
+                <a:spcPts val="0"/>
+              </a:spcAft>
+              <a:buSzPts val="1800"/>
+              <a:buChar char="●"/>
+            </a:pPr>
+            <a:r>
+              <a:rPr lang="it-IT" sz="1800" b="1" dirty="0"/>
+              <a:t>Home</a:t>
+            </a:r>
+            <a:endParaRPr lang="it" sz="1800" b="1" dirty="0"/>
+          </a:p>
+          <a:p>
+            <a:pPr marL="457200" lvl="0" indent="-342900" algn="l" rtl="0">
+              <a:spcBef>
+                <a:spcPts val="0"/>
+              </a:spcBef>
+              <a:spcAft>
+                <a:spcPts val="0"/>
+              </a:spcAft>
+              <a:buSzPts val="1800"/>
+              <a:buChar char="●"/>
+            </a:pPr>
+            <a:r>
+              <a:rPr lang="it-IT" sz="1800" b="1" dirty="0"/>
+              <a:t>Cartella Clinica</a:t>
+            </a:r>
+          </a:p>
+          <a:p>
+            <a:pPr marL="457200" lvl="0" indent="-342900" algn="l" rtl="0">
+              <a:spcBef>
+                <a:spcPts val="0"/>
+              </a:spcBef>
+              <a:spcAft>
+                <a:spcPts val="0"/>
+              </a:spcAft>
+              <a:buSzPts val="1800"/>
+              <a:buChar char="●"/>
+            </a:pPr>
+            <a:r>
+              <a:rPr lang="it-IT" sz="1800" b="1" dirty="0"/>
+              <a:t>Profilo animale</a:t>
+            </a:r>
+          </a:p>
+          <a:p>
+            <a:pPr marL="457200" lvl="0" indent="-342900" algn="l" rtl="0">
+              <a:spcBef>
+                <a:spcPts val="0"/>
+              </a:spcBef>
+              <a:spcAft>
+                <a:spcPts val="0"/>
+              </a:spcAft>
+              <a:buSzPts val="1800"/>
+              <a:buChar char="●"/>
+            </a:pPr>
+            <a:r>
+              <a:rPr lang="it-IT" sz="1800" b="1" dirty="0"/>
+              <a:t>Profilo utente</a:t>
+            </a:r>
+          </a:p>
+          <a:p>
+            <a:pPr marL="457200" lvl="0" indent="-342900" algn="l" rtl="0">
+              <a:spcBef>
+                <a:spcPts val="0"/>
+              </a:spcBef>
+              <a:spcAft>
+                <a:spcPts val="0"/>
+              </a:spcAft>
+              <a:buSzPts val="1800"/>
+              <a:buChar char="●"/>
+            </a:pPr>
+            <a:r>
+              <a:rPr lang="it-IT" sz="1800" b="1" dirty="0"/>
+              <a:t>Calendario utente per salvare eventi</a:t>
+            </a:r>
+          </a:p>
+        </p:txBody>
+      </p:sp>
+      <p:sp>
+        <p:nvSpPr>
+          <p:cNvPr id="84" name="Google Shape;84;p17"/>
+          <p:cNvSpPr txBox="1">
+            <a:spLocks noGrp="1"/>
+          </p:cNvSpPr>
+          <p:nvPr>
+            <p:ph type="title"/>
+          </p:nvPr>
+        </p:nvSpPr>
+        <p:spPr>
+          <a:xfrm>
+            <a:off x="311700" y="445025"/>
+            <a:ext cx="4260300" cy="613200"/>
+          </a:xfrm>
+          <a:prstGeom prst="rect">
+            <a:avLst/>
+          </a:prstGeom>
+        </p:spPr>
+        <p:txBody>
+          <a:bodyPr spcFirstLastPara="1" wrap="square" lIns="91425" tIns="91425" rIns="91425" bIns="91425" anchor="t" anchorCtr="0">
+            <a:noAutofit/>
+          </a:bodyPr>
+          <a:lstStyle/>
+          <a:p>
+            <a:pPr marL="0" lvl="0" indent="0" algn="l" rtl="0">
+              <a:spcBef>
+                <a:spcPts val="0"/>
+              </a:spcBef>
+              <a:spcAft>
+                <a:spcPts val="0"/>
+              </a:spcAft>
+              <a:buNone/>
+            </a:pPr>
+            <a:r>
+              <a:rPr lang="it"/>
+              <a:t>L’APP</a:t>
+            </a:r>
+            <a:endParaRPr/>
+          </a:p>
+        </p:txBody>
+      </p:sp>
+      <p:sp>
+        <p:nvSpPr>
+          <p:cNvPr id="85" name="Google Shape;85;p17"/>
+          <p:cNvSpPr txBox="1">
+            <a:spLocks noGrp="1"/>
+          </p:cNvSpPr>
+          <p:nvPr>
+            <p:ph type="title"/>
+          </p:nvPr>
+        </p:nvSpPr>
+        <p:spPr>
+          <a:xfrm>
+            <a:off x="4752925" y="445025"/>
+            <a:ext cx="4260300" cy="613200"/>
+          </a:xfrm>
+          <a:prstGeom prst="rect">
+            <a:avLst/>
+          </a:prstGeom>
+        </p:spPr>
+        <p:txBody>
+          <a:bodyPr spcFirstLastPara="1" wrap="square" lIns="91425" tIns="91425" rIns="91425" bIns="91425" anchor="t" anchorCtr="0">
+            <a:noAutofit/>
+          </a:bodyPr>
+          <a:lstStyle/>
+          <a:p>
+            <a:pPr marL="0" lvl="0" indent="0" algn="l" rtl="0">
+              <a:spcBef>
+                <a:spcPts val="0"/>
+              </a:spcBef>
+              <a:spcAft>
+                <a:spcPts val="0"/>
+              </a:spcAft>
+              <a:buNone/>
+            </a:pPr>
+            <a:r>
+              <a:rPr lang="it"/>
+              <a:t>IL SITO</a:t>
+            </a:r>
+            <a:endParaRPr/>
+          </a:p>
+        </p:txBody>
+      </p:sp>
+      <p:sp>
+        <p:nvSpPr>
+          <p:cNvPr id="86" name="Google Shape;86;p17"/>
+          <p:cNvSpPr txBox="1">
+            <a:spLocks noGrp="1"/>
+          </p:cNvSpPr>
+          <p:nvPr>
+            <p:ph type="body" idx="1"/>
+          </p:nvPr>
+        </p:nvSpPr>
+        <p:spPr>
+          <a:xfrm>
+            <a:off x="4752925" y="1171675"/>
+            <a:ext cx="3999900" cy="3397200"/>
+          </a:xfrm>
+          <a:prstGeom prst="rect">
+            <a:avLst/>
+          </a:prstGeom>
+        </p:spPr>
+        <p:txBody>
+          <a:bodyPr spcFirstLastPara="1" wrap="square" lIns="91425" tIns="91425" rIns="91425" bIns="91425" anchor="t" anchorCtr="0">
+            <a:noAutofit/>
+          </a:bodyPr>
+          <a:lstStyle/>
+          <a:p>
+            <a:pPr marL="0" lvl="0" indent="0" algn="l" rtl="0">
+              <a:spcBef>
+                <a:spcPts val="0"/>
+              </a:spcBef>
+              <a:spcAft>
+                <a:spcPts val="0"/>
+              </a:spcAft>
+              <a:buNone/>
+            </a:pPr>
+            <a:r>
+              <a:rPr lang="it" sz="1800" b="1" dirty="0"/>
+              <a:t>schermate:</a:t>
+            </a:r>
+            <a:endParaRPr lang="it-IT" sz="1800" b="1" dirty="0"/>
+          </a:p>
+          <a:p>
+            <a:pPr marL="457200" lvl="0" indent="-342900" algn="l" rtl="0">
+              <a:spcBef>
+                <a:spcPts val="1600"/>
+              </a:spcBef>
+              <a:spcAft>
+                <a:spcPts val="0"/>
+              </a:spcAft>
+              <a:buSzPts val="1800"/>
+              <a:buChar char="●"/>
+            </a:pPr>
+            <a:endParaRPr lang="it-IT" sz="1800" b="1" dirty="0"/>
+          </a:p>
+          <a:p>
+            <a:pPr marL="457200" lvl="0" indent="-342900" algn="l" rtl="0">
+              <a:spcBef>
+                <a:spcPts val="1600"/>
+              </a:spcBef>
+              <a:spcAft>
+                <a:spcPts val="0"/>
+              </a:spcAft>
+              <a:buSzPts val="1800"/>
+              <a:buChar char="●"/>
+            </a:pPr>
+            <a:r>
+              <a:rPr lang="it-IT" sz="1800" b="1" dirty="0"/>
+              <a:t>Home fornitore</a:t>
+            </a:r>
+          </a:p>
+          <a:p>
+            <a:pPr marL="457200" lvl="0" indent="-342900" algn="l" rtl="0">
+              <a:spcBef>
+                <a:spcPts val="0"/>
+              </a:spcBef>
+              <a:spcAft>
+                <a:spcPts val="0"/>
+              </a:spcAft>
+              <a:buSzPts val="1800"/>
+              <a:buChar char="●"/>
+            </a:pPr>
+            <a:r>
+              <a:rPr lang="it" sz="1800" b="1" dirty="0"/>
+              <a:t>pagina inserimento nuovi servizi</a:t>
+            </a:r>
+            <a:endParaRPr sz="1800" b="1" dirty="0"/>
+          </a:p>
+          <a:p>
+            <a:pPr marL="457200" lvl="0" indent="-342900" algn="l" rtl="0">
+              <a:spcBef>
+                <a:spcPts val="0"/>
+              </a:spcBef>
+              <a:spcAft>
+                <a:spcPts val="0"/>
+              </a:spcAft>
+              <a:buSzPts val="1800"/>
+              <a:buChar char="●"/>
+            </a:pPr>
+            <a:r>
+              <a:rPr lang="it" sz="1800" b="1" dirty="0"/>
+              <a:t>modifica delle informazioni</a:t>
+            </a:r>
+            <a:endParaRPr sz="1800" b="1" dirty="0"/>
+          </a:p>
+          <a:p>
+            <a:pPr marL="0" lvl="0" indent="0" algn="l" rtl="0">
+              <a:spcBef>
+                <a:spcPts val="1600"/>
+              </a:spcBef>
+              <a:spcAft>
+                <a:spcPts val="1600"/>
+              </a:spcAft>
+              <a:buNone/>
+            </a:pPr>
+            <a:endParaRPr sz="1800" b="1" dirty="0"/>
+          </a:p>
+        </p:txBody>
+      </p:sp>
+    </p:spTree>
+  </p:cSld>
+  <p:clrMapOvr>
+    <a:masterClrMapping/>
+  </p:clrMapOvr>
 </p:sld>
 </file>
 

--- a/Documenti/Relazione Finale/PP relazione.pptx
+++ b/Documenti/Relazione Finale/PP relazione.pptx
@@ -5,7 +5,7 @@
     <p:sldMasterId id="2147483659" r:id="rId1"/>
   </p:sldMasterIdLst>
   <p:notesMasterIdLst>
-    <p:notesMasterId r:id="rId25"/>
+    <p:notesMasterId r:id="rId28"/>
   </p:notesMasterIdLst>
   <p:sldIdLst>
     <p:sldId id="256" r:id="rId2"/>
@@ -31,22 +31,25 @@
     <p:sldId id="277" r:id="rId22"/>
     <p:sldId id="278" r:id="rId23"/>
     <p:sldId id="276" r:id="rId24"/>
+    <p:sldId id="281" r:id="rId25"/>
+    <p:sldId id="282" r:id="rId26"/>
+    <p:sldId id="283" r:id="rId27"/>
   </p:sldIdLst>
   <p:sldSz cx="9144000" cy="5143500" type="screen16x9"/>
   <p:notesSz cx="6858000" cy="9144000"/>
   <p:embeddedFontLst>
     <p:embeddedFont>
       <p:font typeface="Amasis MT Pro" panose="02040504050005020304" pitchFamily="18" charset="0"/>
-      <p:regular r:id="rId26"/>
-      <p:bold r:id="rId27"/>
-      <p:italic r:id="rId28"/>
-      <p:boldItalic r:id="rId29"/>
+      <p:regular r:id="rId29"/>
+      <p:bold r:id="rId30"/>
+      <p:italic r:id="rId31"/>
+      <p:boldItalic r:id="rId32"/>
     </p:embeddedFont>
     <p:embeddedFont>
       <p:font typeface="Old Standard TT" panose="020B0604020202020204" charset="0"/>
-      <p:regular r:id="rId30"/>
-      <p:bold r:id="rId31"/>
-      <p:italic r:id="rId32"/>
+      <p:regular r:id="rId33"/>
+      <p:bold r:id="rId34"/>
+      <p:italic r:id="rId35"/>
     </p:embeddedFont>
   </p:embeddedFontLst>
   <p:defaultTextStyle>
@@ -11809,6 +11812,1235 @@
 </p:sld>
 </file>
 
+<file path=ppt/slides/slide24.xml><?xml version="1.0" encoding="utf-8"?>
+<p:sld xmlns:a="http://schemas.openxmlformats.org/drawingml/2006/main" xmlns:r="http://schemas.openxmlformats.org/officeDocument/2006/relationships" xmlns:p="http://schemas.openxmlformats.org/presentationml/2006/main">
+  <p:cSld>
+    <p:spTree>
+      <p:nvGrpSpPr>
+        <p:cNvPr id="1" name=""/>
+        <p:cNvGrpSpPr/>
+        <p:nvPr/>
+      </p:nvGrpSpPr>
+      <p:grpSpPr>
+        <a:xfrm>
+          <a:off x="0" y="0"/>
+          <a:ext cx="0" cy="0"/>
+          <a:chOff x="0" y="0"/>
+          <a:chExt cx="0" cy="0"/>
+        </a:xfrm>
+      </p:grpSpPr>
+      <p:sp>
+        <p:nvSpPr>
+          <p:cNvPr id="3" name="Sottotitolo 2">
+            <a:extLst>
+              <a:ext uri="{FF2B5EF4-FFF2-40B4-BE49-F238E27FC236}">
+                <a16:creationId xmlns:a16="http://schemas.microsoft.com/office/drawing/2014/main" id="{CFCDC084-CEE7-A9A1-A14C-0263EBE71878}"/>
+              </a:ext>
+            </a:extLst>
+          </p:cNvPr>
+          <p:cNvSpPr>
+            <a:spLocks noGrp="1"/>
+          </p:cNvSpPr>
+          <p:nvPr>
+            <p:ph type="subTitle" idx="1"/>
+          </p:nvPr>
+        </p:nvSpPr>
+        <p:spPr>
+          <a:xfrm>
+            <a:off x="175693" y="1547295"/>
+            <a:ext cx="4045200" cy="1345500"/>
+          </a:xfrm>
+        </p:spPr>
+        <p:txBody>
+          <a:bodyPr/>
+          <a:lstStyle/>
+          <a:p>
+            <a:r>
+              <a:rPr lang="it-IT" dirty="0">
+                <a:solidFill>
+                  <a:srgbClr val="FF0000"/>
+                </a:solidFill>
+              </a:rPr>
+              <a:t>ESEMPIO CLASSE MODELLO:</a:t>
+            </a:r>
+          </a:p>
+          <a:p>
+            <a:r>
+              <a:rPr lang="it-IT" dirty="0"/>
+              <a:t>-ATTRIBUTI</a:t>
+            </a:r>
+          </a:p>
+          <a:p>
+            <a:r>
+              <a:rPr lang="it-IT" dirty="0"/>
+              <a:t>-COSTRUTTORE</a:t>
+            </a:r>
+          </a:p>
+          <a:p>
+            <a:r>
+              <a:rPr lang="it-IT" dirty="0"/>
+              <a:t>-GETTER e SETTER</a:t>
+            </a:r>
+          </a:p>
+        </p:txBody>
+      </p:sp>
+      <p:pic>
+        <p:nvPicPr>
+          <p:cNvPr id="6" name="Immagine 5" descr="Immagine che contiene testo, schermata, software&#10;&#10;Il contenuto generato dall'IA potrebbe non essere corretto.">
+            <a:extLst>
+              <a:ext uri="{FF2B5EF4-FFF2-40B4-BE49-F238E27FC236}">
+                <a16:creationId xmlns:a16="http://schemas.microsoft.com/office/drawing/2014/main" id="{6827942A-1A84-A90B-AC37-8B1521EC441B}"/>
+              </a:ext>
+            </a:extLst>
+          </p:cNvPr>
+          <p:cNvPicPr>
+            <a:picLocks noChangeAspect="1"/>
+          </p:cNvPicPr>
+          <p:nvPr/>
+        </p:nvPicPr>
+        <p:blipFill>
+          <a:blip r:embed="rId2"/>
+          <a:stretch>
+            <a:fillRect/>
+          </a:stretch>
+        </p:blipFill>
+        <p:spPr>
+          <a:xfrm>
+            <a:off x="5974808" y="0"/>
+            <a:ext cx="1428567" cy="1657453"/>
+          </a:xfrm>
+          <a:prstGeom prst="rect">
+            <a:avLst/>
+          </a:prstGeom>
+        </p:spPr>
+      </p:pic>
+      <p:pic>
+        <p:nvPicPr>
+          <p:cNvPr id="8" name="Immagine 7" descr="Immagine che contiene testo, schermata, Carattere&#10;&#10;Il contenuto generato dall'IA potrebbe non essere corretto.">
+            <a:extLst>
+              <a:ext uri="{FF2B5EF4-FFF2-40B4-BE49-F238E27FC236}">
+                <a16:creationId xmlns:a16="http://schemas.microsoft.com/office/drawing/2014/main" id="{3198BFF7-C3F0-0785-5405-7D464972998F}"/>
+              </a:ext>
+            </a:extLst>
+          </p:cNvPr>
+          <p:cNvPicPr>
+            <a:picLocks noChangeAspect="1"/>
+          </p:cNvPicPr>
+          <p:nvPr/>
+        </p:nvPicPr>
+        <p:blipFill>
+          <a:blip r:embed="rId3"/>
+          <a:stretch>
+            <a:fillRect/>
+          </a:stretch>
+        </p:blipFill>
+        <p:spPr>
+          <a:xfrm>
+            <a:off x="4727122" y="1747282"/>
+            <a:ext cx="4306500" cy="1021719"/>
+          </a:xfrm>
+          <a:prstGeom prst="rect">
+            <a:avLst/>
+          </a:prstGeom>
+        </p:spPr>
+      </p:pic>
+      <p:pic>
+        <p:nvPicPr>
+          <p:cNvPr id="10" name="Immagine 9" descr="Immagine che contiene testo, schermata, software&#10;&#10;Il contenuto generato dall'IA potrebbe non essere corretto.">
+            <a:extLst>
+              <a:ext uri="{FF2B5EF4-FFF2-40B4-BE49-F238E27FC236}">
+                <a16:creationId xmlns:a16="http://schemas.microsoft.com/office/drawing/2014/main" id="{CCA4ECAE-9BF6-2610-2AD2-523D05315AB6}"/>
+              </a:ext>
+            </a:extLst>
+          </p:cNvPr>
+          <p:cNvPicPr>
+            <a:picLocks noChangeAspect="1"/>
+          </p:cNvPicPr>
+          <p:nvPr/>
+        </p:nvPicPr>
+        <p:blipFill>
+          <a:blip r:embed="rId4"/>
+          <a:stretch>
+            <a:fillRect/>
+          </a:stretch>
+        </p:blipFill>
+        <p:spPr>
+          <a:xfrm>
+            <a:off x="5827266" y="2858830"/>
+            <a:ext cx="1723649" cy="2039741"/>
+          </a:xfrm>
+          <a:prstGeom prst="rect">
+            <a:avLst/>
+          </a:prstGeom>
+        </p:spPr>
+      </p:pic>
+    </p:spTree>
+    <p:extLst>
+      <p:ext uri="{BB962C8B-B14F-4D97-AF65-F5344CB8AC3E}">
+        <p14:creationId xmlns:p14="http://schemas.microsoft.com/office/powerpoint/2010/main" val="2664216877"/>
+      </p:ext>
+    </p:extLst>
+  </p:cSld>
+  <p:clrMapOvr>
+    <a:masterClrMapping/>
+  </p:clrMapOvr>
+  <p:timing>
+    <p:tnLst>
+      <p:par>
+        <p:cTn id="1" dur="indefinite" restart="never" nodeType="tmRoot">
+          <p:childTnLst>
+            <p:seq concurrent="1" nextAc="seek">
+              <p:cTn id="2" dur="indefinite" nodeType="mainSeq">
+                <p:childTnLst>
+                  <p:par>
+                    <p:cTn id="3" fill="hold">
+                      <p:stCondLst>
+                        <p:cond delay="indefinite"/>
+                      </p:stCondLst>
+                      <p:childTnLst>
+                        <p:par>
+                          <p:cTn id="4" fill="hold">
+                            <p:stCondLst>
+                              <p:cond delay="0"/>
+                            </p:stCondLst>
+                            <p:childTnLst>
+                              <p:par>
+                                <p:cTn id="5" presetID="2" presetClass="entr" presetSubtype="4" fill="hold" nodeType="clickEffect">
+                                  <p:stCondLst>
+                                    <p:cond delay="0"/>
+                                  </p:stCondLst>
+                                  <p:childTnLst>
+                                    <p:set>
+                                      <p:cBhvr>
+                                        <p:cTn id="6" dur="1" fill="hold">
+                                          <p:stCondLst>
+                                            <p:cond delay="0"/>
+                                          </p:stCondLst>
+                                        </p:cTn>
+                                        <p:tgtEl>
+                                          <p:spTgt spid="6"/>
+                                        </p:tgtEl>
+                                        <p:attrNameLst>
+                                          <p:attrName>style.visibility</p:attrName>
+                                        </p:attrNameLst>
+                                      </p:cBhvr>
+                                      <p:to>
+                                        <p:strVal val="visible"/>
+                                      </p:to>
+                                    </p:set>
+                                    <p:anim calcmode="lin" valueType="num">
+                                      <p:cBhvr additive="base">
+                                        <p:cTn id="7" dur="500" fill="hold"/>
+                                        <p:tgtEl>
+                                          <p:spTgt spid="6"/>
+                                        </p:tgtEl>
+                                        <p:attrNameLst>
+                                          <p:attrName>ppt_x</p:attrName>
+                                        </p:attrNameLst>
+                                      </p:cBhvr>
+                                      <p:tavLst>
+                                        <p:tav tm="0">
+                                          <p:val>
+                                            <p:strVal val="#ppt_x"/>
+                                          </p:val>
+                                        </p:tav>
+                                        <p:tav tm="100000">
+                                          <p:val>
+                                            <p:strVal val="#ppt_x"/>
+                                          </p:val>
+                                        </p:tav>
+                                      </p:tavLst>
+                                    </p:anim>
+                                    <p:anim calcmode="lin" valueType="num">
+                                      <p:cBhvr additive="base">
+                                        <p:cTn id="8" dur="500" fill="hold"/>
+                                        <p:tgtEl>
+                                          <p:spTgt spid="6"/>
+                                        </p:tgtEl>
+                                        <p:attrNameLst>
+                                          <p:attrName>ppt_y</p:attrName>
+                                        </p:attrNameLst>
+                                      </p:cBhvr>
+                                      <p:tavLst>
+                                        <p:tav tm="0">
+                                          <p:val>
+                                            <p:strVal val="1+#ppt_h/2"/>
+                                          </p:val>
+                                        </p:tav>
+                                        <p:tav tm="100000">
+                                          <p:val>
+                                            <p:strVal val="#ppt_y"/>
+                                          </p:val>
+                                        </p:tav>
+                                      </p:tavLst>
+                                    </p:anim>
+                                  </p:childTnLst>
+                                </p:cTn>
+                              </p:par>
+                            </p:childTnLst>
+                          </p:cTn>
+                        </p:par>
+                      </p:childTnLst>
+                    </p:cTn>
+                  </p:par>
+                  <p:par>
+                    <p:cTn id="9" fill="hold">
+                      <p:stCondLst>
+                        <p:cond delay="indefinite"/>
+                      </p:stCondLst>
+                      <p:childTnLst>
+                        <p:par>
+                          <p:cTn id="10" fill="hold">
+                            <p:stCondLst>
+                              <p:cond delay="0"/>
+                            </p:stCondLst>
+                            <p:childTnLst>
+                              <p:par>
+                                <p:cTn id="11" presetID="2" presetClass="entr" presetSubtype="4" fill="hold" nodeType="clickEffect">
+                                  <p:stCondLst>
+                                    <p:cond delay="0"/>
+                                  </p:stCondLst>
+                                  <p:childTnLst>
+                                    <p:set>
+                                      <p:cBhvr>
+                                        <p:cTn id="12" dur="1" fill="hold">
+                                          <p:stCondLst>
+                                            <p:cond delay="0"/>
+                                          </p:stCondLst>
+                                        </p:cTn>
+                                        <p:tgtEl>
+                                          <p:spTgt spid="8"/>
+                                        </p:tgtEl>
+                                        <p:attrNameLst>
+                                          <p:attrName>style.visibility</p:attrName>
+                                        </p:attrNameLst>
+                                      </p:cBhvr>
+                                      <p:to>
+                                        <p:strVal val="visible"/>
+                                      </p:to>
+                                    </p:set>
+                                    <p:anim calcmode="lin" valueType="num">
+                                      <p:cBhvr additive="base">
+                                        <p:cTn id="13" dur="500" fill="hold"/>
+                                        <p:tgtEl>
+                                          <p:spTgt spid="8"/>
+                                        </p:tgtEl>
+                                        <p:attrNameLst>
+                                          <p:attrName>ppt_x</p:attrName>
+                                        </p:attrNameLst>
+                                      </p:cBhvr>
+                                      <p:tavLst>
+                                        <p:tav tm="0">
+                                          <p:val>
+                                            <p:strVal val="#ppt_x"/>
+                                          </p:val>
+                                        </p:tav>
+                                        <p:tav tm="100000">
+                                          <p:val>
+                                            <p:strVal val="#ppt_x"/>
+                                          </p:val>
+                                        </p:tav>
+                                      </p:tavLst>
+                                    </p:anim>
+                                    <p:anim calcmode="lin" valueType="num">
+                                      <p:cBhvr additive="base">
+                                        <p:cTn id="14" dur="500" fill="hold"/>
+                                        <p:tgtEl>
+                                          <p:spTgt spid="8"/>
+                                        </p:tgtEl>
+                                        <p:attrNameLst>
+                                          <p:attrName>ppt_y</p:attrName>
+                                        </p:attrNameLst>
+                                      </p:cBhvr>
+                                      <p:tavLst>
+                                        <p:tav tm="0">
+                                          <p:val>
+                                            <p:strVal val="1+#ppt_h/2"/>
+                                          </p:val>
+                                        </p:tav>
+                                        <p:tav tm="100000">
+                                          <p:val>
+                                            <p:strVal val="#ppt_y"/>
+                                          </p:val>
+                                        </p:tav>
+                                      </p:tavLst>
+                                    </p:anim>
+                                  </p:childTnLst>
+                                </p:cTn>
+                              </p:par>
+                            </p:childTnLst>
+                          </p:cTn>
+                        </p:par>
+                      </p:childTnLst>
+                    </p:cTn>
+                  </p:par>
+                  <p:par>
+                    <p:cTn id="15" fill="hold">
+                      <p:stCondLst>
+                        <p:cond delay="indefinite"/>
+                      </p:stCondLst>
+                      <p:childTnLst>
+                        <p:par>
+                          <p:cTn id="16" fill="hold">
+                            <p:stCondLst>
+                              <p:cond delay="0"/>
+                            </p:stCondLst>
+                            <p:childTnLst>
+                              <p:par>
+                                <p:cTn id="17" presetID="2" presetClass="entr" presetSubtype="4" fill="hold" nodeType="clickEffect">
+                                  <p:stCondLst>
+                                    <p:cond delay="0"/>
+                                  </p:stCondLst>
+                                  <p:childTnLst>
+                                    <p:set>
+                                      <p:cBhvr>
+                                        <p:cTn id="18" dur="1" fill="hold">
+                                          <p:stCondLst>
+                                            <p:cond delay="0"/>
+                                          </p:stCondLst>
+                                        </p:cTn>
+                                        <p:tgtEl>
+                                          <p:spTgt spid="10"/>
+                                        </p:tgtEl>
+                                        <p:attrNameLst>
+                                          <p:attrName>style.visibility</p:attrName>
+                                        </p:attrNameLst>
+                                      </p:cBhvr>
+                                      <p:to>
+                                        <p:strVal val="visible"/>
+                                      </p:to>
+                                    </p:set>
+                                    <p:anim calcmode="lin" valueType="num">
+                                      <p:cBhvr additive="base">
+                                        <p:cTn id="19" dur="500" fill="hold"/>
+                                        <p:tgtEl>
+                                          <p:spTgt spid="10"/>
+                                        </p:tgtEl>
+                                        <p:attrNameLst>
+                                          <p:attrName>ppt_x</p:attrName>
+                                        </p:attrNameLst>
+                                      </p:cBhvr>
+                                      <p:tavLst>
+                                        <p:tav tm="0">
+                                          <p:val>
+                                            <p:strVal val="#ppt_x"/>
+                                          </p:val>
+                                        </p:tav>
+                                        <p:tav tm="100000">
+                                          <p:val>
+                                            <p:strVal val="#ppt_x"/>
+                                          </p:val>
+                                        </p:tav>
+                                      </p:tavLst>
+                                    </p:anim>
+                                    <p:anim calcmode="lin" valueType="num">
+                                      <p:cBhvr additive="base">
+                                        <p:cTn id="20" dur="500" fill="hold"/>
+                                        <p:tgtEl>
+                                          <p:spTgt spid="10"/>
+                                        </p:tgtEl>
+                                        <p:attrNameLst>
+                                          <p:attrName>ppt_y</p:attrName>
+                                        </p:attrNameLst>
+                                      </p:cBhvr>
+                                      <p:tavLst>
+                                        <p:tav tm="0">
+                                          <p:val>
+                                            <p:strVal val="1+#ppt_h/2"/>
+                                          </p:val>
+                                        </p:tav>
+                                        <p:tav tm="100000">
+                                          <p:val>
+                                            <p:strVal val="#ppt_y"/>
+                                          </p:val>
+                                        </p:tav>
+                                      </p:tavLst>
+                                    </p:anim>
+                                  </p:childTnLst>
+                                </p:cTn>
+                              </p:par>
+                            </p:childTnLst>
+                          </p:cTn>
+                        </p:par>
+                      </p:childTnLst>
+                    </p:cTn>
+                  </p:par>
+                </p:childTnLst>
+              </p:cTn>
+              <p:prevCondLst>
+                <p:cond evt="onPrev" delay="0">
+                  <p:tgtEl>
+                    <p:sldTgt/>
+                  </p:tgtEl>
+                </p:cond>
+              </p:prevCondLst>
+              <p:nextCondLst>
+                <p:cond evt="onNext" delay="0">
+                  <p:tgtEl>
+                    <p:sldTgt/>
+                  </p:tgtEl>
+                </p:cond>
+              </p:nextCondLst>
+            </p:seq>
+          </p:childTnLst>
+        </p:cTn>
+      </p:par>
+    </p:tnLst>
+  </p:timing>
+</p:sld>
+</file>
+
+<file path=ppt/slides/slide25.xml><?xml version="1.0" encoding="utf-8"?>
+<p:sld xmlns:a="http://schemas.openxmlformats.org/drawingml/2006/main" xmlns:r="http://schemas.openxmlformats.org/officeDocument/2006/relationships" xmlns:p="http://schemas.openxmlformats.org/presentationml/2006/main">
+  <p:cSld>
+    <p:spTree>
+      <p:nvGrpSpPr>
+        <p:cNvPr id="1" name=""/>
+        <p:cNvGrpSpPr/>
+        <p:nvPr/>
+      </p:nvGrpSpPr>
+      <p:grpSpPr>
+        <a:xfrm>
+          <a:off x="0" y="0"/>
+          <a:ext cx="0" cy="0"/>
+          <a:chOff x="0" y="0"/>
+          <a:chExt cx="0" cy="0"/>
+        </a:xfrm>
+      </p:grpSpPr>
+      <p:sp>
+        <p:nvSpPr>
+          <p:cNvPr id="3" name="Sottotitolo 2">
+            <a:extLst>
+              <a:ext uri="{FF2B5EF4-FFF2-40B4-BE49-F238E27FC236}">
+                <a16:creationId xmlns:a16="http://schemas.microsoft.com/office/drawing/2014/main" id="{9885F108-F481-B97B-1855-923F8E76DCA9}"/>
+              </a:ext>
+            </a:extLst>
+          </p:cNvPr>
+          <p:cNvSpPr>
+            <a:spLocks noGrp="1"/>
+          </p:cNvSpPr>
+          <p:nvPr>
+            <p:ph type="subTitle" idx="1"/>
+          </p:nvPr>
+        </p:nvSpPr>
+        <p:spPr>
+          <a:xfrm>
+            <a:off x="289992" y="1787131"/>
+            <a:ext cx="4045200" cy="1345500"/>
+          </a:xfrm>
+        </p:spPr>
+        <p:txBody>
+          <a:bodyPr/>
+          <a:lstStyle/>
+          <a:p>
+            <a:r>
+              <a:rPr lang="it-IT" dirty="0">
+                <a:solidFill>
+                  <a:srgbClr val="FF0000"/>
+                </a:solidFill>
+              </a:rPr>
+              <a:t>ESEMPIO XML(VIEW):</a:t>
+            </a:r>
+          </a:p>
+          <a:p>
+            <a:r>
+              <a:rPr lang="it-IT" dirty="0"/>
+              <a:t>-Uso del Relative Layout</a:t>
+            </a:r>
+          </a:p>
+          <a:p>
+            <a:r>
+              <a:rPr lang="it-IT" dirty="0"/>
+              <a:t>-Annidamento Frame Layout</a:t>
+            </a:r>
+          </a:p>
+          <a:p>
+            <a:r>
+              <a:rPr lang="it-IT" dirty="0"/>
+              <a:t>-Esempio component </a:t>
+            </a:r>
+            <a:r>
+              <a:rPr lang="it-IT" dirty="0" err="1"/>
+              <a:t>ImageView</a:t>
+            </a:r>
+            <a:endParaRPr lang="it-IT" dirty="0"/>
+          </a:p>
+        </p:txBody>
+      </p:sp>
+      <p:pic>
+        <p:nvPicPr>
+          <p:cNvPr id="6" name="Immagine 5" descr="Immagine che contiene testo, schermata, menu, Carattere&#10;&#10;Il contenuto generato dall'IA potrebbe non essere corretto.">
+            <a:extLst>
+              <a:ext uri="{FF2B5EF4-FFF2-40B4-BE49-F238E27FC236}">
+                <a16:creationId xmlns:a16="http://schemas.microsoft.com/office/drawing/2014/main" id="{6BA422BD-03CC-5663-AC02-5CFB825EC6B0}"/>
+              </a:ext>
+            </a:extLst>
+          </p:cNvPr>
+          <p:cNvPicPr>
+            <a:picLocks noChangeAspect="1"/>
+          </p:cNvPicPr>
+          <p:nvPr/>
+        </p:nvPicPr>
+        <p:blipFill>
+          <a:blip r:embed="rId2"/>
+          <a:stretch>
+            <a:fillRect/>
+          </a:stretch>
+        </p:blipFill>
+        <p:spPr>
+          <a:xfrm>
+            <a:off x="5086656" y="919263"/>
+            <a:ext cx="3598089" cy="3081237"/>
+          </a:xfrm>
+          <a:prstGeom prst="rect">
+            <a:avLst/>
+          </a:prstGeom>
+        </p:spPr>
+      </p:pic>
+    </p:spTree>
+    <p:extLst>
+      <p:ext uri="{BB962C8B-B14F-4D97-AF65-F5344CB8AC3E}">
+        <p14:creationId xmlns:p14="http://schemas.microsoft.com/office/powerpoint/2010/main" val="1416175322"/>
+      </p:ext>
+    </p:extLst>
+  </p:cSld>
+  <p:clrMapOvr>
+    <a:masterClrMapping/>
+  </p:clrMapOvr>
+  <p:timing>
+    <p:tnLst>
+      <p:par>
+        <p:cTn id="1" dur="indefinite" restart="never" nodeType="tmRoot">
+          <p:childTnLst>
+            <p:seq concurrent="1" nextAc="seek">
+              <p:cTn id="2" dur="indefinite" nodeType="mainSeq">
+                <p:childTnLst>
+                  <p:par>
+                    <p:cTn id="3" fill="hold">
+                      <p:stCondLst>
+                        <p:cond delay="indefinite"/>
+                      </p:stCondLst>
+                      <p:childTnLst>
+                        <p:par>
+                          <p:cTn id="4" fill="hold">
+                            <p:stCondLst>
+                              <p:cond delay="0"/>
+                            </p:stCondLst>
+                            <p:childTnLst>
+                              <p:par>
+                                <p:cTn id="5" presetID="2" presetClass="entr" presetSubtype="4" fill="hold" nodeType="clickEffect">
+                                  <p:stCondLst>
+                                    <p:cond delay="0"/>
+                                  </p:stCondLst>
+                                  <p:childTnLst>
+                                    <p:set>
+                                      <p:cBhvr>
+                                        <p:cTn id="6" dur="1" fill="hold">
+                                          <p:stCondLst>
+                                            <p:cond delay="0"/>
+                                          </p:stCondLst>
+                                        </p:cTn>
+                                        <p:tgtEl>
+                                          <p:spTgt spid="6"/>
+                                        </p:tgtEl>
+                                        <p:attrNameLst>
+                                          <p:attrName>style.visibility</p:attrName>
+                                        </p:attrNameLst>
+                                      </p:cBhvr>
+                                      <p:to>
+                                        <p:strVal val="visible"/>
+                                      </p:to>
+                                    </p:set>
+                                    <p:anim calcmode="lin" valueType="num">
+                                      <p:cBhvr additive="base">
+                                        <p:cTn id="7" dur="500" fill="hold"/>
+                                        <p:tgtEl>
+                                          <p:spTgt spid="6"/>
+                                        </p:tgtEl>
+                                        <p:attrNameLst>
+                                          <p:attrName>ppt_x</p:attrName>
+                                        </p:attrNameLst>
+                                      </p:cBhvr>
+                                      <p:tavLst>
+                                        <p:tav tm="0">
+                                          <p:val>
+                                            <p:strVal val="#ppt_x"/>
+                                          </p:val>
+                                        </p:tav>
+                                        <p:tav tm="100000">
+                                          <p:val>
+                                            <p:strVal val="#ppt_x"/>
+                                          </p:val>
+                                        </p:tav>
+                                      </p:tavLst>
+                                    </p:anim>
+                                    <p:anim calcmode="lin" valueType="num">
+                                      <p:cBhvr additive="base">
+                                        <p:cTn id="8" dur="500" fill="hold"/>
+                                        <p:tgtEl>
+                                          <p:spTgt spid="6"/>
+                                        </p:tgtEl>
+                                        <p:attrNameLst>
+                                          <p:attrName>ppt_y</p:attrName>
+                                        </p:attrNameLst>
+                                      </p:cBhvr>
+                                      <p:tavLst>
+                                        <p:tav tm="0">
+                                          <p:val>
+                                            <p:strVal val="1+#ppt_h/2"/>
+                                          </p:val>
+                                        </p:tav>
+                                        <p:tav tm="100000">
+                                          <p:val>
+                                            <p:strVal val="#ppt_y"/>
+                                          </p:val>
+                                        </p:tav>
+                                      </p:tavLst>
+                                    </p:anim>
+                                  </p:childTnLst>
+                                </p:cTn>
+                              </p:par>
+                            </p:childTnLst>
+                          </p:cTn>
+                        </p:par>
+                      </p:childTnLst>
+                    </p:cTn>
+                  </p:par>
+                </p:childTnLst>
+              </p:cTn>
+              <p:prevCondLst>
+                <p:cond evt="onPrev" delay="0">
+                  <p:tgtEl>
+                    <p:sldTgt/>
+                  </p:tgtEl>
+                </p:cond>
+              </p:prevCondLst>
+              <p:nextCondLst>
+                <p:cond evt="onNext" delay="0">
+                  <p:tgtEl>
+                    <p:sldTgt/>
+                  </p:tgtEl>
+                </p:cond>
+              </p:nextCondLst>
+            </p:seq>
+          </p:childTnLst>
+        </p:cTn>
+      </p:par>
+    </p:tnLst>
+  </p:timing>
+</p:sld>
+</file>
+
+<file path=ppt/slides/slide26.xml><?xml version="1.0" encoding="utf-8"?>
+<p:sld xmlns:a="http://schemas.openxmlformats.org/drawingml/2006/main" xmlns:r="http://schemas.openxmlformats.org/officeDocument/2006/relationships" xmlns:p="http://schemas.openxmlformats.org/presentationml/2006/main">
+  <p:cSld>
+    <p:spTree>
+      <p:nvGrpSpPr>
+        <p:cNvPr id="1" name=""/>
+        <p:cNvGrpSpPr/>
+        <p:nvPr/>
+      </p:nvGrpSpPr>
+      <p:grpSpPr>
+        <a:xfrm>
+          <a:off x="0" y="0"/>
+          <a:ext cx="0" cy="0"/>
+          <a:chOff x="0" y="0"/>
+          <a:chExt cx="0" cy="0"/>
+        </a:xfrm>
+      </p:grpSpPr>
+      <p:sp>
+        <p:nvSpPr>
+          <p:cNvPr id="3" name="Sottotitolo 2">
+            <a:extLst>
+              <a:ext uri="{FF2B5EF4-FFF2-40B4-BE49-F238E27FC236}">
+                <a16:creationId xmlns:a16="http://schemas.microsoft.com/office/drawing/2014/main" id="{901CAD4B-1583-994C-B63D-D85D1BF35DF9}"/>
+              </a:ext>
+            </a:extLst>
+          </p:cNvPr>
+          <p:cNvSpPr>
+            <a:spLocks noGrp="1"/>
+          </p:cNvSpPr>
+          <p:nvPr>
+            <p:ph type="subTitle" idx="1"/>
+          </p:nvPr>
+        </p:nvSpPr>
+        <p:spPr>
+          <a:xfrm>
+            <a:off x="224678" y="1609672"/>
+            <a:ext cx="4045200" cy="1345500"/>
+          </a:xfrm>
+        </p:spPr>
+        <p:txBody>
+          <a:bodyPr/>
+          <a:lstStyle/>
+          <a:p>
+            <a:r>
+              <a:rPr lang="it-IT" dirty="0">
+                <a:solidFill>
+                  <a:srgbClr val="FF0000"/>
+                </a:solidFill>
+              </a:rPr>
+              <a:t>ESEMPIO CONTROLLER:</a:t>
+            </a:r>
+          </a:p>
+          <a:p>
+            <a:r>
+              <a:rPr lang="it-IT" dirty="0">
+                <a:solidFill>
+                  <a:srgbClr val="FF0000"/>
+                </a:solidFill>
+              </a:rPr>
+              <a:t>Home Activity</a:t>
+            </a:r>
+          </a:p>
+          <a:p>
+            <a:r>
+              <a:rPr lang="it-IT" dirty="0"/>
+              <a:t>-Metodo </a:t>
+            </a:r>
+            <a:r>
+              <a:rPr lang="it-IT" dirty="0" err="1"/>
+              <a:t>OnCreate</a:t>
+            </a:r>
+            <a:r>
+              <a:rPr lang="it-IT" dirty="0"/>
+              <a:t> </a:t>
+            </a:r>
+          </a:p>
+          <a:p>
+            <a:r>
+              <a:rPr lang="it-IT" dirty="0"/>
+              <a:t>-</a:t>
+            </a:r>
+            <a:r>
+              <a:rPr lang="it-IT" dirty="0" err="1"/>
+              <a:t>findVieById</a:t>
+            </a:r>
+            <a:r>
+              <a:rPr lang="it-IT" dirty="0"/>
+              <a:t> per richiamare componenti grafiche</a:t>
+            </a:r>
+          </a:p>
+          <a:p>
+            <a:r>
+              <a:rPr lang="it-IT" dirty="0"/>
+              <a:t>-metodi per interazione con UI e DB</a:t>
+            </a:r>
+          </a:p>
+          <a:p>
+            <a:r>
+              <a:rPr lang="it-IT" dirty="0"/>
+              <a:t> </a:t>
+            </a:r>
+          </a:p>
+        </p:txBody>
+      </p:sp>
+      <p:pic>
+        <p:nvPicPr>
+          <p:cNvPr id="6" name="Immagine 5" descr="Immagine che contiene testo, schermata, software, Software multimediale&#10;&#10;Il contenuto generato dall'IA potrebbe non essere corretto.">
+            <a:extLst>
+              <a:ext uri="{FF2B5EF4-FFF2-40B4-BE49-F238E27FC236}">
+                <a16:creationId xmlns:a16="http://schemas.microsoft.com/office/drawing/2014/main" id="{F271EAF2-18B8-BF2C-11DF-5D318022A674}"/>
+              </a:ext>
+            </a:extLst>
+          </p:cNvPr>
+          <p:cNvPicPr>
+            <a:picLocks noChangeAspect="1"/>
+          </p:cNvPicPr>
+          <p:nvPr/>
+        </p:nvPicPr>
+        <p:blipFill>
+          <a:blip r:embed="rId2"/>
+          <a:stretch>
+            <a:fillRect/>
+          </a:stretch>
+        </p:blipFill>
+        <p:spPr>
+          <a:xfrm>
+            <a:off x="4784272" y="117114"/>
+            <a:ext cx="3967842" cy="1586695"/>
+          </a:xfrm>
+          <a:prstGeom prst="rect">
+            <a:avLst/>
+          </a:prstGeom>
+        </p:spPr>
+      </p:pic>
+      <p:pic>
+        <p:nvPicPr>
+          <p:cNvPr id="8" name="Immagine 7" descr="Immagine che contiene testo, schermata, Carattere&#10;&#10;Il contenuto generato dall'IA potrebbe non essere corretto.">
+            <a:extLst>
+              <a:ext uri="{FF2B5EF4-FFF2-40B4-BE49-F238E27FC236}">
+                <a16:creationId xmlns:a16="http://schemas.microsoft.com/office/drawing/2014/main" id="{CEC9632A-A0E9-7946-735F-74E5B586F89F}"/>
+              </a:ext>
+            </a:extLst>
+          </p:cNvPr>
+          <p:cNvPicPr>
+            <a:picLocks noChangeAspect="1"/>
+          </p:cNvPicPr>
+          <p:nvPr/>
+        </p:nvPicPr>
+        <p:blipFill>
+          <a:blip r:embed="rId3"/>
+          <a:stretch>
+            <a:fillRect/>
+          </a:stretch>
+        </p:blipFill>
+        <p:spPr>
+          <a:xfrm>
+            <a:off x="4784272" y="2006871"/>
+            <a:ext cx="4045200" cy="948301"/>
+          </a:xfrm>
+          <a:prstGeom prst="rect">
+            <a:avLst/>
+          </a:prstGeom>
+        </p:spPr>
+      </p:pic>
+      <p:pic>
+        <p:nvPicPr>
+          <p:cNvPr id="12" name="Immagine 11" descr="Immagine che contiene testo, schermata, Carattere&#10;&#10;Il contenuto generato dall'IA potrebbe non essere corretto.">
+            <a:extLst>
+              <a:ext uri="{FF2B5EF4-FFF2-40B4-BE49-F238E27FC236}">
+                <a16:creationId xmlns:a16="http://schemas.microsoft.com/office/drawing/2014/main" id="{C7185983-AA32-7CE6-27BD-140881EDDFA0}"/>
+              </a:ext>
+            </a:extLst>
+          </p:cNvPr>
+          <p:cNvPicPr>
+            <a:picLocks noChangeAspect="1"/>
+          </p:cNvPicPr>
+          <p:nvPr/>
+        </p:nvPicPr>
+        <p:blipFill>
+          <a:blip r:embed="rId4"/>
+          <a:stretch>
+            <a:fillRect/>
+          </a:stretch>
+        </p:blipFill>
+        <p:spPr>
+          <a:xfrm>
+            <a:off x="4784272" y="3218360"/>
+            <a:ext cx="4054894" cy="1808026"/>
+          </a:xfrm>
+          <a:prstGeom prst="rect">
+            <a:avLst/>
+          </a:prstGeom>
+        </p:spPr>
+      </p:pic>
+    </p:spTree>
+    <p:extLst>
+      <p:ext uri="{BB962C8B-B14F-4D97-AF65-F5344CB8AC3E}">
+        <p14:creationId xmlns:p14="http://schemas.microsoft.com/office/powerpoint/2010/main" val="1243735108"/>
+      </p:ext>
+    </p:extLst>
+  </p:cSld>
+  <p:clrMapOvr>
+    <a:masterClrMapping/>
+  </p:clrMapOvr>
+  <p:timing>
+    <p:tnLst>
+      <p:par>
+        <p:cTn id="1" dur="indefinite" restart="never" nodeType="tmRoot">
+          <p:childTnLst>
+            <p:seq concurrent="1" nextAc="seek">
+              <p:cTn id="2" dur="indefinite" nodeType="mainSeq">
+                <p:childTnLst>
+                  <p:par>
+                    <p:cTn id="3" fill="hold">
+                      <p:stCondLst>
+                        <p:cond delay="indefinite"/>
+                      </p:stCondLst>
+                      <p:childTnLst>
+                        <p:par>
+                          <p:cTn id="4" fill="hold">
+                            <p:stCondLst>
+                              <p:cond delay="0"/>
+                            </p:stCondLst>
+                            <p:childTnLst>
+                              <p:par>
+                                <p:cTn id="5" presetID="2" presetClass="entr" presetSubtype="4" fill="hold" nodeType="clickEffect">
+                                  <p:stCondLst>
+                                    <p:cond delay="0"/>
+                                  </p:stCondLst>
+                                  <p:childTnLst>
+                                    <p:set>
+                                      <p:cBhvr>
+                                        <p:cTn id="6" dur="1" fill="hold">
+                                          <p:stCondLst>
+                                            <p:cond delay="0"/>
+                                          </p:stCondLst>
+                                        </p:cTn>
+                                        <p:tgtEl>
+                                          <p:spTgt spid="6"/>
+                                        </p:tgtEl>
+                                        <p:attrNameLst>
+                                          <p:attrName>style.visibility</p:attrName>
+                                        </p:attrNameLst>
+                                      </p:cBhvr>
+                                      <p:to>
+                                        <p:strVal val="visible"/>
+                                      </p:to>
+                                    </p:set>
+                                    <p:anim calcmode="lin" valueType="num">
+                                      <p:cBhvr additive="base">
+                                        <p:cTn id="7" dur="500" fill="hold"/>
+                                        <p:tgtEl>
+                                          <p:spTgt spid="6"/>
+                                        </p:tgtEl>
+                                        <p:attrNameLst>
+                                          <p:attrName>ppt_x</p:attrName>
+                                        </p:attrNameLst>
+                                      </p:cBhvr>
+                                      <p:tavLst>
+                                        <p:tav tm="0">
+                                          <p:val>
+                                            <p:strVal val="#ppt_x"/>
+                                          </p:val>
+                                        </p:tav>
+                                        <p:tav tm="100000">
+                                          <p:val>
+                                            <p:strVal val="#ppt_x"/>
+                                          </p:val>
+                                        </p:tav>
+                                      </p:tavLst>
+                                    </p:anim>
+                                    <p:anim calcmode="lin" valueType="num">
+                                      <p:cBhvr additive="base">
+                                        <p:cTn id="8" dur="500" fill="hold"/>
+                                        <p:tgtEl>
+                                          <p:spTgt spid="6"/>
+                                        </p:tgtEl>
+                                        <p:attrNameLst>
+                                          <p:attrName>ppt_y</p:attrName>
+                                        </p:attrNameLst>
+                                      </p:cBhvr>
+                                      <p:tavLst>
+                                        <p:tav tm="0">
+                                          <p:val>
+                                            <p:strVal val="1+#ppt_h/2"/>
+                                          </p:val>
+                                        </p:tav>
+                                        <p:tav tm="100000">
+                                          <p:val>
+                                            <p:strVal val="#ppt_y"/>
+                                          </p:val>
+                                        </p:tav>
+                                      </p:tavLst>
+                                    </p:anim>
+                                  </p:childTnLst>
+                                </p:cTn>
+                              </p:par>
+                            </p:childTnLst>
+                          </p:cTn>
+                        </p:par>
+                      </p:childTnLst>
+                    </p:cTn>
+                  </p:par>
+                  <p:par>
+                    <p:cTn id="9" fill="hold">
+                      <p:stCondLst>
+                        <p:cond delay="indefinite"/>
+                      </p:stCondLst>
+                      <p:childTnLst>
+                        <p:par>
+                          <p:cTn id="10" fill="hold">
+                            <p:stCondLst>
+                              <p:cond delay="0"/>
+                            </p:stCondLst>
+                            <p:childTnLst>
+                              <p:par>
+                                <p:cTn id="11" presetID="2" presetClass="entr" presetSubtype="4" fill="hold" nodeType="clickEffect">
+                                  <p:stCondLst>
+                                    <p:cond delay="0"/>
+                                  </p:stCondLst>
+                                  <p:childTnLst>
+                                    <p:set>
+                                      <p:cBhvr>
+                                        <p:cTn id="12" dur="1" fill="hold">
+                                          <p:stCondLst>
+                                            <p:cond delay="0"/>
+                                          </p:stCondLst>
+                                        </p:cTn>
+                                        <p:tgtEl>
+                                          <p:spTgt spid="8"/>
+                                        </p:tgtEl>
+                                        <p:attrNameLst>
+                                          <p:attrName>style.visibility</p:attrName>
+                                        </p:attrNameLst>
+                                      </p:cBhvr>
+                                      <p:to>
+                                        <p:strVal val="visible"/>
+                                      </p:to>
+                                    </p:set>
+                                    <p:anim calcmode="lin" valueType="num">
+                                      <p:cBhvr additive="base">
+                                        <p:cTn id="13" dur="500" fill="hold"/>
+                                        <p:tgtEl>
+                                          <p:spTgt spid="8"/>
+                                        </p:tgtEl>
+                                        <p:attrNameLst>
+                                          <p:attrName>ppt_x</p:attrName>
+                                        </p:attrNameLst>
+                                      </p:cBhvr>
+                                      <p:tavLst>
+                                        <p:tav tm="0">
+                                          <p:val>
+                                            <p:strVal val="#ppt_x"/>
+                                          </p:val>
+                                        </p:tav>
+                                        <p:tav tm="100000">
+                                          <p:val>
+                                            <p:strVal val="#ppt_x"/>
+                                          </p:val>
+                                        </p:tav>
+                                      </p:tavLst>
+                                    </p:anim>
+                                    <p:anim calcmode="lin" valueType="num">
+                                      <p:cBhvr additive="base">
+                                        <p:cTn id="14" dur="500" fill="hold"/>
+                                        <p:tgtEl>
+                                          <p:spTgt spid="8"/>
+                                        </p:tgtEl>
+                                        <p:attrNameLst>
+                                          <p:attrName>ppt_y</p:attrName>
+                                        </p:attrNameLst>
+                                      </p:cBhvr>
+                                      <p:tavLst>
+                                        <p:tav tm="0">
+                                          <p:val>
+                                            <p:strVal val="1+#ppt_h/2"/>
+                                          </p:val>
+                                        </p:tav>
+                                        <p:tav tm="100000">
+                                          <p:val>
+                                            <p:strVal val="#ppt_y"/>
+                                          </p:val>
+                                        </p:tav>
+                                      </p:tavLst>
+                                    </p:anim>
+                                  </p:childTnLst>
+                                </p:cTn>
+                              </p:par>
+                            </p:childTnLst>
+                          </p:cTn>
+                        </p:par>
+                      </p:childTnLst>
+                    </p:cTn>
+                  </p:par>
+                  <p:par>
+                    <p:cTn id="15" fill="hold">
+                      <p:stCondLst>
+                        <p:cond delay="indefinite"/>
+                      </p:stCondLst>
+                      <p:childTnLst>
+                        <p:par>
+                          <p:cTn id="16" fill="hold">
+                            <p:stCondLst>
+                              <p:cond delay="0"/>
+                            </p:stCondLst>
+                            <p:childTnLst>
+                              <p:par>
+                                <p:cTn id="17" presetID="2" presetClass="entr" presetSubtype="4" fill="hold" nodeType="clickEffect">
+                                  <p:stCondLst>
+                                    <p:cond delay="0"/>
+                                  </p:stCondLst>
+                                  <p:childTnLst>
+                                    <p:set>
+                                      <p:cBhvr>
+                                        <p:cTn id="18" dur="1" fill="hold">
+                                          <p:stCondLst>
+                                            <p:cond delay="0"/>
+                                          </p:stCondLst>
+                                        </p:cTn>
+                                        <p:tgtEl>
+                                          <p:spTgt spid="12"/>
+                                        </p:tgtEl>
+                                        <p:attrNameLst>
+                                          <p:attrName>style.visibility</p:attrName>
+                                        </p:attrNameLst>
+                                      </p:cBhvr>
+                                      <p:to>
+                                        <p:strVal val="visible"/>
+                                      </p:to>
+                                    </p:set>
+                                    <p:anim calcmode="lin" valueType="num">
+                                      <p:cBhvr additive="base">
+                                        <p:cTn id="19" dur="500" fill="hold"/>
+                                        <p:tgtEl>
+                                          <p:spTgt spid="12"/>
+                                        </p:tgtEl>
+                                        <p:attrNameLst>
+                                          <p:attrName>ppt_x</p:attrName>
+                                        </p:attrNameLst>
+                                      </p:cBhvr>
+                                      <p:tavLst>
+                                        <p:tav tm="0">
+                                          <p:val>
+                                            <p:strVal val="#ppt_x"/>
+                                          </p:val>
+                                        </p:tav>
+                                        <p:tav tm="100000">
+                                          <p:val>
+                                            <p:strVal val="#ppt_x"/>
+                                          </p:val>
+                                        </p:tav>
+                                      </p:tavLst>
+                                    </p:anim>
+                                    <p:anim calcmode="lin" valueType="num">
+                                      <p:cBhvr additive="base">
+                                        <p:cTn id="20" dur="500" fill="hold"/>
+                                        <p:tgtEl>
+                                          <p:spTgt spid="12"/>
+                                        </p:tgtEl>
+                                        <p:attrNameLst>
+                                          <p:attrName>ppt_y</p:attrName>
+                                        </p:attrNameLst>
+                                      </p:cBhvr>
+                                      <p:tavLst>
+                                        <p:tav tm="0">
+                                          <p:val>
+                                            <p:strVal val="1+#ppt_h/2"/>
+                                          </p:val>
+                                        </p:tav>
+                                        <p:tav tm="100000">
+                                          <p:val>
+                                            <p:strVal val="#ppt_y"/>
+                                          </p:val>
+                                        </p:tav>
+                                      </p:tavLst>
+                                    </p:anim>
+                                  </p:childTnLst>
+                                </p:cTn>
+                              </p:par>
+                            </p:childTnLst>
+                          </p:cTn>
+                        </p:par>
+                      </p:childTnLst>
+                    </p:cTn>
+                  </p:par>
+                </p:childTnLst>
+              </p:cTn>
+              <p:prevCondLst>
+                <p:cond evt="onPrev" delay="0">
+                  <p:tgtEl>
+                    <p:sldTgt/>
+                  </p:tgtEl>
+                </p:cond>
+              </p:prevCondLst>
+              <p:nextCondLst>
+                <p:cond evt="onNext" delay="0">
+                  <p:tgtEl>
+                    <p:sldTgt/>
+                  </p:tgtEl>
+                </p:cond>
+              </p:nextCondLst>
+            </p:seq>
+          </p:childTnLst>
+        </p:cTn>
+      </p:par>
+    </p:tnLst>
+  </p:timing>
+</p:sld>
+</file>
+
 <file path=ppt/slides/slide3.xml><?xml version="1.0" encoding="utf-8"?>
 <p:sld xmlns:a="http://schemas.openxmlformats.org/drawingml/2006/main" xmlns:r="http://schemas.openxmlformats.org/officeDocument/2006/relationships" xmlns:p="http://schemas.openxmlformats.org/presentationml/2006/main">
   <p:cSld>

--- a/Documenti/Relazione Finale/PP relazione.pptx
+++ b/Documenti/Relazione Finale/PP relazione.pptx
@@ -5,7 +5,7 @@
     <p:sldMasterId id="2147483659" r:id="rId1"/>
   </p:sldMasterIdLst>
   <p:notesMasterIdLst>
-    <p:notesMasterId r:id="rId28"/>
+    <p:notesMasterId r:id="rId30"/>
   </p:notesMasterIdLst>
   <p:sldIdLst>
     <p:sldId id="256" r:id="rId2"/>
@@ -14,42 +14,44 @@
     <p:sldId id="264" r:id="rId5"/>
     <p:sldId id="259" r:id="rId6"/>
     <p:sldId id="266" r:id="rId7"/>
-    <p:sldId id="268" r:id="rId8"/>
-    <p:sldId id="262" r:id="rId9"/>
-    <p:sldId id="265" r:id="rId10"/>
-    <p:sldId id="279" r:id="rId11"/>
-    <p:sldId id="280" r:id="rId12"/>
+    <p:sldId id="280" r:id="rId8"/>
+    <p:sldId id="268" r:id="rId9"/>
+    <p:sldId id="262" r:id="rId10"/>
+    <p:sldId id="265" r:id="rId11"/>
+    <p:sldId id="279" r:id="rId12"/>
     <p:sldId id="260" r:id="rId13"/>
     <p:sldId id="267" r:id="rId14"/>
-    <p:sldId id="269" r:id="rId15"/>
-    <p:sldId id="270" r:id="rId16"/>
-    <p:sldId id="271" r:id="rId17"/>
-    <p:sldId id="272" r:id="rId18"/>
-    <p:sldId id="273" r:id="rId19"/>
-    <p:sldId id="274" r:id="rId20"/>
-    <p:sldId id="275" r:id="rId21"/>
-    <p:sldId id="277" r:id="rId22"/>
-    <p:sldId id="278" r:id="rId23"/>
-    <p:sldId id="276" r:id="rId24"/>
-    <p:sldId id="281" r:id="rId25"/>
-    <p:sldId id="282" r:id="rId26"/>
-    <p:sldId id="283" r:id="rId27"/>
+    <p:sldId id="285" r:id="rId15"/>
+    <p:sldId id="269" r:id="rId16"/>
+    <p:sldId id="284" r:id="rId17"/>
+    <p:sldId id="270" r:id="rId18"/>
+    <p:sldId id="271" r:id="rId19"/>
+    <p:sldId id="272" r:id="rId20"/>
+    <p:sldId id="273" r:id="rId21"/>
+    <p:sldId id="274" r:id="rId22"/>
+    <p:sldId id="275" r:id="rId23"/>
+    <p:sldId id="277" r:id="rId24"/>
+    <p:sldId id="278" r:id="rId25"/>
+    <p:sldId id="276" r:id="rId26"/>
+    <p:sldId id="281" r:id="rId27"/>
+    <p:sldId id="282" r:id="rId28"/>
+    <p:sldId id="283" r:id="rId29"/>
   </p:sldIdLst>
   <p:sldSz cx="9144000" cy="5143500" type="screen16x9"/>
   <p:notesSz cx="6858000" cy="9144000"/>
   <p:embeddedFontLst>
     <p:embeddedFont>
       <p:font typeface="Amasis MT Pro" panose="02040504050005020304" pitchFamily="18" charset="0"/>
-      <p:regular r:id="rId29"/>
-      <p:bold r:id="rId30"/>
-      <p:italic r:id="rId31"/>
-      <p:boldItalic r:id="rId32"/>
+      <p:regular r:id="rId31"/>
+      <p:bold r:id="rId32"/>
+      <p:italic r:id="rId33"/>
+      <p:boldItalic r:id="rId34"/>
     </p:embeddedFont>
     <p:embeddedFont>
       <p:font typeface="Old Standard TT" panose="020B0604020202020204" charset="0"/>
-      <p:regular r:id="rId33"/>
-      <p:bold r:id="rId34"/>
-      <p:italic r:id="rId35"/>
+      <p:regular r:id="rId35"/>
+      <p:bold r:id="rId36"/>
+      <p:italic r:id="rId37"/>
     </p:embeddedFont>
   </p:embeddedFontLst>
   <p:defaultTextStyle>
@@ -7072,6 +7074,1349 @@
           <p:cNvPr id="2" name="Titolo 1">
             <a:extLst>
               <a:ext uri="{FF2B5EF4-FFF2-40B4-BE49-F238E27FC236}">
+                <a16:creationId xmlns:a16="http://schemas.microsoft.com/office/drawing/2014/main" id="{CDA77C0F-428A-8B4D-B18A-BC19217C36C7}"/>
+              </a:ext>
+            </a:extLst>
+          </p:cNvPr>
+          <p:cNvSpPr>
+            <a:spLocks noGrp="1"/>
+          </p:cNvSpPr>
+          <p:nvPr>
+            <p:ph type="title"/>
+          </p:nvPr>
+        </p:nvSpPr>
+        <p:spPr/>
+        <p:txBody>
+          <a:bodyPr/>
+          <a:lstStyle/>
+          <a:p>
+            <a:pPr algn="ctr"/>
+            <a:r>
+              <a:rPr lang="it-IT" dirty="0"/>
+              <a:t>WIREFRAME DELL’APP</a:t>
+            </a:r>
+          </a:p>
+        </p:txBody>
+      </p:sp>
+      <p:pic>
+        <p:nvPicPr>
+          <p:cNvPr id="4" name="Immagine 3" descr="Immagine che contiene testo, schermata, cerchio, logo&#10;&#10;Il contenuto generato dall'IA potrebbe non essere corretto.">
+            <a:extLst>
+              <a:ext uri="{FF2B5EF4-FFF2-40B4-BE49-F238E27FC236}">
+                <a16:creationId xmlns:a16="http://schemas.microsoft.com/office/drawing/2014/main" id="{217FE4B0-D712-635C-F1D1-D43A9F7986FC}"/>
+              </a:ext>
+            </a:extLst>
+          </p:cNvPr>
+          <p:cNvPicPr>
+            <a:picLocks noChangeAspect="1"/>
+          </p:cNvPicPr>
+          <p:nvPr/>
+        </p:nvPicPr>
+        <p:blipFill>
+          <a:blip r:embed="rId2"/>
+          <a:stretch>
+            <a:fillRect/>
+          </a:stretch>
+        </p:blipFill>
+        <p:spPr>
+          <a:xfrm>
+            <a:off x="533468" y="1019785"/>
+            <a:ext cx="830804" cy="1849143"/>
+          </a:xfrm>
+          <a:prstGeom prst="rect">
+            <a:avLst/>
+          </a:prstGeom>
+        </p:spPr>
+      </p:pic>
+      <p:pic>
+        <p:nvPicPr>
+          <p:cNvPr id="26" name="Immagine 25" descr="Immagine che contiene testo, schermata, Carattere, design&#10;&#10;Il contenuto generato dall'IA potrebbe non essere corretto.">
+            <a:extLst>
+              <a:ext uri="{FF2B5EF4-FFF2-40B4-BE49-F238E27FC236}">
+                <a16:creationId xmlns:a16="http://schemas.microsoft.com/office/drawing/2014/main" id="{EB8A02DE-DEB9-3CE5-085A-AEC786AC52A0}"/>
+              </a:ext>
+            </a:extLst>
+          </p:cNvPr>
+          <p:cNvPicPr>
+            <a:picLocks noChangeAspect="1"/>
+          </p:cNvPicPr>
+          <p:nvPr/>
+        </p:nvPicPr>
+        <p:blipFill>
+          <a:blip r:embed="rId3"/>
+          <a:stretch>
+            <a:fillRect/>
+          </a:stretch>
+        </p:blipFill>
+        <p:spPr>
+          <a:xfrm flipH="1">
+            <a:off x="2653483" y="3044883"/>
+            <a:ext cx="830802" cy="1849140"/>
+          </a:xfrm>
+          <a:prstGeom prst="rect">
+            <a:avLst/>
+          </a:prstGeom>
+        </p:spPr>
+      </p:pic>
+      <p:pic>
+        <p:nvPicPr>
+          <p:cNvPr id="28" name="Immagine 27" descr="Immagine che contiene testo, schermata, Carattere, design&#10;&#10;Il contenuto generato dall'IA potrebbe non essere corretto.">
+            <a:extLst>
+              <a:ext uri="{FF2B5EF4-FFF2-40B4-BE49-F238E27FC236}">
+                <a16:creationId xmlns:a16="http://schemas.microsoft.com/office/drawing/2014/main" id="{5A62DBC2-49C9-4D2B-5B8A-40074EE76EC3}"/>
+              </a:ext>
+            </a:extLst>
+          </p:cNvPr>
+          <p:cNvPicPr>
+            <a:picLocks noChangeAspect="1"/>
+          </p:cNvPicPr>
+          <p:nvPr/>
+        </p:nvPicPr>
+        <p:blipFill>
+          <a:blip r:embed="rId4"/>
+          <a:stretch>
+            <a:fillRect/>
+          </a:stretch>
+        </p:blipFill>
+        <p:spPr>
+          <a:xfrm>
+            <a:off x="5667200" y="1067394"/>
+            <a:ext cx="864552" cy="1924258"/>
+          </a:xfrm>
+          <a:prstGeom prst="rect">
+            <a:avLst/>
+          </a:prstGeom>
+        </p:spPr>
+      </p:pic>
+      <p:pic>
+        <p:nvPicPr>
+          <p:cNvPr id="30" name="Immagine 29" descr="Immagine che contiene testo, schermata, biglietto da visita, design&#10;&#10;Il contenuto generato dall'IA potrebbe non essere corretto.">
+            <a:extLst>
+              <a:ext uri="{FF2B5EF4-FFF2-40B4-BE49-F238E27FC236}">
+                <a16:creationId xmlns:a16="http://schemas.microsoft.com/office/drawing/2014/main" id="{030715D4-13A2-9A99-BC46-49964438FCE4}"/>
+              </a:ext>
+            </a:extLst>
+          </p:cNvPr>
+          <p:cNvPicPr>
+            <a:picLocks noChangeAspect="1"/>
+          </p:cNvPicPr>
+          <p:nvPr/>
+        </p:nvPicPr>
+        <p:blipFill>
+          <a:blip r:embed="rId5"/>
+          <a:stretch>
+            <a:fillRect/>
+          </a:stretch>
+        </p:blipFill>
+        <p:spPr>
+          <a:xfrm>
+            <a:off x="6774478" y="1057344"/>
+            <a:ext cx="864552" cy="1924259"/>
+          </a:xfrm>
+          <a:prstGeom prst="rect">
+            <a:avLst/>
+          </a:prstGeom>
+        </p:spPr>
+      </p:pic>
+      <p:pic>
+        <p:nvPicPr>
+          <p:cNvPr id="32" name="Immagine 31" descr="Immagine che contiene testo, schermata, Carattere, design&#10;&#10;Il contenuto generato dall'IA potrebbe non essere corretto.">
+            <a:extLst>
+              <a:ext uri="{FF2B5EF4-FFF2-40B4-BE49-F238E27FC236}">
+                <a16:creationId xmlns:a16="http://schemas.microsoft.com/office/drawing/2014/main" id="{B7D876EF-870A-461F-D6E3-AF266C3C95B9}"/>
+              </a:ext>
+            </a:extLst>
+          </p:cNvPr>
+          <p:cNvPicPr>
+            <a:picLocks noChangeAspect="1"/>
+          </p:cNvPicPr>
+          <p:nvPr/>
+        </p:nvPicPr>
+        <p:blipFill>
+          <a:blip r:embed="rId6"/>
+          <a:stretch>
+            <a:fillRect/>
+          </a:stretch>
+        </p:blipFill>
+        <p:spPr>
+          <a:xfrm>
+            <a:off x="4869823" y="3073459"/>
+            <a:ext cx="864553" cy="1924259"/>
+          </a:xfrm>
+          <a:prstGeom prst="rect">
+            <a:avLst/>
+          </a:prstGeom>
+        </p:spPr>
+      </p:pic>
+      <p:pic>
+        <p:nvPicPr>
+          <p:cNvPr id="34" name="Immagine 33" descr="Immagine che contiene testo, schermata, logo, design&#10;&#10;Il contenuto generato dall'IA potrebbe non essere corretto.">
+            <a:extLst>
+              <a:ext uri="{FF2B5EF4-FFF2-40B4-BE49-F238E27FC236}">
+                <a16:creationId xmlns:a16="http://schemas.microsoft.com/office/drawing/2014/main" id="{C5AF193D-71B0-A3F6-0501-C0D09EAB8DF2}"/>
+              </a:ext>
+            </a:extLst>
+          </p:cNvPr>
+          <p:cNvPicPr>
+            <a:picLocks noChangeAspect="1"/>
+          </p:cNvPicPr>
+          <p:nvPr/>
+        </p:nvPicPr>
+        <p:blipFill>
+          <a:blip r:embed="rId7"/>
+          <a:stretch>
+            <a:fillRect/>
+          </a:stretch>
+        </p:blipFill>
+        <p:spPr>
+          <a:xfrm>
+            <a:off x="2550270" y="1058737"/>
+            <a:ext cx="838875" cy="1867109"/>
+          </a:xfrm>
+          <a:prstGeom prst="rect">
+            <a:avLst/>
+          </a:prstGeom>
+        </p:spPr>
+      </p:pic>
+      <p:pic>
+        <p:nvPicPr>
+          <p:cNvPr id="36" name="Immagine 35" descr="Immagine che contiene testo, schermata, numero, Carattere&#10;&#10;Il contenuto generato dall'IA potrebbe non essere corretto.">
+            <a:extLst>
+              <a:ext uri="{FF2B5EF4-FFF2-40B4-BE49-F238E27FC236}">
+                <a16:creationId xmlns:a16="http://schemas.microsoft.com/office/drawing/2014/main" id="{9F8718C3-4DCB-1ED3-E28B-E299F8ED67A2}"/>
+              </a:ext>
+            </a:extLst>
+          </p:cNvPr>
+          <p:cNvPicPr>
+            <a:picLocks noChangeAspect="1"/>
+          </p:cNvPicPr>
+          <p:nvPr/>
+        </p:nvPicPr>
+        <p:blipFill>
+          <a:blip r:embed="rId8"/>
+          <a:stretch>
+            <a:fillRect/>
+          </a:stretch>
+        </p:blipFill>
+        <p:spPr>
+          <a:xfrm>
+            <a:off x="3757616" y="3073459"/>
+            <a:ext cx="838876" cy="1867109"/>
+          </a:xfrm>
+          <a:prstGeom prst="rect">
+            <a:avLst/>
+          </a:prstGeom>
+        </p:spPr>
+      </p:pic>
+      <p:pic>
+        <p:nvPicPr>
+          <p:cNvPr id="38" name="Immagine 37" descr="Immagine che contiene testo, schermata, cerchio, Carattere&#10;&#10;Il contenuto generato dall'IA potrebbe non essere corretto.">
+            <a:extLst>
+              <a:ext uri="{FF2B5EF4-FFF2-40B4-BE49-F238E27FC236}">
+                <a16:creationId xmlns:a16="http://schemas.microsoft.com/office/drawing/2014/main" id="{81F0ABAE-28AE-C04C-9E3D-B61298F422DF}"/>
+              </a:ext>
+            </a:extLst>
+          </p:cNvPr>
+          <p:cNvPicPr>
+            <a:picLocks noChangeAspect="1"/>
+          </p:cNvPicPr>
+          <p:nvPr/>
+        </p:nvPicPr>
+        <p:blipFill>
+          <a:blip r:embed="rId9"/>
+          <a:stretch>
+            <a:fillRect/>
+          </a:stretch>
+        </p:blipFill>
+        <p:spPr>
+          <a:xfrm>
+            <a:off x="4633612" y="1048800"/>
+            <a:ext cx="838876" cy="1867109"/>
+          </a:xfrm>
+          <a:prstGeom prst="rect">
+            <a:avLst/>
+          </a:prstGeom>
+        </p:spPr>
+      </p:pic>
+      <p:pic>
+        <p:nvPicPr>
+          <p:cNvPr id="40" name="Immagine 39" descr="Immagine che contiene testo, schermata, grafica, logo&#10;&#10;Il contenuto generato dall'IA potrebbe non essere corretto.">
+            <a:extLst>
+              <a:ext uri="{FF2B5EF4-FFF2-40B4-BE49-F238E27FC236}">
+                <a16:creationId xmlns:a16="http://schemas.microsoft.com/office/drawing/2014/main" id="{5938B6A7-133E-B8E0-A180-2A475E9BADA9}"/>
+              </a:ext>
+            </a:extLst>
+          </p:cNvPr>
+          <p:cNvPicPr>
+            <a:picLocks noChangeAspect="1"/>
+          </p:cNvPicPr>
+          <p:nvPr/>
+        </p:nvPicPr>
+        <p:blipFill>
+          <a:blip r:embed="rId10"/>
+          <a:stretch>
+            <a:fillRect/>
+          </a:stretch>
+        </p:blipFill>
+        <p:spPr>
+          <a:xfrm>
+            <a:off x="7875587" y="1057344"/>
+            <a:ext cx="830803" cy="1849140"/>
+          </a:xfrm>
+          <a:prstGeom prst="rect">
+            <a:avLst/>
+          </a:prstGeom>
+        </p:spPr>
+      </p:pic>
+      <p:pic>
+        <p:nvPicPr>
+          <p:cNvPr id="42" name="Immagine 41" descr="Immagine che contiene testo, schermata, cerchio, Elementi grafici&#10;&#10;Il contenuto generato dall'IA potrebbe non essere corretto.">
+            <a:extLst>
+              <a:ext uri="{FF2B5EF4-FFF2-40B4-BE49-F238E27FC236}">
+                <a16:creationId xmlns:a16="http://schemas.microsoft.com/office/drawing/2014/main" id="{AC90764F-519C-F11F-4791-3F7545F71713}"/>
+              </a:ext>
+            </a:extLst>
+          </p:cNvPr>
+          <p:cNvPicPr>
+            <a:picLocks noChangeAspect="1"/>
+          </p:cNvPicPr>
+          <p:nvPr/>
+        </p:nvPicPr>
+        <p:blipFill>
+          <a:blip r:embed="rId11"/>
+          <a:stretch>
+            <a:fillRect/>
+          </a:stretch>
+        </p:blipFill>
+        <p:spPr>
+          <a:xfrm>
+            <a:off x="3528047" y="1039005"/>
+            <a:ext cx="890062" cy="1981036"/>
+          </a:xfrm>
+          <a:prstGeom prst="rect">
+            <a:avLst/>
+          </a:prstGeom>
+        </p:spPr>
+      </p:pic>
+      <p:pic>
+        <p:nvPicPr>
+          <p:cNvPr id="44" name="Immagine 43" descr="Immagine che contiene testo, schermata, Carattere, design&#10;&#10;Il contenuto generato dall'IA potrebbe non essere corretto.">
+            <a:extLst>
+              <a:ext uri="{FF2B5EF4-FFF2-40B4-BE49-F238E27FC236}">
+                <a16:creationId xmlns:a16="http://schemas.microsoft.com/office/drawing/2014/main" id="{D54A1AA3-F9D8-A2C5-A901-76D1109BB44B}"/>
+              </a:ext>
+            </a:extLst>
+          </p:cNvPr>
+          <p:cNvPicPr>
+            <a:picLocks noChangeAspect="1"/>
+          </p:cNvPicPr>
+          <p:nvPr/>
+        </p:nvPicPr>
+        <p:blipFill>
+          <a:blip r:embed="rId12"/>
+          <a:stretch>
+            <a:fillRect/>
+          </a:stretch>
+        </p:blipFill>
+        <p:spPr>
+          <a:xfrm>
+            <a:off x="6008393" y="3073460"/>
+            <a:ext cx="864552" cy="1924258"/>
+          </a:xfrm>
+          <a:prstGeom prst="rect">
+            <a:avLst/>
+          </a:prstGeom>
+        </p:spPr>
+      </p:pic>
+      <p:pic>
+        <p:nvPicPr>
+          <p:cNvPr id="46" name="Immagine 45" descr="Immagine che contiene testo, schermata, cerchio, design&#10;&#10;Il contenuto generato dall'IA potrebbe non essere corretto.">
+            <a:extLst>
+              <a:ext uri="{FF2B5EF4-FFF2-40B4-BE49-F238E27FC236}">
+                <a16:creationId xmlns:a16="http://schemas.microsoft.com/office/drawing/2014/main" id="{0BC4043E-2ACA-8C92-2EA6-1753C6C170A0}"/>
+              </a:ext>
+            </a:extLst>
+          </p:cNvPr>
+          <p:cNvPicPr>
+            <a:picLocks noChangeAspect="1"/>
+          </p:cNvPicPr>
+          <p:nvPr/>
+        </p:nvPicPr>
+        <p:blipFill>
+          <a:blip r:embed="rId13"/>
+          <a:stretch>
+            <a:fillRect/>
+          </a:stretch>
+        </p:blipFill>
+        <p:spPr>
+          <a:xfrm>
+            <a:off x="1524994" y="1035021"/>
+            <a:ext cx="864553" cy="1924261"/>
+          </a:xfrm>
+          <a:prstGeom prst="rect">
+            <a:avLst/>
+          </a:prstGeom>
+        </p:spPr>
+      </p:pic>
+    </p:spTree>
+    <p:extLst>
+      <p:ext uri="{BB962C8B-B14F-4D97-AF65-F5344CB8AC3E}">
+        <p14:creationId xmlns:p14="http://schemas.microsoft.com/office/powerpoint/2010/main" val="2210377371"/>
+      </p:ext>
+    </p:extLst>
+  </p:cSld>
+  <p:clrMapOvr>
+    <a:masterClrMapping/>
+  </p:clrMapOvr>
+  <p:timing>
+    <p:tnLst>
+      <p:par>
+        <p:cTn id="1" dur="indefinite" restart="never" nodeType="tmRoot">
+          <p:childTnLst>
+            <p:seq concurrent="1" nextAc="seek">
+              <p:cTn id="2" dur="indefinite" nodeType="mainSeq">
+                <p:childTnLst>
+                  <p:par>
+                    <p:cTn id="3" fill="hold">
+                      <p:stCondLst>
+                        <p:cond delay="indefinite"/>
+                      </p:stCondLst>
+                      <p:childTnLst>
+                        <p:par>
+                          <p:cTn id="4" fill="hold">
+                            <p:stCondLst>
+                              <p:cond delay="0"/>
+                            </p:stCondLst>
+                            <p:childTnLst>
+                              <p:par>
+                                <p:cTn id="5" presetID="2" presetClass="entr" presetSubtype="4" fill="hold" nodeType="clickEffect">
+                                  <p:stCondLst>
+                                    <p:cond delay="0"/>
+                                  </p:stCondLst>
+                                  <p:childTnLst>
+                                    <p:set>
+                                      <p:cBhvr>
+                                        <p:cTn id="6" dur="1" fill="hold">
+                                          <p:stCondLst>
+                                            <p:cond delay="0"/>
+                                          </p:stCondLst>
+                                        </p:cTn>
+                                        <p:tgtEl>
+                                          <p:spTgt spid="4"/>
+                                        </p:tgtEl>
+                                        <p:attrNameLst>
+                                          <p:attrName>style.visibility</p:attrName>
+                                        </p:attrNameLst>
+                                      </p:cBhvr>
+                                      <p:to>
+                                        <p:strVal val="visible"/>
+                                      </p:to>
+                                    </p:set>
+                                    <p:anim calcmode="lin" valueType="num">
+                                      <p:cBhvr additive="base">
+                                        <p:cTn id="7" dur="500" fill="hold"/>
+                                        <p:tgtEl>
+                                          <p:spTgt spid="4"/>
+                                        </p:tgtEl>
+                                        <p:attrNameLst>
+                                          <p:attrName>ppt_x</p:attrName>
+                                        </p:attrNameLst>
+                                      </p:cBhvr>
+                                      <p:tavLst>
+                                        <p:tav tm="0">
+                                          <p:val>
+                                            <p:strVal val="#ppt_x"/>
+                                          </p:val>
+                                        </p:tav>
+                                        <p:tav tm="100000">
+                                          <p:val>
+                                            <p:strVal val="#ppt_x"/>
+                                          </p:val>
+                                        </p:tav>
+                                      </p:tavLst>
+                                    </p:anim>
+                                    <p:anim calcmode="lin" valueType="num">
+                                      <p:cBhvr additive="base">
+                                        <p:cTn id="8" dur="500" fill="hold"/>
+                                        <p:tgtEl>
+                                          <p:spTgt spid="4"/>
+                                        </p:tgtEl>
+                                        <p:attrNameLst>
+                                          <p:attrName>ppt_y</p:attrName>
+                                        </p:attrNameLst>
+                                      </p:cBhvr>
+                                      <p:tavLst>
+                                        <p:tav tm="0">
+                                          <p:val>
+                                            <p:strVal val="1+#ppt_h/2"/>
+                                          </p:val>
+                                        </p:tav>
+                                        <p:tav tm="100000">
+                                          <p:val>
+                                            <p:strVal val="#ppt_y"/>
+                                          </p:val>
+                                        </p:tav>
+                                      </p:tavLst>
+                                    </p:anim>
+                                  </p:childTnLst>
+                                </p:cTn>
+                              </p:par>
+                              <p:par>
+                                <p:cTn id="9" presetID="2" presetClass="entr" presetSubtype="4" fill="hold" nodeType="withEffect">
+                                  <p:stCondLst>
+                                    <p:cond delay="0"/>
+                                  </p:stCondLst>
+                                  <p:childTnLst>
+                                    <p:set>
+                                      <p:cBhvr>
+                                        <p:cTn id="10" dur="1" fill="hold">
+                                          <p:stCondLst>
+                                            <p:cond delay="0"/>
+                                          </p:stCondLst>
+                                        </p:cTn>
+                                        <p:tgtEl>
+                                          <p:spTgt spid="46"/>
+                                        </p:tgtEl>
+                                        <p:attrNameLst>
+                                          <p:attrName>style.visibility</p:attrName>
+                                        </p:attrNameLst>
+                                      </p:cBhvr>
+                                      <p:to>
+                                        <p:strVal val="visible"/>
+                                      </p:to>
+                                    </p:set>
+                                    <p:anim calcmode="lin" valueType="num">
+                                      <p:cBhvr additive="base">
+                                        <p:cTn id="11" dur="500" fill="hold"/>
+                                        <p:tgtEl>
+                                          <p:spTgt spid="46"/>
+                                        </p:tgtEl>
+                                        <p:attrNameLst>
+                                          <p:attrName>ppt_x</p:attrName>
+                                        </p:attrNameLst>
+                                      </p:cBhvr>
+                                      <p:tavLst>
+                                        <p:tav tm="0">
+                                          <p:val>
+                                            <p:strVal val="#ppt_x"/>
+                                          </p:val>
+                                        </p:tav>
+                                        <p:tav tm="100000">
+                                          <p:val>
+                                            <p:strVal val="#ppt_x"/>
+                                          </p:val>
+                                        </p:tav>
+                                      </p:tavLst>
+                                    </p:anim>
+                                    <p:anim calcmode="lin" valueType="num">
+                                      <p:cBhvr additive="base">
+                                        <p:cTn id="12" dur="500" fill="hold"/>
+                                        <p:tgtEl>
+                                          <p:spTgt spid="46"/>
+                                        </p:tgtEl>
+                                        <p:attrNameLst>
+                                          <p:attrName>ppt_y</p:attrName>
+                                        </p:attrNameLst>
+                                      </p:cBhvr>
+                                      <p:tavLst>
+                                        <p:tav tm="0">
+                                          <p:val>
+                                            <p:strVal val="1+#ppt_h/2"/>
+                                          </p:val>
+                                        </p:tav>
+                                        <p:tav tm="100000">
+                                          <p:val>
+                                            <p:strVal val="#ppt_y"/>
+                                          </p:val>
+                                        </p:tav>
+                                      </p:tavLst>
+                                    </p:anim>
+                                  </p:childTnLst>
+                                </p:cTn>
+                              </p:par>
+                              <p:par>
+                                <p:cTn id="13" presetID="2" presetClass="entr" presetSubtype="4" fill="hold" nodeType="withEffect">
+                                  <p:stCondLst>
+                                    <p:cond delay="0"/>
+                                  </p:stCondLst>
+                                  <p:childTnLst>
+                                    <p:set>
+                                      <p:cBhvr>
+                                        <p:cTn id="14" dur="1" fill="hold">
+                                          <p:stCondLst>
+                                            <p:cond delay="0"/>
+                                          </p:stCondLst>
+                                        </p:cTn>
+                                        <p:tgtEl>
+                                          <p:spTgt spid="34"/>
+                                        </p:tgtEl>
+                                        <p:attrNameLst>
+                                          <p:attrName>style.visibility</p:attrName>
+                                        </p:attrNameLst>
+                                      </p:cBhvr>
+                                      <p:to>
+                                        <p:strVal val="visible"/>
+                                      </p:to>
+                                    </p:set>
+                                    <p:anim calcmode="lin" valueType="num">
+                                      <p:cBhvr additive="base">
+                                        <p:cTn id="15" dur="500" fill="hold"/>
+                                        <p:tgtEl>
+                                          <p:spTgt spid="34"/>
+                                        </p:tgtEl>
+                                        <p:attrNameLst>
+                                          <p:attrName>ppt_x</p:attrName>
+                                        </p:attrNameLst>
+                                      </p:cBhvr>
+                                      <p:tavLst>
+                                        <p:tav tm="0">
+                                          <p:val>
+                                            <p:strVal val="#ppt_x"/>
+                                          </p:val>
+                                        </p:tav>
+                                        <p:tav tm="100000">
+                                          <p:val>
+                                            <p:strVal val="#ppt_x"/>
+                                          </p:val>
+                                        </p:tav>
+                                      </p:tavLst>
+                                    </p:anim>
+                                    <p:anim calcmode="lin" valueType="num">
+                                      <p:cBhvr additive="base">
+                                        <p:cTn id="16" dur="500" fill="hold"/>
+                                        <p:tgtEl>
+                                          <p:spTgt spid="34"/>
+                                        </p:tgtEl>
+                                        <p:attrNameLst>
+                                          <p:attrName>ppt_y</p:attrName>
+                                        </p:attrNameLst>
+                                      </p:cBhvr>
+                                      <p:tavLst>
+                                        <p:tav tm="0">
+                                          <p:val>
+                                            <p:strVal val="1+#ppt_h/2"/>
+                                          </p:val>
+                                        </p:tav>
+                                        <p:tav tm="100000">
+                                          <p:val>
+                                            <p:strVal val="#ppt_y"/>
+                                          </p:val>
+                                        </p:tav>
+                                      </p:tavLst>
+                                    </p:anim>
+                                  </p:childTnLst>
+                                </p:cTn>
+                              </p:par>
+                              <p:par>
+                                <p:cTn id="17" presetID="2" presetClass="entr" presetSubtype="4" fill="hold" nodeType="withEffect">
+                                  <p:stCondLst>
+                                    <p:cond delay="0"/>
+                                  </p:stCondLst>
+                                  <p:childTnLst>
+                                    <p:set>
+                                      <p:cBhvr>
+                                        <p:cTn id="18" dur="1" fill="hold">
+                                          <p:stCondLst>
+                                            <p:cond delay="0"/>
+                                          </p:stCondLst>
+                                        </p:cTn>
+                                        <p:tgtEl>
+                                          <p:spTgt spid="42"/>
+                                        </p:tgtEl>
+                                        <p:attrNameLst>
+                                          <p:attrName>style.visibility</p:attrName>
+                                        </p:attrNameLst>
+                                      </p:cBhvr>
+                                      <p:to>
+                                        <p:strVal val="visible"/>
+                                      </p:to>
+                                    </p:set>
+                                    <p:anim calcmode="lin" valueType="num">
+                                      <p:cBhvr additive="base">
+                                        <p:cTn id="19" dur="500" fill="hold"/>
+                                        <p:tgtEl>
+                                          <p:spTgt spid="42"/>
+                                        </p:tgtEl>
+                                        <p:attrNameLst>
+                                          <p:attrName>ppt_x</p:attrName>
+                                        </p:attrNameLst>
+                                      </p:cBhvr>
+                                      <p:tavLst>
+                                        <p:tav tm="0">
+                                          <p:val>
+                                            <p:strVal val="#ppt_x"/>
+                                          </p:val>
+                                        </p:tav>
+                                        <p:tav tm="100000">
+                                          <p:val>
+                                            <p:strVal val="#ppt_x"/>
+                                          </p:val>
+                                        </p:tav>
+                                      </p:tavLst>
+                                    </p:anim>
+                                    <p:anim calcmode="lin" valueType="num">
+                                      <p:cBhvr additive="base">
+                                        <p:cTn id="20" dur="500" fill="hold"/>
+                                        <p:tgtEl>
+                                          <p:spTgt spid="42"/>
+                                        </p:tgtEl>
+                                        <p:attrNameLst>
+                                          <p:attrName>ppt_y</p:attrName>
+                                        </p:attrNameLst>
+                                      </p:cBhvr>
+                                      <p:tavLst>
+                                        <p:tav tm="0">
+                                          <p:val>
+                                            <p:strVal val="1+#ppt_h/2"/>
+                                          </p:val>
+                                        </p:tav>
+                                        <p:tav tm="100000">
+                                          <p:val>
+                                            <p:strVal val="#ppt_y"/>
+                                          </p:val>
+                                        </p:tav>
+                                      </p:tavLst>
+                                    </p:anim>
+                                  </p:childTnLst>
+                                </p:cTn>
+                              </p:par>
+                              <p:par>
+                                <p:cTn id="21" presetID="2" presetClass="entr" presetSubtype="4" fill="hold" nodeType="withEffect">
+                                  <p:stCondLst>
+                                    <p:cond delay="0"/>
+                                  </p:stCondLst>
+                                  <p:childTnLst>
+                                    <p:set>
+                                      <p:cBhvr>
+                                        <p:cTn id="22" dur="1" fill="hold">
+                                          <p:stCondLst>
+                                            <p:cond delay="0"/>
+                                          </p:stCondLst>
+                                        </p:cTn>
+                                        <p:tgtEl>
+                                          <p:spTgt spid="38"/>
+                                        </p:tgtEl>
+                                        <p:attrNameLst>
+                                          <p:attrName>style.visibility</p:attrName>
+                                        </p:attrNameLst>
+                                      </p:cBhvr>
+                                      <p:to>
+                                        <p:strVal val="visible"/>
+                                      </p:to>
+                                    </p:set>
+                                    <p:anim calcmode="lin" valueType="num">
+                                      <p:cBhvr additive="base">
+                                        <p:cTn id="23" dur="500" fill="hold"/>
+                                        <p:tgtEl>
+                                          <p:spTgt spid="38"/>
+                                        </p:tgtEl>
+                                        <p:attrNameLst>
+                                          <p:attrName>ppt_x</p:attrName>
+                                        </p:attrNameLst>
+                                      </p:cBhvr>
+                                      <p:tavLst>
+                                        <p:tav tm="0">
+                                          <p:val>
+                                            <p:strVal val="#ppt_x"/>
+                                          </p:val>
+                                        </p:tav>
+                                        <p:tav tm="100000">
+                                          <p:val>
+                                            <p:strVal val="#ppt_x"/>
+                                          </p:val>
+                                        </p:tav>
+                                      </p:tavLst>
+                                    </p:anim>
+                                    <p:anim calcmode="lin" valueType="num">
+                                      <p:cBhvr additive="base">
+                                        <p:cTn id="24" dur="500" fill="hold"/>
+                                        <p:tgtEl>
+                                          <p:spTgt spid="38"/>
+                                        </p:tgtEl>
+                                        <p:attrNameLst>
+                                          <p:attrName>ppt_y</p:attrName>
+                                        </p:attrNameLst>
+                                      </p:cBhvr>
+                                      <p:tavLst>
+                                        <p:tav tm="0">
+                                          <p:val>
+                                            <p:strVal val="1+#ppt_h/2"/>
+                                          </p:val>
+                                        </p:tav>
+                                        <p:tav tm="100000">
+                                          <p:val>
+                                            <p:strVal val="#ppt_y"/>
+                                          </p:val>
+                                        </p:tav>
+                                      </p:tavLst>
+                                    </p:anim>
+                                  </p:childTnLst>
+                                </p:cTn>
+                              </p:par>
+                              <p:par>
+                                <p:cTn id="25" presetID="2" presetClass="entr" presetSubtype="4" fill="hold" nodeType="withEffect">
+                                  <p:stCondLst>
+                                    <p:cond delay="0"/>
+                                  </p:stCondLst>
+                                  <p:childTnLst>
+                                    <p:set>
+                                      <p:cBhvr>
+                                        <p:cTn id="26" dur="1" fill="hold">
+                                          <p:stCondLst>
+                                            <p:cond delay="0"/>
+                                          </p:stCondLst>
+                                        </p:cTn>
+                                        <p:tgtEl>
+                                          <p:spTgt spid="28"/>
+                                        </p:tgtEl>
+                                        <p:attrNameLst>
+                                          <p:attrName>style.visibility</p:attrName>
+                                        </p:attrNameLst>
+                                      </p:cBhvr>
+                                      <p:to>
+                                        <p:strVal val="visible"/>
+                                      </p:to>
+                                    </p:set>
+                                    <p:anim calcmode="lin" valueType="num">
+                                      <p:cBhvr additive="base">
+                                        <p:cTn id="27" dur="500" fill="hold"/>
+                                        <p:tgtEl>
+                                          <p:spTgt spid="28"/>
+                                        </p:tgtEl>
+                                        <p:attrNameLst>
+                                          <p:attrName>ppt_x</p:attrName>
+                                        </p:attrNameLst>
+                                      </p:cBhvr>
+                                      <p:tavLst>
+                                        <p:tav tm="0">
+                                          <p:val>
+                                            <p:strVal val="#ppt_x"/>
+                                          </p:val>
+                                        </p:tav>
+                                        <p:tav tm="100000">
+                                          <p:val>
+                                            <p:strVal val="#ppt_x"/>
+                                          </p:val>
+                                        </p:tav>
+                                      </p:tavLst>
+                                    </p:anim>
+                                    <p:anim calcmode="lin" valueType="num">
+                                      <p:cBhvr additive="base">
+                                        <p:cTn id="28" dur="500" fill="hold"/>
+                                        <p:tgtEl>
+                                          <p:spTgt spid="28"/>
+                                        </p:tgtEl>
+                                        <p:attrNameLst>
+                                          <p:attrName>ppt_y</p:attrName>
+                                        </p:attrNameLst>
+                                      </p:cBhvr>
+                                      <p:tavLst>
+                                        <p:tav tm="0">
+                                          <p:val>
+                                            <p:strVal val="1+#ppt_h/2"/>
+                                          </p:val>
+                                        </p:tav>
+                                        <p:tav tm="100000">
+                                          <p:val>
+                                            <p:strVal val="#ppt_y"/>
+                                          </p:val>
+                                        </p:tav>
+                                      </p:tavLst>
+                                    </p:anim>
+                                  </p:childTnLst>
+                                </p:cTn>
+                              </p:par>
+                              <p:par>
+                                <p:cTn id="29" presetID="2" presetClass="entr" presetSubtype="4" fill="hold" nodeType="withEffect">
+                                  <p:stCondLst>
+                                    <p:cond delay="0"/>
+                                  </p:stCondLst>
+                                  <p:childTnLst>
+                                    <p:set>
+                                      <p:cBhvr>
+                                        <p:cTn id="30" dur="1" fill="hold">
+                                          <p:stCondLst>
+                                            <p:cond delay="0"/>
+                                          </p:stCondLst>
+                                        </p:cTn>
+                                        <p:tgtEl>
+                                          <p:spTgt spid="30"/>
+                                        </p:tgtEl>
+                                        <p:attrNameLst>
+                                          <p:attrName>style.visibility</p:attrName>
+                                        </p:attrNameLst>
+                                      </p:cBhvr>
+                                      <p:to>
+                                        <p:strVal val="visible"/>
+                                      </p:to>
+                                    </p:set>
+                                    <p:anim calcmode="lin" valueType="num">
+                                      <p:cBhvr additive="base">
+                                        <p:cTn id="31" dur="500" fill="hold"/>
+                                        <p:tgtEl>
+                                          <p:spTgt spid="30"/>
+                                        </p:tgtEl>
+                                        <p:attrNameLst>
+                                          <p:attrName>ppt_x</p:attrName>
+                                        </p:attrNameLst>
+                                      </p:cBhvr>
+                                      <p:tavLst>
+                                        <p:tav tm="0">
+                                          <p:val>
+                                            <p:strVal val="#ppt_x"/>
+                                          </p:val>
+                                        </p:tav>
+                                        <p:tav tm="100000">
+                                          <p:val>
+                                            <p:strVal val="#ppt_x"/>
+                                          </p:val>
+                                        </p:tav>
+                                      </p:tavLst>
+                                    </p:anim>
+                                    <p:anim calcmode="lin" valueType="num">
+                                      <p:cBhvr additive="base">
+                                        <p:cTn id="32" dur="500" fill="hold"/>
+                                        <p:tgtEl>
+                                          <p:spTgt spid="30"/>
+                                        </p:tgtEl>
+                                        <p:attrNameLst>
+                                          <p:attrName>ppt_y</p:attrName>
+                                        </p:attrNameLst>
+                                      </p:cBhvr>
+                                      <p:tavLst>
+                                        <p:tav tm="0">
+                                          <p:val>
+                                            <p:strVal val="1+#ppt_h/2"/>
+                                          </p:val>
+                                        </p:tav>
+                                        <p:tav tm="100000">
+                                          <p:val>
+                                            <p:strVal val="#ppt_y"/>
+                                          </p:val>
+                                        </p:tav>
+                                      </p:tavLst>
+                                    </p:anim>
+                                  </p:childTnLst>
+                                </p:cTn>
+                              </p:par>
+                              <p:par>
+                                <p:cTn id="33" presetID="2" presetClass="entr" presetSubtype="4" fill="hold" nodeType="withEffect">
+                                  <p:stCondLst>
+                                    <p:cond delay="0"/>
+                                  </p:stCondLst>
+                                  <p:childTnLst>
+                                    <p:set>
+                                      <p:cBhvr>
+                                        <p:cTn id="34" dur="1" fill="hold">
+                                          <p:stCondLst>
+                                            <p:cond delay="0"/>
+                                          </p:stCondLst>
+                                        </p:cTn>
+                                        <p:tgtEl>
+                                          <p:spTgt spid="40"/>
+                                        </p:tgtEl>
+                                        <p:attrNameLst>
+                                          <p:attrName>style.visibility</p:attrName>
+                                        </p:attrNameLst>
+                                      </p:cBhvr>
+                                      <p:to>
+                                        <p:strVal val="visible"/>
+                                      </p:to>
+                                    </p:set>
+                                    <p:anim calcmode="lin" valueType="num">
+                                      <p:cBhvr additive="base">
+                                        <p:cTn id="35" dur="500" fill="hold"/>
+                                        <p:tgtEl>
+                                          <p:spTgt spid="40"/>
+                                        </p:tgtEl>
+                                        <p:attrNameLst>
+                                          <p:attrName>ppt_x</p:attrName>
+                                        </p:attrNameLst>
+                                      </p:cBhvr>
+                                      <p:tavLst>
+                                        <p:tav tm="0">
+                                          <p:val>
+                                            <p:strVal val="#ppt_x"/>
+                                          </p:val>
+                                        </p:tav>
+                                        <p:tav tm="100000">
+                                          <p:val>
+                                            <p:strVal val="#ppt_x"/>
+                                          </p:val>
+                                        </p:tav>
+                                      </p:tavLst>
+                                    </p:anim>
+                                    <p:anim calcmode="lin" valueType="num">
+                                      <p:cBhvr additive="base">
+                                        <p:cTn id="36" dur="500" fill="hold"/>
+                                        <p:tgtEl>
+                                          <p:spTgt spid="40"/>
+                                        </p:tgtEl>
+                                        <p:attrNameLst>
+                                          <p:attrName>ppt_y</p:attrName>
+                                        </p:attrNameLst>
+                                      </p:cBhvr>
+                                      <p:tavLst>
+                                        <p:tav tm="0">
+                                          <p:val>
+                                            <p:strVal val="1+#ppt_h/2"/>
+                                          </p:val>
+                                        </p:tav>
+                                        <p:tav tm="100000">
+                                          <p:val>
+                                            <p:strVal val="#ppt_y"/>
+                                          </p:val>
+                                        </p:tav>
+                                      </p:tavLst>
+                                    </p:anim>
+                                  </p:childTnLst>
+                                </p:cTn>
+                              </p:par>
+                              <p:par>
+                                <p:cTn id="37" presetID="2" presetClass="entr" presetSubtype="4" fill="hold" nodeType="withEffect">
+                                  <p:stCondLst>
+                                    <p:cond delay="0"/>
+                                  </p:stCondLst>
+                                  <p:childTnLst>
+                                    <p:set>
+                                      <p:cBhvr>
+                                        <p:cTn id="38" dur="1" fill="hold">
+                                          <p:stCondLst>
+                                            <p:cond delay="0"/>
+                                          </p:stCondLst>
+                                        </p:cTn>
+                                        <p:tgtEl>
+                                          <p:spTgt spid="26"/>
+                                        </p:tgtEl>
+                                        <p:attrNameLst>
+                                          <p:attrName>style.visibility</p:attrName>
+                                        </p:attrNameLst>
+                                      </p:cBhvr>
+                                      <p:to>
+                                        <p:strVal val="visible"/>
+                                      </p:to>
+                                    </p:set>
+                                    <p:anim calcmode="lin" valueType="num">
+                                      <p:cBhvr additive="base">
+                                        <p:cTn id="39" dur="500" fill="hold"/>
+                                        <p:tgtEl>
+                                          <p:spTgt spid="26"/>
+                                        </p:tgtEl>
+                                        <p:attrNameLst>
+                                          <p:attrName>ppt_x</p:attrName>
+                                        </p:attrNameLst>
+                                      </p:cBhvr>
+                                      <p:tavLst>
+                                        <p:tav tm="0">
+                                          <p:val>
+                                            <p:strVal val="#ppt_x"/>
+                                          </p:val>
+                                        </p:tav>
+                                        <p:tav tm="100000">
+                                          <p:val>
+                                            <p:strVal val="#ppt_x"/>
+                                          </p:val>
+                                        </p:tav>
+                                      </p:tavLst>
+                                    </p:anim>
+                                    <p:anim calcmode="lin" valueType="num">
+                                      <p:cBhvr additive="base">
+                                        <p:cTn id="40" dur="500" fill="hold"/>
+                                        <p:tgtEl>
+                                          <p:spTgt spid="26"/>
+                                        </p:tgtEl>
+                                        <p:attrNameLst>
+                                          <p:attrName>ppt_y</p:attrName>
+                                        </p:attrNameLst>
+                                      </p:cBhvr>
+                                      <p:tavLst>
+                                        <p:tav tm="0">
+                                          <p:val>
+                                            <p:strVal val="1+#ppt_h/2"/>
+                                          </p:val>
+                                        </p:tav>
+                                        <p:tav tm="100000">
+                                          <p:val>
+                                            <p:strVal val="#ppt_y"/>
+                                          </p:val>
+                                        </p:tav>
+                                      </p:tavLst>
+                                    </p:anim>
+                                  </p:childTnLst>
+                                </p:cTn>
+                              </p:par>
+                              <p:par>
+                                <p:cTn id="41" presetID="2" presetClass="entr" presetSubtype="4" fill="hold" nodeType="withEffect">
+                                  <p:stCondLst>
+                                    <p:cond delay="0"/>
+                                  </p:stCondLst>
+                                  <p:childTnLst>
+                                    <p:set>
+                                      <p:cBhvr>
+                                        <p:cTn id="42" dur="1" fill="hold">
+                                          <p:stCondLst>
+                                            <p:cond delay="0"/>
+                                          </p:stCondLst>
+                                        </p:cTn>
+                                        <p:tgtEl>
+                                          <p:spTgt spid="36"/>
+                                        </p:tgtEl>
+                                        <p:attrNameLst>
+                                          <p:attrName>style.visibility</p:attrName>
+                                        </p:attrNameLst>
+                                      </p:cBhvr>
+                                      <p:to>
+                                        <p:strVal val="visible"/>
+                                      </p:to>
+                                    </p:set>
+                                    <p:anim calcmode="lin" valueType="num">
+                                      <p:cBhvr additive="base">
+                                        <p:cTn id="43" dur="500" fill="hold"/>
+                                        <p:tgtEl>
+                                          <p:spTgt spid="36"/>
+                                        </p:tgtEl>
+                                        <p:attrNameLst>
+                                          <p:attrName>ppt_x</p:attrName>
+                                        </p:attrNameLst>
+                                      </p:cBhvr>
+                                      <p:tavLst>
+                                        <p:tav tm="0">
+                                          <p:val>
+                                            <p:strVal val="#ppt_x"/>
+                                          </p:val>
+                                        </p:tav>
+                                        <p:tav tm="100000">
+                                          <p:val>
+                                            <p:strVal val="#ppt_x"/>
+                                          </p:val>
+                                        </p:tav>
+                                      </p:tavLst>
+                                    </p:anim>
+                                    <p:anim calcmode="lin" valueType="num">
+                                      <p:cBhvr additive="base">
+                                        <p:cTn id="44" dur="500" fill="hold"/>
+                                        <p:tgtEl>
+                                          <p:spTgt spid="36"/>
+                                        </p:tgtEl>
+                                        <p:attrNameLst>
+                                          <p:attrName>ppt_y</p:attrName>
+                                        </p:attrNameLst>
+                                      </p:cBhvr>
+                                      <p:tavLst>
+                                        <p:tav tm="0">
+                                          <p:val>
+                                            <p:strVal val="1+#ppt_h/2"/>
+                                          </p:val>
+                                        </p:tav>
+                                        <p:tav tm="100000">
+                                          <p:val>
+                                            <p:strVal val="#ppt_y"/>
+                                          </p:val>
+                                        </p:tav>
+                                      </p:tavLst>
+                                    </p:anim>
+                                  </p:childTnLst>
+                                </p:cTn>
+                              </p:par>
+                              <p:par>
+                                <p:cTn id="45" presetID="2" presetClass="entr" presetSubtype="4" fill="hold" nodeType="withEffect">
+                                  <p:stCondLst>
+                                    <p:cond delay="0"/>
+                                  </p:stCondLst>
+                                  <p:childTnLst>
+                                    <p:set>
+                                      <p:cBhvr>
+                                        <p:cTn id="46" dur="1" fill="hold">
+                                          <p:stCondLst>
+                                            <p:cond delay="0"/>
+                                          </p:stCondLst>
+                                        </p:cTn>
+                                        <p:tgtEl>
+                                          <p:spTgt spid="32"/>
+                                        </p:tgtEl>
+                                        <p:attrNameLst>
+                                          <p:attrName>style.visibility</p:attrName>
+                                        </p:attrNameLst>
+                                      </p:cBhvr>
+                                      <p:to>
+                                        <p:strVal val="visible"/>
+                                      </p:to>
+                                    </p:set>
+                                    <p:anim calcmode="lin" valueType="num">
+                                      <p:cBhvr additive="base">
+                                        <p:cTn id="47" dur="500" fill="hold"/>
+                                        <p:tgtEl>
+                                          <p:spTgt spid="32"/>
+                                        </p:tgtEl>
+                                        <p:attrNameLst>
+                                          <p:attrName>ppt_x</p:attrName>
+                                        </p:attrNameLst>
+                                      </p:cBhvr>
+                                      <p:tavLst>
+                                        <p:tav tm="0">
+                                          <p:val>
+                                            <p:strVal val="#ppt_x"/>
+                                          </p:val>
+                                        </p:tav>
+                                        <p:tav tm="100000">
+                                          <p:val>
+                                            <p:strVal val="#ppt_x"/>
+                                          </p:val>
+                                        </p:tav>
+                                      </p:tavLst>
+                                    </p:anim>
+                                    <p:anim calcmode="lin" valueType="num">
+                                      <p:cBhvr additive="base">
+                                        <p:cTn id="48" dur="500" fill="hold"/>
+                                        <p:tgtEl>
+                                          <p:spTgt spid="32"/>
+                                        </p:tgtEl>
+                                        <p:attrNameLst>
+                                          <p:attrName>ppt_y</p:attrName>
+                                        </p:attrNameLst>
+                                      </p:cBhvr>
+                                      <p:tavLst>
+                                        <p:tav tm="0">
+                                          <p:val>
+                                            <p:strVal val="1+#ppt_h/2"/>
+                                          </p:val>
+                                        </p:tav>
+                                        <p:tav tm="100000">
+                                          <p:val>
+                                            <p:strVal val="#ppt_y"/>
+                                          </p:val>
+                                        </p:tav>
+                                      </p:tavLst>
+                                    </p:anim>
+                                  </p:childTnLst>
+                                </p:cTn>
+                              </p:par>
+                              <p:par>
+                                <p:cTn id="49" presetID="2" presetClass="entr" presetSubtype="4" fill="hold" nodeType="withEffect">
+                                  <p:stCondLst>
+                                    <p:cond delay="0"/>
+                                  </p:stCondLst>
+                                  <p:childTnLst>
+                                    <p:set>
+                                      <p:cBhvr>
+                                        <p:cTn id="50" dur="1" fill="hold">
+                                          <p:stCondLst>
+                                            <p:cond delay="0"/>
+                                          </p:stCondLst>
+                                        </p:cTn>
+                                        <p:tgtEl>
+                                          <p:spTgt spid="44"/>
+                                        </p:tgtEl>
+                                        <p:attrNameLst>
+                                          <p:attrName>style.visibility</p:attrName>
+                                        </p:attrNameLst>
+                                      </p:cBhvr>
+                                      <p:to>
+                                        <p:strVal val="visible"/>
+                                      </p:to>
+                                    </p:set>
+                                    <p:anim calcmode="lin" valueType="num">
+                                      <p:cBhvr additive="base">
+                                        <p:cTn id="51" dur="500" fill="hold"/>
+                                        <p:tgtEl>
+                                          <p:spTgt spid="44"/>
+                                        </p:tgtEl>
+                                        <p:attrNameLst>
+                                          <p:attrName>ppt_x</p:attrName>
+                                        </p:attrNameLst>
+                                      </p:cBhvr>
+                                      <p:tavLst>
+                                        <p:tav tm="0">
+                                          <p:val>
+                                            <p:strVal val="#ppt_x"/>
+                                          </p:val>
+                                        </p:tav>
+                                        <p:tav tm="100000">
+                                          <p:val>
+                                            <p:strVal val="#ppt_x"/>
+                                          </p:val>
+                                        </p:tav>
+                                      </p:tavLst>
+                                    </p:anim>
+                                    <p:anim calcmode="lin" valueType="num">
+                                      <p:cBhvr additive="base">
+                                        <p:cTn id="52" dur="500" fill="hold"/>
+                                        <p:tgtEl>
+                                          <p:spTgt spid="44"/>
+                                        </p:tgtEl>
+                                        <p:attrNameLst>
+                                          <p:attrName>ppt_y</p:attrName>
+                                        </p:attrNameLst>
+                                      </p:cBhvr>
+                                      <p:tavLst>
+                                        <p:tav tm="0">
+                                          <p:val>
+                                            <p:strVal val="1+#ppt_h/2"/>
+                                          </p:val>
+                                        </p:tav>
+                                        <p:tav tm="100000">
+                                          <p:val>
+                                            <p:strVal val="#ppt_y"/>
+                                          </p:val>
+                                        </p:tav>
+                                      </p:tavLst>
+                                    </p:anim>
+                                  </p:childTnLst>
+                                </p:cTn>
+                              </p:par>
+                            </p:childTnLst>
+                          </p:cTn>
+                        </p:par>
+                      </p:childTnLst>
+                    </p:cTn>
+                  </p:par>
+                </p:childTnLst>
+              </p:cTn>
+              <p:prevCondLst>
+                <p:cond evt="onPrev" delay="0">
+                  <p:tgtEl>
+                    <p:sldTgt/>
+                  </p:tgtEl>
+                </p:cond>
+              </p:prevCondLst>
+              <p:nextCondLst>
+                <p:cond evt="onNext" delay="0">
+                  <p:tgtEl>
+                    <p:sldTgt/>
+                  </p:tgtEl>
+                </p:cond>
+              </p:nextCondLst>
+            </p:seq>
+          </p:childTnLst>
+        </p:cTn>
+      </p:par>
+    </p:tnLst>
+  </p:timing>
+</p:sld>
+</file>
+
+<file path=ppt/slides/slide11.xml><?xml version="1.0" encoding="utf-8"?>
+<p:sld xmlns:a="http://schemas.openxmlformats.org/drawingml/2006/main" xmlns:r="http://schemas.openxmlformats.org/officeDocument/2006/relationships" xmlns:p="http://schemas.openxmlformats.org/presentationml/2006/main">
+  <p:cSld>
+    <p:spTree>
+      <p:nvGrpSpPr>
+        <p:cNvPr id="1" name=""/>
+        <p:cNvGrpSpPr/>
+        <p:nvPr/>
+      </p:nvGrpSpPr>
+      <p:grpSpPr>
+        <a:xfrm>
+          <a:off x="0" y="0"/>
+          <a:ext cx="0" cy="0"/>
+          <a:chOff x="0" y="0"/>
+          <a:chExt cx="0" cy="0"/>
+        </a:xfrm>
+      </p:grpSpPr>
+      <p:sp>
+        <p:nvSpPr>
+          <p:cNvPr id="2" name="Titolo 1">
+            <a:extLst>
+              <a:ext uri="{FF2B5EF4-FFF2-40B4-BE49-F238E27FC236}">
                 <a16:creationId xmlns:a16="http://schemas.microsoft.com/office/drawing/2014/main" id="{D7801592-9091-B6BB-BCF7-AC7640166F9F}"/>
               </a:ext>
             </a:extLst>
@@ -7569,466 +8914,6 @@
 </p:sld>
 </file>
 
-<file path=ppt/slides/slide11.xml><?xml version="1.0" encoding="utf-8"?>
-<p:sld xmlns:a="http://schemas.openxmlformats.org/drawingml/2006/main" xmlns:r="http://schemas.openxmlformats.org/officeDocument/2006/relationships" xmlns:p="http://schemas.openxmlformats.org/presentationml/2006/main">
-  <p:cSld>
-    <p:spTree>
-      <p:nvGrpSpPr>
-        <p:cNvPr id="1" name=""/>
-        <p:cNvGrpSpPr/>
-        <p:nvPr/>
-      </p:nvGrpSpPr>
-      <p:grpSpPr>
-        <a:xfrm>
-          <a:off x="0" y="0"/>
-          <a:ext cx="0" cy="0"/>
-          <a:chOff x="0" y="0"/>
-          <a:chExt cx="0" cy="0"/>
-        </a:xfrm>
-      </p:grpSpPr>
-      <p:sp>
-        <p:nvSpPr>
-          <p:cNvPr id="2" name="Titolo 1">
-            <a:extLst>
-              <a:ext uri="{FF2B5EF4-FFF2-40B4-BE49-F238E27FC236}">
-                <a16:creationId xmlns:a16="http://schemas.microsoft.com/office/drawing/2014/main" id="{E37A1EEA-6AF2-7B2F-FC04-0640DADB58C3}"/>
-              </a:ext>
-            </a:extLst>
-          </p:cNvPr>
-          <p:cNvSpPr>
-            <a:spLocks noGrp="1"/>
-          </p:cNvSpPr>
-          <p:nvPr>
-            <p:ph type="title"/>
-          </p:nvPr>
-        </p:nvSpPr>
-        <p:spPr/>
-        <p:txBody>
-          <a:bodyPr/>
-          <a:lstStyle/>
-          <a:p>
-            <a:pPr algn="ctr"/>
-            <a:r>
-              <a:rPr lang="it-IT" dirty="0"/>
-              <a:t>Struttura </a:t>
-            </a:r>
-            <a:r>
-              <a:rPr lang="it-IT" dirty="0" err="1"/>
-              <a:t>DataBase</a:t>
-            </a:r>
-            <a:r>
-              <a:rPr lang="it-IT" dirty="0"/>
-              <a:t> SQL</a:t>
-            </a:r>
-          </a:p>
-        </p:txBody>
-      </p:sp>
-      <p:pic>
-        <p:nvPicPr>
-          <p:cNvPr id="4" name="Immagine 3" descr="Immagine che contiene testo, schermata, Carattere, linea&#10;&#10;Il contenuto generato dall'IA potrebbe non essere corretto.">
-            <a:extLst>
-              <a:ext uri="{FF2B5EF4-FFF2-40B4-BE49-F238E27FC236}">
-                <a16:creationId xmlns:a16="http://schemas.microsoft.com/office/drawing/2014/main" id="{3A88FB4C-CC61-BC27-1DBC-EBF02223BC0C}"/>
-              </a:ext>
-            </a:extLst>
-          </p:cNvPr>
-          <p:cNvPicPr>
-            <a:picLocks noChangeAspect="1"/>
-          </p:cNvPicPr>
-          <p:nvPr/>
-        </p:nvPicPr>
-        <p:blipFill>
-          <a:blip r:embed="rId2"/>
-          <a:stretch>
-            <a:fillRect/>
-          </a:stretch>
-        </p:blipFill>
-        <p:spPr>
-          <a:xfrm>
-            <a:off x="2450475" y="997820"/>
-            <a:ext cx="4243048" cy="1367388"/>
-          </a:xfrm>
-          <a:prstGeom prst="rect">
-            <a:avLst/>
-          </a:prstGeom>
-        </p:spPr>
-      </p:pic>
-      <p:pic>
-        <p:nvPicPr>
-          <p:cNvPr id="6" name="Immagine 5" descr="Immagine che contiene testo, schermata, Carattere, linea&#10;&#10;Il contenuto generato dall'IA potrebbe non essere corretto.">
-            <a:extLst>
-              <a:ext uri="{FF2B5EF4-FFF2-40B4-BE49-F238E27FC236}">
-                <a16:creationId xmlns:a16="http://schemas.microsoft.com/office/drawing/2014/main" id="{A31ABDCE-E2A6-EA34-D785-76A91AE119E6}"/>
-              </a:ext>
-            </a:extLst>
-          </p:cNvPr>
-          <p:cNvPicPr>
-            <a:picLocks noChangeAspect="1"/>
-          </p:cNvPicPr>
-          <p:nvPr/>
-        </p:nvPicPr>
-        <p:blipFill>
-          <a:blip r:embed="rId3"/>
-          <a:stretch>
-            <a:fillRect/>
-          </a:stretch>
-        </p:blipFill>
-        <p:spPr>
-          <a:xfrm>
-            <a:off x="2805621" y="2363907"/>
-            <a:ext cx="3289018" cy="1292661"/>
-          </a:xfrm>
-          <a:prstGeom prst="rect">
-            <a:avLst/>
-          </a:prstGeom>
-        </p:spPr>
-      </p:pic>
-      <p:pic>
-        <p:nvPicPr>
-          <p:cNvPr id="8" name="Immagine 7" descr="Immagine che contiene testo, schermata, Carattere, numero&#10;&#10;Il contenuto generato dall'IA potrebbe non essere corretto.">
-            <a:extLst>
-              <a:ext uri="{FF2B5EF4-FFF2-40B4-BE49-F238E27FC236}">
-                <a16:creationId xmlns:a16="http://schemas.microsoft.com/office/drawing/2014/main" id="{E420661F-4F64-BDA6-6746-3E208A6A7A0B}"/>
-              </a:ext>
-            </a:extLst>
-          </p:cNvPr>
-          <p:cNvPicPr>
-            <a:picLocks noChangeAspect="1"/>
-          </p:cNvPicPr>
-          <p:nvPr/>
-        </p:nvPicPr>
-        <p:blipFill>
-          <a:blip r:embed="rId4"/>
-          <a:stretch>
-            <a:fillRect/>
-          </a:stretch>
-        </p:blipFill>
-        <p:spPr>
-          <a:xfrm>
-            <a:off x="3001506" y="3656568"/>
-            <a:ext cx="2897247" cy="1401459"/>
-          </a:xfrm>
-          <a:prstGeom prst="rect">
-            <a:avLst/>
-          </a:prstGeom>
-        </p:spPr>
-      </p:pic>
-    </p:spTree>
-    <p:extLst>
-      <p:ext uri="{BB962C8B-B14F-4D97-AF65-F5344CB8AC3E}">
-        <p14:creationId xmlns:p14="http://schemas.microsoft.com/office/powerpoint/2010/main" val="622900377"/>
-      </p:ext>
-    </p:extLst>
-  </p:cSld>
-  <p:clrMapOvr>
-    <a:masterClrMapping/>
-  </p:clrMapOvr>
-  <p:timing>
-    <p:tnLst>
-      <p:par>
-        <p:cTn id="1" dur="indefinite" restart="never" nodeType="tmRoot">
-          <p:childTnLst>
-            <p:seq concurrent="1" nextAc="seek">
-              <p:cTn id="2" dur="indefinite" nodeType="mainSeq">
-                <p:childTnLst>
-                  <p:par>
-                    <p:cTn id="3" fill="hold">
-                      <p:stCondLst>
-                        <p:cond delay="indefinite"/>
-                      </p:stCondLst>
-                      <p:childTnLst>
-                        <p:par>
-                          <p:cTn id="4" fill="hold">
-                            <p:stCondLst>
-                              <p:cond delay="0"/>
-                            </p:stCondLst>
-                            <p:childTnLst>
-                              <p:par>
-                                <p:cTn id="5" presetID="2" presetClass="entr" presetSubtype="4" fill="hold" nodeType="clickEffect">
-                                  <p:stCondLst>
-                                    <p:cond delay="0"/>
-                                  </p:stCondLst>
-                                  <p:childTnLst>
-                                    <p:set>
-                                      <p:cBhvr>
-                                        <p:cTn id="6" dur="1" fill="hold">
-                                          <p:stCondLst>
-                                            <p:cond delay="0"/>
-                                          </p:stCondLst>
-                                        </p:cTn>
-                                        <p:tgtEl>
-                                          <p:spTgt spid="4"/>
-                                        </p:tgtEl>
-                                        <p:attrNameLst>
-                                          <p:attrName>style.visibility</p:attrName>
-                                        </p:attrNameLst>
-                                      </p:cBhvr>
-                                      <p:to>
-                                        <p:strVal val="visible"/>
-                                      </p:to>
-                                    </p:set>
-                                    <p:anim calcmode="lin" valueType="num">
-                                      <p:cBhvr additive="base">
-                                        <p:cTn id="7" dur="500" fill="hold"/>
-                                        <p:tgtEl>
-                                          <p:spTgt spid="4"/>
-                                        </p:tgtEl>
-                                        <p:attrNameLst>
-                                          <p:attrName>ppt_x</p:attrName>
-                                        </p:attrNameLst>
-                                      </p:cBhvr>
-                                      <p:tavLst>
-                                        <p:tav tm="0">
-                                          <p:val>
-                                            <p:strVal val="#ppt_x"/>
-                                          </p:val>
-                                        </p:tav>
-                                        <p:tav tm="100000">
-                                          <p:val>
-                                            <p:strVal val="#ppt_x"/>
-                                          </p:val>
-                                        </p:tav>
-                                      </p:tavLst>
-                                    </p:anim>
-                                    <p:anim calcmode="lin" valueType="num">
-                                      <p:cBhvr additive="base">
-                                        <p:cTn id="8" dur="500" fill="hold"/>
-                                        <p:tgtEl>
-                                          <p:spTgt spid="4"/>
-                                        </p:tgtEl>
-                                        <p:attrNameLst>
-                                          <p:attrName>ppt_y</p:attrName>
-                                        </p:attrNameLst>
-                                      </p:cBhvr>
-                                      <p:tavLst>
-                                        <p:tav tm="0">
-                                          <p:val>
-                                            <p:strVal val="1+#ppt_h/2"/>
-                                          </p:val>
-                                        </p:tav>
-                                        <p:tav tm="100000">
-                                          <p:val>
-                                            <p:strVal val="#ppt_y"/>
-                                          </p:val>
-                                        </p:tav>
-                                      </p:tavLst>
-                                    </p:anim>
-                                  </p:childTnLst>
-                                </p:cTn>
-                              </p:par>
-                            </p:childTnLst>
-                          </p:cTn>
-                        </p:par>
-                      </p:childTnLst>
-                    </p:cTn>
-                  </p:par>
-                  <p:par>
-                    <p:cTn id="9" fill="hold">
-                      <p:stCondLst>
-                        <p:cond delay="indefinite"/>
-                      </p:stCondLst>
-                      <p:childTnLst>
-                        <p:par>
-                          <p:cTn id="10" fill="hold">
-                            <p:stCondLst>
-                              <p:cond delay="0"/>
-                            </p:stCondLst>
-                            <p:childTnLst>
-                              <p:par>
-                                <p:cTn id="11" presetID="2" presetClass="entr" presetSubtype="4" fill="hold" nodeType="clickEffect">
-                                  <p:stCondLst>
-                                    <p:cond delay="0"/>
-                                  </p:stCondLst>
-                                  <p:childTnLst>
-                                    <p:set>
-                                      <p:cBhvr>
-                                        <p:cTn id="12" dur="1" fill="hold">
-                                          <p:stCondLst>
-                                            <p:cond delay="0"/>
-                                          </p:stCondLst>
-                                        </p:cTn>
-                                        <p:tgtEl>
-                                          <p:spTgt spid="6"/>
-                                        </p:tgtEl>
-                                        <p:attrNameLst>
-                                          <p:attrName>style.visibility</p:attrName>
-                                        </p:attrNameLst>
-                                      </p:cBhvr>
-                                      <p:to>
-                                        <p:strVal val="visible"/>
-                                      </p:to>
-                                    </p:set>
-                                    <p:anim calcmode="lin" valueType="num">
-                                      <p:cBhvr additive="base">
-                                        <p:cTn id="13" dur="500" fill="hold"/>
-                                        <p:tgtEl>
-                                          <p:spTgt spid="6"/>
-                                        </p:tgtEl>
-                                        <p:attrNameLst>
-                                          <p:attrName>ppt_x</p:attrName>
-                                        </p:attrNameLst>
-                                      </p:cBhvr>
-                                      <p:tavLst>
-                                        <p:tav tm="0">
-                                          <p:val>
-                                            <p:strVal val="#ppt_x"/>
-                                          </p:val>
-                                        </p:tav>
-                                        <p:tav tm="100000">
-                                          <p:val>
-                                            <p:strVal val="#ppt_x"/>
-                                          </p:val>
-                                        </p:tav>
-                                      </p:tavLst>
-                                    </p:anim>
-                                    <p:anim calcmode="lin" valueType="num">
-                                      <p:cBhvr additive="base">
-                                        <p:cTn id="14" dur="500" fill="hold"/>
-                                        <p:tgtEl>
-                                          <p:spTgt spid="6"/>
-                                        </p:tgtEl>
-                                        <p:attrNameLst>
-                                          <p:attrName>ppt_y</p:attrName>
-                                        </p:attrNameLst>
-                                      </p:cBhvr>
-                                      <p:tavLst>
-                                        <p:tav tm="0">
-                                          <p:val>
-                                            <p:strVal val="1+#ppt_h/2"/>
-                                          </p:val>
-                                        </p:tav>
-                                        <p:tav tm="100000">
-                                          <p:val>
-                                            <p:strVal val="#ppt_y"/>
-                                          </p:val>
-                                        </p:tav>
-                                      </p:tavLst>
-                                    </p:anim>
-                                  </p:childTnLst>
-                                </p:cTn>
-                              </p:par>
-                            </p:childTnLst>
-                          </p:cTn>
-                        </p:par>
-                      </p:childTnLst>
-                    </p:cTn>
-                  </p:par>
-                  <p:par>
-                    <p:cTn id="15" fill="hold">
-                      <p:stCondLst>
-                        <p:cond delay="indefinite"/>
-                      </p:stCondLst>
-                      <p:childTnLst>
-                        <p:par>
-                          <p:cTn id="16" fill="hold">
-                            <p:stCondLst>
-                              <p:cond delay="0"/>
-                            </p:stCondLst>
-                            <p:childTnLst>
-                              <p:par>
-                                <p:cTn id="17" presetID="2" presetClass="entr" presetSubtype="4" fill="hold" nodeType="clickEffect">
-                                  <p:stCondLst>
-                                    <p:cond delay="0"/>
-                                  </p:stCondLst>
-                                  <p:childTnLst>
-                                    <p:set>
-                                      <p:cBhvr>
-                                        <p:cTn id="18" dur="1" fill="hold">
-                                          <p:stCondLst>
-                                            <p:cond delay="0"/>
-                                          </p:stCondLst>
-                                        </p:cTn>
-                                        <p:tgtEl>
-                                          <p:spTgt spid="8"/>
-                                        </p:tgtEl>
-                                        <p:attrNameLst>
-                                          <p:attrName>style.visibility</p:attrName>
-                                        </p:attrNameLst>
-                                      </p:cBhvr>
-                                      <p:to>
-                                        <p:strVal val="visible"/>
-                                      </p:to>
-                                    </p:set>
-                                    <p:anim calcmode="lin" valueType="num">
-                                      <p:cBhvr additive="base">
-                                        <p:cTn id="19" dur="500" fill="hold"/>
-                                        <p:tgtEl>
-                                          <p:spTgt spid="8"/>
-                                        </p:tgtEl>
-                                        <p:attrNameLst>
-                                          <p:attrName>ppt_x</p:attrName>
-                                        </p:attrNameLst>
-                                      </p:cBhvr>
-                                      <p:tavLst>
-                                        <p:tav tm="0">
-                                          <p:val>
-                                            <p:strVal val="#ppt_x"/>
-                                          </p:val>
-                                        </p:tav>
-                                        <p:tav tm="100000">
-                                          <p:val>
-                                            <p:strVal val="#ppt_x"/>
-                                          </p:val>
-                                        </p:tav>
-                                      </p:tavLst>
-                                    </p:anim>
-                                    <p:anim calcmode="lin" valueType="num">
-                                      <p:cBhvr additive="base">
-                                        <p:cTn id="20" dur="500" fill="hold"/>
-                                        <p:tgtEl>
-                                          <p:spTgt spid="8"/>
-                                        </p:tgtEl>
-                                        <p:attrNameLst>
-                                          <p:attrName>ppt_y</p:attrName>
-                                        </p:attrNameLst>
-                                      </p:cBhvr>
-                                      <p:tavLst>
-                                        <p:tav tm="0">
-                                          <p:val>
-                                            <p:strVal val="1+#ppt_h/2"/>
-                                          </p:val>
-                                        </p:tav>
-                                        <p:tav tm="100000">
-                                          <p:val>
-                                            <p:strVal val="#ppt_y"/>
-                                          </p:val>
-                                        </p:tav>
-                                      </p:tavLst>
-                                    </p:anim>
-                                  </p:childTnLst>
-                                </p:cTn>
-                              </p:par>
-                            </p:childTnLst>
-                          </p:cTn>
-                        </p:par>
-                      </p:childTnLst>
-                    </p:cTn>
-                  </p:par>
-                </p:childTnLst>
-              </p:cTn>
-              <p:prevCondLst>
-                <p:cond evt="onPrev" delay="0">
-                  <p:tgtEl>
-                    <p:sldTgt/>
-                  </p:tgtEl>
-                </p:cond>
-              </p:prevCondLst>
-              <p:nextCondLst>
-                <p:cond evt="onNext" delay="0">
-                  <p:tgtEl>
-                    <p:sldTgt/>
-                  </p:tgtEl>
-                </p:cond>
-              </p:nextCondLst>
-            </p:seq>
-          </p:childTnLst>
-        </p:cTn>
-      </p:par>
-    </p:tnLst>
-  </p:timing>
-</p:sld>
-</file>
-
 <file path=ppt/slides/slide12.xml><?xml version="1.0" encoding="utf-8"?>
 <p:sld xmlns:a="http://schemas.openxmlformats.org/drawingml/2006/main" xmlns:r="http://schemas.openxmlformats.org/officeDocument/2006/relationships" xmlns:p="http://schemas.openxmlformats.org/presentationml/2006/main">
   <p:cSld>
@@ -8609,6 +9494,120 @@
           <p:cNvPr id="2" name="Titolo 1">
             <a:extLst>
               <a:ext uri="{FF2B5EF4-FFF2-40B4-BE49-F238E27FC236}">
+                <a16:creationId xmlns:a16="http://schemas.microsoft.com/office/drawing/2014/main" id="{48C00AFA-9F53-B324-A036-AD8F56F30572}"/>
+              </a:ext>
+            </a:extLst>
+          </p:cNvPr>
+          <p:cNvSpPr>
+            <a:spLocks noGrp="1"/>
+          </p:cNvSpPr>
+          <p:nvPr>
+            <p:ph type="title"/>
+          </p:nvPr>
+        </p:nvSpPr>
+        <p:spPr/>
+        <p:txBody>
+          <a:bodyPr/>
+          <a:lstStyle/>
+          <a:p>
+            <a:r>
+              <a:rPr lang="it-IT" dirty="0" err="1"/>
+              <a:t>Backend</a:t>
+            </a:r>
+            <a:endParaRPr lang="it-IT" dirty="0"/>
+          </a:p>
+        </p:txBody>
+      </p:sp>
+      <p:sp>
+        <p:nvSpPr>
+          <p:cNvPr id="3" name="Segnaposto testo 2">
+            <a:extLst>
+              <a:ext uri="{FF2B5EF4-FFF2-40B4-BE49-F238E27FC236}">
+                <a16:creationId xmlns:a16="http://schemas.microsoft.com/office/drawing/2014/main" id="{A3F04B0C-6616-F8AA-BBE4-8A9E265F3476}"/>
+              </a:ext>
+            </a:extLst>
+          </p:cNvPr>
+          <p:cNvSpPr>
+            <a:spLocks noGrp="1"/>
+          </p:cNvSpPr>
+          <p:nvPr>
+            <p:ph type="body" idx="1"/>
+          </p:nvPr>
+        </p:nvSpPr>
+        <p:spPr/>
+        <p:txBody>
+          <a:bodyPr/>
+          <a:lstStyle/>
+          <a:p>
+            <a:pPr marL="114300" indent="0">
+              <a:buNone/>
+            </a:pPr>
+            <a:r>
+              <a:rPr lang="it-IT" dirty="0"/>
+              <a:t>Il ruolo del </a:t>
+            </a:r>
+            <a:r>
+              <a:rPr lang="it-IT" dirty="0" err="1"/>
+              <a:t>backend</a:t>
+            </a:r>
+            <a:r>
+              <a:rPr lang="it-IT" dirty="0"/>
+              <a:t> è quello di rendere utilizzabili i dati e permettere il funzionamento interattivo di app e portale web. Il </a:t>
+            </a:r>
+            <a:r>
+              <a:rPr lang="it-IT" dirty="0" err="1"/>
+              <a:t>DataBase</a:t>
+            </a:r>
+            <a:r>
+              <a:rPr lang="it-IT" dirty="0"/>
+              <a:t> creato </a:t>
+            </a:r>
+            <a:r>
+              <a:rPr lang="it-IT" dirty="0" err="1"/>
+              <a:t>imagazzina</a:t>
+            </a:r>
+            <a:r>
+              <a:rPr lang="it-IT" dirty="0"/>
+              <a:t> i dati e li rende fruibili agli utenti tramite l’uso di API. In pratica quando un utente si registra su app o sito i suoi dati vengono salvati sul Server e successivamente possono essere modificati o cancellati a seconda delle esigenze degli utenti.</a:t>
+            </a:r>
+          </a:p>
+        </p:txBody>
+      </p:sp>
+    </p:spTree>
+    <p:extLst>
+      <p:ext uri="{BB962C8B-B14F-4D97-AF65-F5344CB8AC3E}">
+        <p14:creationId xmlns:p14="http://schemas.microsoft.com/office/powerpoint/2010/main" val="427418339"/>
+      </p:ext>
+    </p:extLst>
+  </p:cSld>
+  <p:clrMapOvr>
+    <a:masterClrMapping/>
+  </p:clrMapOvr>
+</p:sld>
+</file>
+
+<file path=ppt/slides/slide15.xml><?xml version="1.0" encoding="utf-8"?>
+<p:sld xmlns:a="http://schemas.openxmlformats.org/drawingml/2006/main" xmlns:r="http://schemas.openxmlformats.org/officeDocument/2006/relationships" xmlns:p="http://schemas.openxmlformats.org/presentationml/2006/main">
+  <p:cSld>
+    <p:spTree>
+      <p:nvGrpSpPr>
+        <p:cNvPr id="1" name=""/>
+        <p:cNvGrpSpPr/>
+        <p:nvPr/>
+      </p:nvGrpSpPr>
+      <p:grpSpPr>
+        <a:xfrm>
+          <a:off x="0" y="0"/>
+          <a:ext cx="0" cy="0"/>
+          <a:chOff x="0" y="0"/>
+          <a:chExt cx="0" cy="0"/>
+        </a:xfrm>
+      </p:grpSpPr>
+      <p:sp>
+        <p:nvSpPr>
+          <p:cNvPr id="2" name="Titolo 1">
+            <a:extLst>
+              <a:ext uri="{FF2B5EF4-FFF2-40B4-BE49-F238E27FC236}">
                 <a16:creationId xmlns:a16="http://schemas.microsoft.com/office/drawing/2014/main" id="{3CD9EF37-8F27-BC8E-AAF6-322944516B0D}"/>
               </a:ext>
             </a:extLst>
@@ -8711,7 +9710,111 @@
 </p:sld>
 </file>
 
-<file path=ppt/slides/slide15.xml><?xml version="1.0" encoding="utf-8"?>
+<file path=ppt/slides/slide16.xml><?xml version="1.0" encoding="utf-8"?>
+<p:sld xmlns:a="http://schemas.openxmlformats.org/drawingml/2006/main" xmlns:r="http://schemas.openxmlformats.org/officeDocument/2006/relationships" xmlns:p="http://schemas.openxmlformats.org/presentationml/2006/main">
+  <p:cSld>
+    <p:spTree>
+      <p:nvGrpSpPr>
+        <p:cNvPr id="1" name=""/>
+        <p:cNvGrpSpPr/>
+        <p:nvPr/>
+      </p:nvGrpSpPr>
+      <p:grpSpPr>
+        <a:xfrm>
+          <a:off x="0" y="0"/>
+          <a:ext cx="0" cy="0"/>
+          <a:chOff x="0" y="0"/>
+          <a:chExt cx="0" cy="0"/>
+        </a:xfrm>
+      </p:grpSpPr>
+      <p:sp>
+        <p:nvSpPr>
+          <p:cNvPr id="2" name="Titolo 1">
+            <a:extLst>
+              <a:ext uri="{FF2B5EF4-FFF2-40B4-BE49-F238E27FC236}">
+                <a16:creationId xmlns:a16="http://schemas.microsoft.com/office/drawing/2014/main" id="{51D6D180-D528-A515-B125-F5368256A319}"/>
+              </a:ext>
+            </a:extLst>
+          </p:cNvPr>
+          <p:cNvSpPr>
+            <a:spLocks noGrp="1"/>
+          </p:cNvSpPr>
+          <p:nvPr>
+            <p:ph type="title"/>
+          </p:nvPr>
+        </p:nvSpPr>
+        <p:spPr/>
+        <p:txBody>
+          <a:bodyPr/>
+          <a:lstStyle/>
+          <a:p>
+            <a:r>
+              <a:rPr lang="it-IT" dirty="0" err="1"/>
+              <a:t>FrontEnd</a:t>
+            </a:r>
+            <a:endParaRPr lang="it-IT" dirty="0"/>
+          </a:p>
+        </p:txBody>
+      </p:sp>
+      <p:sp>
+        <p:nvSpPr>
+          <p:cNvPr id="3" name="Segnaposto testo 2">
+            <a:extLst>
+              <a:ext uri="{FF2B5EF4-FFF2-40B4-BE49-F238E27FC236}">
+                <a16:creationId xmlns:a16="http://schemas.microsoft.com/office/drawing/2014/main" id="{961B30F2-96D0-37CD-00E7-63CBA35E7EF0}"/>
+              </a:ext>
+            </a:extLst>
+          </p:cNvPr>
+          <p:cNvSpPr>
+            <a:spLocks noGrp="1"/>
+          </p:cNvSpPr>
+          <p:nvPr>
+            <p:ph type="body" idx="1"/>
+          </p:nvPr>
+        </p:nvSpPr>
+        <p:spPr>
+          <a:xfrm>
+            <a:off x="204107" y="1171600"/>
+            <a:ext cx="8628193" cy="3397200"/>
+          </a:xfrm>
+        </p:spPr>
+        <p:txBody>
+          <a:bodyPr/>
+          <a:lstStyle/>
+          <a:p>
+            <a:pPr marL="114300" indent="0">
+              <a:buNone/>
+            </a:pPr>
+            <a:r>
+              <a:rPr lang="it-IT" dirty="0"/>
+              <a:t>Per l’app è stata creata una UI semplice e intuitiva. Ad esempio nella home abbiamo una grafica che ricorda, per i profili degli animali, i vari social più diffusi in modo da semplificare la UX .L’utente, tramite semplici bottoni riconoscibili è da  subito in grado di comprendere il funzionamento dei vari componenti dell’applicazione.</a:t>
+            </a:r>
+          </a:p>
+          <a:p>
+            <a:pPr marL="114300" indent="0">
+              <a:buNone/>
+            </a:pPr>
+            <a:r>
+              <a:rPr lang="it-IT" dirty="0"/>
+              <a:t>Per ciò che riguarda il portale Web si è scelto di utilizzare la stessa logica, e di rendere facile per l’utente l’inserimento dei propri dati e l’utilizzo del portale al fine di presentare i propri servizi agli utenti.</a:t>
+            </a:r>
+          </a:p>
+        </p:txBody>
+      </p:sp>
+    </p:spTree>
+    <p:extLst>
+      <p:ext uri="{BB962C8B-B14F-4D97-AF65-F5344CB8AC3E}">
+        <p14:creationId xmlns:p14="http://schemas.microsoft.com/office/powerpoint/2010/main" val="1794453119"/>
+      </p:ext>
+    </p:extLst>
+  </p:cSld>
+  <p:clrMapOvr>
+    <a:masterClrMapping/>
+  </p:clrMapOvr>
+</p:sld>
+</file>
+
+<file path=ppt/slides/slide17.xml><?xml version="1.0" encoding="utf-8"?>
 <p:sld xmlns:a="http://schemas.openxmlformats.org/drawingml/2006/main" xmlns:r="http://schemas.openxmlformats.org/officeDocument/2006/relationships" xmlns:p="http://schemas.openxmlformats.org/presentationml/2006/main">
   <p:cSld>
     <p:spTree>
@@ -9080,7 +10183,7 @@
 </p:sld>
 </file>
 
-<file path=ppt/slides/slide16.xml><?xml version="1.0" encoding="utf-8"?>
+<file path=ppt/slides/slide18.xml><?xml version="1.0" encoding="utf-8"?>
 <p:sld xmlns:a="http://schemas.openxmlformats.org/drawingml/2006/main" xmlns:r="http://schemas.openxmlformats.org/officeDocument/2006/relationships" xmlns:p="http://schemas.openxmlformats.org/presentationml/2006/main">
   <p:cSld>
     <p:spTree>
@@ -9322,7 +10425,7 @@
 </p:sld>
 </file>
 
-<file path=ppt/slides/slide17.xml><?xml version="1.0" encoding="utf-8"?>
+<file path=ppt/slides/slide19.xml><?xml version="1.0" encoding="utf-8"?>
 <p:sld xmlns:a="http://schemas.openxmlformats.org/drawingml/2006/main" xmlns:r="http://schemas.openxmlformats.org/officeDocument/2006/relationships" xmlns:p="http://schemas.openxmlformats.org/presentationml/2006/main">
   <p:cSld>
     <p:spTree>
@@ -9699,7 +10802,74 @@
 </p:sld>
 </file>
 
-<file path=ppt/slides/slide18.xml><?xml version="1.0" encoding="utf-8"?>
+<file path=ppt/slides/slide2.xml><?xml version="1.0" encoding="utf-8"?>
+<p:sld xmlns:a="http://schemas.openxmlformats.org/drawingml/2006/main" xmlns:r="http://schemas.openxmlformats.org/officeDocument/2006/relationships" xmlns:p="http://schemas.openxmlformats.org/presentationml/2006/main">
+  <p:cSld>
+    <p:spTree>
+      <p:nvGrpSpPr>
+        <p:cNvPr id="1" name="Shape 64"/>
+        <p:cNvGrpSpPr/>
+        <p:nvPr/>
+      </p:nvGrpSpPr>
+      <p:grpSpPr>
+        <a:xfrm>
+          <a:off x="0" y="0"/>
+          <a:ext cx="0" cy="0"/>
+          <a:chOff x="0" y="0"/>
+          <a:chExt cx="0" cy="0"/>
+        </a:xfrm>
+      </p:grpSpPr>
+      <p:sp>
+        <p:nvSpPr>
+          <p:cNvPr id="65" name="Google Shape;65;p14"/>
+          <p:cNvSpPr txBox="1">
+            <a:spLocks noGrp="1"/>
+          </p:cNvSpPr>
+          <p:nvPr>
+            <p:ph type="title"/>
+          </p:nvPr>
+        </p:nvSpPr>
+        <p:spPr>
+          <a:xfrm>
+            <a:off x="490250" y="526350"/>
+            <a:ext cx="5604000" cy="4090800"/>
+          </a:xfrm>
+          <a:prstGeom prst="rect">
+            <a:avLst/>
+          </a:prstGeom>
+        </p:spPr>
+        <p:txBody>
+          <a:bodyPr spcFirstLastPara="1" wrap="square" lIns="91425" tIns="91425" rIns="91425" bIns="91425" anchor="ctr" anchorCtr="0">
+            <a:noAutofit/>
+          </a:bodyPr>
+          <a:lstStyle/>
+          <a:p>
+            <a:pPr marL="0" lvl="0" indent="0" algn="l" rtl="0">
+              <a:spcBef>
+                <a:spcPts val="0"/>
+              </a:spcBef>
+              <a:spcAft>
+                <a:spcPts val="0"/>
+              </a:spcAft>
+              <a:buNone/>
+            </a:pPr>
+            <a:r>
+              <a:rPr lang="it"/>
+              <a:t>Il progetto</a:t>
+            </a:r>
+            <a:endParaRPr/>
+          </a:p>
+        </p:txBody>
+      </p:sp>
+    </p:spTree>
+  </p:cSld>
+  <p:clrMapOvr>
+    <a:masterClrMapping/>
+  </p:clrMapOvr>
+</p:sld>
+</file>
+
+<file path=ppt/slides/slide20.xml><?xml version="1.0" encoding="utf-8"?>
 <p:sld xmlns:a="http://schemas.openxmlformats.org/drawingml/2006/main" xmlns:r="http://schemas.openxmlformats.org/officeDocument/2006/relationships" xmlns:p="http://schemas.openxmlformats.org/presentationml/2006/main">
   <p:cSld>
     <p:spTree>
@@ -10143,7 +11313,7 @@
 </p:sld>
 </file>
 
-<file path=ppt/slides/slide19.xml><?xml version="1.0" encoding="utf-8"?>
+<file path=ppt/slides/slide21.xml><?xml version="1.0" encoding="utf-8"?>
 <p:sld xmlns:a="http://schemas.openxmlformats.org/drawingml/2006/main" xmlns:r="http://schemas.openxmlformats.org/officeDocument/2006/relationships" xmlns:p="http://schemas.openxmlformats.org/presentationml/2006/main">
   <p:cSld>
     <p:spTree>
@@ -10367,74 +11537,7 @@
 </p:sld>
 </file>
 
-<file path=ppt/slides/slide2.xml><?xml version="1.0" encoding="utf-8"?>
-<p:sld xmlns:a="http://schemas.openxmlformats.org/drawingml/2006/main" xmlns:r="http://schemas.openxmlformats.org/officeDocument/2006/relationships" xmlns:p="http://schemas.openxmlformats.org/presentationml/2006/main">
-  <p:cSld>
-    <p:spTree>
-      <p:nvGrpSpPr>
-        <p:cNvPr id="1" name="Shape 64"/>
-        <p:cNvGrpSpPr/>
-        <p:nvPr/>
-      </p:nvGrpSpPr>
-      <p:grpSpPr>
-        <a:xfrm>
-          <a:off x="0" y="0"/>
-          <a:ext cx="0" cy="0"/>
-          <a:chOff x="0" y="0"/>
-          <a:chExt cx="0" cy="0"/>
-        </a:xfrm>
-      </p:grpSpPr>
-      <p:sp>
-        <p:nvSpPr>
-          <p:cNvPr id="65" name="Google Shape;65;p14"/>
-          <p:cNvSpPr txBox="1">
-            <a:spLocks noGrp="1"/>
-          </p:cNvSpPr>
-          <p:nvPr>
-            <p:ph type="title"/>
-          </p:nvPr>
-        </p:nvSpPr>
-        <p:spPr>
-          <a:xfrm>
-            <a:off x="490250" y="526350"/>
-            <a:ext cx="5604000" cy="4090800"/>
-          </a:xfrm>
-          <a:prstGeom prst="rect">
-            <a:avLst/>
-          </a:prstGeom>
-        </p:spPr>
-        <p:txBody>
-          <a:bodyPr spcFirstLastPara="1" wrap="square" lIns="91425" tIns="91425" rIns="91425" bIns="91425" anchor="ctr" anchorCtr="0">
-            <a:noAutofit/>
-          </a:bodyPr>
-          <a:lstStyle/>
-          <a:p>
-            <a:pPr marL="0" lvl="0" indent="0" algn="l" rtl="0">
-              <a:spcBef>
-                <a:spcPts val="0"/>
-              </a:spcBef>
-              <a:spcAft>
-                <a:spcPts val="0"/>
-              </a:spcAft>
-              <a:buNone/>
-            </a:pPr>
-            <a:r>
-              <a:rPr lang="it"/>
-              <a:t>Il progetto</a:t>
-            </a:r>
-            <a:endParaRPr/>
-          </a:p>
-        </p:txBody>
-      </p:sp>
-    </p:spTree>
-  </p:cSld>
-  <p:clrMapOvr>
-    <a:masterClrMapping/>
-  </p:clrMapOvr>
-</p:sld>
-</file>
-
-<file path=ppt/slides/slide20.xml><?xml version="1.0" encoding="utf-8"?>
+<file path=ppt/slides/slide22.xml><?xml version="1.0" encoding="utf-8"?>
 <p:sld xmlns:a="http://schemas.openxmlformats.org/drawingml/2006/main" xmlns:r="http://schemas.openxmlformats.org/officeDocument/2006/relationships" xmlns:p="http://schemas.openxmlformats.org/presentationml/2006/main">
   <p:cSld>
     <p:spTree>
@@ -10658,7 +11761,7 @@
 </p:sld>
 </file>
 
-<file path=ppt/slides/slide21.xml><?xml version="1.0" encoding="utf-8"?>
+<file path=ppt/slides/slide23.xml><?xml version="1.0" encoding="utf-8"?>
 <p:sld xmlns:a="http://schemas.openxmlformats.org/drawingml/2006/main" xmlns:r="http://schemas.openxmlformats.org/officeDocument/2006/relationships" xmlns:p="http://schemas.openxmlformats.org/presentationml/2006/main">
   <p:cSld>
     <p:spTree>
@@ -10882,7 +11985,7 @@
 </p:sld>
 </file>
 
-<file path=ppt/slides/slide22.xml><?xml version="1.0" encoding="utf-8"?>
+<file path=ppt/slides/slide24.xml><?xml version="1.0" encoding="utf-8"?>
 <p:sld xmlns:a="http://schemas.openxmlformats.org/drawingml/2006/main" xmlns:r="http://schemas.openxmlformats.org/officeDocument/2006/relationships" xmlns:p="http://schemas.openxmlformats.org/presentationml/2006/main">
   <p:cSld>
     <p:spTree>
@@ -11106,7 +12209,7 @@
 </p:sld>
 </file>
 
-<file path=ppt/slides/slide23.xml><?xml version="1.0" encoding="utf-8"?>
+<file path=ppt/slides/slide25.xml><?xml version="1.0" encoding="utf-8"?>
 <p:sld xmlns:a="http://schemas.openxmlformats.org/drawingml/2006/main" xmlns:r="http://schemas.openxmlformats.org/officeDocument/2006/relationships" xmlns:p="http://schemas.openxmlformats.org/presentationml/2006/main">
   <p:cSld>
     <p:spTree>
@@ -11812,7 +12915,7 @@
 </p:sld>
 </file>
 
-<file path=ppt/slides/slide24.xml><?xml version="1.0" encoding="utf-8"?>
+<file path=ppt/slides/slide26.xml><?xml version="1.0" encoding="utf-8"?>
 <p:sld xmlns:a="http://schemas.openxmlformats.org/drawingml/2006/main" xmlns:r="http://schemas.openxmlformats.org/officeDocument/2006/relationships" xmlns:p="http://schemas.openxmlformats.org/presentationml/2006/main">
   <p:cSld>
     <p:spTree>
@@ -12290,7 +13393,7 @@
 </p:sld>
 </file>
 
-<file path=ppt/slides/slide25.xml><?xml version="1.0" encoding="utf-8"?>
+<file path=ppt/slides/slide27.xml><?xml version="1.0" encoding="utf-8"?>
 <p:sld xmlns:a="http://schemas.openxmlformats.org/drawingml/2006/main" xmlns:r="http://schemas.openxmlformats.org/officeDocument/2006/relationships" xmlns:p="http://schemas.openxmlformats.org/presentationml/2006/main">
   <p:cSld>
     <p:spTree>
@@ -12531,7 +13634,7 @@
 </p:sld>
 </file>
 
-<file path=ppt/slides/slide26.xml><?xml version="1.0" encoding="utf-8"?>
+<file path=ppt/slides/slide28.xml><?xml version="1.0" encoding="utf-8"?>
 <p:sld xmlns:a="http://schemas.openxmlformats.org/drawingml/2006/main" xmlns:r="http://schemas.openxmlformats.org/officeDocument/2006/relationships" xmlns:p="http://schemas.openxmlformats.org/presentationml/2006/main">
   <p:cSld>
     <p:spTree>
@@ -13534,6 +14637,466 @@
 </file>
 
 <file path=ppt/slides/slide7.xml><?xml version="1.0" encoding="utf-8"?>
+<p:sld xmlns:a="http://schemas.openxmlformats.org/drawingml/2006/main" xmlns:r="http://schemas.openxmlformats.org/officeDocument/2006/relationships" xmlns:p="http://schemas.openxmlformats.org/presentationml/2006/main">
+  <p:cSld>
+    <p:spTree>
+      <p:nvGrpSpPr>
+        <p:cNvPr id="1" name=""/>
+        <p:cNvGrpSpPr/>
+        <p:nvPr/>
+      </p:nvGrpSpPr>
+      <p:grpSpPr>
+        <a:xfrm>
+          <a:off x="0" y="0"/>
+          <a:ext cx="0" cy="0"/>
+          <a:chOff x="0" y="0"/>
+          <a:chExt cx="0" cy="0"/>
+        </a:xfrm>
+      </p:grpSpPr>
+      <p:sp>
+        <p:nvSpPr>
+          <p:cNvPr id="2" name="Titolo 1">
+            <a:extLst>
+              <a:ext uri="{FF2B5EF4-FFF2-40B4-BE49-F238E27FC236}">
+                <a16:creationId xmlns:a16="http://schemas.microsoft.com/office/drawing/2014/main" id="{E37A1EEA-6AF2-7B2F-FC04-0640DADB58C3}"/>
+              </a:ext>
+            </a:extLst>
+          </p:cNvPr>
+          <p:cNvSpPr>
+            <a:spLocks noGrp="1"/>
+          </p:cNvSpPr>
+          <p:nvPr>
+            <p:ph type="title"/>
+          </p:nvPr>
+        </p:nvSpPr>
+        <p:spPr/>
+        <p:txBody>
+          <a:bodyPr/>
+          <a:lstStyle/>
+          <a:p>
+            <a:pPr algn="ctr"/>
+            <a:r>
+              <a:rPr lang="it-IT" dirty="0"/>
+              <a:t>Struttura </a:t>
+            </a:r>
+            <a:r>
+              <a:rPr lang="it-IT" dirty="0" err="1"/>
+              <a:t>DataBase</a:t>
+            </a:r>
+            <a:r>
+              <a:rPr lang="it-IT" dirty="0"/>
+              <a:t> SQL</a:t>
+            </a:r>
+          </a:p>
+        </p:txBody>
+      </p:sp>
+      <p:pic>
+        <p:nvPicPr>
+          <p:cNvPr id="4" name="Immagine 3" descr="Immagine che contiene testo, schermata, Carattere, linea&#10;&#10;Il contenuto generato dall'IA potrebbe non essere corretto.">
+            <a:extLst>
+              <a:ext uri="{FF2B5EF4-FFF2-40B4-BE49-F238E27FC236}">
+                <a16:creationId xmlns:a16="http://schemas.microsoft.com/office/drawing/2014/main" id="{3A88FB4C-CC61-BC27-1DBC-EBF02223BC0C}"/>
+              </a:ext>
+            </a:extLst>
+          </p:cNvPr>
+          <p:cNvPicPr>
+            <a:picLocks noChangeAspect="1"/>
+          </p:cNvPicPr>
+          <p:nvPr/>
+        </p:nvPicPr>
+        <p:blipFill>
+          <a:blip r:embed="rId2"/>
+          <a:stretch>
+            <a:fillRect/>
+          </a:stretch>
+        </p:blipFill>
+        <p:spPr>
+          <a:xfrm>
+            <a:off x="2450475" y="997820"/>
+            <a:ext cx="4243048" cy="1367388"/>
+          </a:xfrm>
+          <a:prstGeom prst="rect">
+            <a:avLst/>
+          </a:prstGeom>
+        </p:spPr>
+      </p:pic>
+      <p:pic>
+        <p:nvPicPr>
+          <p:cNvPr id="6" name="Immagine 5" descr="Immagine che contiene testo, schermata, Carattere, linea&#10;&#10;Il contenuto generato dall'IA potrebbe non essere corretto.">
+            <a:extLst>
+              <a:ext uri="{FF2B5EF4-FFF2-40B4-BE49-F238E27FC236}">
+                <a16:creationId xmlns:a16="http://schemas.microsoft.com/office/drawing/2014/main" id="{A31ABDCE-E2A6-EA34-D785-76A91AE119E6}"/>
+              </a:ext>
+            </a:extLst>
+          </p:cNvPr>
+          <p:cNvPicPr>
+            <a:picLocks noChangeAspect="1"/>
+          </p:cNvPicPr>
+          <p:nvPr/>
+        </p:nvPicPr>
+        <p:blipFill>
+          <a:blip r:embed="rId3"/>
+          <a:stretch>
+            <a:fillRect/>
+          </a:stretch>
+        </p:blipFill>
+        <p:spPr>
+          <a:xfrm>
+            <a:off x="2805621" y="2363907"/>
+            <a:ext cx="3289018" cy="1292661"/>
+          </a:xfrm>
+          <a:prstGeom prst="rect">
+            <a:avLst/>
+          </a:prstGeom>
+        </p:spPr>
+      </p:pic>
+      <p:pic>
+        <p:nvPicPr>
+          <p:cNvPr id="8" name="Immagine 7" descr="Immagine che contiene testo, schermata, Carattere, numero&#10;&#10;Il contenuto generato dall'IA potrebbe non essere corretto.">
+            <a:extLst>
+              <a:ext uri="{FF2B5EF4-FFF2-40B4-BE49-F238E27FC236}">
+                <a16:creationId xmlns:a16="http://schemas.microsoft.com/office/drawing/2014/main" id="{E420661F-4F64-BDA6-6746-3E208A6A7A0B}"/>
+              </a:ext>
+            </a:extLst>
+          </p:cNvPr>
+          <p:cNvPicPr>
+            <a:picLocks noChangeAspect="1"/>
+          </p:cNvPicPr>
+          <p:nvPr/>
+        </p:nvPicPr>
+        <p:blipFill>
+          <a:blip r:embed="rId4"/>
+          <a:stretch>
+            <a:fillRect/>
+          </a:stretch>
+        </p:blipFill>
+        <p:spPr>
+          <a:xfrm>
+            <a:off x="3001506" y="3656568"/>
+            <a:ext cx="2897247" cy="1401459"/>
+          </a:xfrm>
+          <a:prstGeom prst="rect">
+            <a:avLst/>
+          </a:prstGeom>
+        </p:spPr>
+      </p:pic>
+    </p:spTree>
+    <p:extLst>
+      <p:ext uri="{BB962C8B-B14F-4D97-AF65-F5344CB8AC3E}">
+        <p14:creationId xmlns:p14="http://schemas.microsoft.com/office/powerpoint/2010/main" val="622900377"/>
+      </p:ext>
+    </p:extLst>
+  </p:cSld>
+  <p:clrMapOvr>
+    <a:masterClrMapping/>
+  </p:clrMapOvr>
+  <p:timing>
+    <p:tnLst>
+      <p:par>
+        <p:cTn id="1" dur="indefinite" restart="never" nodeType="tmRoot">
+          <p:childTnLst>
+            <p:seq concurrent="1" nextAc="seek">
+              <p:cTn id="2" dur="indefinite" nodeType="mainSeq">
+                <p:childTnLst>
+                  <p:par>
+                    <p:cTn id="3" fill="hold">
+                      <p:stCondLst>
+                        <p:cond delay="indefinite"/>
+                      </p:stCondLst>
+                      <p:childTnLst>
+                        <p:par>
+                          <p:cTn id="4" fill="hold">
+                            <p:stCondLst>
+                              <p:cond delay="0"/>
+                            </p:stCondLst>
+                            <p:childTnLst>
+                              <p:par>
+                                <p:cTn id="5" presetID="2" presetClass="entr" presetSubtype="4" fill="hold" nodeType="clickEffect">
+                                  <p:stCondLst>
+                                    <p:cond delay="0"/>
+                                  </p:stCondLst>
+                                  <p:childTnLst>
+                                    <p:set>
+                                      <p:cBhvr>
+                                        <p:cTn id="6" dur="1" fill="hold">
+                                          <p:stCondLst>
+                                            <p:cond delay="0"/>
+                                          </p:stCondLst>
+                                        </p:cTn>
+                                        <p:tgtEl>
+                                          <p:spTgt spid="4"/>
+                                        </p:tgtEl>
+                                        <p:attrNameLst>
+                                          <p:attrName>style.visibility</p:attrName>
+                                        </p:attrNameLst>
+                                      </p:cBhvr>
+                                      <p:to>
+                                        <p:strVal val="visible"/>
+                                      </p:to>
+                                    </p:set>
+                                    <p:anim calcmode="lin" valueType="num">
+                                      <p:cBhvr additive="base">
+                                        <p:cTn id="7" dur="500" fill="hold"/>
+                                        <p:tgtEl>
+                                          <p:spTgt spid="4"/>
+                                        </p:tgtEl>
+                                        <p:attrNameLst>
+                                          <p:attrName>ppt_x</p:attrName>
+                                        </p:attrNameLst>
+                                      </p:cBhvr>
+                                      <p:tavLst>
+                                        <p:tav tm="0">
+                                          <p:val>
+                                            <p:strVal val="#ppt_x"/>
+                                          </p:val>
+                                        </p:tav>
+                                        <p:tav tm="100000">
+                                          <p:val>
+                                            <p:strVal val="#ppt_x"/>
+                                          </p:val>
+                                        </p:tav>
+                                      </p:tavLst>
+                                    </p:anim>
+                                    <p:anim calcmode="lin" valueType="num">
+                                      <p:cBhvr additive="base">
+                                        <p:cTn id="8" dur="500" fill="hold"/>
+                                        <p:tgtEl>
+                                          <p:spTgt spid="4"/>
+                                        </p:tgtEl>
+                                        <p:attrNameLst>
+                                          <p:attrName>ppt_y</p:attrName>
+                                        </p:attrNameLst>
+                                      </p:cBhvr>
+                                      <p:tavLst>
+                                        <p:tav tm="0">
+                                          <p:val>
+                                            <p:strVal val="1+#ppt_h/2"/>
+                                          </p:val>
+                                        </p:tav>
+                                        <p:tav tm="100000">
+                                          <p:val>
+                                            <p:strVal val="#ppt_y"/>
+                                          </p:val>
+                                        </p:tav>
+                                      </p:tavLst>
+                                    </p:anim>
+                                  </p:childTnLst>
+                                </p:cTn>
+                              </p:par>
+                            </p:childTnLst>
+                          </p:cTn>
+                        </p:par>
+                      </p:childTnLst>
+                    </p:cTn>
+                  </p:par>
+                  <p:par>
+                    <p:cTn id="9" fill="hold">
+                      <p:stCondLst>
+                        <p:cond delay="indefinite"/>
+                      </p:stCondLst>
+                      <p:childTnLst>
+                        <p:par>
+                          <p:cTn id="10" fill="hold">
+                            <p:stCondLst>
+                              <p:cond delay="0"/>
+                            </p:stCondLst>
+                            <p:childTnLst>
+                              <p:par>
+                                <p:cTn id="11" presetID="2" presetClass="entr" presetSubtype="4" fill="hold" nodeType="clickEffect">
+                                  <p:stCondLst>
+                                    <p:cond delay="0"/>
+                                  </p:stCondLst>
+                                  <p:childTnLst>
+                                    <p:set>
+                                      <p:cBhvr>
+                                        <p:cTn id="12" dur="1" fill="hold">
+                                          <p:stCondLst>
+                                            <p:cond delay="0"/>
+                                          </p:stCondLst>
+                                        </p:cTn>
+                                        <p:tgtEl>
+                                          <p:spTgt spid="6"/>
+                                        </p:tgtEl>
+                                        <p:attrNameLst>
+                                          <p:attrName>style.visibility</p:attrName>
+                                        </p:attrNameLst>
+                                      </p:cBhvr>
+                                      <p:to>
+                                        <p:strVal val="visible"/>
+                                      </p:to>
+                                    </p:set>
+                                    <p:anim calcmode="lin" valueType="num">
+                                      <p:cBhvr additive="base">
+                                        <p:cTn id="13" dur="500" fill="hold"/>
+                                        <p:tgtEl>
+                                          <p:spTgt spid="6"/>
+                                        </p:tgtEl>
+                                        <p:attrNameLst>
+                                          <p:attrName>ppt_x</p:attrName>
+                                        </p:attrNameLst>
+                                      </p:cBhvr>
+                                      <p:tavLst>
+                                        <p:tav tm="0">
+                                          <p:val>
+                                            <p:strVal val="#ppt_x"/>
+                                          </p:val>
+                                        </p:tav>
+                                        <p:tav tm="100000">
+                                          <p:val>
+                                            <p:strVal val="#ppt_x"/>
+                                          </p:val>
+                                        </p:tav>
+                                      </p:tavLst>
+                                    </p:anim>
+                                    <p:anim calcmode="lin" valueType="num">
+                                      <p:cBhvr additive="base">
+                                        <p:cTn id="14" dur="500" fill="hold"/>
+                                        <p:tgtEl>
+                                          <p:spTgt spid="6"/>
+                                        </p:tgtEl>
+                                        <p:attrNameLst>
+                                          <p:attrName>ppt_y</p:attrName>
+                                        </p:attrNameLst>
+                                      </p:cBhvr>
+                                      <p:tavLst>
+                                        <p:tav tm="0">
+                                          <p:val>
+                                            <p:strVal val="1+#ppt_h/2"/>
+                                          </p:val>
+                                        </p:tav>
+                                        <p:tav tm="100000">
+                                          <p:val>
+                                            <p:strVal val="#ppt_y"/>
+                                          </p:val>
+                                        </p:tav>
+                                      </p:tavLst>
+                                    </p:anim>
+                                  </p:childTnLst>
+                                </p:cTn>
+                              </p:par>
+                            </p:childTnLst>
+                          </p:cTn>
+                        </p:par>
+                      </p:childTnLst>
+                    </p:cTn>
+                  </p:par>
+                  <p:par>
+                    <p:cTn id="15" fill="hold">
+                      <p:stCondLst>
+                        <p:cond delay="indefinite"/>
+                      </p:stCondLst>
+                      <p:childTnLst>
+                        <p:par>
+                          <p:cTn id="16" fill="hold">
+                            <p:stCondLst>
+                              <p:cond delay="0"/>
+                            </p:stCondLst>
+                            <p:childTnLst>
+                              <p:par>
+                                <p:cTn id="17" presetID="2" presetClass="entr" presetSubtype="4" fill="hold" nodeType="clickEffect">
+                                  <p:stCondLst>
+                                    <p:cond delay="0"/>
+                                  </p:stCondLst>
+                                  <p:childTnLst>
+                                    <p:set>
+                                      <p:cBhvr>
+                                        <p:cTn id="18" dur="1" fill="hold">
+                                          <p:stCondLst>
+                                            <p:cond delay="0"/>
+                                          </p:stCondLst>
+                                        </p:cTn>
+                                        <p:tgtEl>
+                                          <p:spTgt spid="8"/>
+                                        </p:tgtEl>
+                                        <p:attrNameLst>
+                                          <p:attrName>style.visibility</p:attrName>
+                                        </p:attrNameLst>
+                                      </p:cBhvr>
+                                      <p:to>
+                                        <p:strVal val="visible"/>
+                                      </p:to>
+                                    </p:set>
+                                    <p:anim calcmode="lin" valueType="num">
+                                      <p:cBhvr additive="base">
+                                        <p:cTn id="19" dur="500" fill="hold"/>
+                                        <p:tgtEl>
+                                          <p:spTgt spid="8"/>
+                                        </p:tgtEl>
+                                        <p:attrNameLst>
+                                          <p:attrName>ppt_x</p:attrName>
+                                        </p:attrNameLst>
+                                      </p:cBhvr>
+                                      <p:tavLst>
+                                        <p:tav tm="0">
+                                          <p:val>
+                                            <p:strVal val="#ppt_x"/>
+                                          </p:val>
+                                        </p:tav>
+                                        <p:tav tm="100000">
+                                          <p:val>
+                                            <p:strVal val="#ppt_x"/>
+                                          </p:val>
+                                        </p:tav>
+                                      </p:tavLst>
+                                    </p:anim>
+                                    <p:anim calcmode="lin" valueType="num">
+                                      <p:cBhvr additive="base">
+                                        <p:cTn id="20" dur="500" fill="hold"/>
+                                        <p:tgtEl>
+                                          <p:spTgt spid="8"/>
+                                        </p:tgtEl>
+                                        <p:attrNameLst>
+                                          <p:attrName>ppt_y</p:attrName>
+                                        </p:attrNameLst>
+                                      </p:cBhvr>
+                                      <p:tavLst>
+                                        <p:tav tm="0">
+                                          <p:val>
+                                            <p:strVal val="1+#ppt_h/2"/>
+                                          </p:val>
+                                        </p:tav>
+                                        <p:tav tm="100000">
+                                          <p:val>
+                                            <p:strVal val="#ppt_y"/>
+                                          </p:val>
+                                        </p:tav>
+                                      </p:tavLst>
+                                    </p:anim>
+                                  </p:childTnLst>
+                                </p:cTn>
+                              </p:par>
+                            </p:childTnLst>
+                          </p:cTn>
+                        </p:par>
+                      </p:childTnLst>
+                    </p:cTn>
+                  </p:par>
+                </p:childTnLst>
+              </p:cTn>
+              <p:prevCondLst>
+                <p:cond evt="onPrev" delay="0">
+                  <p:tgtEl>
+                    <p:sldTgt/>
+                  </p:tgtEl>
+                </p:cond>
+              </p:prevCondLst>
+              <p:nextCondLst>
+                <p:cond evt="onNext" delay="0">
+                  <p:tgtEl>
+                    <p:sldTgt/>
+                  </p:tgtEl>
+                </p:cond>
+              </p:nextCondLst>
+            </p:seq>
+          </p:childTnLst>
+        </p:cTn>
+      </p:par>
+    </p:tnLst>
+  </p:timing>
+</p:sld>
+</file>
+
+<file path=ppt/slides/slide8.xml><?xml version="1.0" encoding="utf-8"?>
 <p:sld xmlns:a="http://schemas.openxmlformats.org/drawingml/2006/main" xmlns:r="http://schemas.openxmlformats.org/officeDocument/2006/relationships" xmlns:p="http://schemas.openxmlformats.org/presentationml/2006/main">
   <p:cSld>
     <p:spTree>
@@ -15064,7 +16627,7 @@
 </p:sld>
 </file>
 
-<file path=ppt/slides/slide8.xml><?xml version="1.0" encoding="utf-8"?>
+<file path=ppt/slides/slide9.xml><?xml version="1.0" encoding="utf-8"?>
 <p:sld xmlns:a="http://schemas.openxmlformats.org/drawingml/2006/main" xmlns:r="http://schemas.openxmlformats.org/officeDocument/2006/relationships" xmlns:p="http://schemas.openxmlformats.org/presentationml/2006/main">
   <p:cSld>
     <p:spTree>
@@ -15453,1349 +17016,6 @@
   <p:clrMapOvr>
     <a:masterClrMapping/>
   </p:clrMapOvr>
-</p:sld>
-</file>
-
-<file path=ppt/slides/slide9.xml><?xml version="1.0" encoding="utf-8"?>
-<p:sld xmlns:a="http://schemas.openxmlformats.org/drawingml/2006/main" xmlns:r="http://schemas.openxmlformats.org/officeDocument/2006/relationships" xmlns:p="http://schemas.openxmlformats.org/presentationml/2006/main">
-  <p:cSld>
-    <p:spTree>
-      <p:nvGrpSpPr>
-        <p:cNvPr id="1" name=""/>
-        <p:cNvGrpSpPr/>
-        <p:nvPr/>
-      </p:nvGrpSpPr>
-      <p:grpSpPr>
-        <a:xfrm>
-          <a:off x="0" y="0"/>
-          <a:ext cx="0" cy="0"/>
-          <a:chOff x="0" y="0"/>
-          <a:chExt cx="0" cy="0"/>
-        </a:xfrm>
-      </p:grpSpPr>
-      <p:sp>
-        <p:nvSpPr>
-          <p:cNvPr id="2" name="Titolo 1">
-            <a:extLst>
-              <a:ext uri="{FF2B5EF4-FFF2-40B4-BE49-F238E27FC236}">
-                <a16:creationId xmlns:a16="http://schemas.microsoft.com/office/drawing/2014/main" id="{CDA77C0F-428A-8B4D-B18A-BC19217C36C7}"/>
-              </a:ext>
-            </a:extLst>
-          </p:cNvPr>
-          <p:cNvSpPr>
-            <a:spLocks noGrp="1"/>
-          </p:cNvSpPr>
-          <p:nvPr>
-            <p:ph type="title"/>
-          </p:nvPr>
-        </p:nvSpPr>
-        <p:spPr/>
-        <p:txBody>
-          <a:bodyPr/>
-          <a:lstStyle/>
-          <a:p>
-            <a:pPr algn="ctr"/>
-            <a:r>
-              <a:rPr lang="it-IT" dirty="0"/>
-              <a:t>WIREFRAME DELL’APP</a:t>
-            </a:r>
-          </a:p>
-        </p:txBody>
-      </p:sp>
-      <p:pic>
-        <p:nvPicPr>
-          <p:cNvPr id="4" name="Immagine 3" descr="Immagine che contiene testo, schermata, cerchio, logo&#10;&#10;Il contenuto generato dall'IA potrebbe non essere corretto.">
-            <a:extLst>
-              <a:ext uri="{FF2B5EF4-FFF2-40B4-BE49-F238E27FC236}">
-                <a16:creationId xmlns:a16="http://schemas.microsoft.com/office/drawing/2014/main" id="{217FE4B0-D712-635C-F1D1-D43A9F7986FC}"/>
-              </a:ext>
-            </a:extLst>
-          </p:cNvPr>
-          <p:cNvPicPr>
-            <a:picLocks noChangeAspect="1"/>
-          </p:cNvPicPr>
-          <p:nvPr/>
-        </p:nvPicPr>
-        <p:blipFill>
-          <a:blip r:embed="rId2"/>
-          <a:stretch>
-            <a:fillRect/>
-          </a:stretch>
-        </p:blipFill>
-        <p:spPr>
-          <a:xfrm>
-            <a:off x="533468" y="1019785"/>
-            <a:ext cx="830804" cy="1849143"/>
-          </a:xfrm>
-          <a:prstGeom prst="rect">
-            <a:avLst/>
-          </a:prstGeom>
-        </p:spPr>
-      </p:pic>
-      <p:pic>
-        <p:nvPicPr>
-          <p:cNvPr id="26" name="Immagine 25" descr="Immagine che contiene testo, schermata, Carattere, design&#10;&#10;Il contenuto generato dall'IA potrebbe non essere corretto.">
-            <a:extLst>
-              <a:ext uri="{FF2B5EF4-FFF2-40B4-BE49-F238E27FC236}">
-                <a16:creationId xmlns:a16="http://schemas.microsoft.com/office/drawing/2014/main" id="{EB8A02DE-DEB9-3CE5-085A-AEC786AC52A0}"/>
-              </a:ext>
-            </a:extLst>
-          </p:cNvPr>
-          <p:cNvPicPr>
-            <a:picLocks noChangeAspect="1"/>
-          </p:cNvPicPr>
-          <p:nvPr/>
-        </p:nvPicPr>
-        <p:blipFill>
-          <a:blip r:embed="rId3"/>
-          <a:stretch>
-            <a:fillRect/>
-          </a:stretch>
-        </p:blipFill>
-        <p:spPr>
-          <a:xfrm flipH="1">
-            <a:off x="2653483" y="3044883"/>
-            <a:ext cx="830802" cy="1849140"/>
-          </a:xfrm>
-          <a:prstGeom prst="rect">
-            <a:avLst/>
-          </a:prstGeom>
-        </p:spPr>
-      </p:pic>
-      <p:pic>
-        <p:nvPicPr>
-          <p:cNvPr id="28" name="Immagine 27" descr="Immagine che contiene testo, schermata, Carattere, design&#10;&#10;Il contenuto generato dall'IA potrebbe non essere corretto.">
-            <a:extLst>
-              <a:ext uri="{FF2B5EF4-FFF2-40B4-BE49-F238E27FC236}">
-                <a16:creationId xmlns:a16="http://schemas.microsoft.com/office/drawing/2014/main" id="{5A62DBC2-49C9-4D2B-5B8A-40074EE76EC3}"/>
-              </a:ext>
-            </a:extLst>
-          </p:cNvPr>
-          <p:cNvPicPr>
-            <a:picLocks noChangeAspect="1"/>
-          </p:cNvPicPr>
-          <p:nvPr/>
-        </p:nvPicPr>
-        <p:blipFill>
-          <a:blip r:embed="rId4"/>
-          <a:stretch>
-            <a:fillRect/>
-          </a:stretch>
-        </p:blipFill>
-        <p:spPr>
-          <a:xfrm>
-            <a:off x="5667200" y="1067394"/>
-            <a:ext cx="864552" cy="1924258"/>
-          </a:xfrm>
-          <a:prstGeom prst="rect">
-            <a:avLst/>
-          </a:prstGeom>
-        </p:spPr>
-      </p:pic>
-      <p:pic>
-        <p:nvPicPr>
-          <p:cNvPr id="30" name="Immagine 29" descr="Immagine che contiene testo, schermata, biglietto da visita, design&#10;&#10;Il contenuto generato dall'IA potrebbe non essere corretto.">
-            <a:extLst>
-              <a:ext uri="{FF2B5EF4-FFF2-40B4-BE49-F238E27FC236}">
-                <a16:creationId xmlns:a16="http://schemas.microsoft.com/office/drawing/2014/main" id="{030715D4-13A2-9A99-BC46-49964438FCE4}"/>
-              </a:ext>
-            </a:extLst>
-          </p:cNvPr>
-          <p:cNvPicPr>
-            <a:picLocks noChangeAspect="1"/>
-          </p:cNvPicPr>
-          <p:nvPr/>
-        </p:nvPicPr>
-        <p:blipFill>
-          <a:blip r:embed="rId5"/>
-          <a:stretch>
-            <a:fillRect/>
-          </a:stretch>
-        </p:blipFill>
-        <p:spPr>
-          <a:xfrm>
-            <a:off x="6774478" y="1057344"/>
-            <a:ext cx="864552" cy="1924259"/>
-          </a:xfrm>
-          <a:prstGeom prst="rect">
-            <a:avLst/>
-          </a:prstGeom>
-        </p:spPr>
-      </p:pic>
-      <p:pic>
-        <p:nvPicPr>
-          <p:cNvPr id="32" name="Immagine 31" descr="Immagine che contiene testo, schermata, Carattere, design&#10;&#10;Il contenuto generato dall'IA potrebbe non essere corretto.">
-            <a:extLst>
-              <a:ext uri="{FF2B5EF4-FFF2-40B4-BE49-F238E27FC236}">
-                <a16:creationId xmlns:a16="http://schemas.microsoft.com/office/drawing/2014/main" id="{B7D876EF-870A-461F-D6E3-AF266C3C95B9}"/>
-              </a:ext>
-            </a:extLst>
-          </p:cNvPr>
-          <p:cNvPicPr>
-            <a:picLocks noChangeAspect="1"/>
-          </p:cNvPicPr>
-          <p:nvPr/>
-        </p:nvPicPr>
-        <p:blipFill>
-          <a:blip r:embed="rId6"/>
-          <a:stretch>
-            <a:fillRect/>
-          </a:stretch>
-        </p:blipFill>
-        <p:spPr>
-          <a:xfrm>
-            <a:off x="4869823" y="3073459"/>
-            <a:ext cx="864553" cy="1924259"/>
-          </a:xfrm>
-          <a:prstGeom prst="rect">
-            <a:avLst/>
-          </a:prstGeom>
-        </p:spPr>
-      </p:pic>
-      <p:pic>
-        <p:nvPicPr>
-          <p:cNvPr id="34" name="Immagine 33" descr="Immagine che contiene testo, schermata, logo, design&#10;&#10;Il contenuto generato dall'IA potrebbe non essere corretto.">
-            <a:extLst>
-              <a:ext uri="{FF2B5EF4-FFF2-40B4-BE49-F238E27FC236}">
-                <a16:creationId xmlns:a16="http://schemas.microsoft.com/office/drawing/2014/main" id="{C5AF193D-71B0-A3F6-0501-C0D09EAB8DF2}"/>
-              </a:ext>
-            </a:extLst>
-          </p:cNvPr>
-          <p:cNvPicPr>
-            <a:picLocks noChangeAspect="1"/>
-          </p:cNvPicPr>
-          <p:nvPr/>
-        </p:nvPicPr>
-        <p:blipFill>
-          <a:blip r:embed="rId7"/>
-          <a:stretch>
-            <a:fillRect/>
-          </a:stretch>
-        </p:blipFill>
-        <p:spPr>
-          <a:xfrm>
-            <a:off x="2550270" y="1058737"/>
-            <a:ext cx="838875" cy="1867109"/>
-          </a:xfrm>
-          <a:prstGeom prst="rect">
-            <a:avLst/>
-          </a:prstGeom>
-        </p:spPr>
-      </p:pic>
-      <p:pic>
-        <p:nvPicPr>
-          <p:cNvPr id="36" name="Immagine 35" descr="Immagine che contiene testo, schermata, numero, Carattere&#10;&#10;Il contenuto generato dall'IA potrebbe non essere corretto.">
-            <a:extLst>
-              <a:ext uri="{FF2B5EF4-FFF2-40B4-BE49-F238E27FC236}">
-                <a16:creationId xmlns:a16="http://schemas.microsoft.com/office/drawing/2014/main" id="{9F8718C3-4DCB-1ED3-E28B-E299F8ED67A2}"/>
-              </a:ext>
-            </a:extLst>
-          </p:cNvPr>
-          <p:cNvPicPr>
-            <a:picLocks noChangeAspect="1"/>
-          </p:cNvPicPr>
-          <p:nvPr/>
-        </p:nvPicPr>
-        <p:blipFill>
-          <a:blip r:embed="rId8"/>
-          <a:stretch>
-            <a:fillRect/>
-          </a:stretch>
-        </p:blipFill>
-        <p:spPr>
-          <a:xfrm>
-            <a:off x="3757616" y="3073459"/>
-            <a:ext cx="838876" cy="1867109"/>
-          </a:xfrm>
-          <a:prstGeom prst="rect">
-            <a:avLst/>
-          </a:prstGeom>
-        </p:spPr>
-      </p:pic>
-      <p:pic>
-        <p:nvPicPr>
-          <p:cNvPr id="38" name="Immagine 37" descr="Immagine che contiene testo, schermata, cerchio, Carattere&#10;&#10;Il contenuto generato dall'IA potrebbe non essere corretto.">
-            <a:extLst>
-              <a:ext uri="{FF2B5EF4-FFF2-40B4-BE49-F238E27FC236}">
-                <a16:creationId xmlns:a16="http://schemas.microsoft.com/office/drawing/2014/main" id="{81F0ABAE-28AE-C04C-9E3D-B61298F422DF}"/>
-              </a:ext>
-            </a:extLst>
-          </p:cNvPr>
-          <p:cNvPicPr>
-            <a:picLocks noChangeAspect="1"/>
-          </p:cNvPicPr>
-          <p:nvPr/>
-        </p:nvPicPr>
-        <p:blipFill>
-          <a:blip r:embed="rId9"/>
-          <a:stretch>
-            <a:fillRect/>
-          </a:stretch>
-        </p:blipFill>
-        <p:spPr>
-          <a:xfrm>
-            <a:off x="4633612" y="1048800"/>
-            <a:ext cx="838876" cy="1867109"/>
-          </a:xfrm>
-          <a:prstGeom prst="rect">
-            <a:avLst/>
-          </a:prstGeom>
-        </p:spPr>
-      </p:pic>
-      <p:pic>
-        <p:nvPicPr>
-          <p:cNvPr id="40" name="Immagine 39" descr="Immagine che contiene testo, schermata, grafica, logo&#10;&#10;Il contenuto generato dall'IA potrebbe non essere corretto.">
-            <a:extLst>
-              <a:ext uri="{FF2B5EF4-FFF2-40B4-BE49-F238E27FC236}">
-                <a16:creationId xmlns:a16="http://schemas.microsoft.com/office/drawing/2014/main" id="{5938B6A7-133E-B8E0-A180-2A475E9BADA9}"/>
-              </a:ext>
-            </a:extLst>
-          </p:cNvPr>
-          <p:cNvPicPr>
-            <a:picLocks noChangeAspect="1"/>
-          </p:cNvPicPr>
-          <p:nvPr/>
-        </p:nvPicPr>
-        <p:blipFill>
-          <a:blip r:embed="rId10"/>
-          <a:stretch>
-            <a:fillRect/>
-          </a:stretch>
-        </p:blipFill>
-        <p:spPr>
-          <a:xfrm>
-            <a:off x="7875587" y="1057344"/>
-            <a:ext cx="830803" cy="1849140"/>
-          </a:xfrm>
-          <a:prstGeom prst="rect">
-            <a:avLst/>
-          </a:prstGeom>
-        </p:spPr>
-      </p:pic>
-      <p:pic>
-        <p:nvPicPr>
-          <p:cNvPr id="42" name="Immagine 41" descr="Immagine che contiene testo, schermata, cerchio, Elementi grafici&#10;&#10;Il contenuto generato dall'IA potrebbe non essere corretto.">
-            <a:extLst>
-              <a:ext uri="{FF2B5EF4-FFF2-40B4-BE49-F238E27FC236}">
-                <a16:creationId xmlns:a16="http://schemas.microsoft.com/office/drawing/2014/main" id="{AC90764F-519C-F11F-4791-3F7545F71713}"/>
-              </a:ext>
-            </a:extLst>
-          </p:cNvPr>
-          <p:cNvPicPr>
-            <a:picLocks noChangeAspect="1"/>
-          </p:cNvPicPr>
-          <p:nvPr/>
-        </p:nvPicPr>
-        <p:blipFill>
-          <a:blip r:embed="rId11"/>
-          <a:stretch>
-            <a:fillRect/>
-          </a:stretch>
-        </p:blipFill>
-        <p:spPr>
-          <a:xfrm>
-            <a:off x="3528047" y="1039005"/>
-            <a:ext cx="890062" cy="1981036"/>
-          </a:xfrm>
-          <a:prstGeom prst="rect">
-            <a:avLst/>
-          </a:prstGeom>
-        </p:spPr>
-      </p:pic>
-      <p:pic>
-        <p:nvPicPr>
-          <p:cNvPr id="44" name="Immagine 43" descr="Immagine che contiene testo, schermata, Carattere, design&#10;&#10;Il contenuto generato dall'IA potrebbe non essere corretto.">
-            <a:extLst>
-              <a:ext uri="{FF2B5EF4-FFF2-40B4-BE49-F238E27FC236}">
-                <a16:creationId xmlns:a16="http://schemas.microsoft.com/office/drawing/2014/main" id="{D54A1AA3-F9D8-A2C5-A901-76D1109BB44B}"/>
-              </a:ext>
-            </a:extLst>
-          </p:cNvPr>
-          <p:cNvPicPr>
-            <a:picLocks noChangeAspect="1"/>
-          </p:cNvPicPr>
-          <p:nvPr/>
-        </p:nvPicPr>
-        <p:blipFill>
-          <a:blip r:embed="rId12"/>
-          <a:stretch>
-            <a:fillRect/>
-          </a:stretch>
-        </p:blipFill>
-        <p:spPr>
-          <a:xfrm>
-            <a:off x="6008393" y="3073460"/>
-            <a:ext cx="864552" cy="1924258"/>
-          </a:xfrm>
-          <a:prstGeom prst="rect">
-            <a:avLst/>
-          </a:prstGeom>
-        </p:spPr>
-      </p:pic>
-      <p:pic>
-        <p:nvPicPr>
-          <p:cNvPr id="46" name="Immagine 45" descr="Immagine che contiene testo, schermata, cerchio, design&#10;&#10;Il contenuto generato dall'IA potrebbe non essere corretto.">
-            <a:extLst>
-              <a:ext uri="{FF2B5EF4-FFF2-40B4-BE49-F238E27FC236}">
-                <a16:creationId xmlns:a16="http://schemas.microsoft.com/office/drawing/2014/main" id="{0BC4043E-2ACA-8C92-2EA6-1753C6C170A0}"/>
-              </a:ext>
-            </a:extLst>
-          </p:cNvPr>
-          <p:cNvPicPr>
-            <a:picLocks noChangeAspect="1"/>
-          </p:cNvPicPr>
-          <p:nvPr/>
-        </p:nvPicPr>
-        <p:blipFill>
-          <a:blip r:embed="rId13"/>
-          <a:stretch>
-            <a:fillRect/>
-          </a:stretch>
-        </p:blipFill>
-        <p:spPr>
-          <a:xfrm>
-            <a:off x="1524994" y="1035021"/>
-            <a:ext cx="864553" cy="1924261"/>
-          </a:xfrm>
-          <a:prstGeom prst="rect">
-            <a:avLst/>
-          </a:prstGeom>
-        </p:spPr>
-      </p:pic>
-    </p:spTree>
-    <p:extLst>
-      <p:ext uri="{BB962C8B-B14F-4D97-AF65-F5344CB8AC3E}">
-        <p14:creationId xmlns:p14="http://schemas.microsoft.com/office/powerpoint/2010/main" val="2210377371"/>
-      </p:ext>
-    </p:extLst>
-  </p:cSld>
-  <p:clrMapOvr>
-    <a:masterClrMapping/>
-  </p:clrMapOvr>
-  <p:timing>
-    <p:tnLst>
-      <p:par>
-        <p:cTn id="1" dur="indefinite" restart="never" nodeType="tmRoot">
-          <p:childTnLst>
-            <p:seq concurrent="1" nextAc="seek">
-              <p:cTn id="2" dur="indefinite" nodeType="mainSeq">
-                <p:childTnLst>
-                  <p:par>
-                    <p:cTn id="3" fill="hold">
-                      <p:stCondLst>
-                        <p:cond delay="indefinite"/>
-                      </p:stCondLst>
-                      <p:childTnLst>
-                        <p:par>
-                          <p:cTn id="4" fill="hold">
-                            <p:stCondLst>
-                              <p:cond delay="0"/>
-                            </p:stCondLst>
-                            <p:childTnLst>
-                              <p:par>
-                                <p:cTn id="5" presetID="2" presetClass="entr" presetSubtype="4" fill="hold" nodeType="clickEffect">
-                                  <p:stCondLst>
-                                    <p:cond delay="0"/>
-                                  </p:stCondLst>
-                                  <p:childTnLst>
-                                    <p:set>
-                                      <p:cBhvr>
-                                        <p:cTn id="6" dur="1" fill="hold">
-                                          <p:stCondLst>
-                                            <p:cond delay="0"/>
-                                          </p:stCondLst>
-                                        </p:cTn>
-                                        <p:tgtEl>
-                                          <p:spTgt spid="4"/>
-                                        </p:tgtEl>
-                                        <p:attrNameLst>
-                                          <p:attrName>style.visibility</p:attrName>
-                                        </p:attrNameLst>
-                                      </p:cBhvr>
-                                      <p:to>
-                                        <p:strVal val="visible"/>
-                                      </p:to>
-                                    </p:set>
-                                    <p:anim calcmode="lin" valueType="num">
-                                      <p:cBhvr additive="base">
-                                        <p:cTn id="7" dur="500" fill="hold"/>
-                                        <p:tgtEl>
-                                          <p:spTgt spid="4"/>
-                                        </p:tgtEl>
-                                        <p:attrNameLst>
-                                          <p:attrName>ppt_x</p:attrName>
-                                        </p:attrNameLst>
-                                      </p:cBhvr>
-                                      <p:tavLst>
-                                        <p:tav tm="0">
-                                          <p:val>
-                                            <p:strVal val="#ppt_x"/>
-                                          </p:val>
-                                        </p:tav>
-                                        <p:tav tm="100000">
-                                          <p:val>
-                                            <p:strVal val="#ppt_x"/>
-                                          </p:val>
-                                        </p:tav>
-                                      </p:tavLst>
-                                    </p:anim>
-                                    <p:anim calcmode="lin" valueType="num">
-                                      <p:cBhvr additive="base">
-                                        <p:cTn id="8" dur="500" fill="hold"/>
-                                        <p:tgtEl>
-                                          <p:spTgt spid="4"/>
-                                        </p:tgtEl>
-                                        <p:attrNameLst>
-                                          <p:attrName>ppt_y</p:attrName>
-                                        </p:attrNameLst>
-                                      </p:cBhvr>
-                                      <p:tavLst>
-                                        <p:tav tm="0">
-                                          <p:val>
-                                            <p:strVal val="1+#ppt_h/2"/>
-                                          </p:val>
-                                        </p:tav>
-                                        <p:tav tm="100000">
-                                          <p:val>
-                                            <p:strVal val="#ppt_y"/>
-                                          </p:val>
-                                        </p:tav>
-                                      </p:tavLst>
-                                    </p:anim>
-                                  </p:childTnLst>
-                                </p:cTn>
-                              </p:par>
-                              <p:par>
-                                <p:cTn id="9" presetID="2" presetClass="entr" presetSubtype="4" fill="hold" nodeType="withEffect">
-                                  <p:stCondLst>
-                                    <p:cond delay="0"/>
-                                  </p:stCondLst>
-                                  <p:childTnLst>
-                                    <p:set>
-                                      <p:cBhvr>
-                                        <p:cTn id="10" dur="1" fill="hold">
-                                          <p:stCondLst>
-                                            <p:cond delay="0"/>
-                                          </p:stCondLst>
-                                        </p:cTn>
-                                        <p:tgtEl>
-                                          <p:spTgt spid="46"/>
-                                        </p:tgtEl>
-                                        <p:attrNameLst>
-                                          <p:attrName>style.visibility</p:attrName>
-                                        </p:attrNameLst>
-                                      </p:cBhvr>
-                                      <p:to>
-                                        <p:strVal val="visible"/>
-                                      </p:to>
-                                    </p:set>
-                                    <p:anim calcmode="lin" valueType="num">
-                                      <p:cBhvr additive="base">
-                                        <p:cTn id="11" dur="500" fill="hold"/>
-                                        <p:tgtEl>
-                                          <p:spTgt spid="46"/>
-                                        </p:tgtEl>
-                                        <p:attrNameLst>
-                                          <p:attrName>ppt_x</p:attrName>
-                                        </p:attrNameLst>
-                                      </p:cBhvr>
-                                      <p:tavLst>
-                                        <p:tav tm="0">
-                                          <p:val>
-                                            <p:strVal val="#ppt_x"/>
-                                          </p:val>
-                                        </p:tav>
-                                        <p:tav tm="100000">
-                                          <p:val>
-                                            <p:strVal val="#ppt_x"/>
-                                          </p:val>
-                                        </p:tav>
-                                      </p:tavLst>
-                                    </p:anim>
-                                    <p:anim calcmode="lin" valueType="num">
-                                      <p:cBhvr additive="base">
-                                        <p:cTn id="12" dur="500" fill="hold"/>
-                                        <p:tgtEl>
-                                          <p:spTgt spid="46"/>
-                                        </p:tgtEl>
-                                        <p:attrNameLst>
-                                          <p:attrName>ppt_y</p:attrName>
-                                        </p:attrNameLst>
-                                      </p:cBhvr>
-                                      <p:tavLst>
-                                        <p:tav tm="0">
-                                          <p:val>
-                                            <p:strVal val="1+#ppt_h/2"/>
-                                          </p:val>
-                                        </p:tav>
-                                        <p:tav tm="100000">
-                                          <p:val>
-                                            <p:strVal val="#ppt_y"/>
-                                          </p:val>
-                                        </p:tav>
-                                      </p:tavLst>
-                                    </p:anim>
-                                  </p:childTnLst>
-                                </p:cTn>
-                              </p:par>
-                              <p:par>
-                                <p:cTn id="13" presetID="2" presetClass="entr" presetSubtype="4" fill="hold" nodeType="withEffect">
-                                  <p:stCondLst>
-                                    <p:cond delay="0"/>
-                                  </p:stCondLst>
-                                  <p:childTnLst>
-                                    <p:set>
-                                      <p:cBhvr>
-                                        <p:cTn id="14" dur="1" fill="hold">
-                                          <p:stCondLst>
-                                            <p:cond delay="0"/>
-                                          </p:stCondLst>
-                                        </p:cTn>
-                                        <p:tgtEl>
-                                          <p:spTgt spid="34"/>
-                                        </p:tgtEl>
-                                        <p:attrNameLst>
-                                          <p:attrName>style.visibility</p:attrName>
-                                        </p:attrNameLst>
-                                      </p:cBhvr>
-                                      <p:to>
-                                        <p:strVal val="visible"/>
-                                      </p:to>
-                                    </p:set>
-                                    <p:anim calcmode="lin" valueType="num">
-                                      <p:cBhvr additive="base">
-                                        <p:cTn id="15" dur="500" fill="hold"/>
-                                        <p:tgtEl>
-                                          <p:spTgt spid="34"/>
-                                        </p:tgtEl>
-                                        <p:attrNameLst>
-                                          <p:attrName>ppt_x</p:attrName>
-                                        </p:attrNameLst>
-                                      </p:cBhvr>
-                                      <p:tavLst>
-                                        <p:tav tm="0">
-                                          <p:val>
-                                            <p:strVal val="#ppt_x"/>
-                                          </p:val>
-                                        </p:tav>
-                                        <p:tav tm="100000">
-                                          <p:val>
-                                            <p:strVal val="#ppt_x"/>
-                                          </p:val>
-                                        </p:tav>
-                                      </p:tavLst>
-                                    </p:anim>
-                                    <p:anim calcmode="lin" valueType="num">
-                                      <p:cBhvr additive="base">
-                                        <p:cTn id="16" dur="500" fill="hold"/>
-                                        <p:tgtEl>
-                                          <p:spTgt spid="34"/>
-                                        </p:tgtEl>
-                                        <p:attrNameLst>
-                                          <p:attrName>ppt_y</p:attrName>
-                                        </p:attrNameLst>
-                                      </p:cBhvr>
-                                      <p:tavLst>
-                                        <p:tav tm="0">
-                                          <p:val>
-                                            <p:strVal val="1+#ppt_h/2"/>
-                                          </p:val>
-                                        </p:tav>
-                                        <p:tav tm="100000">
-                                          <p:val>
-                                            <p:strVal val="#ppt_y"/>
-                                          </p:val>
-                                        </p:tav>
-                                      </p:tavLst>
-                                    </p:anim>
-                                  </p:childTnLst>
-                                </p:cTn>
-                              </p:par>
-                              <p:par>
-                                <p:cTn id="17" presetID="2" presetClass="entr" presetSubtype="4" fill="hold" nodeType="withEffect">
-                                  <p:stCondLst>
-                                    <p:cond delay="0"/>
-                                  </p:stCondLst>
-                                  <p:childTnLst>
-                                    <p:set>
-                                      <p:cBhvr>
-                                        <p:cTn id="18" dur="1" fill="hold">
-                                          <p:stCondLst>
-                                            <p:cond delay="0"/>
-                                          </p:stCondLst>
-                                        </p:cTn>
-                                        <p:tgtEl>
-                                          <p:spTgt spid="42"/>
-                                        </p:tgtEl>
-                                        <p:attrNameLst>
-                                          <p:attrName>style.visibility</p:attrName>
-                                        </p:attrNameLst>
-                                      </p:cBhvr>
-                                      <p:to>
-                                        <p:strVal val="visible"/>
-                                      </p:to>
-                                    </p:set>
-                                    <p:anim calcmode="lin" valueType="num">
-                                      <p:cBhvr additive="base">
-                                        <p:cTn id="19" dur="500" fill="hold"/>
-                                        <p:tgtEl>
-                                          <p:spTgt spid="42"/>
-                                        </p:tgtEl>
-                                        <p:attrNameLst>
-                                          <p:attrName>ppt_x</p:attrName>
-                                        </p:attrNameLst>
-                                      </p:cBhvr>
-                                      <p:tavLst>
-                                        <p:tav tm="0">
-                                          <p:val>
-                                            <p:strVal val="#ppt_x"/>
-                                          </p:val>
-                                        </p:tav>
-                                        <p:tav tm="100000">
-                                          <p:val>
-                                            <p:strVal val="#ppt_x"/>
-                                          </p:val>
-                                        </p:tav>
-                                      </p:tavLst>
-                                    </p:anim>
-                                    <p:anim calcmode="lin" valueType="num">
-                                      <p:cBhvr additive="base">
-                                        <p:cTn id="20" dur="500" fill="hold"/>
-                                        <p:tgtEl>
-                                          <p:spTgt spid="42"/>
-                                        </p:tgtEl>
-                                        <p:attrNameLst>
-                                          <p:attrName>ppt_y</p:attrName>
-                                        </p:attrNameLst>
-                                      </p:cBhvr>
-                                      <p:tavLst>
-                                        <p:tav tm="0">
-                                          <p:val>
-                                            <p:strVal val="1+#ppt_h/2"/>
-                                          </p:val>
-                                        </p:tav>
-                                        <p:tav tm="100000">
-                                          <p:val>
-                                            <p:strVal val="#ppt_y"/>
-                                          </p:val>
-                                        </p:tav>
-                                      </p:tavLst>
-                                    </p:anim>
-                                  </p:childTnLst>
-                                </p:cTn>
-                              </p:par>
-                              <p:par>
-                                <p:cTn id="21" presetID="2" presetClass="entr" presetSubtype="4" fill="hold" nodeType="withEffect">
-                                  <p:stCondLst>
-                                    <p:cond delay="0"/>
-                                  </p:stCondLst>
-                                  <p:childTnLst>
-                                    <p:set>
-                                      <p:cBhvr>
-                                        <p:cTn id="22" dur="1" fill="hold">
-                                          <p:stCondLst>
-                                            <p:cond delay="0"/>
-                                          </p:stCondLst>
-                                        </p:cTn>
-                                        <p:tgtEl>
-                                          <p:spTgt spid="38"/>
-                                        </p:tgtEl>
-                                        <p:attrNameLst>
-                                          <p:attrName>style.visibility</p:attrName>
-                                        </p:attrNameLst>
-                                      </p:cBhvr>
-                                      <p:to>
-                                        <p:strVal val="visible"/>
-                                      </p:to>
-                                    </p:set>
-                                    <p:anim calcmode="lin" valueType="num">
-                                      <p:cBhvr additive="base">
-                                        <p:cTn id="23" dur="500" fill="hold"/>
-                                        <p:tgtEl>
-                                          <p:spTgt spid="38"/>
-                                        </p:tgtEl>
-                                        <p:attrNameLst>
-                                          <p:attrName>ppt_x</p:attrName>
-                                        </p:attrNameLst>
-                                      </p:cBhvr>
-                                      <p:tavLst>
-                                        <p:tav tm="0">
-                                          <p:val>
-                                            <p:strVal val="#ppt_x"/>
-                                          </p:val>
-                                        </p:tav>
-                                        <p:tav tm="100000">
-                                          <p:val>
-                                            <p:strVal val="#ppt_x"/>
-                                          </p:val>
-                                        </p:tav>
-                                      </p:tavLst>
-                                    </p:anim>
-                                    <p:anim calcmode="lin" valueType="num">
-                                      <p:cBhvr additive="base">
-                                        <p:cTn id="24" dur="500" fill="hold"/>
-                                        <p:tgtEl>
-                                          <p:spTgt spid="38"/>
-                                        </p:tgtEl>
-                                        <p:attrNameLst>
-                                          <p:attrName>ppt_y</p:attrName>
-                                        </p:attrNameLst>
-                                      </p:cBhvr>
-                                      <p:tavLst>
-                                        <p:tav tm="0">
-                                          <p:val>
-                                            <p:strVal val="1+#ppt_h/2"/>
-                                          </p:val>
-                                        </p:tav>
-                                        <p:tav tm="100000">
-                                          <p:val>
-                                            <p:strVal val="#ppt_y"/>
-                                          </p:val>
-                                        </p:tav>
-                                      </p:tavLst>
-                                    </p:anim>
-                                  </p:childTnLst>
-                                </p:cTn>
-                              </p:par>
-                              <p:par>
-                                <p:cTn id="25" presetID="2" presetClass="entr" presetSubtype="4" fill="hold" nodeType="withEffect">
-                                  <p:stCondLst>
-                                    <p:cond delay="0"/>
-                                  </p:stCondLst>
-                                  <p:childTnLst>
-                                    <p:set>
-                                      <p:cBhvr>
-                                        <p:cTn id="26" dur="1" fill="hold">
-                                          <p:stCondLst>
-                                            <p:cond delay="0"/>
-                                          </p:stCondLst>
-                                        </p:cTn>
-                                        <p:tgtEl>
-                                          <p:spTgt spid="28"/>
-                                        </p:tgtEl>
-                                        <p:attrNameLst>
-                                          <p:attrName>style.visibility</p:attrName>
-                                        </p:attrNameLst>
-                                      </p:cBhvr>
-                                      <p:to>
-                                        <p:strVal val="visible"/>
-                                      </p:to>
-                                    </p:set>
-                                    <p:anim calcmode="lin" valueType="num">
-                                      <p:cBhvr additive="base">
-                                        <p:cTn id="27" dur="500" fill="hold"/>
-                                        <p:tgtEl>
-                                          <p:spTgt spid="28"/>
-                                        </p:tgtEl>
-                                        <p:attrNameLst>
-                                          <p:attrName>ppt_x</p:attrName>
-                                        </p:attrNameLst>
-                                      </p:cBhvr>
-                                      <p:tavLst>
-                                        <p:tav tm="0">
-                                          <p:val>
-                                            <p:strVal val="#ppt_x"/>
-                                          </p:val>
-                                        </p:tav>
-                                        <p:tav tm="100000">
-                                          <p:val>
-                                            <p:strVal val="#ppt_x"/>
-                                          </p:val>
-                                        </p:tav>
-                                      </p:tavLst>
-                                    </p:anim>
-                                    <p:anim calcmode="lin" valueType="num">
-                                      <p:cBhvr additive="base">
-                                        <p:cTn id="28" dur="500" fill="hold"/>
-                                        <p:tgtEl>
-                                          <p:spTgt spid="28"/>
-                                        </p:tgtEl>
-                                        <p:attrNameLst>
-                                          <p:attrName>ppt_y</p:attrName>
-                                        </p:attrNameLst>
-                                      </p:cBhvr>
-                                      <p:tavLst>
-                                        <p:tav tm="0">
-                                          <p:val>
-                                            <p:strVal val="1+#ppt_h/2"/>
-                                          </p:val>
-                                        </p:tav>
-                                        <p:tav tm="100000">
-                                          <p:val>
-                                            <p:strVal val="#ppt_y"/>
-                                          </p:val>
-                                        </p:tav>
-                                      </p:tavLst>
-                                    </p:anim>
-                                  </p:childTnLst>
-                                </p:cTn>
-                              </p:par>
-                              <p:par>
-                                <p:cTn id="29" presetID="2" presetClass="entr" presetSubtype="4" fill="hold" nodeType="withEffect">
-                                  <p:stCondLst>
-                                    <p:cond delay="0"/>
-                                  </p:stCondLst>
-                                  <p:childTnLst>
-                                    <p:set>
-                                      <p:cBhvr>
-                                        <p:cTn id="30" dur="1" fill="hold">
-                                          <p:stCondLst>
-                                            <p:cond delay="0"/>
-                                          </p:stCondLst>
-                                        </p:cTn>
-                                        <p:tgtEl>
-                                          <p:spTgt spid="30"/>
-                                        </p:tgtEl>
-                                        <p:attrNameLst>
-                                          <p:attrName>style.visibility</p:attrName>
-                                        </p:attrNameLst>
-                                      </p:cBhvr>
-                                      <p:to>
-                                        <p:strVal val="visible"/>
-                                      </p:to>
-                                    </p:set>
-                                    <p:anim calcmode="lin" valueType="num">
-                                      <p:cBhvr additive="base">
-                                        <p:cTn id="31" dur="500" fill="hold"/>
-                                        <p:tgtEl>
-                                          <p:spTgt spid="30"/>
-                                        </p:tgtEl>
-                                        <p:attrNameLst>
-                                          <p:attrName>ppt_x</p:attrName>
-                                        </p:attrNameLst>
-                                      </p:cBhvr>
-                                      <p:tavLst>
-                                        <p:tav tm="0">
-                                          <p:val>
-                                            <p:strVal val="#ppt_x"/>
-                                          </p:val>
-                                        </p:tav>
-                                        <p:tav tm="100000">
-                                          <p:val>
-                                            <p:strVal val="#ppt_x"/>
-                                          </p:val>
-                                        </p:tav>
-                                      </p:tavLst>
-                                    </p:anim>
-                                    <p:anim calcmode="lin" valueType="num">
-                                      <p:cBhvr additive="base">
-                                        <p:cTn id="32" dur="500" fill="hold"/>
-                                        <p:tgtEl>
-                                          <p:spTgt spid="30"/>
-                                        </p:tgtEl>
-                                        <p:attrNameLst>
-                                          <p:attrName>ppt_y</p:attrName>
-                                        </p:attrNameLst>
-                                      </p:cBhvr>
-                                      <p:tavLst>
-                                        <p:tav tm="0">
-                                          <p:val>
-                                            <p:strVal val="1+#ppt_h/2"/>
-                                          </p:val>
-                                        </p:tav>
-                                        <p:tav tm="100000">
-                                          <p:val>
-                                            <p:strVal val="#ppt_y"/>
-                                          </p:val>
-                                        </p:tav>
-                                      </p:tavLst>
-                                    </p:anim>
-                                  </p:childTnLst>
-                                </p:cTn>
-                              </p:par>
-                              <p:par>
-                                <p:cTn id="33" presetID="2" presetClass="entr" presetSubtype="4" fill="hold" nodeType="withEffect">
-                                  <p:stCondLst>
-                                    <p:cond delay="0"/>
-                                  </p:stCondLst>
-                                  <p:childTnLst>
-                                    <p:set>
-                                      <p:cBhvr>
-                                        <p:cTn id="34" dur="1" fill="hold">
-                                          <p:stCondLst>
-                                            <p:cond delay="0"/>
-                                          </p:stCondLst>
-                                        </p:cTn>
-                                        <p:tgtEl>
-                                          <p:spTgt spid="40"/>
-                                        </p:tgtEl>
-                                        <p:attrNameLst>
-                                          <p:attrName>style.visibility</p:attrName>
-                                        </p:attrNameLst>
-                                      </p:cBhvr>
-                                      <p:to>
-                                        <p:strVal val="visible"/>
-                                      </p:to>
-                                    </p:set>
-                                    <p:anim calcmode="lin" valueType="num">
-                                      <p:cBhvr additive="base">
-                                        <p:cTn id="35" dur="500" fill="hold"/>
-                                        <p:tgtEl>
-                                          <p:spTgt spid="40"/>
-                                        </p:tgtEl>
-                                        <p:attrNameLst>
-                                          <p:attrName>ppt_x</p:attrName>
-                                        </p:attrNameLst>
-                                      </p:cBhvr>
-                                      <p:tavLst>
-                                        <p:tav tm="0">
-                                          <p:val>
-                                            <p:strVal val="#ppt_x"/>
-                                          </p:val>
-                                        </p:tav>
-                                        <p:tav tm="100000">
-                                          <p:val>
-                                            <p:strVal val="#ppt_x"/>
-                                          </p:val>
-                                        </p:tav>
-                                      </p:tavLst>
-                                    </p:anim>
-                                    <p:anim calcmode="lin" valueType="num">
-                                      <p:cBhvr additive="base">
-                                        <p:cTn id="36" dur="500" fill="hold"/>
-                                        <p:tgtEl>
-                                          <p:spTgt spid="40"/>
-                                        </p:tgtEl>
-                                        <p:attrNameLst>
-                                          <p:attrName>ppt_y</p:attrName>
-                                        </p:attrNameLst>
-                                      </p:cBhvr>
-                                      <p:tavLst>
-                                        <p:tav tm="0">
-                                          <p:val>
-                                            <p:strVal val="1+#ppt_h/2"/>
-                                          </p:val>
-                                        </p:tav>
-                                        <p:tav tm="100000">
-                                          <p:val>
-                                            <p:strVal val="#ppt_y"/>
-                                          </p:val>
-                                        </p:tav>
-                                      </p:tavLst>
-                                    </p:anim>
-                                  </p:childTnLst>
-                                </p:cTn>
-                              </p:par>
-                              <p:par>
-                                <p:cTn id="37" presetID="2" presetClass="entr" presetSubtype="4" fill="hold" nodeType="withEffect">
-                                  <p:stCondLst>
-                                    <p:cond delay="0"/>
-                                  </p:stCondLst>
-                                  <p:childTnLst>
-                                    <p:set>
-                                      <p:cBhvr>
-                                        <p:cTn id="38" dur="1" fill="hold">
-                                          <p:stCondLst>
-                                            <p:cond delay="0"/>
-                                          </p:stCondLst>
-                                        </p:cTn>
-                                        <p:tgtEl>
-                                          <p:spTgt spid="26"/>
-                                        </p:tgtEl>
-                                        <p:attrNameLst>
-                                          <p:attrName>style.visibility</p:attrName>
-                                        </p:attrNameLst>
-                                      </p:cBhvr>
-                                      <p:to>
-                                        <p:strVal val="visible"/>
-                                      </p:to>
-                                    </p:set>
-                                    <p:anim calcmode="lin" valueType="num">
-                                      <p:cBhvr additive="base">
-                                        <p:cTn id="39" dur="500" fill="hold"/>
-                                        <p:tgtEl>
-                                          <p:spTgt spid="26"/>
-                                        </p:tgtEl>
-                                        <p:attrNameLst>
-                                          <p:attrName>ppt_x</p:attrName>
-                                        </p:attrNameLst>
-                                      </p:cBhvr>
-                                      <p:tavLst>
-                                        <p:tav tm="0">
-                                          <p:val>
-                                            <p:strVal val="#ppt_x"/>
-                                          </p:val>
-                                        </p:tav>
-                                        <p:tav tm="100000">
-                                          <p:val>
-                                            <p:strVal val="#ppt_x"/>
-                                          </p:val>
-                                        </p:tav>
-                                      </p:tavLst>
-                                    </p:anim>
-                                    <p:anim calcmode="lin" valueType="num">
-                                      <p:cBhvr additive="base">
-                                        <p:cTn id="40" dur="500" fill="hold"/>
-                                        <p:tgtEl>
-                                          <p:spTgt spid="26"/>
-                                        </p:tgtEl>
-                                        <p:attrNameLst>
-                                          <p:attrName>ppt_y</p:attrName>
-                                        </p:attrNameLst>
-                                      </p:cBhvr>
-                                      <p:tavLst>
-                                        <p:tav tm="0">
-                                          <p:val>
-                                            <p:strVal val="1+#ppt_h/2"/>
-                                          </p:val>
-                                        </p:tav>
-                                        <p:tav tm="100000">
-                                          <p:val>
-                                            <p:strVal val="#ppt_y"/>
-                                          </p:val>
-                                        </p:tav>
-                                      </p:tavLst>
-                                    </p:anim>
-                                  </p:childTnLst>
-                                </p:cTn>
-                              </p:par>
-                              <p:par>
-                                <p:cTn id="41" presetID="2" presetClass="entr" presetSubtype="4" fill="hold" nodeType="withEffect">
-                                  <p:stCondLst>
-                                    <p:cond delay="0"/>
-                                  </p:stCondLst>
-                                  <p:childTnLst>
-                                    <p:set>
-                                      <p:cBhvr>
-                                        <p:cTn id="42" dur="1" fill="hold">
-                                          <p:stCondLst>
-                                            <p:cond delay="0"/>
-                                          </p:stCondLst>
-                                        </p:cTn>
-                                        <p:tgtEl>
-                                          <p:spTgt spid="36"/>
-                                        </p:tgtEl>
-                                        <p:attrNameLst>
-                                          <p:attrName>style.visibility</p:attrName>
-                                        </p:attrNameLst>
-                                      </p:cBhvr>
-                                      <p:to>
-                                        <p:strVal val="visible"/>
-                                      </p:to>
-                                    </p:set>
-                                    <p:anim calcmode="lin" valueType="num">
-                                      <p:cBhvr additive="base">
-                                        <p:cTn id="43" dur="500" fill="hold"/>
-                                        <p:tgtEl>
-                                          <p:spTgt spid="36"/>
-                                        </p:tgtEl>
-                                        <p:attrNameLst>
-                                          <p:attrName>ppt_x</p:attrName>
-                                        </p:attrNameLst>
-                                      </p:cBhvr>
-                                      <p:tavLst>
-                                        <p:tav tm="0">
-                                          <p:val>
-                                            <p:strVal val="#ppt_x"/>
-                                          </p:val>
-                                        </p:tav>
-                                        <p:tav tm="100000">
-                                          <p:val>
-                                            <p:strVal val="#ppt_x"/>
-                                          </p:val>
-                                        </p:tav>
-                                      </p:tavLst>
-                                    </p:anim>
-                                    <p:anim calcmode="lin" valueType="num">
-                                      <p:cBhvr additive="base">
-                                        <p:cTn id="44" dur="500" fill="hold"/>
-                                        <p:tgtEl>
-                                          <p:spTgt spid="36"/>
-                                        </p:tgtEl>
-                                        <p:attrNameLst>
-                                          <p:attrName>ppt_y</p:attrName>
-                                        </p:attrNameLst>
-                                      </p:cBhvr>
-                                      <p:tavLst>
-                                        <p:tav tm="0">
-                                          <p:val>
-                                            <p:strVal val="1+#ppt_h/2"/>
-                                          </p:val>
-                                        </p:tav>
-                                        <p:tav tm="100000">
-                                          <p:val>
-                                            <p:strVal val="#ppt_y"/>
-                                          </p:val>
-                                        </p:tav>
-                                      </p:tavLst>
-                                    </p:anim>
-                                  </p:childTnLst>
-                                </p:cTn>
-                              </p:par>
-                              <p:par>
-                                <p:cTn id="45" presetID="2" presetClass="entr" presetSubtype="4" fill="hold" nodeType="withEffect">
-                                  <p:stCondLst>
-                                    <p:cond delay="0"/>
-                                  </p:stCondLst>
-                                  <p:childTnLst>
-                                    <p:set>
-                                      <p:cBhvr>
-                                        <p:cTn id="46" dur="1" fill="hold">
-                                          <p:stCondLst>
-                                            <p:cond delay="0"/>
-                                          </p:stCondLst>
-                                        </p:cTn>
-                                        <p:tgtEl>
-                                          <p:spTgt spid="32"/>
-                                        </p:tgtEl>
-                                        <p:attrNameLst>
-                                          <p:attrName>style.visibility</p:attrName>
-                                        </p:attrNameLst>
-                                      </p:cBhvr>
-                                      <p:to>
-                                        <p:strVal val="visible"/>
-                                      </p:to>
-                                    </p:set>
-                                    <p:anim calcmode="lin" valueType="num">
-                                      <p:cBhvr additive="base">
-                                        <p:cTn id="47" dur="500" fill="hold"/>
-                                        <p:tgtEl>
-                                          <p:spTgt spid="32"/>
-                                        </p:tgtEl>
-                                        <p:attrNameLst>
-                                          <p:attrName>ppt_x</p:attrName>
-                                        </p:attrNameLst>
-                                      </p:cBhvr>
-                                      <p:tavLst>
-                                        <p:tav tm="0">
-                                          <p:val>
-                                            <p:strVal val="#ppt_x"/>
-                                          </p:val>
-                                        </p:tav>
-                                        <p:tav tm="100000">
-                                          <p:val>
-                                            <p:strVal val="#ppt_x"/>
-                                          </p:val>
-                                        </p:tav>
-                                      </p:tavLst>
-                                    </p:anim>
-                                    <p:anim calcmode="lin" valueType="num">
-                                      <p:cBhvr additive="base">
-                                        <p:cTn id="48" dur="500" fill="hold"/>
-                                        <p:tgtEl>
-                                          <p:spTgt spid="32"/>
-                                        </p:tgtEl>
-                                        <p:attrNameLst>
-                                          <p:attrName>ppt_y</p:attrName>
-                                        </p:attrNameLst>
-                                      </p:cBhvr>
-                                      <p:tavLst>
-                                        <p:tav tm="0">
-                                          <p:val>
-                                            <p:strVal val="1+#ppt_h/2"/>
-                                          </p:val>
-                                        </p:tav>
-                                        <p:tav tm="100000">
-                                          <p:val>
-                                            <p:strVal val="#ppt_y"/>
-                                          </p:val>
-                                        </p:tav>
-                                      </p:tavLst>
-                                    </p:anim>
-                                  </p:childTnLst>
-                                </p:cTn>
-                              </p:par>
-                              <p:par>
-                                <p:cTn id="49" presetID="2" presetClass="entr" presetSubtype="4" fill="hold" nodeType="withEffect">
-                                  <p:stCondLst>
-                                    <p:cond delay="0"/>
-                                  </p:stCondLst>
-                                  <p:childTnLst>
-                                    <p:set>
-                                      <p:cBhvr>
-                                        <p:cTn id="50" dur="1" fill="hold">
-                                          <p:stCondLst>
-                                            <p:cond delay="0"/>
-                                          </p:stCondLst>
-                                        </p:cTn>
-                                        <p:tgtEl>
-                                          <p:spTgt spid="44"/>
-                                        </p:tgtEl>
-                                        <p:attrNameLst>
-                                          <p:attrName>style.visibility</p:attrName>
-                                        </p:attrNameLst>
-                                      </p:cBhvr>
-                                      <p:to>
-                                        <p:strVal val="visible"/>
-                                      </p:to>
-                                    </p:set>
-                                    <p:anim calcmode="lin" valueType="num">
-                                      <p:cBhvr additive="base">
-                                        <p:cTn id="51" dur="500" fill="hold"/>
-                                        <p:tgtEl>
-                                          <p:spTgt spid="44"/>
-                                        </p:tgtEl>
-                                        <p:attrNameLst>
-                                          <p:attrName>ppt_x</p:attrName>
-                                        </p:attrNameLst>
-                                      </p:cBhvr>
-                                      <p:tavLst>
-                                        <p:tav tm="0">
-                                          <p:val>
-                                            <p:strVal val="#ppt_x"/>
-                                          </p:val>
-                                        </p:tav>
-                                        <p:tav tm="100000">
-                                          <p:val>
-                                            <p:strVal val="#ppt_x"/>
-                                          </p:val>
-                                        </p:tav>
-                                      </p:tavLst>
-                                    </p:anim>
-                                    <p:anim calcmode="lin" valueType="num">
-                                      <p:cBhvr additive="base">
-                                        <p:cTn id="52" dur="500" fill="hold"/>
-                                        <p:tgtEl>
-                                          <p:spTgt spid="44"/>
-                                        </p:tgtEl>
-                                        <p:attrNameLst>
-                                          <p:attrName>ppt_y</p:attrName>
-                                        </p:attrNameLst>
-                                      </p:cBhvr>
-                                      <p:tavLst>
-                                        <p:tav tm="0">
-                                          <p:val>
-                                            <p:strVal val="1+#ppt_h/2"/>
-                                          </p:val>
-                                        </p:tav>
-                                        <p:tav tm="100000">
-                                          <p:val>
-                                            <p:strVal val="#ppt_y"/>
-                                          </p:val>
-                                        </p:tav>
-                                      </p:tavLst>
-                                    </p:anim>
-                                  </p:childTnLst>
-                                </p:cTn>
-                              </p:par>
-                            </p:childTnLst>
-                          </p:cTn>
-                        </p:par>
-                      </p:childTnLst>
-                    </p:cTn>
-                  </p:par>
-                </p:childTnLst>
-              </p:cTn>
-              <p:prevCondLst>
-                <p:cond evt="onPrev" delay="0">
-                  <p:tgtEl>
-                    <p:sldTgt/>
-                  </p:tgtEl>
-                </p:cond>
-              </p:prevCondLst>
-              <p:nextCondLst>
-                <p:cond evt="onNext" delay="0">
-                  <p:tgtEl>
-                    <p:sldTgt/>
-                  </p:tgtEl>
-                </p:cond>
-              </p:nextCondLst>
-            </p:seq>
-          </p:childTnLst>
-        </p:cTn>
-      </p:par>
-    </p:tnLst>
-  </p:timing>
 </p:sld>
 </file>
 
